--- a/downloads/presentations/modules/exe-430.pptx
+++ b/downloads/presentations/modules/exe-430.pptx
@@ -3334,13 +3334,11 @@
             </a:avLst>
           </a:prstGeom>
           <a:solidFill>
-            <a:srgbClr val="FFFFFF">
-              <a:alpha val="88000"/>
-            </a:srgbClr>
+            <a:srgbClr val="FFFFFF"/>
           </a:solidFill>
           <a:ln w="12700">
             <a:solidFill>
-              <a:srgbClr val="D6E8F2"/>
+              <a:srgbClr val="B9D7E6"/>
             </a:solidFill>
             <a:prstDash val="solid"/>
           </a:ln>
@@ -3348,26 +3346,42 @@
       </p:sp>
       <p:sp>
         <p:nvSpPr>
-          <p:cNvPr id="14" name="Shape 12"/>
-          <p:cNvSpPr/>
-          <p:nvPr/>
-        </p:nvSpPr>
-        <p:spPr>
-          <a:xfrm>
-            <a:off x="8046720" y="3108960"/>
-            <a:ext cx="2651760" cy="896112"/>
-          </a:xfrm>
-          <a:prstGeom prst="arc">
-            <a:avLst/>
-          </a:prstGeom>
-          <a:noFill/>
-          <a:ln w="25400">
-            <a:solidFill>
-              <a:srgbClr val="0068B7"/>
-            </a:solidFill>
-            <a:prstDash val="solid"/>
-          </a:ln>
-        </p:spPr>
+          <p:cNvPr id="14" name="Text 12"/>
+          <p:cNvSpPr/>
+          <p:nvPr/>
+        </p:nvSpPr>
+        <p:spPr>
+          <a:xfrm>
+            <a:off x="7799832" y="2935224"/>
+            <a:ext cx="3145536" cy="256032"/>
+          </a:xfrm>
+          <a:prstGeom prst="rect">
+            <a:avLst/>
+          </a:prstGeom>
+          <a:noFill/>
+          <a:ln/>
+        </p:spPr>
+        <p:txBody>
+          <a:bodyPr wrap="square" lIns="0" tIns="0" rIns="0" bIns="0" rtlCol="0" anchor="ctr"/>
+          <a:lstStyle/>
+          <a:p>
+            <a:pPr indent="0" marL="0">
+              <a:buNone/>
+            </a:pPr>
+            <a:r>
+              <a:rPr lang="en-US" sz="1300" b="1" dirty="0">
+                <a:solidFill>
+                  <a:srgbClr val="0068B7"/>
+                </a:solidFill>
+                <a:latin typeface="Aptos" pitchFamily="34" charset="0"/>
+                <a:ea typeface="Aptos" pitchFamily="34" charset="-122"/>
+                <a:cs typeface="Aptos" pitchFamily="34" charset="-120"/>
+              </a:rPr>
+              <a:t>Concept checkpoints</a:t>
+            </a:r>
+            <a:endParaRPr lang="en-US" sz="1300" dirty="0"/>
+          </a:p>
+        </p:txBody>
       </p:sp>
       <p:sp>
         <p:nvSpPr>
@@ -3377,102 +3391,67 @@
         </p:nvSpPr>
         <p:spPr>
           <a:xfrm>
-            <a:off x="7909560" y="3099816"/>
-            <a:ext cx="2926080" cy="256032"/>
-          </a:xfrm>
-          <a:prstGeom prst="rect">
-            <a:avLst/>
-          </a:prstGeom>
-          <a:noFill/>
-          <a:ln/>
-        </p:spPr>
-        <p:txBody>
-          <a:bodyPr wrap="square" lIns="0" tIns="0" rIns="0" bIns="0" rtlCol="0" anchor="ctr"/>
-          <a:lstStyle/>
-          <a:p>
-            <a:pPr algn="ctr" indent="0" marL="0">
-              <a:buNone/>
-            </a:pPr>
-            <a:r>
-              <a:rPr lang="en-US" sz="1500" b="1" dirty="0">
-                <a:solidFill>
-                  <a:srgbClr val="003A63"/>
-                </a:solidFill>
-                <a:latin typeface="Aptos" pitchFamily="34" charset="0"/>
-                <a:ea typeface="Aptos" pitchFamily="34" charset="-122"/>
-                <a:cs typeface="Aptos" pitchFamily="34" charset="-120"/>
-              </a:rPr>
-              <a:t>Risk</a:t>
-            </a:r>
-            <a:endParaRPr lang="en-US" sz="1500" dirty="0"/>
+            <a:off x="7818120" y="3300984"/>
+            <a:ext cx="3090672" cy="877824"/>
+          </a:xfrm>
+          <a:prstGeom prst="rect">
+            <a:avLst/>
+          </a:prstGeom>
+          <a:noFill/>
+          <a:ln/>
+        </p:spPr>
+        <p:txBody>
+          <a:bodyPr wrap="square" lIns="254" tIns="254" rIns="254" bIns="254" rtlCol="0" anchor="t">
+            <a:normAutofit/>
+          </a:bodyPr>
+          <a:lstStyle/>
+          <a:p>
+            <a:r>
+              <a:rPr lang="en-US" sz="1380" dirty="0">
+                <a:solidFill>
+                  <a:srgbClr val="17364A"/>
+                </a:solidFill>
+                <a:latin typeface="Aptos" pitchFamily="34" charset="0"/>
+                <a:ea typeface="Aptos" pitchFamily="34" charset="-122"/>
+                <a:cs typeface="Aptos" pitchFamily="34" charset="-120"/>
+              </a:rPr>
+              <a:t>Another risk is resistance caused by lack of transparency.</a:t>
+            </a:r>
+            <a:endParaRPr lang="en-US" sz="1380" dirty="0"/>
+          </a:p>
+          <a:p>
+            <a:r>
+              <a:rPr lang="en-US" sz="1380" dirty="0">
+                <a:solidFill>
+                  <a:srgbClr val="17364A"/>
+                </a:solidFill>
+                <a:latin typeface="Aptos" pitchFamily="34" charset="0"/>
+                <a:ea typeface="Aptos" pitchFamily="34" charset="-122"/>
+                <a:cs typeface="Aptos" pitchFamily="34" charset="-120"/>
+              </a:rPr>
+              <a:t>If staff believe AI is being introduced to monitor or replace them, they may avoid or.</a:t>
+            </a:r>
+            <a:endParaRPr lang="en-US" sz="1380" dirty="0"/>
+          </a:p>
+          <a:p>
+            <a:r>
+              <a:rPr lang="en-US" sz="1380" dirty="0">
+                <a:solidFill>
+                  <a:srgbClr val="17364A"/>
+                </a:solidFill>
+                <a:latin typeface="Aptos" pitchFamily="34" charset="0"/>
+                <a:ea typeface="Aptos" pitchFamily="34" charset="-122"/>
+                <a:cs typeface="Aptos" pitchFamily="34" charset="-120"/>
+              </a:rPr>
+              <a:t>A guardrail is to communicate purpose, boundaries, data practices, and workforce.</a:t>
+            </a:r>
+            <a:endParaRPr lang="en-US" sz="1380" dirty="0"/>
           </a:p>
         </p:txBody>
       </p:sp>
       <p:sp>
         <p:nvSpPr>
           <p:cNvPr id="16" name="Shape 14"/>
-          <p:cNvSpPr/>
-          <p:nvPr/>
-        </p:nvSpPr>
-        <p:spPr>
-          <a:xfrm>
-            <a:off x="8366760" y="3639312"/>
-            <a:ext cx="2011680" cy="0"/>
-          </a:xfrm>
-          <a:prstGeom prst="line">
-            <a:avLst/>
-          </a:prstGeom>
-          <a:noFill/>
-          <a:ln w="63500">
-            <a:solidFill>
-              <a:srgbClr val="2F8A28"/>
-            </a:solidFill>
-            <a:prstDash val="solid"/>
-          </a:ln>
-        </p:spPr>
-      </p:sp>
-      <p:sp>
-        <p:nvSpPr>
-          <p:cNvPr id="17" name="Text 15"/>
-          <p:cNvSpPr/>
-          <p:nvPr/>
-        </p:nvSpPr>
-        <p:spPr>
-          <a:xfrm>
-            <a:off x="7909560" y="3849624"/>
-            <a:ext cx="2926080" cy="164592"/>
-          </a:xfrm>
-          <a:prstGeom prst="rect">
-            <a:avLst/>
-          </a:prstGeom>
-          <a:noFill/>
-          <a:ln/>
-        </p:spPr>
-        <p:txBody>
-          <a:bodyPr wrap="square" lIns="0" tIns="0" rIns="0" bIns="0" rtlCol="0" anchor="ctr"/>
-          <a:lstStyle/>
-          <a:p>
-            <a:pPr algn="ctr" indent="0" marL="0">
-              <a:buNone/>
-            </a:pPr>
-            <a:r>
-              <a:rPr lang="en-US" sz="900" dirty="0">
-                <a:solidFill>
-                  <a:srgbClr val="003A63"/>
-                </a:solidFill>
-                <a:latin typeface="Aptos" pitchFamily="34" charset="0"/>
-                <a:ea typeface="Aptos" pitchFamily="34" charset="-122"/>
-                <a:cs typeface="Aptos" pitchFamily="34" charset="-120"/>
-              </a:rPr>
-              <a:t>Human review</a:t>
-            </a:r>
-            <a:endParaRPr lang="en-US" sz="900" dirty="0"/>
-          </a:p>
-        </p:txBody>
-      </p:sp>
-      <p:sp>
-        <p:nvSpPr>
-          <p:cNvPr id="18" name="Shape 16"/>
           <p:cNvSpPr/>
           <p:nvPr/>
         </p:nvSpPr>
@@ -3499,7 +3478,7 @@
       </p:sp>
       <p:sp>
         <p:nvSpPr>
-          <p:cNvPr id="19" name="Text 17"/>
+          <p:cNvPr id="17" name="Text 15"/>
           <p:cNvSpPr/>
           <p:nvPr/>
         </p:nvSpPr>
@@ -3538,7 +3517,7 @@
       </p:sp>
       <p:sp>
         <p:nvSpPr>
-          <p:cNvPr id="20" name="Text 18"/>
+          <p:cNvPr id="18" name="Text 16"/>
           <p:cNvSpPr/>
           <p:nvPr/>
         </p:nvSpPr>
@@ -4046,13 +4025,11 @@
             </a:avLst>
           </a:prstGeom>
           <a:solidFill>
-            <a:srgbClr val="FFFFFF">
-              <a:alpha val="88000"/>
-            </a:srgbClr>
+            <a:srgbClr val="FFFFFF"/>
           </a:solidFill>
           <a:ln w="12700">
             <a:solidFill>
-              <a:srgbClr val="D6E8F2"/>
+              <a:srgbClr val="B9D7E6"/>
             </a:solidFill>
             <a:prstDash val="solid"/>
           </a:ln>
@@ -4060,30 +4037,42 @@
       </p:sp>
       <p:sp>
         <p:nvSpPr>
-          <p:cNvPr id="14" name="Shape 12"/>
-          <p:cNvSpPr/>
-          <p:nvPr/>
-        </p:nvSpPr>
-        <p:spPr>
-          <a:xfrm>
-            <a:off x="7927848" y="3319272"/>
-            <a:ext cx="792480" cy="749808"/>
-          </a:xfrm>
-          <a:prstGeom prst="roundRect">
-            <a:avLst>
-              <a:gd name="adj" fmla="val 14634"/>
-            </a:avLst>
-          </a:prstGeom>
-          <a:solidFill>
-            <a:srgbClr val="0068B7"/>
-          </a:solidFill>
-          <a:ln w="12700">
-            <a:solidFill>
-              <a:srgbClr val="0068B7"/>
-            </a:solidFill>
-            <a:prstDash val="solid"/>
-          </a:ln>
-        </p:spPr>
+          <p:cNvPr id="14" name="Text 12"/>
+          <p:cNvSpPr/>
+          <p:nvPr/>
+        </p:nvSpPr>
+        <p:spPr>
+          <a:xfrm>
+            <a:off x="7799832" y="2935224"/>
+            <a:ext cx="3145536" cy="256032"/>
+          </a:xfrm>
+          <a:prstGeom prst="rect">
+            <a:avLst/>
+          </a:prstGeom>
+          <a:noFill/>
+          <a:ln/>
+        </p:spPr>
+        <p:txBody>
+          <a:bodyPr wrap="square" lIns="0" tIns="0" rIns="0" bIns="0" rtlCol="0" anchor="ctr"/>
+          <a:lstStyle/>
+          <a:p>
+            <a:pPr indent="0" marL="0">
+              <a:buNone/>
+            </a:pPr>
+            <a:r>
+              <a:rPr lang="en-US" sz="1300" b="1" dirty="0">
+                <a:solidFill>
+                  <a:srgbClr val="0068B7"/>
+                </a:solidFill>
+                <a:latin typeface="Aptos" pitchFamily="34" charset="0"/>
+                <a:ea typeface="Aptos" pitchFamily="34" charset="-122"/>
+                <a:cs typeface="Aptos" pitchFamily="34" charset="-120"/>
+              </a:rPr>
+              <a:t>Concept checkpoints</a:t>
+            </a:r>
+            <a:endParaRPr lang="en-US" sz="1300" dirty="0"/>
+          </a:p>
+        </p:txBody>
       </p:sp>
       <p:sp>
         <p:nvSpPr>
@@ -4093,240 +4082,53 @@
         </p:nvSpPr>
         <p:spPr>
           <a:xfrm>
-            <a:off x="8001000" y="3511296"/>
-            <a:ext cx="646176" cy="310896"/>
-          </a:xfrm>
-          <a:prstGeom prst="rect">
-            <a:avLst/>
-          </a:prstGeom>
-          <a:noFill/>
-          <a:ln/>
-        </p:spPr>
-        <p:txBody>
-          <a:bodyPr wrap="square" lIns="0" tIns="0" rIns="0" bIns="0" rtlCol="0" anchor="ctr">
+            <a:off x="7818120" y="3300984"/>
+            <a:ext cx="3090672" cy="877824"/>
+          </a:xfrm>
+          <a:prstGeom prst="rect">
+            <a:avLst/>
+          </a:prstGeom>
+          <a:noFill/>
+          <a:ln/>
+        </p:spPr>
+        <p:txBody>
+          <a:bodyPr wrap="square" lIns="254" tIns="254" rIns="254" bIns="254" rtlCol="0" anchor="t">
             <a:normAutofit/>
           </a:bodyPr>
           <a:lstStyle/>
           <a:p>
-            <a:pPr algn="ctr" indent="0" marL="0">
-              <a:buNone/>
-            </a:pPr>
-            <a:r>
-              <a:rPr lang="en-US" sz="1500" b="1" dirty="0">
-                <a:solidFill>
-                  <a:srgbClr val="FFFFFF"/>
-                </a:solidFill>
-                <a:latin typeface="Aptos" pitchFamily="34" charset="0"/>
-                <a:ea typeface="Aptos" pitchFamily="34" charset="-122"/>
-                <a:cs typeface="Aptos" pitchFamily="34" charset="-120"/>
-              </a:rPr>
-              <a:t>Plan</a:t>
-            </a:r>
-            <a:endParaRPr lang="en-US" sz="1500" dirty="0"/>
+            <a:r>
+              <a:rPr lang="en-US" sz="1380" dirty="0">
+                <a:solidFill>
+                  <a:srgbClr val="17364A"/>
+                </a:solidFill>
+                <a:latin typeface="Aptos" pitchFamily="34" charset="0"/>
+                <a:ea typeface="Aptos" pitchFamily="34" charset="-122"/>
+                <a:cs typeface="Aptos" pitchFamily="34" charset="-120"/>
+              </a:rPr>
+              <a:t>Predictive analytics adoption requires training on interpretation, limitations, and.</a:t>
+            </a:r>
+            <a:endParaRPr lang="en-US" sz="1380" dirty="0"/>
+          </a:p>
+          <a:p>
+            <a:r>
+              <a:rPr lang="en-US" sz="1380" dirty="0">
+                <a:solidFill>
+                  <a:srgbClr val="17364A"/>
+                </a:solidFill>
+                <a:latin typeface="Aptos" pitchFamily="34" charset="0"/>
+                <a:ea typeface="Aptos" pitchFamily="34" charset="-122"/>
+                <a:cs typeface="Aptos" pitchFamily="34" charset="-120"/>
+              </a:rPr>
+              <a:t>Each AI type changes work in different ways, so change management must be specific.</a:t>
+            </a:r>
+            <a:endParaRPr lang="en-US" sz="1380" dirty="0"/>
           </a:p>
         </p:txBody>
       </p:sp>
       <p:sp>
         <p:nvSpPr>
           <p:cNvPr id="16" name="Shape 14"/>
-          <p:cNvSpPr/>
-          <p:nvPr/>
-        </p:nvSpPr>
-        <p:spPr>
-          <a:xfrm>
-            <a:off x="8976360" y="3319272"/>
-            <a:ext cx="792480" cy="749808"/>
-          </a:xfrm>
-          <a:prstGeom prst="roundRect">
-            <a:avLst>
-              <a:gd name="adj" fmla="val 14634"/>
-            </a:avLst>
-          </a:prstGeom>
-          <a:solidFill>
-            <a:srgbClr val="2F8A28"/>
-          </a:solidFill>
-          <a:ln w="12700">
-            <a:solidFill>
-              <a:srgbClr val="2F8A28"/>
-            </a:solidFill>
-            <a:prstDash val="solid"/>
-          </a:ln>
-        </p:spPr>
-      </p:sp>
-      <p:sp>
-        <p:nvSpPr>
-          <p:cNvPr id="17" name="Text 15"/>
-          <p:cNvSpPr/>
-          <p:nvPr/>
-        </p:nvSpPr>
-        <p:spPr>
-          <a:xfrm>
-            <a:off x="9049512" y="3511296"/>
-            <a:ext cx="646176" cy="310896"/>
-          </a:xfrm>
-          <a:prstGeom prst="rect">
-            <a:avLst/>
-          </a:prstGeom>
-          <a:noFill/>
-          <a:ln/>
-        </p:spPr>
-        <p:txBody>
-          <a:bodyPr wrap="square" lIns="0" tIns="0" rIns="0" bIns="0" rtlCol="0" anchor="ctr">
-            <a:normAutofit/>
-          </a:bodyPr>
-          <a:lstStyle/>
-          <a:p>
-            <a:pPr algn="ctr" indent="0" marL="0">
-              <a:buNone/>
-            </a:pPr>
-            <a:r>
-              <a:rPr lang="en-US" sz="1500" b="1" dirty="0">
-                <a:solidFill>
-                  <a:srgbClr val="FFFFFF"/>
-                </a:solidFill>
-                <a:latin typeface="Aptos" pitchFamily="34" charset="0"/>
-                <a:ea typeface="Aptos" pitchFamily="34" charset="-122"/>
-                <a:cs typeface="Aptos" pitchFamily="34" charset="-120"/>
-              </a:rPr>
-              <a:t>Do</a:t>
-            </a:r>
-            <a:endParaRPr lang="en-US" sz="1500" dirty="0"/>
-          </a:p>
-        </p:txBody>
-      </p:sp>
-      <p:sp>
-        <p:nvSpPr>
-          <p:cNvPr id="18" name="Shape 16"/>
-          <p:cNvSpPr/>
-          <p:nvPr/>
-        </p:nvSpPr>
-        <p:spPr>
-          <a:xfrm>
-            <a:off x="10024872" y="3319272"/>
-            <a:ext cx="792480" cy="749808"/>
-          </a:xfrm>
-          <a:prstGeom prst="roundRect">
-            <a:avLst>
-              <a:gd name="adj" fmla="val 14634"/>
-            </a:avLst>
-          </a:prstGeom>
-          <a:solidFill>
-            <a:srgbClr val="D69A2D"/>
-          </a:solidFill>
-          <a:ln w="12700">
-            <a:solidFill>
-              <a:srgbClr val="D69A2D"/>
-            </a:solidFill>
-            <a:prstDash val="solid"/>
-          </a:ln>
-        </p:spPr>
-      </p:sp>
-      <p:sp>
-        <p:nvSpPr>
-          <p:cNvPr id="19" name="Text 17"/>
-          <p:cNvSpPr/>
-          <p:nvPr/>
-        </p:nvSpPr>
-        <p:spPr>
-          <a:xfrm>
-            <a:off x="10098024" y="3511296"/>
-            <a:ext cx="646176" cy="310896"/>
-          </a:xfrm>
-          <a:prstGeom prst="rect">
-            <a:avLst/>
-          </a:prstGeom>
-          <a:noFill/>
-          <a:ln/>
-        </p:spPr>
-        <p:txBody>
-          <a:bodyPr wrap="square" lIns="0" tIns="0" rIns="0" bIns="0" rtlCol="0" anchor="ctr">
-            <a:normAutofit/>
-          </a:bodyPr>
-          <a:lstStyle/>
-          <a:p>
-            <a:pPr algn="ctr" indent="0" marL="0">
-              <a:buNone/>
-            </a:pPr>
-            <a:r>
-              <a:rPr lang="en-US" sz="1500" b="1" dirty="0">
-                <a:solidFill>
-                  <a:srgbClr val="FFFFFF"/>
-                </a:solidFill>
-                <a:latin typeface="Aptos" pitchFamily="34" charset="0"/>
-                <a:ea typeface="Aptos" pitchFamily="34" charset="-122"/>
-                <a:cs typeface="Aptos" pitchFamily="34" charset="-120"/>
-              </a:rPr>
-              <a:t>Review</a:t>
-            </a:r>
-            <a:endParaRPr lang="en-US" sz="1500" dirty="0"/>
-          </a:p>
-        </p:txBody>
-      </p:sp>
-      <p:sp>
-        <p:nvSpPr>
-          <p:cNvPr id="20" name="Shape 18"/>
-          <p:cNvSpPr/>
-          <p:nvPr/>
-        </p:nvSpPr>
-        <p:spPr>
-          <a:xfrm>
-            <a:off x="8293608" y="4389120"/>
-            <a:ext cx="2157984" cy="0"/>
-          </a:xfrm>
-          <a:prstGeom prst="line">
-            <a:avLst/>
-          </a:prstGeom>
-          <a:noFill/>
-          <a:ln w="25400">
-            <a:solidFill>
-              <a:srgbClr val="8ABBD8"/>
-            </a:solidFill>
-            <a:prstDash val="solid"/>
-          </a:ln>
-        </p:spPr>
-      </p:sp>
-      <p:sp>
-        <p:nvSpPr>
-          <p:cNvPr id="21" name="Text 19"/>
-          <p:cNvSpPr/>
-          <p:nvPr/>
-        </p:nvSpPr>
-        <p:spPr>
-          <a:xfrm>
-            <a:off x="7909560" y="3977640"/>
-            <a:ext cx="2926080" cy="182880"/>
-          </a:xfrm>
-          <a:prstGeom prst="rect">
-            <a:avLst/>
-          </a:prstGeom>
-          <a:noFill/>
-          <a:ln/>
-        </p:spPr>
-        <p:txBody>
-          <a:bodyPr wrap="square" lIns="0" tIns="0" rIns="0" bIns="0" rtlCol="0" anchor="ctr"/>
-          <a:lstStyle/>
-          <a:p>
-            <a:pPr algn="ctr" indent="0" marL="0">
-              <a:buNone/>
-            </a:pPr>
-            <a:r>
-              <a:rPr lang="en-US" sz="1000" dirty="0">
-                <a:solidFill>
-                  <a:srgbClr val="003A63"/>
-                </a:solidFill>
-                <a:latin typeface="Aptos" pitchFamily="34" charset="0"/>
-                <a:ea typeface="Aptos" pitchFamily="34" charset="-122"/>
-                <a:cs typeface="Aptos" pitchFamily="34" charset="-120"/>
-              </a:rPr>
-              <a:t>Dependencies visible</a:t>
-            </a:r>
-            <a:endParaRPr lang="en-US" sz="1000" dirty="0"/>
-          </a:p>
-        </p:txBody>
-      </p:sp>
-      <p:sp>
-        <p:nvSpPr>
-          <p:cNvPr id="22" name="Shape 20"/>
           <p:cNvSpPr/>
           <p:nvPr/>
         </p:nvSpPr>
@@ -4353,7 +4155,7 @@
       </p:sp>
       <p:sp>
         <p:nvSpPr>
-          <p:cNvPr id="23" name="Text 21"/>
+          <p:cNvPr id="17" name="Text 15"/>
           <p:cNvSpPr/>
           <p:nvPr/>
         </p:nvSpPr>
@@ -4392,7 +4194,7 @@
       </p:sp>
       <p:sp>
         <p:nvSpPr>
-          <p:cNvPr id="24" name="Text 22"/>
+          <p:cNvPr id="18" name="Text 16"/>
           <p:cNvSpPr/>
           <p:nvPr/>
         </p:nvSpPr>
@@ -4900,13 +4702,11 @@
             </a:avLst>
           </a:prstGeom>
           <a:solidFill>
-            <a:srgbClr val="FFFFFF">
-              <a:alpha val="88000"/>
-            </a:srgbClr>
+            <a:srgbClr val="FFFFFF"/>
           </a:solidFill>
           <a:ln w="12700">
             <a:solidFill>
-              <a:srgbClr val="D6E8F2"/>
+              <a:srgbClr val="B9D7E6"/>
             </a:solidFill>
             <a:prstDash val="solid"/>
           </a:ln>
@@ -4914,30 +4714,42 @@
       </p:sp>
       <p:sp>
         <p:nvSpPr>
-          <p:cNvPr id="14" name="Shape 12"/>
-          <p:cNvSpPr/>
-          <p:nvPr/>
-        </p:nvSpPr>
-        <p:spPr>
-          <a:xfrm>
-            <a:off x="7927848" y="3319272"/>
-            <a:ext cx="792480" cy="749808"/>
-          </a:xfrm>
-          <a:prstGeom prst="roundRect">
-            <a:avLst>
-              <a:gd name="adj" fmla="val 14634"/>
-            </a:avLst>
-          </a:prstGeom>
-          <a:solidFill>
-            <a:srgbClr val="0068B7"/>
-          </a:solidFill>
-          <a:ln w="12700">
-            <a:solidFill>
-              <a:srgbClr val="0068B7"/>
-            </a:solidFill>
-            <a:prstDash val="solid"/>
-          </a:ln>
-        </p:spPr>
+          <p:cNvPr id="14" name="Text 12"/>
+          <p:cNvSpPr/>
+          <p:nvPr/>
+        </p:nvSpPr>
+        <p:spPr>
+          <a:xfrm>
+            <a:off x="7799832" y="2935224"/>
+            <a:ext cx="3145536" cy="256032"/>
+          </a:xfrm>
+          <a:prstGeom prst="rect">
+            <a:avLst/>
+          </a:prstGeom>
+          <a:noFill/>
+          <a:ln/>
+        </p:spPr>
+        <p:txBody>
+          <a:bodyPr wrap="square" lIns="0" tIns="0" rIns="0" bIns="0" rtlCol="0" anchor="ctr"/>
+          <a:lstStyle/>
+          <a:p>
+            <a:pPr indent="0" marL="0">
+              <a:buNone/>
+            </a:pPr>
+            <a:r>
+              <a:rPr lang="en-US" sz="1300" b="1" dirty="0">
+                <a:solidFill>
+                  <a:srgbClr val="0068B7"/>
+                </a:solidFill>
+                <a:latin typeface="Aptos" pitchFamily="34" charset="0"/>
+                <a:ea typeface="Aptos" pitchFamily="34" charset="-122"/>
+                <a:cs typeface="Aptos" pitchFamily="34" charset="-120"/>
+              </a:rPr>
+              <a:t>Concept checkpoints</a:t>
+            </a:r>
+            <a:endParaRPr lang="en-US" sz="1300" dirty="0"/>
+          </a:p>
+        </p:txBody>
       </p:sp>
       <p:sp>
         <p:nvSpPr>
@@ -4947,240 +4759,67 @@
         </p:nvSpPr>
         <p:spPr>
           <a:xfrm>
-            <a:off x="8001000" y="3511296"/>
-            <a:ext cx="646176" cy="310896"/>
-          </a:xfrm>
-          <a:prstGeom prst="rect">
-            <a:avLst/>
-          </a:prstGeom>
-          <a:noFill/>
-          <a:ln/>
-        </p:spPr>
-        <p:txBody>
-          <a:bodyPr wrap="square" lIns="0" tIns="0" rIns="0" bIns="0" rtlCol="0" anchor="ctr">
+            <a:off x="7818120" y="3300984"/>
+            <a:ext cx="3090672" cy="877824"/>
+          </a:xfrm>
+          <a:prstGeom prst="rect">
+            <a:avLst/>
+          </a:prstGeom>
+          <a:noFill/>
+          <a:ln/>
+        </p:spPr>
+        <p:txBody>
+          <a:bodyPr wrap="square" lIns="254" tIns="254" rIns="254" bIns="254" rtlCol="0" anchor="t">
             <a:normAutofit/>
           </a:bodyPr>
           <a:lstStyle/>
           <a:p>
-            <a:pPr algn="ctr" indent="0" marL="0">
-              <a:buNone/>
-            </a:pPr>
-            <a:r>
-              <a:rPr lang="en-US" sz="1500" b="1" dirty="0">
-                <a:solidFill>
-                  <a:srgbClr val="FFFFFF"/>
-                </a:solidFill>
-                <a:latin typeface="Aptos" pitchFamily="34" charset="0"/>
-                <a:ea typeface="Aptos" pitchFamily="34" charset="-122"/>
-                <a:cs typeface="Aptos" pitchFamily="34" charset="-120"/>
-              </a:rPr>
-              <a:t>Plan</a:t>
-            </a:r>
-            <a:endParaRPr lang="en-US" sz="1500" dirty="0"/>
+            <a:r>
+              <a:rPr lang="en-US" sz="1380" dirty="0">
+                <a:solidFill>
+                  <a:srgbClr val="17364A"/>
+                </a:solidFill>
+                <a:latin typeface="Aptos" pitchFamily="34" charset="0"/>
+                <a:ea typeface="Aptos" pitchFamily="34" charset="-122"/>
+                <a:cs typeface="Aptos" pitchFamily="34" charset="-120"/>
+              </a:rPr>
+              <a:t>Which current or proposed AI use case in your agency raises this leadership or governance.</a:t>
+            </a:r>
+            <a:endParaRPr lang="en-US" sz="1380" dirty="0"/>
+          </a:p>
+          <a:p>
+            <a:r>
+              <a:rPr lang="en-US" sz="1380" dirty="0">
+                <a:solidFill>
+                  <a:srgbClr val="17364A"/>
+                </a:solidFill>
+                <a:latin typeface="Aptos" pitchFamily="34" charset="0"/>
+                <a:ea typeface="Aptos" pitchFamily="34" charset="-122"/>
+                <a:cs typeface="Aptos" pitchFamily="34" charset="-120"/>
+              </a:rPr>
+              <a:t>Who currently has authority to make decisions about this issue, and is that authority.</a:t>
+            </a:r>
+            <a:endParaRPr lang="en-US" sz="1380" dirty="0"/>
+          </a:p>
+          <a:p>
+            <a:r>
+              <a:rPr lang="en-US" sz="1380" dirty="0">
+                <a:solidFill>
+                  <a:srgbClr val="17364A"/>
+                </a:solidFill>
+                <a:latin typeface="Aptos" pitchFamily="34" charset="0"/>
+                <a:ea typeface="Aptos" pitchFamily="34" charset="-122"/>
+                <a:cs typeface="Aptos" pitchFamily="34" charset="-120"/>
+              </a:rPr>
+              <a:t>What evidence would governance or leadership need before approving the use case?</a:t>
+            </a:r>
+            <a:endParaRPr lang="en-US" sz="1380" dirty="0"/>
           </a:p>
         </p:txBody>
       </p:sp>
       <p:sp>
         <p:nvSpPr>
           <p:cNvPr id="16" name="Shape 14"/>
-          <p:cNvSpPr/>
-          <p:nvPr/>
-        </p:nvSpPr>
-        <p:spPr>
-          <a:xfrm>
-            <a:off x="8976360" y="3319272"/>
-            <a:ext cx="792480" cy="749808"/>
-          </a:xfrm>
-          <a:prstGeom prst="roundRect">
-            <a:avLst>
-              <a:gd name="adj" fmla="val 14634"/>
-            </a:avLst>
-          </a:prstGeom>
-          <a:solidFill>
-            <a:srgbClr val="2F8A28"/>
-          </a:solidFill>
-          <a:ln w="12700">
-            <a:solidFill>
-              <a:srgbClr val="2F8A28"/>
-            </a:solidFill>
-            <a:prstDash val="solid"/>
-          </a:ln>
-        </p:spPr>
-      </p:sp>
-      <p:sp>
-        <p:nvSpPr>
-          <p:cNvPr id="17" name="Text 15"/>
-          <p:cNvSpPr/>
-          <p:nvPr/>
-        </p:nvSpPr>
-        <p:spPr>
-          <a:xfrm>
-            <a:off x="9049512" y="3511296"/>
-            <a:ext cx="646176" cy="310896"/>
-          </a:xfrm>
-          <a:prstGeom prst="rect">
-            <a:avLst/>
-          </a:prstGeom>
-          <a:noFill/>
-          <a:ln/>
-        </p:spPr>
-        <p:txBody>
-          <a:bodyPr wrap="square" lIns="0" tIns="0" rIns="0" bIns="0" rtlCol="0" anchor="ctr">
-            <a:normAutofit/>
-          </a:bodyPr>
-          <a:lstStyle/>
-          <a:p>
-            <a:pPr algn="ctr" indent="0" marL="0">
-              <a:buNone/>
-            </a:pPr>
-            <a:r>
-              <a:rPr lang="en-US" sz="1500" b="1" dirty="0">
-                <a:solidFill>
-                  <a:srgbClr val="FFFFFF"/>
-                </a:solidFill>
-                <a:latin typeface="Aptos" pitchFamily="34" charset="0"/>
-                <a:ea typeface="Aptos" pitchFamily="34" charset="-122"/>
-                <a:cs typeface="Aptos" pitchFamily="34" charset="-120"/>
-              </a:rPr>
-              <a:t>Do</a:t>
-            </a:r>
-            <a:endParaRPr lang="en-US" sz="1500" dirty="0"/>
-          </a:p>
-        </p:txBody>
-      </p:sp>
-      <p:sp>
-        <p:nvSpPr>
-          <p:cNvPr id="18" name="Shape 16"/>
-          <p:cNvSpPr/>
-          <p:nvPr/>
-        </p:nvSpPr>
-        <p:spPr>
-          <a:xfrm>
-            <a:off x="10024872" y="3319272"/>
-            <a:ext cx="792480" cy="749808"/>
-          </a:xfrm>
-          <a:prstGeom prst="roundRect">
-            <a:avLst>
-              <a:gd name="adj" fmla="val 14634"/>
-            </a:avLst>
-          </a:prstGeom>
-          <a:solidFill>
-            <a:srgbClr val="D69A2D"/>
-          </a:solidFill>
-          <a:ln w="12700">
-            <a:solidFill>
-              <a:srgbClr val="D69A2D"/>
-            </a:solidFill>
-            <a:prstDash val="solid"/>
-          </a:ln>
-        </p:spPr>
-      </p:sp>
-      <p:sp>
-        <p:nvSpPr>
-          <p:cNvPr id="19" name="Text 17"/>
-          <p:cNvSpPr/>
-          <p:nvPr/>
-        </p:nvSpPr>
-        <p:spPr>
-          <a:xfrm>
-            <a:off x="10098024" y="3511296"/>
-            <a:ext cx="646176" cy="310896"/>
-          </a:xfrm>
-          <a:prstGeom prst="rect">
-            <a:avLst/>
-          </a:prstGeom>
-          <a:noFill/>
-          <a:ln/>
-        </p:spPr>
-        <p:txBody>
-          <a:bodyPr wrap="square" lIns="0" tIns="0" rIns="0" bIns="0" rtlCol="0" anchor="ctr">
-            <a:normAutofit/>
-          </a:bodyPr>
-          <a:lstStyle/>
-          <a:p>
-            <a:pPr algn="ctr" indent="0" marL="0">
-              <a:buNone/>
-            </a:pPr>
-            <a:r>
-              <a:rPr lang="en-US" sz="1500" b="1" dirty="0">
-                <a:solidFill>
-                  <a:srgbClr val="FFFFFF"/>
-                </a:solidFill>
-                <a:latin typeface="Aptos" pitchFamily="34" charset="0"/>
-                <a:ea typeface="Aptos" pitchFamily="34" charset="-122"/>
-                <a:cs typeface="Aptos" pitchFamily="34" charset="-120"/>
-              </a:rPr>
-              <a:t>Review</a:t>
-            </a:r>
-            <a:endParaRPr lang="en-US" sz="1500" dirty="0"/>
-          </a:p>
-        </p:txBody>
-      </p:sp>
-      <p:sp>
-        <p:nvSpPr>
-          <p:cNvPr id="20" name="Shape 18"/>
-          <p:cNvSpPr/>
-          <p:nvPr/>
-        </p:nvSpPr>
-        <p:spPr>
-          <a:xfrm>
-            <a:off x="8293608" y="4389120"/>
-            <a:ext cx="2157984" cy="0"/>
-          </a:xfrm>
-          <a:prstGeom prst="line">
-            <a:avLst/>
-          </a:prstGeom>
-          <a:noFill/>
-          <a:ln w="25400">
-            <a:solidFill>
-              <a:srgbClr val="8ABBD8"/>
-            </a:solidFill>
-            <a:prstDash val="solid"/>
-          </a:ln>
-        </p:spPr>
-      </p:sp>
-      <p:sp>
-        <p:nvSpPr>
-          <p:cNvPr id="21" name="Text 19"/>
-          <p:cNvSpPr/>
-          <p:nvPr/>
-        </p:nvSpPr>
-        <p:spPr>
-          <a:xfrm>
-            <a:off x="7909560" y="3977640"/>
-            <a:ext cx="2926080" cy="182880"/>
-          </a:xfrm>
-          <a:prstGeom prst="rect">
-            <a:avLst/>
-          </a:prstGeom>
-          <a:noFill/>
-          <a:ln/>
-        </p:spPr>
-        <p:txBody>
-          <a:bodyPr wrap="square" lIns="0" tIns="0" rIns="0" bIns="0" rtlCol="0" anchor="ctr"/>
-          <a:lstStyle/>
-          <a:p>
-            <a:pPr algn="ctr" indent="0" marL="0">
-              <a:buNone/>
-            </a:pPr>
-            <a:r>
-              <a:rPr lang="en-US" sz="1000" dirty="0">
-                <a:solidFill>
-                  <a:srgbClr val="003A63"/>
-                </a:solidFill>
-                <a:latin typeface="Aptos" pitchFamily="34" charset="0"/>
-                <a:ea typeface="Aptos" pitchFamily="34" charset="-122"/>
-                <a:cs typeface="Aptos" pitchFamily="34" charset="-120"/>
-              </a:rPr>
-              <a:t>Dependencies visible</a:t>
-            </a:r>
-            <a:endParaRPr lang="en-US" sz="1000" dirty="0"/>
-          </a:p>
-        </p:txBody>
-      </p:sp>
-      <p:sp>
-        <p:nvSpPr>
-          <p:cNvPr id="22" name="Shape 20"/>
           <p:cNvSpPr/>
           <p:nvPr/>
         </p:nvSpPr>
@@ -5207,7 +4846,7 @@
       </p:sp>
       <p:sp>
         <p:nvSpPr>
-          <p:cNvPr id="23" name="Text 21"/>
+          <p:cNvPr id="17" name="Text 15"/>
           <p:cNvSpPr/>
           <p:nvPr/>
         </p:nvSpPr>
@@ -5246,7 +4885,7 @@
       </p:sp>
       <p:sp>
         <p:nvSpPr>
-          <p:cNvPr id="24" name="Text 22"/>
+          <p:cNvPr id="18" name="Text 16"/>
           <p:cNvSpPr/>
           <p:nvPr/>
         </p:nvSpPr>
@@ -5740,13 +5379,11 @@
             </a:avLst>
           </a:prstGeom>
           <a:solidFill>
-            <a:srgbClr val="FFFFFF">
-              <a:alpha val="88000"/>
-            </a:srgbClr>
+            <a:srgbClr val="FFFFFF"/>
           </a:solidFill>
           <a:ln w="12700">
             <a:solidFill>
-              <a:srgbClr val="D6E8F2"/>
+              <a:srgbClr val="B9D7E6"/>
             </a:solidFill>
             <a:prstDash val="solid"/>
           </a:ln>
@@ -5754,30 +5391,42 @@
       </p:sp>
       <p:sp>
         <p:nvSpPr>
-          <p:cNvPr id="14" name="Shape 12"/>
-          <p:cNvSpPr/>
-          <p:nvPr/>
-        </p:nvSpPr>
-        <p:spPr>
-          <a:xfrm>
-            <a:off x="7927848" y="3319272"/>
-            <a:ext cx="792480" cy="749808"/>
-          </a:xfrm>
-          <a:prstGeom prst="roundRect">
-            <a:avLst>
-              <a:gd name="adj" fmla="val 14634"/>
-            </a:avLst>
-          </a:prstGeom>
-          <a:solidFill>
-            <a:srgbClr val="0068B7"/>
-          </a:solidFill>
-          <a:ln w="12700">
-            <a:solidFill>
-              <a:srgbClr val="0068B7"/>
-            </a:solidFill>
-            <a:prstDash val="solid"/>
-          </a:ln>
-        </p:spPr>
+          <p:cNvPr id="14" name="Text 12"/>
+          <p:cNvSpPr/>
+          <p:nvPr/>
+        </p:nvSpPr>
+        <p:spPr>
+          <a:xfrm>
+            <a:off x="7799832" y="2935224"/>
+            <a:ext cx="3145536" cy="256032"/>
+          </a:xfrm>
+          <a:prstGeom prst="rect">
+            <a:avLst/>
+          </a:prstGeom>
+          <a:noFill/>
+          <a:ln/>
+        </p:spPr>
+        <p:txBody>
+          <a:bodyPr wrap="square" lIns="0" tIns="0" rIns="0" bIns="0" rtlCol="0" anchor="ctr"/>
+          <a:lstStyle/>
+          <a:p>
+            <a:pPr indent="0" marL="0">
+              <a:buNone/>
+            </a:pPr>
+            <a:r>
+              <a:rPr lang="en-US" sz="1300" b="1" dirty="0">
+                <a:solidFill>
+                  <a:srgbClr val="0068B7"/>
+                </a:solidFill>
+                <a:latin typeface="Aptos" pitchFamily="34" charset="0"/>
+                <a:ea typeface="Aptos" pitchFamily="34" charset="-122"/>
+                <a:cs typeface="Aptos" pitchFamily="34" charset="-120"/>
+              </a:rPr>
+              <a:t>Concept checkpoints</a:t>
+            </a:r>
+            <a:endParaRPr lang="en-US" sz="1300" dirty="0"/>
+          </a:p>
+        </p:txBody>
       </p:sp>
       <p:sp>
         <p:nvSpPr>
@@ -5787,240 +5436,53 @@
         </p:nvSpPr>
         <p:spPr>
           <a:xfrm>
-            <a:off x="8001000" y="3511296"/>
-            <a:ext cx="646176" cy="310896"/>
-          </a:xfrm>
-          <a:prstGeom prst="rect">
-            <a:avLst/>
-          </a:prstGeom>
-          <a:noFill/>
-          <a:ln/>
-        </p:spPr>
-        <p:txBody>
-          <a:bodyPr wrap="square" lIns="0" tIns="0" rIns="0" bIns="0" rtlCol="0" anchor="ctr">
+            <a:off x="7818120" y="3300984"/>
+            <a:ext cx="3090672" cy="877824"/>
+          </a:xfrm>
+          <a:prstGeom prst="rect">
+            <a:avLst/>
+          </a:prstGeom>
+          <a:noFill/>
+          <a:ln/>
+        </p:spPr>
+        <p:txBody>
+          <a:bodyPr wrap="square" lIns="254" tIns="254" rIns="254" bIns="254" rtlCol="0" anchor="t">
             <a:normAutofit/>
           </a:bodyPr>
           <a:lstStyle/>
           <a:p>
-            <a:pPr algn="ctr" indent="0" marL="0">
-              <a:buNone/>
-            </a:pPr>
-            <a:r>
-              <a:rPr lang="en-US" sz="1500" b="1" dirty="0">
-                <a:solidFill>
-                  <a:srgbClr val="FFFFFF"/>
-                </a:solidFill>
-                <a:latin typeface="Aptos" pitchFamily="34" charset="0"/>
-                <a:ea typeface="Aptos" pitchFamily="34" charset="-122"/>
-                <a:cs typeface="Aptos" pitchFamily="34" charset="-120"/>
-              </a:rPr>
-              <a:t>Plan</a:t>
-            </a:r>
-            <a:endParaRPr lang="en-US" sz="1500" dirty="0"/>
+            <a:r>
+              <a:rPr lang="en-US" sz="1380" dirty="0">
+                <a:solidFill>
+                  <a:srgbClr val="17364A"/>
+                </a:solidFill>
+                <a:latin typeface="Aptos" pitchFamily="34" charset="0"/>
+                <a:ea typeface="Aptos" pitchFamily="34" charset="-122"/>
+                <a:cs typeface="Aptos" pitchFamily="34" charset="-120"/>
+              </a:rPr>
+              <a:t>Which staff, partners, or communities would be affected if this issue were handled poorly?</a:t>
+            </a:r>
+            <a:endParaRPr lang="en-US" sz="1380" dirty="0"/>
+          </a:p>
+          <a:p>
+            <a:r>
+              <a:rPr lang="en-US" sz="1380" dirty="0">
+                <a:solidFill>
+                  <a:srgbClr val="17364A"/>
+                </a:solidFill>
+                <a:latin typeface="Aptos" pitchFamily="34" charset="0"/>
+                <a:ea typeface="Aptos" pitchFamily="34" charset="-122"/>
+                <a:cs typeface="Aptos" pitchFamily="34" charset="-120"/>
+              </a:rPr>
+              <a:t>What policy, process, or artifact should be created or updated after this module?</a:t>
+            </a:r>
+            <a:endParaRPr lang="en-US" sz="1380" dirty="0"/>
           </a:p>
         </p:txBody>
       </p:sp>
       <p:sp>
         <p:nvSpPr>
           <p:cNvPr id="16" name="Shape 14"/>
-          <p:cNvSpPr/>
-          <p:nvPr/>
-        </p:nvSpPr>
-        <p:spPr>
-          <a:xfrm>
-            <a:off x="8976360" y="3319272"/>
-            <a:ext cx="792480" cy="749808"/>
-          </a:xfrm>
-          <a:prstGeom prst="roundRect">
-            <a:avLst>
-              <a:gd name="adj" fmla="val 14634"/>
-            </a:avLst>
-          </a:prstGeom>
-          <a:solidFill>
-            <a:srgbClr val="2F8A28"/>
-          </a:solidFill>
-          <a:ln w="12700">
-            <a:solidFill>
-              <a:srgbClr val="2F8A28"/>
-            </a:solidFill>
-            <a:prstDash val="solid"/>
-          </a:ln>
-        </p:spPr>
-      </p:sp>
-      <p:sp>
-        <p:nvSpPr>
-          <p:cNvPr id="17" name="Text 15"/>
-          <p:cNvSpPr/>
-          <p:nvPr/>
-        </p:nvSpPr>
-        <p:spPr>
-          <a:xfrm>
-            <a:off x="9049512" y="3511296"/>
-            <a:ext cx="646176" cy="310896"/>
-          </a:xfrm>
-          <a:prstGeom prst="rect">
-            <a:avLst/>
-          </a:prstGeom>
-          <a:noFill/>
-          <a:ln/>
-        </p:spPr>
-        <p:txBody>
-          <a:bodyPr wrap="square" lIns="0" tIns="0" rIns="0" bIns="0" rtlCol="0" anchor="ctr">
-            <a:normAutofit/>
-          </a:bodyPr>
-          <a:lstStyle/>
-          <a:p>
-            <a:pPr algn="ctr" indent="0" marL="0">
-              <a:buNone/>
-            </a:pPr>
-            <a:r>
-              <a:rPr lang="en-US" sz="1500" b="1" dirty="0">
-                <a:solidFill>
-                  <a:srgbClr val="FFFFFF"/>
-                </a:solidFill>
-                <a:latin typeface="Aptos" pitchFamily="34" charset="0"/>
-                <a:ea typeface="Aptos" pitchFamily="34" charset="-122"/>
-                <a:cs typeface="Aptos" pitchFamily="34" charset="-120"/>
-              </a:rPr>
-              <a:t>Do</a:t>
-            </a:r>
-            <a:endParaRPr lang="en-US" sz="1500" dirty="0"/>
-          </a:p>
-        </p:txBody>
-      </p:sp>
-      <p:sp>
-        <p:nvSpPr>
-          <p:cNvPr id="18" name="Shape 16"/>
-          <p:cNvSpPr/>
-          <p:nvPr/>
-        </p:nvSpPr>
-        <p:spPr>
-          <a:xfrm>
-            <a:off x="10024872" y="3319272"/>
-            <a:ext cx="792480" cy="749808"/>
-          </a:xfrm>
-          <a:prstGeom prst="roundRect">
-            <a:avLst>
-              <a:gd name="adj" fmla="val 14634"/>
-            </a:avLst>
-          </a:prstGeom>
-          <a:solidFill>
-            <a:srgbClr val="D69A2D"/>
-          </a:solidFill>
-          <a:ln w="12700">
-            <a:solidFill>
-              <a:srgbClr val="D69A2D"/>
-            </a:solidFill>
-            <a:prstDash val="solid"/>
-          </a:ln>
-        </p:spPr>
-      </p:sp>
-      <p:sp>
-        <p:nvSpPr>
-          <p:cNvPr id="19" name="Text 17"/>
-          <p:cNvSpPr/>
-          <p:nvPr/>
-        </p:nvSpPr>
-        <p:spPr>
-          <a:xfrm>
-            <a:off x="10098024" y="3511296"/>
-            <a:ext cx="646176" cy="310896"/>
-          </a:xfrm>
-          <a:prstGeom prst="rect">
-            <a:avLst/>
-          </a:prstGeom>
-          <a:noFill/>
-          <a:ln/>
-        </p:spPr>
-        <p:txBody>
-          <a:bodyPr wrap="square" lIns="0" tIns="0" rIns="0" bIns="0" rtlCol="0" anchor="ctr">
-            <a:normAutofit/>
-          </a:bodyPr>
-          <a:lstStyle/>
-          <a:p>
-            <a:pPr algn="ctr" indent="0" marL="0">
-              <a:buNone/>
-            </a:pPr>
-            <a:r>
-              <a:rPr lang="en-US" sz="1500" b="1" dirty="0">
-                <a:solidFill>
-                  <a:srgbClr val="FFFFFF"/>
-                </a:solidFill>
-                <a:latin typeface="Aptos" pitchFamily="34" charset="0"/>
-                <a:ea typeface="Aptos" pitchFamily="34" charset="-122"/>
-                <a:cs typeface="Aptos" pitchFamily="34" charset="-120"/>
-              </a:rPr>
-              <a:t>Review</a:t>
-            </a:r>
-            <a:endParaRPr lang="en-US" sz="1500" dirty="0"/>
-          </a:p>
-        </p:txBody>
-      </p:sp>
-      <p:sp>
-        <p:nvSpPr>
-          <p:cNvPr id="20" name="Shape 18"/>
-          <p:cNvSpPr/>
-          <p:nvPr/>
-        </p:nvSpPr>
-        <p:spPr>
-          <a:xfrm>
-            <a:off x="8293608" y="4389120"/>
-            <a:ext cx="2157984" cy="0"/>
-          </a:xfrm>
-          <a:prstGeom prst="line">
-            <a:avLst/>
-          </a:prstGeom>
-          <a:noFill/>
-          <a:ln w="25400">
-            <a:solidFill>
-              <a:srgbClr val="8ABBD8"/>
-            </a:solidFill>
-            <a:prstDash val="solid"/>
-          </a:ln>
-        </p:spPr>
-      </p:sp>
-      <p:sp>
-        <p:nvSpPr>
-          <p:cNvPr id="21" name="Text 19"/>
-          <p:cNvSpPr/>
-          <p:nvPr/>
-        </p:nvSpPr>
-        <p:spPr>
-          <a:xfrm>
-            <a:off x="7909560" y="3977640"/>
-            <a:ext cx="2926080" cy="182880"/>
-          </a:xfrm>
-          <a:prstGeom prst="rect">
-            <a:avLst/>
-          </a:prstGeom>
-          <a:noFill/>
-          <a:ln/>
-        </p:spPr>
-        <p:txBody>
-          <a:bodyPr wrap="square" lIns="0" tIns="0" rIns="0" bIns="0" rtlCol="0" anchor="ctr"/>
-          <a:lstStyle/>
-          <a:p>
-            <a:pPr algn="ctr" indent="0" marL="0">
-              <a:buNone/>
-            </a:pPr>
-            <a:r>
-              <a:rPr lang="en-US" sz="1000" dirty="0">
-                <a:solidFill>
-                  <a:srgbClr val="003A63"/>
-                </a:solidFill>
-                <a:latin typeface="Aptos" pitchFamily="34" charset="0"/>
-                <a:ea typeface="Aptos" pitchFamily="34" charset="-122"/>
-                <a:cs typeface="Aptos" pitchFamily="34" charset="-120"/>
-              </a:rPr>
-              <a:t>Dependencies visible</a:t>
-            </a:r>
-            <a:endParaRPr lang="en-US" sz="1000" dirty="0"/>
-          </a:p>
-        </p:txBody>
-      </p:sp>
-      <p:sp>
-        <p:nvSpPr>
-          <p:cNvPr id="22" name="Shape 20"/>
           <p:cNvSpPr/>
           <p:nvPr/>
         </p:nvSpPr>
@@ -6047,7 +5509,7 @@
       </p:sp>
       <p:sp>
         <p:nvSpPr>
-          <p:cNvPr id="23" name="Text 21"/>
+          <p:cNvPr id="17" name="Text 15"/>
           <p:cNvSpPr/>
           <p:nvPr/>
         </p:nvSpPr>
@@ -6086,7 +5548,7 @@
       </p:sp>
       <p:sp>
         <p:nvSpPr>
-          <p:cNvPr id="24" name="Text 22"/>
+          <p:cNvPr id="18" name="Text 16"/>
           <p:cNvSpPr/>
           <p:nvPr/>
         </p:nvSpPr>
@@ -6580,13 +6042,11 @@
             </a:avLst>
           </a:prstGeom>
           <a:solidFill>
-            <a:srgbClr val="FFFFFF">
-              <a:alpha val="88000"/>
-            </a:srgbClr>
+            <a:srgbClr val="FFFFFF"/>
           </a:solidFill>
           <a:ln w="12700">
             <a:solidFill>
-              <a:srgbClr val="D6E8F2"/>
+              <a:srgbClr val="B9D7E6"/>
             </a:solidFill>
             <a:prstDash val="solid"/>
           </a:ln>
@@ -6594,30 +6054,42 @@
       </p:sp>
       <p:sp>
         <p:nvSpPr>
-          <p:cNvPr id="14" name="Shape 12"/>
-          <p:cNvSpPr/>
-          <p:nvPr/>
-        </p:nvSpPr>
-        <p:spPr>
-          <a:xfrm>
-            <a:off x="7927848" y="3319272"/>
-            <a:ext cx="792480" cy="749808"/>
-          </a:xfrm>
-          <a:prstGeom prst="roundRect">
-            <a:avLst>
-              <a:gd name="adj" fmla="val 14634"/>
-            </a:avLst>
-          </a:prstGeom>
-          <a:solidFill>
-            <a:srgbClr val="0068B7"/>
-          </a:solidFill>
-          <a:ln w="12700">
-            <a:solidFill>
-              <a:srgbClr val="0068B7"/>
-            </a:solidFill>
-            <a:prstDash val="solid"/>
-          </a:ln>
-        </p:spPr>
+          <p:cNvPr id="14" name="Text 12"/>
+          <p:cNvSpPr/>
+          <p:nvPr/>
+        </p:nvSpPr>
+        <p:spPr>
+          <a:xfrm>
+            <a:off x="7799832" y="2935224"/>
+            <a:ext cx="3145536" cy="256032"/>
+          </a:xfrm>
+          <a:prstGeom prst="rect">
+            <a:avLst/>
+          </a:prstGeom>
+          <a:noFill/>
+          <a:ln/>
+        </p:spPr>
+        <p:txBody>
+          <a:bodyPr wrap="square" lIns="0" tIns="0" rIns="0" bIns="0" rtlCol="0" anchor="ctr"/>
+          <a:lstStyle/>
+          <a:p>
+            <a:pPr indent="0" marL="0">
+              <a:buNone/>
+            </a:pPr>
+            <a:r>
+              <a:rPr lang="en-US" sz="1300" b="1" dirty="0">
+                <a:solidFill>
+                  <a:srgbClr val="0068B7"/>
+                </a:solidFill>
+                <a:latin typeface="Aptos" pitchFamily="34" charset="0"/>
+                <a:ea typeface="Aptos" pitchFamily="34" charset="-122"/>
+                <a:cs typeface="Aptos" pitchFamily="34" charset="-120"/>
+              </a:rPr>
+              <a:t>Concept checkpoints</a:t>
+            </a:r>
+            <a:endParaRPr lang="en-US" sz="1300" dirty="0"/>
+          </a:p>
+        </p:txBody>
       </p:sp>
       <p:sp>
         <p:nvSpPr>
@@ -6627,240 +6099,53 @@
         </p:nvSpPr>
         <p:spPr>
           <a:xfrm>
-            <a:off x="8001000" y="3511296"/>
-            <a:ext cx="646176" cy="310896"/>
-          </a:xfrm>
-          <a:prstGeom prst="rect">
-            <a:avLst/>
-          </a:prstGeom>
-          <a:noFill/>
-          <a:ln/>
-        </p:spPr>
-        <p:txBody>
-          <a:bodyPr wrap="square" lIns="0" tIns="0" rIns="0" bIns="0" rtlCol="0" anchor="ctr">
+            <a:off x="7818120" y="3300984"/>
+            <a:ext cx="3090672" cy="877824"/>
+          </a:xfrm>
+          <a:prstGeom prst="rect">
+            <a:avLst/>
+          </a:prstGeom>
+          <a:noFill/>
+          <a:ln/>
+        </p:spPr>
+        <p:txBody>
+          <a:bodyPr wrap="square" lIns="254" tIns="254" rIns="254" bIns="254" rtlCol="0" anchor="t">
             <a:normAutofit/>
           </a:bodyPr>
           <a:lstStyle/>
           <a:p>
-            <a:pPr algn="ctr" indent="0" marL="0">
-              <a:buNone/>
-            </a:pPr>
-            <a:r>
-              <a:rPr lang="en-US" sz="1500" b="1" dirty="0">
-                <a:solidFill>
-                  <a:srgbClr val="FFFFFF"/>
-                </a:solidFill>
-                <a:latin typeface="Aptos" pitchFamily="34" charset="0"/>
-                <a:ea typeface="Aptos" pitchFamily="34" charset="-122"/>
-                <a:cs typeface="Aptos" pitchFamily="34" charset="-120"/>
-              </a:rPr>
-              <a:t>Plan</a:t>
-            </a:r>
-            <a:endParaRPr lang="en-US" sz="1500" dirty="0"/>
+            <a:r>
+              <a:rPr lang="en-US" sz="1380" dirty="0">
+                <a:solidFill>
+                  <a:srgbClr val="17364A"/>
+                </a:solidFill>
+                <a:latin typeface="Aptos" pitchFamily="34" charset="0"/>
+                <a:ea typeface="Aptos" pitchFamily="34" charset="-122"/>
+                <a:cs typeface="Aptos" pitchFamily="34" charset="-120"/>
+              </a:rPr>
+              <a:t>Create a change management plan for one AI use case.</a:t>
+            </a:r>
+            <a:endParaRPr lang="en-US" sz="1380" dirty="0"/>
+          </a:p>
+          <a:p>
+            <a:r>
+              <a:rPr lang="en-US" sz="1380" dirty="0">
+                <a:solidFill>
+                  <a:srgbClr val="17364A"/>
+                </a:solidFill>
+                <a:latin typeface="Aptos" pitchFamily="34" charset="0"/>
+                <a:ea typeface="Aptos" pitchFamily="34" charset="-122"/>
+                <a:cs typeface="Aptos" pitchFamily="34" charset="-120"/>
+              </a:rPr>
+              <a:t>Include stakeholder map, communication messages, training needs, workflow changes,.</a:t>
+            </a:r>
+            <a:endParaRPr lang="en-US" sz="1380" dirty="0"/>
           </a:p>
         </p:txBody>
       </p:sp>
       <p:sp>
         <p:nvSpPr>
           <p:cNvPr id="16" name="Shape 14"/>
-          <p:cNvSpPr/>
-          <p:nvPr/>
-        </p:nvSpPr>
-        <p:spPr>
-          <a:xfrm>
-            <a:off x="8976360" y="3319272"/>
-            <a:ext cx="792480" cy="749808"/>
-          </a:xfrm>
-          <a:prstGeom prst="roundRect">
-            <a:avLst>
-              <a:gd name="adj" fmla="val 14634"/>
-            </a:avLst>
-          </a:prstGeom>
-          <a:solidFill>
-            <a:srgbClr val="2F8A28"/>
-          </a:solidFill>
-          <a:ln w="12700">
-            <a:solidFill>
-              <a:srgbClr val="2F8A28"/>
-            </a:solidFill>
-            <a:prstDash val="solid"/>
-          </a:ln>
-        </p:spPr>
-      </p:sp>
-      <p:sp>
-        <p:nvSpPr>
-          <p:cNvPr id="17" name="Text 15"/>
-          <p:cNvSpPr/>
-          <p:nvPr/>
-        </p:nvSpPr>
-        <p:spPr>
-          <a:xfrm>
-            <a:off x="9049512" y="3511296"/>
-            <a:ext cx="646176" cy="310896"/>
-          </a:xfrm>
-          <a:prstGeom prst="rect">
-            <a:avLst/>
-          </a:prstGeom>
-          <a:noFill/>
-          <a:ln/>
-        </p:spPr>
-        <p:txBody>
-          <a:bodyPr wrap="square" lIns="0" tIns="0" rIns="0" bIns="0" rtlCol="0" anchor="ctr">
-            <a:normAutofit/>
-          </a:bodyPr>
-          <a:lstStyle/>
-          <a:p>
-            <a:pPr algn="ctr" indent="0" marL="0">
-              <a:buNone/>
-            </a:pPr>
-            <a:r>
-              <a:rPr lang="en-US" sz="1500" b="1" dirty="0">
-                <a:solidFill>
-                  <a:srgbClr val="FFFFFF"/>
-                </a:solidFill>
-                <a:latin typeface="Aptos" pitchFamily="34" charset="0"/>
-                <a:ea typeface="Aptos" pitchFamily="34" charset="-122"/>
-                <a:cs typeface="Aptos" pitchFamily="34" charset="-120"/>
-              </a:rPr>
-              <a:t>Do</a:t>
-            </a:r>
-            <a:endParaRPr lang="en-US" sz="1500" dirty="0"/>
-          </a:p>
-        </p:txBody>
-      </p:sp>
-      <p:sp>
-        <p:nvSpPr>
-          <p:cNvPr id="18" name="Shape 16"/>
-          <p:cNvSpPr/>
-          <p:nvPr/>
-        </p:nvSpPr>
-        <p:spPr>
-          <a:xfrm>
-            <a:off x="10024872" y="3319272"/>
-            <a:ext cx="792480" cy="749808"/>
-          </a:xfrm>
-          <a:prstGeom prst="roundRect">
-            <a:avLst>
-              <a:gd name="adj" fmla="val 14634"/>
-            </a:avLst>
-          </a:prstGeom>
-          <a:solidFill>
-            <a:srgbClr val="D69A2D"/>
-          </a:solidFill>
-          <a:ln w="12700">
-            <a:solidFill>
-              <a:srgbClr val="D69A2D"/>
-            </a:solidFill>
-            <a:prstDash val="solid"/>
-          </a:ln>
-        </p:spPr>
-      </p:sp>
-      <p:sp>
-        <p:nvSpPr>
-          <p:cNvPr id="19" name="Text 17"/>
-          <p:cNvSpPr/>
-          <p:nvPr/>
-        </p:nvSpPr>
-        <p:spPr>
-          <a:xfrm>
-            <a:off x="10098024" y="3511296"/>
-            <a:ext cx="646176" cy="310896"/>
-          </a:xfrm>
-          <a:prstGeom prst="rect">
-            <a:avLst/>
-          </a:prstGeom>
-          <a:noFill/>
-          <a:ln/>
-        </p:spPr>
-        <p:txBody>
-          <a:bodyPr wrap="square" lIns="0" tIns="0" rIns="0" bIns="0" rtlCol="0" anchor="ctr">
-            <a:normAutofit/>
-          </a:bodyPr>
-          <a:lstStyle/>
-          <a:p>
-            <a:pPr algn="ctr" indent="0" marL="0">
-              <a:buNone/>
-            </a:pPr>
-            <a:r>
-              <a:rPr lang="en-US" sz="1500" b="1" dirty="0">
-                <a:solidFill>
-                  <a:srgbClr val="FFFFFF"/>
-                </a:solidFill>
-                <a:latin typeface="Aptos" pitchFamily="34" charset="0"/>
-                <a:ea typeface="Aptos" pitchFamily="34" charset="-122"/>
-                <a:cs typeface="Aptos" pitchFamily="34" charset="-120"/>
-              </a:rPr>
-              <a:t>Review</a:t>
-            </a:r>
-            <a:endParaRPr lang="en-US" sz="1500" dirty="0"/>
-          </a:p>
-        </p:txBody>
-      </p:sp>
-      <p:sp>
-        <p:nvSpPr>
-          <p:cNvPr id="20" name="Shape 18"/>
-          <p:cNvSpPr/>
-          <p:nvPr/>
-        </p:nvSpPr>
-        <p:spPr>
-          <a:xfrm>
-            <a:off x="8293608" y="4389120"/>
-            <a:ext cx="2157984" cy="0"/>
-          </a:xfrm>
-          <a:prstGeom prst="line">
-            <a:avLst/>
-          </a:prstGeom>
-          <a:noFill/>
-          <a:ln w="25400">
-            <a:solidFill>
-              <a:srgbClr val="8ABBD8"/>
-            </a:solidFill>
-            <a:prstDash val="solid"/>
-          </a:ln>
-        </p:spPr>
-      </p:sp>
-      <p:sp>
-        <p:nvSpPr>
-          <p:cNvPr id="21" name="Text 19"/>
-          <p:cNvSpPr/>
-          <p:nvPr/>
-        </p:nvSpPr>
-        <p:spPr>
-          <a:xfrm>
-            <a:off x="7909560" y="3977640"/>
-            <a:ext cx="2926080" cy="182880"/>
-          </a:xfrm>
-          <a:prstGeom prst="rect">
-            <a:avLst/>
-          </a:prstGeom>
-          <a:noFill/>
-          <a:ln/>
-        </p:spPr>
-        <p:txBody>
-          <a:bodyPr wrap="square" lIns="0" tIns="0" rIns="0" bIns="0" rtlCol="0" anchor="ctr"/>
-          <a:lstStyle/>
-          <a:p>
-            <a:pPr algn="ctr" indent="0" marL="0">
-              <a:buNone/>
-            </a:pPr>
-            <a:r>
-              <a:rPr lang="en-US" sz="1000" dirty="0">
-                <a:solidFill>
-                  <a:srgbClr val="003A63"/>
-                </a:solidFill>
-                <a:latin typeface="Aptos" pitchFamily="34" charset="0"/>
-                <a:ea typeface="Aptos" pitchFamily="34" charset="-122"/>
-                <a:cs typeface="Aptos" pitchFamily="34" charset="-120"/>
-              </a:rPr>
-              <a:t>Dependencies visible</a:t>
-            </a:r>
-            <a:endParaRPr lang="en-US" sz="1000" dirty="0"/>
-          </a:p>
-        </p:txBody>
-      </p:sp>
-      <p:sp>
-        <p:nvSpPr>
-          <p:cNvPr id="22" name="Shape 20"/>
           <p:cNvSpPr/>
           <p:nvPr/>
         </p:nvSpPr>
@@ -6887,7 +6172,7 @@
       </p:sp>
       <p:sp>
         <p:nvSpPr>
-          <p:cNvPr id="23" name="Text 21"/>
+          <p:cNvPr id="17" name="Text 15"/>
           <p:cNvSpPr/>
           <p:nvPr/>
         </p:nvSpPr>
@@ -6926,7 +6211,7 @@
       </p:sp>
       <p:sp>
         <p:nvSpPr>
-          <p:cNvPr id="24" name="Text 22"/>
+          <p:cNvPr id="18" name="Text 16"/>
           <p:cNvSpPr/>
           <p:nvPr/>
         </p:nvSpPr>
@@ -7434,13 +6719,11 @@
             </a:avLst>
           </a:prstGeom>
           <a:solidFill>
-            <a:srgbClr val="FFFFFF">
-              <a:alpha val="88000"/>
-            </a:srgbClr>
+            <a:srgbClr val="FFFFFF"/>
           </a:solidFill>
           <a:ln w="12700">
             <a:solidFill>
-              <a:srgbClr val="D6E8F2"/>
+              <a:srgbClr val="B9D7E6"/>
             </a:solidFill>
             <a:prstDash val="solid"/>
           </a:ln>
@@ -7448,30 +6731,42 @@
       </p:sp>
       <p:sp>
         <p:nvSpPr>
-          <p:cNvPr id="14" name="Shape 12"/>
-          <p:cNvSpPr/>
-          <p:nvPr/>
-        </p:nvSpPr>
-        <p:spPr>
-          <a:xfrm>
-            <a:off x="7927848" y="3319272"/>
-            <a:ext cx="792480" cy="749808"/>
-          </a:xfrm>
-          <a:prstGeom prst="roundRect">
-            <a:avLst>
-              <a:gd name="adj" fmla="val 14634"/>
-            </a:avLst>
-          </a:prstGeom>
-          <a:solidFill>
-            <a:srgbClr val="0068B7"/>
-          </a:solidFill>
-          <a:ln w="12700">
-            <a:solidFill>
-              <a:srgbClr val="0068B7"/>
-            </a:solidFill>
-            <a:prstDash val="solid"/>
-          </a:ln>
-        </p:spPr>
+          <p:cNvPr id="14" name="Text 12"/>
+          <p:cNvSpPr/>
+          <p:nvPr/>
+        </p:nvSpPr>
+        <p:spPr>
+          <a:xfrm>
+            <a:off x="7799832" y="2935224"/>
+            <a:ext cx="3145536" cy="256032"/>
+          </a:xfrm>
+          <a:prstGeom prst="rect">
+            <a:avLst/>
+          </a:prstGeom>
+          <a:noFill/>
+          <a:ln/>
+        </p:spPr>
+        <p:txBody>
+          <a:bodyPr wrap="square" lIns="0" tIns="0" rIns="0" bIns="0" rtlCol="0" anchor="ctr"/>
+          <a:lstStyle/>
+          <a:p>
+            <a:pPr indent="0" marL="0">
+              <a:buNone/>
+            </a:pPr>
+            <a:r>
+              <a:rPr lang="en-US" sz="1300" b="1" dirty="0">
+                <a:solidFill>
+                  <a:srgbClr val="0068B7"/>
+                </a:solidFill>
+                <a:latin typeface="Aptos" pitchFamily="34" charset="0"/>
+                <a:ea typeface="Aptos" pitchFamily="34" charset="-122"/>
+                <a:cs typeface="Aptos" pitchFamily="34" charset="-120"/>
+              </a:rPr>
+              <a:t>Concept checkpoints</a:t>
+            </a:r>
+            <a:endParaRPr lang="en-US" sz="1300" dirty="0"/>
+          </a:p>
+        </p:txBody>
       </p:sp>
       <p:sp>
         <p:nvSpPr>
@@ -7481,240 +6776,53 @@
         </p:nvSpPr>
         <p:spPr>
           <a:xfrm>
-            <a:off x="8001000" y="3511296"/>
-            <a:ext cx="646176" cy="310896"/>
-          </a:xfrm>
-          <a:prstGeom prst="rect">
-            <a:avLst/>
-          </a:prstGeom>
-          <a:noFill/>
-          <a:ln/>
-        </p:spPr>
-        <p:txBody>
-          <a:bodyPr wrap="square" lIns="0" tIns="0" rIns="0" bIns="0" rtlCol="0" anchor="ctr">
+            <a:off x="7818120" y="3300984"/>
+            <a:ext cx="3090672" cy="877824"/>
+          </a:xfrm>
+          <a:prstGeom prst="rect">
+            <a:avLst/>
+          </a:prstGeom>
+          <a:noFill/>
+          <a:ln/>
+        </p:spPr>
+        <p:txBody>
+          <a:bodyPr wrap="square" lIns="254" tIns="254" rIns="254" bIns="254" rtlCol="0" anchor="t">
             <a:normAutofit/>
           </a:bodyPr>
           <a:lstStyle/>
           <a:p>
-            <a:pPr algn="ctr" indent="0" marL="0">
-              <a:buNone/>
-            </a:pPr>
-            <a:r>
-              <a:rPr lang="en-US" sz="1500" b="1" dirty="0">
-                <a:solidFill>
-                  <a:srgbClr val="FFFFFF"/>
-                </a:solidFill>
-                <a:latin typeface="Aptos" pitchFamily="34" charset="0"/>
-                <a:ea typeface="Aptos" pitchFamily="34" charset="-122"/>
-                <a:cs typeface="Aptos" pitchFamily="34" charset="-120"/>
-              </a:rPr>
-              <a:t>Plan</a:t>
-            </a:r>
-            <a:endParaRPr lang="en-US" sz="1500" dirty="0"/>
+            <a:r>
+              <a:rPr lang="en-US" sz="1380" dirty="0">
+                <a:solidFill>
+                  <a:srgbClr val="17364A"/>
+                </a:solidFill>
+                <a:latin typeface="Aptos" pitchFamily="34" charset="0"/>
+                <a:ea typeface="Aptos" pitchFamily="34" charset="-122"/>
+                <a:cs typeface="Aptos" pitchFamily="34" charset="-120"/>
+              </a:rPr>
+              <a:t>Document assumptions, unresolved questions, and which agency roles would need to review.</a:t>
+            </a:r>
+            <a:endParaRPr lang="en-US" sz="1380" dirty="0"/>
+          </a:p>
+          <a:p>
+            <a:r>
+              <a:rPr lang="en-US" sz="1380" dirty="0">
+                <a:solidFill>
+                  <a:srgbClr val="17364A"/>
+                </a:solidFill>
+                <a:latin typeface="Aptos" pitchFamily="34" charset="0"/>
+                <a:ea typeface="Aptos" pitchFamily="34" charset="-122"/>
+                <a:cs typeface="Aptos" pitchFamily="34" charset="-120"/>
+              </a:rPr>
+              <a:t>The exercise should produce a work product that could support governance review,.</a:t>
+            </a:r>
+            <a:endParaRPr lang="en-US" sz="1380" dirty="0"/>
           </a:p>
         </p:txBody>
       </p:sp>
       <p:sp>
         <p:nvSpPr>
           <p:cNvPr id="16" name="Shape 14"/>
-          <p:cNvSpPr/>
-          <p:nvPr/>
-        </p:nvSpPr>
-        <p:spPr>
-          <a:xfrm>
-            <a:off x="8976360" y="3319272"/>
-            <a:ext cx="792480" cy="749808"/>
-          </a:xfrm>
-          <a:prstGeom prst="roundRect">
-            <a:avLst>
-              <a:gd name="adj" fmla="val 14634"/>
-            </a:avLst>
-          </a:prstGeom>
-          <a:solidFill>
-            <a:srgbClr val="2F8A28"/>
-          </a:solidFill>
-          <a:ln w="12700">
-            <a:solidFill>
-              <a:srgbClr val="2F8A28"/>
-            </a:solidFill>
-            <a:prstDash val="solid"/>
-          </a:ln>
-        </p:spPr>
-      </p:sp>
-      <p:sp>
-        <p:nvSpPr>
-          <p:cNvPr id="17" name="Text 15"/>
-          <p:cNvSpPr/>
-          <p:nvPr/>
-        </p:nvSpPr>
-        <p:spPr>
-          <a:xfrm>
-            <a:off x="9049512" y="3511296"/>
-            <a:ext cx="646176" cy="310896"/>
-          </a:xfrm>
-          <a:prstGeom prst="rect">
-            <a:avLst/>
-          </a:prstGeom>
-          <a:noFill/>
-          <a:ln/>
-        </p:spPr>
-        <p:txBody>
-          <a:bodyPr wrap="square" lIns="0" tIns="0" rIns="0" bIns="0" rtlCol="0" anchor="ctr">
-            <a:normAutofit/>
-          </a:bodyPr>
-          <a:lstStyle/>
-          <a:p>
-            <a:pPr algn="ctr" indent="0" marL="0">
-              <a:buNone/>
-            </a:pPr>
-            <a:r>
-              <a:rPr lang="en-US" sz="1500" b="1" dirty="0">
-                <a:solidFill>
-                  <a:srgbClr val="FFFFFF"/>
-                </a:solidFill>
-                <a:latin typeface="Aptos" pitchFamily="34" charset="0"/>
-                <a:ea typeface="Aptos" pitchFamily="34" charset="-122"/>
-                <a:cs typeface="Aptos" pitchFamily="34" charset="-120"/>
-              </a:rPr>
-              <a:t>Do</a:t>
-            </a:r>
-            <a:endParaRPr lang="en-US" sz="1500" dirty="0"/>
-          </a:p>
-        </p:txBody>
-      </p:sp>
-      <p:sp>
-        <p:nvSpPr>
-          <p:cNvPr id="18" name="Shape 16"/>
-          <p:cNvSpPr/>
-          <p:nvPr/>
-        </p:nvSpPr>
-        <p:spPr>
-          <a:xfrm>
-            <a:off x="10024872" y="3319272"/>
-            <a:ext cx="792480" cy="749808"/>
-          </a:xfrm>
-          <a:prstGeom prst="roundRect">
-            <a:avLst>
-              <a:gd name="adj" fmla="val 14634"/>
-            </a:avLst>
-          </a:prstGeom>
-          <a:solidFill>
-            <a:srgbClr val="D69A2D"/>
-          </a:solidFill>
-          <a:ln w="12700">
-            <a:solidFill>
-              <a:srgbClr val="D69A2D"/>
-            </a:solidFill>
-            <a:prstDash val="solid"/>
-          </a:ln>
-        </p:spPr>
-      </p:sp>
-      <p:sp>
-        <p:nvSpPr>
-          <p:cNvPr id="19" name="Text 17"/>
-          <p:cNvSpPr/>
-          <p:nvPr/>
-        </p:nvSpPr>
-        <p:spPr>
-          <a:xfrm>
-            <a:off x="10098024" y="3511296"/>
-            <a:ext cx="646176" cy="310896"/>
-          </a:xfrm>
-          <a:prstGeom prst="rect">
-            <a:avLst/>
-          </a:prstGeom>
-          <a:noFill/>
-          <a:ln/>
-        </p:spPr>
-        <p:txBody>
-          <a:bodyPr wrap="square" lIns="0" tIns="0" rIns="0" bIns="0" rtlCol="0" anchor="ctr">
-            <a:normAutofit/>
-          </a:bodyPr>
-          <a:lstStyle/>
-          <a:p>
-            <a:pPr algn="ctr" indent="0" marL="0">
-              <a:buNone/>
-            </a:pPr>
-            <a:r>
-              <a:rPr lang="en-US" sz="1500" b="1" dirty="0">
-                <a:solidFill>
-                  <a:srgbClr val="FFFFFF"/>
-                </a:solidFill>
-                <a:latin typeface="Aptos" pitchFamily="34" charset="0"/>
-                <a:ea typeface="Aptos" pitchFamily="34" charset="-122"/>
-                <a:cs typeface="Aptos" pitchFamily="34" charset="-120"/>
-              </a:rPr>
-              <a:t>Review</a:t>
-            </a:r>
-            <a:endParaRPr lang="en-US" sz="1500" dirty="0"/>
-          </a:p>
-        </p:txBody>
-      </p:sp>
-      <p:sp>
-        <p:nvSpPr>
-          <p:cNvPr id="20" name="Shape 18"/>
-          <p:cNvSpPr/>
-          <p:nvPr/>
-        </p:nvSpPr>
-        <p:spPr>
-          <a:xfrm>
-            <a:off x="8293608" y="4389120"/>
-            <a:ext cx="2157984" cy="0"/>
-          </a:xfrm>
-          <a:prstGeom prst="line">
-            <a:avLst/>
-          </a:prstGeom>
-          <a:noFill/>
-          <a:ln w="25400">
-            <a:solidFill>
-              <a:srgbClr val="8ABBD8"/>
-            </a:solidFill>
-            <a:prstDash val="solid"/>
-          </a:ln>
-        </p:spPr>
-      </p:sp>
-      <p:sp>
-        <p:nvSpPr>
-          <p:cNvPr id="21" name="Text 19"/>
-          <p:cNvSpPr/>
-          <p:nvPr/>
-        </p:nvSpPr>
-        <p:spPr>
-          <a:xfrm>
-            <a:off x="7909560" y="3977640"/>
-            <a:ext cx="2926080" cy="182880"/>
-          </a:xfrm>
-          <a:prstGeom prst="rect">
-            <a:avLst/>
-          </a:prstGeom>
-          <a:noFill/>
-          <a:ln/>
-        </p:spPr>
-        <p:txBody>
-          <a:bodyPr wrap="square" lIns="0" tIns="0" rIns="0" bIns="0" rtlCol="0" anchor="ctr"/>
-          <a:lstStyle/>
-          <a:p>
-            <a:pPr algn="ctr" indent="0" marL="0">
-              <a:buNone/>
-            </a:pPr>
-            <a:r>
-              <a:rPr lang="en-US" sz="1000" dirty="0">
-                <a:solidFill>
-                  <a:srgbClr val="003A63"/>
-                </a:solidFill>
-                <a:latin typeface="Aptos" pitchFamily="34" charset="0"/>
-                <a:ea typeface="Aptos" pitchFamily="34" charset="-122"/>
-                <a:cs typeface="Aptos" pitchFamily="34" charset="-120"/>
-              </a:rPr>
-              <a:t>Dependencies visible</a:t>
-            </a:r>
-            <a:endParaRPr lang="en-US" sz="1000" dirty="0"/>
-          </a:p>
-        </p:txBody>
-      </p:sp>
-      <p:sp>
-        <p:nvSpPr>
-          <p:cNvPr id="22" name="Shape 20"/>
           <p:cNvSpPr/>
           <p:nvPr/>
         </p:nvSpPr>
@@ -7741,7 +6849,7 @@
       </p:sp>
       <p:sp>
         <p:nvSpPr>
-          <p:cNvPr id="23" name="Text 21"/>
+          <p:cNvPr id="17" name="Text 15"/>
           <p:cNvSpPr/>
           <p:nvPr/>
         </p:nvSpPr>
@@ -7780,7 +6888,7 @@
       </p:sp>
       <p:sp>
         <p:nvSpPr>
-          <p:cNvPr id="24" name="Text 22"/>
+          <p:cNvPr id="18" name="Text 16"/>
           <p:cNvSpPr/>
           <p:nvPr/>
         </p:nvSpPr>
@@ -8260,13 +7368,11 @@
             </a:avLst>
           </a:prstGeom>
           <a:solidFill>
-            <a:srgbClr val="FFFFFF">
-              <a:alpha val="88000"/>
-            </a:srgbClr>
+            <a:srgbClr val="FFFFFF"/>
           </a:solidFill>
           <a:ln w="12700">
             <a:solidFill>
-              <a:srgbClr val="D6E8F2"/>
+              <a:srgbClr val="B9D7E6"/>
             </a:solidFill>
             <a:prstDash val="solid"/>
           </a:ln>
@@ -8274,30 +7380,42 @@
       </p:sp>
       <p:sp>
         <p:nvSpPr>
-          <p:cNvPr id="14" name="Shape 12"/>
-          <p:cNvSpPr/>
-          <p:nvPr/>
-        </p:nvSpPr>
-        <p:spPr>
-          <a:xfrm>
-            <a:off x="7927848" y="3319272"/>
-            <a:ext cx="792480" cy="749808"/>
-          </a:xfrm>
-          <a:prstGeom prst="roundRect">
-            <a:avLst>
-              <a:gd name="adj" fmla="val 14634"/>
-            </a:avLst>
-          </a:prstGeom>
-          <a:solidFill>
-            <a:srgbClr val="0068B7"/>
-          </a:solidFill>
-          <a:ln w="12700">
-            <a:solidFill>
-              <a:srgbClr val="0068B7"/>
-            </a:solidFill>
-            <a:prstDash val="solid"/>
-          </a:ln>
-        </p:spPr>
+          <p:cNvPr id="14" name="Text 12"/>
+          <p:cNvSpPr/>
+          <p:nvPr/>
+        </p:nvSpPr>
+        <p:spPr>
+          <a:xfrm>
+            <a:off x="7799832" y="2935224"/>
+            <a:ext cx="3145536" cy="256032"/>
+          </a:xfrm>
+          <a:prstGeom prst="rect">
+            <a:avLst/>
+          </a:prstGeom>
+          <a:noFill/>
+          <a:ln/>
+        </p:spPr>
+        <p:txBody>
+          <a:bodyPr wrap="square" lIns="0" tIns="0" rIns="0" bIns="0" rtlCol="0" anchor="ctr"/>
+          <a:lstStyle/>
+          <a:p>
+            <a:pPr indent="0" marL="0">
+              <a:buNone/>
+            </a:pPr>
+            <a:r>
+              <a:rPr lang="en-US" sz="1300" b="1" dirty="0">
+                <a:solidFill>
+                  <a:srgbClr val="0068B7"/>
+                </a:solidFill>
+                <a:latin typeface="Aptos" pitchFamily="34" charset="0"/>
+                <a:ea typeface="Aptos" pitchFamily="34" charset="-122"/>
+                <a:cs typeface="Aptos" pitchFamily="34" charset="-120"/>
+              </a:rPr>
+              <a:t>Concept checkpoints</a:t>
+            </a:r>
+            <a:endParaRPr lang="en-US" sz="1300" dirty="0"/>
+          </a:p>
+        </p:txBody>
       </p:sp>
       <p:sp>
         <p:nvSpPr>
@@ -8307,240 +7425,39 @@
         </p:nvSpPr>
         <p:spPr>
           <a:xfrm>
-            <a:off x="8001000" y="3511296"/>
-            <a:ext cx="646176" cy="310896"/>
-          </a:xfrm>
-          <a:prstGeom prst="rect">
-            <a:avLst/>
-          </a:prstGeom>
-          <a:noFill/>
-          <a:ln/>
-        </p:spPr>
-        <p:txBody>
-          <a:bodyPr wrap="square" lIns="0" tIns="0" rIns="0" bIns="0" rtlCol="0" anchor="ctr">
+            <a:off x="7818120" y="3300984"/>
+            <a:ext cx="3090672" cy="877824"/>
+          </a:xfrm>
+          <a:prstGeom prst="rect">
+            <a:avLst/>
+          </a:prstGeom>
+          <a:noFill/>
+          <a:ln/>
+        </p:spPr>
+        <p:txBody>
+          <a:bodyPr wrap="square" lIns="254" tIns="254" rIns="254" bIns="254" rtlCol="0" anchor="t">
             <a:normAutofit/>
           </a:bodyPr>
           <a:lstStyle/>
           <a:p>
-            <a:pPr algn="ctr" indent="0" marL="0">
-              <a:buNone/>
-            </a:pPr>
-            <a:r>
-              <a:rPr lang="en-US" sz="1500" b="1" dirty="0">
-                <a:solidFill>
-                  <a:srgbClr val="FFFFFF"/>
-                </a:solidFill>
-                <a:latin typeface="Aptos" pitchFamily="34" charset="0"/>
-                <a:ea typeface="Aptos" pitchFamily="34" charset="-122"/>
-                <a:cs typeface="Aptos" pitchFamily="34" charset="-120"/>
-              </a:rPr>
-              <a:t>Plan</a:t>
-            </a:r>
-            <a:endParaRPr lang="en-US" sz="1500" dirty="0"/>
+            <a:r>
+              <a:rPr lang="en-US" sz="1380" dirty="0">
+                <a:solidFill>
+                  <a:srgbClr val="17364A"/>
+                </a:solidFill>
+                <a:latin typeface="Aptos" pitchFamily="34" charset="0"/>
+                <a:ea typeface="Aptos" pitchFamily="34" charset="-122"/>
+                <a:cs typeface="Aptos" pitchFamily="34" charset="-120"/>
+              </a:rPr>
+              <a:t>AI adoption plan; stakeholder map; communication plan; training plan; feedback and.</a:t>
+            </a:r>
+            <a:endParaRPr lang="en-US" sz="1380" dirty="0"/>
           </a:p>
         </p:txBody>
       </p:sp>
       <p:sp>
         <p:nvSpPr>
           <p:cNvPr id="16" name="Shape 14"/>
-          <p:cNvSpPr/>
-          <p:nvPr/>
-        </p:nvSpPr>
-        <p:spPr>
-          <a:xfrm>
-            <a:off x="8976360" y="3319272"/>
-            <a:ext cx="792480" cy="749808"/>
-          </a:xfrm>
-          <a:prstGeom prst="roundRect">
-            <a:avLst>
-              <a:gd name="adj" fmla="val 14634"/>
-            </a:avLst>
-          </a:prstGeom>
-          <a:solidFill>
-            <a:srgbClr val="2F8A28"/>
-          </a:solidFill>
-          <a:ln w="12700">
-            <a:solidFill>
-              <a:srgbClr val="2F8A28"/>
-            </a:solidFill>
-            <a:prstDash val="solid"/>
-          </a:ln>
-        </p:spPr>
-      </p:sp>
-      <p:sp>
-        <p:nvSpPr>
-          <p:cNvPr id="17" name="Text 15"/>
-          <p:cNvSpPr/>
-          <p:nvPr/>
-        </p:nvSpPr>
-        <p:spPr>
-          <a:xfrm>
-            <a:off x="9049512" y="3511296"/>
-            <a:ext cx="646176" cy="310896"/>
-          </a:xfrm>
-          <a:prstGeom prst="rect">
-            <a:avLst/>
-          </a:prstGeom>
-          <a:noFill/>
-          <a:ln/>
-        </p:spPr>
-        <p:txBody>
-          <a:bodyPr wrap="square" lIns="0" tIns="0" rIns="0" bIns="0" rtlCol="0" anchor="ctr">
-            <a:normAutofit/>
-          </a:bodyPr>
-          <a:lstStyle/>
-          <a:p>
-            <a:pPr algn="ctr" indent="0" marL="0">
-              <a:buNone/>
-            </a:pPr>
-            <a:r>
-              <a:rPr lang="en-US" sz="1500" b="1" dirty="0">
-                <a:solidFill>
-                  <a:srgbClr val="FFFFFF"/>
-                </a:solidFill>
-                <a:latin typeface="Aptos" pitchFamily="34" charset="0"/>
-                <a:ea typeface="Aptos" pitchFamily="34" charset="-122"/>
-                <a:cs typeface="Aptos" pitchFamily="34" charset="-120"/>
-              </a:rPr>
-              <a:t>Do</a:t>
-            </a:r>
-            <a:endParaRPr lang="en-US" sz="1500" dirty="0"/>
-          </a:p>
-        </p:txBody>
-      </p:sp>
-      <p:sp>
-        <p:nvSpPr>
-          <p:cNvPr id="18" name="Shape 16"/>
-          <p:cNvSpPr/>
-          <p:nvPr/>
-        </p:nvSpPr>
-        <p:spPr>
-          <a:xfrm>
-            <a:off x="10024872" y="3319272"/>
-            <a:ext cx="792480" cy="749808"/>
-          </a:xfrm>
-          <a:prstGeom prst="roundRect">
-            <a:avLst>
-              <a:gd name="adj" fmla="val 14634"/>
-            </a:avLst>
-          </a:prstGeom>
-          <a:solidFill>
-            <a:srgbClr val="D69A2D"/>
-          </a:solidFill>
-          <a:ln w="12700">
-            <a:solidFill>
-              <a:srgbClr val="D69A2D"/>
-            </a:solidFill>
-            <a:prstDash val="solid"/>
-          </a:ln>
-        </p:spPr>
-      </p:sp>
-      <p:sp>
-        <p:nvSpPr>
-          <p:cNvPr id="19" name="Text 17"/>
-          <p:cNvSpPr/>
-          <p:nvPr/>
-        </p:nvSpPr>
-        <p:spPr>
-          <a:xfrm>
-            <a:off x="10098024" y="3511296"/>
-            <a:ext cx="646176" cy="310896"/>
-          </a:xfrm>
-          <a:prstGeom prst="rect">
-            <a:avLst/>
-          </a:prstGeom>
-          <a:noFill/>
-          <a:ln/>
-        </p:spPr>
-        <p:txBody>
-          <a:bodyPr wrap="square" lIns="0" tIns="0" rIns="0" bIns="0" rtlCol="0" anchor="ctr">
-            <a:normAutofit/>
-          </a:bodyPr>
-          <a:lstStyle/>
-          <a:p>
-            <a:pPr algn="ctr" indent="0" marL="0">
-              <a:buNone/>
-            </a:pPr>
-            <a:r>
-              <a:rPr lang="en-US" sz="1500" b="1" dirty="0">
-                <a:solidFill>
-                  <a:srgbClr val="FFFFFF"/>
-                </a:solidFill>
-                <a:latin typeface="Aptos" pitchFamily="34" charset="0"/>
-                <a:ea typeface="Aptos" pitchFamily="34" charset="-122"/>
-                <a:cs typeface="Aptos" pitchFamily="34" charset="-120"/>
-              </a:rPr>
-              <a:t>Review</a:t>
-            </a:r>
-            <a:endParaRPr lang="en-US" sz="1500" dirty="0"/>
-          </a:p>
-        </p:txBody>
-      </p:sp>
-      <p:sp>
-        <p:nvSpPr>
-          <p:cNvPr id="20" name="Shape 18"/>
-          <p:cNvSpPr/>
-          <p:nvPr/>
-        </p:nvSpPr>
-        <p:spPr>
-          <a:xfrm>
-            <a:off x="8293608" y="4389120"/>
-            <a:ext cx="2157984" cy="0"/>
-          </a:xfrm>
-          <a:prstGeom prst="line">
-            <a:avLst/>
-          </a:prstGeom>
-          <a:noFill/>
-          <a:ln w="25400">
-            <a:solidFill>
-              <a:srgbClr val="8ABBD8"/>
-            </a:solidFill>
-            <a:prstDash val="solid"/>
-          </a:ln>
-        </p:spPr>
-      </p:sp>
-      <p:sp>
-        <p:nvSpPr>
-          <p:cNvPr id="21" name="Text 19"/>
-          <p:cNvSpPr/>
-          <p:nvPr/>
-        </p:nvSpPr>
-        <p:spPr>
-          <a:xfrm>
-            <a:off x="7909560" y="3977640"/>
-            <a:ext cx="2926080" cy="182880"/>
-          </a:xfrm>
-          <a:prstGeom prst="rect">
-            <a:avLst/>
-          </a:prstGeom>
-          <a:noFill/>
-          <a:ln/>
-        </p:spPr>
-        <p:txBody>
-          <a:bodyPr wrap="square" lIns="0" tIns="0" rIns="0" bIns="0" rtlCol="0" anchor="ctr"/>
-          <a:lstStyle/>
-          <a:p>
-            <a:pPr algn="ctr" indent="0" marL="0">
-              <a:buNone/>
-            </a:pPr>
-            <a:r>
-              <a:rPr lang="en-US" sz="1000" dirty="0">
-                <a:solidFill>
-                  <a:srgbClr val="003A63"/>
-                </a:solidFill>
-                <a:latin typeface="Aptos" pitchFamily="34" charset="0"/>
-                <a:ea typeface="Aptos" pitchFamily="34" charset="-122"/>
-                <a:cs typeface="Aptos" pitchFamily="34" charset="-120"/>
-              </a:rPr>
-              <a:t>Dependencies visible</a:t>
-            </a:r>
-            <a:endParaRPr lang="en-US" sz="1000" dirty="0"/>
-          </a:p>
-        </p:txBody>
-      </p:sp>
-      <p:sp>
-        <p:nvSpPr>
-          <p:cNvPr id="22" name="Shape 20"/>
           <p:cNvSpPr/>
           <p:nvPr/>
         </p:nvSpPr>
@@ -8567,7 +7484,7 @@
       </p:sp>
       <p:sp>
         <p:nvSpPr>
-          <p:cNvPr id="23" name="Text 21"/>
+          <p:cNvPr id="17" name="Text 15"/>
           <p:cNvSpPr/>
           <p:nvPr/>
         </p:nvSpPr>
@@ -8606,7 +7523,7 @@
       </p:sp>
       <p:sp>
         <p:nvSpPr>
-          <p:cNvPr id="24" name="Text 22"/>
+          <p:cNvPr id="18" name="Text 16"/>
           <p:cNvSpPr/>
           <p:nvPr/>
         </p:nvSpPr>
@@ -9086,13 +8003,11 @@
             </a:avLst>
           </a:prstGeom>
           <a:solidFill>
-            <a:srgbClr val="FFFFFF">
-              <a:alpha val="88000"/>
-            </a:srgbClr>
+            <a:srgbClr val="FFFFFF"/>
           </a:solidFill>
           <a:ln w="12700">
             <a:solidFill>
-              <a:srgbClr val="D6E8F2"/>
+              <a:srgbClr val="B9D7E6"/>
             </a:solidFill>
             <a:prstDash val="solid"/>
           </a:ln>
@@ -9100,30 +8015,42 @@
       </p:sp>
       <p:sp>
         <p:nvSpPr>
-          <p:cNvPr id="14" name="Shape 12"/>
-          <p:cNvSpPr/>
-          <p:nvPr/>
-        </p:nvSpPr>
-        <p:spPr>
-          <a:xfrm>
-            <a:off x="7927848" y="3319272"/>
-            <a:ext cx="792480" cy="749808"/>
-          </a:xfrm>
-          <a:prstGeom prst="roundRect">
-            <a:avLst>
-              <a:gd name="adj" fmla="val 14634"/>
-            </a:avLst>
-          </a:prstGeom>
-          <a:solidFill>
-            <a:srgbClr val="0068B7"/>
-          </a:solidFill>
-          <a:ln w="12700">
-            <a:solidFill>
-              <a:srgbClr val="0068B7"/>
-            </a:solidFill>
-            <a:prstDash val="solid"/>
-          </a:ln>
-        </p:spPr>
+          <p:cNvPr id="14" name="Text 12"/>
+          <p:cNvSpPr/>
+          <p:nvPr/>
+        </p:nvSpPr>
+        <p:spPr>
+          <a:xfrm>
+            <a:off x="7799832" y="2935224"/>
+            <a:ext cx="3145536" cy="256032"/>
+          </a:xfrm>
+          <a:prstGeom prst="rect">
+            <a:avLst/>
+          </a:prstGeom>
+          <a:noFill/>
+          <a:ln/>
+        </p:spPr>
+        <p:txBody>
+          <a:bodyPr wrap="square" lIns="0" tIns="0" rIns="0" bIns="0" rtlCol="0" anchor="ctr"/>
+          <a:lstStyle/>
+          <a:p>
+            <a:pPr indent="0" marL="0">
+              <a:buNone/>
+            </a:pPr>
+            <a:r>
+              <a:rPr lang="en-US" sz="1300" b="1" dirty="0">
+                <a:solidFill>
+                  <a:srgbClr val="0068B7"/>
+                </a:solidFill>
+                <a:latin typeface="Aptos" pitchFamily="34" charset="0"/>
+                <a:ea typeface="Aptos" pitchFamily="34" charset="-122"/>
+                <a:cs typeface="Aptos" pitchFamily="34" charset="-120"/>
+              </a:rPr>
+              <a:t>Concept checkpoints</a:t>
+            </a:r>
+            <a:endParaRPr lang="en-US" sz="1300" dirty="0"/>
+          </a:p>
+        </p:txBody>
       </p:sp>
       <p:sp>
         <p:nvSpPr>
@@ -9133,240 +8060,39 @@
         </p:nvSpPr>
         <p:spPr>
           <a:xfrm>
-            <a:off x="8001000" y="3511296"/>
-            <a:ext cx="646176" cy="310896"/>
-          </a:xfrm>
-          <a:prstGeom prst="rect">
-            <a:avLst/>
-          </a:prstGeom>
-          <a:noFill/>
-          <a:ln/>
-        </p:spPr>
-        <p:txBody>
-          <a:bodyPr wrap="square" lIns="0" tIns="0" rIns="0" bIns="0" rtlCol="0" anchor="ctr">
+            <a:off x="7818120" y="3300984"/>
+            <a:ext cx="3090672" cy="877824"/>
+          </a:xfrm>
+          <a:prstGeom prst="rect">
+            <a:avLst/>
+          </a:prstGeom>
+          <a:noFill/>
+          <a:ln/>
+        </p:spPr>
+        <p:txBody>
+          <a:bodyPr wrap="square" lIns="254" tIns="254" rIns="254" bIns="254" rtlCol="0" anchor="t">
             <a:normAutofit/>
           </a:bodyPr>
           <a:lstStyle/>
           <a:p>
-            <a:pPr algn="ctr" indent="0" marL="0">
-              <a:buNone/>
-            </a:pPr>
-            <a:r>
-              <a:rPr lang="en-US" sz="1500" b="1" dirty="0">
-                <a:solidFill>
-                  <a:srgbClr val="FFFFFF"/>
-                </a:solidFill>
-                <a:latin typeface="Aptos" pitchFamily="34" charset="0"/>
-                <a:ea typeface="Aptos" pitchFamily="34" charset="-122"/>
-                <a:cs typeface="Aptos" pitchFamily="34" charset="-120"/>
-              </a:rPr>
-              <a:t>Plan</a:t>
-            </a:r>
-            <a:endParaRPr lang="en-US" sz="1500" dirty="0"/>
+            <a:r>
+              <a:rPr lang="en-US" sz="1380" dirty="0">
+                <a:solidFill>
+                  <a:srgbClr val="17364A"/>
+                </a:solidFill>
+                <a:latin typeface="Aptos" pitchFamily="34" charset="0"/>
+                <a:ea typeface="Aptos" pitchFamily="34" charset="-122"/>
+                <a:cs typeface="Aptos" pitchFamily="34" charset="-120"/>
+              </a:rPr>
+              <a:t>AI adoption plan; stakeholder map; communication plan; training plan; feedback and.</a:t>
+            </a:r>
+            <a:endParaRPr lang="en-US" sz="1380" dirty="0"/>
           </a:p>
         </p:txBody>
       </p:sp>
       <p:sp>
         <p:nvSpPr>
           <p:cNvPr id="16" name="Shape 14"/>
-          <p:cNvSpPr/>
-          <p:nvPr/>
-        </p:nvSpPr>
-        <p:spPr>
-          <a:xfrm>
-            <a:off x="8976360" y="3319272"/>
-            <a:ext cx="792480" cy="749808"/>
-          </a:xfrm>
-          <a:prstGeom prst="roundRect">
-            <a:avLst>
-              <a:gd name="adj" fmla="val 14634"/>
-            </a:avLst>
-          </a:prstGeom>
-          <a:solidFill>
-            <a:srgbClr val="2F8A28"/>
-          </a:solidFill>
-          <a:ln w="12700">
-            <a:solidFill>
-              <a:srgbClr val="2F8A28"/>
-            </a:solidFill>
-            <a:prstDash val="solid"/>
-          </a:ln>
-        </p:spPr>
-      </p:sp>
-      <p:sp>
-        <p:nvSpPr>
-          <p:cNvPr id="17" name="Text 15"/>
-          <p:cNvSpPr/>
-          <p:nvPr/>
-        </p:nvSpPr>
-        <p:spPr>
-          <a:xfrm>
-            <a:off x="9049512" y="3511296"/>
-            <a:ext cx="646176" cy="310896"/>
-          </a:xfrm>
-          <a:prstGeom prst="rect">
-            <a:avLst/>
-          </a:prstGeom>
-          <a:noFill/>
-          <a:ln/>
-        </p:spPr>
-        <p:txBody>
-          <a:bodyPr wrap="square" lIns="0" tIns="0" rIns="0" bIns="0" rtlCol="0" anchor="ctr">
-            <a:normAutofit/>
-          </a:bodyPr>
-          <a:lstStyle/>
-          <a:p>
-            <a:pPr algn="ctr" indent="0" marL="0">
-              <a:buNone/>
-            </a:pPr>
-            <a:r>
-              <a:rPr lang="en-US" sz="1500" b="1" dirty="0">
-                <a:solidFill>
-                  <a:srgbClr val="FFFFFF"/>
-                </a:solidFill>
-                <a:latin typeface="Aptos" pitchFamily="34" charset="0"/>
-                <a:ea typeface="Aptos" pitchFamily="34" charset="-122"/>
-                <a:cs typeface="Aptos" pitchFamily="34" charset="-120"/>
-              </a:rPr>
-              <a:t>Do</a:t>
-            </a:r>
-            <a:endParaRPr lang="en-US" sz="1500" dirty="0"/>
-          </a:p>
-        </p:txBody>
-      </p:sp>
-      <p:sp>
-        <p:nvSpPr>
-          <p:cNvPr id="18" name="Shape 16"/>
-          <p:cNvSpPr/>
-          <p:nvPr/>
-        </p:nvSpPr>
-        <p:spPr>
-          <a:xfrm>
-            <a:off x="10024872" y="3319272"/>
-            <a:ext cx="792480" cy="749808"/>
-          </a:xfrm>
-          <a:prstGeom prst="roundRect">
-            <a:avLst>
-              <a:gd name="adj" fmla="val 14634"/>
-            </a:avLst>
-          </a:prstGeom>
-          <a:solidFill>
-            <a:srgbClr val="D69A2D"/>
-          </a:solidFill>
-          <a:ln w="12700">
-            <a:solidFill>
-              <a:srgbClr val="D69A2D"/>
-            </a:solidFill>
-            <a:prstDash val="solid"/>
-          </a:ln>
-        </p:spPr>
-      </p:sp>
-      <p:sp>
-        <p:nvSpPr>
-          <p:cNvPr id="19" name="Text 17"/>
-          <p:cNvSpPr/>
-          <p:nvPr/>
-        </p:nvSpPr>
-        <p:spPr>
-          <a:xfrm>
-            <a:off x="10098024" y="3511296"/>
-            <a:ext cx="646176" cy="310896"/>
-          </a:xfrm>
-          <a:prstGeom prst="rect">
-            <a:avLst/>
-          </a:prstGeom>
-          <a:noFill/>
-          <a:ln/>
-        </p:spPr>
-        <p:txBody>
-          <a:bodyPr wrap="square" lIns="0" tIns="0" rIns="0" bIns="0" rtlCol="0" anchor="ctr">
-            <a:normAutofit/>
-          </a:bodyPr>
-          <a:lstStyle/>
-          <a:p>
-            <a:pPr algn="ctr" indent="0" marL="0">
-              <a:buNone/>
-            </a:pPr>
-            <a:r>
-              <a:rPr lang="en-US" sz="1500" b="1" dirty="0">
-                <a:solidFill>
-                  <a:srgbClr val="FFFFFF"/>
-                </a:solidFill>
-                <a:latin typeface="Aptos" pitchFamily="34" charset="0"/>
-                <a:ea typeface="Aptos" pitchFamily="34" charset="-122"/>
-                <a:cs typeface="Aptos" pitchFamily="34" charset="-120"/>
-              </a:rPr>
-              <a:t>Review</a:t>
-            </a:r>
-            <a:endParaRPr lang="en-US" sz="1500" dirty="0"/>
-          </a:p>
-        </p:txBody>
-      </p:sp>
-      <p:sp>
-        <p:nvSpPr>
-          <p:cNvPr id="20" name="Shape 18"/>
-          <p:cNvSpPr/>
-          <p:nvPr/>
-        </p:nvSpPr>
-        <p:spPr>
-          <a:xfrm>
-            <a:off x="8293608" y="4389120"/>
-            <a:ext cx="2157984" cy="0"/>
-          </a:xfrm>
-          <a:prstGeom prst="line">
-            <a:avLst/>
-          </a:prstGeom>
-          <a:noFill/>
-          <a:ln w="25400">
-            <a:solidFill>
-              <a:srgbClr val="8ABBD8"/>
-            </a:solidFill>
-            <a:prstDash val="solid"/>
-          </a:ln>
-        </p:spPr>
-      </p:sp>
-      <p:sp>
-        <p:nvSpPr>
-          <p:cNvPr id="21" name="Text 19"/>
-          <p:cNvSpPr/>
-          <p:nvPr/>
-        </p:nvSpPr>
-        <p:spPr>
-          <a:xfrm>
-            <a:off x="7909560" y="3977640"/>
-            <a:ext cx="2926080" cy="182880"/>
-          </a:xfrm>
-          <a:prstGeom prst="rect">
-            <a:avLst/>
-          </a:prstGeom>
-          <a:noFill/>
-          <a:ln/>
-        </p:spPr>
-        <p:txBody>
-          <a:bodyPr wrap="square" lIns="0" tIns="0" rIns="0" bIns="0" rtlCol="0" anchor="ctr"/>
-          <a:lstStyle/>
-          <a:p>
-            <a:pPr algn="ctr" indent="0" marL="0">
-              <a:buNone/>
-            </a:pPr>
-            <a:r>
-              <a:rPr lang="en-US" sz="1000" dirty="0">
-                <a:solidFill>
-                  <a:srgbClr val="003A63"/>
-                </a:solidFill>
-                <a:latin typeface="Aptos" pitchFamily="34" charset="0"/>
-                <a:ea typeface="Aptos" pitchFamily="34" charset="-122"/>
-                <a:cs typeface="Aptos" pitchFamily="34" charset="-120"/>
-              </a:rPr>
-              <a:t>Dependencies visible</a:t>
-            </a:r>
-            <a:endParaRPr lang="en-US" sz="1000" dirty="0"/>
-          </a:p>
-        </p:txBody>
-      </p:sp>
-      <p:sp>
-        <p:nvSpPr>
-          <p:cNvPr id="22" name="Shape 20"/>
           <p:cNvSpPr/>
           <p:nvPr/>
         </p:nvSpPr>
@@ -9393,7 +8119,7 @@
       </p:sp>
       <p:sp>
         <p:nvSpPr>
-          <p:cNvPr id="23" name="Text 21"/>
+          <p:cNvPr id="17" name="Text 15"/>
           <p:cNvSpPr/>
           <p:nvPr/>
         </p:nvSpPr>
@@ -9432,7 +8158,7 @@
       </p:sp>
       <p:sp>
         <p:nvSpPr>
-          <p:cNvPr id="24" name="Text 22"/>
+          <p:cNvPr id="18" name="Text 16"/>
           <p:cNvSpPr/>
           <p:nvPr/>
         </p:nvSpPr>
@@ -9940,13 +8666,11 @@
             </a:avLst>
           </a:prstGeom>
           <a:solidFill>
-            <a:srgbClr val="FFFFFF">
-              <a:alpha val="88000"/>
-            </a:srgbClr>
+            <a:srgbClr val="FFFFFF"/>
           </a:solidFill>
           <a:ln w="12700">
             <a:solidFill>
-              <a:srgbClr val="D6E8F2"/>
+              <a:srgbClr val="B9D7E6"/>
             </a:solidFill>
             <a:prstDash val="solid"/>
           </a:ln>
@@ -9954,30 +8678,42 @@
       </p:sp>
       <p:sp>
         <p:nvSpPr>
-          <p:cNvPr id="14" name="Shape 12"/>
-          <p:cNvSpPr/>
-          <p:nvPr/>
-        </p:nvSpPr>
-        <p:spPr>
-          <a:xfrm>
-            <a:off x="7927848" y="3319272"/>
-            <a:ext cx="792480" cy="749808"/>
-          </a:xfrm>
-          <a:prstGeom prst="roundRect">
-            <a:avLst>
-              <a:gd name="adj" fmla="val 14634"/>
-            </a:avLst>
-          </a:prstGeom>
-          <a:solidFill>
-            <a:srgbClr val="0068B7"/>
-          </a:solidFill>
-          <a:ln w="12700">
-            <a:solidFill>
-              <a:srgbClr val="0068B7"/>
-            </a:solidFill>
-            <a:prstDash val="solid"/>
-          </a:ln>
-        </p:spPr>
+          <p:cNvPr id="14" name="Text 12"/>
+          <p:cNvSpPr/>
+          <p:nvPr/>
+        </p:nvSpPr>
+        <p:spPr>
+          <a:xfrm>
+            <a:off x="7799832" y="2935224"/>
+            <a:ext cx="3145536" cy="256032"/>
+          </a:xfrm>
+          <a:prstGeom prst="rect">
+            <a:avLst/>
+          </a:prstGeom>
+          <a:noFill/>
+          <a:ln/>
+        </p:spPr>
+        <p:txBody>
+          <a:bodyPr wrap="square" lIns="0" tIns="0" rIns="0" bIns="0" rtlCol="0" anchor="ctr"/>
+          <a:lstStyle/>
+          <a:p>
+            <a:pPr indent="0" marL="0">
+              <a:buNone/>
+            </a:pPr>
+            <a:r>
+              <a:rPr lang="en-US" sz="1300" b="1" dirty="0">
+                <a:solidFill>
+                  <a:srgbClr val="0068B7"/>
+                </a:solidFill>
+                <a:latin typeface="Aptos" pitchFamily="34" charset="0"/>
+                <a:ea typeface="Aptos" pitchFamily="34" charset="-122"/>
+                <a:cs typeface="Aptos" pitchFamily="34" charset="-120"/>
+              </a:rPr>
+              <a:t>Concept checkpoints</a:t>
+            </a:r>
+            <a:endParaRPr lang="en-US" sz="1300" dirty="0"/>
+          </a:p>
+        </p:txBody>
       </p:sp>
       <p:sp>
         <p:nvSpPr>
@@ -9987,240 +8723,67 @@
         </p:nvSpPr>
         <p:spPr>
           <a:xfrm>
-            <a:off x="8001000" y="3511296"/>
-            <a:ext cx="646176" cy="310896"/>
-          </a:xfrm>
-          <a:prstGeom prst="rect">
-            <a:avLst/>
-          </a:prstGeom>
-          <a:noFill/>
-          <a:ln/>
-        </p:spPr>
-        <p:txBody>
-          <a:bodyPr wrap="square" lIns="0" tIns="0" rIns="0" bIns="0" rtlCol="0" anchor="ctr">
+            <a:off x="7818120" y="3300984"/>
+            <a:ext cx="3090672" cy="877824"/>
+          </a:xfrm>
+          <a:prstGeom prst="rect">
+            <a:avLst/>
+          </a:prstGeom>
+          <a:noFill/>
+          <a:ln/>
+        </p:spPr>
+        <p:txBody>
+          <a:bodyPr wrap="square" lIns="254" tIns="254" rIns="254" bIns="254" rtlCol="0" anchor="t">
             <a:normAutofit/>
           </a:bodyPr>
           <a:lstStyle/>
           <a:p>
-            <a:pPr algn="ctr" indent="0" marL="0">
-              <a:buNone/>
-            </a:pPr>
-            <a:r>
-              <a:rPr lang="en-US" sz="1500" b="1" dirty="0">
-                <a:solidFill>
-                  <a:srgbClr val="FFFFFF"/>
-                </a:solidFill>
-                <a:latin typeface="Aptos" pitchFamily="34" charset="0"/>
-                <a:ea typeface="Aptos" pitchFamily="34" charset="-122"/>
-                <a:cs typeface="Aptos" pitchFamily="34" charset="-120"/>
-              </a:rPr>
-              <a:t>Plan</a:t>
-            </a:r>
-            <a:endParaRPr lang="en-US" sz="1500" dirty="0"/>
+            <a:r>
+              <a:rPr lang="en-US" sz="1380" dirty="0">
+                <a:solidFill>
+                  <a:srgbClr val="17364A"/>
+                </a:solidFill>
+                <a:latin typeface="Aptos" pitchFamily="34" charset="0"/>
+                <a:ea typeface="Aptos" pitchFamily="34" charset="-122"/>
+                <a:cs typeface="Aptos" pitchFamily="34" charset="-120"/>
+              </a:rPr>
+              <a:t>1.</a:t>
+            </a:r>
+            <a:endParaRPr lang="en-US" sz="1380" dirty="0"/>
+          </a:p>
+          <a:p>
+            <a:r>
+              <a:rPr lang="en-US" sz="1380" dirty="0">
+                <a:solidFill>
+                  <a:srgbClr val="17364A"/>
+                </a:solidFill>
+                <a:latin typeface="Aptos" pitchFamily="34" charset="0"/>
+                <a:ea typeface="Aptos" pitchFamily="34" charset="-122"/>
+                <a:cs typeface="Aptos" pitchFamily="34" charset="-120"/>
+              </a:rPr>
+              <a:t>What is the strongest reason this module topic belongs in AI leadership and governance.</a:t>
+            </a:r>
+            <a:endParaRPr lang="en-US" sz="1380" dirty="0"/>
+          </a:p>
+          <a:p>
+            <a:r>
+              <a:rPr lang="en-US" sz="1380" dirty="0">
+                <a:solidFill>
+                  <a:srgbClr val="17364A"/>
+                </a:solidFill>
+                <a:latin typeface="Aptos" pitchFamily="34" charset="0"/>
+                <a:ea typeface="Aptos" pitchFamily="34" charset="-122"/>
+                <a:cs typeface="Aptos" pitchFamily="34" charset="-120"/>
+              </a:rPr>
+              <a:t>2.</a:t>
+            </a:r>
+            <a:endParaRPr lang="en-US" sz="1380" dirty="0"/>
           </a:p>
         </p:txBody>
       </p:sp>
       <p:sp>
         <p:nvSpPr>
           <p:cNvPr id="16" name="Shape 14"/>
-          <p:cNvSpPr/>
-          <p:nvPr/>
-        </p:nvSpPr>
-        <p:spPr>
-          <a:xfrm>
-            <a:off x="8976360" y="3319272"/>
-            <a:ext cx="792480" cy="749808"/>
-          </a:xfrm>
-          <a:prstGeom prst="roundRect">
-            <a:avLst>
-              <a:gd name="adj" fmla="val 14634"/>
-            </a:avLst>
-          </a:prstGeom>
-          <a:solidFill>
-            <a:srgbClr val="2F8A28"/>
-          </a:solidFill>
-          <a:ln w="12700">
-            <a:solidFill>
-              <a:srgbClr val="2F8A28"/>
-            </a:solidFill>
-            <a:prstDash val="solid"/>
-          </a:ln>
-        </p:spPr>
-      </p:sp>
-      <p:sp>
-        <p:nvSpPr>
-          <p:cNvPr id="17" name="Text 15"/>
-          <p:cNvSpPr/>
-          <p:nvPr/>
-        </p:nvSpPr>
-        <p:spPr>
-          <a:xfrm>
-            <a:off x="9049512" y="3511296"/>
-            <a:ext cx="646176" cy="310896"/>
-          </a:xfrm>
-          <a:prstGeom prst="rect">
-            <a:avLst/>
-          </a:prstGeom>
-          <a:noFill/>
-          <a:ln/>
-        </p:spPr>
-        <p:txBody>
-          <a:bodyPr wrap="square" lIns="0" tIns="0" rIns="0" bIns="0" rtlCol="0" anchor="ctr">
-            <a:normAutofit/>
-          </a:bodyPr>
-          <a:lstStyle/>
-          <a:p>
-            <a:pPr algn="ctr" indent="0" marL="0">
-              <a:buNone/>
-            </a:pPr>
-            <a:r>
-              <a:rPr lang="en-US" sz="1500" b="1" dirty="0">
-                <a:solidFill>
-                  <a:srgbClr val="FFFFFF"/>
-                </a:solidFill>
-                <a:latin typeface="Aptos" pitchFamily="34" charset="0"/>
-                <a:ea typeface="Aptos" pitchFamily="34" charset="-122"/>
-                <a:cs typeface="Aptos" pitchFamily="34" charset="-120"/>
-              </a:rPr>
-              <a:t>Do</a:t>
-            </a:r>
-            <a:endParaRPr lang="en-US" sz="1500" dirty="0"/>
-          </a:p>
-        </p:txBody>
-      </p:sp>
-      <p:sp>
-        <p:nvSpPr>
-          <p:cNvPr id="18" name="Shape 16"/>
-          <p:cNvSpPr/>
-          <p:nvPr/>
-        </p:nvSpPr>
-        <p:spPr>
-          <a:xfrm>
-            <a:off x="10024872" y="3319272"/>
-            <a:ext cx="792480" cy="749808"/>
-          </a:xfrm>
-          <a:prstGeom prst="roundRect">
-            <a:avLst>
-              <a:gd name="adj" fmla="val 14634"/>
-            </a:avLst>
-          </a:prstGeom>
-          <a:solidFill>
-            <a:srgbClr val="D69A2D"/>
-          </a:solidFill>
-          <a:ln w="12700">
-            <a:solidFill>
-              <a:srgbClr val="D69A2D"/>
-            </a:solidFill>
-            <a:prstDash val="solid"/>
-          </a:ln>
-        </p:spPr>
-      </p:sp>
-      <p:sp>
-        <p:nvSpPr>
-          <p:cNvPr id="19" name="Text 17"/>
-          <p:cNvSpPr/>
-          <p:nvPr/>
-        </p:nvSpPr>
-        <p:spPr>
-          <a:xfrm>
-            <a:off x="10098024" y="3511296"/>
-            <a:ext cx="646176" cy="310896"/>
-          </a:xfrm>
-          <a:prstGeom prst="rect">
-            <a:avLst/>
-          </a:prstGeom>
-          <a:noFill/>
-          <a:ln/>
-        </p:spPr>
-        <p:txBody>
-          <a:bodyPr wrap="square" lIns="0" tIns="0" rIns="0" bIns="0" rtlCol="0" anchor="ctr">
-            <a:normAutofit/>
-          </a:bodyPr>
-          <a:lstStyle/>
-          <a:p>
-            <a:pPr algn="ctr" indent="0" marL="0">
-              <a:buNone/>
-            </a:pPr>
-            <a:r>
-              <a:rPr lang="en-US" sz="1500" b="1" dirty="0">
-                <a:solidFill>
-                  <a:srgbClr val="FFFFFF"/>
-                </a:solidFill>
-                <a:latin typeface="Aptos" pitchFamily="34" charset="0"/>
-                <a:ea typeface="Aptos" pitchFamily="34" charset="-122"/>
-                <a:cs typeface="Aptos" pitchFamily="34" charset="-120"/>
-              </a:rPr>
-              <a:t>Review</a:t>
-            </a:r>
-            <a:endParaRPr lang="en-US" sz="1500" dirty="0"/>
-          </a:p>
-        </p:txBody>
-      </p:sp>
-      <p:sp>
-        <p:nvSpPr>
-          <p:cNvPr id="20" name="Shape 18"/>
-          <p:cNvSpPr/>
-          <p:nvPr/>
-        </p:nvSpPr>
-        <p:spPr>
-          <a:xfrm>
-            <a:off x="8293608" y="4389120"/>
-            <a:ext cx="2157984" cy="0"/>
-          </a:xfrm>
-          <a:prstGeom prst="line">
-            <a:avLst/>
-          </a:prstGeom>
-          <a:noFill/>
-          <a:ln w="25400">
-            <a:solidFill>
-              <a:srgbClr val="8ABBD8"/>
-            </a:solidFill>
-            <a:prstDash val="solid"/>
-          </a:ln>
-        </p:spPr>
-      </p:sp>
-      <p:sp>
-        <p:nvSpPr>
-          <p:cNvPr id="21" name="Text 19"/>
-          <p:cNvSpPr/>
-          <p:nvPr/>
-        </p:nvSpPr>
-        <p:spPr>
-          <a:xfrm>
-            <a:off x="7909560" y="3977640"/>
-            <a:ext cx="2926080" cy="182880"/>
-          </a:xfrm>
-          <a:prstGeom prst="rect">
-            <a:avLst/>
-          </a:prstGeom>
-          <a:noFill/>
-          <a:ln/>
-        </p:spPr>
-        <p:txBody>
-          <a:bodyPr wrap="square" lIns="0" tIns="0" rIns="0" bIns="0" rtlCol="0" anchor="ctr"/>
-          <a:lstStyle/>
-          <a:p>
-            <a:pPr algn="ctr" indent="0" marL="0">
-              <a:buNone/>
-            </a:pPr>
-            <a:r>
-              <a:rPr lang="en-US" sz="1000" dirty="0">
-                <a:solidFill>
-                  <a:srgbClr val="003A63"/>
-                </a:solidFill>
-                <a:latin typeface="Aptos" pitchFamily="34" charset="0"/>
-                <a:ea typeface="Aptos" pitchFamily="34" charset="-122"/>
-                <a:cs typeface="Aptos" pitchFamily="34" charset="-120"/>
-              </a:rPr>
-              <a:t>Dependencies visible</a:t>
-            </a:r>
-            <a:endParaRPr lang="en-US" sz="1000" dirty="0"/>
-          </a:p>
-        </p:txBody>
-      </p:sp>
-      <p:sp>
-        <p:nvSpPr>
-          <p:cNvPr id="22" name="Shape 20"/>
           <p:cNvSpPr/>
           <p:nvPr/>
         </p:nvSpPr>
@@ -10247,7 +8810,7 @@
       </p:sp>
       <p:sp>
         <p:nvSpPr>
-          <p:cNvPr id="23" name="Text 21"/>
+          <p:cNvPr id="17" name="Text 15"/>
           <p:cNvSpPr/>
           <p:nvPr/>
         </p:nvSpPr>
@@ -10286,7 +8849,7 @@
       </p:sp>
       <p:sp>
         <p:nvSpPr>
-          <p:cNvPr id="24" name="Text 22"/>
+          <p:cNvPr id="18" name="Text 16"/>
           <p:cNvSpPr/>
           <p:nvPr/>
         </p:nvSpPr>
@@ -10794,13 +9357,11 @@
             </a:avLst>
           </a:prstGeom>
           <a:solidFill>
-            <a:srgbClr val="FFFFFF">
-              <a:alpha val="88000"/>
-            </a:srgbClr>
+            <a:srgbClr val="FFFFFF"/>
           </a:solidFill>
           <a:ln w="12700">
             <a:solidFill>
-              <a:srgbClr val="D6E8F2"/>
+              <a:srgbClr val="B9D7E6"/>
             </a:solidFill>
             <a:prstDash val="solid"/>
           </a:ln>
@@ -10808,30 +9369,42 @@
       </p:sp>
       <p:sp>
         <p:nvSpPr>
-          <p:cNvPr id="14" name="Shape 12"/>
-          <p:cNvSpPr/>
-          <p:nvPr/>
-        </p:nvSpPr>
-        <p:spPr>
-          <a:xfrm>
-            <a:off x="7927848" y="3319272"/>
-            <a:ext cx="792480" cy="749808"/>
-          </a:xfrm>
-          <a:prstGeom prst="roundRect">
-            <a:avLst>
-              <a:gd name="adj" fmla="val 14634"/>
-            </a:avLst>
-          </a:prstGeom>
-          <a:solidFill>
-            <a:srgbClr val="0068B7"/>
-          </a:solidFill>
-          <a:ln w="12700">
-            <a:solidFill>
-              <a:srgbClr val="0068B7"/>
-            </a:solidFill>
-            <a:prstDash val="solid"/>
-          </a:ln>
-        </p:spPr>
+          <p:cNvPr id="14" name="Text 12"/>
+          <p:cNvSpPr/>
+          <p:nvPr/>
+        </p:nvSpPr>
+        <p:spPr>
+          <a:xfrm>
+            <a:off x="7799832" y="2935224"/>
+            <a:ext cx="3145536" cy="256032"/>
+          </a:xfrm>
+          <a:prstGeom prst="rect">
+            <a:avLst/>
+          </a:prstGeom>
+          <a:noFill/>
+          <a:ln/>
+        </p:spPr>
+        <p:txBody>
+          <a:bodyPr wrap="square" lIns="0" tIns="0" rIns="0" bIns="0" rtlCol="0" anchor="ctr"/>
+          <a:lstStyle/>
+          <a:p>
+            <a:pPr indent="0" marL="0">
+              <a:buNone/>
+            </a:pPr>
+            <a:r>
+              <a:rPr lang="en-US" sz="1300" b="1" dirty="0">
+                <a:solidFill>
+                  <a:srgbClr val="0068B7"/>
+                </a:solidFill>
+                <a:latin typeface="Aptos" pitchFamily="34" charset="0"/>
+                <a:ea typeface="Aptos" pitchFamily="34" charset="-122"/>
+                <a:cs typeface="Aptos" pitchFamily="34" charset="-120"/>
+              </a:rPr>
+              <a:t>Concept checkpoints</a:t>
+            </a:r>
+            <a:endParaRPr lang="en-US" sz="1300" dirty="0"/>
+          </a:p>
+        </p:txBody>
       </p:sp>
       <p:sp>
         <p:nvSpPr>
@@ -10841,240 +9414,67 @@
         </p:nvSpPr>
         <p:spPr>
           <a:xfrm>
-            <a:off x="8001000" y="3511296"/>
-            <a:ext cx="646176" cy="310896"/>
-          </a:xfrm>
-          <a:prstGeom prst="rect">
-            <a:avLst/>
-          </a:prstGeom>
-          <a:noFill/>
-          <a:ln/>
-        </p:spPr>
-        <p:txBody>
-          <a:bodyPr wrap="square" lIns="0" tIns="0" rIns="0" bIns="0" rtlCol="0" anchor="ctr">
+            <a:off x="7818120" y="3300984"/>
+            <a:ext cx="3090672" cy="877824"/>
+          </a:xfrm>
+          <a:prstGeom prst="rect">
+            <a:avLst/>
+          </a:prstGeom>
+          <a:noFill/>
+          <a:ln/>
+        </p:spPr>
+        <p:txBody>
+          <a:bodyPr wrap="square" lIns="254" tIns="254" rIns="254" bIns="254" rtlCol="0" anchor="t">
             <a:normAutofit/>
           </a:bodyPr>
           <a:lstStyle/>
           <a:p>
-            <a:pPr algn="ctr" indent="0" marL="0">
-              <a:buNone/>
-            </a:pPr>
-            <a:r>
-              <a:rPr lang="en-US" sz="1500" b="1" dirty="0">
-                <a:solidFill>
-                  <a:srgbClr val="FFFFFF"/>
-                </a:solidFill>
-                <a:latin typeface="Aptos" pitchFamily="34" charset="0"/>
-                <a:ea typeface="Aptos" pitchFamily="34" charset="-122"/>
-                <a:cs typeface="Aptos" pitchFamily="34" charset="-120"/>
-              </a:rPr>
-              <a:t>Plan</a:t>
-            </a:r>
-            <a:endParaRPr lang="en-US" sz="1500" dirty="0"/>
+            <a:r>
+              <a:rPr lang="en-US" sz="1380" dirty="0">
+                <a:solidFill>
+                  <a:srgbClr val="17364A"/>
+                </a:solidFill>
+                <a:latin typeface="Aptos" pitchFamily="34" charset="0"/>
+                <a:ea typeface="Aptos" pitchFamily="34" charset="-122"/>
+                <a:cs typeface="Aptos" pitchFamily="34" charset="-120"/>
+              </a:rPr>
+              <a:t>NIST Artificial Intelligence Risk Management Framework (AI RMF 1.0):.</a:t>
+            </a:r>
+            <a:endParaRPr lang="en-US" sz="1380" dirty="0"/>
+          </a:p>
+          <a:p>
+            <a:r>
+              <a:rPr lang="en-US" sz="1380" dirty="0">
+                <a:solidFill>
+                  <a:srgbClr val="17364A"/>
+                </a:solidFill>
+                <a:latin typeface="Aptos" pitchFamily="34" charset="0"/>
+                <a:ea typeface="Aptos" pitchFamily="34" charset="-122"/>
+                <a:cs typeface="Aptos" pitchFamily="34" charset="-120"/>
+              </a:rPr>
+              <a:t>CDC Public Health Data Strategy and Data Modernization resources:.</a:t>
+            </a:r>
+            <a:endParaRPr lang="en-US" sz="1380" dirty="0"/>
+          </a:p>
+          <a:p>
+            <a:r>
+              <a:rPr lang="en-US" sz="1380" dirty="0">
+                <a:solidFill>
+                  <a:srgbClr val="17364A"/>
+                </a:solidFill>
+                <a:latin typeface="Aptos" pitchFamily="34" charset="0"/>
+                <a:ea typeface="Aptos" pitchFamily="34" charset="-122"/>
+                <a:cs typeface="Aptos" pitchFamily="34" charset="-120"/>
+              </a:rPr>
+              <a:t>WHO Ethics and Governance of Artificial Intelligence for Health:.</a:t>
+            </a:r>
+            <a:endParaRPr lang="en-US" sz="1380" dirty="0"/>
           </a:p>
         </p:txBody>
       </p:sp>
       <p:sp>
         <p:nvSpPr>
           <p:cNvPr id="16" name="Shape 14"/>
-          <p:cNvSpPr/>
-          <p:nvPr/>
-        </p:nvSpPr>
-        <p:spPr>
-          <a:xfrm>
-            <a:off x="8976360" y="3319272"/>
-            <a:ext cx="792480" cy="749808"/>
-          </a:xfrm>
-          <a:prstGeom prst="roundRect">
-            <a:avLst>
-              <a:gd name="adj" fmla="val 14634"/>
-            </a:avLst>
-          </a:prstGeom>
-          <a:solidFill>
-            <a:srgbClr val="2F8A28"/>
-          </a:solidFill>
-          <a:ln w="12700">
-            <a:solidFill>
-              <a:srgbClr val="2F8A28"/>
-            </a:solidFill>
-            <a:prstDash val="solid"/>
-          </a:ln>
-        </p:spPr>
-      </p:sp>
-      <p:sp>
-        <p:nvSpPr>
-          <p:cNvPr id="17" name="Text 15"/>
-          <p:cNvSpPr/>
-          <p:nvPr/>
-        </p:nvSpPr>
-        <p:spPr>
-          <a:xfrm>
-            <a:off x="9049512" y="3511296"/>
-            <a:ext cx="646176" cy="310896"/>
-          </a:xfrm>
-          <a:prstGeom prst="rect">
-            <a:avLst/>
-          </a:prstGeom>
-          <a:noFill/>
-          <a:ln/>
-        </p:spPr>
-        <p:txBody>
-          <a:bodyPr wrap="square" lIns="0" tIns="0" rIns="0" bIns="0" rtlCol="0" anchor="ctr">
-            <a:normAutofit/>
-          </a:bodyPr>
-          <a:lstStyle/>
-          <a:p>
-            <a:pPr algn="ctr" indent="0" marL="0">
-              <a:buNone/>
-            </a:pPr>
-            <a:r>
-              <a:rPr lang="en-US" sz="1500" b="1" dirty="0">
-                <a:solidFill>
-                  <a:srgbClr val="FFFFFF"/>
-                </a:solidFill>
-                <a:latin typeface="Aptos" pitchFamily="34" charset="0"/>
-                <a:ea typeface="Aptos" pitchFamily="34" charset="-122"/>
-                <a:cs typeface="Aptos" pitchFamily="34" charset="-120"/>
-              </a:rPr>
-              <a:t>Do</a:t>
-            </a:r>
-            <a:endParaRPr lang="en-US" sz="1500" dirty="0"/>
-          </a:p>
-        </p:txBody>
-      </p:sp>
-      <p:sp>
-        <p:nvSpPr>
-          <p:cNvPr id="18" name="Shape 16"/>
-          <p:cNvSpPr/>
-          <p:nvPr/>
-        </p:nvSpPr>
-        <p:spPr>
-          <a:xfrm>
-            <a:off x="10024872" y="3319272"/>
-            <a:ext cx="792480" cy="749808"/>
-          </a:xfrm>
-          <a:prstGeom prst="roundRect">
-            <a:avLst>
-              <a:gd name="adj" fmla="val 14634"/>
-            </a:avLst>
-          </a:prstGeom>
-          <a:solidFill>
-            <a:srgbClr val="D69A2D"/>
-          </a:solidFill>
-          <a:ln w="12700">
-            <a:solidFill>
-              <a:srgbClr val="D69A2D"/>
-            </a:solidFill>
-            <a:prstDash val="solid"/>
-          </a:ln>
-        </p:spPr>
-      </p:sp>
-      <p:sp>
-        <p:nvSpPr>
-          <p:cNvPr id="19" name="Text 17"/>
-          <p:cNvSpPr/>
-          <p:nvPr/>
-        </p:nvSpPr>
-        <p:spPr>
-          <a:xfrm>
-            <a:off x="10098024" y="3511296"/>
-            <a:ext cx="646176" cy="310896"/>
-          </a:xfrm>
-          <a:prstGeom prst="rect">
-            <a:avLst/>
-          </a:prstGeom>
-          <a:noFill/>
-          <a:ln/>
-        </p:spPr>
-        <p:txBody>
-          <a:bodyPr wrap="square" lIns="0" tIns="0" rIns="0" bIns="0" rtlCol="0" anchor="ctr">
-            <a:normAutofit/>
-          </a:bodyPr>
-          <a:lstStyle/>
-          <a:p>
-            <a:pPr algn="ctr" indent="0" marL="0">
-              <a:buNone/>
-            </a:pPr>
-            <a:r>
-              <a:rPr lang="en-US" sz="1500" b="1" dirty="0">
-                <a:solidFill>
-                  <a:srgbClr val="FFFFFF"/>
-                </a:solidFill>
-                <a:latin typeface="Aptos" pitchFamily="34" charset="0"/>
-                <a:ea typeface="Aptos" pitchFamily="34" charset="-122"/>
-                <a:cs typeface="Aptos" pitchFamily="34" charset="-120"/>
-              </a:rPr>
-              <a:t>Review</a:t>
-            </a:r>
-            <a:endParaRPr lang="en-US" sz="1500" dirty="0"/>
-          </a:p>
-        </p:txBody>
-      </p:sp>
-      <p:sp>
-        <p:nvSpPr>
-          <p:cNvPr id="20" name="Shape 18"/>
-          <p:cNvSpPr/>
-          <p:nvPr/>
-        </p:nvSpPr>
-        <p:spPr>
-          <a:xfrm>
-            <a:off x="8293608" y="4389120"/>
-            <a:ext cx="2157984" cy="0"/>
-          </a:xfrm>
-          <a:prstGeom prst="line">
-            <a:avLst/>
-          </a:prstGeom>
-          <a:noFill/>
-          <a:ln w="25400">
-            <a:solidFill>
-              <a:srgbClr val="8ABBD8"/>
-            </a:solidFill>
-            <a:prstDash val="solid"/>
-          </a:ln>
-        </p:spPr>
-      </p:sp>
-      <p:sp>
-        <p:nvSpPr>
-          <p:cNvPr id="21" name="Text 19"/>
-          <p:cNvSpPr/>
-          <p:nvPr/>
-        </p:nvSpPr>
-        <p:spPr>
-          <a:xfrm>
-            <a:off x="7909560" y="3977640"/>
-            <a:ext cx="2926080" cy="182880"/>
-          </a:xfrm>
-          <a:prstGeom prst="rect">
-            <a:avLst/>
-          </a:prstGeom>
-          <a:noFill/>
-          <a:ln/>
-        </p:spPr>
-        <p:txBody>
-          <a:bodyPr wrap="square" lIns="0" tIns="0" rIns="0" bIns="0" rtlCol="0" anchor="ctr"/>
-          <a:lstStyle/>
-          <a:p>
-            <a:pPr algn="ctr" indent="0" marL="0">
-              <a:buNone/>
-            </a:pPr>
-            <a:r>
-              <a:rPr lang="en-US" sz="1000" dirty="0">
-                <a:solidFill>
-                  <a:srgbClr val="003A63"/>
-                </a:solidFill>
-                <a:latin typeface="Aptos" pitchFamily="34" charset="0"/>
-                <a:ea typeface="Aptos" pitchFamily="34" charset="-122"/>
-                <a:cs typeface="Aptos" pitchFamily="34" charset="-120"/>
-              </a:rPr>
-              <a:t>Dependencies visible</a:t>
-            </a:r>
-            <a:endParaRPr lang="en-US" sz="1000" dirty="0"/>
-          </a:p>
-        </p:txBody>
-      </p:sp>
-      <p:sp>
-        <p:nvSpPr>
-          <p:cNvPr id="22" name="Shape 20"/>
           <p:cNvSpPr/>
           <p:nvPr/>
         </p:nvSpPr>
@@ -11101,7 +9501,7 @@
       </p:sp>
       <p:sp>
         <p:nvSpPr>
-          <p:cNvPr id="23" name="Text 21"/>
+          <p:cNvPr id="17" name="Text 15"/>
           <p:cNvSpPr/>
           <p:nvPr/>
         </p:nvSpPr>
@@ -11140,7 +9540,7 @@
       </p:sp>
       <p:sp>
         <p:nvSpPr>
-          <p:cNvPr id="24" name="Text 22"/>
+          <p:cNvPr id="18" name="Text 16"/>
           <p:cNvSpPr/>
           <p:nvPr/>
         </p:nvSpPr>
@@ -11673,20 +10073,20 @@
         </p:nvSpPr>
         <p:spPr>
           <a:xfrm>
-            <a:off x="7635240" y="3730752"/>
-            <a:ext cx="1033272" cy="749808"/>
+            <a:off x="7909560" y="3675888"/>
+            <a:ext cx="3154680" cy="1691640"/>
           </a:xfrm>
           <a:prstGeom prst="roundRect">
             <a:avLst>
-              <a:gd name="adj" fmla="val 14634"/>
+              <a:gd name="adj" fmla="val 6486"/>
             </a:avLst>
           </a:prstGeom>
           <a:solidFill>
-            <a:srgbClr val="0068B7"/>
+            <a:srgbClr val="FFFFFF"/>
           </a:solidFill>
           <a:ln w="12700">
             <a:solidFill>
-              <a:srgbClr val="0068B7"/>
+              <a:srgbClr val="B9D7E6"/>
             </a:solidFill>
             <a:prstDash val="solid"/>
           </a:ln>
@@ -11700,172 +10100,100 @@
         </p:nvSpPr>
         <p:spPr>
           <a:xfrm>
-            <a:off x="7708392" y="3922776"/>
-            <a:ext cx="886968" cy="310896"/>
-          </a:xfrm>
-          <a:prstGeom prst="rect">
-            <a:avLst/>
-          </a:prstGeom>
-          <a:noFill/>
-          <a:ln/>
-        </p:spPr>
-        <p:txBody>
-          <a:bodyPr wrap="square" lIns="0" tIns="0" rIns="0" bIns="0" rtlCol="0" anchor="ctr">
+            <a:off x="8074152" y="3822192"/>
+            <a:ext cx="2825496" cy="256032"/>
+          </a:xfrm>
+          <a:prstGeom prst="rect">
+            <a:avLst/>
+          </a:prstGeom>
+          <a:noFill/>
+          <a:ln/>
+        </p:spPr>
+        <p:txBody>
+          <a:bodyPr wrap="square" lIns="0" tIns="0" rIns="0" bIns="0" rtlCol="0" anchor="ctr"/>
+          <a:lstStyle/>
+          <a:p>
+            <a:pPr indent="0" marL="0">
+              <a:buNone/>
+            </a:pPr>
+            <a:r>
+              <a:rPr lang="en-US" sz="1300" b="1" dirty="0">
+                <a:solidFill>
+                  <a:srgbClr val="0068B7"/>
+                </a:solidFill>
+                <a:latin typeface="Aptos" pitchFamily="34" charset="0"/>
+                <a:ea typeface="Aptos" pitchFamily="34" charset="-122"/>
+                <a:cs typeface="Aptos" pitchFamily="34" charset="-120"/>
+              </a:rPr>
+              <a:t>Learning sequence</a:t>
+            </a:r>
+            <a:endParaRPr lang="en-US" sz="1300" dirty="0"/>
+          </a:p>
+        </p:txBody>
+      </p:sp>
+      <p:sp>
+        <p:nvSpPr>
+          <p:cNvPr id="15" name="Text 13"/>
+          <p:cNvSpPr/>
+          <p:nvPr/>
+        </p:nvSpPr>
+        <p:spPr>
+          <a:xfrm>
+            <a:off x="8092440" y="4187952"/>
+            <a:ext cx="2770632" cy="1033272"/>
+          </a:xfrm>
+          <a:prstGeom prst="rect">
+            <a:avLst/>
+          </a:prstGeom>
+          <a:noFill/>
+          <a:ln/>
+        </p:spPr>
+        <p:txBody>
+          <a:bodyPr wrap="square" lIns="254" tIns="254" rIns="254" bIns="254" rtlCol="0" anchor="t">
             <a:normAutofit/>
           </a:bodyPr>
           <a:lstStyle/>
           <a:p>
-            <a:pPr algn="ctr" indent="0" marL="0">
-              <a:buNone/>
-            </a:pPr>
-            <a:r>
-              <a:rPr lang="en-US" sz="1500" b="1" dirty="0">
-                <a:solidFill>
-                  <a:srgbClr val="FFFFFF"/>
-                </a:solidFill>
-                <a:latin typeface="Aptos" pitchFamily="34" charset="0"/>
-                <a:ea typeface="Aptos" pitchFamily="34" charset="-122"/>
-                <a:cs typeface="Aptos" pitchFamily="34" charset="-120"/>
-              </a:rPr>
-              <a:t>Learn</a:t>
-            </a:r>
-            <a:endParaRPr lang="en-US" sz="1500" dirty="0"/>
-          </a:p>
-        </p:txBody>
-      </p:sp>
-      <p:sp>
-        <p:nvSpPr>
-          <p:cNvPr id="15" name="Shape 13"/>
-          <p:cNvSpPr/>
-          <p:nvPr/>
-        </p:nvSpPr>
-        <p:spPr>
-          <a:xfrm>
-            <a:off x="8924544" y="3730752"/>
-            <a:ext cx="1033272" cy="749808"/>
-          </a:xfrm>
-          <a:prstGeom prst="roundRect">
-            <a:avLst>
-              <a:gd name="adj" fmla="val 14634"/>
-            </a:avLst>
-          </a:prstGeom>
-          <a:solidFill>
-            <a:srgbClr val="2F8A28"/>
-          </a:solidFill>
-          <a:ln w="12700">
-            <a:solidFill>
-              <a:srgbClr val="2F8A28"/>
-            </a:solidFill>
-            <a:prstDash val="solid"/>
-          </a:ln>
-        </p:spPr>
-      </p:sp>
-      <p:sp>
-        <p:nvSpPr>
-          <p:cNvPr id="16" name="Text 14"/>
-          <p:cNvSpPr/>
-          <p:nvPr/>
-        </p:nvSpPr>
-        <p:spPr>
-          <a:xfrm>
-            <a:off x="8997696" y="3922776"/>
-            <a:ext cx="886968" cy="310896"/>
-          </a:xfrm>
-          <a:prstGeom prst="rect">
-            <a:avLst/>
-          </a:prstGeom>
-          <a:noFill/>
-          <a:ln/>
-        </p:spPr>
-        <p:txBody>
-          <a:bodyPr wrap="square" lIns="0" tIns="0" rIns="0" bIns="0" rtlCol="0" anchor="ctr">
-            <a:normAutofit/>
-          </a:bodyPr>
-          <a:lstStyle/>
-          <a:p>
-            <a:pPr algn="ctr" indent="0" marL="0">
-              <a:buNone/>
-            </a:pPr>
-            <a:r>
-              <a:rPr lang="en-US" sz="1500" b="1" dirty="0">
-                <a:solidFill>
-                  <a:srgbClr val="FFFFFF"/>
-                </a:solidFill>
-                <a:latin typeface="Aptos" pitchFamily="34" charset="0"/>
-                <a:ea typeface="Aptos" pitchFamily="34" charset="-122"/>
-                <a:cs typeface="Aptos" pitchFamily="34" charset="-120"/>
-              </a:rPr>
-              <a:t>Apply</a:t>
-            </a:r>
-            <a:endParaRPr lang="en-US" sz="1500" dirty="0"/>
-          </a:p>
-        </p:txBody>
-      </p:sp>
-      <p:sp>
-        <p:nvSpPr>
-          <p:cNvPr id="17" name="Shape 15"/>
-          <p:cNvSpPr/>
-          <p:nvPr/>
-        </p:nvSpPr>
-        <p:spPr>
-          <a:xfrm>
-            <a:off x="10213848" y="3730752"/>
-            <a:ext cx="1033272" cy="749808"/>
-          </a:xfrm>
-          <a:prstGeom prst="roundRect">
-            <a:avLst>
-              <a:gd name="adj" fmla="val 14634"/>
-            </a:avLst>
-          </a:prstGeom>
-          <a:solidFill>
-            <a:srgbClr val="6A4CA3"/>
-          </a:solidFill>
-          <a:ln w="12700">
-            <a:solidFill>
-              <a:srgbClr val="6A4CA3"/>
-            </a:solidFill>
-            <a:prstDash val="solid"/>
-          </a:ln>
-        </p:spPr>
-      </p:sp>
-      <p:sp>
-        <p:nvSpPr>
-          <p:cNvPr id="18" name="Text 16"/>
-          <p:cNvSpPr/>
-          <p:nvPr/>
-        </p:nvSpPr>
-        <p:spPr>
-          <a:xfrm>
-            <a:off x="10287000" y="3922776"/>
-            <a:ext cx="886968" cy="310896"/>
-          </a:xfrm>
-          <a:prstGeom prst="rect">
-            <a:avLst/>
-          </a:prstGeom>
-          <a:noFill/>
-          <a:ln/>
-        </p:spPr>
-        <p:txBody>
-          <a:bodyPr wrap="square" lIns="0" tIns="0" rIns="0" bIns="0" rtlCol="0" anchor="ctr">
-            <a:normAutofit/>
-          </a:bodyPr>
-          <a:lstStyle/>
-          <a:p>
-            <a:pPr algn="ctr" indent="0" marL="0">
-              <a:buNone/>
-            </a:pPr>
-            <a:r>
-              <a:rPr lang="en-US" sz="1500" b="1" dirty="0">
-                <a:solidFill>
-                  <a:srgbClr val="FFFFFF"/>
-                </a:solidFill>
-                <a:latin typeface="Aptos" pitchFamily="34" charset="0"/>
-                <a:ea typeface="Aptos" pitchFamily="34" charset="-122"/>
-                <a:cs typeface="Aptos" pitchFamily="34" charset="-120"/>
-              </a:rPr>
-              <a:t>Document</a:t>
-            </a:r>
-            <a:endParaRPr lang="en-US" sz="1500" dirty="0"/>
+            <a:r>
+              <a:rPr lang="en-US" sz="1380" dirty="0">
+                <a:solidFill>
+                  <a:srgbClr val="17364A"/>
+                </a:solidFill>
+                <a:latin typeface="Aptos" pitchFamily="34" charset="0"/>
+                <a:ea typeface="Aptos" pitchFamily="34" charset="-122"/>
+                <a:cs typeface="Aptos" pitchFamily="34" charset="-120"/>
+              </a:rPr>
+              <a:t>Read the module for shared vocabulary and context.</a:t>
+            </a:r>
+            <a:endParaRPr lang="en-US" sz="1380" dirty="0"/>
+          </a:p>
+          <a:p>
+            <a:r>
+              <a:rPr lang="en-US" sz="1380" dirty="0">
+                <a:solidFill>
+                  <a:srgbClr val="17364A"/>
+                </a:solidFill>
+                <a:latin typeface="Aptos" pitchFamily="34" charset="0"/>
+                <a:ea typeface="Aptos" pitchFamily="34" charset="-122"/>
+                <a:cs typeface="Aptos" pitchFamily="34" charset="-120"/>
+              </a:rPr>
+              <a:t>Complete the practical exercise to apply the concept.</a:t>
+            </a:r>
+            <a:endParaRPr lang="en-US" sz="1380" dirty="0"/>
+          </a:p>
+          <a:p>
+            <a:r>
+              <a:rPr lang="en-US" sz="1380" dirty="0">
+                <a:solidFill>
+                  <a:srgbClr val="17364A"/>
+                </a:solidFill>
+                <a:latin typeface="Aptos" pitchFamily="34" charset="0"/>
+                <a:ea typeface="Aptos" pitchFamily="34" charset="-122"/>
+                <a:cs typeface="Aptos" pitchFamily="34" charset="-120"/>
+              </a:rPr>
+              <a:t>Use the notes and references for deeper review.</a:t>
+            </a:r>
+            <a:endParaRPr lang="en-US" sz="1380" dirty="0"/>
           </a:p>
         </p:txBody>
       </p:sp>
@@ -12324,13 +10652,11 @@
             </a:avLst>
           </a:prstGeom>
           <a:solidFill>
-            <a:srgbClr val="FFFFFF">
-              <a:alpha val="88000"/>
-            </a:srgbClr>
+            <a:srgbClr val="FFFFFF"/>
           </a:solidFill>
           <a:ln w="12700">
             <a:solidFill>
-              <a:srgbClr val="D6E8F2"/>
+              <a:srgbClr val="B9D7E6"/>
             </a:solidFill>
             <a:prstDash val="solid"/>
           </a:ln>
@@ -12338,30 +10664,42 @@
       </p:sp>
       <p:sp>
         <p:nvSpPr>
-          <p:cNvPr id="14" name="Shape 12"/>
-          <p:cNvSpPr/>
-          <p:nvPr/>
-        </p:nvSpPr>
-        <p:spPr>
-          <a:xfrm>
-            <a:off x="7927848" y="3319272"/>
-            <a:ext cx="792480" cy="749808"/>
-          </a:xfrm>
-          <a:prstGeom prst="roundRect">
-            <a:avLst>
-              <a:gd name="adj" fmla="val 14634"/>
-            </a:avLst>
-          </a:prstGeom>
-          <a:solidFill>
-            <a:srgbClr val="0068B7"/>
-          </a:solidFill>
-          <a:ln w="12700">
-            <a:solidFill>
-              <a:srgbClr val="0068B7"/>
-            </a:solidFill>
-            <a:prstDash val="solid"/>
-          </a:ln>
-        </p:spPr>
+          <p:cNvPr id="14" name="Text 12"/>
+          <p:cNvSpPr/>
+          <p:nvPr/>
+        </p:nvSpPr>
+        <p:spPr>
+          <a:xfrm>
+            <a:off x="7799832" y="2935224"/>
+            <a:ext cx="3145536" cy="256032"/>
+          </a:xfrm>
+          <a:prstGeom prst="rect">
+            <a:avLst/>
+          </a:prstGeom>
+          <a:noFill/>
+          <a:ln/>
+        </p:spPr>
+        <p:txBody>
+          <a:bodyPr wrap="square" lIns="0" tIns="0" rIns="0" bIns="0" rtlCol="0" anchor="ctr"/>
+          <a:lstStyle/>
+          <a:p>
+            <a:pPr indent="0" marL="0">
+              <a:buNone/>
+            </a:pPr>
+            <a:r>
+              <a:rPr lang="en-US" sz="1300" b="1" dirty="0">
+                <a:solidFill>
+                  <a:srgbClr val="0068B7"/>
+                </a:solidFill>
+                <a:latin typeface="Aptos" pitchFamily="34" charset="0"/>
+                <a:ea typeface="Aptos" pitchFamily="34" charset="-122"/>
+                <a:cs typeface="Aptos" pitchFamily="34" charset="-120"/>
+              </a:rPr>
+              <a:t>Concept checkpoints</a:t>
+            </a:r>
+            <a:endParaRPr lang="en-US" sz="1300" dirty="0"/>
+          </a:p>
+        </p:txBody>
       </p:sp>
       <p:sp>
         <p:nvSpPr>
@@ -12371,240 +10709,53 @@
         </p:nvSpPr>
         <p:spPr>
           <a:xfrm>
-            <a:off x="8001000" y="3511296"/>
-            <a:ext cx="646176" cy="310896"/>
-          </a:xfrm>
-          <a:prstGeom prst="rect">
-            <a:avLst/>
-          </a:prstGeom>
-          <a:noFill/>
-          <a:ln/>
-        </p:spPr>
-        <p:txBody>
-          <a:bodyPr wrap="square" lIns="0" tIns="0" rIns="0" bIns="0" rtlCol="0" anchor="ctr">
+            <a:off x="7818120" y="3300984"/>
+            <a:ext cx="3090672" cy="877824"/>
+          </a:xfrm>
+          <a:prstGeom prst="rect">
+            <a:avLst/>
+          </a:prstGeom>
+          <a:noFill/>
+          <a:ln/>
+        </p:spPr>
+        <p:txBody>
+          <a:bodyPr wrap="square" lIns="254" tIns="254" rIns="254" bIns="254" rtlCol="0" anchor="t">
             <a:normAutofit/>
           </a:bodyPr>
           <a:lstStyle/>
           <a:p>
-            <a:pPr algn="ctr" indent="0" marL="0">
-              <a:buNone/>
-            </a:pPr>
-            <a:r>
-              <a:rPr lang="en-US" sz="1500" b="1" dirty="0">
-                <a:solidFill>
-                  <a:srgbClr val="FFFFFF"/>
-                </a:solidFill>
-                <a:latin typeface="Aptos" pitchFamily="34" charset="0"/>
-                <a:ea typeface="Aptos" pitchFamily="34" charset="-122"/>
-                <a:cs typeface="Aptos" pitchFamily="34" charset="-120"/>
-              </a:rPr>
-              <a:t>Plan</a:t>
-            </a:r>
-            <a:endParaRPr lang="en-US" sz="1500" dirty="0"/>
+            <a:r>
+              <a:rPr lang="en-US" sz="1380" dirty="0">
+                <a:solidFill>
+                  <a:srgbClr val="17364A"/>
+                </a:solidFill>
+                <a:latin typeface="Aptos" pitchFamily="34" charset="0"/>
+                <a:ea typeface="Aptos" pitchFamily="34" charset="-122"/>
+                <a:cs typeface="Aptos" pitchFamily="34" charset="-120"/>
+              </a:rPr>
+              <a:t>OMB Memorandum M-24-10 on federal AI governance, risk management, and innovation, where.</a:t>
+            </a:r>
+            <a:endParaRPr lang="en-US" sz="1380" dirty="0"/>
+          </a:p>
+          <a:p>
+            <a:r>
+              <a:rPr lang="en-US" sz="1380" dirty="0">
+                <a:solidFill>
+                  <a:srgbClr val="17364A"/>
+                </a:solidFill>
+                <a:latin typeface="Aptos" pitchFamily="34" charset="0"/>
+                <a:ea typeface="Aptos" pitchFamily="34" charset="-122"/>
+                <a:cs typeface="Aptos" pitchFamily="34" charset="-120"/>
+              </a:rPr>
+              <a:t>Agency strategic plans, procurement policies, privacy policies, cybersecurity policies,.</a:t>
+            </a:r>
+            <a:endParaRPr lang="en-US" sz="1380" dirty="0"/>
           </a:p>
         </p:txBody>
       </p:sp>
       <p:sp>
         <p:nvSpPr>
           <p:cNvPr id="16" name="Shape 14"/>
-          <p:cNvSpPr/>
-          <p:nvPr/>
-        </p:nvSpPr>
-        <p:spPr>
-          <a:xfrm>
-            <a:off x="8976360" y="3319272"/>
-            <a:ext cx="792480" cy="749808"/>
-          </a:xfrm>
-          <a:prstGeom prst="roundRect">
-            <a:avLst>
-              <a:gd name="adj" fmla="val 14634"/>
-            </a:avLst>
-          </a:prstGeom>
-          <a:solidFill>
-            <a:srgbClr val="2F8A28"/>
-          </a:solidFill>
-          <a:ln w="12700">
-            <a:solidFill>
-              <a:srgbClr val="2F8A28"/>
-            </a:solidFill>
-            <a:prstDash val="solid"/>
-          </a:ln>
-        </p:spPr>
-      </p:sp>
-      <p:sp>
-        <p:nvSpPr>
-          <p:cNvPr id="17" name="Text 15"/>
-          <p:cNvSpPr/>
-          <p:nvPr/>
-        </p:nvSpPr>
-        <p:spPr>
-          <a:xfrm>
-            <a:off x="9049512" y="3511296"/>
-            <a:ext cx="646176" cy="310896"/>
-          </a:xfrm>
-          <a:prstGeom prst="rect">
-            <a:avLst/>
-          </a:prstGeom>
-          <a:noFill/>
-          <a:ln/>
-        </p:spPr>
-        <p:txBody>
-          <a:bodyPr wrap="square" lIns="0" tIns="0" rIns="0" bIns="0" rtlCol="0" anchor="ctr">
-            <a:normAutofit/>
-          </a:bodyPr>
-          <a:lstStyle/>
-          <a:p>
-            <a:pPr algn="ctr" indent="0" marL="0">
-              <a:buNone/>
-            </a:pPr>
-            <a:r>
-              <a:rPr lang="en-US" sz="1500" b="1" dirty="0">
-                <a:solidFill>
-                  <a:srgbClr val="FFFFFF"/>
-                </a:solidFill>
-                <a:latin typeface="Aptos" pitchFamily="34" charset="0"/>
-                <a:ea typeface="Aptos" pitchFamily="34" charset="-122"/>
-                <a:cs typeface="Aptos" pitchFamily="34" charset="-120"/>
-              </a:rPr>
-              <a:t>Do</a:t>
-            </a:r>
-            <a:endParaRPr lang="en-US" sz="1500" dirty="0"/>
-          </a:p>
-        </p:txBody>
-      </p:sp>
-      <p:sp>
-        <p:nvSpPr>
-          <p:cNvPr id="18" name="Shape 16"/>
-          <p:cNvSpPr/>
-          <p:nvPr/>
-        </p:nvSpPr>
-        <p:spPr>
-          <a:xfrm>
-            <a:off x="10024872" y="3319272"/>
-            <a:ext cx="792480" cy="749808"/>
-          </a:xfrm>
-          <a:prstGeom prst="roundRect">
-            <a:avLst>
-              <a:gd name="adj" fmla="val 14634"/>
-            </a:avLst>
-          </a:prstGeom>
-          <a:solidFill>
-            <a:srgbClr val="D69A2D"/>
-          </a:solidFill>
-          <a:ln w="12700">
-            <a:solidFill>
-              <a:srgbClr val="D69A2D"/>
-            </a:solidFill>
-            <a:prstDash val="solid"/>
-          </a:ln>
-        </p:spPr>
-      </p:sp>
-      <p:sp>
-        <p:nvSpPr>
-          <p:cNvPr id="19" name="Text 17"/>
-          <p:cNvSpPr/>
-          <p:nvPr/>
-        </p:nvSpPr>
-        <p:spPr>
-          <a:xfrm>
-            <a:off x="10098024" y="3511296"/>
-            <a:ext cx="646176" cy="310896"/>
-          </a:xfrm>
-          <a:prstGeom prst="rect">
-            <a:avLst/>
-          </a:prstGeom>
-          <a:noFill/>
-          <a:ln/>
-        </p:spPr>
-        <p:txBody>
-          <a:bodyPr wrap="square" lIns="0" tIns="0" rIns="0" bIns="0" rtlCol="0" anchor="ctr">
-            <a:normAutofit/>
-          </a:bodyPr>
-          <a:lstStyle/>
-          <a:p>
-            <a:pPr algn="ctr" indent="0" marL="0">
-              <a:buNone/>
-            </a:pPr>
-            <a:r>
-              <a:rPr lang="en-US" sz="1500" b="1" dirty="0">
-                <a:solidFill>
-                  <a:srgbClr val="FFFFFF"/>
-                </a:solidFill>
-                <a:latin typeface="Aptos" pitchFamily="34" charset="0"/>
-                <a:ea typeface="Aptos" pitchFamily="34" charset="-122"/>
-                <a:cs typeface="Aptos" pitchFamily="34" charset="-120"/>
-              </a:rPr>
-              <a:t>Review</a:t>
-            </a:r>
-            <a:endParaRPr lang="en-US" sz="1500" dirty="0"/>
-          </a:p>
-        </p:txBody>
-      </p:sp>
-      <p:sp>
-        <p:nvSpPr>
-          <p:cNvPr id="20" name="Shape 18"/>
-          <p:cNvSpPr/>
-          <p:nvPr/>
-        </p:nvSpPr>
-        <p:spPr>
-          <a:xfrm>
-            <a:off x="8293608" y="4389120"/>
-            <a:ext cx="2157984" cy="0"/>
-          </a:xfrm>
-          <a:prstGeom prst="line">
-            <a:avLst/>
-          </a:prstGeom>
-          <a:noFill/>
-          <a:ln w="25400">
-            <a:solidFill>
-              <a:srgbClr val="8ABBD8"/>
-            </a:solidFill>
-            <a:prstDash val="solid"/>
-          </a:ln>
-        </p:spPr>
-      </p:sp>
-      <p:sp>
-        <p:nvSpPr>
-          <p:cNvPr id="21" name="Text 19"/>
-          <p:cNvSpPr/>
-          <p:nvPr/>
-        </p:nvSpPr>
-        <p:spPr>
-          <a:xfrm>
-            <a:off x="7909560" y="3977640"/>
-            <a:ext cx="2926080" cy="182880"/>
-          </a:xfrm>
-          <a:prstGeom prst="rect">
-            <a:avLst/>
-          </a:prstGeom>
-          <a:noFill/>
-          <a:ln/>
-        </p:spPr>
-        <p:txBody>
-          <a:bodyPr wrap="square" lIns="0" tIns="0" rIns="0" bIns="0" rtlCol="0" anchor="ctr"/>
-          <a:lstStyle/>
-          <a:p>
-            <a:pPr algn="ctr" indent="0" marL="0">
-              <a:buNone/>
-            </a:pPr>
-            <a:r>
-              <a:rPr lang="en-US" sz="1000" dirty="0">
-                <a:solidFill>
-                  <a:srgbClr val="003A63"/>
-                </a:solidFill>
-                <a:latin typeface="Aptos" pitchFamily="34" charset="0"/>
-                <a:ea typeface="Aptos" pitchFamily="34" charset="-122"/>
-                <a:cs typeface="Aptos" pitchFamily="34" charset="-120"/>
-              </a:rPr>
-              <a:t>Dependencies visible</a:t>
-            </a:r>
-            <a:endParaRPr lang="en-US" sz="1000" dirty="0"/>
-          </a:p>
-        </p:txBody>
-      </p:sp>
-      <p:sp>
-        <p:nvSpPr>
-          <p:cNvPr id="22" name="Shape 20"/>
           <p:cNvSpPr/>
           <p:nvPr/>
         </p:nvSpPr>
@@ -12631,7 +10782,7 @@
       </p:sp>
       <p:sp>
         <p:nvSpPr>
-          <p:cNvPr id="23" name="Text 21"/>
+          <p:cNvPr id="17" name="Text 15"/>
           <p:cNvSpPr/>
           <p:nvPr/>
         </p:nvSpPr>
@@ -12670,7 +10821,7 @@
       </p:sp>
       <p:sp>
         <p:nvSpPr>
-          <p:cNvPr id="24" name="Text 22"/>
+          <p:cNvPr id="18" name="Text 16"/>
           <p:cNvSpPr/>
           <p:nvPr/>
         </p:nvSpPr>
@@ -13183,20 +11334,20 @@
         </p:nvSpPr>
         <p:spPr>
           <a:xfrm>
-            <a:off x="7818120" y="3977640"/>
-            <a:ext cx="972312" cy="749808"/>
+            <a:off x="8046720" y="3794760"/>
+            <a:ext cx="3063240" cy="1600200"/>
           </a:xfrm>
           <a:prstGeom prst="roundRect">
             <a:avLst>
-              <a:gd name="adj" fmla="val 14634"/>
+              <a:gd name="adj" fmla="val 6857"/>
             </a:avLst>
           </a:prstGeom>
           <a:solidFill>
-            <a:srgbClr val="0068B7"/>
+            <a:srgbClr val="FFFFFF"/>
           </a:solidFill>
           <a:ln w="12700">
             <a:solidFill>
-              <a:srgbClr val="0068B7"/>
+              <a:srgbClr val="B9D7E6"/>
             </a:solidFill>
             <a:prstDash val="solid"/>
           </a:ln>
@@ -13210,172 +11361,100 @@
         </p:nvSpPr>
         <p:spPr>
           <a:xfrm>
-            <a:off x="7891272" y="4169664"/>
-            <a:ext cx="826008" cy="310896"/>
-          </a:xfrm>
-          <a:prstGeom prst="rect">
-            <a:avLst/>
-          </a:prstGeom>
-          <a:noFill/>
-          <a:ln/>
-        </p:spPr>
-        <p:txBody>
-          <a:bodyPr wrap="square" lIns="0" tIns="0" rIns="0" bIns="0" rtlCol="0" anchor="ctr">
+            <a:off x="8211312" y="3941064"/>
+            <a:ext cx="2734056" cy="256032"/>
+          </a:xfrm>
+          <a:prstGeom prst="rect">
+            <a:avLst/>
+          </a:prstGeom>
+          <a:noFill/>
+          <a:ln/>
+        </p:spPr>
+        <p:txBody>
+          <a:bodyPr wrap="square" lIns="0" tIns="0" rIns="0" bIns="0" rtlCol="0" anchor="ctr"/>
+          <a:lstStyle/>
+          <a:p>
+            <a:pPr indent="0" marL="0">
+              <a:buNone/>
+            </a:pPr>
+            <a:r>
+              <a:rPr lang="en-US" sz="1300" b="1" dirty="0">
+                <a:solidFill>
+                  <a:srgbClr val="0068B7"/>
+                </a:solidFill>
+                <a:latin typeface="Aptos" pitchFamily="34" charset="0"/>
+                <a:ea typeface="Aptos" pitchFamily="34" charset="-122"/>
+                <a:cs typeface="Aptos" pitchFamily="34" charset="-120"/>
+              </a:rPr>
+              <a:t>Use the play links to</a:t>
+            </a:r>
+            <a:endParaRPr lang="en-US" sz="1300" dirty="0"/>
+          </a:p>
+        </p:txBody>
+      </p:sp>
+      <p:sp>
+        <p:nvSpPr>
+          <p:cNvPr id="15" name="Text 13"/>
+          <p:cNvSpPr/>
+          <p:nvPr/>
+        </p:nvSpPr>
+        <p:spPr>
+          <a:xfrm>
+            <a:off x="8229600" y="4306824"/>
+            <a:ext cx="2679192" cy="941832"/>
+          </a:xfrm>
+          <a:prstGeom prst="rect">
+            <a:avLst/>
+          </a:prstGeom>
+          <a:noFill/>
+          <a:ln/>
+        </p:spPr>
+        <p:txBody>
+          <a:bodyPr wrap="square" lIns="254" tIns="254" rIns="254" bIns="254" rtlCol="0" anchor="t">
             <a:normAutofit/>
           </a:bodyPr>
           <a:lstStyle/>
           <a:p>
-            <a:pPr algn="ctr" indent="0" marL="0">
-              <a:buNone/>
-            </a:pPr>
-            <a:r>
-              <a:rPr lang="en-US" sz="1500" b="1" dirty="0">
-                <a:solidFill>
-                  <a:srgbClr val="FFFFFF"/>
-                </a:solidFill>
-                <a:latin typeface="Aptos" pitchFamily="34" charset="0"/>
-                <a:ea typeface="Aptos" pitchFamily="34" charset="-122"/>
-                <a:cs typeface="Aptos" pitchFamily="34" charset="-120"/>
-              </a:rPr>
-              <a:t>Lesson</a:t>
-            </a:r>
-            <a:endParaRPr lang="en-US" sz="1500" dirty="0"/>
-          </a:p>
-        </p:txBody>
-      </p:sp>
-      <p:sp>
-        <p:nvSpPr>
-          <p:cNvPr id="15" name="Shape 13"/>
-          <p:cNvSpPr/>
-          <p:nvPr/>
-        </p:nvSpPr>
-        <p:spPr>
-          <a:xfrm>
-            <a:off x="9046464" y="3977640"/>
-            <a:ext cx="972312" cy="749808"/>
-          </a:xfrm>
-          <a:prstGeom prst="roundRect">
-            <a:avLst>
-              <a:gd name="adj" fmla="val 14634"/>
-            </a:avLst>
-          </a:prstGeom>
-          <a:solidFill>
-            <a:srgbClr val="2F8A28"/>
-          </a:solidFill>
-          <a:ln w="12700">
-            <a:solidFill>
-              <a:srgbClr val="2F8A28"/>
-            </a:solidFill>
-            <a:prstDash val="solid"/>
-          </a:ln>
-        </p:spPr>
-      </p:sp>
-      <p:sp>
-        <p:nvSpPr>
-          <p:cNvPr id="16" name="Text 14"/>
-          <p:cNvSpPr/>
-          <p:nvPr/>
-        </p:nvSpPr>
-        <p:spPr>
-          <a:xfrm>
-            <a:off x="9119616" y="4169664"/>
-            <a:ext cx="826008" cy="310896"/>
-          </a:xfrm>
-          <a:prstGeom prst="rect">
-            <a:avLst/>
-          </a:prstGeom>
-          <a:noFill/>
-          <a:ln/>
-        </p:spPr>
-        <p:txBody>
-          <a:bodyPr wrap="square" lIns="0" tIns="0" rIns="0" bIns="0" rtlCol="0" anchor="ctr">
-            <a:normAutofit/>
-          </a:bodyPr>
-          <a:lstStyle/>
-          <a:p>
-            <a:pPr algn="ctr" indent="0" marL="0">
-              <a:buNone/>
-            </a:pPr>
-            <a:r>
-              <a:rPr lang="en-US" sz="1500" b="1" dirty="0">
-                <a:solidFill>
-                  <a:srgbClr val="FFFFFF"/>
-                </a:solidFill>
-                <a:latin typeface="Aptos" pitchFamily="34" charset="0"/>
-                <a:ea typeface="Aptos" pitchFamily="34" charset="-122"/>
-                <a:cs typeface="Aptos" pitchFamily="34" charset="-120"/>
-              </a:rPr>
-              <a:t>Plays</a:t>
-            </a:r>
-            <a:endParaRPr lang="en-US" sz="1500" dirty="0"/>
-          </a:p>
-        </p:txBody>
-      </p:sp>
-      <p:sp>
-        <p:nvSpPr>
-          <p:cNvPr id="17" name="Shape 15"/>
-          <p:cNvSpPr/>
-          <p:nvPr/>
-        </p:nvSpPr>
-        <p:spPr>
-          <a:xfrm>
-            <a:off x="10274808" y="3977640"/>
-            <a:ext cx="972312" cy="749808"/>
-          </a:xfrm>
-          <a:prstGeom prst="roundRect">
-            <a:avLst>
-              <a:gd name="adj" fmla="val 14634"/>
-            </a:avLst>
-          </a:prstGeom>
-          <a:solidFill>
-            <a:srgbClr val="6A4CA3"/>
-          </a:solidFill>
-          <a:ln w="12700">
-            <a:solidFill>
-              <a:srgbClr val="6A4CA3"/>
-            </a:solidFill>
-            <a:prstDash val="solid"/>
-          </a:ln>
-        </p:spPr>
-      </p:sp>
-      <p:sp>
-        <p:nvSpPr>
-          <p:cNvPr id="18" name="Text 16"/>
-          <p:cNvSpPr/>
-          <p:nvPr/>
-        </p:nvSpPr>
-        <p:spPr>
-          <a:xfrm>
-            <a:off x="10347960" y="4169664"/>
-            <a:ext cx="826008" cy="310896"/>
-          </a:xfrm>
-          <a:prstGeom prst="rect">
-            <a:avLst/>
-          </a:prstGeom>
-          <a:noFill/>
-          <a:ln/>
-        </p:spPr>
-        <p:txBody>
-          <a:bodyPr wrap="square" lIns="0" tIns="0" rIns="0" bIns="0" rtlCol="0" anchor="ctr">
-            <a:normAutofit/>
-          </a:bodyPr>
-          <a:lstStyle/>
-          <a:p>
-            <a:pPr algn="ctr" indent="0" marL="0">
-              <a:buNone/>
-            </a:pPr>
-            <a:r>
-              <a:rPr lang="en-US" sz="1500" b="1" dirty="0">
-                <a:solidFill>
-                  <a:srgbClr val="FFFFFF"/>
-                </a:solidFill>
-                <a:latin typeface="Aptos" pitchFamily="34" charset="0"/>
-                <a:ea typeface="Aptos" pitchFamily="34" charset="-122"/>
-                <a:cs typeface="Aptos" pitchFamily="34" charset="-120"/>
-              </a:rPr>
-              <a:t>Action</a:t>
-            </a:r>
-            <a:endParaRPr lang="en-US" sz="1500" dirty="0"/>
+            <a:r>
+              <a:rPr lang="en-US" sz="1380" dirty="0">
+                <a:solidFill>
+                  <a:srgbClr val="17364A"/>
+                </a:solidFill>
+                <a:latin typeface="Aptos" pitchFamily="34" charset="0"/>
+                <a:ea typeface="Aptos" pitchFamily="34" charset="-122"/>
+                <a:cs typeface="Aptos" pitchFamily="34" charset="-120"/>
+              </a:rPr>
+              <a:t>Locate the decision point in the playbook sequence.</a:t>
+            </a:r>
+            <a:endParaRPr lang="en-US" sz="1380" dirty="0"/>
+          </a:p>
+          <a:p>
+            <a:r>
+              <a:rPr lang="en-US" sz="1380" dirty="0">
+                <a:solidFill>
+                  <a:srgbClr val="17364A"/>
+                </a:solidFill>
+                <a:latin typeface="Aptos" pitchFamily="34" charset="0"/>
+                <a:ea typeface="Aptos" pitchFamily="34" charset="-122"/>
+                <a:cs typeface="Aptos" pitchFamily="34" charset="-120"/>
+              </a:rPr>
+              <a:t>Identify who should participate in the work.</a:t>
+            </a:r>
+            <a:endParaRPr lang="en-US" sz="1380" dirty="0"/>
+          </a:p>
+          <a:p>
+            <a:r>
+              <a:rPr lang="en-US" sz="1380" dirty="0">
+                <a:solidFill>
+                  <a:srgbClr val="17364A"/>
+                </a:solidFill>
+                <a:latin typeface="Aptos" pitchFamily="34" charset="0"/>
+                <a:ea typeface="Aptos" pitchFamily="34" charset="-122"/>
+                <a:cs typeface="Aptos" pitchFamily="34" charset="-120"/>
+              </a:rPr>
+              <a:t>Document the review, approval, or implementation step.</a:t>
+            </a:r>
+            <a:endParaRPr lang="en-US" sz="1380" dirty="0"/>
           </a:p>
         </p:txBody>
       </p:sp>
@@ -13853,20 +11932,20 @@
         </p:nvSpPr>
         <p:spPr>
           <a:xfrm>
-            <a:off x="7818120" y="3977640"/>
-            <a:ext cx="972312" cy="749808"/>
+            <a:off x="8046720" y="3794760"/>
+            <a:ext cx="3063240" cy="1600200"/>
           </a:xfrm>
           <a:prstGeom prst="roundRect">
             <a:avLst>
-              <a:gd name="adj" fmla="val 14634"/>
+              <a:gd name="adj" fmla="val 6857"/>
             </a:avLst>
           </a:prstGeom>
           <a:solidFill>
-            <a:srgbClr val="0068B7"/>
+            <a:srgbClr val="FFFFFF"/>
           </a:solidFill>
           <a:ln w="12700">
             <a:solidFill>
-              <a:srgbClr val="0068B7"/>
+              <a:srgbClr val="B9D7E6"/>
             </a:solidFill>
             <a:prstDash val="solid"/>
           </a:ln>
@@ -13880,172 +11959,100 @@
         </p:nvSpPr>
         <p:spPr>
           <a:xfrm>
-            <a:off x="7891272" y="4169664"/>
-            <a:ext cx="826008" cy="310896"/>
-          </a:xfrm>
-          <a:prstGeom prst="rect">
-            <a:avLst/>
-          </a:prstGeom>
-          <a:noFill/>
-          <a:ln/>
-        </p:spPr>
-        <p:txBody>
-          <a:bodyPr wrap="square" lIns="0" tIns="0" rIns="0" bIns="0" rtlCol="0" anchor="ctr">
+            <a:off x="8211312" y="3941064"/>
+            <a:ext cx="2734056" cy="256032"/>
+          </a:xfrm>
+          <a:prstGeom prst="rect">
+            <a:avLst/>
+          </a:prstGeom>
+          <a:noFill/>
+          <a:ln/>
+        </p:spPr>
+        <p:txBody>
+          <a:bodyPr wrap="square" lIns="0" tIns="0" rIns="0" bIns="0" rtlCol="0" anchor="ctr"/>
+          <a:lstStyle/>
+          <a:p>
+            <a:pPr indent="0" marL="0">
+              <a:buNone/>
+            </a:pPr>
+            <a:r>
+              <a:rPr lang="en-US" sz="1300" b="1" dirty="0">
+                <a:solidFill>
+                  <a:srgbClr val="0068B7"/>
+                </a:solidFill>
+                <a:latin typeface="Aptos" pitchFamily="34" charset="0"/>
+                <a:ea typeface="Aptos" pitchFamily="34" charset="-122"/>
+                <a:cs typeface="Aptos" pitchFamily="34" charset="-120"/>
+              </a:rPr>
+              <a:t>Tool selection cues</a:t>
+            </a:r>
+            <a:endParaRPr lang="en-US" sz="1300" dirty="0"/>
+          </a:p>
+        </p:txBody>
+      </p:sp>
+      <p:sp>
+        <p:nvSpPr>
+          <p:cNvPr id="15" name="Text 13"/>
+          <p:cNvSpPr/>
+          <p:nvPr/>
+        </p:nvSpPr>
+        <p:spPr>
+          <a:xfrm>
+            <a:off x="8229600" y="4306824"/>
+            <a:ext cx="2679192" cy="941832"/>
+          </a:xfrm>
+          <a:prstGeom prst="rect">
+            <a:avLst/>
+          </a:prstGeom>
+          <a:noFill/>
+          <a:ln/>
+        </p:spPr>
+        <p:txBody>
+          <a:bodyPr wrap="square" lIns="254" tIns="254" rIns="254" bIns="254" rtlCol="0" anchor="t">
             <a:normAutofit/>
           </a:bodyPr>
           <a:lstStyle/>
           <a:p>
-            <a:pPr algn="ctr" indent="0" marL="0">
-              <a:buNone/>
-            </a:pPr>
-            <a:r>
-              <a:rPr lang="en-US" sz="1500" b="1" dirty="0">
-                <a:solidFill>
-                  <a:srgbClr val="FFFFFF"/>
-                </a:solidFill>
-                <a:latin typeface="Aptos" pitchFamily="34" charset="0"/>
-                <a:ea typeface="Aptos" pitchFamily="34" charset="-122"/>
-                <a:cs typeface="Aptos" pitchFamily="34" charset="-120"/>
-              </a:rPr>
-              <a:t>Concept</a:t>
-            </a:r>
-            <a:endParaRPr lang="en-US" sz="1500" dirty="0"/>
-          </a:p>
-        </p:txBody>
-      </p:sp>
-      <p:sp>
-        <p:nvSpPr>
-          <p:cNvPr id="15" name="Shape 13"/>
-          <p:cNvSpPr/>
-          <p:nvPr/>
-        </p:nvSpPr>
-        <p:spPr>
-          <a:xfrm>
-            <a:off x="9046464" y="3977640"/>
-            <a:ext cx="972312" cy="749808"/>
-          </a:xfrm>
-          <a:prstGeom prst="roundRect">
-            <a:avLst>
-              <a:gd name="adj" fmla="val 14634"/>
-            </a:avLst>
-          </a:prstGeom>
-          <a:solidFill>
-            <a:srgbClr val="2F8A28"/>
-          </a:solidFill>
-          <a:ln w="12700">
-            <a:solidFill>
-              <a:srgbClr val="2F8A28"/>
-            </a:solidFill>
-            <a:prstDash val="solid"/>
-          </a:ln>
-        </p:spPr>
-      </p:sp>
-      <p:sp>
-        <p:nvSpPr>
-          <p:cNvPr id="16" name="Text 14"/>
-          <p:cNvSpPr/>
-          <p:nvPr/>
-        </p:nvSpPr>
-        <p:spPr>
-          <a:xfrm>
-            <a:off x="9119616" y="4169664"/>
-            <a:ext cx="826008" cy="310896"/>
-          </a:xfrm>
-          <a:prstGeom prst="rect">
-            <a:avLst/>
-          </a:prstGeom>
-          <a:noFill/>
-          <a:ln/>
-        </p:spPr>
-        <p:txBody>
-          <a:bodyPr wrap="square" lIns="0" tIns="0" rIns="0" bIns="0" rtlCol="0" anchor="ctr">
-            <a:normAutofit/>
-          </a:bodyPr>
-          <a:lstStyle/>
-          <a:p>
-            <a:pPr algn="ctr" indent="0" marL="0">
-              <a:buNone/>
-            </a:pPr>
-            <a:r>
-              <a:rPr lang="en-US" sz="1500" b="1" dirty="0">
-                <a:solidFill>
-                  <a:srgbClr val="FFFFFF"/>
-                </a:solidFill>
-                <a:latin typeface="Aptos" pitchFamily="34" charset="0"/>
-                <a:ea typeface="Aptos" pitchFamily="34" charset="-122"/>
-                <a:cs typeface="Aptos" pitchFamily="34" charset="-120"/>
-              </a:rPr>
-              <a:t>Tool</a:t>
-            </a:r>
-            <a:endParaRPr lang="en-US" sz="1500" dirty="0"/>
-          </a:p>
-        </p:txBody>
-      </p:sp>
-      <p:sp>
-        <p:nvSpPr>
-          <p:cNvPr id="17" name="Shape 15"/>
-          <p:cNvSpPr/>
-          <p:nvPr/>
-        </p:nvSpPr>
-        <p:spPr>
-          <a:xfrm>
-            <a:off x="10274808" y="3977640"/>
-            <a:ext cx="972312" cy="749808"/>
-          </a:xfrm>
-          <a:prstGeom prst="roundRect">
-            <a:avLst>
-              <a:gd name="adj" fmla="val 14634"/>
-            </a:avLst>
-          </a:prstGeom>
-          <a:solidFill>
-            <a:srgbClr val="D69A2D"/>
-          </a:solidFill>
-          <a:ln w="12700">
-            <a:solidFill>
-              <a:srgbClr val="D69A2D"/>
-            </a:solidFill>
-            <a:prstDash val="solid"/>
-          </a:ln>
-        </p:spPr>
-      </p:sp>
-      <p:sp>
-        <p:nvSpPr>
-          <p:cNvPr id="18" name="Text 16"/>
-          <p:cNvSpPr/>
-          <p:nvPr/>
-        </p:nvSpPr>
-        <p:spPr>
-          <a:xfrm>
-            <a:off x="10347960" y="4169664"/>
-            <a:ext cx="826008" cy="310896"/>
-          </a:xfrm>
-          <a:prstGeom prst="rect">
-            <a:avLst/>
-          </a:prstGeom>
-          <a:noFill/>
-          <a:ln/>
-        </p:spPr>
-        <p:txBody>
-          <a:bodyPr wrap="square" lIns="0" tIns="0" rIns="0" bIns="0" rtlCol="0" anchor="ctr">
-            <a:normAutofit/>
-          </a:bodyPr>
-          <a:lstStyle/>
-          <a:p>
-            <a:pPr algn="ctr" indent="0" marL="0">
-              <a:buNone/>
-            </a:pPr>
-            <a:r>
-              <a:rPr lang="en-US" sz="1500" b="1" dirty="0">
-                <a:solidFill>
-                  <a:srgbClr val="FFFFFF"/>
-                </a:solidFill>
-                <a:latin typeface="Aptos" pitchFamily="34" charset="0"/>
-                <a:ea typeface="Aptos" pitchFamily="34" charset="-122"/>
-                <a:cs typeface="Aptos" pitchFamily="34" charset="-120"/>
-              </a:rPr>
-              <a:t>Artifact</a:t>
-            </a:r>
-            <a:endParaRPr lang="en-US" sz="1500" dirty="0"/>
+            <a:r>
+              <a:rPr lang="en-US" sz="1380" dirty="0">
+                <a:solidFill>
+                  <a:srgbClr val="17364A"/>
+                </a:solidFill>
+                <a:latin typeface="Aptos" pitchFamily="34" charset="0"/>
+                <a:ea typeface="Aptos" pitchFamily="34" charset="-122"/>
+                <a:cs typeface="Aptos" pitchFamily="34" charset="-120"/>
+              </a:rPr>
+              <a:t>Use a tool when no comparable local process exists.</a:t>
+            </a:r>
+            <a:endParaRPr lang="en-US" sz="1380" dirty="0"/>
+          </a:p>
+          <a:p>
+            <a:r>
+              <a:rPr lang="en-US" sz="1380" dirty="0">
+                <a:solidFill>
+                  <a:srgbClr val="17364A"/>
+                </a:solidFill>
+                <a:latin typeface="Aptos" pitchFamily="34" charset="0"/>
+                <a:ea typeface="Aptos" pitchFamily="34" charset="-122"/>
+                <a:cs typeface="Aptos" pitchFamily="34" charset="-120"/>
+              </a:rPr>
+              <a:t>Adapt existing department templates when they already fit the purpose.</a:t>
+            </a:r>
+            <a:endParaRPr lang="en-US" sz="1380" dirty="0"/>
+          </a:p>
+          <a:p>
+            <a:r>
+              <a:rPr lang="en-US" sz="1380" dirty="0">
+                <a:solidFill>
+                  <a:srgbClr val="17364A"/>
+                </a:solidFill>
+                <a:latin typeface="Aptos" pitchFamily="34" charset="0"/>
+                <a:ea typeface="Aptos" pitchFamily="34" charset="-122"/>
+                <a:cs typeface="Aptos" pitchFamily="34" charset="-120"/>
+              </a:rPr>
+              <a:t>Save the completed artifact as evidence of the decision.</a:t>
+            </a:r>
+            <a:endParaRPr lang="en-US" sz="1380" dirty="0"/>
           </a:p>
         </p:txBody>
       </p:sp>
@@ -14518,13 +12525,11 @@
             </a:avLst>
           </a:prstGeom>
           <a:solidFill>
-            <a:srgbClr val="FFFFFF">
-              <a:alpha val="88000"/>
-            </a:srgbClr>
+            <a:srgbClr val="FFFFFF"/>
           </a:solidFill>
           <a:ln w="12700">
             <a:solidFill>
-              <a:srgbClr val="D6E8F2"/>
+              <a:srgbClr val="B9D7E6"/>
             </a:solidFill>
             <a:prstDash val="solid"/>
           </a:ln>
@@ -14532,30 +12537,42 @@
       </p:sp>
       <p:sp>
         <p:nvSpPr>
-          <p:cNvPr id="14" name="Shape 12"/>
-          <p:cNvSpPr/>
-          <p:nvPr/>
-        </p:nvSpPr>
-        <p:spPr>
-          <a:xfrm>
-            <a:off x="7927848" y="3319272"/>
-            <a:ext cx="792480" cy="749808"/>
-          </a:xfrm>
-          <a:prstGeom prst="roundRect">
-            <a:avLst>
-              <a:gd name="adj" fmla="val 14634"/>
-            </a:avLst>
-          </a:prstGeom>
-          <a:solidFill>
-            <a:srgbClr val="0068B7"/>
-          </a:solidFill>
-          <a:ln w="12700">
-            <a:solidFill>
-              <a:srgbClr val="0068B7"/>
-            </a:solidFill>
-            <a:prstDash val="solid"/>
-          </a:ln>
-        </p:spPr>
+          <p:cNvPr id="14" name="Text 12"/>
+          <p:cNvSpPr/>
+          <p:nvPr/>
+        </p:nvSpPr>
+        <p:spPr>
+          <a:xfrm>
+            <a:off x="7799832" y="2935224"/>
+            <a:ext cx="3145536" cy="256032"/>
+          </a:xfrm>
+          <a:prstGeom prst="rect">
+            <a:avLst/>
+          </a:prstGeom>
+          <a:noFill/>
+          <a:ln/>
+        </p:spPr>
+        <p:txBody>
+          <a:bodyPr wrap="square" lIns="0" tIns="0" rIns="0" bIns="0" rtlCol="0" anchor="ctr"/>
+          <a:lstStyle/>
+          <a:p>
+            <a:pPr indent="0" marL="0">
+              <a:buNone/>
+            </a:pPr>
+            <a:r>
+              <a:rPr lang="en-US" sz="1300" b="1" dirty="0">
+                <a:solidFill>
+                  <a:srgbClr val="0068B7"/>
+                </a:solidFill>
+                <a:latin typeface="Aptos" pitchFamily="34" charset="0"/>
+                <a:ea typeface="Aptos" pitchFamily="34" charset="-122"/>
+                <a:cs typeface="Aptos" pitchFamily="34" charset="-120"/>
+              </a:rPr>
+              <a:t>Concept checkpoints</a:t>
+            </a:r>
+            <a:endParaRPr lang="en-US" sz="1300" dirty="0"/>
+          </a:p>
+        </p:txBody>
       </p:sp>
       <p:sp>
         <p:nvSpPr>
@@ -14565,240 +12582,67 @@
         </p:nvSpPr>
         <p:spPr>
           <a:xfrm>
-            <a:off x="8001000" y="3511296"/>
-            <a:ext cx="646176" cy="310896"/>
-          </a:xfrm>
-          <a:prstGeom prst="rect">
-            <a:avLst/>
-          </a:prstGeom>
-          <a:noFill/>
-          <a:ln/>
-        </p:spPr>
-        <p:txBody>
-          <a:bodyPr wrap="square" lIns="0" tIns="0" rIns="0" bIns="0" rtlCol="0" anchor="ctr">
+            <a:off x="7818120" y="3300984"/>
+            <a:ext cx="3090672" cy="877824"/>
+          </a:xfrm>
+          <a:prstGeom prst="rect">
+            <a:avLst/>
+          </a:prstGeom>
+          <a:noFill/>
+          <a:ln/>
+        </p:spPr>
+        <p:txBody>
+          <a:bodyPr wrap="square" lIns="254" tIns="254" rIns="254" bIns="254" rtlCol="0" anchor="t">
             <a:normAutofit/>
           </a:bodyPr>
           <a:lstStyle/>
           <a:p>
-            <a:pPr algn="ctr" indent="0" marL="0">
-              <a:buNone/>
-            </a:pPr>
-            <a:r>
-              <a:rPr lang="en-US" sz="1500" b="1" dirty="0">
-                <a:solidFill>
-                  <a:srgbClr val="FFFFFF"/>
-                </a:solidFill>
-                <a:latin typeface="Aptos" pitchFamily="34" charset="0"/>
-                <a:ea typeface="Aptos" pitchFamily="34" charset="-122"/>
-                <a:cs typeface="Aptos" pitchFamily="34" charset="-120"/>
-              </a:rPr>
-              <a:t>Plan</a:t>
-            </a:r>
-            <a:endParaRPr lang="en-US" sz="1500" dirty="0"/>
+            <a:r>
+              <a:rPr lang="en-US" sz="1380" dirty="0">
+                <a:solidFill>
+                  <a:srgbClr val="17364A"/>
+                </a:solidFill>
+                <a:latin typeface="Aptos" pitchFamily="34" charset="0"/>
+                <a:ea typeface="Aptos" pitchFamily="34" charset="-122"/>
+                <a:cs typeface="Aptos" pitchFamily="34" charset="-120"/>
+              </a:rPr>
+              <a:t>Develop a change management plan that includes communication, training, workflow updates,.</a:t>
+            </a:r>
+            <a:endParaRPr lang="en-US" sz="1380" dirty="0"/>
+          </a:p>
+          <a:p>
+            <a:r>
+              <a:rPr lang="en-US" sz="1380" dirty="0">
+                <a:solidFill>
+                  <a:srgbClr val="17364A"/>
+                </a:solidFill>
+                <a:latin typeface="Aptos" pitchFamily="34" charset="0"/>
+                <a:ea typeface="Aptos" pitchFamily="34" charset="-122"/>
+                <a:cs typeface="Aptos" pitchFamily="34" charset="-120"/>
+              </a:rPr>
+              <a:t>Recognize staff concerns related to trust, workload, deskilling, surveillance,.</a:t>
+            </a:r>
+            <a:endParaRPr lang="en-US" sz="1380" dirty="0"/>
+          </a:p>
+          <a:p>
+            <a:r>
+              <a:rPr lang="en-US" sz="1380" dirty="0">
+                <a:solidFill>
+                  <a:srgbClr val="17364A"/>
+                </a:solidFill>
+                <a:latin typeface="Aptos" pitchFamily="34" charset="0"/>
+                <a:ea typeface="Aptos" pitchFamily="34" charset="-122"/>
+                <a:cs typeface="Aptos" pitchFamily="34" charset="-120"/>
+              </a:rPr>
+              <a:t>Produce an AI adoption and change management plan.</a:t>
+            </a:r>
+            <a:endParaRPr lang="en-US" sz="1380" dirty="0"/>
           </a:p>
         </p:txBody>
       </p:sp>
       <p:sp>
         <p:nvSpPr>
           <p:cNvPr id="16" name="Shape 14"/>
-          <p:cNvSpPr/>
-          <p:nvPr/>
-        </p:nvSpPr>
-        <p:spPr>
-          <a:xfrm>
-            <a:off x="8976360" y="3319272"/>
-            <a:ext cx="792480" cy="749808"/>
-          </a:xfrm>
-          <a:prstGeom prst="roundRect">
-            <a:avLst>
-              <a:gd name="adj" fmla="val 14634"/>
-            </a:avLst>
-          </a:prstGeom>
-          <a:solidFill>
-            <a:srgbClr val="2F8A28"/>
-          </a:solidFill>
-          <a:ln w="12700">
-            <a:solidFill>
-              <a:srgbClr val="2F8A28"/>
-            </a:solidFill>
-            <a:prstDash val="solid"/>
-          </a:ln>
-        </p:spPr>
-      </p:sp>
-      <p:sp>
-        <p:nvSpPr>
-          <p:cNvPr id="17" name="Text 15"/>
-          <p:cNvSpPr/>
-          <p:nvPr/>
-        </p:nvSpPr>
-        <p:spPr>
-          <a:xfrm>
-            <a:off x="9049512" y="3511296"/>
-            <a:ext cx="646176" cy="310896"/>
-          </a:xfrm>
-          <a:prstGeom prst="rect">
-            <a:avLst/>
-          </a:prstGeom>
-          <a:noFill/>
-          <a:ln/>
-        </p:spPr>
-        <p:txBody>
-          <a:bodyPr wrap="square" lIns="0" tIns="0" rIns="0" bIns="0" rtlCol="0" anchor="ctr">
-            <a:normAutofit/>
-          </a:bodyPr>
-          <a:lstStyle/>
-          <a:p>
-            <a:pPr algn="ctr" indent="0" marL="0">
-              <a:buNone/>
-            </a:pPr>
-            <a:r>
-              <a:rPr lang="en-US" sz="1500" b="1" dirty="0">
-                <a:solidFill>
-                  <a:srgbClr val="FFFFFF"/>
-                </a:solidFill>
-                <a:latin typeface="Aptos" pitchFamily="34" charset="0"/>
-                <a:ea typeface="Aptos" pitchFamily="34" charset="-122"/>
-                <a:cs typeface="Aptos" pitchFamily="34" charset="-120"/>
-              </a:rPr>
-              <a:t>Do</a:t>
-            </a:r>
-            <a:endParaRPr lang="en-US" sz="1500" dirty="0"/>
-          </a:p>
-        </p:txBody>
-      </p:sp>
-      <p:sp>
-        <p:nvSpPr>
-          <p:cNvPr id="18" name="Shape 16"/>
-          <p:cNvSpPr/>
-          <p:nvPr/>
-        </p:nvSpPr>
-        <p:spPr>
-          <a:xfrm>
-            <a:off x="10024872" y="3319272"/>
-            <a:ext cx="792480" cy="749808"/>
-          </a:xfrm>
-          <a:prstGeom prst="roundRect">
-            <a:avLst>
-              <a:gd name="adj" fmla="val 14634"/>
-            </a:avLst>
-          </a:prstGeom>
-          <a:solidFill>
-            <a:srgbClr val="D69A2D"/>
-          </a:solidFill>
-          <a:ln w="12700">
-            <a:solidFill>
-              <a:srgbClr val="D69A2D"/>
-            </a:solidFill>
-            <a:prstDash val="solid"/>
-          </a:ln>
-        </p:spPr>
-      </p:sp>
-      <p:sp>
-        <p:nvSpPr>
-          <p:cNvPr id="19" name="Text 17"/>
-          <p:cNvSpPr/>
-          <p:nvPr/>
-        </p:nvSpPr>
-        <p:spPr>
-          <a:xfrm>
-            <a:off x="10098024" y="3511296"/>
-            <a:ext cx="646176" cy="310896"/>
-          </a:xfrm>
-          <a:prstGeom prst="rect">
-            <a:avLst/>
-          </a:prstGeom>
-          <a:noFill/>
-          <a:ln/>
-        </p:spPr>
-        <p:txBody>
-          <a:bodyPr wrap="square" lIns="0" tIns="0" rIns="0" bIns="0" rtlCol="0" anchor="ctr">
-            <a:normAutofit/>
-          </a:bodyPr>
-          <a:lstStyle/>
-          <a:p>
-            <a:pPr algn="ctr" indent="0" marL="0">
-              <a:buNone/>
-            </a:pPr>
-            <a:r>
-              <a:rPr lang="en-US" sz="1500" b="1" dirty="0">
-                <a:solidFill>
-                  <a:srgbClr val="FFFFFF"/>
-                </a:solidFill>
-                <a:latin typeface="Aptos" pitchFamily="34" charset="0"/>
-                <a:ea typeface="Aptos" pitchFamily="34" charset="-122"/>
-                <a:cs typeface="Aptos" pitchFamily="34" charset="-120"/>
-              </a:rPr>
-              <a:t>Review</a:t>
-            </a:r>
-            <a:endParaRPr lang="en-US" sz="1500" dirty="0"/>
-          </a:p>
-        </p:txBody>
-      </p:sp>
-      <p:sp>
-        <p:nvSpPr>
-          <p:cNvPr id="20" name="Shape 18"/>
-          <p:cNvSpPr/>
-          <p:nvPr/>
-        </p:nvSpPr>
-        <p:spPr>
-          <a:xfrm>
-            <a:off x="8293608" y="4389120"/>
-            <a:ext cx="2157984" cy="0"/>
-          </a:xfrm>
-          <a:prstGeom prst="line">
-            <a:avLst/>
-          </a:prstGeom>
-          <a:noFill/>
-          <a:ln w="25400">
-            <a:solidFill>
-              <a:srgbClr val="8ABBD8"/>
-            </a:solidFill>
-            <a:prstDash val="solid"/>
-          </a:ln>
-        </p:spPr>
-      </p:sp>
-      <p:sp>
-        <p:nvSpPr>
-          <p:cNvPr id="21" name="Text 19"/>
-          <p:cNvSpPr/>
-          <p:nvPr/>
-        </p:nvSpPr>
-        <p:spPr>
-          <a:xfrm>
-            <a:off x="7909560" y="3977640"/>
-            <a:ext cx="2926080" cy="182880"/>
-          </a:xfrm>
-          <a:prstGeom prst="rect">
-            <a:avLst/>
-          </a:prstGeom>
-          <a:noFill/>
-          <a:ln/>
-        </p:spPr>
-        <p:txBody>
-          <a:bodyPr wrap="square" lIns="0" tIns="0" rIns="0" bIns="0" rtlCol="0" anchor="ctr"/>
-          <a:lstStyle/>
-          <a:p>
-            <a:pPr algn="ctr" indent="0" marL="0">
-              <a:buNone/>
-            </a:pPr>
-            <a:r>
-              <a:rPr lang="en-US" sz="1000" dirty="0">
-                <a:solidFill>
-                  <a:srgbClr val="003A63"/>
-                </a:solidFill>
-                <a:latin typeface="Aptos" pitchFamily="34" charset="0"/>
-                <a:ea typeface="Aptos" pitchFamily="34" charset="-122"/>
-                <a:cs typeface="Aptos" pitchFamily="34" charset="-120"/>
-              </a:rPr>
-              <a:t>Dependencies visible</a:t>
-            </a:r>
-            <a:endParaRPr lang="en-US" sz="1000" dirty="0"/>
-          </a:p>
-        </p:txBody>
-      </p:sp>
-      <p:sp>
-        <p:nvSpPr>
-          <p:cNvPr id="22" name="Shape 20"/>
           <p:cNvSpPr/>
           <p:nvPr/>
         </p:nvSpPr>
@@ -14825,7 +12669,7 @@
       </p:sp>
       <p:sp>
         <p:nvSpPr>
-          <p:cNvPr id="23" name="Text 21"/>
+          <p:cNvPr id="17" name="Text 15"/>
           <p:cNvSpPr/>
           <p:nvPr/>
         </p:nvSpPr>
@@ -14864,7 +12708,7 @@
       </p:sp>
       <p:sp>
         <p:nvSpPr>
-          <p:cNvPr id="24" name="Text 22"/>
+          <p:cNvPr id="18" name="Text 16"/>
           <p:cNvSpPr/>
           <p:nvPr/>
         </p:nvSpPr>
@@ -15372,13 +13216,11 @@
             </a:avLst>
           </a:prstGeom>
           <a:solidFill>
-            <a:srgbClr val="FFFFFF">
-              <a:alpha val="88000"/>
-            </a:srgbClr>
+            <a:srgbClr val="FFFFFF"/>
           </a:solidFill>
           <a:ln w="12700">
             <a:solidFill>
-              <a:srgbClr val="D6E8F2"/>
+              <a:srgbClr val="B9D7E6"/>
             </a:solidFill>
             <a:prstDash val="solid"/>
           </a:ln>
@@ -15386,30 +13228,42 @@
       </p:sp>
       <p:sp>
         <p:nvSpPr>
-          <p:cNvPr id="14" name="Shape 12"/>
-          <p:cNvSpPr/>
-          <p:nvPr/>
-        </p:nvSpPr>
-        <p:spPr>
-          <a:xfrm>
-            <a:off x="7927848" y="3319272"/>
-            <a:ext cx="792480" cy="749808"/>
-          </a:xfrm>
-          <a:prstGeom prst="roundRect">
-            <a:avLst>
-              <a:gd name="adj" fmla="val 14634"/>
-            </a:avLst>
-          </a:prstGeom>
-          <a:solidFill>
-            <a:srgbClr val="0068B7"/>
-          </a:solidFill>
-          <a:ln w="12700">
-            <a:solidFill>
-              <a:srgbClr val="0068B7"/>
-            </a:solidFill>
-            <a:prstDash val="solid"/>
-          </a:ln>
-        </p:spPr>
+          <p:cNvPr id="14" name="Text 12"/>
+          <p:cNvSpPr/>
+          <p:nvPr/>
+        </p:nvSpPr>
+        <p:spPr>
+          <a:xfrm>
+            <a:off x="7799832" y="2935224"/>
+            <a:ext cx="3145536" cy="256032"/>
+          </a:xfrm>
+          <a:prstGeom prst="rect">
+            <a:avLst/>
+          </a:prstGeom>
+          <a:noFill/>
+          <a:ln/>
+        </p:spPr>
+        <p:txBody>
+          <a:bodyPr wrap="square" lIns="0" tIns="0" rIns="0" bIns="0" rtlCol="0" anchor="ctr"/>
+          <a:lstStyle/>
+          <a:p>
+            <a:pPr indent="0" marL="0">
+              <a:buNone/>
+            </a:pPr>
+            <a:r>
+              <a:rPr lang="en-US" sz="1300" b="1" dirty="0">
+                <a:solidFill>
+                  <a:srgbClr val="0068B7"/>
+                </a:solidFill>
+                <a:latin typeface="Aptos" pitchFamily="34" charset="0"/>
+                <a:ea typeface="Aptos" pitchFamily="34" charset="-122"/>
+                <a:cs typeface="Aptos" pitchFamily="34" charset="-120"/>
+              </a:rPr>
+              <a:t>Concept checkpoints</a:t>
+            </a:r>
+            <a:endParaRPr lang="en-US" sz="1300" dirty="0"/>
+          </a:p>
+        </p:txBody>
       </p:sp>
       <p:sp>
         <p:nvSpPr>
@@ -15419,240 +13273,67 @@
         </p:nvSpPr>
         <p:spPr>
           <a:xfrm>
-            <a:off x="8001000" y="3511296"/>
-            <a:ext cx="646176" cy="310896"/>
-          </a:xfrm>
-          <a:prstGeom prst="rect">
-            <a:avLst/>
-          </a:prstGeom>
-          <a:noFill/>
-          <a:ln/>
-        </p:spPr>
-        <p:txBody>
-          <a:bodyPr wrap="square" lIns="0" tIns="0" rIns="0" bIns="0" rtlCol="0" anchor="ctr">
+            <a:off x="7818120" y="3300984"/>
+            <a:ext cx="3090672" cy="877824"/>
+          </a:xfrm>
+          <a:prstGeom prst="rect">
+            <a:avLst/>
+          </a:prstGeom>
+          <a:noFill/>
+          <a:ln/>
+        </p:spPr>
+        <p:txBody>
+          <a:bodyPr wrap="square" lIns="254" tIns="254" rIns="254" bIns="254" rtlCol="0" anchor="t">
             <a:normAutofit/>
           </a:bodyPr>
           <a:lstStyle/>
           <a:p>
-            <a:pPr algn="ctr" indent="0" marL="0">
-              <a:buNone/>
-            </a:pPr>
-            <a:r>
-              <a:rPr lang="en-US" sz="1500" b="1" dirty="0">
-                <a:solidFill>
-                  <a:srgbClr val="FFFFFF"/>
-                </a:solidFill>
-                <a:latin typeface="Aptos" pitchFamily="34" charset="0"/>
-                <a:ea typeface="Aptos" pitchFamily="34" charset="-122"/>
-                <a:cs typeface="Aptos" pitchFamily="34" charset="-120"/>
-              </a:rPr>
-              <a:t>Plan</a:t>
-            </a:r>
-            <a:endParaRPr lang="en-US" sz="1500" dirty="0"/>
+            <a:r>
+              <a:rPr lang="en-US" sz="1380" dirty="0">
+                <a:solidFill>
+                  <a:srgbClr val="17364A"/>
+                </a:solidFill>
+                <a:latin typeface="Aptos" pitchFamily="34" charset="0"/>
+                <a:ea typeface="Aptos" pitchFamily="34" charset="-122"/>
+                <a:cs typeface="Aptos" pitchFamily="34" charset="-120"/>
+              </a:rPr>
+              <a:t>AI adoption changes how people work, make decisions, document actions, communicate with.</a:t>
+            </a:r>
+            <a:endParaRPr lang="en-US" sz="1380" dirty="0"/>
+          </a:p>
+          <a:p>
+            <a:r>
+              <a:rPr lang="en-US" sz="1380" dirty="0">
+                <a:solidFill>
+                  <a:srgbClr val="17364A"/>
+                </a:solidFill>
+                <a:latin typeface="Aptos" pitchFamily="34" charset="0"/>
+                <a:ea typeface="Aptos" pitchFamily="34" charset="-122"/>
+                <a:cs typeface="Aptos" pitchFamily="34" charset="-120"/>
+              </a:rPr>
+              <a:t>Staff need to understand why a tool is being introduced, how it affects their workflow,.</a:t>
+            </a:r>
+            <a:endParaRPr lang="en-US" sz="1380" dirty="0"/>
+          </a:p>
+          <a:p>
+            <a:r>
+              <a:rPr lang="en-US" sz="1380" dirty="0">
+                <a:solidFill>
+                  <a:srgbClr val="17364A"/>
+                </a:solidFill>
+                <a:latin typeface="Aptos" pitchFamily="34" charset="0"/>
+                <a:ea typeface="Aptos" pitchFamily="34" charset="-122"/>
+                <a:cs typeface="Aptos" pitchFamily="34" charset="-120"/>
+              </a:rPr>
+              <a:t>This module helps leaders plan the organizational side of AI adoption.</a:t>
+            </a:r>
+            <a:endParaRPr lang="en-US" sz="1380" dirty="0"/>
           </a:p>
         </p:txBody>
       </p:sp>
       <p:sp>
         <p:nvSpPr>
           <p:cNvPr id="16" name="Shape 14"/>
-          <p:cNvSpPr/>
-          <p:nvPr/>
-        </p:nvSpPr>
-        <p:spPr>
-          <a:xfrm>
-            <a:off x="8976360" y="3319272"/>
-            <a:ext cx="792480" cy="749808"/>
-          </a:xfrm>
-          <a:prstGeom prst="roundRect">
-            <a:avLst>
-              <a:gd name="adj" fmla="val 14634"/>
-            </a:avLst>
-          </a:prstGeom>
-          <a:solidFill>
-            <a:srgbClr val="2F8A28"/>
-          </a:solidFill>
-          <a:ln w="12700">
-            <a:solidFill>
-              <a:srgbClr val="2F8A28"/>
-            </a:solidFill>
-            <a:prstDash val="solid"/>
-          </a:ln>
-        </p:spPr>
-      </p:sp>
-      <p:sp>
-        <p:nvSpPr>
-          <p:cNvPr id="17" name="Text 15"/>
-          <p:cNvSpPr/>
-          <p:nvPr/>
-        </p:nvSpPr>
-        <p:spPr>
-          <a:xfrm>
-            <a:off x="9049512" y="3511296"/>
-            <a:ext cx="646176" cy="310896"/>
-          </a:xfrm>
-          <a:prstGeom prst="rect">
-            <a:avLst/>
-          </a:prstGeom>
-          <a:noFill/>
-          <a:ln/>
-        </p:spPr>
-        <p:txBody>
-          <a:bodyPr wrap="square" lIns="0" tIns="0" rIns="0" bIns="0" rtlCol="0" anchor="ctr">
-            <a:normAutofit/>
-          </a:bodyPr>
-          <a:lstStyle/>
-          <a:p>
-            <a:pPr algn="ctr" indent="0" marL="0">
-              <a:buNone/>
-            </a:pPr>
-            <a:r>
-              <a:rPr lang="en-US" sz="1500" b="1" dirty="0">
-                <a:solidFill>
-                  <a:srgbClr val="FFFFFF"/>
-                </a:solidFill>
-                <a:latin typeface="Aptos" pitchFamily="34" charset="0"/>
-                <a:ea typeface="Aptos" pitchFamily="34" charset="-122"/>
-                <a:cs typeface="Aptos" pitchFamily="34" charset="-120"/>
-              </a:rPr>
-              <a:t>Do</a:t>
-            </a:r>
-            <a:endParaRPr lang="en-US" sz="1500" dirty="0"/>
-          </a:p>
-        </p:txBody>
-      </p:sp>
-      <p:sp>
-        <p:nvSpPr>
-          <p:cNvPr id="18" name="Shape 16"/>
-          <p:cNvSpPr/>
-          <p:nvPr/>
-        </p:nvSpPr>
-        <p:spPr>
-          <a:xfrm>
-            <a:off x="10024872" y="3319272"/>
-            <a:ext cx="792480" cy="749808"/>
-          </a:xfrm>
-          <a:prstGeom prst="roundRect">
-            <a:avLst>
-              <a:gd name="adj" fmla="val 14634"/>
-            </a:avLst>
-          </a:prstGeom>
-          <a:solidFill>
-            <a:srgbClr val="D69A2D"/>
-          </a:solidFill>
-          <a:ln w="12700">
-            <a:solidFill>
-              <a:srgbClr val="D69A2D"/>
-            </a:solidFill>
-            <a:prstDash val="solid"/>
-          </a:ln>
-        </p:spPr>
-      </p:sp>
-      <p:sp>
-        <p:nvSpPr>
-          <p:cNvPr id="19" name="Text 17"/>
-          <p:cNvSpPr/>
-          <p:nvPr/>
-        </p:nvSpPr>
-        <p:spPr>
-          <a:xfrm>
-            <a:off x="10098024" y="3511296"/>
-            <a:ext cx="646176" cy="310896"/>
-          </a:xfrm>
-          <a:prstGeom prst="rect">
-            <a:avLst/>
-          </a:prstGeom>
-          <a:noFill/>
-          <a:ln/>
-        </p:spPr>
-        <p:txBody>
-          <a:bodyPr wrap="square" lIns="0" tIns="0" rIns="0" bIns="0" rtlCol="0" anchor="ctr">
-            <a:normAutofit/>
-          </a:bodyPr>
-          <a:lstStyle/>
-          <a:p>
-            <a:pPr algn="ctr" indent="0" marL="0">
-              <a:buNone/>
-            </a:pPr>
-            <a:r>
-              <a:rPr lang="en-US" sz="1500" b="1" dirty="0">
-                <a:solidFill>
-                  <a:srgbClr val="FFFFFF"/>
-                </a:solidFill>
-                <a:latin typeface="Aptos" pitchFamily="34" charset="0"/>
-                <a:ea typeface="Aptos" pitchFamily="34" charset="-122"/>
-                <a:cs typeface="Aptos" pitchFamily="34" charset="-120"/>
-              </a:rPr>
-              <a:t>Review</a:t>
-            </a:r>
-            <a:endParaRPr lang="en-US" sz="1500" dirty="0"/>
-          </a:p>
-        </p:txBody>
-      </p:sp>
-      <p:sp>
-        <p:nvSpPr>
-          <p:cNvPr id="20" name="Shape 18"/>
-          <p:cNvSpPr/>
-          <p:nvPr/>
-        </p:nvSpPr>
-        <p:spPr>
-          <a:xfrm>
-            <a:off x="8293608" y="4389120"/>
-            <a:ext cx="2157984" cy="0"/>
-          </a:xfrm>
-          <a:prstGeom prst="line">
-            <a:avLst/>
-          </a:prstGeom>
-          <a:noFill/>
-          <a:ln w="25400">
-            <a:solidFill>
-              <a:srgbClr val="8ABBD8"/>
-            </a:solidFill>
-            <a:prstDash val="solid"/>
-          </a:ln>
-        </p:spPr>
-      </p:sp>
-      <p:sp>
-        <p:nvSpPr>
-          <p:cNvPr id="21" name="Text 19"/>
-          <p:cNvSpPr/>
-          <p:nvPr/>
-        </p:nvSpPr>
-        <p:spPr>
-          <a:xfrm>
-            <a:off x="7909560" y="3977640"/>
-            <a:ext cx="2926080" cy="182880"/>
-          </a:xfrm>
-          <a:prstGeom prst="rect">
-            <a:avLst/>
-          </a:prstGeom>
-          <a:noFill/>
-          <a:ln/>
-        </p:spPr>
-        <p:txBody>
-          <a:bodyPr wrap="square" lIns="0" tIns="0" rIns="0" bIns="0" rtlCol="0" anchor="ctr"/>
-          <a:lstStyle/>
-          <a:p>
-            <a:pPr algn="ctr" indent="0" marL="0">
-              <a:buNone/>
-            </a:pPr>
-            <a:r>
-              <a:rPr lang="en-US" sz="1000" dirty="0">
-                <a:solidFill>
-                  <a:srgbClr val="003A63"/>
-                </a:solidFill>
-                <a:latin typeface="Aptos" pitchFamily="34" charset="0"/>
-                <a:ea typeface="Aptos" pitchFamily="34" charset="-122"/>
-                <a:cs typeface="Aptos" pitchFamily="34" charset="-120"/>
-              </a:rPr>
-              <a:t>Dependencies visible</a:t>
-            </a:r>
-            <a:endParaRPr lang="en-US" sz="1000" dirty="0"/>
-          </a:p>
-        </p:txBody>
-      </p:sp>
-      <p:sp>
-        <p:nvSpPr>
-          <p:cNvPr id="22" name="Shape 20"/>
           <p:cNvSpPr/>
           <p:nvPr/>
         </p:nvSpPr>
@@ -15679,7 +13360,7 @@
       </p:sp>
       <p:sp>
         <p:nvSpPr>
-          <p:cNvPr id="23" name="Text 21"/>
+          <p:cNvPr id="17" name="Text 15"/>
           <p:cNvSpPr/>
           <p:nvPr/>
         </p:nvSpPr>
@@ -15718,7 +13399,7 @@
       </p:sp>
       <p:sp>
         <p:nvSpPr>
-          <p:cNvPr id="24" name="Text 22"/>
+          <p:cNvPr id="18" name="Text 16"/>
           <p:cNvSpPr/>
           <p:nvPr/>
         </p:nvSpPr>
@@ -16226,13 +13907,11 @@
             </a:avLst>
           </a:prstGeom>
           <a:solidFill>
-            <a:srgbClr val="FFFFFF">
-              <a:alpha val="88000"/>
-            </a:srgbClr>
+            <a:srgbClr val="FFFFFF"/>
           </a:solidFill>
           <a:ln w="12700">
             <a:solidFill>
-              <a:srgbClr val="D6E8F2"/>
+              <a:srgbClr val="B9D7E6"/>
             </a:solidFill>
             <a:prstDash val="solid"/>
           </a:ln>
@@ -16240,30 +13919,42 @@
       </p:sp>
       <p:sp>
         <p:nvSpPr>
-          <p:cNvPr id="14" name="Shape 12"/>
-          <p:cNvSpPr/>
-          <p:nvPr/>
-        </p:nvSpPr>
-        <p:spPr>
-          <a:xfrm>
-            <a:off x="7927848" y="3319272"/>
-            <a:ext cx="792480" cy="749808"/>
-          </a:xfrm>
-          <a:prstGeom prst="roundRect">
-            <a:avLst>
-              <a:gd name="adj" fmla="val 14634"/>
-            </a:avLst>
-          </a:prstGeom>
-          <a:solidFill>
-            <a:srgbClr val="0068B7"/>
-          </a:solidFill>
-          <a:ln w="12700">
-            <a:solidFill>
-              <a:srgbClr val="0068B7"/>
-            </a:solidFill>
-            <a:prstDash val="solid"/>
-          </a:ln>
-        </p:spPr>
+          <p:cNvPr id="14" name="Text 12"/>
+          <p:cNvSpPr/>
+          <p:nvPr/>
+        </p:nvSpPr>
+        <p:spPr>
+          <a:xfrm>
+            <a:off x="7799832" y="2935224"/>
+            <a:ext cx="3145536" cy="256032"/>
+          </a:xfrm>
+          <a:prstGeom prst="rect">
+            <a:avLst/>
+          </a:prstGeom>
+          <a:noFill/>
+          <a:ln/>
+        </p:spPr>
+        <p:txBody>
+          <a:bodyPr wrap="square" lIns="0" tIns="0" rIns="0" bIns="0" rtlCol="0" anchor="ctr"/>
+          <a:lstStyle/>
+          <a:p>
+            <a:pPr indent="0" marL="0">
+              <a:buNone/>
+            </a:pPr>
+            <a:r>
+              <a:rPr lang="en-US" sz="1300" b="1" dirty="0">
+                <a:solidFill>
+                  <a:srgbClr val="0068B7"/>
+                </a:solidFill>
+                <a:latin typeface="Aptos" pitchFamily="34" charset="0"/>
+                <a:ea typeface="Aptos" pitchFamily="34" charset="-122"/>
+                <a:cs typeface="Aptos" pitchFamily="34" charset="-120"/>
+              </a:rPr>
+              <a:t>Concept checkpoints</a:t>
+            </a:r>
+            <a:endParaRPr lang="en-US" sz="1300" dirty="0"/>
+          </a:p>
+        </p:txBody>
       </p:sp>
       <p:sp>
         <p:nvSpPr>
@@ -16273,240 +13964,67 @@
         </p:nvSpPr>
         <p:spPr>
           <a:xfrm>
-            <a:off x="8001000" y="3511296"/>
-            <a:ext cx="646176" cy="310896"/>
-          </a:xfrm>
-          <a:prstGeom prst="rect">
-            <a:avLst/>
-          </a:prstGeom>
-          <a:noFill/>
-          <a:ln/>
-        </p:spPr>
-        <p:txBody>
-          <a:bodyPr wrap="square" lIns="0" tIns="0" rIns="0" bIns="0" rtlCol="0" anchor="ctr">
+            <a:off x="7818120" y="3300984"/>
+            <a:ext cx="3090672" cy="877824"/>
+          </a:xfrm>
+          <a:prstGeom prst="rect">
+            <a:avLst/>
+          </a:prstGeom>
+          <a:noFill/>
+          <a:ln/>
+        </p:spPr>
+        <p:txBody>
+          <a:bodyPr wrap="square" lIns="254" tIns="254" rIns="254" bIns="254" rtlCol="0" anchor="t">
             <a:normAutofit/>
           </a:bodyPr>
           <a:lstStyle/>
           <a:p>
-            <a:pPr algn="ctr" indent="0" marL="0">
-              <a:buNone/>
-            </a:pPr>
-            <a:r>
-              <a:rPr lang="en-US" sz="1500" b="1" dirty="0">
-                <a:solidFill>
-                  <a:srgbClr val="FFFFFF"/>
-                </a:solidFill>
-                <a:latin typeface="Aptos" pitchFamily="34" charset="0"/>
-                <a:ea typeface="Aptos" pitchFamily="34" charset="-122"/>
-                <a:cs typeface="Aptos" pitchFamily="34" charset="-120"/>
-              </a:rPr>
-              <a:t>Plan</a:t>
-            </a:r>
-            <a:endParaRPr lang="en-US" sz="1500" dirty="0"/>
+            <a:r>
+              <a:rPr lang="en-US" sz="1380" dirty="0">
+                <a:solidFill>
+                  <a:srgbClr val="17364A"/>
+                </a:solidFill>
+                <a:latin typeface="Aptos" pitchFamily="34" charset="0"/>
+                <a:ea typeface="Aptos" pitchFamily="34" charset="-122"/>
+                <a:cs typeface="Aptos" pitchFamily="34" charset="-120"/>
+              </a:rPr>
+              <a:t>Staff may not trust the output, may over-trust it, may not understand their review.</a:t>
+            </a:r>
+            <a:endParaRPr lang="en-US" sz="1380" dirty="0"/>
+          </a:p>
+          <a:p>
+            <a:r>
+              <a:rPr lang="en-US" sz="1380" dirty="0">
+                <a:solidFill>
+                  <a:srgbClr val="17364A"/>
+                </a:solidFill>
+                <a:latin typeface="Aptos" pitchFamily="34" charset="0"/>
+                <a:ea typeface="Aptos" pitchFamily="34" charset="-122"/>
+                <a:cs typeface="Aptos" pitchFamily="34" charset="-120"/>
+              </a:rPr>
+              <a:t>Change management is also an equity and workforce issue.</a:t>
+            </a:r>
+            <a:endParaRPr lang="en-US" sz="1380" dirty="0"/>
+          </a:p>
+          <a:p>
+            <a:r>
+              <a:rPr lang="en-US" sz="1380" dirty="0">
+                <a:solidFill>
+                  <a:srgbClr val="17364A"/>
+                </a:solidFill>
+                <a:latin typeface="Aptos" pitchFamily="34" charset="0"/>
+                <a:ea typeface="Aptos" pitchFamily="34" charset="-122"/>
+                <a:cs typeface="Aptos" pitchFamily="34" charset="-120"/>
+              </a:rPr>
+              <a:t>Staff who are not included in design may experience AI as a threat or burden.</a:t>
+            </a:r>
+            <a:endParaRPr lang="en-US" sz="1380" dirty="0"/>
           </a:p>
         </p:txBody>
       </p:sp>
       <p:sp>
         <p:nvSpPr>
           <p:cNvPr id="16" name="Shape 14"/>
-          <p:cNvSpPr/>
-          <p:nvPr/>
-        </p:nvSpPr>
-        <p:spPr>
-          <a:xfrm>
-            <a:off x="8976360" y="3319272"/>
-            <a:ext cx="792480" cy="749808"/>
-          </a:xfrm>
-          <a:prstGeom prst="roundRect">
-            <a:avLst>
-              <a:gd name="adj" fmla="val 14634"/>
-            </a:avLst>
-          </a:prstGeom>
-          <a:solidFill>
-            <a:srgbClr val="2F8A28"/>
-          </a:solidFill>
-          <a:ln w="12700">
-            <a:solidFill>
-              <a:srgbClr val="2F8A28"/>
-            </a:solidFill>
-            <a:prstDash val="solid"/>
-          </a:ln>
-        </p:spPr>
-      </p:sp>
-      <p:sp>
-        <p:nvSpPr>
-          <p:cNvPr id="17" name="Text 15"/>
-          <p:cNvSpPr/>
-          <p:nvPr/>
-        </p:nvSpPr>
-        <p:spPr>
-          <a:xfrm>
-            <a:off x="9049512" y="3511296"/>
-            <a:ext cx="646176" cy="310896"/>
-          </a:xfrm>
-          <a:prstGeom prst="rect">
-            <a:avLst/>
-          </a:prstGeom>
-          <a:noFill/>
-          <a:ln/>
-        </p:spPr>
-        <p:txBody>
-          <a:bodyPr wrap="square" lIns="0" tIns="0" rIns="0" bIns="0" rtlCol="0" anchor="ctr">
-            <a:normAutofit/>
-          </a:bodyPr>
-          <a:lstStyle/>
-          <a:p>
-            <a:pPr algn="ctr" indent="0" marL="0">
-              <a:buNone/>
-            </a:pPr>
-            <a:r>
-              <a:rPr lang="en-US" sz="1500" b="1" dirty="0">
-                <a:solidFill>
-                  <a:srgbClr val="FFFFFF"/>
-                </a:solidFill>
-                <a:latin typeface="Aptos" pitchFamily="34" charset="0"/>
-                <a:ea typeface="Aptos" pitchFamily="34" charset="-122"/>
-                <a:cs typeface="Aptos" pitchFamily="34" charset="-120"/>
-              </a:rPr>
-              <a:t>Do</a:t>
-            </a:r>
-            <a:endParaRPr lang="en-US" sz="1500" dirty="0"/>
-          </a:p>
-        </p:txBody>
-      </p:sp>
-      <p:sp>
-        <p:nvSpPr>
-          <p:cNvPr id="18" name="Shape 16"/>
-          <p:cNvSpPr/>
-          <p:nvPr/>
-        </p:nvSpPr>
-        <p:spPr>
-          <a:xfrm>
-            <a:off x="10024872" y="3319272"/>
-            <a:ext cx="792480" cy="749808"/>
-          </a:xfrm>
-          <a:prstGeom prst="roundRect">
-            <a:avLst>
-              <a:gd name="adj" fmla="val 14634"/>
-            </a:avLst>
-          </a:prstGeom>
-          <a:solidFill>
-            <a:srgbClr val="D69A2D"/>
-          </a:solidFill>
-          <a:ln w="12700">
-            <a:solidFill>
-              <a:srgbClr val="D69A2D"/>
-            </a:solidFill>
-            <a:prstDash val="solid"/>
-          </a:ln>
-        </p:spPr>
-      </p:sp>
-      <p:sp>
-        <p:nvSpPr>
-          <p:cNvPr id="19" name="Text 17"/>
-          <p:cNvSpPr/>
-          <p:nvPr/>
-        </p:nvSpPr>
-        <p:spPr>
-          <a:xfrm>
-            <a:off x="10098024" y="3511296"/>
-            <a:ext cx="646176" cy="310896"/>
-          </a:xfrm>
-          <a:prstGeom prst="rect">
-            <a:avLst/>
-          </a:prstGeom>
-          <a:noFill/>
-          <a:ln/>
-        </p:spPr>
-        <p:txBody>
-          <a:bodyPr wrap="square" lIns="0" tIns="0" rIns="0" bIns="0" rtlCol="0" anchor="ctr">
-            <a:normAutofit/>
-          </a:bodyPr>
-          <a:lstStyle/>
-          <a:p>
-            <a:pPr algn="ctr" indent="0" marL="0">
-              <a:buNone/>
-            </a:pPr>
-            <a:r>
-              <a:rPr lang="en-US" sz="1500" b="1" dirty="0">
-                <a:solidFill>
-                  <a:srgbClr val="FFFFFF"/>
-                </a:solidFill>
-                <a:latin typeface="Aptos" pitchFamily="34" charset="0"/>
-                <a:ea typeface="Aptos" pitchFamily="34" charset="-122"/>
-                <a:cs typeface="Aptos" pitchFamily="34" charset="-120"/>
-              </a:rPr>
-              <a:t>Review</a:t>
-            </a:r>
-            <a:endParaRPr lang="en-US" sz="1500" dirty="0"/>
-          </a:p>
-        </p:txBody>
-      </p:sp>
-      <p:sp>
-        <p:nvSpPr>
-          <p:cNvPr id="20" name="Shape 18"/>
-          <p:cNvSpPr/>
-          <p:nvPr/>
-        </p:nvSpPr>
-        <p:spPr>
-          <a:xfrm>
-            <a:off x="8293608" y="4389120"/>
-            <a:ext cx="2157984" cy="0"/>
-          </a:xfrm>
-          <a:prstGeom prst="line">
-            <a:avLst/>
-          </a:prstGeom>
-          <a:noFill/>
-          <a:ln w="25400">
-            <a:solidFill>
-              <a:srgbClr val="8ABBD8"/>
-            </a:solidFill>
-            <a:prstDash val="solid"/>
-          </a:ln>
-        </p:spPr>
-      </p:sp>
-      <p:sp>
-        <p:nvSpPr>
-          <p:cNvPr id="21" name="Text 19"/>
-          <p:cNvSpPr/>
-          <p:nvPr/>
-        </p:nvSpPr>
-        <p:spPr>
-          <a:xfrm>
-            <a:off x="7909560" y="3977640"/>
-            <a:ext cx="2926080" cy="182880"/>
-          </a:xfrm>
-          <a:prstGeom prst="rect">
-            <a:avLst/>
-          </a:prstGeom>
-          <a:noFill/>
-          <a:ln/>
-        </p:spPr>
-        <p:txBody>
-          <a:bodyPr wrap="square" lIns="0" tIns="0" rIns="0" bIns="0" rtlCol="0" anchor="ctr"/>
-          <a:lstStyle/>
-          <a:p>
-            <a:pPr algn="ctr" indent="0" marL="0">
-              <a:buNone/>
-            </a:pPr>
-            <a:r>
-              <a:rPr lang="en-US" sz="1000" dirty="0">
-                <a:solidFill>
-                  <a:srgbClr val="003A63"/>
-                </a:solidFill>
-                <a:latin typeface="Aptos" pitchFamily="34" charset="0"/>
-                <a:ea typeface="Aptos" pitchFamily="34" charset="-122"/>
-                <a:cs typeface="Aptos" pitchFamily="34" charset="-120"/>
-              </a:rPr>
-              <a:t>Dependencies visible</a:t>
-            </a:r>
-            <a:endParaRPr lang="en-US" sz="1000" dirty="0"/>
-          </a:p>
-        </p:txBody>
-      </p:sp>
-      <p:sp>
-        <p:nvSpPr>
-          <p:cNvPr id="22" name="Shape 20"/>
           <p:cNvSpPr/>
           <p:nvPr/>
         </p:nvSpPr>
@@ -16533,7 +14051,7 @@
       </p:sp>
       <p:sp>
         <p:nvSpPr>
-          <p:cNvPr id="23" name="Text 21"/>
+          <p:cNvPr id="17" name="Text 15"/>
           <p:cNvSpPr/>
           <p:nvPr/>
         </p:nvSpPr>
@@ -16572,7 +14090,7 @@
       </p:sp>
       <p:sp>
         <p:nvSpPr>
-          <p:cNvPr id="24" name="Text 22"/>
+          <p:cNvPr id="18" name="Text 16"/>
           <p:cNvSpPr/>
           <p:nvPr/>
         </p:nvSpPr>
@@ -17080,13 +14598,11 @@
             </a:avLst>
           </a:prstGeom>
           <a:solidFill>
-            <a:srgbClr val="FFFFFF">
-              <a:alpha val="88000"/>
-            </a:srgbClr>
+            <a:srgbClr val="FFFFFF"/>
           </a:solidFill>
           <a:ln w="12700">
             <a:solidFill>
-              <a:srgbClr val="D6E8F2"/>
+              <a:srgbClr val="B9D7E6"/>
             </a:solidFill>
             <a:prstDash val="solid"/>
           </a:ln>
@@ -17094,30 +14610,42 @@
       </p:sp>
       <p:sp>
         <p:nvSpPr>
-          <p:cNvPr id="14" name="Shape 12"/>
-          <p:cNvSpPr/>
-          <p:nvPr/>
-        </p:nvSpPr>
-        <p:spPr>
-          <a:xfrm>
-            <a:off x="7927848" y="3319272"/>
-            <a:ext cx="792480" cy="749808"/>
-          </a:xfrm>
-          <a:prstGeom prst="roundRect">
-            <a:avLst>
-              <a:gd name="adj" fmla="val 14634"/>
-            </a:avLst>
-          </a:prstGeom>
-          <a:solidFill>
-            <a:srgbClr val="0068B7"/>
-          </a:solidFill>
-          <a:ln w="12700">
-            <a:solidFill>
-              <a:srgbClr val="0068B7"/>
-            </a:solidFill>
-            <a:prstDash val="solid"/>
-          </a:ln>
-        </p:spPr>
+          <p:cNvPr id="14" name="Text 12"/>
+          <p:cNvSpPr/>
+          <p:nvPr/>
+        </p:nvSpPr>
+        <p:spPr>
+          <a:xfrm>
+            <a:off x="7799832" y="2935224"/>
+            <a:ext cx="3145536" cy="256032"/>
+          </a:xfrm>
+          <a:prstGeom prst="rect">
+            <a:avLst/>
+          </a:prstGeom>
+          <a:noFill/>
+          <a:ln/>
+        </p:spPr>
+        <p:txBody>
+          <a:bodyPr wrap="square" lIns="0" tIns="0" rIns="0" bIns="0" rtlCol="0" anchor="ctr"/>
+          <a:lstStyle/>
+          <a:p>
+            <a:pPr indent="0" marL="0">
+              <a:buNone/>
+            </a:pPr>
+            <a:r>
+              <a:rPr lang="en-US" sz="1300" b="1" dirty="0">
+                <a:solidFill>
+                  <a:srgbClr val="0068B7"/>
+                </a:solidFill>
+                <a:latin typeface="Aptos" pitchFamily="34" charset="0"/>
+                <a:ea typeface="Aptos" pitchFamily="34" charset="-122"/>
+                <a:cs typeface="Aptos" pitchFamily="34" charset="-120"/>
+              </a:rPr>
+              <a:t>Concept checkpoints</a:t>
+            </a:r>
+            <a:endParaRPr lang="en-US" sz="1300" dirty="0"/>
+          </a:p>
+        </p:txBody>
       </p:sp>
       <p:sp>
         <p:nvSpPr>
@@ -17127,240 +14655,67 @@
         </p:nvSpPr>
         <p:spPr>
           <a:xfrm>
-            <a:off x="8001000" y="3511296"/>
-            <a:ext cx="646176" cy="310896"/>
-          </a:xfrm>
-          <a:prstGeom prst="rect">
-            <a:avLst/>
-          </a:prstGeom>
-          <a:noFill/>
-          <a:ln/>
-        </p:spPr>
-        <p:txBody>
-          <a:bodyPr wrap="square" lIns="0" tIns="0" rIns="0" bIns="0" rtlCol="0" anchor="ctr">
+            <a:off x="7818120" y="3300984"/>
+            <a:ext cx="3090672" cy="877824"/>
+          </a:xfrm>
+          <a:prstGeom prst="rect">
+            <a:avLst/>
+          </a:prstGeom>
+          <a:noFill/>
+          <a:ln/>
+        </p:spPr>
+        <p:txBody>
+          <a:bodyPr wrap="square" lIns="254" tIns="254" rIns="254" bIns="254" rtlCol="0" anchor="t">
             <a:normAutofit/>
           </a:bodyPr>
           <a:lstStyle/>
           <a:p>
-            <a:pPr algn="ctr" indent="0" marL="0">
-              <a:buNone/>
-            </a:pPr>
-            <a:r>
-              <a:rPr lang="en-US" sz="1500" b="1" dirty="0">
-                <a:solidFill>
-                  <a:srgbClr val="FFFFFF"/>
-                </a:solidFill>
-                <a:latin typeface="Aptos" pitchFamily="34" charset="0"/>
-                <a:ea typeface="Aptos" pitchFamily="34" charset="-122"/>
-                <a:cs typeface="Aptos" pitchFamily="34" charset="-120"/>
-              </a:rPr>
-              <a:t>Plan</a:t>
-            </a:r>
-            <a:endParaRPr lang="en-US" sz="1500" dirty="0"/>
+            <a:r>
+              <a:rPr lang="en-US" sz="1380" dirty="0">
+                <a:solidFill>
+                  <a:srgbClr val="17364A"/>
+                </a:solidFill>
+                <a:latin typeface="Aptos" pitchFamily="34" charset="0"/>
+                <a:ea typeface="Aptos" pitchFamily="34" charset="-122"/>
+                <a:cs typeface="Aptos" pitchFamily="34" charset="-120"/>
+              </a:rPr>
+              <a:t>The tool is technically functional, but staff do not use it because they are unsure.</a:t>
+            </a:r>
+            <a:endParaRPr lang="en-US" sz="1380" dirty="0"/>
+          </a:p>
+          <a:p>
+            <a:r>
+              <a:rPr lang="en-US" sz="1380" dirty="0">
+                <a:solidFill>
+                  <a:srgbClr val="17364A"/>
+                </a:solidFill>
+                <a:latin typeface="Aptos" pitchFamily="34" charset="0"/>
+                <a:ea typeface="Aptos" pitchFamily="34" charset="-122"/>
+                <a:cs typeface="Aptos" pitchFamily="34" charset="-120"/>
+              </a:rPr>
+              <a:t>A change management plan addresses these concerns directly.</a:t>
+            </a:r>
+            <a:endParaRPr lang="en-US" sz="1380" dirty="0"/>
+          </a:p>
+          <a:p>
+            <a:r>
+              <a:rPr lang="en-US" sz="1380" dirty="0">
+                <a:solidFill>
+                  <a:srgbClr val="17364A"/>
+                </a:solidFill>
+                <a:latin typeface="Aptos" pitchFamily="34" charset="0"/>
+                <a:ea typeface="Aptos" pitchFamily="34" charset="-122"/>
+                <a:cs typeface="Aptos" pitchFamily="34" charset="-120"/>
+              </a:rPr>
+              <a:t>It explains the purpose of the tool, approved uses, prohibited uses, privacy protections,.</a:t>
+            </a:r>
+            <a:endParaRPr lang="en-US" sz="1380" dirty="0"/>
           </a:p>
         </p:txBody>
       </p:sp>
       <p:sp>
         <p:nvSpPr>
           <p:cNvPr id="16" name="Shape 14"/>
-          <p:cNvSpPr/>
-          <p:nvPr/>
-        </p:nvSpPr>
-        <p:spPr>
-          <a:xfrm>
-            <a:off x="8976360" y="3319272"/>
-            <a:ext cx="792480" cy="749808"/>
-          </a:xfrm>
-          <a:prstGeom prst="roundRect">
-            <a:avLst>
-              <a:gd name="adj" fmla="val 14634"/>
-            </a:avLst>
-          </a:prstGeom>
-          <a:solidFill>
-            <a:srgbClr val="2F8A28"/>
-          </a:solidFill>
-          <a:ln w="12700">
-            <a:solidFill>
-              <a:srgbClr val="2F8A28"/>
-            </a:solidFill>
-            <a:prstDash val="solid"/>
-          </a:ln>
-        </p:spPr>
-      </p:sp>
-      <p:sp>
-        <p:nvSpPr>
-          <p:cNvPr id="17" name="Text 15"/>
-          <p:cNvSpPr/>
-          <p:nvPr/>
-        </p:nvSpPr>
-        <p:spPr>
-          <a:xfrm>
-            <a:off x="9049512" y="3511296"/>
-            <a:ext cx="646176" cy="310896"/>
-          </a:xfrm>
-          <a:prstGeom prst="rect">
-            <a:avLst/>
-          </a:prstGeom>
-          <a:noFill/>
-          <a:ln/>
-        </p:spPr>
-        <p:txBody>
-          <a:bodyPr wrap="square" lIns="0" tIns="0" rIns="0" bIns="0" rtlCol="0" anchor="ctr">
-            <a:normAutofit/>
-          </a:bodyPr>
-          <a:lstStyle/>
-          <a:p>
-            <a:pPr algn="ctr" indent="0" marL="0">
-              <a:buNone/>
-            </a:pPr>
-            <a:r>
-              <a:rPr lang="en-US" sz="1500" b="1" dirty="0">
-                <a:solidFill>
-                  <a:srgbClr val="FFFFFF"/>
-                </a:solidFill>
-                <a:latin typeface="Aptos" pitchFamily="34" charset="0"/>
-                <a:ea typeface="Aptos" pitchFamily="34" charset="-122"/>
-                <a:cs typeface="Aptos" pitchFamily="34" charset="-120"/>
-              </a:rPr>
-              <a:t>Do</a:t>
-            </a:r>
-            <a:endParaRPr lang="en-US" sz="1500" dirty="0"/>
-          </a:p>
-        </p:txBody>
-      </p:sp>
-      <p:sp>
-        <p:nvSpPr>
-          <p:cNvPr id="18" name="Shape 16"/>
-          <p:cNvSpPr/>
-          <p:nvPr/>
-        </p:nvSpPr>
-        <p:spPr>
-          <a:xfrm>
-            <a:off x="10024872" y="3319272"/>
-            <a:ext cx="792480" cy="749808"/>
-          </a:xfrm>
-          <a:prstGeom prst="roundRect">
-            <a:avLst>
-              <a:gd name="adj" fmla="val 14634"/>
-            </a:avLst>
-          </a:prstGeom>
-          <a:solidFill>
-            <a:srgbClr val="D69A2D"/>
-          </a:solidFill>
-          <a:ln w="12700">
-            <a:solidFill>
-              <a:srgbClr val="D69A2D"/>
-            </a:solidFill>
-            <a:prstDash val="solid"/>
-          </a:ln>
-        </p:spPr>
-      </p:sp>
-      <p:sp>
-        <p:nvSpPr>
-          <p:cNvPr id="19" name="Text 17"/>
-          <p:cNvSpPr/>
-          <p:nvPr/>
-        </p:nvSpPr>
-        <p:spPr>
-          <a:xfrm>
-            <a:off x="10098024" y="3511296"/>
-            <a:ext cx="646176" cy="310896"/>
-          </a:xfrm>
-          <a:prstGeom prst="rect">
-            <a:avLst/>
-          </a:prstGeom>
-          <a:noFill/>
-          <a:ln/>
-        </p:spPr>
-        <p:txBody>
-          <a:bodyPr wrap="square" lIns="0" tIns="0" rIns="0" bIns="0" rtlCol="0" anchor="ctr">
-            <a:normAutofit/>
-          </a:bodyPr>
-          <a:lstStyle/>
-          <a:p>
-            <a:pPr algn="ctr" indent="0" marL="0">
-              <a:buNone/>
-            </a:pPr>
-            <a:r>
-              <a:rPr lang="en-US" sz="1500" b="1" dirty="0">
-                <a:solidFill>
-                  <a:srgbClr val="FFFFFF"/>
-                </a:solidFill>
-                <a:latin typeface="Aptos" pitchFamily="34" charset="0"/>
-                <a:ea typeface="Aptos" pitchFamily="34" charset="-122"/>
-                <a:cs typeface="Aptos" pitchFamily="34" charset="-120"/>
-              </a:rPr>
-              <a:t>Review</a:t>
-            </a:r>
-            <a:endParaRPr lang="en-US" sz="1500" dirty="0"/>
-          </a:p>
-        </p:txBody>
-      </p:sp>
-      <p:sp>
-        <p:nvSpPr>
-          <p:cNvPr id="20" name="Shape 18"/>
-          <p:cNvSpPr/>
-          <p:nvPr/>
-        </p:nvSpPr>
-        <p:spPr>
-          <a:xfrm>
-            <a:off x="8293608" y="4389120"/>
-            <a:ext cx="2157984" cy="0"/>
-          </a:xfrm>
-          <a:prstGeom prst="line">
-            <a:avLst/>
-          </a:prstGeom>
-          <a:noFill/>
-          <a:ln w="25400">
-            <a:solidFill>
-              <a:srgbClr val="8ABBD8"/>
-            </a:solidFill>
-            <a:prstDash val="solid"/>
-          </a:ln>
-        </p:spPr>
-      </p:sp>
-      <p:sp>
-        <p:nvSpPr>
-          <p:cNvPr id="21" name="Text 19"/>
-          <p:cNvSpPr/>
-          <p:nvPr/>
-        </p:nvSpPr>
-        <p:spPr>
-          <a:xfrm>
-            <a:off x="7909560" y="3977640"/>
-            <a:ext cx="2926080" cy="182880"/>
-          </a:xfrm>
-          <a:prstGeom prst="rect">
-            <a:avLst/>
-          </a:prstGeom>
-          <a:noFill/>
-          <a:ln/>
-        </p:spPr>
-        <p:txBody>
-          <a:bodyPr wrap="square" lIns="0" tIns="0" rIns="0" bIns="0" rtlCol="0" anchor="ctr"/>
-          <a:lstStyle/>
-          <a:p>
-            <a:pPr algn="ctr" indent="0" marL="0">
-              <a:buNone/>
-            </a:pPr>
-            <a:r>
-              <a:rPr lang="en-US" sz="1000" dirty="0">
-                <a:solidFill>
-                  <a:srgbClr val="003A63"/>
-                </a:solidFill>
-                <a:latin typeface="Aptos" pitchFamily="34" charset="0"/>
-                <a:ea typeface="Aptos" pitchFamily="34" charset="-122"/>
-                <a:cs typeface="Aptos" pitchFamily="34" charset="-120"/>
-              </a:rPr>
-              <a:t>Dependencies visible</a:t>
-            </a:r>
-            <a:endParaRPr lang="en-US" sz="1000" dirty="0"/>
-          </a:p>
-        </p:txBody>
-      </p:sp>
-      <p:sp>
-        <p:nvSpPr>
-          <p:cNvPr id="22" name="Shape 20"/>
           <p:cNvSpPr/>
           <p:nvPr/>
         </p:nvSpPr>
@@ -17387,7 +14742,7 @@
       </p:sp>
       <p:sp>
         <p:nvSpPr>
-          <p:cNvPr id="23" name="Text 21"/>
+          <p:cNvPr id="17" name="Text 15"/>
           <p:cNvSpPr/>
           <p:nvPr/>
         </p:nvSpPr>
@@ -17426,7 +14781,7 @@
       </p:sp>
       <p:sp>
         <p:nvSpPr>
-          <p:cNvPr id="24" name="Text 22"/>
+          <p:cNvPr id="18" name="Text 16"/>
           <p:cNvSpPr/>
           <p:nvPr/>
         </p:nvSpPr>
@@ -17934,13 +15289,11 @@
             </a:avLst>
           </a:prstGeom>
           <a:solidFill>
-            <a:srgbClr val="FFFFFF">
-              <a:alpha val="88000"/>
-            </a:srgbClr>
+            <a:srgbClr val="FFFFFF"/>
           </a:solidFill>
           <a:ln w="12700">
             <a:solidFill>
-              <a:srgbClr val="D6E8F2"/>
+              <a:srgbClr val="B9D7E6"/>
             </a:solidFill>
             <a:prstDash val="solid"/>
           </a:ln>
@@ -17948,190 +15301,112 @@
       </p:sp>
       <p:sp>
         <p:nvSpPr>
-          <p:cNvPr id="14" name="Shape 12"/>
-          <p:cNvSpPr/>
-          <p:nvPr/>
-        </p:nvSpPr>
-        <p:spPr>
-          <a:xfrm>
-            <a:off x="7891272" y="3108960"/>
-            <a:ext cx="566928" cy="566928"/>
-          </a:xfrm>
-          <a:prstGeom prst="ellipse">
-            <a:avLst/>
-          </a:prstGeom>
-          <a:solidFill>
-            <a:srgbClr val="0068B7"/>
-          </a:solidFill>
-          <a:ln w="12700">
-            <a:solidFill>
-              <a:srgbClr val="0068B7"/>
-            </a:solidFill>
-            <a:prstDash val="solid"/>
-          </a:ln>
-        </p:spPr>
-      </p:sp>
-      <p:sp>
-        <p:nvSpPr>
-          <p:cNvPr id="15" name="Shape 13"/>
-          <p:cNvSpPr/>
-          <p:nvPr/>
-        </p:nvSpPr>
-        <p:spPr>
-          <a:xfrm>
-            <a:off x="10287000" y="3108960"/>
-            <a:ext cx="566928" cy="566928"/>
-          </a:xfrm>
-          <a:prstGeom prst="ellipse">
-            <a:avLst/>
-          </a:prstGeom>
-          <a:solidFill>
-            <a:srgbClr val="2F8A28"/>
-          </a:solidFill>
-          <a:ln w="12700">
-            <a:solidFill>
-              <a:srgbClr val="2F8A28"/>
-            </a:solidFill>
-            <a:prstDash val="solid"/>
-          </a:ln>
-        </p:spPr>
+          <p:cNvPr id="14" name="Text 12"/>
+          <p:cNvSpPr/>
+          <p:nvPr/>
+        </p:nvSpPr>
+        <p:spPr>
+          <a:xfrm>
+            <a:off x="7799832" y="2935224"/>
+            <a:ext cx="3145536" cy="256032"/>
+          </a:xfrm>
+          <a:prstGeom prst="rect">
+            <a:avLst/>
+          </a:prstGeom>
+          <a:noFill/>
+          <a:ln/>
+        </p:spPr>
+        <p:txBody>
+          <a:bodyPr wrap="square" lIns="0" tIns="0" rIns="0" bIns="0" rtlCol="0" anchor="ctr"/>
+          <a:lstStyle/>
+          <a:p>
+            <a:pPr indent="0" marL="0">
+              <a:buNone/>
+            </a:pPr>
+            <a:r>
+              <a:rPr lang="en-US" sz="1300" b="1" dirty="0">
+                <a:solidFill>
+                  <a:srgbClr val="0068B7"/>
+                </a:solidFill>
+                <a:latin typeface="Aptos" pitchFamily="34" charset="0"/>
+                <a:ea typeface="Aptos" pitchFamily="34" charset="-122"/>
+                <a:cs typeface="Aptos" pitchFamily="34" charset="-120"/>
+              </a:rPr>
+              <a:t>Concept checkpoints</a:t>
+            </a:r>
+            <a:endParaRPr lang="en-US" sz="1300" dirty="0"/>
+          </a:p>
+        </p:txBody>
+      </p:sp>
+      <p:sp>
+        <p:nvSpPr>
+          <p:cNvPr id="15" name="Text 13"/>
+          <p:cNvSpPr/>
+          <p:nvPr/>
+        </p:nvSpPr>
+        <p:spPr>
+          <a:xfrm>
+            <a:off x="7818120" y="3300984"/>
+            <a:ext cx="3090672" cy="877824"/>
+          </a:xfrm>
+          <a:prstGeom prst="rect">
+            <a:avLst/>
+          </a:prstGeom>
+          <a:noFill/>
+          <a:ln/>
+        </p:spPr>
+        <p:txBody>
+          <a:bodyPr wrap="square" lIns="254" tIns="254" rIns="254" bIns="254" rtlCol="0" anchor="t">
+            <a:normAutofit/>
+          </a:bodyPr>
+          <a:lstStyle/>
+          <a:p>
+            <a:r>
+              <a:rPr lang="en-US" sz="1380" dirty="0">
+                <a:solidFill>
+                  <a:srgbClr val="17364A"/>
+                </a:solidFill>
+                <a:latin typeface="Aptos" pitchFamily="34" charset="0"/>
+                <a:ea typeface="Aptos" pitchFamily="34" charset="-122"/>
+                <a:cs typeface="Aptos" pitchFamily="34" charset="-120"/>
+              </a:rPr>
+              <a:t>Leaders should identify who will be affected, what pain points the tool is supposed to.</a:t>
+            </a:r>
+            <a:endParaRPr lang="en-US" sz="1380" dirty="0"/>
+          </a:p>
+          <a:p>
+            <a:r>
+              <a:rPr lang="en-US" sz="1380" dirty="0">
+                <a:solidFill>
+                  <a:srgbClr val="17364A"/>
+                </a:solidFill>
+                <a:latin typeface="Aptos" pitchFamily="34" charset="0"/>
+                <a:ea typeface="Aptos" pitchFamily="34" charset="-122"/>
+                <a:cs typeface="Aptos" pitchFamily="34" charset="-120"/>
+              </a:rPr>
+              <a:t>Stakeholder engagement should include frontline users, supervisors, program leaders, IT,.</a:t>
+            </a:r>
+            <a:endParaRPr lang="en-US" sz="1380" dirty="0"/>
+          </a:p>
+          <a:p>
+            <a:r>
+              <a:rPr lang="en-US" sz="1380" dirty="0">
+                <a:solidFill>
+                  <a:srgbClr val="17364A"/>
+                </a:solidFill>
+                <a:latin typeface="Aptos" pitchFamily="34" charset="0"/>
+                <a:ea typeface="Aptos" pitchFamily="34" charset="-122"/>
+                <a:cs typeface="Aptos" pitchFamily="34" charset="-120"/>
+              </a:rPr>
+              <a:t>The communication plan should be specific.</a:t>
+            </a:r>
+            <a:endParaRPr lang="en-US" sz="1380" dirty="0"/>
+          </a:p>
+        </p:txBody>
       </p:sp>
       <p:sp>
         <p:nvSpPr>
           <p:cNvPr id="16" name="Shape 14"/>
-          <p:cNvSpPr/>
-          <p:nvPr/>
-        </p:nvSpPr>
-        <p:spPr>
-          <a:xfrm>
-            <a:off x="9089136" y="3456432"/>
-            <a:ext cx="566928" cy="566928"/>
-          </a:xfrm>
-          <a:prstGeom prst="ellipse">
-            <a:avLst/>
-          </a:prstGeom>
-          <a:solidFill>
-            <a:srgbClr val="6A4CA3"/>
-          </a:solidFill>
-          <a:ln w="12700">
-            <a:solidFill>
-              <a:srgbClr val="6A4CA3"/>
-            </a:solidFill>
-            <a:prstDash val="solid"/>
-          </a:ln>
-        </p:spPr>
-      </p:sp>
-      <p:sp>
-        <p:nvSpPr>
-          <p:cNvPr id="17" name="Shape 15"/>
-          <p:cNvSpPr/>
-          <p:nvPr/>
-        </p:nvSpPr>
-        <p:spPr>
-          <a:xfrm>
-            <a:off x="8385048" y="3419856"/>
-            <a:ext cx="1975104" cy="0"/>
-          </a:xfrm>
-          <a:prstGeom prst="line">
-            <a:avLst/>
-          </a:prstGeom>
-          <a:noFill/>
-          <a:ln w="25400">
-            <a:solidFill>
-              <a:srgbClr val="8ABBD8"/>
-            </a:solidFill>
-            <a:prstDash val="solid"/>
-          </a:ln>
-        </p:spPr>
-      </p:sp>
-      <p:sp>
-        <p:nvSpPr>
-          <p:cNvPr id="18" name="Shape 16"/>
-          <p:cNvSpPr/>
-          <p:nvPr/>
-        </p:nvSpPr>
-        <p:spPr>
-          <a:xfrm>
-            <a:off x="8202168" y="3630168"/>
-            <a:ext cx="1170432" cy="118872"/>
-          </a:xfrm>
-          <a:prstGeom prst="line">
-            <a:avLst/>
-          </a:prstGeom>
-          <a:noFill/>
-          <a:ln w="25400">
-            <a:solidFill>
-              <a:srgbClr val="8ABBD8"/>
-            </a:solidFill>
-            <a:prstDash val="solid"/>
-          </a:ln>
-        </p:spPr>
-      </p:sp>
-      <p:sp>
-        <p:nvSpPr>
-          <p:cNvPr id="19" name="Shape 17"/>
-          <p:cNvSpPr/>
-          <p:nvPr/>
-        </p:nvSpPr>
-        <p:spPr>
-          <a:xfrm>
-            <a:off x="10543032" y="3630168"/>
-            <a:ext cx="-1170432" cy="118872"/>
-          </a:xfrm>
-          <a:prstGeom prst="line">
-            <a:avLst/>
-          </a:prstGeom>
-          <a:noFill/>
-          <a:ln w="25400">
-            <a:solidFill>
-              <a:srgbClr val="8ABBD8"/>
-            </a:solidFill>
-            <a:prstDash val="solid"/>
-          </a:ln>
-        </p:spPr>
-      </p:sp>
-      <p:sp>
-        <p:nvSpPr>
-          <p:cNvPr id="20" name="Text 18"/>
-          <p:cNvSpPr/>
-          <p:nvPr/>
-        </p:nvSpPr>
-        <p:spPr>
-          <a:xfrm>
-            <a:off x="7863840" y="4069080"/>
-            <a:ext cx="3017520" cy="164592"/>
-          </a:xfrm>
-          <a:prstGeom prst="rect">
-            <a:avLst/>
-          </a:prstGeom>
-          <a:noFill/>
-          <a:ln/>
-        </p:spPr>
-        <p:txBody>
-          <a:bodyPr wrap="square" lIns="0" tIns="0" rIns="0" bIns="0" rtlCol="0" anchor="ctr"/>
-          <a:lstStyle/>
-          <a:p>
-            <a:pPr algn="ctr" indent="0" marL="0">
-              <a:buNone/>
-            </a:pPr>
-            <a:r>
-              <a:rPr lang="en-US" sz="900" b="1" dirty="0">
-                <a:solidFill>
-                  <a:srgbClr val="003A63"/>
-                </a:solidFill>
-                <a:latin typeface="Aptos" pitchFamily="34" charset="0"/>
-                <a:ea typeface="Aptos" pitchFamily="34" charset="-122"/>
-                <a:cs typeface="Aptos" pitchFamily="34" charset="-120"/>
-              </a:rPr>
-              <a:t>Decision rights</a:t>
-            </a:r>
-            <a:endParaRPr lang="en-US" sz="900" dirty="0"/>
-          </a:p>
-        </p:txBody>
-      </p:sp>
-      <p:sp>
-        <p:nvSpPr>
-          <p:cNvPr id="21" name="Shape 19"/>
           <p:cNvSpPr/>
           <p:nvPr/>
         </p:nvSpPr>
@@ -18158,7 +15433,7 @@
       </p:sp>
       <p:sp>
         <p:nvSpPr>
-          <p:cNvPr id="22" name="Text 20"/>
+          <p:cNvPr id="17" name="Text 15"/>
           <p:cNvSpPr/>
           <p:nvPr/>
         </p:nvSpPr>
@@ -18197,7 +15472,7 @@
       </p:sp>
       <p:sp>
         <p:nvSpPr>
-          <p:cNvPr id="23" name="Text 21"/>
+          <p:cNvPr id="18" name="Text 16"/>
           <p:cNvSpPr/>
           <p:nvPr/>
         </p:nvSpPr>

--- a/downloads/presentations/modules/exe-430.pptx
+++ b/downloads/presentations/modules/exe-430.pptx
@@ -3162,49 +3162,58 @@
           <a:ln/>
         </p:spPr>
         <p:txBody>
-          <a:bodyPr wrap="square" lIns="635" tIns="635" rIns="635" bIns="635" rtlCol="0" anchor="t">
+          <a:bodyPr wrap="square" lIns="1016" tIns="1016" rIns="1016" bIns="1016" rtlCol="0" anchor="t">
             <a:normAutofit/>
           </a:bodyPr>
           <a:lstStyle/>
           <a:p>
+            <a:pPr indent="0" marL="0">
+              <a:buNone/>
+            </a:pPr>
             <a:r>
               <a:rPr lang="en-US" sz="2100" dirty="0">
                 <a:solidFill>
-                  <a:srgbClr val="17364A"/>
-                </a:solidFill>
-                <a:latin typeface="Aptos" pitchFamily="34" charset="0"/>
-                <a:ea typeface="Aptos" pitchFamily="34" charset="-122"/>
-                <a:cs typeface="Aptos" pitchFamily="34" charset="-120"/>
-              </a:rPr>
-              <a:t>One risk is adoption without understanding.</a:t>
+                  <a:srgbClr val="003A63"/>
+                </a:solidFill>
+                <a:latin typeface="Aptos" pitchFamily="34" charset="0"/>
+                <a:ea typeface="Aptos" pitchFamily="34" charset="-122"/>
+                <a:cs typeface="Aptos" pitchFamily="34" charset="-120"/>
+              </a:rPr>
+              <a:t>• One risk is adoption without understanding.</a:t>
             </a:r>
             <a:endParaRPr lang="en-US" sz="2100" dirty="0"/>
           </a:p>
           <a:p>
+            <a:pPr indent="0" marL="0">
+              <a:buNone/>
+            </a:pPr>
             <a:r>
               <a:rPr lang="en-US" sz="2100" dirty="0">
                 <a:solidFill>
-                  <a:srgbClr val="17364A"/>
-                </a:solidFill>
-                <a:latin typeface="Aptos" pitchFamily="34" charset="0"/>
-                <a:ea typeface="Aptos" pitchFamily="34" charset="-122"/>
-                <a:cs typeface="Aptos" pitchFamily="34" charset="-120"/>
-              </a:rPr>
-              <a:t>Staff may use the tool incorrectly or treat outputs as authoritative because training was superficial.</a:t>
+                  <a:srgbClr val="003A63"/>
+                </a:solidFill>
+                <a:latin typeface="Aptos" pitchFamily="34" charset="0"/>
+                <a:ea typeface="Aptos" pitchFamily="34" charset="-122"/>
+                <a:cs typeface="Aptos" pitchFamily="34" charset="-120"/>
+              </a:rPr>
+              <a:t>• Staff may use the tool incorrectly or treat outputs as authoritative because training was.</a:t>
             </a:r>
             <a:endParaRPr lang="en-US" sz="2100" dirty="0"/>
           </a:p>
           <a:p>
+            <a:pPr indent="0" marL="0">
+              <a:buNone/>
+            </a:pPr>
             <a:r>
               <a:rPr lang="en-US" sz="2100" dirty="0">
                 <a:solidFill>
-                  <a:srgbClr val="17364A"/>
-                </a:solidFill>
-                <a:latin typeface="Aptos" pitchFamily="34" charset="0"/>
-                <a:ea typeface="Aptos" pitchFamily="34" charset="-122"/>
-                <a:cs typeface="Aptos" pitchFamily="34" charset="-120"/>
-              </a:rPr>
-              <a:t>A guardrail is to require role-based training and workflow-specific practice before access is granted.</a:t>
+                  <a:srgbClr val="003A63"/>
+                </a:solidFill>
+                <a:latin typeface="Aptos" pitchFamily="34" charset="0"/>
+                <a:ea typeface="Aptos" pitchFamily="34" charset="-122"/>
+                <a:cs typeface="Aptos" pitchFamily="34" charset="-120"/>
+              </a:rPr>
+              <a:t>• A guardrail is to require role-based training and workflow-specific practice before access is.</a:t>
             </a:r>
             <a:endParaRPr lang="en-US" sz="2100" dirty="0"/>
           </a:p>
@@ -3284,17 +3293,17 @@
         </p:nvSpPr>
         <p:spPr>
           <a:xfrm>
-            <a:off x="7799832" y="1828800"/>
-            <a:ext cx="3145536" cy="685800"/>
-          </a:xfrm>
-          <a:prstGeom prst="rect">
-            <a:avLst/>
-          </a:prstGeom>
-          <a:noFill/>
-          <a:ln/>
-        </p:spPr>
-        <p:txBody>
-          <a:bodyPr wrap="square" lIns="0" tIns="0" rIns="0" bIns="0" rtlCol="0" anchor="t">
+            <a:off x="7799832" y="1801368"/>
+            <a:ext cx="3145536" cy="758952"/>
+          </a:xfrm>
+          <a:prstGeom prst="rect">
+            <a:avLst/>
+          </a:prstGeom>
+          <a:noFill/>
+          <a:ln/>
+        </p:spPr>
+        <p:txBody>
+          <a:bodyPr wrap="square" lIns="254" tIns="254" rIns="254" bIns="254" rtlCol="0" anchor="t">
             <a:normAutofit/>
           </a:bodyPr>
           <a:lstStyle/>
@@ -3303,7 +3312,7 @@
               <a:buNone/>
             </a:pPr>
             <a:r>
-              <a:rPr lang="en-US" sz="1550" dirty="0">
+              <a:rPr lang="en-US" sz="1320" dirty="0">
                 <a:solidFill>
                   <a:srgbClr val="17364A"/>
                 </a:solidFill>
@@ -3313,7 +3322,7 @@
               </a:rPr>
               <a:t>One risk is adoption without understanding.</a:t>
             </a:r>
-            <a:endParaRPr lang="en-US" sz="1550" dirty="0"/>
+            <a:endParaRPr lang="en-US" sz="1320" dirty="0"/>
           </a:p>
         </p:txBody>
       </p:sp>
@@ -3401,13 +3410,16 @@
           <a:ln/>
         </p:spPr>
         <p:txBody>
-          <a:bodyPr wrap="square" lIns="254" tIns="254" rIns="254" bIns="254" rtlCol="0" anchor="t">
+          <a:bodyPr wrap="square" lIns="508" tIns="508" rIns="508" bIns="508" rtlCol="0" anchor="t">
             <a:normAutofit/>
           </a:bodyPr>
           <a:lstStyle/>
           <a:p>
-            <a:r>
-              <a:rPr lang="en-US" sz="1380" dirty="0">
+            <a:pPr indent="0" marL="0">
+              <a:buNone/>
+            </a:pPr>
+            <a:r>
+              <a:rPr lang="en-US" sz="1220" dirty="0">
                 <a:solidFill>
                   <a:srgbClr val="17364A"/>
                 </a:solidFill>
@@ -3417,11 +3429,14 @@
               </a:rPr>
               <a:t>Another risk is resistance caused by lack of transparency.</a:t>
             </a:r>
-            <a:endParaRPr lang="en-US" sz="1380" dirty="0"/>
-          </a:p>
-          <a:p>
-            <a:r>
-              <a:rPr lang="en-US" sz="1380" dirty="0">
+            <a:endParaRPr lang="en-US" sz="1220" dirty="0"/>
+          </a:p>
+          <a:p>
+            <a:pPr indent="0" marL="0">
+              <a:buNone/>
+            </a:pPr>
+            <a:r>
+              <a:rPr lang="en-US" sz="1220" dirty="0">
                 <a:solidFill>
                   <a:srgbClr val="17364A"/>
                 </a:solidFill>
@@ -3429,13 +3444,16 @@
                 <a:ea typeface="Aptos" pitchFamily="34" charset="-122"/>
                 <a:cs typeface="Aptos" pitchFamily="34" charset="-120"/>
               </a:rPr>
-              <a:t>If staff believe AI is being introduced to monitor or replace them, they may avoid or.</a:t>
-            </a:r>
-            <a:endParaRPr lang="en-US" sz="1380" dirty="0"/>
-          </a:p>
-          <a:p>
-            <a:r>
-              <a:rPr lang="en-US" sz="1380" dirty="0">
+              <a:t>If staff believe AI is being introduced to monitor or replace.</a:t>
+            </a:r>
+            <a:endParaRPr lang="en-US" sz="1220" dirty="0"/>
+          </a:p>
+          <a:p>
+            <a:pPr indent="0" marL="0">
+              <a:buNone/>
+            </a:pPr>
+            <a:r>
+              <a:rPr lang="en-US" sz="1220" dirty="0">
                 <a:solidFill>
                   <a:srgbClr val="17364A"/>
                 </a:solidFill>
@@ -3443,9 +3461,9 @@
                 <a:ea typeface="Aptos" pitchFamily="34" charset="-122"/>
                 <a:cs typeface="Aptos" pitchFamily="34" charset="-120"/>
               </a:rPr>
-              <a:t>A guardrail is to communicate purpose, boundaries, data practices, and workforce.</a:t>
-            </a:r>
-            <a:endParaRPr lang="en-US" sz="1380" dirty="0"/>
+              <a:t>A guardrail is to communicate purpose, boundaries, data practices,.</a:t>
+            </a:r>
+            <a:endParaRPr lang="en-US" sz="1220" dirty="0"/>
           </a:p>
         </p:txBody>
       </p:sp>
@@ -3523,17 +3541,17 @@
         </p:nvSpPr>
         <p:spPr>
           <a:xfrm>
-            <a:off x="7799832" y="5001768"/>
-            <a:ext cx="3145536" cy="502920"/>
-          </a:xfrm>
-          <a:prstGeom prst="rect">
-            <a:avLst/>
-          </a:prstGeom>
-          <a:noFill/>
-          <a:ln/>
-        </p:spPr>
-        <p:txBody>
-          <a:bodyPr wrap="square" lIns="0" tIns="0" rIns="0" bIns="0" rtlCol="0" anchor="t">
+            <a:off x="7799832" y="4974336"/>
+            <a:ext cx="3145536" cy="576072"/>
+          </a:xfrm>
+          <a:prstGeom prst="rect">
+            <a:avLst/>
+          </a:prstGeom>
+          <a:noFill/>
+          <a:ln/>
+        </p:spPr>
+        <p:txBody>
+          <a:bodyPr wrap="square" lIns="254" tIns="254" rIns="254" bIns="254" rtlCol="0" anchor="t">
             <a:normAutofit/>
           </a:bodyPr>
           <a:lstStyle/>
@@ -3542,7 +3560,7 @@
               <a:buNone/>
             </a:pPr>
             <a:r>
-              <a:rPr lang="en-US" sz="1550" dirty="0">
+              <a:rPr lang="en-US" sz="1320" dirty="0">
                 <a:solidFill>
                   <a:srgbClr val="17364A"/>
                 </a:solidFill>
@@ -3550,9 +3568,9 @@
                 <a:ea typeface="Aptos" pitchFamily="34" charset="-122"/>
                 <a:cs typeface="Aptos" pitchFamily="34" charset="-120"/>
               </a:rPr>
-              <a:t>Identify what could go wrong, who could be affected, what safeguards are needed, and what evidence should be reviewed before use expands.</a:t>
-            </a:r>
-            <a:endParaRPr lang="en-US" sz="1550" dirty="0"/>
+              <a:t>Identify what could go wrong, who could be affected, what safeguards are needed, and what evidence should be reviewed.</a:t>
+            </a:r>
+            <a:endParaRPr lang="en-US" sz="1320" dirty="0"/>
           </a:p>
         </p:txBody>
       </p:sp>
@@ -3853,49 +3871,58 @@
           <a:ln/>
         </p:spPr>
         <p:txBody>
-          <a:bodyPr wrap="square" lIns="635" tIns="635" rIns="635" bIns="635" rtlCol="0" anchor="t">
+          <a:bodyPr wrap="square" lIns="1016" tIns="1016" rIns="1016" bIns="1016" rtlCol="0" anchor="t">
             <a:normAutofit/>
           </a:bodyPr>
           <a:lstStyle/>
           <a:p>
+            <a:pPr indent="0" marL="0">
+              <a:buNone/>
+            </a:pPr>
             <a:r>
               <a:rPr lang="en-US" sz="2100" dirty="0">
                 <a:solidFill>
-                  <a:srgbClr val="17364A"/>
-                </a:solidFill>
-                <a:latin typeface="Aptos" pitchFamily="34" charset="0"/>
-                <a:ea typeface="Aptos" pitchFamily="34" charset="-122"/>
-                <a:cs typeface="Aptos" pitchFamily="34" charset="-120"/>
-              </a:rPr>
-              <a:t>Generative AI adoption requires training on review, citation, privacy, and public records.</a:t>
+                  <a:srgbClr val="003A63"/>
+                </a:solidFill>
+                <a:latin typeface="Aptos" pitchFamily="34" charset="0"/>
+                <a:ea typeface="Aptos" pitchFamily="34" charset="-122"/>
+                <a:cs typeface="Aptos" pitchFamily="34" charset="-120"/>
+              </a:rPr>
+              <a:t>• Generative AI adoption requires training on review, citation, privacy, and public records.</a:t>
             </a:r>
             <a:endParaRPr lang="en-US" sz="2100" dirty="0"/>
           </a:p>
           <a:p>
+            <a:pPr indent="0" marL="0">
+              <a:buNone/>
+            </a:pPr>
             <a:r>
               <a:rPr lang="en-US" sz="2100" dirty="0">
                 <a:solidFill>
-                  <a:srgbClr val="17364A"/>
-                </a:solidFill>
-                <a:latin typeface="Aptos" pitchFamily="34" charset="0"/>
-                <a:ea typeface="Aptos" pitchFamily="34" charset="-122"/>
-                <a:cs typeface="Aptos" pitchFamily="34" charset="-120"/>
-              </a:rPr>
-              <a:t>Predictive analytics adoption requires training on interpretation, limitations, and override.</a:t>
+                  <a:srgbClr val="003A63"/>
+                </a:solidFill>
+                <a:latin typeface="Aptos" pitchFamily="34" charset="0"/>
+                <a:ea typeface="Aptos" pitchFamily="34" charset="-122"/>
+                <a:cs typeface="Aptos" pitchFamily="34" charset="-120"/>
+              </a:rPr>
+              <a:t>• Predictive analytics adoption requires training on interpretation, limitations, and override.</a:t>
             </a:r>
             <a:endParaRPr lang="en-US" sz="2100" dirty="0"/>
           </a:p>
           <a:p>
+            <a:pPr indent="0" marL="0">
+              <a:buNone/>
+            </a:pPr>
             <a:r>
               <a:rPr lang="en-US" sz="2100" dirty="0">
                 <a:solidFill>
-                  <a:srgbClr val="17364A"/>
-                </a:solidFill>
-                <a:latin typeface="Aptos" pitchFamily="34" charset="0"/>
-                <a:ea typeface="Aptos" pitchFamily="34" charset="-122"/>
-                <a:cs typeface="Aptos" pitchFamily="34" charset="-120"/>
-              </a:rPr>
-              <a:t>Agentic workflow adoption requires training on approvals, stop procedures, and escalation.</a:t>
+                  <a:srgbClr val="003A63"/>
+                </a:solidFill>
+                <a:latin typeface="Aptos" pitchFamily="34" charset="0"/>
+                <a:ea typeface="Aptos" pitchFamily="34" charset="-122"/>
+                <a:cs typeface="Aptos" pitchFamily="34" charset="-120"/>
+              </a:rPr>
+              <a:t>• Agentic workflow adoption requires training on approvals, stop procedures, and escalation.</a:t>
             </a:r>
             <a:endParaRPr lang="en-US" sz="2100" dirty="0"/>
           </a:p>
@@ -3975,17 +4002,17 @@
         </p:nvSpPr>
         <p:spPr>
           <a:xfrm>
-            <a:off x="7799832" y="1828800"/>
-            <a:ext cx="3145536" cy="685800"/>
-          </a:xfrm>
-          <a:prstGeom prst="rect">
-            <a:avLst/>
-          </a:prstGeom>
-          <a:noFill/>
-          <a:ln/>
-        </p:spPr>
-        <p:txBody>
-          <a:bodyPr wrap="square" lIns="0" tIns="0" rIns="0" bIns="0" rtlCol="0" anchor="t">
+            <a:off x="7799832" y="1801368"/>
+            <a:ext cx="3145536" cy="758952"/>
+          </a:xfrm>
+          <a:prstGeom prst="rect">
+            <a:avLst/>
+          </a:prstGeom>
+          <a:noFill/>
+          <a:ln/>
+        </p:spPr>
+        <p:txBody>
+          <a:bodyPr wrap="square" lIns="254" tIns="254" rIns="254" bIns="254" rtlCol="0" anchor="t">
             <a:normAutofit/>
           </a:bodyPr>
           <a:lstStyle/>
@@ -3994,7 +4021,7 @@
               <a:buNone/>
             </a:pPr>
             <a:r>
-              <a:rPr lang="en-US" sz="1550" dirty="0">
+              <a:rPr lang="en-US" sz="1320" dirty="0">
                 <a:solidFill>
                   <a:srgbClr val="17364A"/>
                 </a:solidFill>
@@ -4004,7 +4031,7 @@
               </a:rPr>
               <a:t>Generative AI adoption requires training on review, citation, privacy, and public records.</a:t>
             </a:r>
-            <a:endParaRPr lang="en-US" sz="1550" dirty="0"/>
+            <a:endParaRPr lang="en-US" sz="1320" dirty="0"/>
           </a:p>
         </p:txBody>
       </p:sp>
@@ -4092,13 +4119,16 @@
           <a:ln/>
         </p:spPr>
         <p:txBody>
-          <a:bodyPr wrap="square" lIns="254" tIns="254" rIns="254" bIns="254" rtlCol="0" anchor="t">
+          <a:bodyPr wrap="square" lIns="508" tIns="508" rIns="508" bIns="508" rtlCol="0" anchor="t">
             <a:normAutofit/>
           </a:bodyPr>
           <a:lstStyle/>
           <a:p>
-            <a:r>
-              <a:rPr lang="en-US" sz="1380" dirty="0">
+            <a:pPr indent="0" marL="0">
+              <a:buNone/>
+            </a:pPr>
+            <a:r>
+              <a:rPr lang="en-US" sz="1220" dirty="0">
                 <a:solidFill>
                   <a:srgbClr val="17364A"/>
                 </a:solidFill>
@@ -4106,13 +4136,16 @@
                 <a:ea typeface="Aptos" pitchFamily="34" charset="-122"/>
                 <a:cs typeface="Aptos" pitchFamily="34" charset="-120"/>
               </a:rPr>
-              <a:t>Predictive analytics adoption requires training on interpretation, limitations, and.</a:t>
-            </a:r>
-            <a:endParaRPr lang="en-US" sz="1380" dirty="0"/>
-          </a:p>
-          <a:p>
-            <a:r>
-              <a:rPr lang="en-US" sz="1380" dirty="0">
+              <a:t>Predictive analytics adoption requires training on interpretation,.</a:t>
+            </a:r>
+            <a:endParaRPr lang="en-US" sz="1220" dirty="0"/>
+          </a:p>
+          <a:p>
+            <a:pPr indent="0" marL="0">
+              <a:buNone/>
+            </a:pPr>
+            <a:r>
+              <a:rPr lang="en-US" sz="1220" dirty="0">
                 <a:solidFill>
                   <a:srgbClr val="17364A"/>
                 </a:solidFill>
@@ -4120,9 +4153,9 @@
                 <a:ea typeface="Aptos" pitchFamily="34" charset="-122"/>
                 <a:cs typeface="Aptos" pitchFamily="34" charset="-120"/>
               </a:rPr>
-              <a:t>Each AI type changes work in different ways, so change management must be specific.</a:t>
-            </a:r>
-            <a:endParaRPr lang="en-US" sz="1380" dirty="0"/>
+              <a:t>Each AI type changes work in different ways, so change management.</a:t>
+            </a:r>
+            <a:endParaRPr lang="en-US" sz="1220" dirty="0"/>
           </a:p>
         </p:txBody>
       </p:sp>
@@ -4200,17 +4233,17 @@
         </p:nvSpPr>
         <p:spPr>
           <a:xfrm>
-            <a:off x="7799832" y="5001768"/>
-            <a:ext cx="3145536" cy="502920"/>
-          </a:xfrm>
-          <a:prstGeom prst="rect">
-            <a:avLst/>
-          </a:prstGeom>
-          <a:noFill/>
-          <a:ln/>
-        </p:spPr>
-        <p:txBody>
-          <a:bodyPr wrap="square" lIns="0" tIns="0" rIns="0" bIns="0" rtlCol="0" anchor="t">
+            <a:off x="7799832" y="4974336"/>
+            <a:ext cx="3145536" cy="576072"/>
+          </a:xfrm>
+          <a:prstGeom prst="rect">
+            <a:avLst/>
+          </a:prstGeom>
+          <a:noFill/>
+          <a:ln/>
+        </p:spPr>
+        <p:txBody>
+          <a:bodyPr wrap="square" lIns="254" tIns="254" rIns="254" bIns="254" rtlCol="0" anchor="t">
             <a:normAutofit/>
           </a:bodyPr>
           <a:lstStyle/>
@@ -4219,7 +4252,7 @@
               <a:buNone/>
             </a:pPr>
             <a:r>
-              <a:rPr lang="en-US" sz="1550" dirty="0">
+              <a:rPr lang="en-US" sz="1320" dirty="0">
                 <a:solidFill>
                   <a:srgbClr val="17364A"/>
                 </a:solidFill>
@@ -4227,9 +4260,9 @@
                 <a:ea typeface="Aptos" pitchFamily="34" charset="-122"/>
                 <a:cs typeface="Aptos" pitchFamily="34" charset="-120"/>
               </a:rPr>
-              <a:t>Use the concept to clarify workflow changes, dependencies, staffing, procurement requirements, training needs, and implementation checkpoints.</a:t>
-            </a:r>
-            <a:endParaRPr lang="en-US" sz="1550" dirty="0"/>
+              <a:t>Use the concept to clarify workflow changes, dependencies, staffing, procurement requirements, training needs, and.</a:t>
+            </a:r>
+            <a:endParaRPr lang="en-US" sz="1320" dirty="0"/>
           </a:p>
         </p:txBody>
       </p:sp>
@@ -4530,49 +4563,58 @@
           <a:ln/>
         </p:spPr>
         <p:txBody>
-          <a:bodyPr wrap="square" lIns="635" tIns="635" rIns="635" bIns="635" rtlCol="0" anchor="t">
+          <a:bodyPr wrap="square" lIns="1016" tIns="1016" rIns="1016" bIns="1016" rtlCol="0" anchor="t">
             <a:normAutofit/>
           </a:bodyPr>
           <a:lstStyle/>
           <a:p>
+            <a:pPr indent="0" marL="0">
+              <a:buNone/>
+            </a:pPr>
             <a:r>
               <a:rPr lang="en-US" sz="2100" dirty="0">
                 <a:solidFill>
-                  <a:srgbClr val="17364A"/>
-                </a:solidFill>
-                <a:latin typeface="Aptos" pitchFamily="34" charset="0"/>
-                <a:ea typeface="Aptos" pitchFamily="34" charset="-122"/>
-                <a:cs typeface="Aptos" pitchFamily="34" charset="-120"/>
-              </a:rPr>
-              <a:t>Which current or proposed AI use case in your agency raises this leadership or governance issue most.</a:t>
+                  <a:srgbClr val="003A63"/>
+                </a:solidFill>
+                <a:latin typeface="Aptos" pitchFamily="34" charset="0"/>
+                <a:ea typeface="Aptos" pitchFamily="34" charset="-122"/>
+                <a:cs typeface="Aptos" pitchFamily="34" charset="-120"/>
+              </a:rPr>
+              <a:t>• Which current or proposed AI use case in your agency raises this leadership or governance.</a:t>
             </a:r>
             <a:endParaRPr lang="en-US" sz="2100" dirty="0"/>
           </a:p>
           <a:p>
+            <a:pPr indent="0" marL="0">
+              <a:buNone/>
+            </a:pPr>
             <a:r>
               <a:rPr lang="en-US" sz="2100" dirty="0">
                 <a:solidFill>
-                  <a:srgbClr val="17364A"/>
-                </a:solidFill>
-                <a:latin typeface="Aptos" pitchFamily="34" charset="0"/>
-                <a:ea typeface="Aptos" pitchFamily="34" charset="-122"/>
-                <a:cs typeface="Aptos" pitchFamily="34" charset="-120"/>
-              </a:rPr>
-              <a:t>Who currently has authority to make decisions about this issue, and is that authority documented?</a:t>
+                  <a:srgbClr val="003A63"/>
+                </a:solidFill>
+                <a:latin typeface="Aptos" pitchFamily="34" charset="0"/>
+                <a:ea typeface="Aptos" pitchFamily="34" charset="-122"/>
+                <a:cs typeface="Aptos" pitchFamily="34" charset="-120"/>
+              </a:rPr>
+              <a:t>• Who currently has authority to make decisions about this issue, and is that authority.</a:t>
             </a:r>
             <a:endParaRPr lang="en-US" sz="2100" dirty="0"/>
           </a:p>
           <a:p>
+            <a:pPr indent="0" marL="0">
+              <a:buNone/>
+            </a:pPr>
             <a:r>
               <a:rPr lang="en-US" sz="2100" dirty="0">
                 <a:solidFill>
-                  <a:srgbClr val="17364A"/>
-                </a:solidFill>
-                <a:latin typeface="Aptos" pitchFamily="34" charset="0"/>
-                <a:ea typeface="Aptos" pitchFamily="34" charset="-122"/>
-                <a:cs typeface="Aptos" pitchFamily="34" charset="-120"/>
-              </a:rPr>
-              <a:t>What evidence would governance or leadership need before approving the use case?</a:t>
+                  <a:srgbClr val="003A63"/>
+                </a:solidFill>
+                <a:latin typeface="Aptos" pitchFamily="34" charset="0"/>
+                <a:ea typeface="Aptos" pitchFamily="34" charset="-122"/>
+                <a:cs typeface="Aptos" pitchFamily="34" charset="-120"/>
+              </a:rPr>
+              <a:t>• What evidence would governance or leadership need before approving the use case?</a:t>
             </a:r>
             <a:endParaRPr lang="en-US" sz="2100" dirty="0"/>
           </a:p>
@@ -4652,17 +4694,17 @@
         </p:nvSpPr>
         <p:spPr>
           <a:xfrm>
-            <a:off x="7799832" y="1828800"/>
-            <a:ext cx="3145536" cy="685800"/>
-          </a:xfrm>
-          <a:prstGeom prst="rect">
-            <a:avLst/>
-          </a:prstGeom>
-          <a:noFill/>
-          <a:ln/>
-        </p:spPr>
-        <p:txBody>
-          <a:bodyPr wrap="square" lIns="0" tIns="0" rIns="0" bIns="0" rtlCol="0" anchor="t">
+            <a:off x="7799832" y="1801368"/>
+            <a:ext cx="3145536" cy="758952"/>
+          </a:xfrm>
+          <a:prstGeom prst="rect">
+            <a:avLst/>
+          </a:prstGeom>
+          <a:noFill/>
+          <a:ln/>
+        </p:spPr>
+        <p:txBody>
+          <a:bodyPr wrap="square" lIns="254" tIns="254" rIns="254" bIns="254" rtlCol="0" anchor="t">
             <a:normAutofit/>
           </a:bodyPr>
           <a:lstStyle/>
@@ -4671,7 +4713,7 @@
               <a:buNone/>
             </a:pPr>
             <a:r>
-              <a:rPr lang="en-US" sz="1550" dirty="0">
+              <a:rPr lang="en-US" sz="1320" dirty="0">
                 <a:solidFill>
                   <a:srgbClr val="17364A"/>
                 </a:solidFill>
@@ -4681,7 +4723,7 @@
               </a:rPr>
               <a:t>Which current or proposed AI use case in your agency raises this leadership or governance issue most.</a:t>
             </a:r>
-            <a:endParaRPr lang="en-US" sz="1550" dirty="0"/>
+            <a:endParaRPr lang="en-US" sz="1320" dirty="0"/>
           </a:p>
         </p:txBody>
       </p:sp>
@@ -4769,13 +4811,16 @@
           <a:ln/>
         </p:spPr>
         <p:txBody>
-          <a:bodyPr wrap="square" lIns="254" tIns="254" rIns="254" bIns="254" rtlCol="0" anchor="t">
+          <a:bodyPr wrap="square" lIns="508" tIns="508" rIns="508" bIns="508" rtlCol="0" anchor="t">
             <a:normAutofit/>
           </a:bodyPr>
           <a:lstStyle/>
           <a:p>
-            <a:r>
-              <a:rPr lang="en-US" sz="1380" dirty="0">
+            <a:pPr indent="0" marL="0">
+              <a:buNone/>
+            </a:pPr>
+            <a:r>
+              <a:rPr lang="en-US" sz="1220" dirty="0">
                 <a:solidFill>
                   <a:srgbClr val="17364A"/>
                 </a:solidFill>
@@ -4783,13 +4828,16 @@
                 <a:ea typeface="Aptos" pitchFamily="34" charset="-122"/>
                 <a:cs typeface="Aptos" pitchFamily="34" charset="-120"/>
               </a:rPr>
-              <a:t>Which current or proposed AI use case in your agency raises this leadership or governance.</a:t>
-            </a:r>
-            <a:endParaRPr lang="en-US" sz="1380" dirty="0"/>
-          </a:p>
-          <a:p>
-            <a:r>
-              <a:rPr lang="en-US" sz="1380" dirty="0">
+              <a:t>Which current or proposed AI use case in your agency raises this.</a:t>
+            </a:r>
+            <a:endParaRPr lang="en-US" sz="1220" dirty="0"/>
+          </a:p>
+          <a:p>
+            <a:pPr indent="0" marL="0">
+              <a:buNone/>
+            </a:pPr>
+            <a:r>
+              <a:rPr lang="en-US" sz="1220" dirty="0">
                 <a:solidFill>
                   <a:srgbClr val="17364A"/>
                 </a:solidFill>
@@ -4797,13 +4845,16 @@
                 <a:ea typeface="Aptos" pitchFamily="34" charset="-122"/>
                 <a:cs typeface="Aptos" pitchFamily="34" charset="-120"/>
               </a:rPr>
-              <a:t>Who currently has authority to make decisions about this issue, and is that authority.</a:t>
-            </a:r>
-            <a:endParaRPr lang="en-US" sz="1380" dirty="0"/>
-          </a:p>
-          <a:p>
-            <a:r>
-              <a:rPr lang="en-US" sz="1380" dirty="0">
+              <a:t>Who currently has authority to make decisions about this issue,.</a:t>
+            </a:r>
+            <a:endParaRPr lang="en-US" sz="1220" dirty="0"/>
+          </a:p>
+          <a:p>
+            <a:pPr indent="0" marL="0">
+              <a:buNone/>
+            </a:pPr>
+            <a:r>
+              <a:rPr lang="en-US" sz="1220" dirty="0">
                 <a:solidFill>
                   <a:srgbClr val="17364A"/>
                 </a:solidFill>
@@ -4811,9 +4862,9 @@
                 <a:ea typeface="Aptos" pitchFamily="34" charset="-122"/>
                 <a:cs typeface="Aptos" pitchFamily="34" charset="-120"/>
               </a:rPr>
-              <a:t>What evidence would governance or leadership need before approving the use case?</a:t>
-            </a:r>
-            <a:endParaRPr lang="en-US" sz="1380" dirty="0"/>
+              <a:t>What evidence would governance or leadership need before approving.</a:t>
+            </a:r>
+            <a:endParaRPr lang="en-US" sz="1220" dirty="0"/>
           </a:p>
         </p:txBody>
       </p:sp>
@@ -4891,17 +4942,17 @@
         </p:nvSpPr>
         <p:spPr>
           <a:xfrm>
-            <a:off x="7799832" y="5001768"/>
-            <a:ext cx="3145536" cy="502920"/>
-          </a:xfrm>
-          <a:prstGeom prst="rect">
-            <a:avLst/>
-          </a:prstGeom>
-          <a:noFill/>
-          <a:ln/>
-        </p:spPr>
-        <p:txBody>
-          <a:bodyPr wrap="square" lIns="0" tIns="0" rIns="0" bIns="0" rtlCol="0" anchor="t">
+            <a:off x="7799832" y="4974336"/>
+            <a:ext cx="3145536" cy="576072"/>
+          </a:xfrm>
+          <a:prstGeom prst="rect">
+            <a:avLst/>
+          </a:prstGeom>
+          <a:noFill/>
+          <a:ln/>
+        </p:spPr>
+        <p:txBody>
+          <a:bodyPr wrap="square" lIns="254" tIns="254" rIns="254" bIns="254" rtlCol="0" anchor="t">
             <a:normAutofit/>
           </a:bodyPr>
           <a:lstStyle/>
@@ -4910,7 +4961,7 @@
               <a:buNone/>
             </a:pPr>
             <a:r>
-              <a:rPr lang="en-US" sz="1550" dirty="0">
+              <a:rPr lang="en-US" sz="1320" dirty="0">
                 <a:solidFill>
                   <a:srgbClr val="17364A"/>
                 </a:solidFill>
@@ -4918,9 +4969,9 @@
                 <a:ea typeface="Aptos" pitchFamily="34" charset="-122"/>
                 <a:cs typeface="Aptos" pitchFamily="34" charset="-120"/>
               </a:rPr>
-              <a:t>Use the concept to clarify workflow changes, dependencies, staffing, procurement requirements, training needs, and implementation checkpoints.</a:t>
-            </a:r>
-            <a:endParaRPr lang="en-US" sz="1550" dirty="0"/>
+              <a:t>Use the concept to clarify workflow changes, dependencies, staffing, procurement requirements, training needs, and.</a:t>
+            </a:r>
+            <a:endParaRPr lang="en-US" sz="1320" dirty="0"/>
           </a:p>
         </p:txBody>
       </p:sp>
@@ -5221,35 +5272,41 @@
           <a:ln/>
         </p:spPr>
         <p:txBody>
-          <a:bodyPr wrap="square" lIns="635" tIns="635" rIns="635" bIns="635" rtlCol="0" anchor="t">
+          <a:bodyPr wrap="square" lIns="1016" tIns="1016" rIns="1016" bIns="1016" rtlCol="0" anchor="t">
             <a:normAutofit/>
           </a:bodyPr>
           <a:lstStyle/>
           <a:p>
+            <a:pPr indent="0" marL="0">
+              <a:buNone/>
+            </a:pPr>
             <a:r>
               <a:rPr lang="en-US" sz="2100" dirty="0">
                 <a:solidFill>
-                  <a:srgbClr val="17364A"/>
-                </a:solidFill>
-                <a:latin typeface="Aptos" pitchFamily="34" charset="0"/>
-                <a:ea typeface="Aptos" pitchFamily="34" charset="-122"/>
-                <a:cs typeface="Aptos" pitchFamily="34" charset="-120"/>
-              </a:rPr>
-              <a:t>Which staff, partners, or communities would be affected if this issue were handled poorly?</a:t>
+                  <a:srgbClr val="003A63"/>
+                </a:solidFill>
+                <a:latin typeface="Aptos" pitchFamily="34" charset="0"/>
+                <a:ea typeface="Aptos" pitchFamily="34" charset="-122"/>
+                <a:cs typeface="Aptos" pitchFamily="34" charset="-120"/>
+              </a:rPr>
+              <a:t>• Which staff, partners, or communities would be affected if this issue were handled poorly?</a:t>
             </a:r>
             <a:endParaRPr lang="en-US" sz="2100" dirty="0"/>
           </a:p>
           <a:p>
+            <a:pPr indent="0" marL="0">
+              <a:buNone/>
+            </a:pPr>
             <a:r>
               <a:rPr lang="en-US" sz="2100" dirty="0">
                 <a:solidFill>
-                  <a:srgbClr val="17364A"/>
-                </a:solidFill>
-                <a:latin typeface="Aptos" pitchFamily="34" charset="0"/>
-                <a:ea typeface="Aptos" pitchFamily="34" charset="-122"/>
-                <a:cs typeface="Aptos" pitchFamily="34" charset="-120"/>
-              </a:rPr>
-              <a:t>What policy, process, or artifact should be created or updated after this module?</a:t>
+                  <a:srgbClr val="003A63"/>
+                </a:solidFill>
+                <a:latin typeface="Aptos" pitchFamily="34" charset="0"/>
+                <a:ea typeface="Aptos" pitchFamily="34" charset="-122"/>
+                <a:cs typeface="Aptos" pitchFamily="34" charset="-120"/>
+              </a:rPr>
+              <a:t>• What policy, process, or artifact should be created or updated after this module?</a:t>
             </a:r>
             <a:endParaRPr lang="en-US" sz="2100" dirty="0"/>
           </a:p>
@@ -5329,17 +5386,17 @@
         </p:nvSpPr>
         <p:spPr>
           <a:xfrm>
-            <a:off x="7799832" y="1828800"/>
-            <a:ext cx="3145536" cy="685800"/>
-          </a:xfrm>
-          <a:prstGeom prst="rect">
-            <a:avLst/>
-          </a:prstGeom>
-          <a:noFill/>
-          <a:ln/>
-        </p:spPr>
-        <p:txBody>
-          <a:bodyPr wrap="square" lIns="0" tIns="0" rIns="0" bIns="0" rtlCol="0" anchor="t">
+            <a:off x="7799832" y="1801368"/>
+            <a:ext cx="3145536" cy="758952"/>
+          </a:xfrm>
+          <a:prstGeom prst="rect">
+            <a:avLst/>
+          </a:prstGeom>
+          <a:noFill/>
+          <a:ln/>
+        </p:spPr>
+        <p:txBody>
+          <a:bodyPr wrap="square" lIns="254" tIns="254" rIns="254" bIns="254" rtlCol="0" anchor="t">
             <a:normAutofit/>
           </a:bodyPr>
           <a:lstStyle/>
@@ -5348,7 +5405,7 @@
               <a:buNone/>
             </a:pPr>
             <a:r>
-              <a:rPr lang="en-US" sz="1550" dirty="0">
+              <a:rPr lang="en-US" sz="1320" dirty="0">
                 <a:solidFill>
                   <a:srgbClr val="17364A"/>
                 </a:solidFill>
@@ -5358,7 +5415,7 @@
               </a:rPr>
               <a:t>Which staff, partners, or communities would be affected if this issue were handled poorly?</a:t>
             </a:r>
-            <a:endParaRPr lang="en-US" sz="1550" dirty="0"/>
+            <a:endParaRPr lang="en-US" sz="1320" dirty="0"/>
           </a:p>
         </p:txBody>
       </p:sp>
@@ -5446,13 +5503,16 @@
           <a:ln/>
         </p:spPr>
         <p:txBody>
-          <a:bodyPr wrap="square" lIns="254" tIns="254" rIns="254" bIns="254" rtlCol="0" anchor="t">
+          <a:bodyPr wrap="square" lIns="508" tIns="508" rIns="508" bIns="508" rtlCol="0" anchor="t">
             <a:normAutofit/>
           </a:bodyPr>
           <a:lstStyle/>
           <a:p>
-            <a:r>
-              <a:rPr lang="en-US" sz="1380" dirty="0">
+            <a:pPr indent="0" marL="0">
+              <a:buNone/>
+            </a:pPr>
+            <a:r>
+              <a:rPr lang="en-US" sz="1220" dirty="0">
                 <a:solidFill>
                   <a:srgbClr val="17364A"/>
                 </a:solidFill>
@@ -5460,13 +5520,16 @@
                 <a:ea typeface="Aptos" pitchFamily="34" charset="-122"/>
                 <a:cs typeface="Aptos" pitchFamily="34" charset="-120"/>
               </a:rPr>
-              <a:t>Which staff, partners, or communities would be affected if this issue were handled poorly?</a:t>
-            </a:r>
-            <a:endParaRPr lang="en-US" sz="1380" dirty="0"/>
-          </a:p>
-          <a:p>
-            <a:r>
-              <a:rPr lang="en-US" sz="1380" dirty="0">
+              <a:t>Which staff, partners, or communities would be affected if this.</a:t>
+            </a:r>
+            <a:endParaRPr lang="en-US" sz="1220" dirty="0"/>
+          </a:p>
+          <a:p>
+            <a:pPr indent="0" marL="0">
+              <a:buNone/>
+            </a:pPr>
+            <a:r>
+              <a:rPr lang="en-US" sz="1220" dirty="0">
                 <a:solidFill>
                   <a:srgbClr val="17364A"/>
                 </a:solidFill>
@@ -5474,9 +5537,9 @@
                 <a:ea typeface="Aptos" pitchFamily="34" charset="-122"/>
                 <a:cs typeface="Aptos" pitchFamily="34" charset="-120"/>
               </a:rPr>
-              <a:t>What policy, process, or artifact should be created or updated after this module?</a:t>
-            </a:r>
-            <a:endParaRPr lang="en-US" sz="1380" dirty="0"/>
+              <a:t>What policy, process, or artifact should be created or updated.</a:t>
+            </a:r>
+            <a:endParaRPr lang="en-US" sz="1220" dirty="0"/>
           </a:p>
         </p:txBody>
       </p:sp>
@@ -5554,17 +5617,17 @@
         </p:nvSpPr>
         <p:spPr>
           <a:xfrm>
-            <a:off x="7799832" y="5001768"/>
-            <a:ext cx="3145536" cy="502920"/>
-          </a:xfrm>
-          <a:prstGeom prst="rect">
-            <a:avLst/>
-          </a:prstGeom>
-          <a:noFill/>
-          <a:ln/>
-        </p:spPr>
-        <p:txBody>
-          <a:bodyPr wrap="square" lIns="0" tIns="0" rIns="0" bIns="0" rtlCol="0" anchor="t">
+            <a:off x="7799832" y="4974336"/>
+            <a:ext cx="3145536" cy="576072"/>
+          </a:xfrm>
+          <a:prstGeom prst="rect">
+            <a:avLst/>
+          </a:prstGeom>
+          <a:noFill/>
+          <a:ln/>
+        </p:spPr>
+        <p:txBody>
+          <a:bodyPr wrap="square" lIns="254" tIns="254" rIns="254" bIns="254" rtlCol="0" anchor="t">
             <a:normAutofit/>
           </a:bodyPr>
           <a:lstStyle/>
@@ -5573,7 +5636,7 @@
               <a:buNone/>
             </a:pPr>
             <a:r>
-              <a:rPr lang="en-US" sz="1550" dirty="0">
+              <a:rPr lang="en-US" sz="1320" dirty="0">
                 <a:solidFill>
                   <a:srgbClr val="17364A"/>
                 </a:solidFill>
@@ -5581,9 +5644,9 @@
                 <a:ea typeface="Aptos" pitchFamily="34" charset="-122"/>
                 <a:cs typeface="Aptos" pitchFamily="34" charset="-120"/>
               </a:rPr>
-              <a:t>Use the concept to clarify workflow changes, dependencies, staffing, procurement requirements, training needs, and implementation checkpoints.</a:t>
-            </a:r>
-            <a:endParaRPr lang="en-US" sz="1550" dirty="0"/>
+              <a:t>Use the concept to clarify workflow changes, dependencies, staffing, procurement requirements, training needs, and.</a:t>
+            </a:r>
+            <a:endParaRPr lang="en-US" sz="1320" dirty="0"/>
           </a:p>
         </p:txBody>
       </p:sp>
@@ -5884,35 +5947,41 @@
           <a:ln/>
         </p:spPr>
         <p:txBody>
-          <a:bodyPr wrap="square" lIns="635" tIns="635" rIns="635" bIns="635" rtlCol="0" anchor="t">
+          <a:bodyPr wrap="square" lIns="1016" tIns="1016" rIns="1016" bIns="1016" rtlCol="0" anchor="t">
             <a:normAutofit/>
           </a:bodyPr>
           <a:lstStyle/>
           <a:p>
+            <a:pPr indent="0" marL="0">
+              <a:buNone/>
+            </a:pPr>
             <a:r>
               <a:rPr lang="en-US" sz="2100" dirty="0">
                 <a:solidFill>
-                  <a:srgbClr val="17364A"/>
-                </a:solidFill>
-                <a:latin typeface="Aptos" pitchFamily="34" charset="0"/>
-                <a:ea typeface="Aptos" pitchFamily="34" charset="-122"/>
-                <a:cs typeface="Aptos" pitchFamily="34" charset="-120"/>
-              </a:rPr>
-              <a:t>Create a change management plan for one AI use case.</a:t>
+                  <a:srgbClr val="003A63"/>
+                </a:solidFill>
+                <a:latin typeface="Aptos" pitchFamily="34" charset="0"/>
+                <a:ea typeface="Aptos" pitchFamily="34" charset="-122"/>
+                <a:cs typeface="Aptos" pitchFamily="34" charset="-120"/>
+              </a:rPr>
+              <a:t>• Create a change management plan for one AI use case.</a:t>
             </a:r>
             <a:endParaRPr lang="en-US" sz="2100" dirty="0"/>
           </a:p>
           <a:p>
+            <a:pPr indent="0" marL="0">
+              <a:buNone/>
+            </a:pPr>
             <a:r>
               <a:rPr lang="en-US" sz="2100" dirty="0">
                 <a:solidFill>
-                  <a:srgbClr val="17364A"/>
-                </a:solidFill>
-                <a:latin typeface="Aptos" pitchFamily="34" charset="0"/>
-                <a:ea typeface="Aptos" pitchFamily="34" charset="-122"/>
-                <a:cs typeface="Aptos" pitchFamily="34" charset="-120"/>
-              </a:rPr>
-              <a:t>Include stakeholder map, communication messages, training needs, workflow changes, adoption measures,.</a:t>
+                  <a:srgbClr val="003A63"/>
+                </a:solidFill>
+                <a:latin typeface="Aptos" pitchFamily="34" charset="0"/>
+                <a:ea typeface="Aptos" pitchFamily="34" charset="-122"/>
+                <a:cs typeface="Aptos" pitchFamily="34" charset="-120"/>
+              </a:rPr>
+              <a:t>• Include stakeholder map, communication messages, training needs, workflow changes, adoption.</a:t>
             </a:r>
             <a:endParaRPr lang="en-US" sz="2100" dirty="0"/>
           </a:p>
@@ -5992,17 +6061,17 @@
         </p:nvSpPr>
         <p:spPr>
           <a:xfrm>
-            <a:off x="7799832" y="1828800"/>
-            <a:ext cx="3145536" cy="685800"/>
-          </a:xfrm>
-          <a:prstGeom prst="rect">
-            <a:avLst/>
-          </a:prstGeom>
-          <a:noFill/>
-          <a:ln/>
-        </p:spPr>
-        <p:txBody>
-          <a:bodyPr wrap="square" lIns="0" tIns="0" rIns="0" bIns="0" rtlCol="0" anchor="t">
+            <a:off x="7799832" y="1801368"/>
+            <a:ext cx="3145536" cy="758952"/>
+          </a:xfrm>
+          <a:prstGeom prst="rect">
+            <a:avLst/>
+          </a:prstGeom>
+          <a:noFill/>
+          <a:ln/>
+        </p:spPr>
+        <p:txBody>
+          <a:bodyPr wrap="square" lIns="254" tIns="254" rIns="254" bIns="254" rtlCol="0" anchor="t">
             <a:normAutofit/>
           </a:bodyPr>
           <a:lstStyle/>
@@ -6011,7 +6080,7 @@
               <a:buNone/>
             </a:pPr>
             <a:r>
-              <a:rPr lang="en-US" sz="1550" dirty="0">
+              <a:rPr lang="en-US" sz="1320" dirty="0">
                 <a:solidFill>
                   <a:srgbClr val="17364A"/>
                 </a:solidFill>
@@ -6021,7 +6090,7 @@
               </a:rPr>
               <a:t>Create a change management plan for one AI use case.</a:t>
             </a:r>
-            <a:endParaRPr lang="en-US" sz="1550" dirty="0"/>
+            <a:endParaRPr lang="en-US" sz="1320" dirty="0"/>
           </a:p>
         </p:txBody>
       </p:sp>
@@ -6109,13 +6178,16 @@
           <a:ln/>
         </p:spPr>
         <p:txBody>
-          <a:bodyPr wrap="square" lIns="254" tIns="254" rIns="254" bIns="254" rtlCol="0" anchor="t">
+          <a:bodyPr wrap="square" lIns="508" tIns="508" rIns="508" bIns="508" rtlCol="0" anchor="t">
             <a:normAutofit/>
           </a:bodyPr>
           <a:lstStyle/>
           <a:p>
-            <a:r>
-              <a:rPr lang="en-US" sz="1380" dirty="0">
+            <a:pPr indent="0" marL="0">
+              <a:buNone/>
+            </a:pPr>
+            <a:r>
+              <a:rPr lang="en-US" sz="1220" dirty="0">
                 <a:solidFill>
                   <a:srgbClr val="17364A"/>
                 </a:solidFill>
@@ -6125,11 +6197,14 @@
               </a:rPr>
               <a:t>Create a change management plan for one AI use case.</a:t>
             </a:r>
-            <a:endParaRPr lang="en-US" sz="1380" dirty="0"/>
-          </a:p>
-          <a:p>
-            <a:r>
-              <a:rPr lang="en-US" sz="1380" dirty="0">
+            <a:endParaRPr lang="en-US" sz="1220" dirty="0"/>
+          </a:p>
+          <a:p>
+            <a:pPr indent="0" marL="0">
+              <a:buNone/>
+            </a:pPr>
+            <a:r>
+              <a:rPr lang="en-US" sz="1220" dirty="0">
                 <a:solidFill>
                   <a:srgbClr val="17364A"/>
                 </a:solidFill>
@@ -6137,9 +6212,9 @@
                 <a:ea typeface="Aptos" pitchFamily="34" charset="-122"/>
                 <a:cs typeface="Aptos" pitchFamily="34" charset="-120"/>
               </a:rPr>
-              <a:t>Include stakeholder map, communication messages, training needs, workflow changes,.</a:t>
-            </a:r>
-            <a:endParaRPr lang="en-US" sz="1380" dirty="0"/>
+              <a:t>Include stakeholder map, communication messages, training needs,.</a:t>
+            </a:r>
+            <a:endParaRPr lang="en-US" sz="1220" dirty="0"/>
           </a:p>
         </p:txBody>
       </p:sp>
@@ -6217,17 +6292,17 @@
         </p:nvSpPr>
         <p:spPr>
           <a:xfrm>
-            <a:off x="7799832" y="5001768"/>
-            <a:ext cx="3145536" cy="502920"/>
-          </a:xfrm>
-          <a:prstGeom prst="rect">
-            <a:avLst/>
-          </a:prstGeom>
-          <a:noFill/>
-          <a:ln/>
-        </p:spPr>
-        <p:txBody>
-          <a:bodyPr wrap="square" lIns="0" tIns="0" rIns="0" bIns="0" rtlCol="0" anchor="t">
+            <a:off x="7799832" y="4974336"/>
+            <a:ext cx="3145536" cy="576072"/>
+          </a:xfrm>
+          <a:prstGeom prst="rect">
+            <a:avLst/>
+          </a:prstGeom>
+          <a:noFill/>
+          <a:ln/>
+        </p:spPr>
+        <p:txBody>
+          <a:bodyPr wrap="square" lIns="254" tIns="254" rIns="254" bIns="254" rtlCol="0" anchor="t">
             <a:normAutofit/>
           </a:bodyPr>
           <a:lstStyle/>
@@ -6236,7 +6311,7 @@
               <a:buNone/>
             </a:pPr>
             <a:r>
-              <a:rPr lang="en-US" sz="1550" dirty="0">
+              <a:rPr lang="en-US" sz="1320" dirty="0">
                 <a:solidFill>
                   <a:srgbClr val="17364A"/>
                 </a:solidFill>
@@ -6244,9 +6319,9 @@
                 <a:ea typeface="Aptos" pitchFamily="34" charset="-122"/>
                 <a:cs typeface="Aptos" pitchFamily="34" charset="-120"/>
               </a:rPr>
-              <a:t>Use the assignment to test whether you can explain the concept, apply it to a realistic public health situation, and identify what would need review before the work moves forward.</a:t>
-            </a:r>
-            <a:endParaRPr lang="en-US" sz="1550" dirty="0"/>
+              <a:t>Use the assignment to test whether you can explain the concept, apply it to a realistic public health situation, and.</a:t>
+            </a:r>
+            <a:endParaRPr lang="en-US" sz="1320" dirty="0"/>
           </a:p>
         </p:txBody>
       </p:sp>
@@ -6547,49 +6622,58 @@
           <a:ln/>
         </p:spPr>
         <p:txBody>
-          <a:bodyPr wrap="square" lIns="635" tIns="635" rIns="635" bIns="635" rtlCol="0" anchor="t">
+          <a:bodyPr wrap="square" lIns="1016" tIns="1016" rIns="1016" bIns="1016" rtlCol="0" anchor="t">
             <a:normAutofit/>
           </a:bodyPr>
           <a:lstStyle/>
           <a:p>
+            <a:pPr indent="0" marL="0">
+              <a:buNone/>
+            </a:pPr>
             <a:r>
               <a:rPr lang="en-US" sz="2100" dirty="0">
                 <a:solidFill>
-                  <a:srgbClr val="17364A"/>
-                </a:solidFill>
-                <a:latin typeface="Aptos" pitchFamily="34" charset="0"/>
-                <a:ea typeface="Aptos" pitchFamily="34" charset="-122"/>
-                <a:cs typeface="Aptos" pitchFamily="34" charset="-120"/>
-              </a:rPr>
-              <a:t>Choose a real or realistic public health AI use case.</a:t>
+                  <a:srgbClr val="003A63"/>
+                </a:solidFill>
+                <a:latin typeface="Aptos" pitchFamily="34" charset="0"/>
+                <a:ea typeface="Aptos" pitchFamily="34" charset="-122"/>
+                <a:cs typeface="Aptos" pitchFamily="34" charset="-120"/>
+              </a:rPr>
+              <a:t>• Choose a real or realistic public health AI use case.</a:t>
             </a:r>
             <a:endParaRPr lang="en-US" sz="2100" dirty="0"/>
           </a:p>
           <a:p>
+            <a:pPr indent="0" marL="0">
+              <a:buNone/>
+            </a:pPr>
             <a:r>
               <a:rPr lang="en-US" sz="2100" dirty="0">
                 <a:solidFill>
-                  <a:srgbClr val="17364A"/>
-                </a:solidFill>
-                <a:latin typeface="Aptos" pitchFamily="34" charset="0"/>
-                <a:ea typeface="Aptos" pitchFamily="34" charset="-122"/>
-                <a:cs typeface="Aptos" pitchFamily="34" charset="-120"/>
-              </a:rPr>
-              <a:t>Document assumptions, unresolved questions, and which agency roles would need to review the artifact.</a:t>
+                  <a:srgbClr val="003A63"/>
+                </a:solidFill>
+                <a:latin typeface="Aptos" pitchFamily="34" charset="0"/>
+                <a:ea typeface="Aptos" pitchFamily="34" charset="-122"/>
+                <a:cs typeface="Aptos" pitchFamily="34" charset="-120"/>
+              </a:rPr>
+              <a:t>• Document assumptions, unresolved questions, and which agency roles would need to review the.</a:t>
             </a:r>
             <a:endParaRPr lang="en-US" sz="2100" dirty="0"/>
           </a:p>
           <a:p>
+            <a:pPr indent="0" marL="0">
+              <a:buNone/>
+            </a:pPr>
             <a:r>
               <a:rPr lang="en-US" sz="2100" dirty="0">
                 <a:solidFill>
-                  <a:srgbClr val="17364A"/>
-                </a:solidFill>
-                <a:latin typeface="Aptos" pitchFamily="34" charset="0"/>
-                <a:ea typeface="Aptos" pitchFamily="34" charset="-122"/>
-                <a:cs typeface="Aptos" pitchFamily="34" charset="-120"/>
-              </a:rPr>
-              <a:t>The exercise should produce a work product that could support governance review, leadership discussion,.</a:t>
+                  <a:srgbClr val="003A63"/>
+                </a:solidFill>
+                <a:latin typeface="Aptos" pitchFamily="34" charset="0"/>
+                <a:ea typeface="Aptos" pitchFamily="34" charset="-122"/>
+                <a:cs typeface="Aptos" pitchFamily="34" charset="-120"/>
+              </a:rPr>
+              <a:t>• The exercise should produce a work product that could support governance review, leadership.</a:t>
             </a:r>
             <a:endParaRPr lang="en-US" sz="2100" dirty="0"/>
           </a:p>
@@ -6669,17 +6753,17 @@
         </p:nvSpPr>
         <p:spPr>
           <a:xfrm>
-            <a:off x="7799832" y="1828800"/>
-            <a:ext cx="3145536" cy="685800"/>
-          </a:xfrm>
-          <a:prstGeom prst="rect">
-            <a:avLst/>
-          </a:prstGeom>
-          <a:noFill/>
-          <a:ln/>
-        </p:spPr>
-        <p:txBody>
-          <a:bodyPr wrap="square" lIns="0" tIns="0" rIns="0" bIns="0" rtlCol="0" anchor="t">
+            <a:off x="7799832" y="1801368"/>
+            <a:ext cx="3145536" cy="758952"/>
+          </a:xfrm>
+          <a:prstGeom prst="rect">
+            <a:avLst/>
+          </a:prstGeom>
+          <a:noFill/>
+          <a:ln/>
+        </p:spPr>
+        <p:txBody>
+          <a:bodyPr wrap="square" lIns="254" tIns="254" rIns="254" bIns="254" rtlCol="0" anchor="t">
             <a:normAutofit/>
           </a:bodyPr>
           <a:lstStyle/>
@@ -6688,7 +6772,7 @@
               <a:buNone/>
             </a:pPr>
             <a:r>
-              <a:rPr lang="en-US" sz="1550" dirty="0">
+              <a:rPr lang="en-US" sz="1320" dirty="0">
                 <a:solidFill>
                   <a:srgbClr val="17364A"/>
                 </a:solidFill>
@@ -6698,7 +6782,7 @@
               </a:rPr>
               <a:t>Choose a real or realistic public health AI use case.</a:t>
             </a:r>
-            <a:endParaRPr lang="en-US" sz="1550" dirty="0"/>
+            <a:endParaRPr lang="en-US" sz="1320" dirty="0"/>
           </a:p>
         </p:txBody>
       </p:sp>
@@ -6786,13 +6870,16 @@
           <a:ln/>
         </p:spPr>
         <p:txBody>
-          <a:bodyPr wrap="square" lIns="254" tIns="254" rIns="254" bIns="254" rtlCol="0" anchor="t">
+          <a:bodyPr wrap="square" lIns="508" tIns="508" rIns="508" bIns="508" rtlCol="0" anchor="t">
             <a:normAutofit/>
           </a:bodyPr>
           <a:lstStyle/>
           <a:p>
-            <a:r>
-              <a:rPr lang="en-US" sz="1380" dirty="0">
+            <a:pPr indent="0" marL="0">
+              <a:buNone/>
+            </a:pPr>
+            <a:r>
+              <a:rPr lang="en-US" sz="1220" dirty="0">
                 <a:solidFill>
                   <a:srgbClr val="17364A"/>
                 </a:solidFill>
@@ -6800,13 +6887,16 @@
                 <a:ea typeface="Aptos" pitchFamily="34" charset="-122"/>
                 <a:cs typeface="Aptos" pitchFamily="34" charset="-120"/>
               </a:rPr>
-              <a:t>Document assumptions, unresolved questions, and which agency roles would need to review.</a:t>
-            </a:r>
-            <a:endParaRPr lang="en-US" sz="1380" dirty="0"/>
-          </a:p>
-          <a:p>
-            <a:r>
-              <a:rPr lang="en-US" sz="1380" dirty="0">
+              <a:t>Document assumptions, unresolved questions, and which agency roles.</a:t>
+            </a:r>
+            <a:endParaRPr lang="en-US" sz="1220" dirty="0"/>
+          </a:p>
+          <a:p>
+            <a:pPr indent="0" marL="0">
+              <a:buNone/>
+            </a:pPr>
+            <a:r>
+              <a:rPr lang="en-US" sz="1220" dirty="0">
                 <a:solidFill>
                   <a:srgbClr val="17364A"/>
                 </a:solidFill>
@@ -6814,9 +6904,9 @@
                 <a:ea typeface="Aptos" pitchFamily="34" charset="-122"/>
                 <a:cs typeface="Aptos" pitchFamily="34" charset="-120"/>
               </a:rPr>
-              <a:t>The exercise should produce a work product that could support governance review,.</a:t>
-            </a:r>
-            <a:endParaRPr lang="en-US" sz="1380" dirty="0"/>
+              <a:t>The exercise should produce a work product that could support.</a:t>
+            </a:r>
+            <a:endParaRPr lang="en-US" sz="1220" dirty="0"/>
           </a:p>
         </p:txBody>
       </p:sp>
@@ -6894,17 +6984,17 @@
         </p:nvSpPr>
         <p:spPr>
           <a:xfrm>
-            <a:off x="7799832" y="5001768"/>
-            <a:ext cx="3145536" cy="502920"/>
-          </a:xfrm>
-          <a:prstGeom prst="rect">
-            <a:avLst/>
-          </a:prstGeom>
-          <a:noFill/>
-          <a:ln/>
-        </p:spPr>
-        <p:txBody>
-          <a:bodyPr wrap="square" lIns="0" tIns="0" rIns="0" bIns="0" rtlCol="0" anchor="t">
+            <a:off x="7799832" y="4974336"/>
+            <a:ext cx="3145536" cy="576072"/>
+          </a:xfrm>
+          <a:prstGeom prst="rect">
+            <a:avLst/>
+          </a:prstGeom>
+          <a:noFill/>
+          <a:ln/>
+        </p:spPr>
+        <p:txBody>
+          <a:bodyPr wrap="square" lIns="254" tIns="254" rIns="254" bIns="254" rtlCol="0" anchor="t">
             <a:normAutofit/>
           </a:bodyPr>
           <a:lstStyle/>
@@ -6913,7 +7003,7 @@
               <a:buNone/>
             </a:pPr>
             <a:r>
-              <a:rPr lang="en-US" sz="1550" dirty="0">
+              <a:rPr lang="en-US" sz="1320" dirty="0">
                 <a:solidFill>
                   <a:srgbClr val="17364A"/>
                 </a:solidFill>
@@ -6921,9 +7011,9 @@
                 <a:ea typeface="Aptos" pitchFamily="34" charset="-122"/>
                 <a:cs typeface="Aptos" pitchFamily="34" charset="-120"/>
               </a:rPr>
-              <a:t>Use the concept to clarify workflow changes, dependencies, staffing, procurement requirements, training needs, and implementation checkpoints.</a:t>
-            </a:r>
-            <a:endParaRPr lang="en-US" sz="1550" dirty="0"/>
+              <a:t>Use the concept to clarify workflow changes, dependencies, staffing, procurement requirements, training needs, and.</a:t>
+            </a:r>
+            <a:endParaRPr lang="en-US" sz="1320" dirty="0"/>
           </a:p>
         </p:txBody>
       </p:sp>
@@ -7224,21 +7314,24 @@
           <a:ln/>
         </p:spPr>
         <p:txBody>
-          <a:bodyPr wrap="square" lIns="635" tIns="635" rIns="635" bIns="635" rtlCol="0" anchor="t">
+          <a:bodyPr wrap="square" lIns="1016" tIns="1016" rIns="1016" bIns="1016" rtlCol="0" anchor="t">
             <a:normAutofit/>
           </a:bodyPr>
           <a:lstStyle/>
           <a:p>
+            <a:pPr indent="0" marL="0">
+              <a:buNone/>
+            </a:pPr>
             <a:r>
               <a:rPr lang="en-US" sz="2100" dirty="0">
                 <a:solidFill>
-                  <a:srgbClr val="17364A"/>
-                </a:solidFill>
-                <a:latin typeface="Aptos" pitchFamily="34" charset="0"/>
-                <a:ea typeface="Aptos" pitchFamily="34" charset="-122"/>
-                <a:cs typeface="Aptos" pitchFamily="34" charset="-120"/>
-              </a:rPr>
-              <a:t>AI adoption plan; stakeholder map; communication plan; training plan; feedback and adoption monitoring.</a:t>
+                  <a:srgbClr val="003A63"/>
+                </a:solidFill>
+                <a:latin typeface="Aptos" pitchFamily="34" charset="0"/>
+                <a:ea typeface="Aptos" pitchFamily="34" charset="-122"/>
+                <a:cs typeface="Aptos" pitchFamily="34" charset="-120"/>
+              </a:rPr>
+              <a:t>• AI adoption plan; stakeholder map; communication plan; training plan; feedback and adoption.</a:t>
             </a:r>
             <a:endParaRPr lang="en-US" sz="2100" dirty="0"/>
           </a:p>
@@ -7318,17 +7411,17 @@
         </p:nvSpPr>
         <p:spPr>
           <a:xfrm>
-            <a:off x="7799832" y="1828800"/>
-            <a:ext cx="3145536" cy="685800"/>
-          </a:xfrm>
-          <a:prstGeom prst="rect">
-            <a:avLst/>
-          </a:prstGeom>
-          <a:noFill/>
-          <a:ln/>
-        </p:spPr>
-        <p:txBody>
-          <a:bodyPr wrap="square" lIns="0" tIns="0" rIns="0" bIns="0" rtlCol="0" anchor="t">
+            <a:off x="7799832" y="1801368"/>
+            <a:ext cx="3145536" cy="758952"/>
+          </a:xfrm>
+          <a:prstGeom prst="rect">
+            <a:avLst/>
+          </a:prstGeom>
+          <a:noFill/>
+          <a:ln/>
+        </p:spPr>
+        <p:txBody>
+          <a:bodyPr wrap="square" lIns="254" tIns="254" rIns="254" bIns="254" rtlCol="0" anchor="t">
             <a:normAutofit/>
           </a:bodyPr>
           <a:lstStyle/>
@@ -7337,7 +7430,7 @@
               <a:buNone/>
             </a:pPr>
             <a:r>
-              <a:rPr lang="en-US" sz="1550" dirty="0">
+              <a:rPr lang="en-US" sz="1320" dirty="0">
                 <a:solidFill>
                   <a:srgbClr val="17364A"/>
                 </a:solidFill>
@@ -7347,7 +7440,7 @@
               </a:rPr>
               <a:t>AI adoption plan; stakeholder map; communication plan; training plan; feedback and adoption monitoring.</a:t>
             </a:r>
-            <a:endParaRPr lang="en-US" sz="1550" dirty="0"/>
+            <a:endParaRPr lang="en-US" sz="1320" dirty="0"/>
           </a:p>
         </p:txBody>
       </p:sp>
@@ -7435,13 +7528,16 @@
           <a:ln/>
         </p:spPr>
         <p:txBody>
-          <a:bodyPr wrap="square" lIns="254" tIns="254" rIns="254" bIns="254" rtlCol="0" anchor="t">
+          <a:bodyPr wrap="square" lIns="508" tIns="508" rIns="508" bIns="508" rtlCol="0" anchor="t">
             <a:normAutofit/>
           </a:bodyPr>
           <a:lstStyle/>
           <a:p>
-            <a:r>
-              <a:rPr lang="en-US" sz="1380" dirty="0">
+            <a:pPr indent="0" marL="0">
+              <a:buNone/>
+            </a:pPr>
+            <a:r>
+              <a:rPr lang="en-US" sz="1220" dirty="0">
                 <a:solidFill>
                   <a:srgbClr val="17364A"/>
                 </a:solidFill>
@@ -7449,9 +7545,9 @@
                 <a:ea typeface="Aptos" pitchFamily="34" charset="-122"/>
                 <a:cs typeface="Aptos" pitchFamily="34" charset="-120"/>
               </a:rPr>
-              <a:t>AI adoption plan; stakeholder map; communication plan; training plan; feedback and.</a:t>
-            </a:r>
-            <a:endParaRPr lang="en-US" sz="1380" dirty="0"/>
+              <a:t>AI adoption plan; stakeholder map; communication plan; training.</a:t>
+            </a:r>
+            <a:endParaRPr lang="en-US" sz="1220" dirty="0"/>
           </a:p>
         </p:txBody>
       </p:sp>
@@ -7529,17 +7625,17 @@
         </p:nvSpPr>
         <p:spPr>
           <a:xfrm>
-            <a:off x="7799832" y="5001768"/>
-            <a:ext cx="3145536" cy="502920"/>
-          </a:xfrm>
-          <a:prstGeom prst="rect">
-            <a:avLst/>
-          </a:prstGeom>
-          <a:noFill/>
-          <a:ln/>
-        </p:spPr>
-        <p:txBody>
-          <a:bodyPr wrap="square" lIns="0" tIns="0" rIns="0" bIns="0" rtlCol="0" anchor="t">
+            <a:off x="7799832" y="4974336"/>
+            <a:ext cx="3145536" cy="576072"/>
+          </a:xfrm>
+          <a:prstGeom prst="rect">
+            <a:avLst/>
+          </a:prstGeom>
+          <a:noFill/>
+          <a:ln/>
+        </p:spPr>
+        <p:txBody>
+          <a:bodyPr wrap="square" lIns="254" tIns="254" rIns="254" bIns="254" rtlCol="0" anchor="t">
             <a:normAutofit/>
           </a:bodyPr>
           <a:lstStyle/>
@@ -7548,7 +7644,7 @@
               <a:buNone/>
             </a:pPr>
             <a:r>
-              <a:rPr lang="en-US" sz="1550" dirty="0">
+              <a:rPr lang="en-US" sz="1320" dirty="0">
                 <a:solidFill>
                   <a:srgbClr val="17364A"/>
                 </a:solidFill>
@@ -7556,9 +7652,9 @@
                 <a:ea typeface="Aptos" pitchFamily="34" charset="-122"/>
                 <a:cs typeface="Aptos" pitchFamily="34" charset="-120"/>
               </a:rPr>
-              <a:t>Use the concept to clarify workflow changes, dependencies, staffing, procurement requirements, training needs, and implementation checkpoints.</a:t>
-            </a:r>
-            <a:endParaRPr lang="en-US" sz="1550" dirty="0"/>
+              <a:t>Use the concept to clarify workflow changes, dependencies, staffing, procurement requirements, training needs, and.</a:t>
+            </a:r>
+            <a:endParaRPr lang="en-US" sz="1320" dirty="0"/>
           </a:p>
         </p:txBody>
       </p:sp>
@@ -7859,21 +7955,24 @@
           <a:ln/>
         </p:spPr>
         <p:txBody>
-          <a:bodyPr wrap="square" lIns="635" tIns="635" rIns="635" bIns="635" rtlCol="0" anchor="t">
+          <a:bodyPr wrap="square" lIns="1016" tIns="1016" rIns="1016" bIns="1016" rtlCol="0" anchor="t">
             <a:normAutofit/>
           </a:bodyPr>
           <a:lstStyle/>
           <a:p>
+            <a:pPr indent="0" marL="0">
+              <a:buNone/>
+            </a:pPr>
             <a:r>
               <a:rPr lang="en-US" sz="2100" dirty="0">
                 <a:solidFill>
-                  <a:srgbClr val="17364A"/>
-                </a:solidFill>
-                <a:latin typeface="Aptos" pitchFamily="34" charset="0"/>
-                <a:ea typeface="Aptos" pitchFamily="34" charset="-122"/>
-                <a:cs typeface="Aptos" pitchFamily="34" charset="-120"/>
-              </a:rPr>
-              <a:t>AI adoption plan; stakeholder map; communication plan; training plan; feedback and adoption monitoring.</a:t>
+                  <a:srgbClr val="003A63"/>
+                </a:solidFill>
+                <a:latin typeface="Aptos" pitchFamily="34" charset="0"/>
+                <a:ea typeface="Aptos" pitchFamily="34" charset="-122"/>
+                <a:cs typeface="Aptos" pitchFamily="34" charset="-120"/>
+              </a:rPr>
+              <a:t>• AI adoption plan; stakeholder map; communication plan; training plan; feedback and adoption.</a:t>
             </a:r>
             <a:endParaRPr lang="en-US" sz="2100" dirty="0"/>
           </a:p>
@@ -7953,17 +8052,17 @@
         </p:nvSpPr>
         <p:spPr>
           <a:xfrm>
-            <a:off x="7799832" y="1828800"/>
-            <a:ext cx="3145536" cy="685800"/>
-          </a:xfrm>
-          <a:prstGeom prst="rect">
-            <a:avLst/>
-          </a:prstGeom>
-          <a:noFill/>
-          <a:ln/>
-        </p:spPr>
-        <p:txBody>
-          <a:bodyPr wrap="square" lIns="0" tIns="0" rIns="0" bIns="0" rtlCol="0" anchor="t">
+            <a:off x="7799832" y="1801368"/>
+            <a:ext cx="3145536" cy="758952"/>
+          </a:xfrm>
+          <a:prstGeom prst="rect">
+            <a:avLst/>
+          </a:prstGeom>
+          <a:noFill/>
+          <a:ln/>
+        </p:spPr>
+        <p:txBody>
+          <a:bodyPr wrap="square" lIns="254" tIns="254" rIns="254" bIns="254" rtlCol="0" anchor="t">
             <a:normAutofit/>
           </a:bodyPr>
           <a:lstStyle/>
@@ -7972,7 +8071,7 @@
               <a:buNone/>
             </a:pPr>
             <a:r>
-              <a:rPr lang="en-US" sz="1550" dirty="0">
+              <a:rPr lang="en-US" sz="1320" dirty="0">
                 <a:solidFill>
                   <a:srgbClr val="17364A"/>
                 </a:solidFill>
@@ -7982,7 +8081,7 @@
               </a:rPr>
               <a:t>AI adoption plan; stakeholder map; communication plan; training plan; feedback and adoption monitoring.</a:t>
             </a:r>
-            <a:endParaRPr lang="en-US" sz="1550" dirty="0"/>
+            <a:endParaRPr lang="en-US" sz="1320" dirty="0"/>
           </a:p>
         </p:txBody>
       </p:sp>
@@ -8070,13 +8169,16 @@
           <a:ln/>
         </p:spPr>
         <p:txBody>
-          <a:bodyPr wrap="square" lIns="254" tIns="254" rIns="254" bIns="254" rtlCol="0" anchor="t">
+          <a:bodyPr wrap="square" lIns="508" tIns="508" rIns="508" bIns="508" rtlCol="0" anchor="t">
             <a:normAutofit/>
           </a:bodyPr>
           <a:lstStyle/>
           <a:p>
-            <a:r>
-              <a:rPr lang="en-US" sz="1380" dirty="0">
+            <a:pPr indent="0" marL="0">
+              <a:buNone/>
+            </a:pPr>
+            <a:r>
+              <a:rPr lang="en-US" sz="1220" dirty="0">
                 <a:solidFill>
                   <a:srgbClr val="17364A"/>
                 </a:solidFill>
@@ -8084,9 +8186,9 @@
                 <a:ea typeface="Aptos" pitchFamily="34" charset="-122"/>
                 <a:cs typeface="Aptos" pitchFamily="34" charset="-120"/>
               </a:rPr>
-              <a:t>AI adoption plan; stakeholder map; communication plan; training plan; feedback and.</a:t>
-            </a:r>
-            <a:endParaRPr lang="en-US" sz="1380" dirty="0"/>
+              <a:t>AI adoption plan; stakeholder map; communication plan; training.</a:t>
+            </a:r>
+            <a:endParaRPr lang="en-US" sz="1220" dirty="0"/>
           </a:p>
         </p:txBody>
       </p:sp>
@@ -8164,17 +8266,17 @@
         </p:nvSpPr>
         <p:spPr>
           <a:xfrm>
-            <a:off x="7799832" y="5001768"/>
-            <a:ext cx="3145536" cy="502920"/>
-          </a:xfrm>
-          <a:prstGeom prst="rect">
-            <a:avLst/>
-          </a:prstGeom>
-          <a:noFill/>
-          <a:ln/>
-        </p:spPr>
-        <p:txBody>
-          <a:bodyPr wrap="square" lIns="0" tIns="0" rIns="0" bIns="0" rtlCol="0" anchor="t">
+            <a:off x="7799832" y="4974336"/>
+            <a:ext cx="3145536" cy="576072"/>
+          </a:xfrm>
+          <a:prstGeom prst="rect">
+            <a:avLst/>
+          </a:prstGeom>
+          <a:noFill/>
+          <a:ln/>
+        </p:spPr>
+        <p:txBody>
+          <a:bodyPr wrap="square" lIns="254" tIns="254" rIns="254" bIns="254" rtlCol="0" anchor="t">
             <a:normAutofit/>
           </a:bodyPr>
           <a:lstStyle/>
@@ -8183,7 +8285,7 @@
               <a:buNone/>
             </a:pPr>
             <a:r>
-              <a:rPr lang="en-US" sz="1550" dirty="0">
+              <a:rPr lang="en-US" sz="1320" dirty="0">
                 <a:solidFill>
                   <a:srgbClr val="17364A"/>
                 </a:solidFill>
@@ -8191,9 +8293,9 @@
                 <a:ea typeface="Aptos" pitchFamily="34" charset="-122"/>
                 <a:cs typeface="Aptos" pitchFamily="34" charset="-120"/>
               </a:rPr>
-              <a:t>Use the assignment to test whether you can explain the concept, apply it to a realistic public health situation, and identify what would need review before the work moves forward.</a:t>
-            </a:r>
-            <a:endParaRPr lang="en-US" sz="1550" dirty="0"/>
+              <a:t>Use the assignment to test whether you can explain the concept, apply it to a realistic public health situation, and.</a:t>
+            </a:r>
+            <a:endParaRPr lang="en-US" sz="1320" dirty="0"/>
           </a:p>
         </p:txBody>
       </p:sp>
@@ -8494,49 +8596,58 @@
           <a:ln/>
         </p:spPr>
         <p:txBody>
-          <a:bodyPr wrap="square" lIns="635" tIns="635" rIns="635" bIns="635" rtlCol="0" anchor="t">
+          <a:bodyPr wrap="square" lIns="1016" tIns="1016" rIns="1016" bIns="1016" rtlCol="0" anchor="t">
             <a:normAutofit/>
           </a:bodyPr>
           <a:lstStyle/>
           <a:p>
+            <a:pPr indent="0" marL="0">
+              <a:buNone/>
+            </a:pPr>
             <a:r>
               <a:rPr lang="en-US" sz="2100" dirty="0">
                 <a:solidFill>
-                  <a:srgbClr val="17364A"/>
-                </a:solidFill>
-                <a:latin typeface="Aptos" pitchFamily="34" charset="0"/>
-                <a:ea typeface="Aptos" pitchFamily="34" charset="-122"/>
-                <a:cs typeface="Aptos" pitchFamily="34" charset="-120"/>
-              </a:rPr>
-              <a:t>1. What is the strongest reason this module topic belongs in AI leadership and governance training?</a:t>
+                  <a:srgbClr val="003A63"/>
+                </a:solidFill>
+                <a:latin typeface="Aptos" pitchFamily="34" charset="0"/>
+                <a:ea typeface="Aptos" pitchFamily="34" charset="-122"/>
+                <a:cs typeface="Aptos" pitchFamily="34" charset="-120"/>
+              </a:rPr>
+              <a:t>• 1. What is the strongest reason this module topic belongs in AI leadership and governance.</a:t>
             </a:r>
             <a:endParaRPr lang="en-US" sz="2100" dirty="0"/>
           </a:p>
           <a:p>
+            <a:pPr indent="0" marL="0">
+              <a:buNone/>
+            </a:pPr>
             <a:r>
               <a:rPr lang="en-US" sz="2100" dirty="0">
                 <a:solidFill>
-                  <a:srgbClr val="17364A"/>
-                </a:solidFill>
-                <a:latin typeface="Aptos" pitchFamily="34" charset="0"/>
-                <a:ea typeface="Aptos" pitchFamily="34" charset="-122"/>
-                <a:cs typeface="Aptos" pitchFamily="34" charset="-120"/>
-              </a:rPr>
-              <a:t>2. Which practice best supports accountable public health AI governance?</a:t>
+                  <a:srgbClr val="003A63"/>
+                </a:solidFill>
+                <a:latin typeface="Aptos" pitchFamily="34" charset="0"/>
+                <a:ea typeface="Aptos" pitchFamily="34" charset="-122"/>
+                <a:cs typeface="Aptos" pitchFamily="34" charset="-120"/>
+              </a:rPr>
+              <a:t>• 2. Which practice best supports accountable public health AI governance?</a:t>
             </a:r>
             <a:endParaRPr lang="en-US" sz="2100" dirty="0"/>
           </a:p>
           <a:p>
+            <a:pPr indent="0" marL="0">
+              <a:buNone/>
+            </a:pPr>
             <a:r>
               <a:rPr lang="en-US" sz="2100" dirty="0">
                 <a:solidFill>
-                  <a:srgbClr val="17364A"/>
-                </a:solidFill>
-                <a:latin typeface="Aptos" pitchFamily="34" charset="0"/>
-                <a:ea typeface="Aptos" pitchFamily="34" charset="-122"/>
-                <a:cs typeface="Aptos" pitchFamily="34" charset="-120"/>
-              </a:rPr>
-              <a:t>3. When should an AI use case be escalated for leadership or governance review?</a:t>
+                  <a:srgbClr val="003A63"/>
+                </a:solidFill>
+                <a:latin typeface="Aptos" pitchFamily="34" charset="0"/>
+                <a:ea typeface="Aptos" pitchFamily="34" charset="-122"/>
+                <a:cs typeface="Aptos" pitchFamily="34" charset="-120"/>
+              </a:rPr>
+              <a:t>• 3. When should an AI use case be escalated for leadership or governance review?</a:t>
             </a:r>
             <a:endParaRPr lang="en-US" sz="2100" dirty="0"/>
           </a:p>
@@ -8616,17 +8727,17 @@
         </p:nvSpPr>
         <p:spPr>
           <a:xfrm>
-            <a:off x="7799832" y="1828800"/>
-            <a:ext cx="3145536" cy="685800"/>
-          </a:xfrm>
-          <a:prstGeom prst="rect">
-            <a:avLst/>
-          </a:prstGeom>
-          <a:noFill/>
-          <a:ln/>
-        </p:spPr>
-        <p:txBody>
-          <a:bodyPr wrap="square" lIns="0" tIns="0" rIns="0" bIns="0" rtlCol="0" anchor="t">
+            <a:off x="7799832" y="1801368"/>
+            <a:ext cx="3145536" cy="758952"/>
+          </a:xfrm>
+          <a:prstGeom prst="rect">
+            <a:avLst/>
+          </a:prstGeom>
+          <a:noFill/>
+          <a:ln/>
+        </p:spPr>
+        <p:txBody>
+          <a:bodyPr wrap="square" lIns="254" tIns="254" rIns="254" bIns="254" rtlCol="0" anchor="t">
             <a:normAutofit/>
           </a:bodyPr>
           <a:lstStyle/>
@@ -8635,7 +8746,7 @@
               <a:buNone/>
             </a:pPr>
             <a:r>
-              <a:rPr lang="en-US" sz="1550" dirty="0">
+              <a:rPr lang="en-US" sz="1320" dirty="0">
                 <a:solidFill>
                   <a:srgbClr val="17364A"/>
                 </a:solidFill>
@@ -8645,7 +8756,7 @@
               </a:rPr>
               <a:t>1. What is the strongest reason this module topic belongs in AI leadership and governance training?</a:t>
             </a:r>
-            <a:endParaRPr lang="en-US" sz="1550" dirty="0"/>
+            <a:endParaRPr lang="en-US" sz="1320" dirty="0"/>
           </a:p>
         </p:txBody>
       </p:sp>
@@ -8733,13 +8844,16 @@
           <a:ln/>
         </p:spPr>
         <p:txBody>
-          <a:bodyPr wrap="square" lIns="254" tIns="254" rIns="254" bIns="254" rtlCol="0" anchor="t">
+          <a:bodyPr wrap="square" lIns="508" tIns="508" rIns="508" bIns="508" rtlCol="0" anchor="t">
             <a:normAutofit/>
           </a:bodyPr>
           <a:lstStyle/>
           <a:p>
-            <a:r>
-              <a:rPr lang="en-US" sz="1380" dirty="0">
+            <a:pPr indent="0" marL="0">
+              <a:buNone/>
+            </a:pPr>
+            <a:r>
+              <a:rPr lang="en-US" sz="1220" dirty="0">
                 <a:solidFill>
                   <a:srgbClr val="17364A"/>
                 </a:solidFill>
@@ -8749,11 +8863,14 @@
               </a:rPr>
               <a:t>1.</a:t>
             </a:r>
-            <a:endParaRPr lang="en-US" sz="1380" dirty="0"/>
-          </a:p>
-          <a:p>
-            <a:r>
-              <a:rPr lang="en-US" sz="1380" dirty="0">
+            <a:endParaRPr lang="en-US" sz="1220" dirty="0"/>
+          </a:p>
+          <a:p>
+            <a:pPr indent="0" marL="0">
+              <a:buNone/>
+            </a:pPr>
+            <a:r>
+              <a:rPr lang="en-US" sz="1220" dirty="0">
                 <a:solidFill>
                   <a:srgbClr val="17364A"/>
                 </a:solidFill>
@@ -8761,13 +8878,16 @@
                 <a:ea typeface="Aptos" pitchFamily="34" charset="-122"/>
                 <a:cs typeface="Aptos" pitchFamily="34" charset="-120"/>
               </a:rPr>
-              <a:t>What is the strongest reason this module topic belongs in AI leadership and governance.</a:t>
-            </a:r>
-            <a:endParaRPr lang="en-US" sz="1380" dirty="0"/>
-          </a:p>
-          <a:p>
-            <a:r>
-              <a:rPr lang="en-US" sz="1380" dirty="0">
+              <a:t>What is the strongest reason this module topic belongs in AI.</a:t>
+            </a:r>
+            <a:endParaRPr lang="en-US" sz="1220" dirty="0"/>
+          </a:p>
+          <a:p>
+            <a:pPr indent="0" marL="0">
+              <a:buNone/>
+            </a:pPr>
+            <a:r>
+              <a:rPr lang="en-US" sz="1220" dirty="0">
                 <a:solidFill>
                   <a:srgbClr val="17364A"/>
                 </a:solidFill>
@@ -8777,7 +8897,7 @@
               </a:rPr>
               <a:t>2.</a:t>
             </a:r>
-            <a:endParaRPr lang="en-US" sz="1380" dirty="0"/>
+            <a:endParaRPr lang="en-US" sz="1220" dirty="0"/>
           </a:p>
         </p:txBody>
       </p:sp>
@@ -8855,17 +8975,17 @@
         </p:nvSpPr>
         <p:spPr>
           <a:xfrm>
-            <a:off x="7799832" y="5001768"/>
-            <a:ext cx="3145536" cy="502920"/>
-          </a:xfrm>
-          <a:prstGeom prst="rect">
-            <a:avLst/>
-          </a:prstGeom>
-          <a:noFill/>
-          <a:ln/>
-        </p:spPr>
-        <p:txBody>
-          <a:bodyPr wrap="square" lIns="0" tIns="0" rIns="0" bIns="0" rtlCol="0" anchor="t">
+            <a:off x="7799832" y="4974336"/>
+            <a:ext cx="3145536" cy="576072"/>
+          </a:xfrm>
+          <a:prstGeom prst="rect">
+            <a:avLst/>
+          </a:prstGeom>
+          <a:noFill/>
+          <a:ln/>
+        </p:spPr>
+        <p:txBody>
+          <a:bodyPr wrap="square" lIns="254" tIns="254" rIns="254" bIns="254" rtlCol="0" anchor="t">
             <a:normAutofit/>
           </a:bodyPr>
           <a:lstStyle/>
@@ -8874,7 +8994,7 @@
               <a:buNone/>
             </a:pPr>
             <a:r>
-              <a:rPr lang="en-US" sz="1550" dirty="0">
+              <a:rPr lang="en-US" sz="1320" dirty="0">
                 <a:solidFill>
                   <a:srgbClr val="17364A"/>
                 </a:solidFill>
@@ -8882,9 +9002,9 @@
                 <a:ea typeface="Aptos" pitchFamily="34" charset="-122"/>
                 <a:cs typeface="Aptos" pitchFamily="34" charset="-120"/>
               </a:rPr>
-              <a:t>Use the assignment to test whether you can explain the concept, apply it to a realistic public health situation, and identify what would need review before the work moves forward.</a:t>
-            </a:r>
-            <a:endParaRPr lang="en-US" sz="1550" dirty="0"/>
+              <a:t>Use the assignment to test whether you can explain the concept, apply it to a realistic public health situation, and.</a:t>
+            </a:r>
+            <a:endParaRPr lang="en-US" sz="1320" dirty="0"/>
           </a:p>
         </p:txBody>
       </p:sp>
@@ -9185,49 +9305,58 @@
           <a:ln/>
         </p:spPr>
         <p:txBody>
-          <a:bodyPr wrap="square" lIns="635" tIns="635" rIns="635" bIns="635" rtlCol="0" anchor="t">
+          <a:bodyPr wrap="square" lIns="1016" tIns="1016" rIns="1016" bIns="1016" rtlCol="0" anchor="t">
             <a:normAutofit/>
           </a:bodyPr>
           <a:lstStyle/>
           <a:p>
+            <a:pPr indent="0" marL="0">
+              <a:buNone/>
+            </a:pPr>
             <a:r>
               <a:rPr lang="en-US" sz="2100" dirty="0">
                 <a:solidFill>
-                  <a:srgbClr val="17364A"/>
-                </a:solidFill>
-                <a:latin typeface="Aptos" pitchFamily="34" charset="0"/>
-                <a:ea typeface="Aptos" pitchFamily="34" charset="-122"/>
-                <a:cs typeface="Aptos" pitchFamily="34" charset="-120"/>
-              </a:rPr>
-              <a:t>NIST Artificial Intelligence Risk Management Framework (AI RMF 1.0):.</a:t>
+                  <a:srgbClr val="003A63"/>
+                </a:solidFill>
+                <a:latin typeface="Aptos" pitchFamily="34" charset="0"/>
+                <a:ea typeface="Aptos" pitchFamily="34" charset="-122"/>
+                <a:cs typeface="Aptos" pitchFamily="34" charset="-120"/>
+              </a:rPr>
+              <a:t>• NIST Artificial Intelligence Risk Management Framework (AI RMF 1.0):.</a:t>
             </a:r>
             <a:endParaRPr lang="en-US" sz="2100" dirty="0"/>
           </a:p>
           <a:p>
+            <a:pPr indent="0" marL="0">
+              <a:buNone/>
+            </a:pPr>
             <a:r>
               <a:rPr lang="en-US" sz="2100" dirty="0">
                 <a:solidFill>
-                  <a:srgbClr val="17364A"/>
-                </a:solidFill>
-                <a:latin typeface="Aptos" pitchFamily="34" charset="0"/>
-                <a:ea typeface="Aptos" pitchFamily="34" charset="-122"/>
-                <a:cs typeface="Aptos" pitchFamily="34" charset="-120"/>
-              </a:rPr>
-              <a:t>NIST Generative AI Profile:.</a:t>
+                  <a:srgbClr val="003A63"/>
+                </a:solidFill>
+                <a:latin typeface="Aptos" pitchFamily="34" charset="0"/>
+                <a:ea typeface="Aptos" pitchFamily="34" charset="-122"/>
+                <a:cs typeface="Aptos" pitchFamily="34" charset="-120"/>
+              </a:rPr>
+              <a:t>• NIST Generative AI Profile:.</a:t>
             </a:r>
             <a:endParaRPr lang="en-US" sz="2100" dirty="0"/>
           </a:p>
           <a:p>
+            <a:pPr indent="0" marL="0">
+              <a:buNone/>
+            </a:pPr>
             <a:r>
               <a:rPr lang="en-US" sz="2100" dirty="0">
                 <a:solidFill>
-                  <a:srgbClr val="17364A"/>
-                </a:solidFill>
-                <a:latin typeface="Aptos" pitchFamily="34" charset="0"/>
-                <a:ea typeface="Aptos" pitchFamily="34" charset="-122"/>
-                <a:cs typeface="Aptos" pitchFamily="34" charset="-120"/>
-              </a:rPr>
-              <a:t>NIST Privacy Framework</a:t>
+                  <a:srgbClr val="003A63"/>
+                </a:solidFill>
+                <a:latin typeface="Aptos" pitchFamily="34" charset="0"/>
+                <a:ea typeface="Aptos" pitchFamily="34" charset="-122"/>
+                <a:cs typeface="Aptos" pitchFamily="34" charset="-120"/>
+              </a:rPr>
+              <a:t>• NIST Privacy Framework</a:t>
             </a:r>
             <a:endParaRPr lang="en-US" sz="2100" dirty="0"/>
           </a:p>
@@ -9307,17 +9436,17 @@
         </p:nvSpPr>
         <p:spPr>
           <a:xfrm>
-            <a:off x="7799832" y="1828800"/>
-            <a:ext cx="3145536" cy="685800"/>
-          </a:xfrm>
-          <a:prstGeom prst="rect">
-            <a:avLst/>
-          </a:prstGeom>
-          <a:noFill/>
-          <a:ln/>
-        </p:spPr>
-        <p:txBody>
-          <a:bodyPr wrap="square" lIns="0" tIns="0" rIns="0" bIns="0" rtlCol="0" anchor="t">
+            <a:off x="7799832" y="1801368"/>
+            <a:ext cx="3145536" cy="758952"/>
+          </a:xfrm>
+          <a:prstGeom prst="rect">
+            <a:avLst/>
+          </a:prstGeom>
+          <a:noFill/>
+          <a:ln/>
+        </p:spPr>
+        <p:txBody>
+          <a:bodyPr wrap="square" lIns="254" tIns="254" rIns="254" bIns="254" rtlCol="0" anchor="t">
             <a:normAutofit/>
           </a:bodyPr>
           <a:lstStyle/>
@@ -9326,7 +9455,7 @@
               <a:buNone/>
             </a:pPr>
             <a:r>
-              <a:rPr lang="en-US" sz="1550" dirty="0">
+              <a:rPr lang="en-US" sz="1320" dirty="0">
                 <a:solidFill>
                   <a:srgbClr val="17364A"/>
                 </a:solidFill>
@@ -9336,7 +9465,7 @@
               </a:rPr>
               <a:t>NIST Artificial Intelligence Risk Management Framework (AI RMF 1.0):.</a:t>
             </a:r>
-            <a:endParaRPr lang="en-US" sz="1550" dirty="0"/>
+            <a:endParaRPr lang="en-US" sz="1320" dirty="0"/>
           </a:p>
         </p:txBody>
       </p:sp>
@@ -9424,13 +9553,16 @@
           <a:ln/>
         </p:spPr>
         <p:txBody>
-          <a:bodyPr wrap="square" lIns="254" tIns="254" rIns="254" bIns="254" rtlCol="0" anchor="t">
+          <a:bodyPr wrap="square" lIns="508" tIns="508" rIns="508" bIns="508" rtlCol="0" anchor="t">
             <a:normAutofit/>
           </a:bodyPr>
           <a:lstStyle/>
           <a:p>
-            <a:r>
-              <a:rPr lang="en-US" sz="1380" dirty="0">
+            <a:pPr indent="0" marL="0">
+              <a:buNone/>
+            </a:pPr>
+            <a:r>
+              <a:rPr lang="en-US" sz="1220" dirty="0">
                 <a:solidFill>
                   <a:srgbClr val="17364A"/>
                 </a:solidFill>
@@ -9438,13 +9570,16 @@
                 <a:ea typeface="Aptos" pitchFamily="34" charset="-122"/>
                 <a:cs typeface="Aptos" pitchFamily="34" charset="-120"/>
               </a:rPr>
-              <a:t>NIST Artificial Intelligence Risk Management Framework (AI RMF 1.0):.</a:t>
-            </a:r>
-            <a:endParaRPr lang="en-US" sz="1380" dirty="0"/>
-          </a:p>
-          <a:p>
-            <a:r>
-              <a:rPr lang="en-US" sz="1380" dirty="0">
+              <a:t>NIST Artificial Intelligence Risk Management Framework (AI RMF.</a:t>
+            </a:r>
+            <a:endParaRPr lang="en-US" sz="1220" dirty="0"/>
+          </a:p>
+          <a:p>
+            <a:pPr indent="0" marL="0">
+              <a:buNone/>
+            </a:pPr>
+            <a:r>
+              <a:rPr lang="en-US" sz="1220" dirty="0">
                 <a:solidFill>
                   <a:srgbClr val="17364A"/>
                 </a:solidFill>
@@ -9454,11 +9589,14 @@
               </a:rPr>
               <a:t>CDC Public Health Data Strategy and Data Modernization resources:.</a:t>
             </a:r>
-            <a:endParaRPr lang="en-US" sz="1380" dirty="0"/>
-          </a:p>
-          <a:p>
-            <a:r>
-              <a:rPr lang="en-US" sz="1380" dirty="0">
+            <a:endParaRPr lang="en-US" sz="1220" dirty="0"/>
+          </a:p>
+          <a:p>
+            <a:pPr indent="0" marL="0">
+              <a:buNone/>
+            </a:pPr>
+            <a:r>
+              <a:rPr lang="en-US" sz="1220" dirty="0">
                 <a:solidFill>
                   <a:srgbClr val="17364A"/>
                 </a:solidFill>
@@ -9468,7 +9606,7 @@
               </a:rPr>
               <a:t>WHO Ethics and Governance of Artificial Intelligence for Health:.</a:t>
             </a:r>
-            <a:endParaRPr lang="en-US" sz="1380" dirty="0"/>
+            <a:endParaRPr lang="en-US" sz="1220" dirty="0"/>
           </a:p>
         </p:txBody>
       </p:sp>
@@ -9546,17 +9684,17 @@
         </p:nvSpPr>
         <p:spPr>
           <a:xfrm>
-            <a:off x="7799832" y="5001768"/>
-            <a:ext cx="3145536" cy="502920"/>
-          </a:xfrm>
-          <a:prstGeom prst="rect">
-            <a:avLst/>
-          </a:prstGeom>
-          <a:noFill/>
-          <a:ln/>
-        </p:spPr>
-        <p:txBody>
-          <a:bodyPr wrap="square" lIns="0" tIns="0" rIns="0" bIns="0" rtlCol="0" anchor="t">
+            <a:off x="7799832" y="4974336"/>
+            <a:ext cx="3145536" cy="576072"/>
+          </a:xfrm>
+          <a:prstGeom prst="rect">
+            <a:avLst/>
+          </a:prstGeom>
+          <a:noFill/>
+          <a:ln/>
+        </p:spPr>
+        <p:txBody>
+          <a:bodyPr wrap="square" lIns="254" tIns="254" rIns="254" bIns="254" rtlCol="0" anchor="t">
             <a:normAutofit/>
           </a:bodyPr>
           <a:lstStyle/>
@@ -9565,7 +9703,7 @@
               <a:buNone/>
             </a:pPr>
             <a:r>
-              <a:rPr lang="en-US" sz="1550" dirty="0">
+              <a:rPr lang="en-US" sz="1320" dirty="0">
                 <a:solidFill>
                   <a:srgbClr val="17364A"/>
                 </a:solidFill>
@@ -9573,9 +9711,9 @@
                 <a:ea typeface="Aptos" pitchFamily="34" charset="-122"/>
                 <a:cs typeface="Aptos" pitchFamily="34" charset="-120"/>
               </a:rPr>
-              <a:t>Use the concept to clarify workflow changes, dependencies, staffing, procurement requirements, training needs, and implementation checkpoints.</a:t>
-            </a:r>
-            <a:endParaRPr lang="en-US" sz="1550" dirty="0"/>
+              <a:t>Use the concept to clarify workflow changes, dependencies, staffing, procurement requirements, training needs, and.</a:t>
+            </a:r>
+            <a:endParaRPr lang="en-US" sz="1320" dirty="0"/>
           </a:p>
         </p:txBody>
       </p:sp>
@@ -9876,49 +10014,58 @@
           <a:ln/>
         </p:spPr>
         <p:txBody>
-          <a:bodyPr wrap="square" lIns="635" tIns="635" rIns="635" bIns="635" rtlCol="0" anchor="t">
+          <a:bodyPr wrap="square" lIns="1016" tIns="1016" rIns="1016" bIns="1016" rtlCol="0" anchor="t">
             <a:normAutofit/>
           </a:bodyPr>
           <a:lstStyle/>
           <a:p>
+            <a:pPr indent="0" marL="0">
+              <a:buNone/>
+            </a:pPr>
             <a:r>
               <a:rPr lang="en-US" sz="2100" dirty="0">
                 <a:solidFill>
-                  <a:srgbClr val="17364A"/>
-                </a:solidFill>
-                <a:latin typeface="Aptos" pitchFamily="34" charset="0"/>
-                <a:ea typeface="Aptos" pitchFamily="34" charset="-122"/>
-                <a:cs typeface="Aptos" pitchFamily="34" charset="-120"/>
-              </a:rPr>
-              <a:t>AI adoption changes how people work, make decisions, document actions, communicate with partners, and understand.</a:t>
+                  <a:srgbClr val="003A63"/>
+                </a:solidFill>
+                <a:latin typeface="Aptos" pitchFamily="34" charset="0"/>
+                <a:ea typeface="Aptos" pitchFamily="34" charset="-122"/>
+                <a:cs typeface="Aptos" pitchFamily="34" charset="-120"/>
+              </a:rPr>
+              <a:t>• AI adoption changes how people work, make decisions, document actions, communicate with.</a:t>
             </a:r>
             <a:endParaRPr lang="en-US" sz="2100" dirty="0"/>
           </a:p>
           <a:p>
+            <a:pPr indent="0" marL="0">
+              <a:buNone/>
+            </a:pPr>
             <a:r>
               <a:rPr lang="en-US" sz="2100" dirty="0">
                 <a:solidFill>
-                  <a:srgbClr val="17364A"/>
-                </a:solidFill>
-                <a:latin typeface="Aptos" pitchFamily="34" charset="0"/>
-                <a:ea typeface="Aptos" pitchFamily="34" charset="-122"/>
-                <a:cs typeface="Aptos" pitchFamily="34" charset="-120"/>
-              </a:rPr>
-              <a:t>Successful implementation requires change management, not just technical deployment.</a:t>
+                  <a:srgbClr val="003A63"/>
+                </a:solidFill>
+                <a:latin typeface="Aptos" pitchFamily="34" charset="0"/>
+                <a:ea typeface="Aptos" pitchFamily="34" charset="-122"/>
+                <a:cs typeface="Aptos" pitchFamily="34" charset="-120"/>
+              </a:rPr>
+              <a:t>• Successful implementation requires change management, not just technical deployment.</a:t>
             </a:r>
             <a:endParaRPr lang="en-US" sz="2100" dirty="0"/>
           </a:p>
           <a:p>
+            <a:pPr indent="0" marL="0">
+              <a:buNone/>
+            </a:pPr>
             <a:r>
               <a:rPr lang="en-US" sz="2100" dirty="0">
                 <a:solidFill>
-                  <a:srgbClr val="17364A"/>
-                </a:solidFill>
-                <a:latin typeface="Aptos" pitchFamily="34" charset="0"/>
-                <a:ea typeface="Aptos" pitchFamily="34" charset="-122"/>
-                <a:cs typeface="Aptos" pitchFamily="34" charset="-120"/>
-              </a:rPr>
-              <a:t>Staff need to understand why a tool is being introduced, how it affects their workflow, what they are responsible.</a:t>
+                  <a:srgbClr val="003A63"/>
+                </a:solidFill>
+                <a:latin typeface="Aptos" pitchFamily="34" charset="0"/>
+                <a:ea typeface="Aptos" pitchFamily="34" charset="-122"/>
+                <a:cs typeface="Aptos" pitchFamily="34" charset="-120"/>
+              </a:rPr>
+              <a:t>• Staff need to understand why a tool is being introduced, how it affects their workflow, what.</a:t>
             </a:r>
             <a:endParaRPr lang="en-US" sz="2100" dirty="0"/>
           </a:p>
@@ -9998,17 +10145,17 @@
         </p:nvSpPr>
         <p:spPr>
           <a:xfrm>
-            <a:off x="8074152" y="1920240"/>
-            <a:ext cx="2825496" cy="1280160"/>
-          </a:xfrm>
-          <a:prstGeom prst="rect">
-            <a:avLst/>
-          </a:prstGeom>
-          <a:noFill/>
-          <a:ln/>
-        </p:spPr>
-        <p:txBody>
-          <a:bodyPr wrap="square" lIns="0" tIns="0" rIns="0" bIns="0" rtlCol="0" anchor="t">
+            <a:off x="8074152" y="1892808"/>
+            <a:ext cx="2825496" cy="1353312"/>
+          </a:xfrm>
+          <a:prstGeom prst="rect">
+            <a:avLst/>
+          </a:prstGeom>
+          <a:noFill/>
+          <a:ln/>
+        </p:spPr>
+        <p:txBody>
+          <a:bodyPr wrap="square" lIns="254" tIns="254" rIns="254" bIns="254" rtlCol="0" anchor="t">
             <a:normAutofit/>
           </a:bodyPr>
           <a:lstStyle/>
@@ -10017,7 +10164,7 @@
               <a:buNone/>
             </a:pPr>
             <a:r>
-              <a:rPr lang="en-US" sz="1550" dirty="0">
+              <a:rPr lang="en-US" sz="1320" dirty="0">
                 <a:solidFill>
                   <a:srgbClr val="17364A"/>
                 </a:solidFill>
@@ -10025,43 +10172,9 @@
                 <a:ea typeface="Aptos" pitchFamily="34" charset="-122"/>
                 <a:cs typeface="Aptos" pitchFamily="34" charset="-120"/>
               </a:rPr>
-              <a:t>Level: advanced/leadership</a:t>
-            </a:r>
-            <a:endParaRPr lang="en-US" sz="1550" dirty="0"/>
-          </a:p>
-          <a:p>
-            <a:pPr indent="0" marL="0">
-              <a:buNone/>
-            </a:pPr>
-            <a:r>
-              <a:rPr lang="en-US" sz="1550" dirty="0">
-                <a:solidFill>
-                  <a:srgbClr val="17364A"/>
-                </a:solidFill>
-                <a:latin typeface="Aptos" pitchFamily="34" charset="0"/>
-                <a:ea typeface="Aptos" pitchFamily="34" charset="-122"/>
-                <a:cs typeface="Aptos" pitchFamily="34" charset="-120"/>
-              </a:rPr>
-              <a:t>Primary track: Public Health Executive Leadership Track</a:t>
-            </a:r>
-            <a:endParaRPr lang="en-US" sz="1550" dirty="0"/>
-          </a:p>
-          <a:p>
-            <a:pPr indent="0" marL="0">
-              <a:buNone/>
-            </a:pPr>
-            <a:r>
-              <a:rPr lang="en-US" sz="1550" dirty="0">
-                <a:solidFill>
-                  <a:srgbClr val="17364A"/>
-                </a:solidFill>
-                <a:latin typeface="Aptos" pitchFamily="34" charset="0"/>
-                <a:ea typeface="Aptos" pitchFamily="34" charset="-122"/>
-                <a:cs typeface="Aptos" pitchFamily="34" charset="-120"/>
-              </a:rPr>
-              <a:t>Appears in tracks: governance-security</a:t>
-            </a:r>
-            <a:endParaRPr lang="en-US" sz="1550" dirty="0"/>
+              <a:t>Level: advanced/leadership Primary track: Public Health Executive Leadership Track Appears in tracks: governance-security</a:t>
+            </a:r>
+            <a:endParaRPr lang="en-US" sz="1320" dirty="0"/>
           </a:p>
         </p:txBody>
       </p:sp>
@@ -10149,13 +10262,16 @@
           <a:ln/>
         </p:spPr>
         <p:txBody>
-          <a:bodyPr wrap="square" lIns="254" tIns="254" rIns="254" bIns="254" rtlCol="0" anchor="t">
+          <a:bodyPr wrap="square" lIns="508" tIns="508" rIns="508" bIns="508" rtlCol="0" anchor="t">
             <a:normAutofit/>
           </a:bodyPr>
           <a:lstStyle/>
           <a:p>
-            <a:r>
-              <a:rPr lang="en-US" sz="1380" dirty="0">
+            <a:pPr indent="0" marL="0">
+              <a:buNone/>
+            </a:pPr>
+            <a:r>
+              <a:rPr lang="en-US" sz="1220" dirty="0">
                 <a:solidFill>
                   <a:srgbClr val="17364A"/>
                 </a:solidFill>
@@ -10165,11 +10281,14 @@
               </a:rPr>
               <a:t>Read the module for shared vocabulary and context.</a:t>
             </a:r>
-            <a:endParaRPr lang="en-US" sz="1380" dirty="0"/>
-          </a:p>
-          <a:p>
-            <a:r>
-              <a:rPr lang="en-US" sz="1380" dirty="0">
+            <a:endParaRPr lang="en-US" sz="1220" dirty="0"/>
+          </a:p>
+          <a:p>
+            <a:pPr indent="0" marL="0">
+              <a:buNone/>
+            </a:pPr>
+            <a:r>
+              <a:rPr lang="en-US" sz="1220" dirty="0">
                 <a:solidFill>
                   <a:srgbClr val="17364A"/>
                 </a:solidFill>
@@ -10179,11 +10298,14 @@
               </a:rPr>
               <a:t>Complete the practical exercise to apply the concept.</a:t>
             </a:r>
-            <a:endParaRPr lang="en-US" sz="1380" dirty="0"/>
-          </a:p>
-          <a:p>
-            <a:r>
-              <a:rPr lang="en-US" sz="1380" dirty="0">
+            <a:endParaRPr lang="en-US" sz="1220" dirty="0"/>
+          </a:p>
+          <a:p>
+            <a:pPr indent="0" marL="0">
+              <a:buNone/>
+            </a:pPr>
+            <a:r>
+              <a:rPr lang="en-US" sz="1220" dirty="0">
                 <a:solidFill>
                   <a:srgbClr val="17364A"/>
                 </a:solidFill>
@@ -10193,7 +10315,7 @@
               </a:rPr>
               <a:t>Use the notes and references for deeper review.</a:t>
             </a:r>
-            <a:endParaRPr lang="en-US" sz="1380" dirty="0"/>
+            <a:endParaRPr lang="en-US" sz="1220" dirty="0"/>
           </a:p>
         </p:txBody>
       </p:sp>
@@ -10494,35 +10616,41 @@
           <a:ln/>
         </p:spPr>
         <p:txBody>
-          <a:bodyPr wrap="square" lIns="635" tIns="635" rIns="635" bIns="635" rtlCol="0" anchor="t">
+          <a:bodyPr wrap="square" lIns="1016" tIns="1016" rIns="1016" bIns="1016" rtlCol="0" anchor="t">
             <a:normAutofit/>
           </a:bodyPr>
           <a:lstStyle/>
           <a:p>
+            <a:pPr indent="0" marL="0">
+              <a:buNone/>
+            </a:pPr>
             <a:r>
               <a:rPr lang="en-US" sz="2100" dirty="0">
                 <a:solidFill>
-                  <a:srgbClr val="17364A"/>
-                </a:solidFill>
-                <a:latin typeface="Aptos" pitchFamily="34" charset="0"/>
-                <a:ea typeface="Aptos" pitchFamily="34" charset="-122"/>
-                <a:cs typeface="Aptos" pitchFamily="34" charset="-120"/>
-              </a:rPr>
-              <a:t>OMB Memorandum M-24-10 on federal AI governance, risk management, and innovation, where relevant to.</a:t>
+                  <a:srgbClr val="003A63"/>
+                </a:solidFill>
+                <a:latin typeface="Aptos" pitchFamily="34" charset="0"/>
+                <a:ea typeface="Aptos" pitchFamily="34" charset="-122"/>
+                <a:cs typeface="Aptos" pitchFamily="34" charset="-120"/>
+              </a:rPr>
+              <a:t>• OMB Memorandum M-24-10 on federal AI governance, risk management, and innovation, where.</a:t>
             </a:r>
             <a:endParaRPr lang="en-US" sz="2100" dirty="0"/>
           </a:p>
           <a:p>
+            <a:pPr indent="0" marL="0">
+              <a:buNone/>
+            </a:pPr>
             <a:r>
               <a:rPr lang="en-US" sz="2100" dirty="0">
                 <a:solidFill>
-                  <a:srgbClr val="17364A"/>
-                </a:solidFill>
-                <a:latin typeface="Aptos" pitchFamily="34" charset="0"/>
-                <a:ea typeface="Aptos" pitchFamily="34" charset="-122"/>
-                <a:cs typeface="Aptos" pitchFamily="34" charset="-120"/>
-              </a:rPr>
-              <a:t>Agency strategic plans, procurement policies, privacy policies, cybersecurity policies, records.</a:t>
+                  <a:srgbClr val="003A63"/>
+                </a:solidFill>
+                <a:latin typeface="Aptos" pitchFamily="34" charset="0"/>
+                <a:ea typeface="Aptos" pitchFamily="34" charset="-122"/>
+                <a:cs typeface="Aptos" pitchFamily="34" charset="-120"/>
+              </a:rPr>
+              <a:t>• Agency strategic plans, procurement policies, privacy policies, cybersecurity policies, records.</a:t>
             </a:r>
             <a:endParaRPr lang="en-US" sz="2100" dirty="0"/>
           </a:p>
@@ -10602,17 +10730,17 @@
         </p:nvSpPr>
         <p:spPr>
           <a:xfrm>
-            <a:off x="7799832" y="1828800"/>
-            <a:ext cx="3145536" cy="685800"/>
-          </a:xfrm>
-          <a:prstGeom prst="rect">
-            <a:avLst/>
-          </a:prstGeom>
-          <a:noFill/>
-          <a:ln/>
-        </p:spPr>
-        <p:txBody>
-          <a:bodyPr wrap="square" lIns="0" tIns="0" rIns="0" bIns="0" rtlCol="0" anchor="t">
+            <a:off x="7799832" y="1801368"/>
+            <a:ext cx="3145536" cy="758952"/>
+          </a:xfrm>
+          <a:prstGeom prst="rect">
+            <a:avLst/>
+          </a:prstGeom>
+          <a:noFill/>
+          <a:ln/>
+        </p:spPr>
+        <p:txBody>
+          <a:bodyPr wrap="square" lIns="254" tIns="254" rIns="254" bIns="254" rtlCol="0" anchor="t">
             <a:normAutofit/>
           </a:bodyPr>
           <a:lstStyle/>
@@ -10621,7 +10749,7 @@
               <a:buNone/>
             </a:pPr>
             <a:r>
-              <a:rPr lang="en-US" sz="1550" dirty="0">
+              <a:rPr lang="en-US" sz="1320" dirty="0">
                 <a:solidFill>
                   <a:srgbClr val="17364A"/>
                 </a:solidFill>
@@ -10631,7 +10759,7 @@
               </a:rPr>
               <a:t>OMB Memorandum M-24-10 on federal AI governance, risk management, and innovation, where relevant to.</a:t>
             </a:r>
-            <a:endParaRPr lang="en-US" sz="1550" dirty="0"/>
+            <a:endParaRPr lang="en-US" sz="1320" dirty="0"/>
           </a:p>
         </p:txBody>
       </p:sp>
@@ -10719,13 +10847,16 @@
           <a:ln/>
         </p:spPr>
         <p:txBody>
-          <a:bodyPr wrap="square" lIns="254" tIns="254" rIns="254" bIns="254" rtlCol="0" anchor="t">
+          <a:bodyPr wrap="square" lIns="508" tIns="508" rIns="508" bIns="508" rtlCol="0" anchor="t">
             <a:normAutofit/>
           </a:bodyPr>
           <a:lstStyle/>
           <a:p>
-            <a:r>
-              <a:rPr lang="en-US" sz="1380" dirty="0">
+            <a:pPr indent="0" marL="0">
+              <a:buNone/>
+            </a:pPr>
+            <a:r>
+              <a:rPr lang="en-US" sz="1220" dirty="0">
                 <a:solidFill>
                   <a:srgbClr val="17364A"/>
                 </a:solidFill>
@@ -10733,13 +10864,16 @@
                 <a:ea typeface="Aptos" pitchFamily="34" charset="-122"/>
                 <a:cs typeface="Aptos" pitchFamily="34" charset="-120"/>
               </a:rPr>
-              <a:t>OMB Memorandum M-24-10 on federal AI governance, risk management, and innovation, where.</a:t>
-            </a:r>
-            <a:endParaRPr lang="en-US" sz="1380" dirty="0"/>
-          </a:p>
-          <a:p>
-            <a:r>
-              <a:rPr lang="en-US" sz="1380" dirty="0">
+              <a:t>OMB Memorandum M-24-10 on federal AI governance, risk management,.</a:t>
+            </a:r>
+            <a:endParaRPr lang="en-US" sz="1220" dirty="0"/>
+          </a:p>
+          <a:p>
+            <a:pPr indent="0" marL="0">
+              <a:buNone/>
+            </a:pPr>
+            <a:r>
+              <a:rPr lang="en-US" sz="1220" dirty="0">
                 <a:solidFill>
                   <a:srgbClr val="17364A"/>
                 </a:solidFill>
@@ -10747,9 +10881,9 @@
                 <a:ea typeface="Aptos" pitchFamily="34" charset="-122"/>
                 <a:cs typeface="Aptos" pitchFamily="34" charset="-120"/>
               </a:rPr>
-              <a:t>Agency strategic plans, procurement policies, privacy policies, cybersecurity policies,.</a:t>
-            </a:r>
-            <a:endParaRPr lang="en-US" sz="1380" dirty="0"/>
+              <a:t>Agency strategic plans, procurement policies, privacy policies,.</a:t>
+            </a:r>
+            <a:endParaRPr lang="en-US" sz="1220" dirty="0"/>
           </a:p>
         </p:txBody>
       </p:sp>
@@ -10827,17 +10961,17 @@
         </p:nvSpPr>
         <p:spPr>
           <a:xfrm>
-            <a:off x="7799832" y="5001768"/>
-            <a:ext cx="3145536" cy="502920"/>
-          </a:xfrm>
-          <a:prstGeom prst="rect">
-            <a:avLst/>
-          </a:prstGeom>
-          <a:noFill/>
-          <a:ln/>
-        </p:spPr>
-        <p:txBody>
-          <a:bodyPr wrap="square" lIns="0" tIns="0" rIns="0" bIns="0" rtlCol="0" anchor="t">
+            <a:off x="7799832" y="4974336"/>
+            <a:ext cx="3145536" cy="576072"/>
+          </a:xfrm>
+          <a:prstGeom prst="rect">
+            <a:avLst/>
+          </a:prstGeom>
+          <a:noFill/>
+          <a:ln/>
+        </p:spPr>
+        <p:txBody>
+          <a:bodyPr wrap="square" lIns="254" tIns="254" rIns="254" bIns="254" rtlCol="0" anchor="t">
             <a:normAutofit/>
           </a:bodyPr>
           <a:lstStyle/>
@@ -10846,7 +10980,7 @@
               <a:buNone/>
             </a:pPr>
             <a:r>
-              <a:rPr lang="en-US" sz="1550" dirty="0">
+              <a:rPr lang="en-US" sz="1320" dirty="0">
                 <a:solidFill>
                   <a:srgbClr val="17364A"/>
                 </a:solidFill>
@@ -10854,9 +10988,9 @@
                 <a:ea typeface="Aptos" pitchFamily="34" charset="-122"/>
                 <a:cs typeface="Aptos" pitchFamily="34" charset="-120"/>
               </a:rPr>
-              <a:t>Use the concept to clarify workflow changes, dependencies, staffing, procurement requirements, training needs, and implementation checkpoints.</a:t>
-            </a:r>
-            <a:endParaRPr lang="en-US" sz="1550" dirty="0"/>
+              <a:t>Use the concept to clarify workflow changes, dependencies, staffing, procurement requirements, training needs, and.</a:t>
+            </a:r>
+            <a:endParaRPr lang="en-US" sz="1320" dirty="0"/>
           </a:p>
         </p:txBody>
       </p:sp>
@@ -11157,63 +11291,75 @@
           <a:ln/>
         </p:spPr>
         <p:txBody>
-          <a:bodyPr wrap="square" lIns="635" tIns="635" rIns="635" bIns="635" rtlCol="0" anchor="t">
+          <a:bodyPr wrap="square" lIns="1016" tIns="1016" rIns="1016" bIns="1016" rtlCol="0" anchor="t">
             <a:normAutofit/>
           </a:bodyPr>
           <a:lstStyle/>
           <a:p>
+            <a:pPr indent="0" marL="0">
+              <a:buNone/>
+            </a:pPr>
             <a:r>
               <a:rPr lang="en-US" sz="1900" dirty="0">
                 <a:solidFill>
-                  <a:srgbClr val="17364A"/>
-                </a:solidFill>
-                <a:latin typeface="Aptos" pitchFamily="34" charset="0"/>
-                <a:ea typeface="Aptos" pitchFamily="34" charset="-122"/>
-                <a:cs typeface="Aptos" pitchFamily="34" charset="-120"/>
-              </a:rPr>
-              <a:t>Play 11: Build and Deploy AI Solutions - This lesson informs Play 11 by helping learners connect the lesson.</a:t>
+                  <a:srgbClr val="003A63"/>
+                </a:solidFill>
+                <a:latin typeface="Aptos" pitchFamily="34" charset="0"/>
+                <a:ea typeface="Aptos" pitchFamily="34" charset="-122"/>
+                <a:cs typeface="Aptos" pitchFamily="34" charset="-120"/>
+              </a:rPr>
+              <a:t>• Play 11: Build and Deploy AI Solutions - This lesson informs Play 11 by helping learners.</a:t>
             </a:r>
             <a:endParaRPr lang="en-US" sz="1900" dirty="0"/>
           </a:p>
           <a:p>
+            <a:pPr indent="0" marL="0">
+              <a:buNone/>
+            </a:pPr>
             <a:r>
               <a:rPr lang="en-US" sz="1900" dirty="0">
                 <a:solidFill>
-                  <a:srgbClr val="17364A"/>
-                </a:solidFill>
-                <a:latin typeface="Aptos" pitchFamily="34" charset="0"/>
-                <a:ea typeface="Aptos" pitchFamily="34" charset="-122"/>
-                <a:cs typeface="Aptos" pitchFamily="34" charset="-120"/>
-              </a:rPr>
-              <a:t>Play 2: Readiness Assessment - This lesson informs Play 2 by helping learners connect the lesson topic to.</a:t>
+                  <a:srgbClr val="003A63"/>
+                </a:solidFill>
+                <a:latin typeface="Aptos" pitchFamily="34" charset="0"/>
+                <a:ea typeface="Aptos" pitchFamily="34" charset="-122"/>
+                <a:cs typeface="Aptos" pitchFamily="34" charset="-120"/>
+              </a:rPr>
+              <a:t>• Play 2: Readiness Assessment - This lesson informs Play 2 by helping learners connect the.</a:t>
             </a:r>
             <a:endParaRPr lang="en-US" sz="1900" dirty="0"/>
           </a:p>
           <a:p>
+            <a:pPr indent="0" marL="0">
+              <a:buNone/>
+            </a:pPr>
             <a:r>
               <a:rPr lang="en-US" sz="1900" dirty="0">
                 <a:solidFill>
-                  <a:srgbClr val="17364A"/>
-                </a:solidFill>
-                <a:latin typeface="Aptos" pitchFamily="34" charset="0"/>
-                <a:ea typeface="Aptos" pitchFamily="34" charset="-122"/>
-                <a:cs typeface="Aptos" pitchFamily="34" charset="-120"/>
-              </a:rPr>
-              <a:t>Play 3: Establish AI Governance - This lesson informs Play 3 by helping learners connect the lesson topic to.</a:t>
+                  <a:srgbClr val="003A63"/>
+                </a:solidFill>
+                <a:latin typeface="Aptos" pitchFamily="34" charset="0"/>
+                <a:ea typeface="Aptos" pitchFamily="34" charset="-122"/>
+                <a:cs typeface="Aptos" pitchFamily="34" charset="-120"/>
+              </a:rPr>
+              <a:t>• Play 3: Establish AI Governance - This lesson informs Play 3 by helping learners connect the.</a:t>
             </a:r>
             <a:endParaRPr lang="en-US" sz="1900" dirty="0"/>
           </a:p>
           <a:p>
+            <a:pPr indent="0" marL="0">
+              <a:buNone/>
+            </a:pPr>
             <a:r>
               <a:rPr lang="en-US" sz="1900" dirty="0">
                 <a:solidFill>
-                  <a:srgbClr val="17364A"/>
-                </a:solidFill>
-                <a:latin typeface="Aptos" pitchFamily="34" charset="0"/>
-                <a:ea typeface="Aptos" pitchFamily="34" charset="-122"/>
-                <a:cs typeface="Aptos" pitchFamily="34" charset="-120"/>
-              </a:rPr>
-              <a:t>Play 1: Vision &amp; Guardrails - This lesson informs Play 1 by helping learners connect the lesson topic to.</a:t>
+                  <a:srgbClr val="003A63"/>
+                </a:solidFill>
+                <a:latin typeface="Aptos" pitchFamily="34" charset="0"/>
+                <a:ea typeface="Aptos" pitchFamily="34" charset="-122"/>
+                <a:cs typeface="Aptos" pitchFamily="34" charset="-120"/>
+              </a:rPr>
+              <a:t>• Play 1: Vision &amp; Guardrails - This lesson informs Play 1 by helping learners connect the.</a:t>
             </a:r>
             <a:endParaRPr lang="en-US" sz="1900" dirty="0"/>
           </a:p>
@@ -11293,17 +11439,17 @@
         </p:nvSpPr>
         <p:spPr>
           <a:xfrm>
-            <a:off x="8211312" y="1920240"/>
-            <a:ext cx="2734056" cy="1463040"/>
-          </a:xfrm>
-          <a:prstGeom prst="rect">
-            <a:avLst/>
-          </a:prstGeom>
-          <a:noFill/>
-          <a:ln/>
-        </p:spPr>
-        <p:txBody>
-          <a:bodyPr wrap="square" lIns="0" tIns="0" rIns="0" bIns="0" rtlCol="0" anchor="t">
+            <a:off x="8211312" y="1892808"/>
+            <a:ext cx="2734056" cy="1536192"/>
+          </a:xfrm>
+          <a:prstGeom prst="rect">
+            <a:avLst/>
+          </a:prstGeom>
+          <a:noFill/>
+          <a:ln/>
+        </p:spPr>
+        <p:txBody>
+          <a:bodyPr wrap="square" lIns="254" tIns="254" rIns="254" bIns="254" rtlCol="0" anchor="t">
             <a:normAutofit/>
           </a:bodyPr>
           <a:lstStyle/>
@@ -11312,7 +11458,7 @@
               <a:buNone/>
             </a:pPr>
             <a:r>
-              <a:rPr lang="en-US" sz="1550" dirty="0">
+              <a:rPr lang="en-US" sz="1320" dirty="0">
                 <a:solidFill>
                   <a:srgbClr val="17364A"/>
                 </a:solidFill>
@@ -11320,9 +11466,9 @@
                 <a:ea typeface="Aptos" pitchFamily="34" charset="-122"/>
                 <a:cs typeface="Aptos" pitchFamily="34" charset="-120"/>
               </a:rPr>
-              <a:t>Use the related plays to identify decisions, participants, timing, approvals, and documentation needed for responsible implementation.</a:t>
-            </a:r>
-            <a:endParaRPr lang="en-US" sz="1550" dirty="0"/>
+              <a:t>Use the related plays to identify decisions, participants, timing, approvals, and documentation needed for responsible.</a:t>
+            </a:r>
+            <a:endParaRPr lang="en-US" sz="1320" dirty="0"/>
           </a:p>
         </p:txBody>
       </p:sp>
@@ -11410,13 +11556,16 @@
           <a:ln/>
         </p:spPr>
         <p:txBody>
-          <a:bodyPr wrap="square" lIns="254" tIns="254" rIns="254" bIns="254" rtlCol="0" anchor="t">
+          <a:bodyPr wrap="square" lIns="508" tIns="508" rIns="508" bIns="508" rtlCol="0" anchor="t">
             <a:normAutofit/>
           </a:bodyPr>
           <a:lstStyle/>
           <a:p>
-            <a:r>
-              <a:rPr lang="en-US" sz="1380" dirty="0">
+            <a:pPr indent="0" marL="0">
+              <a:buNone/>
+            </a:pPr>
+            <a:r>
+              <a:rPr lang="en-US" sz="1220" dirty="0">
                 <a:solidFill>
                   <a:srgbClr val="17364A"/>
                 </a:solidFill>
@@ -11426,11 +11575,14 @@
               </a:rPr>
               <a:t>Locate the decision point in the playbook sequence.</a:t>
             </a:r>
-            <a:endParaRPr lang="en-US" sz="1380" dirty="0"/>
-          </a:p>
-          <a:p>
-            <a:r>
-              <a:rPr lang="en-US" sz="1380" dirty="0">
+            <a:endParaRPr lang="en-US" sz="1220" dirty="0"/>
+          </a:p>
+          <a:p>
+            <a:pPr indent="0" marL="0">
+              <a:buNone/>
+            </a:pPr>
+            <a:r>
+              <a:rPr lang="en-US" sz="1220" dirty="0">
                 <a:solidFill>
                   <a:srgbClr val="17364A"/>
                 </a:solidFill>
@@ -11440,11 +11592,14 @@
               </a:rPr>
               <a:t>Identify who should participate in the work.</a:t>
             </a:r>
-            <a:endParaRPr lang="en-US" sz="1380" dirty="0"/>
-          </a:p>
-          <a:p>
-            <a:r>
-              <a:rPr lang="en-US" sz="1380" dirty="0">
+            <a:endParaRPr lang="en-US" sz="1220" dirty="0"/>
+          </a:p>
+          <a:p>
+            <a:pPr indent="0" marL="0">
+              <a:buNone/>
+            </a:pPr>
+            <a:r>
+              <a:rPr lang="en-US" sz="1220" dirty="0">
                 <a:solidFill>
                   <a:srgbClr val="17364A"/>
                 </a:solidFill>
@@ -11454,7 +11609,7 @@
               </a:rPr>
               <a:t>Document the review, approval, or implementation step.</a:t>
             </a:r>
-            <a:endParaRPr lang="en-US" sz="1380" dirty="0"/>
+            <a:endParaRPr lang="en-US" sz="1220" dirty="0"/>
           </a:p>
         </p:txBody>
       </p:sp>
@@ -11755,63 +11910,75 @@
           <a:ln/>
         </p:spPr>
         <p:txBody>
-          <a:bodyPr wrap="square" lIns="635" tIns="635" rIns="635" bIns="635" rtlCol="0" anchor="t">
+          <a:bodyPr wrap="square" lIns="1016" tIns="1016" rIns="1016" bIns="1016" rtlCol="0" anchor="t">
             <a:normAutofit/>
           </a:bodyPr>
           <a:lstStyle/>
           <a:p>
+            <a:pPr indent="0" marL="0">
+              <a:buNone/>
+            </a:pPr>
             <a:r>
               <a:rPr lang="en-US" sz="1850" dirty="0">
                 <a:solidFill>
-                  <a:srgbClr val="17364A"/>
-                </a:solidFill>
-                <a:latin typeface="Aptos" pitchFamily="34" charset="0"/>
-                <a:ea typeface="Aptos" pitchFamily="34" charset="-122"/>
-                <a:cs typeface="Aptos" pitchFamily="34" charset="-120"/>
-              </a:rPr>
-              <a:t>Tool 4: AI Policy Landscape Scan (Worksheet) - Use AI Policy Landscape Scan to translate this lesson into a.</a:t>
+                  <a:srgbClr val="003A63"/>
+                </a:solidFill>
+                <a:latin typeface="Aptos" pitchFamily="34" charset="0"/>
+                <a:ea typeface="Aptos" pitchFamily="34" charset="-122"/>
+                <a:cs typeface="Aptos" pitchFamily="34" charset="-120"/>
+              </a:rPr>
+              <a:t>• Tool 4: AI Policy Landscape Scan (Worksheet) - Use AI Policy Landscape Scan to translate this.</a:t>
             </a:r>
             <a:endParaRPr lang="en-US" sz="1850" dirty="0"/>
           </a:p>
           <a:p>
+            <a:pPr indent="0" marL="0">
+              <a:buNone/>
+            </a:pPr>
             <a:r>
               <a:rPr lang="en-US" sz="1850" dirty="0">
                 <a:solidFill>
-                  <a:srgbClr val="17364A"/>
-                </a:solidFill>
-                <a:latin typeface="Aptos" pitchFamily="34" charset="0"/>
-                <a:ea typeface="Aptos" pitchFamily="34" charset="-122"/>
-                <a:cs typeface="Aptos" pitchFamily="34" charset="-120"/>
-              </a:rPr>
-              <a:t>Tool 5: AI Environmental and Resource Impact Review (Checklist) - Use AI Environmental and Resource Impact.</a:t>
+                  <a:srgbClr val="003A63"/>
+                </a:solidFill>
+                <a:latin typeface="Aptos" pitchFamily="34" charset="0"/>
+                <a:ea typeface="Aptos" pitchFamily="34" charset="-122"/>
+                <a:cs typeface="Aptos" pitchFamily="34" charset="-120"/>
+              </a:rPr>
+              <a:t>• Tool 5: AI Environmental and Resource Impact Review (Checklist) - Use AI Environmental and.</a:t>
             </a:r>
             <a:endParaRPr lang="en-US" sz="1850" dirty="0"/>
           </a:p>
           <a:p>
+            <a:pPr indent="0" marL="0">
+              <a:buNone/>
+            </a:pPr>
             <a:r>
               <a:rPr lang="en-US" sz="1850" dirty="0">
                 <a:solidFill>
-                  <a:srgbClr val="17364A"/>
-                </a:solidFill>
-                <a:latin typeface="Aptos" pitchFamily="34" charset="0"/>
-                <a:ea typeface="Aptos" pitchFamily="34" charset="-122"/>
-                <a:cs typeface="Aptos" pitchFamily="34" charset="-120"/>
-              </a:rPr>
-              <a:t>Tool 6: Human-Centered AI Decision Rule Checklist (Checklist) - Use Human-Centered AI Decision Rule.</a:t>
+                  <a:srgbClr val="003A63"/>
+                </a:solidFill>
+                <a:latin typeface="Aptos" pitchFamily="34" charset="0"/>
+                <a:ea typeface="Aptos" pitchFamily="34" charset="-122"/>
+                <a:cs typeface="Aptos" pitchFamily="34" charset="-120"/>
+              </a:rPr>
+              <a:t>• Tool 6: Human-Centered AI Decision Rule Checklist (Checklist) - Use Human-Centered AI Decision.</a:t>
             </a:r>
             <a:endParaRPr lang="en-US" sz="1850" dirty="0"/>
           </a:p>
           <a:p>
+            <a:pPr indent="0" marL="0">
+              <a:buNone/>
+            </a:pPr>
             <a:r>
               <a:rPr lang="en-US" sz="1850" dirty="0">
                 <a:solidFill>
-                  <a:srgbClr val="17364A"/>
-                </a:solidFill>
-                <a:latin typeface="Aptos" pitchFamily="34" charset="0"/>
-                <a:ea typeface="Aptos" pitchFamily="34" charset="-122"/>
-                <a:cs typeface="Aptos" pitchFamily="34" charset="-120"/>
-              </a:rPr>
-              <a:t>Tool 8: AI Project Charter (Planning) - Use AI Project Charter to translate this lesson into a documented.</a:t>
+                  <a:srgbClr val="003A63"/>
+                </a:solidFill>
+                <a:latin typeface="Aptos" pitchFamily="34" charset="0"/>
+                <a:ea typeface="Aptos" pitchFamily="34" charset="-122"/>
+                <a:cs typeface="Aptos" pitchFamily="34" charset="-120"/>
+              </a:rPr>
+              <a:t>• Tool 8: AI Project Charter (Planning) - Use AI Project Charter to translate this lesson into a.</a:t>
             </a:r>
             <a:endParaRPr lang="en-US" sz="1850" dirty="0"/>
           </a:p>
@@ -11891,17 +12058,17 @@
         </p:nvSpPr>
         <p:spPr>
           <a:xfrm>
-            <a:off x="8211312" y="1920240"/>
-            <a:ext cx="2734056" cy="1463040"/>
-          </a:xfrm>
-          <a:prstGeom prst="rect">
-            <a:avLst/>
-          </a:prstGeom>
-          <a:noFill/>
-          <a:ln/>
-        </p:spPr>
-        <p:txBody>
-          <a:bodyPr wrap="square" lIns="0" tIns="0" rIns="0" bIns="0" rtlCol="0" anchor="t">
+            <a:off x="8211312" y="1892808"/>
+            <a:ext cx="2734056" cy="1536192"/>
+          </a:xfrm>
+          <a:prstGeom prst="rect">
+            <a:avLst/>
+          </a:prstGeom>
+          <a:noFill/>
+          <a:ln/>
+        </p:spPr>
+        <p:txBody>
+          <a:bodyPr wrap="square" lIns="254" tIns="254" rIns="254" bIns="254" rtlCol="0" anchor="t">
             <a:normAutofit/>
           </a:bodyPr>
           <a:lstStyle/>
@@ -11910,7 +12077,7 @@
               <a:buNone/>
             </a:pPr>
             <a:r>
-              <a:rPr lang="en-US" sz="1550" dirty="0">
+              <a:rPr lang="en-US" sz="1320" dirty="0">
                 <a:solidFill>
                   <a:srgbClr val="17364A"/>
                 </a:solidFill>
@@ -11918,9 +12085,9 @@
                 <a:ea typeface="Aptos" pitchFamily="34" charset="-122"/>
                 <a:cs typeface="Aptos" pitchFamily="34" charset="-120"/>
               </a:rPr>
-              <a:t>Use linked tools when your department needs a structured worksheet, template, checklist, review process, or documentation artifact.</a:t>
-            </a:r>
-            <a:endParaRPr lang="en-US" sz="1550" dirty="0"/>
+              <a:t>Use linked tools when your department needs a structured worksheet, template, checklist, review process, or.</a:t>
+            </a:r>
+            <a:endParaRPr lang="en-US" sz="1320" dirty="0"/>
           </a:p>
         </p:txBody>
       </p:sp>
@@ -12008,13 +12175,16 @@
           <a:ln/>
         </p:spPr>
         <p:txBody>
-          <a:bodyPr wrap="square" lIns="254" tIns="254" rIns="254" bIns="254" rtlCol="0" anchor="t">
+          <a:bodyPr wrap="square" lIns="508" tIns="508" rIns="508" bIns="508" rtlCol="0" anchor="t">
             <a:normAutofit/>
           </a:bodyPr>
           <a:lstStyle/>
           <a:p>
-            <a:r>
-              <a:rPr lang="en-US" sz="1380" dirty="0">
+            <a:pPr indent="0" marL="0">
+              <a:buNone/>
+            </a:pPr>
+            <a:r>
+              <a:rPr lang="en-US" sz="1220" dirty="0">
                 <a:solidFill>
                   <a:srgbClr val="17364A"/>
                 </a:solidFill>
@@ -12024,11 +12194,14 @@
               </a:rPr>
               <a:t>Use a tool when no comparable local process exists.</a:t>
             </a:r>
-            <a:endParaRPr lang="en-US" sz="1380" dirty="0"/>
-          </a:p>
-          <a:p>
-            <a:r>
-              <a:rPr lang="en-US" sz="1380" dirty="0">
+            <a:endParaRPr lang="en-US" sz="1220" dirty="0"/>
+          </a:p>
+          <a:p>
+            <a:pPr indent="0" marL="0">
+              <a:buNone/>
+            </a:pPr>
+            <a:r>
+              <a:rPr lang="en-US" sz="1220" dirty="0">
                 <a:solidFill>
                   <a:srgbClr val="17364A"/>
                 </a:solidFill>
@@ -12036,13 +12209,16 @@
                 <a:ea typeface="Aptos" pitchFamily="34" charset="-122"/>
                 <a:cs typeface="Aptos" pitchFamily="34" charset="-120"/>
               </a:rPr>
-              <a:t>Adapt existing department templates when they already fit the purpose.</a:t>
-            </a:r>
-            <a:endParaRPr lang="en-US" sz="1380" dirty="0"/>
-          </a:p>
-          <a:p>
-            <a:r>
-              <a:rPr lang="en-US" sz="1380" dirty="0">
+              <a:t>Adapt existing department templates when they already fit the.</a:t>
+            </a:r>
+            <a:endParaRPr lang="en-US" sz="1220" dirty="0"/>
+          </a:p>
+          <a:p>
+            <a:pPr indent="0" marL="0">
+              <a:buNone/>
+            </a:pPr>
+            <a:r>
+              <a:rPr lang="en-US" sz="1220" dirty="0">
                 <a:solidFill>
                   <a:srgbClr val="17364A"/>
                 </a:solidFill>
@@ -12052,7 +12228,7 @@
               </a:rPr>
               <a:t>Save the completed artifact as evidence of the decision.</a:t>
             </a:r>
-            <a:endParaRPr lang="en-US" sz="1380" dirty="0"/>
+            <a:endParaRPr lang="en-US" sz="1220" dirty="0"/>
           </a:p>
         </p:txBody>
       </p:sp>
@@ -12353,49 +12529,58 @@
           <a:ln/>
         </p:spPr>
         <p:txBody>
-          <a:bodyPr wrap="square" lIns="635" tIns="635" rIns="635" bIns="635" rtlCol="0" anchor="t">
+          <a:bodyPr wrap="square" lIns="1016" tIns="1016" rIns="1016" bIns="1016" rtlCol="0" anchor="t">
             <a:normAutofit/>
           </a:bodyPr>
           <a:lstStyle/>
           <a:p>
+            <a:pPr indent="0" marL="0">
+              <a:buNone/>
+            </a:pPr>
             <a:r>
               <a:rPr lang="en-US" sz="2100" dirty="0">
                 <a:solidFill>
-                  <a:srgbClr val="17364A"/>
-                </a:solidFill>
-                <a:latin typeface="Aptos" pitchFamily="34" charset="0"/>
-                <a:ea typeface="Aptos" pitchFamily="34" charset="-122"/>
-                <a:cs typeface="Aptos" pitchFamily="34" charset="-120"/>
-              </a:rPr>
-              <a:t>Explain why AI implementation requires change management.</a:t>
+                  <a:srgbClr val="003A63"/>
+                </a:solidFill>
+                <a:latin typeface="Aptos" pitchFamily="34" charset="0"/>
+                <a:ea typeface="Aptos" pitchFamily="34" charset="-122"/>
+                <a:cs typeface="Aptos" pitchFamily="34" charset="-120"/>
+              </a:rPr>
+              <a:t>• Explain why AI implementation requires change management.</a:t>
             </a:r>
             <a:endParaRPr lang="en-US" sz="2100" dirty="0"/>
           </a:p>
           <a:p>
+            <a:pPr indent="0" marL="0">
+              <a:buNone/>
+            </a:pPr>
             <a:r>
               <a:rPr lang="en-US" sz="2100" dirty="0">
                 <a:solidFill>
-                  <a:srgbClr val="17364A"/>
-                </a:solidFill>
-                <a:latin typeface="Aptos" pitchFamily="34" charset="0"/>
-                <a:ea typeface="Aptos" pitchFamily="34" charset="-122"/>
-                <a:cs typeface="Aptos" pitchFamily="34" charset="-120"/>
-              </a:rPr>
-              <a:t>Identify stakeholders affected by an AI-supported workflow.</a:t>
+                  <a:srgbClr val="003A63"/>
+                </a:solidFill>
+                <a:latin typeface="Aptos" pitchFamily="34" charset="0"/>
+                <a:ea typeface="Aptos" pitchFamily="34" charset="-122"/>
+                <a:cs typeface="Aptos" pitchFamily="34" charset="-120"/>
+              </a:rPr>
+              <a:t>• Identify stakeholders affected by an AI-supported workflow.</a:t>
             </a:r>
             <a:endParaRPr lang="en-US" sz="2100" dirty="0"/>
           </a:p>
           <a:p>
+            <a:pPr indent="0" marL="0">
+              <a:buNone/>
+            </a:pPr>
             <a:r>
               <a:rPr lang="en-US" sz="2100" dirty="0">
                 <a:solidFill>
-                  <a:srgbClr val="17364A"/>
-                </a:solidFill>
-                <a:latin typeface="Aptos" pitchFamily="34" charset="0"/>
-                <a:ea typeface="Aptos" pitchFamily="34" charset="-122"/>
-                <a:cs typeface="Aptos" pitchFamily="34" charset="-120"/>
-              </a:rPr>
-              <a:t>Develop a change management plan that includes communication, training, workflow updates, feedback, and.</a:t>
+                  <a:srgbClr val="003A63"/>
+                </a:solidFill>
+                <a:latin typeface="Aptos" pitchFamily="34" charset="0"/>
+                <a:ea typeface="Aptos" pitchFamily="34" charset="-122"/>
+                <a:cs typeface="Aptos" pitchFamily="34" charset="-120"/>
+              </a:rPr>
+              <a:t>• Develop a change management plan that includes communication, training, workflow updates,.</a:t>
             </a:r>
             <a:endParaRPr lang="en-US" sz="2100" dirty="0"/>
           </a:p>
@@ -12475,17 +12660,17 @@
         </p:nvSpPr>
         <p:spPr>
           <a:xfrm>
-            <a:off x="7799832" y="1828800"/>
-            <a:ext cx="3145536" cy="685800"/>
-          </a:xfrm>
-          <a:prstGeom prst="rect">
-            <a:avLst/>
-          </a:prstGeom>
-          <a:noFill/>
-          <a:ln/>
-        </p:spPr>
-        <p:txBody>
-          <a:bodyPr wrap="square" lIns="0" tIns="0" rIns="0" bIns="0" rtlCol="0" anchor="t">
+            <a:off x="7799832" y="1801368"/>
+            <a:ext cx="3145536" cy="758952"/>
+          </a:xfrm>
+          <a:prstGeom prst="rect">
+            <a:avLst/>
+          </a:prstGeom>
+          <a:noFill/>
+          <a:ln/>
+        </p:spPr>
+        <p:txBody>
+          <a:bodyPr wrap="square" lIns="254" tIns="254" rIns="254" bIns="254" rtlCol="0" anchor="t">
             <a:normAutofit/>
           </a:bodyPr>
           <a:lstStyle/>
@@ -12494,7 +12679,7 @@
               <a:buNone/>
             </a:pPr>
             <a:r>
-              <a:rPr lang="en-US" sz="1550" dirty="0">
+              <a:rPr lang="en-US" sz="1320" dirty="0">
                 <a:solidFill>
                   <a:srgbClr val="17364A"/>
                 </a:solidFill>
@@ -12504,7 +12689,7 @@
               </a:rPr>
               <a:t>Explain why AI implementation requires change management.</a:t>
             </a:r>
-            <a:endParaRPr lang="en-US" sz="1550" dirty="0"/>
+            <a:endParaRPr lang="en-US" sz="1320" dirty="0"/>
           </a:p>
         </p:txBody>
       </p:sp>
@@ -12592,13 +12777,16 @@
           <a:ln/>
         </p:spPr>
         <p:txBody>
-          <a:bodyPr wrap="square" lIns="254" tIns="254" rIns="254" bIns="254" rtlCol="0" anchor="t">
+          <a:bodyPr wrap="square" lIns="508" tIns="508" rIns="508" bIns="508" rtlCol="0" anchor="t">
             <a:normAutofit/>
           </a:bodyPr>
           <a:lstStyle/>
           <a:p>
-            <a:r>
-              <a:rPr lang="en-US" sz="1380" dirty="0">
+            <a:pPr indent="0" marL="0">
+              <a:buNone/>
+            </a:pPr>
+            <a:r>
+              <a:rPr lang="en-US" sz="1220" dirty="0">
                 <a:solidFill>
                   <a:srgbClr val="17364A"/>
                 </a:solidFill>
@@ -12606,13 +12794,16 @@
                 <a:ea typeface="Aptos" pitchFamily="34" charset="-122"/>
                 <a:cs typeface="Aptos" pitchFamily="34" charset="-120"/>
               </a:rPr>
-              <a:t>Develop a change management plan that includes communication, training, workflow updates,.</a:t>
-            </a:r>
-            <a:endParaRPr lang="en-US" sz="1380" dirty="0"/>
-          </a:p>
-          <a:p>
-            <a:r>
-              <a:rPr lang="en-US" sz="1380" dirty="0">
+              <a:t>Develop a change management plan that includes communication,.</a:t>
+            </a:r>
+            <a:endParaRPr lang="en-US" sz="1220" dirty="0"/>
+          </a:p>
+          <a:p>
+            <a:pPr indent="0" marL="0">
+              <a:buNone/>
+            </a:pPr>
+            <a:r>
+              <a:rPr lang="en-US" sz="1220" dirty="0">
                 <a:solidFill>
                   <a:srgbClr val="17364A"/>
                 </a:solidFill>
@@ -12620,13 +12811,16 @@
                 <a:ea typeface="Aptos" pitchFamily="34" charset="-122"/>
                 <a:cs typeface="Aptos" pitchFamily="34" charset="-120"/>
               </a:rPr>
-              <a:t>Recognize staff concerns related to trust, workload, deskilling, surveillance,.</a:t>
-            </a:r>
-            <a:endParaRPr lang="en-US" sz="1380" dirty="0"/>
-          </a:p>
-          <a:p>
-            <a:r>
-              <a:rPr lang="en-US" sz="1380" dirty="0">
+              <a:t>Recognize staff concerns related to trust, workload, deskilling,.</a:t>
+            </a:r>
+            <a:endParaRPr lang="en-US" sz="1220" dirty="0"/>
+          </a:p>
+          <a:p>
+            <a:pPr indent="0" marL="0">
+              <a:buNone/>
+            </a:pPr>
+            <a:r>
+              <a:rPr lang="en-US" sz="1220" dirty="0">
                 <a:solidFill>
                   <a:srgbClr val="17364A"/>
                 </a:solidFill>
@@ -12636,7 +12830,7 @@
               </a:rPr>
               <a:t>Produce an AI adoption and change management plan.</a:t>
             </a:r>
-            <a:endParaRPr lang="en-US" sz="1380" dirty="0"/>
+            <a:endParaRPr lang="en-US" sz="1220" dirty="0"/>
           </a:p>
         </p:txBody>
       </p:sp>
@@ -12714,17 +12908,17 @@
         </p:nvSpPr>
         <p:spPr>
           <a:xfrm>
-            <a:off x="7799832" y="5001768"/>
-            <a:ext cx="3145536" cy="502920"/>
-          </a:xfrm>
-          <a:prstGeom prst="rect">
-            <a:avLst/>
-          </a:prstGeom>
-          <a:noFill/>
-          <a:ln/>
-        </p:spPr>
-        <p:txBody>
-          <a:bodyPr wrap="square" lIns="0" tIns="0" rIns="0" bIns="0" rtlCol="0" anchor="t">
+            <a:off x="7799832" y="4974336"/>
+            <a:ext cx="3145536" cy="576072"/>
+          </a:xfrm>
+          <a:prstGeom prst="rect">
+            <a:avLst/>
+          </a:prstGeom>
+          <a:noFill/>
+          <a:ln/>
+        </p:spPr>
+        <p:txBody>
+          <a:bodyPr wrap="square" lIns="254" tIns="254" rIns="254" bIns="254" rtlCol="0" anchor="t">
             <a:normAutofit/>
           </a:bodyPr>
           <a:lstStyle/>
@@ -12733,7 +12927,7 @@
               <a:buNone/>
             </a:pPr>
             <a:r>
-              <a:rPr lang="en-US" sz="1550" dirty="0">
+              <a:rPr lang="en-US" sz="1320" dirty="0">
                 <a:solidFill>
                   <a:srgbClr val="17364A"/>
                 </a:solidFill>
@@ -12741,9 +12935,9 @@
                 <a:ea typeface="Aptos" pitchFamily="34" charset="-122"/>
                 <a:cs typeface="Aptos" pitchFamily="34" charset="-120"/>
               </a:rPr>
-              <a:t>Use the assignment to test whether you can explain the concept, apply it to a realistic public health situation, and identify what would need review before the work moves forward.</a:t>
-            </a:r>
-            <a:endParaRPr lang="en-US" sz="1550" dirty="0"/>
+              <a:t>Use the assignment to test whether you can explain the concept, apply it to a realistic public health situation, and.</a:t>
+            </a:r>
+            <a:endParaRPr lang="en-US" sz="1320" dirty="0"/>
           </a:p>
         </p:txBody>
       </p:sp>
@@ -13044,49 +13238,58 @@
           <a:ln/>
         </p:spPr>
         <p:txBody>
-          <a:bodyPr wrap="square" lIns="635" tIns="635" rIns="635" bIns="635" rtlCol="0" anchor="t">
+          <a:bodyPr wrap="square" lIns="1016" tIns="1016" rIns="1016" bIns="1016" rtlCol="0" anchor="t">
             <a:normAutofit/>
           </a:bodyPr>
           <a:lstStyle/>
           <a:p>
+            <a:pPr indent="0" marL="0">
+              <a:buNone/>
+            </a:pPr>
             <a:r>
               <a:rPr lang="en-US" sz="2100" dirty="0">
                 <a:solidFill>
-                  <a:srgbClr val="17364A"/>
-                </a:solidFill>
-                <a:latin typeface="Aptos" pitchFamily="34" charset="0"/>
-                <a:ea typeface="Aptos" pitchFamily="34" charset="-122"/>
-                <a:cs typeface="Aptos" pitchFamily="34" charset="-120"/>
-              </a:rPr>
-              <a:t>AI adoption changes how people work, make decisions, document actions, communicate with partners, and.</a:t>
+                  <a:srgbClr val="003A63"/>
+                </a:solidFill>
+                <a:latin typeface="Aptos" pitchFamily="34" charset="0"/>
+                <a:ea typeface="Aptos" pitchFamily="34" charset="-122"/>
+                <a:cs typeface="Aptos" pitchFamily="34" charset="-120"/>
+              </a:rPr>
+              <a:t>• AI adoption changes how people work, make decisions, document actions, communicate with.</a:t>
             </a:r>
             <a:endParaRPr lang="en-US" sz="2100" dirty="0"/>
           </a:p>
           <a:p>
+            <a:pPr indent="0" marL="0">
+              <a:buNone/>
+            </a:pPr>
             <a:r>
               <a:rPr lang="en-US" sz="2100" dirty="0">
                 <a:solidFill>
-                  <a:srgbClr val="17364A"/>
-                </a:solidFill>
-                <a:latin typeface="Aptos" pitchFamily="34" charset="0"/>
-                <a:ea typeface="Aptos" pitchFamily="34" charset="-122"/>
-                <a:cs typeface="Aptos" pitchFamily="34" charset="-120"/>
-              </a:rPr>
-              <a:t>Successful implementation requires change management, not just technical deployment.</a:t>
+                  <a:srgbClr val="003A63"/>
+                </a:solidFill>
+                <a:latin typeface="Aptos" pitchFamily="34" charset="0"/>
+                <a:ea typeface="Aptos" pitchFamily="34" charset="-122"/>
+                <a:cs typeface="Aptos" pitchFamily="34" charset="-120"/>
+              </a:rPr>
+              <a:t>• Successful implementation requires change management, not just technical deployment.</a:t>
             </a:r>
             <a:endParaRPr lang="en-US" sz="2100" dirty="0"/>
           </a:p>
           <a:p>
+            <a:pPr indent="0" marL="0">
+              <a:buNone/>
+            </a:pPr>
             <a:r>
               <a:rPr lang="en-US" sz="2100" dirty="0">
                 <a:solidFill>
-                  <a:srgbClr val="17364A"/>
-                </a:solidFill>
-                <a:latin typeface="Aptos" pitchFamily="34" charset="0"/>
-                <a:ea typeface="Aptos" pitchFamily="34" charset="-122"/>
-                <a:cs typeface="Aptos" pitchFamily="34" charset="-120"/>
-              </a:rPr>
-              <a:t>Staff need to understand why a tool is being introduced, how it affects their workflow, what they are.</a:t>
+                  <a:srgbClr val="003A63"/>
+                </a:solidFill>
+                <a:latin typeface="Aptos" pitchFamily="34" charset="0"/>
+                <a:ea typeface="Aptos" pitchFamily="34" charset="-122"/>
+                <a:cs typeface="Aptos" pitchFamily="34" charset="-120"/>
+              </a:rPr>
+              <a:t>• Staff need to understand why a tool is being introduced, how it affects their workflow, what.</a:t>
             </a:r>
             <a:endParaRPr lang="en-US" sz="2100" dirty="0"/>
           </a:p>
@@ -13166,17 +13369,17 @@
         </p:nvSpPr>
         <p:spPr>
           <a:xfrm>
-            <a:off x="7799832" y="1828800"/>
-            <a:ext cx="3145536" cy="685800"/>
-          </a:xfrm>
-          <a:prstGeom prst="rect">
-            <a:avLst/>
-          </a:prstGeom>
-          <a:noFill/>
-          <a:ln/>
-        </p:spPr>
-        <p:txBody>
-          <a:bodyPr wrap="square" lIns="0" tIns="0" rIns="0" bIns="0" rtlCol="0" anchor="t">
+            <a:off x="7799832" y="1801368"/>
+            <a:ext cx="3145536" cy="758952"/>
+          </a:xfrm>
+          <a:prstGeom prst="rect">
+            <a:avLst/>
+          </a:prstGeom>
+          <a:noFill/>
+          <a:ln/>
+        </p:spPr>
+        <p:txBody>
+          <a:bodyPr wrap="square" lIns="254" tIns="254" rIns="254" bIns="254" rtlCol="0" anchor="t">
             <a:normAutofit/>
           </a:bodyPr>
           <a:lstStyle/>
@@ -13185,7 +13388,7 @@
               <a:buNone/>
             </a:pPr>
             <a:r>
-              <a:rPr lang="en-US" sz="1550" dirty="0">
+              <a:rPr lang="en-US" sz="1320" dirty="0">
                 <a:solidFill>
                   <a:srgbClr val="17364A"/>
                 </a:solidFill>
@@ -13195,7 +13398,7 @@
               </a:rPr>
               <a:t>AI adoption changes how people work, make decisions, document actions, communicate with partners, and.</a:t>
             </a:r>
-            <a:endParaRPr lang="en-US" sz="1550" dirty="0"/>
+            <a:endParaRPr lang="en-US" sz="1320" dirty="0"/>
           </a:p>
         </p:txBody>
       </p:sp>
@@ -13283,13 +13486,16 @@
           <a:ln/>
         </p:spPr>
         <p:txBody>
-          <a:bodyPr wrap="square" lIns="254" tIns="254" rIns="254" bIns="254" rtlCol="0" anchor="t">
+          <a:bodyPr wrap="square" lIns="508" tIns="508" rIns="508" bIns="508" rtlCol="0" anchor="t">
             <a:normAutofit/>
           </a:bodyPr>
           <a:lstStyle/>
           <a:p>
-            <a:r>
-              <a:rPr lang="en-US" sz="1380" dirty="0">
+            <a:pPr indent="0" marL="0">
+              <a:buNone/>
+            </a:pPr>
+            <a:r>
+              <a:rPr lang="en-US" sz="1220" dirty="0">
                 <a:solidFill>
                   <a:srgbClr val="17364A"/>
                 </a:solidFill>
@@ -13297,13 +13503,16 @@
                 <a:ea typeface="Aptos" pitchFamily="34" charset="-122"/>
                 <a:cs typeface="Aptos" pitchFamily="34" charset="-120"/>
               </a:rPr>
-              <a:t>AI adoption changes how people work, make decisions, document actions, communicate with.</a:t>
-            </a:r>
-            <a:endParaRPr lang="en-US" sz="1380" dirty="0"/>
-          </a:p>
-          <a:p>
-            <a:r>
-              <a:rPr lang="en-US" sz="1380" dirty="0">
+              <a:t>AI adoption changes how people work, make decisions, document.</a:t>
+            </a:r>
+            <a:endParaRPr lang="en-US" sz="1220" dirty="0"/>
+          </a:p>
+          <a:p>
+            <a:pPr indent="0" marL="0">
+              <a:buNone/>
+            </a:pPr>
+            <a:r>
+              <a:rPr lang="en-US" sz="1220" dirty="0">
                 <a:solidFill>
                   <a:srgbClr val="17364A"/>
                 </a:solidFill>
@@ -13311,13 +13520,16 @@
                 <a:ea typeface="Aptos" pitchFamily="34" charset="-122"/>
                 <a:cs typeface="Aptos" pitchFamily="34" charset="-120"/>
               </a:rPr>
-              <a:t>Staff need to understand why a tool is being introduced, how it affects their workflow,.</a:t>
-            </a:r>
-            <a:endParaRPr lang="en-US" sz="1380" dirty="0"/>
-          </a:p>
-          <a:p>
-            <a:r>
-              <a:rPr lang="en-US" sz="1380" dirty="0">
+              <a:t>Staff need to understand why a tool is being introduced, how it.</a:t>
+            </a:r>
+            <a:endParaRPr lang="en-US" sz="1220" dirty="0"/>
+          </a:p>
+          <a:p>
+            <a:pPr indent="0" marL="0">
+              <a:buNone/>
+            </a:pPr>
+            <a:r>
+              <a:rPr lang="en-US" sz="1220" dirty="0">
                 <a:solidFill>
                   <a:srgbClr val="17364A"/>
                 </a:solidFill>
@@ -13325,9 +13537,9 @@
                 <a:ea typeface="Aptos" pitchFamily="34" charset="-122"/>
                 <a:cs typeface="Aptos" pitchFamily="34" charset="-120"/>
               </a:rPr>
-              <a:t>This module helps leaders plan the organizational side of AI adoption.</a:t>
-            </a:r>
-            <a:endParaRPr lang="en-US" sz="1380" dirty="0"/>
+              <a:t>This module helps leaders plan the organizational side of AI.</a:t>
+            </a:r>
+            <a:endParaRPr lang="en-US" sz="1220" dirty="0"/>
           </a:p>
         </p:txBody>
       </p:sp>
@@ -13405,17 +13617,17 @@
         </p:nvSpPr>
         <p:spPr>
           <a:xfrm>
-            <a:off x="7799832" y="5001768"/>
-            <a:ext cx="3145536" cy="502920"/>
-          </a:xfrm>
-          <a:prstGeom prst="rect">
-            <a:avLst/>
-          </a:prstGeom>
-          <a:noFill/>
-          <a:ln/>
-        </p:spPr>
-        <p:txBody>
-          <a:bodyPr wrap="square" lIns="0" tIns="0" rIns="0" bIns="0" rtlCol="0" anchor="t">
+            <a:off x="7799832" y="4974336"/>
+            <a:ext cx="3145536" cy="576072"/>
+          </a:xfrm>
+          <a:prstGeom prst="rect">
+            <a:avLst/>
+          </a:prstGeom>
+          <a:noFill/>
+          <a:ln/>
+        </p:spPr>
+        <p:txBody>
+          <a:bodyPr wrap="square" lIns="254" tIns="254" rIns="254" bIns="254" rtlCol="0" anchor="t">
             <a:normAutofit/>
           </a:bodyPr>
           <a:lstStyle/>
@@ -13424,7 +13636,7 @@
               <a:buNone/>
             </a:pPr>
             <a:r>
-              <a:rPr lang="en-US" sz="1550" dirty="0">
+              <a:rPr lang="en-US" sz="1320" dirty="0">
                 <a:solidFill>
                   <a:srgbClr val="17364A"/>
                 </a:solidFill>
@@ -13432,9 +13644,9 @@
                 <a:ea typeface="Aptos" pitchFamily="34" charset="-122"/>
                 <a:cs typeface="Aptos" pitchFamily="34" charset="-120"/>
               </a:rPr>
-              <a:t>Use the concept to clarify workflow changes, dependencies, staffing, procurement requirements, training needs, and implementation checkpoints.</a:t>
-            </a:r>
-            <a:endParaRPr lang="en-US" sz="1550" dirty="0"/>
+              <a:t>Use the concept to clarify workflow changes, dependencies, staffing, procurement requirements, training needs, and.</a:t>
+            </a:r>
+            <a:endParaRPr lang="en-US" sz="1320" dirty="0"/>
           </a:p>
         </p:txBody>
       </p:sp>
@@ -13735,49 +13947,58 @@
           <a:ln/>
         </p:spPr>
         <p:txBody>
-          <a:bodyPr wrap="square" lIns="635" tIns="635" rIns="635" bIns="635" rtlCol="0" anchor="t">
+          <a:bodyPr wrap="square" lIns="1016" tIns="1016" rIns="1016" bIns="1016" rtlCol="0" anchor="t">
             <a:normAutofit/>
           </a:bodyPr>
           <a:lstStyle/>
           <a:p>
+            <a:pPr indent="0" marL="0">
+              <a:buNone/>
+            </a:pPr>
             <a:r>
               <a:rPr lang="en-US" sz="2100" dirty="0">
                 <a:solidFill>
-                  <a:srgbClr val="17364A"/>
-                </a:solidFill>
-                <a:latin typeface="Aptos" pitchFamily="34" charset="0"/>
-                <a:ea typeface="Aptos" pitchFamily="34" charset="-122"/>
-                <a:cs typeface="Aptos" pitchFamily="34" charset="-120"/>
-              </a:rPr>
-              <a:t>AI tools may fail even when the technology works because the organization is not ready to use them.</a:t>
+                  <a:srgbClr val="003A63"/>
+                </a:solidFill>
+                <a:latin typeface="Aptos" pitchFamily="34" charset="0"/>
+                <a:ea typeface="Aptos" pitchFamily="34" charset="-122"/>
+                <a:cs typeface="Aptos" pitchFamily="34" charset="-120"/>
+              </a:rPr>
+              <a:t>• AI tools may fail even when the technology works because the organization is not ready to use.</a:t>
             </a:r>
             <a:endParaRPr lang="en-US" sz="2100" dirty="0"/>
           </a:p>
           <a:p>
+            <a:pPr indent="0" marL="0">
+              <a:buNone/>
+            </a:pPr>
             <a:r>
               <a:rPr lang="en-US" sz="2100" dirty="0">
                 <a:solidFill>
-                  <a:srgbClr val="17364A"/>
-                </a:solidFill>
-                <a:latin typeface="Aptos" pitchFamily="34" charset="0"/>
-                <a:ea typeface="Aptos" pitchFamily="34" charset="-122"/>
-                <a:cs typeface="Aptos" pitchFamily="34" charset="-120"/>
-              </a:rPr>
-              <a:t>Staff may not trust the output, may over-trust it, may not understand their review responsibilities, or.</a:t>
+                  <a:srgbClr val="003A63"/>
+                </a:solidFill>
+                <a:latin typeface="Aptos" pitchFamily="34" charset="0"/>
+                <a:ea typeface="Aptos" pitchFamily="34" charset="-122"/>
+                <a:cs typeface="Aptos" pitchFamily="34" charset="-120"/>
+              </a:rPr>
+              <a:t>• Staff may not trust the output, may over-trust it, may not understand their review.</a:t>
             </a:r>
             <a:endParaRPr lang="en-US" sz="2100" dirty="0"/>
           </a:p>
           <a:p>
+            <a:pPr indent="0" marL="0">
+              <a:buNone/>
+            </a:pPr>
             <a:r>
               <a:rPr lang="en-US" sz="2100" dirty="0">
                 <a:solidFill>
-                  <a:srgbClr val="17364A"/>
-                </a:solidFill>
-                <a:latin typeface="Aptos" pitchFamily="34" charset="0"/>
-                <a:ea typeface="Aptos" pitchFamily="34" charset="-122"/>
-                <a:cs typeface="Aptos" pitchFamily="34" charset="-120"/>
-              </a:rPr>
-              <a:t>Leaders may underestimate the time needed for training, workflow redesign, and user feedback.</a:t>
+                  <a:srgbClr val="003A63"/>
+                </a:solidFill>
+                <a:latin typeface="Aptos" pitchFamily="34" charset="0"/>
+                <a:ea typeface="Aptos" pitchFamily="34" charset="-122"/>
+                <a:cs typeface="Aptos" pitchFamily="34" charset="-120"/>
+              </a:rPr>
+              <a:t>• Leaders may underestimate the time needed for training, workflow redesign, and user feedback.</a:t>
             </a:r>
             <a:endParaRPr lang="en-US" sz="2100" dirty="0"/>
           </a:p>
@@ -13857,17 +14078,17 @@
         </p:nvSpPr>
         <p:spPr>
           <a:xfrm>
-            <a:off x="7799832" y="1828800"/>
-            <a:ext cx="3145536" cy="685800"/>
-          </a:xfrm>
-          <a:prstGeom prst="rect">
-            <a:avLst/>
-          </a:prstGeom>
-          <a:noFill/>
-          <a:ln/>
-        </p:spPr>
-        <p:txBody>
-          <a:bodyPr wrap="square" lIns="0" tIns="0" rIns="0" bIns="0" rtlCol="0" anchor="t">
+            <a:off x="7799832" y="1801368"/>
+            <a:ext cx="3145536" cy="758952"/>
+          </a:xfrm>
+          <a:prstGeom prst="rect">
+            <a:avLst/>
+          </a:prstGeom>
+          <a:noFill/>
+          <a:ln/>
+        </p:spPr>
+        <p:txBody>
+          <a:bodyPr wrap="square" lIns="254" tIns="254" rIns="254" bIns="254" rtlCol="0" anchor="t">
             <a:normAutofit/>
           </a:bodyPr>
           <a:lstStyle/>
@@ -13876,7 +14097,7 @@
               <a:buNone/>
             </a:pPr>
             <a:r>
-              <a:rPr lang="en-US" sz="1550" dirty="0">
+              <a:rPr lang="en-US" sz="1320" dirty="0">
                 <a:solidFill>
                   <a:srgbClr val="17364A"/>
                 </a:solidFill>
@@ -13886,7 +14107,7 @@
               </a:rPr>
               <a:t>AI tools may fail even when the technology works because the organization is not ready to use them.</a:t>
             </a:r>
-            <a:endParaRPr lang="en-US" sz="1550" dirty="0"/>
+            <a:endParaRPr lang="en-US" sz="1320" dirty="0"/>
           </a:p>
         </p:txBody>
       </p:sp>
@@ -13974,13 +14195,16 @@
           <a:ln/>
         </p:spPr>
         <p:txBody>
-          <a:bodyPr wrap="square" lIns="254" tIns="254" rIns="254" bIns="254" rtlCol="0" anchor="t">
+          <a:bodyPr wrap="square" lIns="508" tIns="508" rIns="508" bIns="508" rtlCol="0" anchor="t">
             <a:normAutofit/>
           </a:bodyPr>
           <a:lstStyle/>
           <a:p>
-            <a:r>
-              <a:rPr lang="en-US" sz="1380" dirty="0">
+            <a:pPr indent="0" marL="0">
+              <a:buNone/>
+            </a:pPr>
+            <a:r>
+              <a:rPr lang="en-US" sz="1220" dirty="0">
                 <a:solidFill>
                   <a:srgbClr val="17364A"/>
                 </a:solidFill>
@@ -13988,13 +14212,16 @@
                 <a:ea typeface="Aptos" pitchFamily="34" charset="-122"/>
                 <a:cs typeface="Aptos" pitchFamily="34" charset="-120"/>
               </a:rPr>
-              <a:t>Staff may not trust the output, may over-trust it, may not understand their review.</a:t>
-            </a:r>
-            <a:endParaRPr lang="en-US" sz="1380" dirty="0"/>
-          </a:p>
-          <a:p>
-            <a:r>
-              <a:rPr lang="en-US" sz="1380" dirty="0">
+              <a:t>Staff may not trust the output, may over-trust it, may not.</a:t>
+            </a:r>
+            <a:endParaRPr lang="en-US" sz="1220" dirty="0"/>
+          </a:p>
+          <a:p>
+            <a:pPr indent="0" marL="0">
+              <a:buNone/>
+            </a:pPr>
+            <a:r>
+              <a:rPr lang="en-US" sz="1220" dirty="0">
                 <a:solidFill>
                   <a:srgbClr val="17364A"/>
                 </a:solidFill>
@@ -14004,11 +14231,14 @@
               </a:rPr>
               <a:t>Change management is also an equity and workforce issue.</a:t>
             </a:r>
-            <a:endParaRPr lang="en-US" sz="1380" dirty="0"/>
-          </a:p>
-          <a:p>
-            <a:r>
-              <a:rPr lang="en-US" sz="1380" dirty="0">
+            <a:endParaRPr lang="en-US" sz="1220" dirty="0"/>
+          </a:p>
+          <a:p>
+            <a:pPr indent="0" marL="0">
+              <a:buNone/>
+            </a:pPr>
+            <a:r>
+              <a:rPr lang="en-US" sz="1220" dirty="0">
                 <a:solidFill>
                   <a:srgbClr val="17364A"/>
                 </a:solidFill>
@@ -14016,9 +14246,9 @@
                 <a:ea typeface="Aptos" pitchFamily="34" charset="-122"/>
                 <a:cs typeface="Aptos" pitchFamily="34" charset="-120"/>
               </a:rPr>
-              <a:t>Staff who are not included in design may experience AI as a threat or burden.</a:t>
-            </a:r>
-            <a:endParaRPr lang="en-US" sz="1380" dirty="0"/>
+              <a:t>Staff who are not included in design may experience AI as a threat.</a:t>
+            </a:r>
+            <a:endParaRPr lang="en-US" sz="1220" dirty="0"/>
           </a:p>
         </p:txBody>
       </p:sp>
@@ -14096,17 +14326,17 @@
         </p:nvSpPr>
         <p:spPr>
           <a:xfrm>
-            <a:off x="7799832" y="5001768"/>
-            <a:ext cx="3145536" cy="502920"/>
-          </a:xfrm>
-          <a:prstGeom prst="rect">
-            <a:avLst/>
-          </a:prstGeom>
-          <a:noFill/>
-          <a:ln/>
-        </p:spPr>
-        <p:txBody>
-          <a:bodyPr wrap="square" lIns="0" tIns="0" rIns="0" bIns="0" rtlCol="0" anchor="t">
+            <a:off x="7799832" y="4974336"/>
+            <a:ext cx="3145536" cy="576072"/>
+          </a:xfrm>
+          <a:prstGeom prst="rect">
+            <a:avLst/>
+          </a:prstGeom>
+          <a:noFill/>
+          <a:ln/>
+        </p:spPr>
+        <p:txBody>
+          <a:bodyPr wrap="square" lIns="254" tIns="254" rIns="254" bIns="254" rtlCol="0" anchor="t">
             <a:normAutofit/>
           </a:bodyPr>
           <a:lstStyle/>
@@ -14115,7 +14345,7 @@
               <a:buNone/>
             </a:pPr>
             <a:r>
-              <a:rPr lang="en-US" sz="1550" dirty="0">
+              <a:rPr lang="en-US" sz="1320" dirty="0">
                 <a:solidFill>
                   <a:srgbClr val="17364A"/>
                 </a:solidFill>
@@ -14123,9 +14353,9 @@
                 <a:ea typeface="Aptos" pitchFamily="34" charset="-122"/>
                 <a:cs typeface="Aptos" pitchFamily="34" charset="-120"/>
               </a:rPr>
-              <a:t>Use the concept to clarify workflow changes, dependencies, staffing, procurement requirements, training needs, and implementation checkpoints.</a:t>
-            </a:r>
-            <a:endParaRPr lang="en-US" sz="1550" dirty="0"/>
+              <a:t>Use the concept to clarify workflow changes, dependencies, staffing, procurement requirements, training needs, and.</a:t>
+            </a:r>
+            <a:endParaRPr lang="en-US" sz="1320" dirty="0"/>
           </a:p>
         </p:txBody>
       </p:sp>
@@ -14426,49 +14656,58 @@
           <a:ln/>
         </p:spPr>
         <p:txBody>
-          <a:bodyPr wrap="square" lIns="635" tIns="635" rIns="635" bIns="635" rtlCol="0" anchor="t">
+          <a:bodyPr wrap="square" lIns="1016" tIns="1016" rIns="1016" bIns="1016" rtlCol="0" anchor="t">
             <a:normAutofit/>
           </a:bodyPr>
           <a:lstStyle/>
           <a:p>
+            <a:pPr indent="0" marL="0">
+              <a:buNone/>
+            </a:pPr>
             <a:r>
               <a:rPr lang="en-US" sz="2100" dirty="0">
                 <a:solidFill>
-                  <a:srgbClr val="17364A"/>
-                </a:solidFill>
-                <a:latin typeface="Aptos" pitchFamily="34" charset="0"/>
-                <a:ea typeface="Aptos" pitchFamily="34" charset="-122"/>
-                <a:cs typeface="Aptos" pitchFamily="34" charset="-120"/>
-              </a:rPr>
-              <a:t>A health department launches an AI assistant to help staff find internal policies and program guidance.</a:t>
+                  <a:srgbClr val="003A63"/>
+                </a:solidFill>
+                <a:latin typeface="Aptos" pitchFamily="34" charset="0"/>
+                <a:ea typeface="Aptos" pitchFamily="34" charset="-122"/>
+                <a:cs typeface="Aptos" pitchFamily="34" charset="-120"/>
+              </a:rPr>
+              <a:t>• A health department launches an AI assistant to help staff find internal policies and program.</a:t>
             </a:r>
             <a:endParaRPr lang="en-US" sz="2100" dirty="0"/>
           </a:p>
           <a:p>
+            <a:pPr indent="0" marL="0">
+              <a:buNone/>
+            </a:pPr>
             <a:r>
               <a:rPr lang="en-US" sz="2100" dirty="0">
                 <a:solidFill>
-                  <a:srgbClr val="17364A"/>
-                </a:solidFill>
-                <a:latin typeface="Aptos" pitchFamily="34" charset="0"/>
-                <a:ea typeface="Aptos" pitchFamily="34" charset="-122"/>
-                <a:cs typeface="Aptos" pitchFamily="34" charset="-120"/>
-              </a:rPr>
-              <a:t>The tool is technically functional, but staff do not use it because they are unsure whether answers are.</a:t>
+                  <a:srgbClr val="003A63"/>
+                </a:solidFill>
+                <a:latin typeface="Aptos" pitchFamily="34" charset="0"/>
+                <a:ea typeface="Aptos" pitchFamily="34" charset="-122"/>
+                <a:cs typeface="Aptos" pitchFamily="34" charset="-120"/>
+              </a:rPr>
+              <a:t>• The tool is technically functional, but staff do not use it because they are unsure whether.</a:t>
             </a:r>
             <a:endParaRPr lang="en-US" sz="2100" dirty="0"/>
           </a:p>
           <a:p>
+            <a:pPr indent="0" marL="0">
+              <a:buNone/>
+            </a:pPr>
             <a:r>
               <a:rPr lang="en-US" sz="2100" dirty="0">
                 <a:solidFill>
-                  <a:srgbClr val="17364A"/>
-                </a:solidFill>
-                <a:latin typeface="Aptos" pitchFamily="34" charset="0"/>
-                <a:ea typeface="Aptos" pitchFamily="34" charset="-122"/>
-                <a:cs typeface="Aptos" pitchFamily="34" charset="-120"/>
-              </a:rPr>
-              <a:t>Some staff worry that the tool will be used to judge their productivity.</a:t>
+                  <a:srgbClr val="003A63"/>
+                </a:solidFill>
+                <a:latin typeface="Aptos" pitchFamily="34" charset="0"/>
+                <a:ea typeface="Aptos" pitchFamily="34" charset="-122"/>
+                <a:cs typeface="Aptos" pitchFamily="34" charset="-120"/>
+              </a:rPr>
+              <a:t>• Some staff worry that the tool will be used to judge their productivity.</a:t>
             </a:r>
             <a:endParaRPr lang="en-US" sz="2100" dirty="0"/>
           </a:p>
@@ -14548,17 +14787,17 @@
         </p:nvSpPr>
         <p:spPr>
           <a:xfrm>
-            <a:off x="7799832" y="1828800"/>
-            <a:ext cx="3145536" cy="685800"/>
-          </a:xfrm>
-          <a:prstGeom prst="rect">
-            <a:avLst/>
-          </a:prstGeom>
-          <a:noFill/>
-          <a:ln/>
-        </p:spPr>
-        <p:txBody>
-          <a:bodyPr wrap="square" lIns="0" tIns="0" rIns="0" bIns="0" rtlCol="0" anchor="t">
+            <a:off x="7799832" y="1801368"/>
+            <a:ext cx="3145536" cy="758952"/>
+          </a:xfrm>
+          <a:prstGeom prst="rect">
+            <a:avLst/>
+          </a:prstGeom>
+          <a:noFill/>
+          <a:ln/>
+        </p:spPr>
+        <p:txBody>
+          <a:bodyPr wrap="square" lIns="254" tIns="254" rIns="254" bIns="254" rtlCol="0" anchor="t">
             <a:normAutofit/>
           </a:bodyPr>
           <a:lstStyle/>
@@ -14567,7 +14806,7 @@
               <a:buNone/>
             </a:pPr>
             <a:r>
-              <a:rPr lang="en-US" sz="1550" dirty="0">
+              <a:rPr lang="en-US" sz="1320" dirty="0">
                 <a:solidFill>
                   <a:srgbClr val="17364A"/>
                 </a:solidFill>
@@ -14577,7 +14816,7 @@
               </a:rPr>
               <a:t>A health department launches an AI assistant to help staff find internal policies and program guidance.</a:t>
             </a:r>
-            <a:endParaRPr lang="en-US" sz="1550" dirty="0"/>
+            <a:endParaRPr lang="en-US" sz="1320" dirty="0"/>
           </a:p>
         </p:txBody>
       </p:sp>
@@ -14665,13 +14904,16 @@
           <a:ln/>
         </p:spPr>
         <p:txBody>
-          <a:bodyPr wrap="square" lIns="254" tIns="254" rIns="254" bIns="254" rtlCol="0" anchor="t">
+          <a:bodyPr wrap="square" lIns="508" tIns="508" rIns="508" bIns="508" rtlCol="0" anchor="t">
             <a:normAutofit/>
           </a:bodyPr>
           <a:lstStyle/>
           <a:p>
-            <a:r>
-              <a:rPr lang="en-US" sz="1380" dirty="0">
+            <a:pPr indent="0" marL="0">
+              <a:buNone/>
+            </a:pPr>
+            <a:r>
+              <a:rPr lang="en-US" sz="1220" dirty="0">
                 <a:solidFill>
                   <a:srgbClr val="17364A"/>
                 </a:solidFill>
@@ -14679,13 +14921,16 @@
                 <a:ea typeface="Aptos" pitchFamily="34" charset="-122"/>
                 <a:cs typeface="Aptos" pitchFamily="34" charset="-120"/>
               </a:rPr>
-              <a:t>The tool is technically functional, but staff do not use it because they are unsure.</a:t>
-            </a:r>
-            <a:endParaRPr lang="en-US" sz="1380" dirty="0"/>
-          </a:p>
-          <a:p>
-            <a:r>
-              <a:rPr lang="en-US" sz="1380" dirty="0">
+              <a:t>The tool is technically functional, but staff do not use it.</a:t>
+            </a:r>
+            <a:endParaRPr lang="en-US" sz="1220" dirty="0"/>
+          </a:p>
+          <a:p>
+            <a:pPr indent="0" marL="0">
+              <a:buNone/>
+            </a:pPr>
+            <a:r>
+              <a:rPr lang="en-US" sz="1220" dirty="0">
                 <a:solidFill>
                   <a:srgbClr val="17364A"/>
                 </a:solidFill>
@@ -14695,11 +14940,14 @@
               </a:rPr>
               <a:t>A change management plan addresses these concerns directly.</a:t>
             </a:r>
-            <a:endParaRPr lang="en-US" sz="1380" dirty="0"/>
-          </a:p>
-          <a:p>
-            <a:r>
-              <a:rPr lang="en-US" sz="1380" dirty="0">
+            <a:endParaRPr lang="en-US" sz="1220" dirty="0"/>
+          </a:p>
+          <a:p>
+            <a:pPr indent="0" marL="0">
+              <a:buNone/>
+            </a:pPr>
+            <a:r>
+              <a:rPr lang="en-US" sz="1220" dirty="0">
                 <a:solidFill>
                   <a:srgbClr val="17364A"/>
                 </a:solidFill>
@@ -14707,9 +14955,9 @@
                 <a:ea typeface="Aptos" pitchFamily="34" charset="-122"/>
                 <a:cs typeface="Aptos" pitchFamily="34" charset="-120"/>
               </a:rPr>
-              <a:t>It explains the purpose of the tool, approved uses, prohibited uses, privacy protections,.</a:t>
-            </a:r>
-            <a:endParaRPr lang="en-US" sz="1380" dirty="0"/>
+              <a:t>It explains the purpose of the tool, approved uses, prohibited.</a:t>
+            </a:r>
+            <a:endParaRPr lang="en-US" sz="1220" dirty="0"/>
           </a:p>
         </p:txBody>
       </p:sp>
@@ -14787,17 +15035,17 @@
         </p:nvSpPr>
         <p:spPr>
           <a:xfrm>
-            <a:off x="7799832" y="5001768"/>
-            <a:ext cx="3145536" cy="502920"/>
-          </a:xfrm>
-          <a:prstGeom prst="rect">
-            <a:avLst/>
-          </a:prstGeom>
-          <a:noFill/>
-          <a:ln/>
-        </p:spPr>
-        <p:txBody>
-          <a:bodyPr wrap="square" lIns="0" tIns="0" rIns="0" bIns="0" rtlCol="0" anchor="t">
+            <a:off x="7799832" y="4974336"/>
+            <a:ext cx="3145536" cy="576072"/>
+          </a:xfrm>
+          <a:prstGeom prst="rect">
+            <a:avLst/>
+          </a:prstGeom>
+          <a:noFill/>
+          <a:ln/>
+        </p:spPr>
+        <p:txBody>
+          <a:bodyPr wrap="square" lIns="254" tIns="254" rIns="254" bIns="254" rtlCol="0" anchor="t">
             <a:normAutofit/>
           </a:bodyPr>
           <a:lstStyle/>
@@ -14806,7 +15054,7 @@
               <a:buNone/>
             </a:pPr>
             <a:r>
-              <a:rPr lang="en-US" sz="1550" dirty="0">
+              <a:rPr lang="en-US" sz="1320" dirty="0">
                 <a:solidFill>
                   <a:srgbClr val="17364A"/>
                 </a:solidFill>
@@ -14814,9 +15062,9 @@
                 <a:ea typeface="Aptos" pitchFamily="34" charset="-122"/>
                 <a:cs typeface="Aptos" pitchFamily="34" charset="-120"/>
               </a:rPr>
-              <a:t>Use the concept to clarify workflow changes, dependencies, staffing, procurement requirements, training needs, and implementation checkpoints.</a:t>
-            </a:r>
-            <a:endParaRPr lang="en-US" sz="1550" dirty="0"/>
+              <a:t>Use the concept to clarify workflow changes, dependencies, staffing, procurement requirements, training needs, and.</a:t>
+            </a:r>
+            <a:endParaRPr lang="en-US" sz="1320" dirty="0"/>
           </a:p>
         </p:txBody>
       </p:sp>
@@ -15117,49 +15365,58 @@
           <a:ln/>
         </p:spPr>
         <p:txBody>
-          <a:bodyPr wrap="square" lIns="635" tIns="635" rIns="635" bIns="635" rtlCol="0" anchor="t">
+          <a:bodyPr wrap="square" lIns="1016" tIns="1016" rIns="1016" bIns="1016" rtlCol="0" anchor="t">
             <a:normAutofit/>
           </a:bodyPr>
           <a:lstStyle/>
           <a:p>
+            <a:pPr indent="0" marL="0">
+              <a:buNone/>
+            </a:pPr>
             <a:r>
               <a:rPr lang="en-US" sz="2100" dirty="0">
                 <a:solidFill>
-                  <a:srgbClr val="17364A"/>
-                </a:solidFill>
-                <a:latin typeface="Aptos" pitchFamily="34" charset="0"/>
-                <a:ea typeface="Aptos" pitchFamily="34" charset="-122"/>
-                <a:cs typeface="Aptos" pitchFamily="34" charset="-120"/>
-              </a:rPr>
-              <a:t>AI change management should begin before procurement or configuration.</a:t>
+                  <a:srgbClr val="003A63"/>
+                </a:solidFill>
+                <a:latin typeface="Aptos" pitchFamily="34" charset="0"/>
+                <a:ea typeface="Aptos" pitchFamily="34" charset="-122"/>
+                <a:cs typeface="Aptos" pitchFamily="34" charset="-120"/>
+              </a:rPr>
+              <a:t>• AI change management should begin before procurement or configuration.</a:t>
             </a:r>
             <a:endParaRPr lang="en-US" sz="2100" dirty="0"/>
           </a:p>
           <a:p>
+            <a:pPr indent="0" marL="0">
+              <a:buNone/>
+            </a:pPr>
             <a:r>
               <a:rPr lang="en-US" sz="2100" dirty="0">
                 <a:solidFill>
-                  <a:srgbClr val="17364A"/>
-                </a:solidFill>
-                <a:latin typeface="Aptos" pitchFamily="34" charset="0"/>
-                <a:ea typeface="Aptos" pitchFamily="34" charset="-122"/>
-                <a:cs typeface="Aptos" pitchFamily="34" charset="-120"/>
-              </a:rPr>
-              <a:t>Leaders should identify who will be affected, what pain points the tool is supposed to address, which.</a:t>
+                  <a:srgbClr val="003A63"/>
+                </a:solidFill>
+                <a:latin typeface="Aptos" pitchFamily="34" charset="0"/>
+                <a:ea typeface="Aptos" pitchFamily="34" charset="-122"/>
+                <a:cs typeface="Aptos" pitchFamily="34" charset="-120"/>
+              </a:rPr>
+              <a:t>• Leaders should identify who will be affected, what pain points the tool is supposed to.</a:t>
             </a:r>
             <a:endParaRPr lang="en-US" sz="2100" dirty="0"/>
           </a:p>
           <a:p>
+            <a:pPr indent="0" marL="0">
+              <a:buNone/>
+            </a:pPr>
             <a:r>
               <a:rPr lang="en-US" sz="2100" dirty="0">
                 <a:solidFill>
-                  <a:srgbClr val="17364A"/>
-                </a:solidFill>
-                <a:latin typeface="Aptos" pitchFamily="34" charset="0"/>
-                <a:ea typeface="Aptos" pitchFamily="34" charset="-122"/>
-                <a:cs typeface="Aptos" pitchFamily="34" charset="-120"/>
-              </a:rPr>
-              <a:t>Stakeholder engagement should include frontline users, supervisors, program leaders, IT, privacy,.</a:t>
+                  <a:srgbClr val="003A63"/>
+                </a:solidFill>
+                <a:latin typeface="Aptos" pitchFamily="34" charset="0"/>
+                <a:ea typeface="Aptos" pitchFamily="34" charset="-122"/>
+                <a:cs typeface="Aptos" pitchFamily="34" charset="-120"/>
+              </a:rPr>
+              <a:t>• Stakeholder engagement should include frontline users, supervisors, program leaders, IT,.</a:t>
             </a:r>
             <a:endParaRPr lang="en-US" sz="2100" dirty="0"/>
           </a:p>
@@ -15239,17 +15496,17 @@
         </p:nvSpPr>
         <p:spPr>
           <a:xfrm>
-            <a:off x="7799832" y="1828800"/>
-            <a:ext cx="3145536" cy="685800"/>
-          </a:xfrm>
-          <a:prstGeom prst="rect">
-            <a:avLst/>
-          </a:prstGeom>
-          <a:noFill/>
-          <a:ln/>
-        </p:spPr>
-        <p:txBody>
-          <a:bodyPr wrap="square" lIns="0" tIns="0" rIns="0" bIns="0" rtlCol="0" anchor="t">
+            <a:off x="7799832" y="1801368"/>
+            <a:ext cx="3145536" cy="758952"/>
+          </a:xfrm>
+          <a:prstGeom prst="rect">
+            <a:avLst/>
+          </a:prstGeom>
+          <a:noFill/>
+          <a:ln/>
+        </p:spPr>
+        <p:txBody>
+          <a:bodyPr wrap="square" lIns="254" tIns="254" rIns="254" bIns="254" rtlCol="0" anchor="t">
             <a:normAutofit/>
           </a:bodyPr>
           <a:lstStyle/>
@@ -15258,7 +15515,7 @@
               <a:buNone/>
             </a:pPr>
             <a:r>
-              <a:rPr lang="en-US" sz="1550" dirty="0">
+              <a:rPr lang="en-US" sz="1320" dirty="0">
                 <a:solidFill>
                   <a:srgbClr val="17364A"/>
                 </a:solidFill>
@@ -15268,7 +15525,7 @@
               </a:rPr>
               <a:t>AI change management should begin before procurement or configuration.</a:t>
             </a:r>
-            <a:endParaRPr lang="en-US" sz="1550" dirty="0"/>
+            <a:endParaRPr lang="en-US" sz="1320" dirty="0"/>
           </a:p>
         </p:txBody>
       </p:sp>
@@ -15356,13 +15613,16 @@
           <a:ln/>
         </p:spPr>
         <p:txBody>
-          <a:bodyPr wrap="square" lIns="254" tIns="254" rIns="254" bIns="254" rtlCol="0" anchor="t">
+          <a:bodyPr wrap="square" lIns="508" tIns="508" rIns="508" bIns="508" rtlCol="0" anchor="t">
             <a:normAutofit/>
           </a:bodyPr>
           <a:lstStyle/>
           <a:p>
-            <a:r>
-              <a:rPr lang="en-US" sz="1380" dirty="0">
+            <a:pPr indent="0" marL="0">
+              <a:buNone/>
+            </a:pPr>
+            <a:r>
+              <a:rPr lang="en-US" sz="1220" dirty="0">
                 <a:solidFill>
                   <a:srgbClr val="17364A"/>
                 </a:solidFill>
@@ -15370,13 +15630,16 @@
                 <a:ea typeface="Aptos" pitchFamily="34" charset="-122"/>
                 <a:cs typeface="Aptos" pitchFamily="34" charset="-120"/>
               </a:rPr>
-              <a:t>Leaders should identify who will be affected, what pain points the tool is supposed to.</a:t>
-            </a:r>
-            <a:endParaRPr lang="en-US" sz="1380" dirty="0"/>
-          </a:p>
-          <a:p>
-            <a:r>
-              <a:rPr lang="en-US" sz="1380" dirty="0">
+              <a:t>Leaders should identify who will be affected, what pain points the.</a:t>
+            </a:r>
+            <a:endParaRPr lang="en-US" sz="1220" dirty="0"/>
+          </a:p>
+          <a:p>
+            <a:pPr indent="0" marL="0">
+              <a:buNone/>
+            </a:pPr>
+            <a:r>
+              <a:rPr lang="en-US" sz="1220" dirty="0">
                 <a:solidFill>
                   <a:srgbClr val="17364A"/>
                 </a:solidFill>
@@ -15384,13 +15647,16 @@
                 <a:ea typeface="Aptos" pitchFamily="34" charset="-122"/>
                 <a:cs typeface="Aptos" pitchFamily="34" charset="-120"/>
               </a:rPr>
-              <a:t>Stakeholder engagement should include frontline users, supervisors, program leaders, IT,.</a:t>
-            </a:r>
-            <a:endParaRPr lang="en-US" sz="1380" dirty="0"/>
-          </a:p>
-          <a:p>
-            <a:r>
-              <a:rPr lang="en-US" sz="1380" dirty="0">
+              <a:t>Stakeholder engagement should include frontline users,.</a:t>
+            </a:r>
+            <a:endParaRPr lang="en-US" sz="1220" dirty="0"/>
+          </a:p>
+          <a:p>
+            <a:pPr indent="0" marL="0">
+              <a:buNone/>
+            </a:pPr>
+            <a:r>
+              <a:rPr lang="en-US" sz="1220" dirty="0">
                 <a:solidFill>
                   <a:srgbClr val="17364A"/>
                 </a:solidFill>
@@ -15400,7 +15666,7 @@
               </a:rPr>
               <a:t>The communication plan should be specific.</a:t>
             </a:r>
-            <a:endParaRPr lang="en-US" sz="1380" dirty="0"/>
+            <a:endParaRPr lang="en-US" sz="1220" dirty="0"/>
           </a:p>
         </p:txBody>
       </p:sp>
@@ -15478,17 +15744,17 @@
         </p:nvSpPr>
         <p:spPr>
           <a:xfrm>
-            <a:off x="7799832" y="5001768"/>
-            <a:ext cx="3145536" cy="502920"/>
-          </a:xfrm>
-          <a:prstGeom prst="rect">
-            <a:avLst/>
-          </a:prstGeom>
-          <a:noFill/>
-          <a:ln/>
-        </p:spPr>
-        <p:txBody>
-          <a:bodyPr wrap="square" lIns="0" tIns="0" rIns="0" bIns="0" rtlCol="0" anchor="t">
+            <a:off x="7799832" y="4974336"/>
+            <a:ext cx="3145536" cy="576072"/>
+          </a:xfrm>
+          <a:prstGeom prst="rect">
+            <a:avLst/>
+          </a:prstGeom>
+          <a:noFill/>
+          <a:ln/>
+        </p:spPr>
+        <p:txBody>
+          <a:bodyPr wrap="square" lIns="254" tIns="254" rIns="254" bIns="254" rtlCol="0" anchor="t">
             <a:normAutofit/>
           </a:bodyPr>
           <a:lstStyle/>
@@ -15497,7 +15763,7 @@
               <a:buNone/>
             </a:pPr>
             <a:r>
-              <a:rPr lang="en-US" sz="1550" dirty="0">
+              <a:rPr lang="en-US" sz="1320" dirty="0">
                 <a:solidFill>
                   <a:srgbClr val="17364A"/>
                 </a:solidFill>
@@ -15505,9 +15771,9 @@
                 <a:ea typeface="Aptos" pitchFamily="34" charset="-122"/>
                 <a:cs typeface="Aptos" pitchFamily="34" charset="-120"/>
               </a:rPr>
-              <a:t>Translate this concept into clear decision rights, review steps, documentation expectations, and escalation paths before an AI-supported workflow is approved.</a:t>
-            </a:r>
-            <a:endParaRPr lang="en-US" sz="1550" dirty="0"/>
+              <a:t>Translate this concept into clear decision rights, review steps, documentation expectations, and escalation paths before.</a:t>
+            </a:r>
+            <a:endParaRPr lang="en-US" sz="1320" dirty="0"/>
           </a:p>
         </p:txBody>
       </p:sp>

--- a/downloads/presentations/modules/exe-430.pptx
+++ b/downloads/presentations/modules/exe-430.pptx
@@ -3228,11 +3228,11 @@
         <p:spPr>
           <a:xfrm>
             <a:off x="7635240" y="1325880"/>
-            <a:ext cx="3474720" cy="1325880"/>
+            <a:ext cx="3474720" cy="1207008"/>
           </a:xfrm>
           <a:prstGeom prst="roundRect">
             <a:avLst>
-              <a:gd name="adj" fmla="val 8276"/>
+              <a:gd name="adj" fmla="val 9091"/>
             </a:avLst>
           </a:prstGeom>
           <a:solidFill>
@@ -3294,7 +3294,7 @@
         <p:spPr>
           <a:xfrm>
             <a:off x="7799832" y="1801368"/>
-            <a:ext cx="3145536" cy="758952"/>
+            <a:ext cx="3145536" cy="640080"/>
           </a:xfrm>
           <a:prstGeom prst="rect">
             <a:avLst/>
@@ -3334,7 +3334,7 @@
         </p:nvSpPr>
         <p:spPr>
           <a:xfrm>
-            <a:off x="7635240" y="2788920"/>
+            <a:off x="7635240" y="2670048"/>
             <a:ext cx="3474720" cy="1536192"/>
           </a:xfrm>
           <a:prstGeom prst="roundRect">
@@ -3361,7 +3361,7 @@
         </p:nvSpPr>
         <p:spPr>
           <a:xfrm>
-            <a:off x="7799832" y="2935224"/>
+            <a:off x="7799832" y="2816352"/>
             <a:ext cx="3145536" cy="256032"/>
           </a:xfrm>
           <a:prstGeom prst="rect">
@@ -3400,7 +3400,7 @@
         </p:nvSpPr>
         <p:spPr>
           <a:xfrm>
-            <a:off x="7818120" y="3300984"/>
+            <a:off x="7818120" y="3182112"/>
             <a:ext cx="3090672" cy="877824"/>
           </a:xfrm>
           <a:prstGeom prst="rect">
@@ -3475,12 +3475,12 @@
         </p:nvSpPr>
         <p:spPr>
           <a:xfrm>
-            <a:off x="7635240" y="4498848"/>
-            <a:ext cx="3474720" cy="1143000"/>
+            <a:off x="7635240" y="4343400"/>
+            <a:ext cx="3474720" cy="1255471"/>
           </a:xfrm>
           <a:prstGeom prst="roundRect">
             <a:avLst>
-              <a:gd name="adj" fmla="val 9600"/>
+              <a:gd name="adj" fmla="val 8740"/>
             </a:avLst>
           </a:prstGeom>
           <a:solidFill>
@@ -3502,7 +3502,7 @@
         </p:nvSpPr>
         <p:spPr>
           <a:xfrm>
-            <a:off x="7799832" y="4645152"/>
+            <a:off x="7799832" y="4489704"/>
             <a:ext cx="3145536" cy="256032"/>
           </a:xfrm>
           <a:prstGeom prst="rect">
@@ -3541,8 +3541,8 @@
         </p:nvSpPr>
         <p:spPr>
           <a:xfrm>
-            <a:off x="7799832" y="4974336"/>
-            <a:ext cx="3145536" cy="576072"/>
+            <a:off x="7799832" y="4818888"/>
+            <a:ext cx="3145536" cy="688543"/>
           </a:xfrm>
           <a:prstGeom prst="rect">
             <a:avLst/>
@@ -3568,7 +3568,7 @@
                 <a:ea typeface="Aptos" pitchFamily="34" charset="-122"/>
                 <a:cs typeface="Aptos" pitchFamily="34" charset="-120"/>
               </a:rPr>
-              <a:t>Identify what could go wrong, who could be affected, what safeguards are needed, and what evidence should be reviewed.</a:t>
+              <a:t>Identify what could go wrong, who could be affected, what safeguards are needed, and what evidence should be reviewed before use.</a:t>
             </a:r>
             <a:endParaRPr lang="en-US" sz="1320" dirty="0"/>
           </a:p>
@@ -3937,11 +3937,11 @@
         <p:spPr>
           <a:xfrm>
             <a:off x="7635240" y="1325880"/>
-            <a:ext cx="3474720" cy="1325880"/>
+            <a:ext cx="3474720" cy="1207008"/>
           </a:xfrm>
           <a:prstGeom prst="roundRect">
             <a:avLst>
-              <a:gd name="adj" fmla="val 8276"/>
+              <a:gd name="adj" fmla="val 9091"/>
             </a:avLst>
           </a:prstGeom>
           <a:solidFill>
@@ -4003,7 +4003,7 @@
         <p:spPr>
           <a:xfrm>
             <a:off x="7799832" y="1801368"/>
-            <a:ext cx="3145536" cy="758952"/>
+            <a:ext cx="3145536" cy="640080"/>
           </a:xfrm>
           <a:prstGeom prst="rect">
             <a:avLst/>
@@ -4029,7 +4029,7 @@
                 <a:ea typeface="Aptos" pitchFamily="34" charset="-122"/>
                 <a:cs typeface="Aptos" pitchFamily="34" charset="-120"/>
               </a:rPr>
-              <a:t>Generative AI adoption requires training on review, citation, privacy, and public records.</a:t>
+              <a:t>Generative AI adoption requires training on review, citation, privacy, and public.</a:t>
             </a:r>
             <a:endParaRPr lang="en-US" sz="1320" dirty="0"/>
           </a:p>
@@ -4043,12 +4043,12 @@
         </p:nvSpPr>
         <p:spPr>
           <a:xfrm>
-            <a:off x="7635240" y="2788920"/>
-            <a:ext cx="3474720" cy="1536192"/>
+            <a:off x="7635240" y="2670048"/>
+            <a:ext cx="3474720" cy="1377086"/>
           </a:xfrm>
           <a:prstGeom prst="roundRect">
             <a:avLst>
-              <a:gd name="adj" fmla="val 7143"/>
+              <a:gd name="adj" fmla="val 7968"/>
             </a:avLst>
           </a:prstGeom>
           <a:solidFill>
@@ -4070,7 +4070,7 @@
         </p:nvSpPr>
         <p:spPr>
           <a:xfrm>
-            <a:off x="7799832" y="2935224"/>
+            <a:off x="7799832" y="2816352"/>
             <a:ext cx="3145536" cy="256032"/>
           </a:xfrm>
           <a:prstGeom prst="rect">
@@ -4109,8 +4109,8 @@
         </p:nvSpPr>
         <p:spPr>
           <a:xfrm>
-            <a:off x="7818120" y="3300984"/>
-            <a:ext cx="3090672" cy="877824"/>
+            <a:off x="7818120" y="3182112"/>
+            <a:ext cx="3090672" cy="718718"/>
           </a:xfrm>
           <a:prstGeom prst="rect">
             <a:avLst/>
@@ -4167,12 +4167,12 @@
         </p:nvSpPr>
         <p:spPr>
           <a:xfrm>
-            <a:off x="7635240" y="4498848"/>
-            <a:ext cx="3474720" cy="1143000"/>
+            <a:off x="7635240" y="4184294"/>
+            <a:ext cx="3474720" cy="1466698"/>
           </a:xfrm>
           <a:prstGeom prst="roundRect">
             <a:avLst>
-              <a:gd name="adj" fmla="val 9600"/>
+              <a:gd name="adj" fmla="val 7481"/>
             </a:avLst>
           </a:prstGeom>
           <a:solidFill>
@@ -4194,7 +4194,7 @@
         </p:nvSpPr>
         <p:spPr>
           <a:xfrm>
-            <a:off x="7799832" y="4645152"/>
+            <a:off x="7799832" y="4330598"/>
             <a:ext cx="3145536" cy="256032"/>
           </a:xfrm>
           <a:prstGeom prst="rect">
@@ -4233,8 +4233,8 @@
         </p:nvSpPr>
         <p:spPr>
           <a:xfrm>
-            <a:off x="7799832" y="4974336"/>
-            <a:ext cx="3145536" cy="576072"/>
+            <a:off x="7799832" y="4659782"/>
+            <a:ext cx="3145536" cy="899770"/>
           </a:xfrm>
           <a:prstGeom prst="rect">
             <a:avLst/>
@@ -4260,7 +4260,7 @@
                 <a:ea typeface="Aptos" pitchFamily="34" charset="-122"/>
                 <a:cs typeface="Aptos" pitchFamily="34" charset="-120"/>
               </a:rPr>
-              <a:t>Use the concept to clarify workflow changes, dependencies, staffing, procurement requirements, training needs, and.</a:t>
+              <a:t>Use the concept to clarify workflow changes, dependencies, staffing, procurement requirements, training needs, and implementation checkpoints.</a:t>
             </a:r>
             <a:endParaRPr lang="en-US" sz="1320" dirty="0"/>
           </a:p>
@@ -4629,11 +4629,11 @@
         <p:spPr>
           <a:xfrm>
             <a:off x="7635240" y="1325880"/>
-            <a:ext cx="3474720" cy="1325880"/>
+            <a:ext cx="3474720" cy="1255471"/>
           </a:xfrm>
           <a:prstGeom prst="roundRect">
             <a:avLst>
-              <a:gd name="adj" fmla="val 8276"/>
+              <a:gd name="adj" fmla="val 8740"/>
             </a:avLst>
           </a:prstGeom>
           <a:solidFill>
@@ -4695,7 +4695,7 @@
         <p:spPr>
           <a:xfrm>
             <a:off x="7799832" y="1801368"/>
-            <a:ext cx="3145536" cy="758952"/>
+            <a:ext cx="3145536" cy="688543"/>
           </a:xfrm>
           <a:prstGeom prst="rect">
             <a:avLst/>
@@ -4735,12 +4735,12 @@
         </p:nvSpPr>
         <p:spPr>
           <a:xfrm>
-            <a:off x="7635240" y="2788920"/>
-            <a:ext cx="3474720" cy="1536192"/>
+            <a:off x="7635240" y="2718511"/>
+            <a:ext cx="3474720" cy="1328623"/>
           </a:xfrm>
           <a:prstGeom prst="roundRect">
             <a:avLst>
-              <a:gd name="adj" fmla="val 7143"/>
+              <a:gd name="adj" fmla="val 8259"/>
             </a:avLst>
           </a:prstGeom>
           <a:solidFill>
@@ -4762,7 +4762,7 @@
         </p:nvSpPr>
         <p:spPr>
           <a:xfrm>
-            <a:off x="7799832" y="2935224"/>
+            <a:off x="7799832" y="2864815"/>
             <a:ext cx="3145536" cy="256032"/>
           </a:xfrm>
           <a:prstGeom prst="rect">
@@ -4801,8 +4801,8 @@
         </p:nvSpPr>
         <p:spPr>
           <a:xfrm>
-            <a:off x="7818120" y="3300984"/>
-            <a:ext cx="3090672" cy="877824"/>
+            <a:off x="7818120" y="3230575"/>
+            <a:ext cx="3090672" cy="670255"/>
           </a:xfrm>
           <a:prstGeom prst="rect">
             <a:avLst/>
@@ -4876,12 +4876,12 @@
         </p:nvSpPr>
         <p:spPr>
           <a:xfrm>
-            <a:off x="7635240" y="4498848"/>
-            <a:ext cx="3474720" cy="1143000"/>
+            <a:off x="7635240" y="4184294"/>
+            <a:ext cx="3474720" cy="1466698"/>
           </a:xfrm>
           <a:prstGeom prst="roundRect">
             <a:avLst>
-              <a:gd name="adj" fmla="val 9600"/>
+              <a:gd name="adj" fmla="val 7481"/>
             </a:avLst>
           </a:prstGeom>
           <a:solidFill>
@@ -4903,7 +4903,7 @@
         </p:nvSpPr>
         <p:spPr>
           <a:xfrm>
-            <a:off x="7799832" y="4645152"/>
+            <a:off x="7799832" y="4330598"/>
             <a:ext cx="3145536" cy="256032"/>
           </a:xfrm>
           <a:prstGeom prst="rect">
@@ -4942,8 +4942,8 @@
         </p:nvSpPr>
         <p:spPr>
           <a:xfrm>
-            <a:off x="7799832" y="4974336"/>
-            <a:ext cx="3145536" cy="576072"/>
+            <a:off x="7799832" y="4659782"/>
+            <a:ext cx="3145536" cy="899770"/>
           </a:xfrm>
           <a:prstGeom prst="rect">
             <a:avLst/>
@@ -4969,7 +4969,7 @@
                 <a:ea typeface="Aptos" pitchFamily="34" charset="-122"/>
                 <a:cs typeface="Aptos" pitchFamily="34" charset="-120"/>
               </a:rPr>
-              <a:t>Use the concept to clarify workflow changes, dependencies, staffing, procurement requirements, training needs, and.</a:t>
+              <a:t>Use the concept to clarify workflow changes, dependencies, staffing, procurement requirements, training needs, and implementation checkpoints.</a:t>
             </a:r>
             <a:endParaRPr lang="en-US" sz="1320" dirty="0"/>
           </a:p>
@@ -5321,11 +5321,11 @@
         <p:spPr>
           <a:xfrm>
             <a:off x="7635240" y="1325880"/>
-            <a:ext cx="3474720" cy="1325880"/>
+            <a:ext cx="3474720" cy="1207008"/>
           </a:xfrm>
           <a:prstGeom prst="roundRect">
             <a:avLst>
-              <a:gd name="adj" fmla="val 8276"/>
+              <a:gd name="adj" fmla="val 9091"/>
             </a:avLst>
           </a:prstGeom>
           <a:solidFill>
@@ -5387,7 +5387,7 @@
         <p:spPr>
           <a:xfrm>
             <a:off x="7799832" y="1801368"/>
-            <a:ext cx="3145536" cy="758952"/>
+            <a:ext cx="3145536" cy="640080"/>
           </a:xfrm>
           <a:prstGeom prst="rect">
             <a:avLst/>
@@ -5413,7 +5413,7 @@
                 <a:ea typeface="Aptos" pitchFamily="34" charset="-122"/>
                 <a:cs typeface="Aptos" pitchFamily="34" charset="-120"/>
               </a:rPr>
-              <a:t>Which staff, partners, or communities would be affected if this issue were handled poorly?</a:t>
+              <a:t>Which staff, partners, or communities would be affected if this issue were handled.</a:t>
             </a:r>
             <a:endParaRPr lang="en-US" sz="1320" dirty="0"/>
           </a:p>
@@ -5427,12 +5427,12 @@
         </p:nvSpPr>
         <p:spPr>
           <a:xfrm>
-            <a:off x="7635240" y="2788920"/>
-            <a:ext cx="3474720" cy="1536192"/>
+            <a:off x="7635240" y="2670048"/>
+            <a:ext cx="3474720" cy="1377086"/>
           </a:xfrm>
           <a:prstGeom prst="roundRect">
             <a:avLst>
-              <a:gd name="adj" fmla="val 7143"/>
+              <a:gd name="adj" fmla="val 7968"/>
             </a:avLst>
           </a:prstGeom>
           <a:solidFill>
@@ -5454,7 +5454,7 @@
         </p:nvSpPr>
         <p:spPr>
           <a:xfrm>
-            <a:off x="7799832" y="2935224"/>
+            <a:off x="7799832" y="2816352"/>
             <a:ext cx="3145536" cy="256032"/>
           </a:xfrm>
           <a:prstGeom prst="rect">
@@ -5493,8 +5493,8 @@
         </p:nvSpPr>
         <p:spPr>
           <a:xfrm>
-            <a:off x="7818120" y="3300984"/>
-            <a:ext cx="3090672" cy="877824"/>
+            <a:off x="7818120" y="3182112"/>
+            <a:ext cx="3090672" cy="718718"/>
           </a:xfrm>
           <a:prstGeom prst="rect">
             <a:avLst/>
@@ -5551,12 +5551,12 @@
         </p:nvSpPr>
         <p:spPr>
           <a:xfrm>
-            <a:off x="7635240" y="4498848"/>
-            <a:ext cx="3474720" cy="1143000"/>
+            <a:off x="7635240" y="4184294"/>
+            <a:ext cx="3474720" cy="1466698"/>
           </a:xfrm>
           <a:prstGeom prst="roundRect">
             <a:avLst>
-              <a:gd name="adj" fmla="val 9600"/>
+              <a:gd name="adj" fmla="val 7481"/>
             </a:avLst>
           </a:prstGeom>
           <a:solidFill>
@@ -5578,7 +5578,7 @@
         </p:nvSpPr>
         <p:spPr>
           <a:xfrm>
-            <a:off x="7799832" y="4645152"/>
+            <a:off x="7799832" y="4330598"/>
             <a:ext cx="3145536" cy="256032"/>
           </a:xfrm>
           <a:prstGeom prst="rect">
@@ -5617,8 +5617,8 @@
         </p:nvSpPr>
         <p:spPr>
           <a:xfrm>
-            <a:off x="7799832" y="4974336"/>
-            <a:ext cx="3145536" cy="576072"/>
+            <a:off x="7799832" y="4659782"/>
+            <a:ext cx="3145536" cy="899770"/>
           </a:xfrm>
           <a:prstGeom prst="rect">
             <a:avLst/>
@@ -5644,7 +5644,7 @@
                 <a:ea typeface="Aptos" pitchFamily="34" charset="-122"/>
                 <a:cs typeface="Aptos" pitchFamily="34" charset="-120"/>
               </a:rPr>
-              <a:t>Use the concept to clarify workflow changes, dependencies, staffing, procurement requirements, training needs, and.</a:t>
+              <a:t>Use the concept to clarify workflow changes, dependencies, staffing, procurement requirements, training needs, and implementation checkpoints.</a:t>
             </a:r>
             <a:endParaRPr lang="en-US" sz="1320" dirty="0"/>
           </a:p>
@@ -5996,11 +5996,11 @@
         <p:spPr>
           <a:xfrm>
             <a:off x="7635240" y="1325880"/>
-            <a:ext cx="3474720" cy="1325880"/>
+            <a:ext cx="3474720" cy="1207008"/>
           </a:xfrm>
           <a:prstGeom prst="roundRect">
             <a:avLst>
-              <a:gd name="adj" fmla="val 8276"/>
+              <a:gd name="adj" fmla="val 9091"/>
             </a:avLst>
           </a:prstGeom>
           <a:solidFill>
@@ -6062,7 +6062,7 @@
         <p:spPr>
           <a:xfrm>
             <a:off x="7799832" y="1801368"/>
-            <a:ext cx="3145536" cy="758952"/>
+            <a:ext cx="3145536" cy="640080"/>
           </a:xfrm>
           <a:prstGeom prst="rect">
             <a:avLst/>
@@ -6102,12 +6102,12 @@
         </p:nvSpPr>
         <p:spPr>
           <a:xfrm>
-            <a:off x="7635240" y="2788920"/>
-            <a:ext cx="3474720" cy="1536192"/>
+            <a:off x="7635240" y="2670048"/>
+            <a:ext cx="3474720" cy="1377086"/>
           </a:xfrm>
           <a:prstGeom prst="roundRect">
             <a:avLst>
-              <a:gd name="adj" fmla="val 7143"/>
+              <a:gd name="adj" fmla="val 7968"/>
             </a:avLst>
           </a:prstGeom>
           <a:solidFill>
@@ -6129,7 +6129,7 @@
         </p:nvSpPr>
         <p:spPr>
           <a:xfrm>
-            <a:off x="7799832" y="2935224"/>
+            <a:off x="7799832" y="2816352"/>
             <a:ext cx="3145536" cy="256032"/>
           </a:xfrm>
           <a:prstGeom prst="rect">
@@ -6168,8 +6168,8 @@
         </p:nvSpPr>
         <p:spPr>
           <a:xfrm>
-            <a:off x="7818120" y="3300984"/>
-            <a:ext cx="3090672" cy="877824"/>
+            <a:off x="7818120" y="3182112"/>
+            <a:ext cx="3090672" cy="718718"/>
           </a:xfrm>
           <a:prstGeom prst="rect">
             <a:avLst/>
@@ -6226,12 +6226,12 @@
         </p:nvSpPr>
         <p:spPr>
           <a:xfrm>
-            <a:off x="7635240" y="4498848"/>
-            <a:ext cx="3474720" cy="1143000"/>
+            <a:off x="7635240" y="4184294"/>
+            <a:ext cx="3474720" cy="1466698"/>
           </a:xfrm>
           <a:prstGeom prst="roundRect">
             <a:avLst>
-              <a:gd name="adj" fmla="val 9600"/>
+              <a:gd name="adj" fmla="val 7481"/>
             </a:avLst>
           </a:prstGeom>
           <a:solidFill>
@@ -6253,7 +6253,7 @@
         </p:nvSpPr>
         <p:spPr>
           <a:xfrm>
-            <a:off x="7799832" y="4645152"/>
+            <a:off x="7799832" y="4330598"/>
             <a:ext cx="3145536" cy="256032"/>
           </a:xfrm>
           <a:prstGeom prst="rect">
@@ -6292,8 +6292,8 @@
         </p:nvSpPr>
         <p:spPr>
           <a:xfrm>
-            <a:off x="7799832" y="4974336"/>
-            <a:ext cx="3145536" cy="576072"/>
+            <a:off x="7799832" y="4659782"/>
+            <a:ext cx="3145536" cy="899770"/>
           </a:xfrm>
           <a:prstGeom prst="rect">
             <a:avLst/>
@@ -6319,7 +6319,7 @@
                 <a:ea typeface="Aptos" pitchFamily="34" charset="-122"/>
                 <a:cs typeface="Aptos" pitchFamily="34" charset="-120"/>
               </a:rPr>
-              <a:t>Use the assignment to test whether you can explain the concept, apply it to a realistic public health situation, and.</a:t>
+              <a:t>Use the assignment to test whether you can explain the concept, apply it to a realistic public health situation, and identify what would need review before the work moves forward.</a:t>
             </a:r>
             <a:endParaRPr lang="en-US" sz="1320" dirty="0"/>
           </a:p>
@@ -6688,11 +6688,11 @@
         <p:spPr>
           <a:xfrm>
             <a:off x="7635240" y="1325880"/>
-            <a:ext cx="3474720" cy="1325880"/>
+            <a:ext cx="3474720" cy="1207008"/>
           </a:xfrm>
           <a:prstGeom prst="roundRect">
             <a:avLst>
-              <a:gd name="adj" fmla="val 8276"/>
+              <a:gd name="adj" fmla="val 9091"/>
             </a:avLst>
           </a:prstGeom>
           <a:solidFill>
@@ -6754,7 +6754,7 @@
         <p:spPr>
           <a:xfrm>
             <a:off x="7799832" y="1801368"/>
-            <a:ext cx="3145536" cy="758952"/>
+            <a:ext cx="3145536" cy="640080"/>
           </a:xfrm>
           <a:prstGeom prst="rect">
             <a:avLst/>
@@ -6794,12 +6794,12 @@
         </p:nvSpPr>
         <p:spPr>
           <a:xfrm>
-            <a:off x="7635240" y="2788920"/>
-            <a:ext cx="3474720" cy="1536192"/>
+            <a:off x="7635240" y="2670048"/>
+            <a:ext cx="3474720" cy="1377086"/>
           </a:xfrm>
           <a:prstGeom prst="roundRect">
             <a:avLst>
-              <a:gd name="adj" fmla="val 7143"/>
+              <a:gd name="adj" fmla="val 7968"/>
             </a:avLst>
           </a:prstGeom>
           <a:solidFill>
@@ -6821,7 +6821,7 @@
         </p:nvSpPr>
         <p:spPr>
           <a:xfrm>
-            <a:off x="7799832" y="2935224"/>
+            <a:off x="7799832" y="2816352"/>
             <a:ext cx="3145536" cy="256032"/>
           </a:xfrm>
           <a:prstGeom prst="rect">
@@ -6860,8 +6860,8 @@
         </p:nvSpPr>
         <p:spPr>
           <a:xfrm>
-            <a:off x="7818120" y="3300984"/>
-            <a:ext cx="3090672" cy="877824"/>
+            <a:off x="7818120" y="3182112"/>
+            <a:ext cx="3090672" cy="718718"/>
           </a:xfrm>
           <a:prstGeom prst="rect">
             <a:avLst/>
@@ -6918,12 +6918,12 @@
         </p:nvSpPr>
         <p:spPr>
           <a:xfrm>
-            <a:off x="7635240" y="4498848"/>
-            <a:ext cx="3474720" cy="1143000"/>
+            <a:off x="7635240" y="4184294"/>
+            <a:ext cx="3474720" cy="1466698"/>
           </a:xfrm>
           <a:prstGeom prst="roundRect">
             <a:avLst>
-              <a:gd name="adj" fmla="val 9600"/>
+              <a:gd name="adj" fmla="val 7481"/>
             </a:avLst>
           </a:prstGeom>
           <a:solidFill>
@@ -6945,7 +6945,7 @@
         </p:nvSpPr>
         <p:spPr>
           <a:xfrm>
-            <a:off x="7799832" y="4645152"/>
+            <a:off x="7799832" y="4330598"/>
             <a:ext cx="3145536" cy="256032"/>
           </a:xfrm>
           <a:prstGeom prst="rect">
@@ -6984,8 +6984,8 @@
         </p:nvSpPr>
         <p:spPr>
           <a:xfrm>
-            <a:off x="7799832" y="4974336"/>
-            <a:ext cx="3145536" cy="576072"/>
+            <a:off x="7799832" y="4659782"/>
+            <a:ext cx="3145536" cy="899770"/>
           </a:xfrm>
           <a:prstGeom prst="rect">
             <a:avLst/>
@@ -7011,7 +7011,7 @@
                 <a:ea typeface="Aptos" pitchFamily="34" charset="-122"/>
                 <a:cs typeface="Aptos" pitchFamily="34" charset="-120"/>
               </a:rPr>
-              <a:t>Use the concept to clarify workflow changes, dependencies, staffing, procurement requirements, training needs, and.</a:t>
+              <a:t>Use the concept to clarify workflow changes, dependencies, staffing, procurement requirements, training needs, and implementation checkpoints.</a:t>
             </a:r>
             <a:endParaRPr lang="en-US" sz="1320" dirty="0"/>
           </a:p>
@@ -7346,11 +7346,11 @@
         <p:spPr>
           <a:xfrm>
             <a:off x="7635240" y="1325880"/>
-            <a:ext cx="3474720" cy="1325880"/>
+            <a:ext cx="3474720" cy="1255471"/>
           </a:xfrm>
           <a:prstGeom prst="roundRect">
             <a:avLst>
-              <a:gd name="adj" fmla="val 8276"/>
+              <a:gd name="adj" fmla="val 8740"/>
             </a:avLst>
           </a:prstGeom>
           <a:solidFill>
@@ -7412,7 +7412,7 @@
         <p:spPr>
           <a:xfrm>
             <a:off x="7799832" y="1801368"/>
-            <a:ext cx="3145536" cy="758952"/>
+            <a:ext cx="3145536" cy="688543"/>
           </a:xfrm>
           <a:prstGeom prst="rect">
             <a:avLst/>
@@ -7452,12 +7452,12 @@
         </p:nvSpPr>
         <p:spPr>
           <a:xfrm>
-            <a:off x="7635240" y="2788920"/>
-            <a:ext cx="3474720" cy="1536192"/>
+            <a:off x="7635240" y="2718511"/>
+            <a:ext cx="3474720" cy="1328623"/>
           </a:xfrm>
           <a:prstGeom prst="roundRect">
             <a:avLst>
-              <a:gd name="adj" fmla="val 7143"/>
+              <a:gd name="adj" fmla="val 8259"/>
             </a:avLst>
           </a:prstGeom>
           <a:solidFill>
@@ -7479,7 +7479,7 @@
         </p:nvSpPr>
         <p:spPr>
           <a:xfrm>
-            <a:off x="7799832" y="2935224"/>
+            <a:off x="7799832" y="2864815"/>
             <a:ext cx="3145536" cy="256032"/>
           </a:xfrm>
           <a:prstGeom prst="rect">
@@ -7518,8 +7518,8 @@
         </p:nvSpPr>
         <p:spPr>
           <a:xfrm>
-            <a:off x="7818120" y="3300984"/>
-            <a:ext cx="3090672" cy="877824"/>
+            <a:off x="7818120" y="3230575"/>
+            <a:ext cx="3090672" cy="670255"/>
           </a:xfrm>
           <a:prstGeom prst="rect">
             <a:avLst/>
@@ -7559,12 +7559,12 @@
         </p:nvSpPr>
         <p:spPr>
           <a:xfrm>
-            <a:off x="7635240" y="4498848"/>
-            <a:ext cx="3474720" cy="1143000"/>
+            <a:off x="7635240" y="4184294"/>
+            <a:ext cx="3474720" cy="1466698"/>
           </a:xfrm>
           <a:prstGeom prst="roundRect">
             <a:avLst>
-              <a:gd name="adj" fmla="val 9600"/>
+              <a:gd name="adj" fmla="val 7481"/>
             </a:avLst>
           </a:prstGeom>
           <a:solidFill>
@@ -7586,7 +7586,7 @@
         </p:nvSpPr>
         <p:spPr>
           <a:xfrm>
-            <a:off x="7799832" y="4645152"/>
+            <a:off x="7799832" y="4330598"/>
             <a:ext cx="3145536" cy="256032"/>
           </a:xfrm>
           <a:prstGeom prst="rect">
@@ -7625,8 +7625,8 @@
         </p:nvSpPr>
         <p:spPr>
           <a:xfrm>
-            <a:off x="7799832" y="4974336"/>
-            <a:ext cx="3145536" cy="576072"/>
+            <a:off x="7799832" y="4659782"/>
+            <a:ext cx="3145536" cy="899770"/>
           </a:xfrm>
           <a:prstGeom prst="rect">
             <a:avLst/>
@@ -7652,7 +7652,7 @@
                 <a:ea typeface="Aptos" pitchFamily="34" charset="-122"/>
                 <a:cs typeface="Aptos" pitchFamily="34" charset="-120"/>
               </a:rPr>
-              <a:t>Use the concept to clarify workflow changes, dependencies, staffing, procurement requirements, training needs, and.</a:t>
+              <a:t>Use the concept to clarify workflow changes, dependencies, staffing, procurement requirements, training needs, and implementation checkpoints.</a:t>
             </a:r>
             <a:endParaRPr lang="en-US" sz="1320" dirty="0"/>
           </a:p>
@@ -7987,11 +7987,11 @@
         <p:spPr>
           <a:xfrm>
             <a:off x="7635240" y="1325880"/>
-            <a:ext cx="3474720" cy="1325880"/>
+            <a:ext cx="3474720" cy="1255471"/>
           </a:xfrm>
           <a:prstGeom prst="roundRect">
             <a:avLst>
-              <a:gd name="adj" fmla="val 8276"/>
+              <a:gd name="adj" fmla="val 8740"/>
             </a:avLst>
           </a:prstGeom>
           <a:solidFill>
@@ -8053,7 +8053,7 @@
         <p:spPr>
           <a:xfrm>
             <a:off x="7799832" y="1801368"/>
-            <a:ext cx="3145536" cy="758952"/>
+            <a:ext cx="3145536" cy="688543"/>
           </a:xfrm>
           <a:prstGeom prst="rect">
             <a:avLst/>
@@ -8093,12 +8093,12 @@
         </p:nvSpPr>
         <p:spPr>
           <a:xfrm>
-            <a:off x="7635240" y="2788920"/>
-            <a:ext cx="3474720" cy="1536192"/>
+            <a:off x="7635240" y="2718511"/>
+            <a:ext cx="3474720" cy="1328623"/>
           </a:xfrm>
           <a:prstGeom prst="roundRect">
             <a:avLst>
-              <a:gd name="adj" fmla="val 7143"/>
+              <a:gd name="adj" fmla="val 8259"/>
             </a:avLst>
           </a:prstGeom>
           <a:solidFill>
@@ -8120,7 +8120,7 @@
         </p:nvSpPr>
         <p:spPr>
           <a:xfrm>
-            <a:off x="7799832" y="2935224"/>
+            <a:off x="7799832" y="2864815"/>
             <a:ext cx="3145536" cy="256032"/>
           </a:xfrm>
           <a:prstGeom prst="rect">
@@ -8159,8 +8159,8 @@
         </p:nvSpPr>
         <p:spPr>
           <a:xfrm>
-            <a:off x="7818120" y="3300984"/>
-            <a:ext cx="3090672" cy="877824"/>
+            <a:off x="7818120" y="3230575"/>
+            <a:ext cx="3090672" cy="670255"/>
           </a:xfrm>
           <a:prstGeom prst="rect">
             <a:avLst/>
@@ -8200,12 +8200,12 @@
         </p:nvSpPr>
         <p:spPr>
           <a:xfrm>
-            <a:off x="7635240" y="4498848"/>
-            <a:ext cx="3474720" cy="1143000"/>
+            <a:off x="7635240" y="4184294"/>
+            <a:ext cx="3474720" cy="1466698"/>
           </a:xfrm>
           <a:prstGeom prst="roundRect">
             <a:avLst>
-              <a:gd name="adj" fmla="val 9600"/>
+              <a:gd name="adj" fmla="val 7481"/>
             </a:avLst>
           </a:prstGeom>
           <a:solidFill>
@@ -8227,7 +8227,7 @@
         </p:nvSpPr>
         <p:spPr>
           <a:xfrm>
-            <a:off x="7799832" y="4645152"/>
+            <a:off x="7799832" y="4330598"/>
             <a:ext cx="3145536" cy="256032"/>
           </a:xfrm>
           <a:prstGeom prst="rect">
@@ -8266,8 +8266,8 @@
         </p:nvSpPr>
         <p:spPr>
           <a:xfrm>
-            <a:off x="7799832" y="4974336"/>
-            <a:ext cx="3145536" cy="576072"/>
+            <a:off x="7799832" y="4659782"/>
+            <a:ext cx="3145536" cy="899770"/>
           </a:xfrm>
           <a:prstGeom prst="rect">
             <a:avLst/>
@@ -8293,7 +8293,7 @@
                 <a:ea typeface="Aptos" pitchFamily="34" charset="-122"/>
                 <a:cs typeface="Aptos" pitchFamily="34" charset="-120"/>
               </a:rPr>
-              <a:t>Use the assignment to test whether you can explain the concept, apply it to a realistic public health situation, and.</a:t>
+              <a:t>Use the assignment to test whether you can explain the concept, apply it to a realistic public health situation, and identify what would need review before the work moves forward.</a:t>
             </a:r>
             <a:endParaRPr lang="en-US" sz="1320" dirty="0"/>
           </a:p>
@@ -8662,11 +8662,11 @@
         <p:spPr>
           <a:xfrm>
             <a:off x="7635240" y="1325880"/>
-            <a:ext cx="3474720" cy="1325880"/>
+            <a:ext cx="3474720" cy="1255471"/>
           </a:xfrm>
           <a:prstGeom prst="roundRect">
             <a:avLst>
-              <a:gd name="adj" fmla="val 8276"/>
+              <a:gd name="adj" fmla="val 8740"/>
             </a:avLst>
           </a:prstGeom>
           <a:solidFill>
@@ -8728,7 +8728,7 @@
         <p:spPr>
           <a:xfrm>
             <a:off x="7799832" y="1801368"/>
-            <a:ext cx="3145536" cy="758952"/>
+            <a:ext cx="3145536" cy="688543"/>
           </a:xfrm>
           <a:prstGeom prst="rect">
             <a:avLst/>
@@ -8768,12 +8768,12 @@
         </p:nvSpPr>
         <p:spPr>
           <a:xfrm>
-            <a:off x="7635240" y="2788920"/>
-            <a:ext cx="3474720" cy="1536192"/>
+            <a:off x="7635240" y="2718511"/>
+            <a:ext cx="3474720" cy="1328623"/>
           </a:xfrm>
           <a:prstGeom prst="roundRect">
             <a:avLst>
-              <a:gd name="adj" fmla="val 7143"/>
+              <a:gd name="adj" fmla="val 8259"/>
             </a:avLst>
           </a:prstGeom>
           <a:solidFill>
@@ -8795,7 +8795,7 @@
         </p:nvSpPr>
         <p:spPr>
           <a:xfrm>
-            <a:off x="7799832" y="2935224"/>
+            <a:off x="7799832" y="2864815"/>
             <a:ext cx="3145536" cy="256032"/>
           </a:xfrm>
           <a:prstGeom prst="rect">
@@ -8834,8 +8834,8 @@
         </p:nvSpPr>
         <p:spPr>
           <a:xfrm>
-            <a:off x="7818120" y="3300984"/>
-            <a:ext cx="3090672" cy="877824"/>
+            <a:off x="7818120" y="3230575"/>
+            <a:ext cx="3090672" cy="670255"/>
           </a:xfrm>
           <a:prstGeom prst="rect">
             <a:avLst/>
@@ -8909,12 +8909,12 @@
         </p:nvSpPr>
         <p:spPr>
           <a:xfrm>
-            <a:off x="7635240" y="4498848"/>
-            <a:ext cx="3474720" cy="1143000"/>
+            <a:off x="7635240" y="4184294"/>
+            <a:ext cx="3474720" cy="1466698"/>
           </a:xfrm>
           <a:prstGeom prst="roundRect">
             <a:avLst>
-              <a:gd name="adj" fmla="val 9600"/>
+              <a:gd name="adj" fmla="val 7481"/>
             </a:avLst>
           </a:prstGeom>
           <a:solidFill>
@@ -8936,7 +8936,7 @@
         </p:nvSpPr>
         <p:spPr>
           <a:xfrm>
-            <a:off x="7799832" y="4645152"/>
+            <a:off x="7799832" y="4330598"/>
             <a:ext cx="3145536" cy="256032"/>
           </a:xfrm>
           <a:prstGeom prst="rect">
@@ -8975,8 +8975,8 @@
         </p:nvSpPr>
         <p:spPr>
           <a:xfrm>
-            <a:off x="7799832" y="4974336"/>
-            <a:ext cx="3145536" cy="576072"/>
+            <a:off x="7799832" y="4659782"/>
+            <a:ext cx="3145536" cy="899770"/>
           </a:xfrm>
           <a:prstGeom prst="rect">
             <a:avLst/>
@@ -9002,7 +9002,7 @@
                 <a:ea typeface="Aptos" pitchFamily="34" charset="-122"/>
                 <a:cs typeface="Aptos" pitchFamily="34" charset="-120"/>
               </a:rPr>
-              <a:t>Use the assignment to test whether you can explain the concept, apply it to a realistic public health situation, and.</a:t>
+              <a:t>Use the assignment to test whether you can explain the concept, apply it to a realistic public health situation, and identify what would need review before the work moves forward.</a:t>
             </a:r>
             <a:endParaRPr lang="en-US" sz="1320" dirty="0"/>
           </a:p>
@@ -9371,11 +9371,11 @@
         <p:spPr>
           <a:xfrm>
             <a:off x="7635240" y="1325880"/>
-            <a:ext cx="3474720" cy="1325880"/>
+            <a:ext cx="3474720" cy="1207008"/>
           </a:xfrm>
           <a:prstGeom prst="roundRect">
             <a:avLst>
-              <a:gd name="adj" fmla="val 8276"/>
+              <a:gd name="adj" fmla="val 9091"/>
             </a:avLst>
           </a:prstGeom>
           <a:solidFill>
@@ -9437,7 +9437,7 @@
         <p:spPr>
           <a:xfrm>
             <a:off x="7799832" y="1801368"/>
-            <a:ext cx="3145536" cy="758952"/>
+            <a:ext cx="3145536" cy="640080"/>
           </a:xfrm>
           <a:prstGeom prst="rect">
             <a:avLst/>
@@ -9477,12 +9477,12 @@
         </p:nvSpPr>
         <p:spPr>
           <a:xfrm>
-            <a:off x="7635240" y="2788920"/>
-            <a:ext cx="3474720" cy="1536192"/>
+            <a:off x="7635240" y="2670048"/>
+            <a:ext cx="3474720" cy="1377086"/>
           </a:xfrm>
           <a:prstGeom prst="roundRect">
             <a:avLst>
-              <a:gd name="adj" fmla="val 7143"/>
+              <a:gd name="adj" fmla="val 7968"/>
             </a:avLst>
           </a:prstGeom>
           <a:solidFill>
@@ -9504,7 +9504,7 @@
         </p:nvSpPr>
         <p:spPr>
           <a:xfrm>
-            <a:off x="7799832" y="2935224"/>
+            <a:off x="7799832" y="2816352"/>
             <a:ext cx="3145536" cy="256032"/>
           </a:xfrm>
           <a:prstGeom prst="rect">
@@ -9543,8 +9543,8 @@
         </p:nvSpPr>
         <p:spPr>
           <a:xfrm>
-            <a:off x="7818120" y="3300984"/>
-            <a:ext cx="3090672" cy="877824"/>
+            <a:off x="7818120" y="3182112"/>
+            <a:ext cx="3090672" cy="718718"/>
           </a:xfrm>
           <a:prstGeom prst="rect">
             <a:avLst/>
@@ -9618,12 +9618,12 @@
         </p:nvSpPr>
         <p:spPr>
           <a:xfrm>
-            <a:off x="7635240" y="4498848"/>
-            <a:ext cx="3474720" cy="1143000"/>
+            <a:off x="7635240" y="4184294"/>
+            <a:ext cx="3474720" cy="1466698"/>
           </a:xfrm>
           <a:prstGeom prst="roundRect">
             <a:avLst>
-              <a:gd name="adj" fmla="val 9600"/>
+              <a:gd name="adj" fmla="val 7481"/>
             </a:avLst>
           </a:prstGeom>
           <a:solidFill>
@@ -9645,7 +9645,7 @@
         </p:nvSpPr>
         <p:spPr>
           <a:xfrm>
-            <a:off x="7799832" y="4645152"/>
+            <a:off x="7799832" y="4330598"/>
             <a:ext cx="3145536" cy="256032"/>
           </a:xfrm>
           <a:prstGeom prst="rect">
@@ -9684,8 +9684,8 @@
         </p:nvSpPr>
         <p:spPr>
           <a:xfrm>
-            <a:off x="7799832" y="4974336"/>
-            <a:ext cx="3145536" cy="576072"/>
+            <a:off x="7799832" y="4659782"/>
+            <a:ext cx="3145536" cy="899770"/>
           </a:xfrm>
           <a:prstGeom prst="rect">
             <a:avLst/>
@@ -9711,7 +9711,7 @@
                 <a:ea typeface="Aptos" pitchFamily="34" charset="-122"/>
                 <a:cs typeface="Aptos" pitchFamily="34" charset="-120"/>
               </a:rPr>
-              <a:t>Use the concept to clarify workflow changes, dependencies, staffing, procurement requirements, training needs, and.</a:t>
+              <a:t>Use the concept to clarify workflow changes, dependencies, staffing, procurement requirements, training needs, and implementation checkpoints.</a:t>
             </a:r>
             <a:endParaRPr lang="en-US" sz="1320" dirty="0"/>
           </a:p>
@@ -10665,11 +10665,11 @@
         <p:spPr>
           <a:xfrm>
             <a:off x="7635240" y="1325880"/>
-            <a:ext cx="3474720" cy="1325880"/>
+            <a:ext cx="3474720" cy="1255471"/>
           </a:xfrm>
           <a:prstGeom prst="roundRect">
             <a:avLst>
-              <a:gd name="adj" fmla="val 8276"/>
+              <a:gd name="adj" fmla="val 8740"/>
             </a:avLst>
           </a:prstGeom>
           <a:solidFill>
@@ -10731,7 +10731,7 @@
         <p:spPr>
           <a:xfrm>
             <a:off x="7799832" y="1801368"/>
-            <a:ext cx="3145536" cy="758952"/>
+            <a:ext cx="3145536" cy="688543"/>
           </a:xfrm>
           <a:prstGeom prst="rect">
             <a:avLst/>
@@ -10771,12 +10771,12 @@
         </p:nvSpPr>
         <p:spPr>
           <a:xfrm>
-            <a:off x="7635240" y="2788920"/>
-            <a:ext cx="3474720" cy="1536192"/>
+            <a:off x="7635240" y="2718511"/>
+            <a:ext cx="3474720" cy="1328623"/>
           </a:xfrm>
           <a:prstGeom prst="roundRect">
             <a:avLst>
-              <a:gd name="adj" fmla="val 7143"/>
+              <a:gd name="adj" fmla="val 8259"/>
             </a:avLst>
           </a:prstGeom>
           <a:solidFill>
@@ -10798,7 +10798,7 @@
         </p:nvSpPr>
         <p:spPr>
           <a:xfrm>
-            <a:off x="7799832" y="2935224"/>
+            <a:off x="7799832" y="2864815"/>
             <a:ext cx="3145536" cy="256032"/>
           </a:xfrm>
           <a:prstGeom prst="rect">
@@ -10837,8 +10837,8 @@
         </p:nvSpPr>
         <p:spPr>
           <a:xfrm>
-            <a:off x="7818120" y="3300984"/>
-            <a:ext cx="3090672" cy="877824"/>
+            <a:off x="7818120" y="3230575"/>
+            <a:ext cx="3090672" cy="670255"/>
           </a:xfrm>
           <a:prstGeom prst="rect">
             <a:avLst/>
@@ -10895,12 +10895,12 @@
         </p:nvSpPr>
         <p:spPr>
           <a:xfrm>
-            <a:off x="7635240" y="4498848"/>
-            <a:ext cx="3474720" cy="1143000"/>
+            <a:off x="7635240" y="4184294"/>
+            <a:ext cx="3474720" cy="1466698"/>
           </a:xfrm>
           <a:prstGeom prst="roundRect">
             <a:avLst>
-              <a:gd name="adj" fmla="val 9600"/>
+              <a:gd name="adj" fmla="val 7481"/>
             </a:avLst>
           </a:prstGeom>
           <a:solidFill>
@@ -10922,7 +10922,7 @@
         </p:nvSpPr>
         <p:spPr>
           <a:xfrm>
-            <a:off x="7799832" y="4645152"/>
+            <a:off x="7799832" y="4330598"/>
             <a:ext cx="3145536" cy="256032"/>
           </a:xfrm>
           <a:prstGeom prst="rect">
@@ -10961,8 +10961,8 @@
         </p:nvSpPr>
         <p:spPr>
           <a:xfrm>
-            <a:off x="7799832" y="4974336"/>
-            <a:ext cx="3145536" cy="576072"/>
+            <a:off x="7799832" y="4659782"/>
+            <a:ext cx="3145536" cy="899770"/>
           </a:xfrm>
           <a:prstGeom prst="rect">
             <a:avLst/>
@@ -10988,7 +10988,7 @@
                 <a:ea typeface="Aptos" pitchFamily="34" charset="-122"/>
                 <a:cs typeface="Aptos" pitchFamily="34" charset="-120"/>
               </a:rPr>
-              <a:t>Use the concept to clarify workflow changes, dependencies, staffing, procurement requirements, training needs, and.</a:t>
+              <a:t>Use the concept to clarify workflow changes, dependencies, staffing, procurement requirements, training needs, and implementation checkpoints.</a:t>
             </a:r>
             <a:endParaRPr lang="en-US" sz="1320" dirty="0"/>
           </a:p>
@@ -11466,7 +11466,7 @@
                 <a:ea typeface="Aptos" pitchFamily="34" charset="-122"/>
                 <a:cs typeface="Aptos" pitchFamily="34" charset="-120"/>
               </a:rPr>
-              <a:t>Use the related plays to identify decisions, participants, timing, approvals, and documentation needed for responsible.</a:t>
+              <a:t>Use the related plays to identify decisions, participants, timing, approvals, and documentation needed for responsible implementation.</a:t>
             </a:r>
             <a:endParaRPr lang="en-US" sz="1320" dirty="0"/>
           </a:p>
@@ -12085,7 +12085,7 @@
                 <a:ea typeface="Aptos" pitchFamily="34" charset="-122"/>
                 <a:cs typeface="Aptos" pitchFamily="34" charset="-120"/>
               </a:rPr>
-              <a:t>Use linked tools when your department needs a structured worksheet, template, checklist, review process, or.</a:t>
+              <a:t>Use linked tools when your department needs a structured worksheet, template, checklist, review process, or documentation artifact.</a:t>
             </a:r>
             <a:endParaRPr lang="en-US" sz="1320" dirty="0"/>
           </a:p>
@@ -12595,11 +12595,11 @@
         <p:spPr>
           <a:xfrm>
             <a:off x="7635240" y="1325880"/>
-            <a:ext cx="3474720" cy="1325880"/>
+            <a:ext cx="3474720" cy="1207008"/>
           </a:xfrm>
           <a:prstGeom prst="roundRect">
             <a:avLst>
-              <a:gd name="adj" fmla="val 8276"/>
+              <a:gd name="adj" fmla="val 9091"/>
             </a:avLst>
           </a:prstGeom>
           <a:solidFill>
@@ -12661,7 +12661,7 @@
         <p:spPr>
           <a:xfrm>
             <a:off x="7799832" y="1801368"/>
-            <a:ext cx="3145536" cy="758952"/>
+            <a:ext cx="3145536" cy="640080"/>
           </a:xfrm>
           <a:prstGeom prst="rect">
             <a:avLst/>
@@ -12701,12 +12701,12 @@
         </p:nvSpPr>
         <p:spPr>
           <a:xfrm>
-            <a:off x="7635240" y="2788920"/>
-            <a:ext cx="3474720" cy="1536192"/>
+            <a:off x="7635240" y="2670048"/>
+            <a:ext cx="3474720" cy="1377086"/>
           </a:xfrm>
           <a:prstGeom prst="roundRect">
             <a:avLst>
-              <a:gd name="adj" fmla="val 7143"/>
+              <a:gd name="adj" fmla="val 7968"/>
             </a:avLst>
           </a:prstGeom>
           <a:solidFill>
@@ -12728,7 +12728,7 @@
         </p:nvSpPr>
         <p:spPr>
           <a:xfrm>
-            <a:off x="7799832" y="2935224"/>
+            <a:off x="7799832" y="2816352"/>
             <a:ext cx="3145536" cy="256032"/>
           </a:xfrm>
           <a:prstGeom prst="rect">
@@ -12767,8 +12767,8 @@
         </p:nvSpPr>
         <p:spPr>
           <a:xfrm>
-            <a:off x="7818120" y="3300984"/>
-            <a:ext cx="3090672" cy="877824"/>
+            <a:off x="7818120" y="3182112"/>
+            <a:ext cx="3090672" cy="718718"/>
           </a:xfrm>
           <a:prstGeom prst="rect">
             <a:avLst/>
@@ -12842,12 +12842,12 @@
         </p:nvSpPr>
         <p:spPr>
           <a:xfrm>
-            <a:off x="7635240" y="4498848"/>
-            <a:ext cx="3474720" cy="1143000"/>
+            <a:off x="7635240" y="4184294"/>
+            <a:ext cx="3474720" cy="1466698"/>
           </a:xfrm>
           <a:prstGeom prst="roundRect">
             <a:avLst>
-              <a:gd name="adj" fmla="val 9600"/>
+              <a:gd name="adj" fmla="val 7481"/>
             </a:avLst>
           </a:prstGeom>
           <a:solidFill>
@@ -12869,7 +12869,7 @@
         </p:nvSpPr>
         <p:spPr>
           <a:xfrm>
-            <a:off x="7799832" y="4645152"/>
+            <a:off x="7799832" y="4330598"/>
             <a:ext cx="3145536" cy="256032"/>
           </a:xfrm>
           <a:prstGeom prst="rect">
@@ -12908,8 +12908,8 @@
         </p:nvSpPr>
         <p:spPr>
           <a:xfrm>
-            <a:off x="7799832" y="4974336"/>
-            <a:ext cx="3145536" cy="576072"/>
+            <a:off x="7799832" y="4659782"/>
+            <a:ext cx="3145536" cy="899770"/>
           </a:xfrm>
           <a:prstGeom prst="rect">
             <a:avLst/>
@@ -12935,7 +12935,7 @@
                 <a:ea typeface="Aptos" pitchFamily="34" charset="-122"/>
                 <a:cs typeface="Aptos" pitchFamily="34" charset="-120"/>
               </a:rPr>
-              <a:t>Use the assignment to test whether you can explain the concept, apply it to a realistic public health situation, and.</a:t>
+              <a:t>Use the assignment to test whether you can explain the concept, apply it to a realistic public health situation, and identify what would need review before the work moves forward.</a:t>
             </a:r>
             <a:endParaRPr lang="en-US" sz="1320" dirty="0"/>
           </a:p>
@@ -13304,11 +13304,11 @@
         <p:spPr>
           <a:xfrm>
             <a:off x="7635240" y="1325880"/>
-            <a:ext cx="3474720" cy="1325880"/>
+            <a:ext cx="3474720" cy="1255471"/>
           </a:xfrm>
           <a:prstGeom prst="roundRect">
             <a:avLst>
-              <a:gd name="adj" fmla="val 8276"/>
+              <a:gd name="adj" fmla="val 8740"/>
             </a:avLst>
           </a:prstGeom>
           <a:solidFill>
@@ -13370,7 +13370,7 @@
         <p:spPr>
           <a:xfrm>
             <a:off x="7799832" y="1801368"/>
-            <a:ext cx="3145536" cy="758952"/>
+            <a:ext cx="3145536" cy="688543"/>
           </a:xfrm>
           <a:prstGeom prst="rect">
             <a:avLst/>
@@ -13410,12 +13410,12 @@
         </p:nvSpPr>
         <p:spPr>
           <a:xfrm>
-            <a:off x="7635240" y="2788920"/>
-            <a:ext cx="3474720" cy="1536192"/>
+            <a:off x="7635240" y="2718511"/>
+            <a:ext cx="3474720" cy="1328623"/>
           </a:xfrm>
           <a:prstGeom prst="roundRect">
             <a:avLst>
-              <a:gd name="adj" fmla="val 7143"/>
+              <a:gd name="adj" fmla="val 8259"/>
             </a:avLst>
           </a:prstGeom>
           <a:solidFill>
@@ -13437,8 +13437,8 @@
         </p:nvSpPr>
         <p:spPr>
           <a:xfrm>
-            <a:off x="7799832" y="2935224"/>
-            <a:ext cx="3145536" cy="256032"/>
+            <a:off x="7799832" y="2846527"/>
+            <a:ext cx="3145536" cy="237744"/>
           </a:xfrm>
           <a:prstGeom prst="rect">
             <a:avLst/>
@@ -13454,7 +13454,7 @@
               <a:buNone/>
             </a:pPr>
             <a:r>
-              <a:rPr lang="en-US" sz="1300" b="1" dirty="0">
+              <a:rPr lang="en-US" sz="1250" b="1" dirty="0">
                 <a:solidFill>
                   <a:srgbClr val="0068B7"/>
                 </a:solidFill>
@@ -13462,101 +13462,317 @@
                 <a:ea typeface="Aptos" pitchFamily="34" charset="-122"/>
                 <a:cs typeface="Aptos" pitchFamily="34" charset="-120"/>
               </a:rPr>
-              <a:t>Concept checkpoints</a:t>
-            </a:r>
-            <a:endParaRPr lang="en-US" sz="1300" dirty="0"/>
-          </a:p>
-        </p:txBody>
-      </p:sp>
-      <p:sp>
-        <p:nvSpPr>
-          <p:cNvPr id="15" name="Text 13"/>
-          <p:cNvSpPr/>
-          <p:nvPr/>
-        </p:nvSpPr>
-        <p:spPr>
-          <a:xfrm>
-            <a:off x="7818120" y="3300984"/>
-            <a:ext cx="3090672" cy="877824"/>
-          </a:xfrm>
-          <a:prstGeom prst="rect">
-            <a:avLst/>
-          </a:prstGeom>
-          <a:noFill/>
-          <a:ln/>
-        </p:spPr>
-        <p:txBody>
-          <a:bodyPr wrap="square" lIns="508" tIns="508" rIns="508" bIns="508" rtlCol="0" anchor="t">
+              <a:t>Implementation path</a:t>
+            </a:r>
+            <a:endParaRPr lang="en-US" sz="1250" dirty="0"/>
+          </a:p>
+        </p:txBody>
+      </p:sp>
+      <p:sp>
+        <p:nvSpPr>
+          <p:cNvPr id="15" name="Shape 13"/>
+          <p:cNvSpPr/>
+          <p:nvPr/>
+        </p:nvSpPr>
+        <p:spPr>
+          <a:xfrm>
+            <a:off x="8763000" y="3399739"/>
+            <a:ext cx="164592" cy="0"/>
+          </a:xfrm>
+          <a:prstGeom prst="line">
+            <a:avLst/>
+          </a:prstGeom>
+          <a:noFill/>
+          <a:ln w="15240">
+            <a:solidFill>
+              <a:srgbClr val="8ABBD8"/>
+            </a:solidFill>
+            <a:prstDash val="solid"/>
+          </a:ln>
+        </p:spPr>
+      </p:sp>
+      <p:sp>
+        <p:nvSpPr>
+          <p:cNvPr id="16" name="Shape 14"/>
+          <p:cNvSpPr/>
+          <p:nvPr/>
+        </p:nvSpPr>
+        <p:spPr>
+          <a:xfrm>
+            <a:off x="7872984" y="3248863"/>
+            <a:ext cx="890016" cy="301752"/>
+          </a:xfrm>
+          <a:prstGeom prst="roundRect">
+            <a:avLst>
+              <a:gd name="adj" fmla="val 24242"/>
+            </a:avLst>
+          </a:prstGeom>
+          <a:solidFill>
+            <a:srgbClr val="0068B7"/>
+          </a:solidFill>
+          <a:ln w="12700">
+            <a:solidFill>
+              <a:srgbClr val="0068B7"/>
+            </a:solidFill>
+            <a:prstDash val="solid"/>
+          </a:ln>
+        </p:spPr>
+      </p:sp>
+      <p:sp>
+        <p:nvSpPr>
+          <p:cNvPr id="17" name="Text 15"/>
+          <p:cNvSpPr/>
+          <p:nvPr/>
+        </p:nvSpPr>
+        <p:spPr>
+          <a:xfrm>
+            <a:off x="7909560" y="3322015"/>
+            <a:ext cx="816864" cy="146304"/>
+          </a:xfrm>
+          <a:prstGeom prst="rect">
+            <a:avLst/>
+          </a:prstGeom>
+          <a:noFill/>
+          <a:ln/>
+        </p:spPr>
+        <p:txBody>
+          <a:bodyPr wrap="square" lIns="0" tIns="0" rIns="0" bIns="0" rtlCol="0" anchor="ctr">
             <a:normAutofit/>
           </a:bodyPr>
           <a:lstStyle/>
           <a:p>
-            <a:pPr indent="0" marL="0">
-              <a:buNone/>
-            </a:pPr>
-            <a:r>
-              <a:rPr lang="en-US" sz="1220" dirty="0">
-                <a:solidFill>
-                  <a:srgbClr val="17364A"/>
-                </a:solidFill>
-                <a:latin typeface="Aptos" pitchFamily="34" charset="0"/>
-                <a:ea typeface="Aptos" pitchFamily="34" charset="-122"/>
-                <a:cs typeface="Aptos" pitchFamily="34" charset="-120"/>
-              </a:rPr>
-              <a:t>AI adoption changes how people work, make decisions, document.</a:t>
-            </a:r>
-            <a:endParaRPr lang="en-US" sz="1220" dirty="0"/>
-          </a:p>
-          <a:p>
-            <a:pPr indent="0" marL="0">
-              <a:buNone/>
-            </a:pPr>
-            <a:r>
-              <a:rPr lang="en-US" sz="1220" dirty="0">
-                <a:solidFill>
-                  <a:srgbClr val="17364A"/>
-                </a:solidFill>
-                <a:latin typeface="Aptos" pitchFamily="34" charset="0"/>
-                <a:ea typeface="Aptos" pitchFamily="34" charset="-122"/>
-                <a:cs typeface="Aptos" pitchFamily="34" charset="-120"/>
-              </a:rPr>
-              <a:t>Staff need to understand why a tool is being introduced, how it.</a:t>
-            </a:r>
-            <a:endParaRPr lang="en-US" sz="1220" dirty="0"/>
-          </a:p>
-          <a:p>
-            <a:pPr indent="0" marL="0">
-              <a:buNone/>
-            </a:pPr>
-            <a:r>
-              <a:rPr lang="en-US" sz="1220" dirty="0">
-                <a:solidFill>
-                  <a:srgbClr val="17364A"/>
-                </a:solidFill>
-                <a:latin typeface="Aptos" pitchFamily="34" charset="0"/>
-                <a:ea typeface="Aptos" pitchFamily="34" charset="-122"/>
-                <a:cs typeface="Aptos" pitchFamily="34" charset="-120"/>
-              </a:rPr>
-              <a:t>This module helps leaders plan the organizational side of AI.</a:t>
-            </a:r>
-            <a:endParaRPr lang="en-US" sz="1220" dirty="0"/>
-          </a:p>
-        </p:txBody>
-      </p:sp>
-      <p:sp>
-        <p:nvSpPr>
-          <p:cNvPr id="16" name="Shape 14"/>
-          <p:cNvSpPr/>
-          <p:nvPr/>
-        </p:nvSpPr>
-        <p:spPr>
-          <a:xfrm>
-            <a:off x="7635240" y="4498848"/>
-            <a:ext cx="3474720" cy="1143000"/>
+            <a:pPr algn="ctr" indent="0" marL="0">
+              <a:buNone/>
+            </a:pPr>
+            <a:r>
+              <a:rPr lang="en-US" sz="880" b="1" dirty="0">
+                <a:solidFill>
+                  <a:srgbClr val="FFFFFF"/>
+                </a:solidFill>
+                <a:latin typeface="Aptos" pitchFamily="34" charset="0"/>
+                <a:ea typeface="Aptos" pitchFamily="34" charset="-122"/>
+                <a:cs typeface="Aptos" pitchFamily="34" charset="-120"/>
+              </a:rPr>
+              <a:t>Need</a:t>
+            </a:r>
+            <a:endParaRPr lang="en-US" sz="880" dirty="0"/>
+          </a:p>
+        </p:txBody>
+      </p:sp>
+      <p:sp>
+        <p:nvSpPr>
+          <p:cNvPr id="18" name="Shape 16"/>
+          <p:cNvSpPr/>
+          <p:nvPr/>
+        </p:nvSpPr>
+        <p:spPr>
+          <a:xfrm>
+            <a:off x="9817608" y="3399739"/>
+            <a:ext cx="164592" cy="0"/>
+          </a:xfrm>
+          <a:prstGeom prst="line">
+            <a:avLst/>
+          </a:prstGeom>
+          <a:noFill/>
+          <a:ln w="15240">
+            <a:solidFill>
+              <a:srgbClr val="8ABBD8"/>
+            </a:solidFill>
+            <a:prstDash val="solid"/>
+          </a:ln>
+        </p:spPr>
+      </p:sp>
+      <p:sp>
+        <p:nvSpPr>
+          <p:cNvPr id="19" name="Shape 17"/>
+          <p:cNvSpPr/>
+          <p:nvPr/>
+        </p:nvSpPr>
+        <p:spPr>
+          <a:xfrm>
+            <a:off x="8927592" y="3248863"/>
+            <a:ext cx="890016" cy="301752"/>
           </a:xfrm>
           <a:prstGeom prst="roundRect">
             <a:avLst>
-              <a:gd name="adj" fmla="val 9600"/>
+              <a:gd name="adj" fmla="val 24242"/>
+            </a:avLst>
+          </a:prstGeom>
+          <a:solidFill>
+            <a:srgbClr val="2F8A28"/>
+          </a:solidFill>
+          <a:ln w="12700">
+            <a:solidFill>
+              <a:srgbClr val="2F8A28"/>
+            </a:solidFill>
+            <a:prstDash val="solid"/>
+          </a:ln>
+        </p:spPr>
+      </p:sp>
+      <p:sp>
+        <p:nvSpPr>
+          <p:cNvPr id="20" name="Text 18"/>
+          <p:cNvSpPr/>
+          <p:nvPr/>
+        </p:nvSpPr>
+        <p:spPr>
+          <a:xfrm>
+            <a:off x="8964168" y="3322015"/>
+            <a:ext cx="816864" cy="146304"/>
+          </a:xfrm>
+          <a:prstGeom prst="rect">
+            <a:avLst/>
+          </a:prstGeom>
+          <a:noFill/>
+          <a:ln/>
+        </p:spPr>
+        <p:txBody>
+          <a:bodyPr wrap="square" lIns="0" tIns="0" rIns="0" bIns="0" rtlCol="0" anchor="ctr">
+            <a:normAutofit/>
+          </a:bodyPr>
+          <a:lstStyle/>
+          <a:p>
+            <a:pPr algn="ctr" indent="0" marL="0">
+              <a:buNone/>
+            </a:pPr>
+            <a:r>
+              <a:rPr lang="en-US" sz="880" b="1" dirty="0">
+                <a:solidFill>
+                  <a:srgbClr val="FFFFFF"/>
+                </a:solidFill>
+                <a:latin typeface="Aptos" pitchFamily="34" charset="0"/>
+                <a:ea typeface="Aptos" pitchFamily="34" charset="-122"/>
+                <a:cs typeface="Aptos" pitchFamily="34" charset="-120"/>
+              </a:rPr>
+              <a:t>Build</a:t>
+            </a:r>
+            <a:endParaRPr lang="en-US" sz="880" dirty="0"/>
+          </a:p>
+        </p:txBody>
+      </p:sp>
+      <p:sp>
+        <p:nvSpPr>
+          <p:cNvPr id="21" name="Shape 19"/>
+          <p:cNvSpPr/>
+          <p:nvPr/>
+        </p:nvSpPr>
+        <p:spPr>
+          <a:xfrm>
+            <a:off x="9982200" y="3248863"/>
+            <a:ext cx="890016" cy="301752"/>
+          </a:xfrm>
+          <a:prstGeom prst="roundRect">
+            <a:avLst>
+              <a:gd name="adj" fmla="val 24242"/>
+            </a:avLst>
+          </a:prstGeom>
+          <a:solidFill>
+            <a:srgbClr val="6A4CA3"/>
+          </a:solidFill>
+          <a:ln w="12700">
+            <a:solidFill>
+              <a:srgbClr val="6A4CA3"/>
+            </a:solidFill>
+            <a:prstDash val="solid"/>
+          </a:ln>
+        </p:spPr>
+      </p:sp>
+      <p:sp>
+        <p:nvSpPr>
+          <p:cNvPr id="22" name="Text 20"/>
+          <p:cNvSpPr/>
+          <p:nvPr/>
+        </p:nvSpPr>
+        <p:spPr>
+          <a:xfrm>
+            <a:off x="10018776" y="3322015"/>
+            <a:ext cx="816864" cy="146304"/>
+          </a:xfrm>
+          <a:prstGeom prst="rect">
+            <a:avLst/>
+          </a:prstGeom>
+          <a:noFill/>
+          <a:ln/>
+        </p:spPr>
+        <p:txBody>
+          <a:bodyPr wrap="square" lIns="0" tIns="0" rIns="0" bIns="0" rtlCol="0" anchor="ctr">
+            <a:normAutofit/>
+          </a:bodyPr>
+          <a:lstStyle/>
+          <a:p>
+            <a:pPr algn="ctr" indent="0" marL="0">
+              <a:buNone/>
+            </a:pPr>
+            <a:r>
+              <a:rPr lang="en-US" sz="880" b="1" dirty="0">
+                <a:solidFill>
+                  <a:srgbClr val="FFFFFF"/>
+                </a:solidFill>
+                <a:latin typeface="Aptos" pitchFamily="34" charset="0"/>
+                <a:ea typeface="Aptos" pitchFamily="34" charset="-122"/>
+                <a:cs typeface="Aptos" pitchFamily="34" charset="-120"/>
+              </a:rPr>
+              <a:t>Adopt</a:t>
+            </a:r>
+            <a:endParaRPr lang="en-US" sz="880" dirty="0"/>
+          </a:p>
+        </p:txBody>
+      </p:sp>
+      <p:sp>
+        <p:nvSpPr>
+          <p:cNvPr id="23" name="Text 21"/>
+          <p:cNvSpPr/>
+          <p:nvPr/>
+        </p:nvSpPr>
+        <p:spPr>
+          <a:xfrm>
+            <a:off x="7854696" y="3742639"/>
+            <a:ext cx="3035808" cy="158191"/>
+          </a:xfrm>
+          <a:prstGeom prst="rect">
+            <a:avLst/>
+          </a:prstGeom>
+          <a:noFill/>
+          <a:ln/>
+        </p:spPr>
+        <p:txBody>
+          <a:bodyPr wrap="square" lIns="254" tIns="254" rIns="254" bIns="254" rtlCol="0" anchor="t">
+            <a:normAutofit/>
+          </a:bodyPr>
+          <a:lstStyle/>
+          <a:p>
+            <a:pPr indent="0" marL="0">
+              <a:buNone/>
+            </a:pPr>
+            <a:r>
+              <a:rPr lang="en-US" sz="1120" dirty="0">
+                <a:solidFill>
+                  <a:srgbClr val="17364A"/>
+                </a:solidFill>
+                <a:latin typeface="Aptos" pitchFamily="34" charset="0"/>
+                <a:ea typeface="Aptos" pitchFamily="34" charset="-122"/>
+                <a:cs typeface="Aptos" pitchFamily="34" charset="-120"/>
+              </a:rPr>
+              <a:t>Implementation work should make dependencies, approvals, training, and sustainment visible before launch.</a:t>
+            </a:r>
+            <a:endParaRPr lang="en-US" sz="1120" dirty="0"/>
+          </a:p>
+        </p:txBody>
+      </p:sp>
+      <p:sp>
+        <p:nvSpPr>
+          <p:cNvPr id="24" name="Shape 22"/>
+          <p:cNvSpPr/>
+          <p:nvPr/>
+        </p:nvSpPr>
+        <p:spPr>
+          <a:xfrm>
+            <a:off x="7635240" y="4184294"/>
+            <a:ext cx="3474720" cy="1466698"/>
+          </a:xfrm>
+          <a:prstGeom prst="roundRect">
+            <a:avLst>
+              <a:gd name="adj" fmla="val 7481"/>
             </a:avLst>
           </a:prstGeom>
           <a:solidFill>
@@ -13572,13 +13788,13 @@
       </p:sp>
       <p:sp>
         <p:nvSpPr>
-          <p:cNvPr id="17" name="Text 15"/>
-          <p:cNvSpPr/>
-          <p:nvPr/>
-        </p:nvSpPr>
-        <p:spPr>
-          <a:xfrm>
-            <a:off x="7799832" y="4645152"/>
+          <p:cNvPr id="25" name="Text 23"/>
+          <p:cNvSpPr/>
+          <p:nvPr/>
+        </p:nvSpPr>
+        <p:spPr>
+          <a:xfrm>
+            <a:off x="7799832" y="4330598"/>
             <a:ext cx="3145536" cy="256032"/>
           </a:xfrm>
           <a:prstGeom prst="rect">
@@ -13611,14 +13827,14 @@
       </p:sp>
       <p:sp>
         <p:nvSpPr>
-          <p:cNvPr id="18" name="Text 16"/>
-          <p:cNvSpPr/>
-          <p:nvPr/>
-        </p:nvSpPr>
-        <p:spPr>
-          <a:xfrm>
-            <a:off x="7799832" y="4974336"/>
-            <a:ext cx="3145536" cy="576072"/>
+          <p:cNvPr id="26" name="Text 24"/>
+          <p:cNvSpPr/>
+          <p:nvPr/>
+        </p:nvSpPr>
+        <p:spPr>
+          <a:xfrm>
+            <a:off x="7799832" y="4659782"/>
+            <a:ext cx="3145536" cy="899770"/>
           </a:xfrm>
           <a:prstGeom prst="rect">
             <a:avLst/>
@@ -13644,7 +13860,7 @@
                 <a:ea typeface="Aptos" pitchFamily="34" charset="-122"/>
                 <a:cs typeface="Aptos" pitchFamily="34" charset="-120"/>
               </a:rPr>
-              <a:t>Use the concept to clarify workflow changes, dependencies, staffing, procurement requirements, training needs, and.</a:t>
+              <a:t>Use the concept to clarify workflow changes, dependencies, staffing, procurement requirements, training needs, and implementation checkpoints.</a:t>
             </a:r>
             <a:endParaRPr lang="en-US" sz="1320" dirty="0"/>
           </a:p>
@@ -14013,11 +14229,11 @@
         <p:spPr>
           <a:xfrm>
             <a:off x="7635240" y="1325880"/>
-            <a:ext cx="3474720" cy="1325880"/>
+            <a:ext cx="3474720" cy="1255471"/>
           </a:xfrm>
           <a:prstGeom prst="roundRect">
             <a:avLst>
-              <a:gd name="adj" fmla="val 8276"/>
+              <a:gd name="adj" fmla="val 8740"/>
             </a:avLst>
           </a:prstGeom>
           <a:solidFill>
@@ -14079,7 +14295,7 @@
         <p:spPr>
           <a:xfrm>
             <a:off x="7799832" y="1801368"/>
-            <a:ext cx="3145536" cy="758952"/>
+            <a:ext cx="3145536" cy="688543"/>
           </a:xfrm>
           <a:prstGeom prst="rect">
             <a:avLst/>
@@ -14119,12 +14335,12 @@
         </p:nvSpPr>
         <p:spPr>
           <a:xfrm>
-            <a:off x="7635240" y="2788920"/>
-            <a:ext cx="3474720" cy="1536192"/>
+            <a:off x="7635240" y="2718511"/>
+            <a:ext cx="3474720" cy="1328623"/>
           </a:xfrm>
           <a:prstGeom prst="roundRect">
             <a:avLst>
-              <a:gd name="adj" fmla="val 7143"/>
+              <a:gd name="adj" fmla="val 8259"/>
             </a:avLst>
           </a:prstGeom>
           <a:solidFill>
@@ -14146,8 +14362,8 @@
         </p:nvSpPr>
         <p:spPr>
           <a:xfrm>
-            <a:off x="7799832" y="2935224"/>
-            <a:ext cx="3145536" cy="256032"/>
+            <a:off x="7799832" y="2846527"/>
+            <a:ext cx="3145536" cy="237744"/>
           </a:xfrm>
           <a:prstGeom prst="rect">
             <a:avLst/>
@@ -14163,7 +14379,7 @@
               <a:buNone/>
             </a:pPr>
             <a:r>
-              <a:rPr lang="en-US" sz="1300" b="1" dirty="0">
+              <a:rPr lang="en-US" sz="1250" b="1" dirty="0">
                 <a:solidFill>
                   <a:srgbClr val="0068B7"/>
                 </a:solidFill>
@@ -14171,101 +14387,317 @@
                 <a:ea typeface="Aptos" pitchFamily="34" charset="-122"/>
                 <a:cs typeface="Aptos" pitchFamily="34" charset="-120"/>
               </a:rPr>
-              <a:t>Concept checkpoints</a:t>
-            </a:r>
-            <a:endParaRPr lang="en-US" sz="1300" dirty="0"/>
-          </a:p>
-        </p:txBody>
-      </p:sp>
-      <p:sp>
-        <p:nvSpPr>
-          <p:cNvPr id="15" name="Text 13"/>
-          <p:cNvSpPr/>
-          <p:nvPr/>
-        </p:nvSpPr>
-        <p:spPr>
-          <a:xfrm>
-            <a:off x="7818120" y="3300984"/>
-            <a:ext cx="3090672" cy="877824"/>
-          </a:xfrm>
-          <a:prstGeom prst="rect">
-            <a:avLst/>
-          </a:prstGeom>
-          <a:noFill/>
-          <a:ln/>
-        </p:spPr>
-        <p:txBody>
-          <a:bodyPr wrap="square" lIns="508" tIns="508" rIns="508" bIns="508" rtlCol="0" anchor="t">
+              <a:t>Implementation path</a:t>
+            </a:r>
+            <a:endParaRPr lang="en-US" sz="1250" dirty="0"/>
+          </a:p>
+        </p:txBody>
+      </p:sp>
+      <p:sp>
+        <p:nvSpPr>
+          <p:cNvPr id="15" name="Shape 13"/>
+          <p:cNvSpPr/>
+          <p:nvPr/>
+        </p:nvSpPr>
+        <p:spPr>
+          <a:xfrm>
+            <a:off x="8763000" y="3399739"/>
+            <a:ext cx="164592" cy="0"/>
+          </a:xfrm>
+          <a:prstGeom prst="line">
+            <a:avLst/>
+          </a:prstGeom>
+          <a:noFill/>
+          <a:ln w="15240">
+            <a:solidFill>
+              <a:srgbClr val="8ABBD8"/>
+            </a:solidFill>
+            <a:prstDash val="solid"/>
+          </a:ln>
+        </p:spPr>
+      </p:sp>
+      <p:sp>
+        <p:nvSpPr>
+          <p:cNvPr id="16" name="Shape 14"/>
+          <p:cNvSpPr/>
+          <p:nvPr/>
+        </p:nvSpPr>
+        <p:spPr>
+          <a:xfrm>
+            <a:off x="7872984" y="3248863"/>
+            <a:ext cx="890016" cy="301752"/>
+          </a:xfrm>
+          <a:prstGeom prst="roundRect">
+            <a:avLst>
+              <a:gd name="adj" fmla="val 24242"/>
+            </a:avLst>
+          </a:prstGeom>
+          <a:solidFill>
+            <a:srgbClr val="0068B7"/>
+          </a:solidFill>
+          <a:ln w="12700">
+            <a:solidFill>
+              <a:srgbClr val="0068B7"/>
+            </a:solidFill>
+            <a:prstDash val="solid"/>
+          </a:ln>
+        </p:spPr>
+      </p:sp>
+      <p:sp>
+        <p:nvSpPr>
+          <p:cNvPr id="17" name="Text 15"/>
+          <p:cNvSpPr/>
+          <p:nvPr/>
+        </p:nvSpPr>
+        <p:spPr>
+          <a:xfrm>
+            <a:off x="7909560" y="3322015"/>
+            <a:ext cx="816864" cy="146304"/>
+          </a:xfrm>
+          <a:prstGeom prst="rect">
+            <a:avLst/>
+          </a:prstGeom>
+          <a:noFill/>
+          <a:ln/>
+        </p:spPr>
+        <p:txBody>
+          <a:bodyPr wrap="square" lIns="0" tIns="0" rIns="0" bIns="0" rtlCol="0" anchor="ctr">
             <a:normAutofit/>
           </a:bodyPr>
           <a:lstStyle/>
           <a:p>
-            <a:pPr indent="0" marL="0">
-              <a:buNone/>
-            </a:pPr>
-            <a:r>
-              <a:rPr lang="en-US" sz="1220" dirty="0">
-                <a:solidFill>
-                  <a:srgbClr val="17364A"/>
-                </a:solidFill>
-                <a:latin typeface="Aptos" pitchFamily="34" charset="0"/>
-                <a:ea typeface="Aptos" pitchFamily="34" charset="-122"/>
-                <a:cs typeface="Aptos" pitchFamily="34" charset="-120"/>
-              </a:rPr>
-              <a:t>Staff may not trust the output, may over-trust it, may not.</a:t>
-            </a:r>
-            <a:endParaRPr lang="en-US" sz="1220" dirty="0"/>
-          </a:p>
-          <a:p>
-            <a:pPr indent="0" marL="0">
-              <a:buNone/>
-            </a:pPr>
-            <a:r>
-              <a:rPr lang="en-US" sz="1220" dirty="0">
-                <a:solidFill>
-                  <a:srgbClr val="17364A"/>
-                </a:solidFill>
-                <a:latin typeface="Aptos" pitchFamily="34" charset="0"/>
-                <a:ea typeface="Aptos" pitchFamily="34" charset="-122"/>
-                <a:cs typeface="Aptos" pitchFamily="34" charset="-120"/>
-              </a:rPr>
-              <a:t>Change management is also an equity and workforce issue.</a:t>
-            </a:r>
-            <a:endParaRPr lang="en-US" sz="1220" dirty="0"/>
-          </a:p>
-          <a:p>
-            <a:pPr indent="0" marL="0">
-              <a:buNone/>
-            </a:pPr>
-            <a:r>
-              <a:rPr lang="en-US" sz="1220" dirty="0">
-                <a:solidFill>
-                  <a:srgbClr val="17364A"/>
-                </a:solidFill>
-                <a:latin typeface="Aptos" pitchFamily="34" charset="0"/>
-                <a:ea typeface="Aptos" pitchFamily="34" charset="-122"/>
-                <a:cs typeface="Aptos" pitchFamily="34" charset="-120"/>
-              </a:rPr>
-              <a:t>Staff who are not included in design may experience AI as a threat.</a:t>
-            </a:r>
-            <a:endParaRPr lang="en-US" sz="1220" dirty="0"/>
-          </a:p>
-        </p:txBody>
-      </p:sp>
-      <p:sp>
-        <p:nvSpPr>
-          <p:cNvPr id="16" name="Shape 14"/>
-          <p:cNvSpPr/>
-          <p:nvPr/>
-        </p:nvSpPr>
-        <p:spPr>
-          <a:xfrm>
-            <a:off x="7635240" y="4498848"/>
-            <a:ext cx="3474720" cy="1143000"/>
+            <a:pPr algn="ctr" indent="0" marL="0">
+              <a:buNone/>
+            </a:pPr>
+            <a:r>
+              <a:rPr lang="en-US" sz="880" b="1" dirty="0">
+                <a:solidFill>
+                  <a:srgbClr val="FFFFFF"/>
+                </a:solidFill>
+                <a:latin typeface="Aptos" pitchFamily="34" charset="0"/>
+                <a:ea typeface="Aptos" pitchFamily="34" charset="-122"/>
+                <a:cs typeface="Aptos" pitchFamily="34" charset="-120"/>
+              </a:rPr>
+              <a:t>Need</a:t>
+            </a:r>
+            <a:endParaRPr lang="en-US" sz="880" dirty="0"/>
+          </a:p>
+        </p:txBody>
+      </p:sp>
+      <p:sp>
+        <p:nvSpPr>
+          <p:cNvPr id="18" name="Shape 16"/>
+          <p:cNvSpPr/>
+          <p:nvPr/>
+        </p:nvSpPr>
+        <p:spPr>
+          <a:xfrm>
+            <a:off x="9817608" y="3399739"/>
+            <a:ext cx="164592" cy="0"/>
+          </a:xfrm>
+          <a:prstGeom prst="line">
+            <a:avLst/>
+          </a:prstGeom>
+          <a:noFill/>
+          <a:ln w="15240">
+            <a:solidFill>
+              <a:srgbClr val="8ABBD8"/>
+            </a:solidFill>
+            <a:prstDash val="solid"/>
+          </a:ln>
+        </p:spPr>
+      </p:sp>
+      <p:sp>
+        <p:nvSpPr>
+          <p:cNvPr id="19" name="Shape 17"/>
+          <p:cNvSpPr/>
+          <p:nvPr/>
+        </p:nvSpPr>
+        <p:spPr>
+          <a:xfrm>
+            <a:off x="8927592" y="3248863"/>
+            <a:ext cx="890016" cy="301752"/>
           </a:xfrm>
           <a:prstGeom prst="roundRect">
             <a:avLst>
-              <a:gd name="adj" fmla="val 9600"/>
+              <a:gd name="adj" fmla="val 24242"/>
+            </a:avLst>
+          </a:prstGeom>
+          <a:solidFill>
+            <a:srgbClr val="2F8A28"/>
+          </a:solidFill>
+          <a:ln w="12700">
+            <a:solidFill>
+              <a:srgbClr val="2F8A28"/>
+            </a:solidFill>
+            <a:prstDash val="solid"/>
+          </a:ln>
+        </p:spPr>
+      </p:sp>
+      <p:sp>
+        <p:nvSpPr>
+          <p:cNvPr id="20" name="Text 18"/>
+          <p:cNvSpPr/>
+          <p:nvPr/>
+        </p:nvSpPr>
+        <p:spPr>
+          <a:xfrm>
+            <a:off x="8964168" y="3322015"/>
+            <a:ext cx="816864" cy="146304"/>
+          </a:xfrm>
+          <a:prstGeom prst="rect">
+            <a:avLst/>
+          </a:prstGeom>
+          <a:noFill/>
+          <a:ln/>
+        </p:spPr>
+        <p:txBody>
+          <a:bodyPr wrap="square" lIns="0" tIns="0" rIns="0" bIns="0" rtlCol="0" anchor="ctr">
+            <a:normAutofit/>
+          </a:bodyPr>
+          <a:lstStyle/>
+          <a:p>
+            <a:pPr algn="ctr" indent="0" marL="0">
+              <a:buNone/>
+            </a:pPr>
+            <a:r>
+              <a:rPr lang="en-US" sz="880" b="1" dirty="0">
+                <a:solidFill>
+                  <a:srgbClr val="FFFFFF"/>
+                </a:solidFill>
+                <a:latin typeface="Aptos" pitchFamily="34" charset="0"/>
+                <a:ea typeface="Aptos" pitchFamily="34" charset="-122"/>
+                <a:cs typeface="Aptos" pitchFamily="34" charset="-120"/>
+              </a:rPr>
+              <a:t>Build</a:t>
+            </a:r>
+            <a:endParaRPr lang="en-US" sz="880" dirty="0"/>
+          </a:p>
+        </p:txBody>
+      </p:sp>
+      <p:sp>
+        <p:nvSpPr>
+          <p:cNvPr id="21" name="Shape 19"/>
+          <p:cNvSpPr/>
+          <p:nvPr/>
+        </p:nvSpPr>
+        <p:spPr>
+          <a:xfrm>
+            <a:off x="9982200" y="3248863"/>
+            <a:ext cx="890016" cy="301752"/>
+          </a:xfrm>
+          <a:prstGeom prst="roundRect">
+            <a:avLst>
+              <a:gd name="adj" fmla="val 24242"/>
+            </a:avLst>
+          </a:prstGeom>
+          <a:solidFill>
+            <a:srgbClr val="6A4CA3"/>
+          </a:solidFill>
+          <a:ln w="12700">
+            <a:solidFill>
+              <a:srgbClr val="6A4CA3"/>
+            </a:solidFill>
+            <a:prstDash val="solid"/>
+          </a:ln>
+        </p:spPr>
+      </p:sp>
+      <p:sp>
+        <p:nvSpPr>
+          <p:cNvPr id="22" name="Text 20"/>
+          <p:cNvSpPr/>
+          <p:nvPr/>
+        </p:nvSpPr>
+        <p:spPr>
+          <a:xfrm>
+            <a:off x="10018776" y="3322015"/>
+            <a:ext cx="816864" cy="146304"/>
+          </a:xfrm>
+          <a:prstGeom prst="rect">
+            <a:avLst/>
+          </a:prstGeom>
+          <a:noFill/>
+          <a:ln/>
+        </p:spPr>
+        <p:txBody>
+          <a:bodyPr wrap="square" lIns="0" tIns="0" rIns="0" bIns="0" rtlCol="0" anchor="ctr">
+            <a:normAutofit/>
+          </a:bodyPr>
+          <a:lstStyle/>
+          <a:p>
+            <a:pPr algn="ctr" indent="0" marL="0">
+              <a:buNone/>
+            </a:pPr>
+            <a:r>
+              <a:rPr lang="en-US" sz="880" b="1" dirty="0">
+                <a:solidFill>
+                  <a:srgbClr val="FFFFFF"/>
+                </a:solidFill>
+                <a:latin typeface="Aptos" pitchFamily="34" charset="0"/>
+                <a:ea typeface="Aptos" pitchFamily="34" charset="-122"/>
+                <a:cs typeface="Aptos" pitchFamily="34" charset="-120"/>
+              </a:rPr>
+              <a:t>Adopt</a:t>
+            </a:r>
+            <a:endParaRPr lang="en-US" sz="880" dirty="0"/>
+          </a:p>
+        </p:txBody>
+      </p:sp>
+      <p:sp>
+        <p:nvSpPr>
+          <p:cNvPr id="23" name="Text 21"/>
+          <p:cNvSpPr/>
+          <p:nvPr/>
+        </p:nvSpPr>
+        <p:spPr>
+          <a:xfrm>
+            <a:off x="7854696" y="3742639"/>
+            <a:ext cx="3035808" cy="158191"/>
+          </a:xfrm>
+          <a:prstGeom prst="rect">
+            <a:avLst/>
+          </a:prstGeom>
+          <a:noFill/>
+          <a:ln/>
+        </p:spPr>
+        <p:txBody>
+          <a:bodyPr wrap="square" lIns="254" tIns="254" rIns="254" bIns="254" rtlCol="0" anchor="t">
+            <a:normAutofit/>
+          </a:bodyPr>
+          <a:lstStyle/>
+          <a:p>
+            <a:pPr indent="0" marL="0">
+              <a:buNone/>
+            </a:pPr>
+            <a:r>
+              <a:rPr lang="en-US" sz="1120" dirty="0">
+                <a:solidFill>
+                  <a:srgbClr val="17364A"/>
+                </a:solidFill>
+                <a:latin typeface="Aptos" pitchFamily="34" charset="0"/>
+                <a:ea typeface="Aptos" pitchFamily="34" charset="-122"/>
+                <a:cs typeface="Aptos" pitchFamily="34" charset="-120"/>
+              </a:rPr>
+              <a:t>Implementation work should make dependencies, approvals, training, and sustainment visible before launch.</a:t>
+            </a:r>
+            <a:endParaRPr lang="en-US" sz="1120" dirty="0"/>
+          </a:p>
+        </p:txBody>
+      </p:sp>
+      <p:sp>
+        <p:nvSpPr>
+          <p:cNvPr id="24" name="Shape 22"/>
+          <p:cNvSpPr/>
+          <p:nvPr/>
+        </p:nvSpPr>
+        <p:spPr>
+          <a:xfrm>
+            <a:off x="7635240" y="4184294"/>
+            <a:ext cx="3474720" cy="1466698"/>
+          </a:xfrm>
+          <a:prstGeom prst="roundRect">
+            <a:avLst>
+              <a:gd name="adj" fmla="val 7481"/>
             </a:avLst>
           </a:prstGeom>
           <a:solidFill>
@@ -14281,13 +14713,13 @@
       </p:sp>
       <p:sp>
         <p:nvSpPr>
-          <p:cNvPr id="17" name="Text 15"/>
-          <p:cNvSpPr/>
-          <p:nvPr/>
-        </p:nvSpPr>
-        <p:spPr>
-          <a:xfrm>
-            <a:off x="7799832" y="4645152"/>
+          <p:cNvPr id="25" name="Text 23"/>
+          <p:cNvSpPr/>
+          <p:nvPr/>
+        </p:nvSpPr>
+        <p:spPr>
+          <a:xfrm>
+            <a:off x="7799832" y="4330598"/>
             <a:ext cx="3145536" cy="256032"/>
           </a:xfrm>
           <a:prstGeom prst="rect">
@@ -14320,14 +14752,14 @@
       </p:sp>
       <p:sp>
         <p:nvSpPr>
-          <p:cNvPr id="18" name="Text 16"/>
-          <p:cNvSpPr/>
-          <p:nvPr/>
-        </p:nvSpPr>
-        <p:spPr>
-          <a:xfrm>
-            <a:off x="7799832" y="4974336"/>
-            <a:ext cx="3145536" cy="576072"/>
+          <p:cNvPr id="26" name="Text 24"/>
+          <p:cNvSpPr/>
+          <p:nvPr/>
+        </p:nvSpPr>
+        <p:spPr>
+          <a:xfrm>
+            <a:off x="7799832" y="4659782"/>
+            <a:ext cx="3145536" cy="899770"/>
           </a:xfrm>
           <a:prstGeom prst="rect">
             <a:avLst/>
@@ -14353,7 +14785,7 @@
                 <a:ea typeface="Aptos" pitchFamily="34" charset="-122"/>
                 <a:cs typeface="Aptos" pitchFamily="34" charset="-120"/>
               </a:rPr>
-              <a:t>Use the concept to clarify workflow changes, dependencies, staffing, procurement requirements, training needs, and.</a:t>
+              <a:t>Use the concept to clarify workflow changes, dependencies, staffing, procurement requirements, training needs, and implementation checkpoints.</a:t>
             </a:r>
             <a:endParaRPr lang="en-US" sz="1320" dirty="0"/>
           </a:p>
@@ -14722,11 +15154,11 @@
         <p:spPr>
           <a:xfrm>
             <a:off x="7635240" y="1325880"/>
-            <a:ext cx="3474720" cy="1325880"/>
+            <a:ext cx="3474720" cy="1255471"/>
           </a:xfrm>
           <a:prstGeom prst="roundRect">
             <a:avLst>
-              <a:gd name="adj" fmla="val 8276"/>
+              <a:gd name="adj" fmla="val 8740"/>
             </a:avLst>
           </a:prstGeom>
           <a:solidFill>
@@ -14788,7 +15220,7 @@
         <p:spPr>
           <a:xfrm>
             <a:off x="7799832" y="1801368"/>
-            <a:ext cx="3145536" cy="758952"/>
+            <a:ext cx="3145536" cy="688543"/>
           </a:xfrm>
           <a:prstGeom prst="rect">
             <a:avLst/>
@@ -14828,12 +15260,12 @@
         </p:nvSpPr>
         <p:spPr>
           <a:xfrm>
-            <a:off x="7635240" y="2788920"/>
-            <a:ext cx="3474720" cy="1536192"/>
+            <a:off x="7635240" y="2718511"/>
+            <a:ext cx="3474720" cy="1328623"/>
           </a:xfrm>
           <a:prstGeom prst="roundRect">
             <a:avLst>
-              <a:gd name="adj" fmla="val 7143"/>
+              <a:gd name="adj" fmla="val 8259"/>
             </a:avLst>
           </a:prstGeom>
           <a:solidFill>
@@ -14855,7 +15287,7 @@
         </p:nvSpPr>
         <p:spPr>
           <a:xfrm>
-            <a:off x="7799832" y="2935224"/>
+            <a:off x="7799832" y="2864815"/>
             <a:ext cx="3145536" cy="256032"/>
           </a:xfrm>
           <a:prstGeom prst="rect">
@@ -14894,8 +15326,8 @@
         </p:nvSpPr>
         <p:spPr>
           <a:xfrm>
-            <a:off x="7818120" y="3300984"/>
-            <a:ext cx="3090672" cy="877824"/>
+            <a:off x="7818120" y="3230575"/>
+            <a:ext cx="3090672" cy="670255"/>
           </a:xfrm>
           <a:prstGeom prst="rect">
             <a:avLst/>
@@ -14969,12 +15401,12 @@
         </p:nvSpPr>
         <p:spPr>
           <a:xfrm>
-            <a:off x="7635240" y="4498848"/>
-            <a:ext cx="3474720" cy="1143000"/>
+            <a:off x="7635240" y="4184294"/>
+            <a:ext cx="3474720" cy="1466698"/>
           </a:xfrm>
           <a:prstGeom prst="roundRect">
             <a:avLst>
-              <a:gd name="adj" fmla="val 9600"/>
+              <a:gd name="adj" fmla="val 7481"/>
             </a:avLst>
           </a:prstGeom>
           <a:solidFill>
@@ -14996,7 +15428,7 @@
         </p:nvSpPr>
         <p:spPr>
           <a:xfrm>
-            <a:off x="7799832" y="4645152"/>
+            <a:off x="7799832" y="4330598"/>
             <a:ext cx="3145536" cy="256032"/>
           </a:xfrm>
           <a:prstGeom prst="rect">
@@ -15035,8 +15467,8 @@
         </p:nvSpPr>
         <p:spPr>
           <a:xfrm>
-            <a:off x="7799832" y="4974336"/>
-            <a:ext cx="3145536" cy="576072"/>
+            <a:off x="7799832" y="4659782"/>
+            <a:ext cx="3145536" cy="899770"/>
           </a:xfrm>
           <a:prstGeom prst="rect">
             <a:avLst/>
@@ -15062,7 +15494,7 @@
                 <a:ea typeface="Aptos" pitchFamily="34" charset="-122"/>
                 <a:cs typeface="Aptos" pitchFamily="34" charset="-120"/>
               </a:rPr>
-              <a:t>Use the concept to clarify workflow changes, dependencies, staffing, procurement requirements, training needs, and.</a:t>
+              <a:t>Use the concept to clarify workflow changes, dependencies, staffing, procurement requirements, training needs, and implementation checkpoints.</a:t>
             </a:r>
             <a:endParaRPr lang="en-US" sz="1320" dirty="0"/>
           </a:p>
@@ -15431,11 +15863,11 @@
         <p:spPr>
           <a:xfrm>
             <a:off x="7635240" y="1325880"/>
-            <a:ext cx="3474720" cy="1325880"/>
+            <a:ext cx="3474720" cy="1207008"/>
           </a:xfrm>
           <a:prstGeom prst="roundRect">
             <a:avLst>
-              <a:gd name="adj" fmla="val 8276"/>
+              <a:gd name="adj" fmla="val 9091"/>
             </a:avLst>
           </a:prstGeom>
           <a:solidFill>
@@ -15497,7 +15929,7 @@
         <p:spPr>
           <a:xfrm>
             <a:off x="7799832" y="1801368"/>
-            <a:ext cx="3145536" cy="758952"/>
+            <a:ext cx="3145536" cy="640080"/>
           </a:xfrm>
           <a:prstGeom prst="rect">
             <a:avLst/>
@@ -15537,12 +15969,12 @@
         </p:nvSpPr>
         <p:spPr>
           <a:xfrm>
-            <a:off x="7635240" y="2788920"/>
-            <a:ext cx="3474720" cy="1536192"/>
+            <a:off x="7635240" y="2670048"/>
+            <a:ext cx="3474720" cy="1377086"/>
           </a:xfrm>
           <a:prstGeom prst="roundRect">
             <a:avLst>
-              <a:gd name="adj" fmla="val 7143"/>
+              <a:gd name="adj" fmla="val 7968"/>
             </a:avLst>
           </a:prstGeom>
           <a:solidFill>
@@ -15564,8 +15996,8 @@
         </p:nvSpPr>
         <p:spPr>
           <a:xfrm>
-            <a:off x="7799832" y="2935224"/>
-            <a:ext cx="3145536" cy="256032"/>
+            <a:off x="7799832" y="2798064"/>
+            <a:ext cx="3145536" cy="237744"/>
           </a:xfrm>
           <a:prstGeom prst="rect">
             <a:avLst/>
@@ -15581,7 +16013,7 @@
               <a:buNone/>
             </a:pPr>
             <a:r>
-              <a:rPr lang="en-US" sz="1300" b="1" dirty="0">
+              <a:rPr lang="en-US" sz="1250" b="1" dirty="0">
                 <a:solidFill>
                   <a:srgbClr val="0068B7"/>
                 </a:solidFill>
@@ -15589,101 +16021,317 @@
                 <a:ea typeface="Aptos" pitchFamily="34" charset="-122"/>
                 <a:cs typeface="Aptos" pitchFamily="34" charset="-120"/>
               </a:rPr>
-              <a:t>Concept checkpoints</a:t>
-            </a:r>
-            <a:endParaRPr lang="en-US" sz="1300" dirty="0"/>
-          </a:p>
-        </p:txBody>
-      </p:sp>
-      <p:sp>
-        <p:nvSpPr>
-          <p:cNvPr id="15" name="Text 13"/>
-          <p:cNvSpPr/>
-          <p:nvPr/>
-        </p:nvSpPr>
-        <p:spPr>
-          <a:xfrm>
-            <a:off x="7818120" y="3300984"/>
-            <a:ext cx="3090672" cy="877824"/>
-          </a:xfrm>
-          <a:prstGeom prst="rect">
-            <a:avLst/>
-          </a:prstGeom>
-          <a:noFill/>
-          <a:ln/>
-        </p:spPr>
-        <p:txBody>
-          <a:bodyPr wrap="square" lIns="508" tIns="508" rIns="508" bIns="508" rtlCol="0" anchor="t">
+              <a:t>Governance pathway</a:t>
+            </a:r>
+            <a:endParaRPr lang="en-US" sz="1250" dirty="0"/>
+          </a:p>
+        </p:txBody>
+      </p:sp>
+      <p:sp>
+        <p:nvSpPr>
+          <p:cNvPr id="15" name="Shape 13"/>
+          <p:cNvSpPr/>
+          <p:nvPr/>
+        </p:nvSpPr>
+        <p:spPr>
+          <a:xfrm>
+            <a:off x="8763000" y="3351276"/>
+            <a:ext cx="164592" cy="0"/>
+          </a:xfrm>
+          <a:prstGeom prst="line">
+            <a:avLst/>
+          </a:prstGeom>
+          <a:noFill/>
+          <a:ln w="15240">
+            <a:solidFill>
+              <a:srgbClr val="8ABBD8"/>
+            </a:solidFill>
+            <a:prstDash val="solid"/>
+          </a:ln>
+        </p:spPr>
+      </p:sp>
+      <p:sp>
+        <p:nvSpPr>
+          <p:cNvPr id="16" name="Shape 14"/>
+          <p:cNvSpPr/>
+          <p:nvPr/>
+        </p:nvSpPr>
+        <p:spPr>
+          <a:xfrm>
+            <a:off x="7872984" y="3200400"/>
+            <a:ext cx="890016" cy="301752"/>
+          </a:xfrm>
+          <a:prstGeom prst="roundRect">
+            <a:avLst>
+              <a:gd name="adj" fmla="val 24242"/>
+            </a:avLst>
+          </a:prstGeom>
+          <a:solidFill>
+            <a:srgbClr val="0068B7"/>
+          </a:solidFill>
+          <a:ln w="12700">
+            <a:solidFill>
+              <a:srgbClr val="0068B7"/>
+            </a:solidFill>
+            <a:prstDash val="solid"/>
+          </a:ln>
+        </p:spPr>
+      </p:sp>
+      <p:sp>
+        <p:nvSpPr>
+          <p:cNvPr id="17" name="Text 15"/>
+          <p:cNvSpPr/>
+          <p:nvPr/>
+        </p:nvSpPr>
+        <p:spPr>
+          <a:xfrm>
+            <a:off x="7909560" y="3273552"/>
+            <a:ext cx="816864" cy="146304"/>
+          </a:xfrm>
+          <a:prstGeom prst="rect">
+            <a:avLst/>
+          </a:prstGeom>
+          <a:noFill/>
+          <a:ln/>
+        </p:spPr>
+        <p:txBody>
+          <a:bodyPr wrap="square" lIns="0" tIns="0" rIns="0" bIns="0" rtlCol="0" anchor="ctr">
             <a:normAutofit/>
           </a:bodyPr>
           <a:lstStyle/>
           <a:p>
-            <a:pPr indent="0" marL="0">
-              <a:buNone/>
-            </a:pPr>
-            <a:r>
-              <a:rPr lang="en-US" sz="1220" dirty="0">
-                <a:solidFill>
-                  <a:srgbClr val="17364A"/>
-                </a:solidFill>
-                <a:latin typeface="Aptos" pitchFamily="34" charset="0"/>
-                <a:ea typeface="Aptos" pitchFamily="34" charset="-122"/>
-                <a:cs typeface="Aptos" pitchFamily="34" charset="-120"/>
-              </a:rPr>
-              <a:t>Leaders should identify who will be affected, what pain points the.</a:t>
-            </a:r>
-            <a:endParaRPr lang="en-US" sz="1220" dirty="0"/>
-          </a:p>
-          <a:p>
-            <a:pPr indent="0" marL="0">
-              <a:buNone/>
-            </a:pPr>
-            <a:r>
-              <a:rPr lang="en-US" sz="1220" dirty="0">
-                <a:solidFill>
-                  <a:srgbClr val="17364A"/>
-                </a:solidFill>
-                <a:latin typeface="Aptos" pitchFamily="34" charset="0"/>
-                <a:ea typeface="Aptos" pitchFamily="34" charset="-122"/>
-                <a:cs typeface="Aptos" pitchFamily="34" charset="-120"/>
-              </a:rPr>
-              <a:t>Stakeholder engagement should include frontline users,.</a:t>
-            </a:r>
-            <a:endParaRPr lang="en-US" sz="1220" dirty="0"/>
-          </a:p>
-          <a:p>
-            <a:pPr indent="0" marL="0">
-              <a:buNone/>
-            </a:pPr>
-            <a:r>
-              <a:rPr lang="en-US" sz="1220" dirty="0">
-                <a:solidFill>
-                  <a:srgbClr val="17364A"/>
-                </a:solidFill>
-                <a:latin typeface="Aptos" pitchFamily="34" charset="0"/>
-                <a:ea typeface="Aptos" pitchFamily="34" charset="-122"/>
-                <a:cs typeface="Aptos" pitchFamily="34" charset="-120"/>
-              </a:rPr>
-              <a:t>The communication plan should be specific.</a:t>
-            </a:r>
-            <a:endParaRPr lang="en-US" sz="1220" dirty="0"/>
-          </a:p>
-        </p:txBody>
-      </p:sp>
-      <p:sp>
-        <p:nvSpPr>
-          <p:cNvPr id="16" name="Shape 14"/>
-          <p:cNvSpPr/>
-          <p:nvPr/>
-        </p:nvSpPr>
-        <p:spPr>
-          <a:xfrm>
-            <a:off x="7635240" y="4498848"/>
-            <a:ext cx="3474720" cy="1143000"/>
+            <a:pPr algn="ctr" indent="0" marL="0">
+              <a:buNone/>
+            </a:pPr>
+            <a:r>
+              <a:rPr lang="en-US" sz="880" b="1" dirty="0">
+                <a:solidFill>
+                  <a:srgbClr val="FFFFFF"/>
+                </a:solidFill>
+                <a:latin typeface="Aptos" pitchFamily="34" charset="0"/>
+                <a:ea typeface="Aptos" pitchFamily="34" charset="-122"/>
+                <a:cs typeface="Aptos" pitchFamily="34" charset="-120"/>
+              </a:rPr>
+              <a:t>Submit</a:t>
+            </a:r>
+            <a:endParaRPr lang="en-US" sz="880" dirty="0"/>
+          </a:p>
+        </p:txBody>
+      </p:sp>
+      <p:sp>
+        <p:nvSpPr>
+          <p:cNvPr id="18" name="Shape 16"/>
+          <p:cNvSpPr/>
+          <p:nvPr/>
+        </p:nvSpPr>
+        <p:spPr>
+          <a:xfrm>
+            <a:off x="9817608" y="3351276"/>
+            <a:ext cx="164592" cy="0"/>
+          </a:xfrm>
+          <a:prstGeom prst="line">
+            <a:avLst/>
+          </a:prstGeom>
+          <a:noFill/>
+          <a:ln w="15240">
+            <a:solidFill>
+              <a:srgbClr val="8ABBD8"/>
+            </a:solidFill>
+            <a:prstDash val="solid"/>
+          </a:ln>
+        </p:spPr>
+      </p:sp>
+      <p:sp>
+        <p:nvSpPr>
+          <p:cNvPr id="19" name="Shape 17"/>
+          <p:cNvSpPr/>
+          <p:nvPr/>
+        </p:nvSpPr>
+        <p:spPr>
+          <a:xfrm>
+            <a:off x="8927592" y="3200400"/>
+            <a:ext cx="890016" cy="301752"/>
           </a:xfrm>
           <a:prstGeom prst="roundRect">
             <a:avLst>
-              <a:gd name="adj" fmla="val 9600"/>
+              <a:gd name="adj" fmla="val 24242"/>
+            </a:avLst>
+          </a:prstGeom>
+          <a:solidFill>
+            <a:srgbClr val="2F8A28"/>
+          </a:solidFill>
+          <a:ln w="12700">
+            <a:solidFill>
+              <a:srgbClr val="2F8A28"/>
+            </a:solidFill>
+            <a:prstDash val="solid"/>
+          </a:ln>
+        </p:spPr>
+      </p:sp>
+      <p:sp>
+        <p:nvSpPr>
+          <p:cNvPr id="20" name="Text 18"/>
+          <p:cNvSpPr/>
+          <p:nvPr/>
+        </p:nvSpPr>
+        <p:spPr>
+          <a:xfrm>
+            <a:off x="8964168" y="3273552"/>
+            <a:ext cx="816864" cy="146304"/>
+          </a:xfrm>
+          <a:prstGeom prst="rect">
+            <a:avLst/>
+          </a:prstGeom>
+          <a:noFill/>
+          <a:ln/>
+        </p:spPr>
+        <p:txBody>
+          <a:bodyPr wrap="square" lIns="0" tIns="0" rIns="0" bIns="0" rtlCol="0" anchor="ctr">
+            <a:normAutofit/>
+          </a:bodyPr>
+          <a:lstStyle/>
+          <a:p>
+            <a:pPr algn="ctr" indent="0" marL="0">
+              <a:buNone/>
+            </a:pPr>
+            <a:r>
+              <a:rPr lang="en-US" sz="880" b="1" dirty="0">
+                <a:solidFill>
+                  <a:srgbClr val="FFFFFF"/>
+                </a:solidFill>
+                <a:latin typeface="Aptos" pitchFamily="34" charset="0"/>
+                <a:ea typeface="Aptos" pitchFamily="34" charset="-122"/>
+                <a:cs typeface="Aptos" pitchFamily="34" charset="-120"/>
+              </a:rPr>
+              <a:t>Review</a:t>
+            </a:r>
+            <a:endParaRPr lang="en-US" sz="880" dirty="0"/>
+          </a:p>
+        </p:txBody>
+      </p:sp>
+      <p:sp>
+        <p:nvSpPr>
+          <p:cNvPr id="21" name="Shape 19"/>
+          <p:cNvSpPr/>
+          <p:nvPr/>
+        </p:nvSpPr>
+        <p:spPr>
+          <a:xfrm>
+            <a:off x="9982200" y="3200400"/>
+            <a:ext cx="890016" cy="301752"/>
+          </a:xfrm>
+          <a:prstGeom prst="roundRect">
+            <a:avLst>
+              <a:gd name="adj" fmla="val 24242"/>
+            </a:avLst>
+          </a:prstGeom>
+          <a:solidFill>
+            <a:srgbClr val="6A4CA3"/>
+          </a:solidFill>
+          <a:ln w="12700">
+            <a:solidFill>
+              <a:srgbClr val="6A4CA3"/>
+            </a:solidFill>
+            <a:prstDash val="solid"/>
+          </a:ln>
+        </p:spPr>
+      </p:sp>
+      <p:sp>
+        <p:nvSpPr>
+          <p:cNvPr id="22" name="Text 20"/>
+          <p:cNvSpPr/>
+          <p:nvPr/>
+        </p:nvSpPr>
+        <p:spPr>
+          <a:xfrm>
+            <a:off x="10018776" y="3273552"/>
+            <a:ext cx="816864" cy="146304"/>
+          </a:xfrm>
+          <a:prstGeom prst="rect">
+            <a:avLst/>
+          </a:prstGeom>
+          <a:noFill/>
+          <a:ln/>
+        </p:spPr>
+        <p:txBody>
+          <a:bodyPr wrap="square" lIns="0" tIns="0" rIns="0" bIns="0" rtlCol="0" anchor="ctr">
+            <a:normAutofit/>
+          </a:bodyPr>
+          <a:lstStyle/>
+          <a:p>
+            <a:pPr algn="ctr" indent="0" marL="0">
+              <a:buNone/>
+            </a:pPr>
+            <a:r>
+              <a:rPr lang="en-US" sz="880" b="1" dirty="0">
+                <a:solidFill>
+                  <a:srgbClr val="FFFFFF"/>
+                </a:solidFill>
+                <a:latin typeface="Aptos" pitchFamily="34" charset="0"/>
+                <a:ea typeface="Aptos" pitchFamily="34" charset="-122"/>
+                <a:cs typeface="Aptos" pitchFamily="34" charset="-120"/>
+              </a:rPr>
+              <a:t>Oversee</a:t>
+            </a:r>
+            <a:endParaRPr lang="en-US" sz="880" dirty="0"/>
+          </a:p>
+        </p:txBody>
+      </p:sp>
+      <p:sp>
+        <p:nvSpPr>
+          <p:cNvPr id="23" name="Text 21"/>
+          <p:cNvSpPr/>
+          <p:nvPr/>
+        </p:nvSpPr>
+        <p:spPr>
+          <a:xfrm>
+            <a:off x="7854696" y="3694176"/>
+            <a:ext cx="3035808" cy="206654"/>
+          </a:xfrm>
+          <a:prstGeom prst="rect">
+            <a:avLst/>
+          </a:prstGeom>
+          <a:noFill/>
+          <a:ln/>
+        </p:spPr>
+        <p:txBody>
+          <a:bodyPr wrap="square" lIns="254" tIns="254" rIns="254" bIns="254" rtlCol="0" anchor="t">
+            <a:normAutofit/>
+          </a:bodyPr>
+          <a:lstStyle/>
+          <a:p>
+            <a:pPr indent="0" marL="0">
+              <a:buNone/>
+            </a:pPr>
+            <a:r>
+              <a:rPr lang="en-US" sz="1120" dirty="0">
+                <a:solidFill>
+                  <a:srgbClr val="17364A"/>
+                </a:solidFill>
+                <a:latin typeface="Aptos" pitchFamily="34" charset="0"/>
+                <a:ea typeface="Aptos" pitchFamily="34" charset="-122"/>
+                <a:cs typeface="Aptos" pitchFamily="34" charset="-120"/>
+              </a:rPr>
+              <a:t>A proposed AI use should move through documented review before it becomes an operational workflow.</a:t>
+            </a:r>
+            <a:endParaRPr lang="en-US" sz="1120" dirty="0"/>
+          </a:p>
+        </p:txBody>
+      </p:sp>
+      <p:sp>
+        <p:nvSpPr>
+          <p:cNvPr id="24" name="Shape 22"/>
+          <p:cNvSpPr/>
+          <p:nvPr/>
+        </p:nvSpPr>
+        <p:spPr>
+          <a:xfrm>
+            <a:off x="7635240" y="4184294"/>
+            <a:ext cx="3474720" cy="1466698"/>
+          </a:xfrm>
+          <a:prstGeom prst="roundRect">
+            <a:avLst>
+              <a:gd name="adj" fmla="val 7481"/>
             </a:avLst>
           </a:prstGeom>
           <a:solidFill>
@@ -15699,13 +16347,13 @@
       </p:sp>
       <p:sp>
         <p:nvSpPr>
-          <p:cNvPr id="17" name="Text 15"/>
-          <p:cNvSpPr/>
-          <p:nvPr/>
-        </p:nvSpPr>
-        <p:spPr>
-          <a:xfrm>
-            <a:off x="7799832" y="4645152"/>
+          <p:cNvPr id="25" name="Text 23"/>
+          <p:cNvSpPr/>
+          <p:nvPr/>
+        </p:nvSpPr>
+        <p:spPr>
+          <a:xfrm>
+            <a:off x="7799832" y="4330598"/>
             <a:ext cx="3145536" cy="256032"/>
           </a:xfrm>
           <a:prstGeom prst="rect">
@@ -15738,14 +16386,14 @@
       </p:sp>
       <p:sp>
         <p:nvSpPr>
-          <p:cNvPr id="18" name="Text 16"/>
-          <p:cNvSpPr/>
-          <p:nvPr/>
-        </p:nvSpPr>
-        <p:spPr>
-          <a:xfrm>
-            <a:off x="7799832" y="4974336"/>
-            <a:ext cx="3145536" cy="576072"/>
+          <p:cNvPr id="26" name="Text 24"/>
+          <p:cNvSpPr/>
+          <p:nvPr/>
+        </p:nvSpPr>
+        <p:spPr>
+          <a:xfrm>
+            <a:off x="7799832" y="4659782"/>
+            <a:ext cx="3145536" cy="899770"/>
           </a:xfrm>
           <a:prstGeom prst="rect">
             <a:avLst/>
@@ -15771,7 +16419,7 @@
                 <a:ea typeface="Aptos" pitchFamily="34" charset="-122"/>
                 <a:cs typeface="Aptos" pitchFamily="34" charset="-120"/>
               </a:rPr>
-              <a:t>Translate this concept into clear decision rights, review steps, documentation expectations, and escalation paths before.</a:t>
+              <a:t>Translate this concept into clear decision rights, review steps, documentation expectations, and escalation paths before an AI-supported workflow is approved.</a:t>
             </a:r>
             <a:endParaRPr lang="en-US" sz="1320" dirty="0"/>
           </a:p>

--- a/downloads/presentations/modules/exe-430.pptx
+++ b/downloads/presentations/modules/exe-430.pptx
@@ -3152,8 +3152,8 @@
         </p:nvSpPr>
         <p:spPr>
           <a:xfrm>
-            <a:off x="868680" y="1508760"/>
-            <a:ext cx="6309360" cy="4160520"/>
+            <a:off x="822960" y="1463040"/>
+            <a:ext cx="6565392" cy="4343400"/>
           </a:xfrm>
           <a:prstGeom prst="rect">
             <a:avLst/>
@@ -3171,7 +3171,7 @@
               <a:buNone/>
             </a:pPr>
             <a:r>
-              <a:rPr lang="en-US" sz="2100" dirty="0">
+              <a:rPr lang="en-US" sz="1920" dirty="0">
                 <a:solidFill>
                   <a:srgbClr val="003A63"/>
                 </a:solidFill>
@@ -3181,14 +3181,14 @@
               </a:rPr>
               <a:t>• One risk is adoption without understanding.</a:t>
             </a:r>
-            <a:endParaRPr lang="en-US" sz="2100" dirty="0"/>
-          </a:p>
-          <a:p>
-            <a:pPr indent="0" marL="0">
-              <a:buNone/>
-            </a:pPr>
-            <a:r>
-              <a:rPr lang="en-US" sz="2100" dirty="0">
+            <a:endParaRPr lang="en-US" sz="1920" dirty="0"/>
+          </a:p>
+          <a:p>
+            <a:pPr indent="0" marL="0">
+              <a:buNone/>
+            </a:pPr>
+            <a:r>
+              <a:rPr lang="en-US" sz="1920" dirty="0">
                 <a:solidFill>
                   <a:srgbClr val="003A63"/>
                 </a:solidFill>
@@ -3196,16 +3196,16 @@
                 <a:ea typeface="Aptos" pitchFamily="34" charset="-122"/>
                 <a:cs typeface="Aptos" pitchFamily="34" charset="-120"/>
               </a:rPr>
-              <a:t>• Staff may use the tool incorrectly or treat outputs as authoritative because training was.</a:t>
-            </a:r>
-            <a:endParaRPr lang="en-US" sz="2100" dirty="0"/>
-          </a:p>
-          <a:p>
-            <a:pPr indent="0" marL="0">
-              <a:buNone/>
-            </a:pPr>
-            <a:r>
-              <a:rPr lang="en-US" sz="2100" dirty="0">
+              <a:t>• Staff may use the tool incorrectly or treat outputs as authoritative because.</a:t>
+            </a:r>
+            <a:endParaRPr lang="en-US" sz="1920" dirty="0"/>
+          </a:p>
+          <a:p>
+            <a:pPr indent="0" marL="0">
+              <a:buNone/>
+            </a:pPr>
+            <a:r>
+              <a:rPr lang="en-US" sz="1920" dirty="0">
                 <a:solidFill>
                   <a:srgbClr val="003A63"/>
                 </a:solidFill>
@@ -3213,9 +3213,9 @@
                 <a:ea typeface="Aptos" pitchFamily="34" charset="-122"/>
                 <a:cs typeface="Aptos" pitchFamily="34" charset="-120"/>
               </a:rPr>
-              <a:t>• A guardrail is to require role-based training and workflow-specific practice before access is.</a:t>
-            </a:r>
-            <a:endParaRPr lang="en-US" sz="2100" dirty="0"/>
+              <a:t>• A guardrail is to require role-based training and workflow-specific practice.</a:t>
+            </a:r>
+            <a:endParaRPr lang="en-US" sz="1920" dirty="0"/>
           </a:p>
         </p:txBody>
       </p:sp>
@@ -3227,12 +3227,12 @@
         </p:nvSpPr>
         <p:spPr>
           <a:xfrm>
-            <a:off x="7635240" y="1325880"/>
-            <a:ext cx="3474720" cy="1207008"/>
+            <a:off x="7543800" y="1325880"/>
+            <a:ext cx="3611880" cy="1261872"/>
           </a:xfrm>
           <a:prstGeom prst="roundRect">
             <a:avLst>
-              <a:gd name="adj" fmla="val 9091"/>
+              <a:gd name="adj" fmla="val 8696"/>
             </a:avLst>
           </a:prstGeom>
           <a:solidFill>
@@ -3254,8 +3254,8 @@
         </p:nvSpPr>
         <p:spPr>
           <a:xfrm>
-            <a:off x="7799832" y="1472184"/>
-            <a:ext cx="3145536" cy="256032"/>
+            <a:off x="7708392" y="1453896"/>
+            <a:ext cx="3282696" cy="228600"/>
           </a:xfrm>
           <a:prstGeom prst="rect">
             <a:avLst/>
@@ -3271,7 +3271,7 @@
               <a:buNone/>
             </a:pPr>
             <a:r>
-              <a:rPr lang="en-US" sz="1300" b="1" dirty="0">
+              <a:rPr lang="en-US" sz="1220" b="1" dirty="0">
                 <a:solidFill>
                   <a:srgbClr val="0068B7"/>
                 </a:solidFill>
@@ -3281,7 +3281,7 @@
               </a:rPr>
               <a:t>Risk check</a:t>
             </a:r>
-            <a:endParaRPr lang="en-US" sz="1300" dirty="0"/>
+            <a:endParaRPr lang="en-US" sz="1220" dirty="0"/>
           </a:p>
         </p:txBody>
       </p:sp>
@@ -3293,8 +3293,8 @@
         </p:nvSpPr>
         <p:spPr>
           <a:xfrm>
-            <a:off x="7799832" y="1801368"/>
-            <a:ext cx="3145536" cy="640080"/>
+            <a:off x="7708392" y="1764792"/>
+            <a:ext cx="3282696" cy="749808"/>
           </a:xfrm>
           <a:prstGeom prst="rect">
             <a:avLst/>
@@ -3312,7 +3312,7 @@
               <a:buNone/>
             </a:pPr>
             <a:r>
-              <a:rPr lang="en-US" sz="1320" dirty="0">
+              <a:rPr lang="en-US" sz="1220" dirty="0">
                 <a:solidFill>
                   <a:srgbClr val="17364A"/>
                 </a:solidFill>
@@ -3322,7 +3322,7 @@
               </a:rPr>
               <a:t>One risk is adoption without understanding.</a:t>
             </a:r>
-            <a:endParaRPr lang="en-US" sz="1320" dirty="0"/>
+            <a:endParaRPr lang="en-US" sz="1220" dirty="0"/>
           </a:p>
         </p:txBody>
       </p:sp>
@@ -3334,12 +3334,12 @@
         </p:nvSpPr>
         <p:spPr>
           <a:xfrm>
-            <a:off x="7635240" y="2670048"/>
-            <a:ext cx="3474720" cy="1536192"/>
+            <a:off x="7543800" y="2724912"/>
+            <a:ext cx="3611880" cy="1527048"/>
           </a:xfrm>
           <a:prstGeom prst="roundRect">
             <a:avLst>
-              <a:gd name="adj" fmla="val 7143"/>
+              <a:gd name="adj" fmla="val 7186"/>
             </a:avLst>
           </a:prstGeom>
           <a:solidFill>
@@ -3361,8 +3361,8 @@
         </p:nvSpPr>
         <p:spPr>
           <a:xfrm>
-            <a:off x="7799832" y="2816352"/>
-            <a:ext cx="3145536" cy="256032"/>
+            <a:off x="7708392" y="2852928"/>
+            <a:ext cx="3282696" cy="228600"/>
           </a:xfrm>
           <a:prstGeom prst="rect">
             <a:avLst/>
@@ -3378,7 +3378,7 @@
               <a:buNone/>
             </a:pPr>
             <a:r>
-              <a:rPr lang="en-US" sz="1300" b="1" dirty="0">
+              <a:rPr lang="en-US" sz="1220" b="1" dirty="0">
                 <a:solidFill>
                   <a:srgbClr val="0068B7"/>
                 </a:solidFill>
@@ -3388,7 +3388,7 @@
               </a:rPr>
               <a:t>Concept checkpoints</a:t>
             </a:r>
-            <a:endParaRPr lang="en-US" sz="1300" dirty="0"/>
+            <a:endParaRPr lang="en-US" sz="1220" dirty="0"/>
           </a:p>
         </p:txBody>
       </p:sp>
@@ -3400,8 +3400,8 @@
         </p:nvSpPr>
         <p:spPr>
           <a:xfrm>
-            <a:off x="7818120" y="3182112"/>
-            <a:ext cx="3090672" cy="877824"/>
+            <a:off x="7726680" y="3182112"/>
+            <a:ext cx="3227832" cy="960120"/>
           </a:xfrm>
           <a:prstGeom prst="rect">
             <a:avLst/>
@@ -3419,7 +3419,7 @@
               <a:buNone/>
             </a:pPr>
             <a:r>
-              <a:rPr lang="en-US" sz="1220" dirty="0">
+              <a:rPr lang="en-US" sz="1140" dirty="0">
                 <a:solidFill>
                   <a:srgbClr val="17364A"/>
                 </a:solidFill>
@@ -3427,16 +3427,16 @@
                 <a:ea typeface="Aptos" pitchFamily="34" charset="-122"/>
                 <a:cs typeface="Aptos" pitchFamily="34" charset="-120"/>
               </a:rPr>
-              <a:t>Another risk is resistance caused by lack of transparency.</a:t>
-            </a:r>
-            <a:endParaRPr lang="en-US" sz="1220" dirty="0"/>
-          </a:p>
-          <a:p>
-            <a:pPr indent="0" marL="0">
-              <a:buNone/>
-            </a:pPr>
-            <a:r>
-              <a:rPr lang="en-US" sz="1220" dirty="0">
+              <a:t>Another risk is resistance caused by lack of.</a:t>
+            </a:r>
+            <a:endParaRPr lang="en-US" sz="1140" dirty="0"/>
+          </a:p>
+          <a:p>
+            <a:pPr indent="0" marL="0">
+              <a:buNone/>
+            </a:pPr>
+            <a:r>
+              <a:rPr lang="en-US" sz="1140" dirty="0">
                 <a:solidFill>
                   <a:srgbClr val="17364A"/>
                 </a:solidFill>
@@ -3444,16 +3444,16 @@
                 <a:ea typeface="Aptos" pitchFamily="34" charset="-122"/>
                 <a:cs typeface="Aptos" pitchFamily="34" charset="-120"/>
               </a:rPr>
-              <a:t>If staff believe AI is being introduced to monitor or replace.</a:t>
-            </a:r>
-            <a:endParaRPr lang="en-US" sz="1220" dirty="0"/>
-          </a:p>
-          <a:p>
-            <a:pPr indent="0" marL="0">
-              <a:buNone/>
-            </a:pPr>
-            <a:r>
-              <a:rPr lang="en-US" sz="1220" dirty="0">
+              <a:t>If staff believe AI is being introduced to monitor.</a:t>
+            </a:r>
+            <a:endParaRPr lang="en-US" sz="1140" dirty="0"/>
+          </a:p>
+          <a:p>
+            <a:pPr indent="0" marL="0">
+              <a:buNone/>
+            </a:pPr>
+            <a:r>
+              <a:rPr lang="en-US" sz="1140" dirty="0">
                 <a:solidFill>
                   <a:srgbClr val="17364A"/>
                 </a:solidFill>
@@ -3461,9 +3461,9 @@
                 <a:ea typeface="Aptos" pitchFamily="34" charset="-122"/>
                 <a:cs typeface="Aptos" pitchFamily="34" charset="-120"/>
               </a:rPr>
-              <a:t>A guardrail is to communicate purpose, boundaries, data practices,.</a:t>
-            </a:r>
-            <a:endParaRPr lang="en-US" sz="1220" dirty="0"/>
+              <a:t>A guardrail is to communicate purpose, boundaries,.</a:t>
+            </a:r>
+            <a:endParaRPr lang="en-US" sz="1140" dirty="0"/>
           </a:p>
         </p:txBody>
       </p:sp>
@@ -3475,12 +3475,12 @@
         </p:nvSpPr>
         <p:spPr>
           <a:xfrm>
-            <a:off x="7635240" y="4343400"/>
-            <a:ext cx="3474720" cy="1255471"/>
+            <a:off x="7543800" y="4389120"/>
+            <a:ext cx="3611880" cy="1261872"/>
           </a:xfrm>
           <a:prstGeom prst="roundRect">
             <a:avLst>
-              <a:gd name="adj" fmla="val 8740"/>
+              <a:gd name="adj" fmla="val 8696"/>
             </a:avLst>
           </a:prstGeom>
           <a:solidFill>
@@ -3502,8 +3502,8 @@
         </p:nvSpPr>
         <p:spPr>
           <a:xfrm>
-            <a:off x="7799832" y="4489704"/>
-            <a:ext cx="3145536" cy="256032"/>
+            <a:off x="7708392" y="4517136"/>
+            <a:ext cx="3282696" cy="228600"/>
           </a:xfrm>
           <a:prstGeom prst="rect">
             <a:avLst/>
@@ -3519,7 +3519,7 @@
               <a:buNone/>
             </a:pPr>
             <a:r>
-              <a:rPr lang="en-US" sz="1300" b="1" dirty="0">
+              <a:rPr lang="en-US" sz="1220" b="1" dirty="0">
                 <a:solidFill>
                   <a:srgbClr val="0068B7"/>
                 </a:solidFill>
@@ -3529,7 +3529,7 @@
               </a:rPr>
               <a:t>Safeguard to plan</a:t>
             </a:r>
-            <a:endParaRPr lang="en-US" sz="1300" dirty="0"/>
+            <a:endParaRPr lang="en-US" sz="1220" dirty="0"/>
           </a:p>
         </p:txBody>
       </p:sp>
@@ -3541,8 +3541,8 @@
         </p:nvSpPr>
         <p:spPr>
           <a:xfrm>
-            <a:off x="7799832" y="4818888"/>
-            <a:ext cx="3145536" cy="688543"/>
+            <a:off x="7708392" y="4828032"/>
+            <a:ext cx="3282696" cy="749808"/>
           </a:xfrm>
           <a:prstGeom prst="rect">
             <a:avLst/>
@@ -3560,7 +3560,7 @@
               <a:buNone/>
             </a:pPr>
             <a:r>
-              <a:rPr lang="en-US" sz="1320" dirty="0">
+              <a:rPr lang="en-US" sz="1220" dirty="0">
                 <a:solidFill>
                   <a:srgbClr val="17364A"/>
                 </a:solidFill>
@@ -3568,9 +3568,9 @@
                 <a:ea typeface="Aptos" pitchFamily="34" charset="-122"/>
                 <a:cs typeface="Aptos" pitchFamily="34" charset="-120"/>
               </a:rPr>
-              <a:t>Identify what could go wrong, who could be affected, what safeguards are needed, and what evidence should be reviewed before use.</a:t>
-            </a:r>
-            <a:endParaRPr lang="en-US" sz="1320" dirty="0"/>
+              <a:t>Identify what could go wrong, who could be affected, what safeguards are needed,.</a:t>
+            </a:r>
+            <a:endParaRPr lang="en-US" sz="1220" dirty="0"/>
           </a:p>
         </p:txBody>
       </p:sp>
@@ -3861,8 +3861,8 @@
         </p:nvSpPr>
         <p:spPr>
           <a:xfrm>
-            <a:off x="868680" y="1508760"/>
-            <a:ext cx="6309360" cy="4160520"/>
+            <a:off x="822960" y="1463040"/>
+            <a:ext cx="6565392" cy="4343400"/>
           </a:xfrm>
           <a:prstGeom prst="rect">
             <a:avLst/>
@@ -3880,7 +3880,7 @@
               <a:buNone/>
             </a:pPr>
             <a:r>
-              <a:rPr lang="en-US" sz="2100" dirty="0">
+              <a:rPr lang="en-US" sz="1920" dirty="0">
                 <a:solidFill>
                   <a:srgbClr val="003A63"/>
                 </a:solidFill>
@@ -3888,16 +3888,16 @@
                 <a:ea typeface="Aptos" pitchFamily="34" charset="-122"/>
                 <a:cs typeface="Aptos" pitchFamily="34" charset="-120"/>
               </a:rPr>
-              <a:t>• Generative AI adoption requires training on review, citation, privacy, and public records.</a:t>
-            </a:r>
-            <a:endParaRPr lang="en-US" sz="2100" dirty="0"/>
-          </a:p>
-          <a:p>
-            <a:pPr indent="0" marL="0">
-              <a:buNone/>
-            </a:pPr>
-            <a:r>
-              <a:rPr lang="en-US" sz="2100" dirty="0">
+              <a:t>• Generative AI adoption requires training on review, citation, privacy, and.</a:t>
+            </a:r>
+            <a:endParaRPr lang="en-US" sz="1920" dirty="0"/>
+          </a:p>
+          <a:p>
+            <a:pPr indent="0" marL="0">
+              <a:buNone/>
+            </a:pPr>
+            <a:r>
+              <a:rPr lang="en-US" sz="1920" dirty="0">
                 <a:solidFill>
                   <a:srgbClr val="003A63"/>
                 </a:solidFill>
@@ -3905,16 +3905,16 @@
                 <a:ea typeface="Aptos" pitchFamily="34" charset="-122"/>
                 <a:cs typeface="Aptos" pitchFamily="34" charset="-120"/>
               </a:rPr>
-              <a:t>• Predictive analytics adoption requires training on interpretation, limitations, and override.</a:t>
-            </a:r>
-            <a:endParaRPr lang="en-US" sz="2100" dirty="0"/>
-          </a:p>
-          <a:p>
-            <a:pPr indent="0" marL="0">
-              <a:buNone/>
-            </a:pPr>
-            <a:r>
-              <a:rPr lang="en-US" sz="2100" dirty="0">
+              <a:t>• Predictive analytics adoption requires training on interpretation,.</a:t>
+            </a:r>
+            <a:endParaRPr lang="en-US" sz="1920" dirty="0"/>
+          </a:p>
+          <a:p>
+            <a:pPr indent="0" marL="0">
+              <a:buNone/>
+            </a:pPr>
+            <a:r>
+              <a:rPr lang="en-US" sz="1920" dirty="0">
                 <a:solidFill>
                   <a:srgbClr val="003A63"/>
                 </a:solidFill>
@@ -3922,9 +3922,9 @@
                 <a:ea typeface="Aptos" pitchFamily="34" charset="-122"/>
                 <a:cs typeface="Aptos" pitchFamily="34" charset="-120"/>
               </a:rPr>
-              <a:t>• Agentic workflow adoption requires training on approvals, stop procedures, and escalation.</a:t>
-            </a:r>
-            <a:endParaRPr lang="en-US" sz="2100" dirty="0"/>
+              <a:t>• Agentic workflow adoption requires training on approvals, stop procedures,.</a:t>
+            </a:r>
+            <a:endParaRPr lang="en-US" sz="1920" dirty="0"/>
           </a:p>
         </p:txBody>
       </p:sp>
@@ -3936,12 +3936,12 @@
         </p:nvSpPr>
         <p:spPr>
           <a:xfrm>
-            <a:off x="7635240" y="1325880"/>
-            <a:ext cx="3474720" cy="1207008"/>
+            <a:off x="7543800" y="1325880"/>
+            <a:ext cx="3611880" cy="1261872"/>
           </a:xfrm>
           <a:prstGeom prst="roundRect">
             <a:avLst>
-              <a:gd name="adj" fmla="val 9091"/>
+              <a:gd name="adj" fmla="val 8696"/>
             </a:avLst>
           </a:prstGeom>
           <a:solidFill>
@@ -3963,8 +3963,8 @@
         </p:nvSpPr>
         <p:spPr>
           <a:xfrm>
-            <a:off x="7799832" y="1472184"/>
-            <a:ext cx="3145536" cy="256032"/>
+            <a:off x="7708392" y="1453896"/>
+            <a:ext cx="3282696" cy="228600"/>
           </a:xfrm>
           <a:prstGeom prst="rect">
             <a:avLst/>
@@ -3980,7 +3980,7 @@
               <a:buNone/>
             </a:pPr>
             <a:r>
-              <a:rPr lang="en-US" sz="1300" b="1" dirty="0">
+              <a:rPr lang="en-US" sz="1220" b="1" dirty="0">
                 <a:solidFill>
                   <a:srgbClr val="0068B7"/>
                 </a:solidFill>
@@ -3990,7 +3990,7 @@
               </a:rPr>
               <a:t>Implementation cue</a:t>
             </a:r>
-            <a:endParaRPr lang="en-US" sz="1300" dirty="0"/>
+            <a:endParaRPr lang="en-US" sz="1220" dirty="0"/>
           </a:p>
         </p:txBody>
       </p:sp>
@@ -4002,8 +4002,8 @@
         </p:nvSpPr>
         <p:spPr>
           <a:xfrm>
-            <a:off x="7799832" y="1801368"/>
-            <a:ext cx="3145536" cy="640080"/>
+            <a:off x="7708392" y="1764792"/>
+            <a:ext cx="3282696" cy="749808"/>
           </a:xfrm>
           <a:prstGeom prst="rect">
             <a:avLst/>
@@ -4021,7 +4021,7 @@
               <a:buNone/>
             </a:pPr>
             <a:r>
-              <a:rPr lang="en-US" sz="1320" dirty="0">
+              <a:rPr lang="en-US" sz="1220" dirty="0">
                 <a:solidFill>
                   <a:srgbClr val="17364A"/>
                 </a:solidFill>
@@ -4029,9 +4029,9 @@
                 <a:ea typeface="Aptos" pitchFamily="34" charset="-122"/>
                 <a:cs typeface="Aptos" pitchFamily="34" charset="-120"/>
               </a:rPr>
-              <a:t>Generative AI adoption requires training on review, citation, privacy, and public.</a:t>
-            </a:r>
-            <a:endParaRPr lang="en-US" sz="1320" dirty="0"/>
+              <a:t>Generative AI adoption requires training on review, citation, privacy, and.</a:t>
+            </a:r>
+            <a:endParaRPr lang="en-US" sz="1220" dirty="0"/>
           </a:p>
         </p:txBody>
       </p:sp>
@@ -4043,12 +4043,12 @@
         </p:nvSpPr>
         <p:spPr>
           <a:xfrm>
-            <a:off x="7635240" y="2670048"/>
-            <a:ext cx="3474720" cy="1377086"/>
+            <a:off x="7543800" y="2724912"/>
+            <a:ext cx="3611880" cy="1527048"/>
           </a:xfrm>
           <a:prstGeom prst="roundRect">
             <a:avLst>
-              <a:gd name="adj" fmla="val 7968"/>
+              <a:gd name="adj" fmla="val 7186"/>
             </a:avLst>
           </a:prstGeom>
           <a:solidFill>
@@ -4070,8 +4070,8 @@
         </p:nvSpPr>
         <p:spPr>
           <a:xfrm>
-            <a:off x="7799832" y="2816352"/>
-            <a:ext cx="3145536" cy="256032"/>
+            <a:off x="7708392" y="2852928"/>
+            <a:ext cx="3282696" cy="228600"/>
           </a:xfrm>
           <a:prstGeom prst="rect">
             <a:avLst/>
@@ -4087,7 +4087,7 @@
               <a:buNone/>
             </a:pPr>
             <a:r>
-              <a:rPr lang="en-US" sz="1300" b="1" dirty="0">
+              <a:rPr lang="en-US" sz="1220" b="1" dirty="0">
                 <a:solidFill>
                   <a:srgbClr val="0068B7"/>
                 </a:solidFill>
@@ -4097,7 +4097,7 @@
               </a:rPr>
               <a:t>Concept checkpoints</a:t>
             </a:r>
-            <a:endParaRPr lang="en-US" sz="1300" dirty="0"/>
+            <a:endParaRPr lang="en-US" sz="1220" dirty="0"/>
           </a:p>
         </p:txBody>
       </p:sp>
@@ -4109,8 +4109,8 @@
         </p:nvSpPr>
         <p:spPr>
           <a:xfrm>
-            <a:off x="7818120" y="3182112"/>
-            <a:ext cx="3090672" cy="718718"/>
+            <a:off x="7726680" y="3182112"/>
+            <a:ext cx="3227832" cy="960120"/>
           </a:xfrm>
           <a:prstGeom prst="rect">
             <a:avLst/>
@@ -4128,7 +4128,7 @@
               <a:buNone/>
             </a:pPr>
             <a:r>
-              <a:rPr lang="en-US" sz="1220" dirty="0">
+              <a:rPr lang="en-US" sz="1140" dirty="0">
                 <a:solidFill>
                   <a:srgbClr val="17364A"/>
                 </a:solidFill>
@@ -4136,16 +4136,16 @@
                 <a:ea typeface="Aptos" pitchFamily="34" charset="-122"/>
                 <a:cs typeface="Aptos" pitchFamily="34" charset="-120"/>
               </a:rPr>
-              <a:t>Predictive analytics adoption requires training on interpretation,.</a:t>
-            </a:r>
-            <a:endParaRPr lang="en-US" sz="1220" dirty="0"/>
-          </a:p>
-          <a:p>
-            <a:pPr indent="0" marL="0">
-              <a:buNone/>
-            </a:pPr>
-            <a:r>
-              <a:rPr lang="en-US" sz="1220" dirty="0">
+              <a:t>Predictive analytics adoption requires training on.</a:t>
+            </a:r>
+            <a:endParaRPr lang="en-US" sz="1140" dirty="0"/>
+          </a:p>
+          <a:p>
+            <a:pPr indent="0" marL="0">
+              <a:buNone/>
+            </a:pPr>
+            <a:r>
+              <a:rPr lang="en-US" sz="1140" dirty="0">
                 <a:solidFill>
                   <a:srgbClr val="17364A"/>
                 </a:solidFill>
@@ -4153,9 +4153,9 @@
                 <a:ea typeface="Aptos" pitchFamily="34" charset="-122"/>
                 <a:cs typeface="Aptos" pitchFamily="34" charset="-120"/>
               </a:rPr>
-              <a:t>Each AI type changes work in different ways, so change management.</a:t>
-            </a:r>
-            <a:endParaRPr lang="en-US" sz="1220" dirty="0"/>
+              <a:t>Each AI type changes work in different ways, so.</a:t>
+            </a:r>
+            <a:endParaRPr lang="en-US" sz="1140" dirty="0"/>
           </a:p>
         </p:txBody>
       </p:sp>
@@ -4167,12 +4167,12 @@
         </p:nvSpPr>
         <p:spPr>
           <a:xfrm>
-            <a:off x="7635240" y="4184294"/>
-            <a:ext cx="3474720" cy="1466698"/>
+            <a:off x="7543800" y="4389120"/>
+            <a:ext cx="3611880" cy="1261872"/>
           </a:xfrm>
           <a:prstGeom prst="roundRect">
             <a:avLst>
-              <a:gd name="adj" fmla="val 7481"/>
+              <a:gd name="adj" fmla="val 8696"/>
             </a:avLst>
           </a:prstGeom>
           <a:solidFill>
@@ -4194,8 +4194,8 @@
         </p:nvSpPr>
         <p:spPr>
           <a:xfrm>
-            <a:off x="7799832" y="4330598"/>
-            <a:ext cx="3145536" cy="256032"/>
+            <a:off x="7708392" y="4517136"/>
+            <a:ext cx="3282696" cy="228600"/>
           </a:xfrm>
           <a:prstGeom prst="rect">
             <a:avLst/>
@@ -4211,7 +4211,7 @@
               <a:buNone/>
             </a:pPr>
             <a:r>
-              <a:rPr lang="en-US" sz="1300" b="1" dirty="0">
+              <a:rPr lang="en-US" sz="1220" b="1" dirty="0">
                 <a:solidFill>
                   <a:srgbClr val="0068B7"/>
                 </a:solidFill>
@@ -4221,7 +4221,7 @@
               </a:rPr>
               <a:t>Next action</a:t>
             </a:r>
-            <a:endParaRPr lang="en-US" sz="1300" dirty="0"/>
+            <a:endParaRPr lang="en-US" sz="1220" dirty="0"/>
           </a:p>
         </p:txBody>
       </p:sp>
@@ -4233,8 +4233,8 @@
         </p:nvSpPr>
         <p:spPr>
           <a:xfrm>
-            <a:off x="7799832" y="4659782"/>
-            <a:ext cx="3145536" cy="899770"/>
+            <a:off x="7708392" y="4828032"/>
+            <a:ext cx="3282696" cy="749808"/>
           </a:xfrm>
           <a:prstGeom prst="rect">
             <a:avLst/>
@@ -4252,7 +4252,7 @@
               <a:buNone/>
             </a:pPr>
             <a:r>
-              <a:rPr lang="en-US" sz="1320" dirty="0">
+              <a:rPr lang="en-US" sz="1220" dirty="0">
                 <a:solidFill>
                   <a:srgbClr val="17364A"/>
                 </a:solidFill>
@@ -4260,9 +4260,9 @@
                 <a:ea typeface="Aptos" pitchFamily="34" charset="-122"/>
                 <a:cs typeface="Aptos" pitchFamily="34" charset="-120"/>
               </a:rPr>
-              <a:t>Use the concept to clarify workflow changes, dependencies, staffing, procurement requirements, training needs, and implementation checkpoints.</a:t>
-            </a:r>
-            <a:endParaRPr lang="en-US" sz="1320" dirty="0"/>
+              <a:t>Use the concept to clarify workflow changes, dependencies, staffing, procurement.</a:t>
+            </a:r>
+            <a:endParaRPr lang="en-US" sz="1220" dirty="0"/>
           </a:p>
         </p:txBody>
       </p:sp>
@@ -4553,8 +4553,8 @@
         </p:nvSpPr>
         <p:spPr>
           <a:xfrm>
-            <a:off x="868680" y="1508760"/>
-            <a:ext cx="6309360" cy="4160520"/>
+            <a:off x="822960" y="1463040"/>
+            <a:ext cx="6565392" cy="4343400"/>
           </a:xfrm>
           <a:prstGeom prst="rect">
             <a:avLst/>
@@ -4572,7 +4572,7 @@
               <a:buNone/>
             </a:pPr>
             <a:r>
-              <a:rPr lang="en-US" sz="2100" dirty="0">
+              <a:rPr lang="en-US" sz="1920" dirty="0">
                 <a:solidFill>
                   <a:srgbClr val="003A63"/>
                 </a:solidFill>
@@ -4580,16 +4580,16 @@
                 <a:ea typeface="Aptos" pitchFamily="34" charset="-122"/>
                 <a:cs typeface="Aptos" pitchFamily="34" charset="-120"/>
               </a:rPr>
-              <a:t>• Which current or proposed AI use case in your agency raises this leadership or governance.</a:t>
-            </a:r>
-            <a:endParaRPr lang="en-US" sz="2100" dirty="0"/>
-          </a:p>
-          <a:p>
-            <a:pPr indent="0" marL="0">
-              <a:buNone/>
-            </a:pPr>
-            <a:r>
-              <a:rPr lang="en-US" sz="2100" dirty="0">
+              <a:t>• Which current or proposed AI use case in your agency raises this leadership.</a:t>
+            </a:r>
+            <a:endParaRPr lang="en-US" sz="1920" dirty="0"/>
+          </a:p>
+          <a:p>
+            <a:pPr indent="0" marL="0">
+              <a:buNone/>
+            </a:pPr>
+            <a:r>
+              <a:rPr lang="en-US" sz="1920" dirty="0">
                 <a:solidFill>
                   <a:srgbClr val="003A63"/>
                 </a:solidFill>
@@ -4597,16 +4597,16 @@
                 <a:ea typeface="Aptos" pitchFamily="34" charset="-122"/>
                 <a:cs typeface="Aptos" pitchFamily="34" charset="-120"/>
               </a:rPr>
-              <a:t>• Who currently has authority to make decisions about this issue, and is that authority.</a:t>
-            </a:r>
-            <a:endParaRPr lang="en-US" sz="2100" dirty="0"/>
-          </a:p>
-          <a:p>
-            <a:pPr indent="0" marL="0">
-              <a:buNone/>
-            </a:pPr>
-            <a:r>
-              <a:rPr lang="en-US" sz="2100" dirty="0">
+              <a:t>• Who currently has authority to make decisions about this issue, and is that.</a:t>
+            </a:r>
+            <a:endParaRPr lang="en-US" sz="1920" dirty="0"/>
+          </a:p>
+          <a:p>
+            <a:pPr indent="0" marL="0">
+              <a:buNone/>
+            </a:pPr>
+            <a:r>
+              <a:rPr lang="en-US" sz="1920" dirty="0">
                 <a:solidFill>
                   <a:srgbClr val="003A63"/>
                 </a:solidFill>
@@ -4614,9 +4614,9 @@
                 <a:ea typeface="Aptos" pitchFamily="34" charset="-122"/>
                 <a:cs typeface="Aptos" pitchFamily="34" charset="-120"/>
               </a:rPr>
-              <a:t>• What evidence would governance or leadership need before approving the use case?</a:t>
-            </a:r>
-            <a:endParaRPr lang="en-US" sz="2100" dirty="0"/>
+              <a:t>• What evidence would governance or leadership need before approving the use.</a:t>
+            </a:r>
+            <a:endParaRPr lang="en-US" sz="1920" dirty="0"/>
           </a:p>
         </p:txBody>
       </p:sp>
@@ -4628,12 +4628,12 @@
         </p:nvSpPr>
         <p:spPr>
           <a:xfrm>
-            <a:off x="7635240" y="1325880"/>
-            <a:ext cx="3474720" cy="1255471"/>
+            <a:off x="7543800" y="1325880"/>
+            <a:ext cx="3611880" cy="1261872"/>
           </a:xfrm>
           <a:prstGeom prst="roundRect">
             <a:avLst>
-              <a:gd name="adj" fmla="val 8740"/>
+              <a:gd name="adj" fmla="val 8696"/>
             </a:avLst>
           </a:prstGeom>
           <a:solidFill>
@@ -4655,8 +4655,8 @@
         </p:nvSpPr>
         <p:spPr>
           <a:xfrm>
-            <a:off x="7799832" y="1472184"/>
-            <a:ext cx="3145536" cy="256032"/>
+            <a:off x="7708392" y="1453896"/>
+            <a:ext cx="3282696" cy="228600"/>
           </a:xfrm>
           <a:prstGeom prst="rect">
             <a:avLst/>
@@ -4672,7 +4672,7 @@
               <a:buNone/>
             </a:pPr>
             <a:r>
-              <a:rPr lang="en-US" sz="1300" b="1" dirty="0">
+              <a:rPr lang="en-US" sz="1220" b="1" dirty="0">
                 <a:solidFill>
                   <a:srgbClr val="0068B7"/>
                 </a:solidFill>
@@ -4682,7 +4682,7 @@
               </a:rPr>
               <a:t>Implementation cue</a:t>
             </a:r>
-            <a:endParaRPr lang="en-US" sz="1300" dirty="0"/>
+            <a:endParaRPr lang="en-US" sz="1220" dirty="0"/>
           </a:p>
         </p:txBody>
       </p:sp>
@@ -4694,8 +4694,8 @@
         </p:nvSpPr>
         <p:spPr>
           <a:xfrm>
-            <a:off x="7799832" y="1801368"/>
-            <a:ext cx="3145536" cy="688543"/>
+            <a:off x="7708392" y="1764792"/>
+            <a:ext cx="3282696" cy="749808"/>
           </a:xfrm>
           <a:prstGeom prst="rect">
             <a:avLst/>
@@ -4713,7 +4713,7 @@
               <a:buNone/>
             </a:pPr>
             <a:r>
-              <a:rPr lang="en-US" sz="1320" dirty="0">
+              <a:rPr lang="en-US" sz="1220" dirty="0">
                 <a:solidFill>
                   <a:srgbClr val="17364A"/>
                 </a:solidFill>
@@ -4721,9 +4721,9 @@
                 <a:ea typeface="Aptos" pitchFamily="34" charset="-122"/>
                 <a:cs typeface="Aptos" pitchFamily="34" charset="-120"/>
               </a:rPr>
-              <a:t>Which current or proposed AI use case in your agency raises this leadership or governance issue most.</a:t>
-            </a:r>
-            <a:endParaRPr lang="en-US" sz="1320" dirty="0"/>
+              <a:t>Which current or proposed AI use case in your agency raises this leadership or.</a:t>
+            </a:r>
+            <a:endParaRPr lang="en-US" sz="1220" dirty="0"/>
           </a:p>
         </p:txBody>
       </p:sp>
@@ -4735,12 +4735,12 @@
         </p:nvSpPr>
         <p:spPr>
           <a:xfrm>
-            <a:off x="7635240" y="2718511"/>
-            <a:ext cx="3474720" cy="1328623"/>
+            <a:off x="7543800" y="2724912"/>
+            <a:ext cx="3611880" cy="1527048"/>
           </a:xfrm>
           <a:prstGeom prst="roundRect">
             <a:avLst>
-              <a:gd name="adj" fmla="val 8259"/>
+              <a:gd name="adj" fmla="val 7186"/>
             </a:avLst>
           </a:prstGeom>
           <a:solidFill>
@@ -4762,8 +4762,8 @@
         </p:nvSpPr>
         <p:spPr>
           <a:xfrm>
-            <a:off x="7799832" y="2864815"/>
-            <a:ext cx="3145536" cy="256032"/>
+            <a:off x="7708392" y="2852928"/>
+            <a:ext cx="3282696" cy="228600"/>
           </a:xfrm>
           <a:prstGeom prst="rect">
             <a:avLst/>
@@ -4779,7 +4779,7 @@
               <a:buNone/>
             </a:pPr>
             <a:r>
-              <a:rPr lang="en-US" sz="1300" b="1" dirty="0">
+              <a:rPr lang="en-US" sz="1220" b="1" dirty="0">
                 <a:solidFill>
                   <a:srgbClr val="0068B7"/>
                 </a:solidFill>
@@ -4789,7 +4789,7 @@
               </a:rPr>
               <a:t>Concept checkpoints</a:t>
             </a:r>
-            <a:endParaRPr lang="en-US" sz="1300" dirty="0"/>
+            <a:endParaRPr lang="en-US" sz="1220" dirty="0"/>
           </a:p>
         </p:txBody>
       </p:sp>
@@ -4801,8 +4801,8 @@
         </p:nvSpPr>
         <p:spPr>
           <a:xfrm>
-            <a:off x="7818120" y="3230575"/>
-            <a:ext cx="3090672" cy="670255"/>
+            <a:off x="7726680" y="3182112"/>
+            <a:ext cx="3227832" cy="960120"/>
           </a:xfrm>
           <a:prstGeom prst="rect">
             <a:avLst/>
@@ -4820,7 +4820,7 @@
               <a:buNone/>
             </a:pPr>
             <a:r>
-              <a:rPr lang="en-US" sz="1220" dirty="0">
+              <a:rPr lang="en-US" sz="1140" dirty="0">
                 <a:solidFill>
                   <a:srgbClr val="17364A"/>
                 </a:solidFill>
@@ -4828,16 +4828,16 @@
                 <a:ea typeface="Aptos" pitchFamily="34" charset="-122"/>
                 <a:cs typeface="Aptos" pitchFamily="34" charset="-120"/>
               </a:rPr>
-              <a:t>Which current or proposed AI use case in your agency raises this.</a:t>
-            </a:r>
-            <a:endParaRPr lang="en-US" sz="1220" dirty="0"/>
-          </a:p>
-          <a:p>
-            <a:pPr indent="0" marL="0">
-              <a:buNone/>
-            </a:pPr>
-            <a:r>
-              <a:rPr lang="en-US" sz="1220" dirty="0">
+              <a:t>Which current or proposed AI use case in your.</a:t>
+            </a:r>
+            <a:endParaRPr lang="en-US" sz="1140" dirty="0"/>
+          </a:p>
+          <a:p>
+            <a:pPr indent="0" marL="0">
+              <a:buNone/>
+            </a:pPr>
+            <a:r>
+              <a:rPr lang="en-US" sz="1140" dirty="0">
                 <a:solidFill>
                   <a:srgbClr val="17364A"/>
                 </a:solidFill>
@@ -4845,16 +4845,16 @@
                 <a:ea typeface="Aptos" pitchFamily="34" charset="-122"/>
                 <a:cs typeface="Aptos" pitchFamily="34" charset="-120"/>
               </a:rPr>
-              <a:t>Who currently has authority to make decisions about this issue,.</a:t>
-            </a:r>
-            <a:endParaRPr lang="en-US" sz="1220" dirty="0"/>
-          </a:p>
-          <a:p>
-            <a:pPr indent="0" marL="0">
-              <a:buNone/>
-            </a:pPr>
-            <a:r>
-              <a:rPr lang="en-US" sz="1220" dirty="0">
+              <a:t>Who currently has authority to make decisions.</a:t>
+            </a:r>
+            <a:endParaRPr lang="en-US" sz="1140" dirty="0"/>
+          </a:p>
+          <a:p>
+            <a:pPr indent="0" marL="0">
+              <a:buNone/>
+            </a:pPr>
+            <a:r>
+              <a:rPr lang="en-US" sz="1140" dirty="0">
                 <a:solidFill>
                   <a:srgbClr val="17364A"/>
                 </a:solidFill>
@@ -4862,9 +4862,9 @@
                 <a:ea typeface="Aptos" pitchFamily="34" charset="-122"/>
                 <a:cs typeface="Aptos" pitchFamily="34" charset="-120"/>
               </a:rPr>
-              <a:t>What evidence would governance or leadership need before approving.</a:t>
-            </a:r>
-            <a:endParaRPr lang="en-US" sz="1220" dirty="0"/>
+              <a:t>What evidence would governance or leadership need.</a:t>
+            </a:r>
+            <a:endParaRPr lang="en-US" sz="1140" dirty="0"/>
           </a:p>
         </p:txBody>
       </p:sp>
@@ -4876,12 +4876,12 @@
         </p:nvSpPr>
         <p:spPr>
           <a:xfrm>
-            <a:off x="7635240" y="4184294"/>
-            <a:ext cx="3474720" cy="1466698"/>
+            <a:off x="7543800" y="4389120"/>
+            <a:ext cx="3611880" cy="1261872"/>
           </a:xfrm>
           <a:prstGeom prst="roundRect">
             <a:avLst>
-              <a:gd name="adj" fmla="val 7481"/>
+              <a:gd name="adj" fmla="val 8696"/>
             </a:avLst>
           </a:prstGeom>
           <a:solidFill>
@@ -4903,8 +4903,8 @@
         </p:nvSpPr>
         <p:spPr>
           <a:xfrm>
-            <a:off x="7799832" y="4330598"/>
-            <a:ext cx="3145536" cy="256032"/>
+            <a:off x="7708392" y="4517136"/>
+            <a:ext cx="3282696" cy="228600"/>
           </a:xfrm>
           <a:prstGeom prst="rect">
             <a:avLst/>
@@ -4920,7 +4920,7 @@
               <a:buNone/>
             </a:pPr>
             <a:r>
-              <a:rPr lang="en-US" sz="1300" b="1" dirty="0">
+              <a:rPr lang="en-US" sz="1220" b="1" dirty="0">
                 <a:solidFill>
                   <a:srgbClr val="0068B7"/>
                 </a:solidFill>
@@ -4930,7 +4930,7 @@
               </a:rPr>
               <a:t>Next action</a:t>
             </a:r>
-            <a:endParaRPr lang="en-US" sz="1300" dirty="0"/>
+            <a:endParaRPr lang="en-US" sz="1220" dirty="0"/>
           </a:p>
         </p:txBody>
       </p:sp>
@@ -4942,8 +4942,8 @@
         </p:nvSpPr>
         <p:spPr>
           <a:xfrm>
-            <a:off x="7799832" y="4659782"/>
-            <a:ext cx="3145536" cy="899770"/>
+            <a:off x="7708392" y="4828032"/>
+            <a:ext cx="3282696" cy="749808"/>
           </a:xfrm>
           <a:prstGeom prst="rect">
             <a:avLst/>
@@ -4961,7 +4961,7 @@
               <a:buNone/>
             </a:pPr>
             <a:r>
-              <a:rPr lang="en-US" sz="1320" dirty="0">
+              <a:rPr lang="en-US" sz="1220" dirty="0">
                 <a:solidFill>
                   <a:srgbClr val="17364A"/>
                 </a:solidFill>
@@ -4969,9 +4969,9 @@
                 <a:ea typeface="Aptos" pitchFamily="34" charset="-122"/>
                 <a:cs typeface="Aptos" pitchFamily="34" charset="-120"/>
               </a:rPr>
-              <a:t>Use the concept to clarify workflow changes, dependencies, staffing, procurement requirements, training needs, and implementation checkpoints.</a:t>
-            </a:r>
-            <a:endParaRPr lang="en-US" sz="1320" dirty="0"/>
+              <a:t>Use the concept to clarify workflow changes, dependencies, staffing, procurement.</a:t>
+            </a:r>
+            <a:endParaRPr lang="en-US" sz="1220" dirty="0"/>
           </a:p>
         </p:txBody>
       </p:sp>
@@ -5262,8 +5262,8 @@
         </p:nvSpPr>
         <p:spPr>
           <a:xfrm>
-            <a:off x="868680" y="1508760"/>
-            <a:ext cx="6309360" cy="4160520"/>
+            <a:off x="822960" y="1463040"/>
+            <a:ext cx="6565392" cy="4343400"/>
           </a:xfrm>
           <a:prstGeom prst="rect">
             <a:avLst/>
@@ -5281,7 +5281,7 @@
               <a:buNone/>
             </a:pPr>
             <a:r>
-              <a:rPr lang="en-US" sz="2100" dirty="0">
+              <a:rPr lang="en-US" sz="1920" dirty="0">
                 <a:solidFill>
                   <a:srgbClr val="003A63"/>
                 </a:solidFill>
@@ -5289,16 +5289,16 @@
                 <a:ea typeface="Aptos" pitchFamily="34" charset="-122"/>
                 <a:cs typeface="Aptos" pitchFamily="34" charset="-120"/>
               </a:rPr>
-              <a:t>• Which staff, partners, or communities would be affected if this issue were handled poorly?</a:t>
-            </a:r>
-            <a:endParaRPr lang="en-US" sz="2100" dirty="0"/>
-          </a:p>
-          <a:p>
-            <a:pPr indent="0" marL="0">
-              <a:buNone/>
-            </a:pPr>
-            <a:r>
-              <a:rPr lang="en-US" sz="2100" dirty="0">
+              <a:t>• Which staff, partners, or communities would be affected if this issue were.</a:t>
+            </a:r>
+            <a:endParaRPr lang="en-US" sz="1920" dirty="0"/>
+          </a:p>
+          <a:p>
+            <a:pPr indent="0" marL="0">
+              <a:buNone/>
+            </a:pPr>
+            <a:r>
+              <a:rPr lang="en-US" sz="1920" dirty="0">
                 <a:solidFill>
                   <a:srgbClr val="003A63"/>
                 </a:solidFill>
@@ -5306,9 +5306,9 @@
                 <a:ea typeface="Aptos" pitchFamily="34" charset="-122"/>
                 <a:cs typeface="Aptos" pitchFamily="34" charset="-120"/>
               </a:rPr>
-              <a:t>• What policy, process, or artifact should be created or updated after this module?</a:t>
-            </a:r>
-            <a:endParaRPr lang="en-US" sz="2100" dirty="0"/>
+              <a:t>• What policy, process, or artifact should be created or updated after this.</a:t>
+            </a:r>
+            <a:endParaRPr lang="en-US" sz="1920" dirty="0"/>
           </a:p>
         </p:txBody>
       </p:sp>
@@ -5320,12 +5320,12 @@
         </p:nvSpPr>
         <p:spPr>
           <a:xfrm>
-            <a:off x="7635240" y="1325880"/>
-            <a:ext cx="3474720" cy="1207008"/>
+            <a:off x="7543800" y="1325880"/>
+            <a:ext cx="3611880" cy="1261872"/>
           </a:xfrm>
           <a:prstGeom prst="roundRect">
             <a:avLst>
-              <a:gd name="adj" fmla="val 9091"/>
+              <a:gd name="adj" fmla="val 8696"/>
             </a:avLst>
           </a:prstGeom>
           <a:solidFill>
@@ -5347,8 +5347,8 @@
         </p:nvSpPr>
         <p:spPr>
           <a:xfrm>
-            <a:off x="7799832" y="1472184"/>
-            <a:ext cx="3145536" cy="256032"/>
+            <a:off x="7708392" y="1453896"/>
+            <a:ext cx="3282696" cy="228600"/>
           </a:xfrm>
           <a:prstGeom prst="rect">
             <a:avLst/>
@@ -5364,7 +5364,7 @@
               <a:buNone/>
             </a:pPr>
             <a:r>
-              <a:rPr lang="en-US" sz="1300" b="1" dirty="0">
+              <a:rPr lang="en-US" sz="1220" b="1" dirty="0">
                 <a:solidFill>
                   <a:srgbClr val="0068B7"/>
                 </a:solidFill>
@@ -5374,7 +5374,7 @@
               </a:rPr>
               <a:t>Implementation cue</a:t>
             </a:r>
-            <a:endParaRPr lang="en-US" sz="1300" dirty="0"/>
+            <a:endParaRPr lang="en-US" sz="1220" dirty="0"/>
           </a:p>
         </p:txBody>
       </p:sp>
@@ -5386,8 +5386,8 @@
         </p:nvSpPr>
         <p:spPr>
           <a:xfrm>
-            <a:off x="7799832" y="1801368"/>
-            <a:ext cx="3145536" cy="640080"/>
+            <a:off x="7708392" y="1764792"/>
+            <a:ext cx="3282696" cy="749808"/>
           </a:xfrm>
           <a:prstGeom prst="rect">
             <a:avLst/>
@@ -5405,7 +5405,7 @@
               <a:buNone/>
             </a:pPr>
             <a:r>
-              <a:rPr lang="en-US" sz="1320" dirty="0">
+              <a:rPr lang="en-US" sz="1220" dirty="0">
                 <a:solidFill>
                   <a:srgbClr val="17364A"/>
                 </a:solidFill>
@@ -5413,9 +5413,9 @@
                 <a:ea typeface="Aptos" pitchFamily="34" charset="-122"/>
                 <a:cs typeface="Aptos" pitchFamily="34" charset="-120"/>
               </a:rPr>
-              <a:t>Which staff, partners, or communities would be affected if this issue were handled.</a:t>
-            </a:r>
-            <a:endParaRPr lang="en-US" sz="1320" dirty="0"/>
+              <a:t>Which staff, partners, or communities would be affected if this issue were.</a:t>
+            </a:r>
+            <a:endParaRPr lang="en-US" sz="1220" dirty="0"/>
           </a:p>
         </p:txBody>
       </p:sp>
@@ -5427,12 +5427,12 @@
         </p:nvSpPr>
         <p:spPr>
           <a:xfrm>
-            <a:off x="7635240" y="2670048"/>
-            <a:ext cx="3474720" cy="1377086"/>
+            <a:off x="7543800" y="2724912"/>
+            <a:ext cx="3611880" cy="1527048"/>
           </a:xfrm>
           <a:prstGeom prst="roundRect">
             <a:avLst>
-              <a:gd name="adj" fmla="val 7968"/>
+              <a:gd name="adj" fmla="val 7186"/>
             </a:avLst>
           </a:prstGeom>
           <a:solidFill>
@@ -5454,8 +5454,8 @@
         </p:nvSpPr>
         <p:spPr>
           <a:xfrm>
-            <a:off x="7799832" y="2816352"/>
-            <a:ext cx="3145536" cy="256032"/>
+            <a:off x="7708392" y="2852928"/>
+            <a:ext cx="3282696" cy="228600"/>
           </a:xfrm>
           <a:prstGeom prst="rect">
             <a:avLst/>
@@ -5471,7 +5471,7 @@
               <a:buNone/>
             </a:pPr>
             <a:r>
-              <a:rPr lang="en-US" sz="1300" b="1" dirty="0">
+              <a:rPr lang="en-US" sz="1220" b="1" dirty="0">
                 <a:solidFill>
                   <a:srgbClr val="0068B7"/>
                 </a:solidFill>
@@ -5481,7 +5481,7 @@
               </a:rPr>
               <a:t>Concept checkpoints</a:t>
             </a:r>
-            <a:endParaRPr lang="en-US" sz="1300" dirty="0"/>
+            <a:endParaRPr lang="en-US" sz="1220" dirty="0"/>
           </a:p>
         </p:txBody>
       </p:sp>
@@ -5493,8 +5493,8 @@
         </p:nvSpPr>
         <p:spPr>
           <a:xfrm>
-            <a:off x="7818120" y="3182112"/>
-            <a:ext cx="3090672" cy="718718"/>
+            <a:off x="7726680" y="3182112"/>
+            <a:ext cx="3227832" cy="960120"/>
           </a:xfrm>
           <a:prstGeom prst="rect">
             <a:avLst/>
@@ -5512,7 +5512,7 @@
               <a:buNone/>
             </a:pPr>
             <a:r>
-              <a:rPr lang="en-US" sz="1220" dirty="0">
+              <a:rPr lang="en-US" sz="1140" dirty="0">
                 <a:solidFill>
                   <a:srgbClr val="17364A"/>
                 </a:solidFill>
@@ -5520,16 +5520,16 @@
                 <a:ea typeface="Aptos" pitchFamily="34" charset="-122"/>
                 <a:cs typeface="Aptos" pitchFamily="34" charset="-120"/>
               </a:rPr>
-              <a:t>Which staff, partners, or communities would be affected if this.</a:t>
-            </a:r>
-            <a:endParaRPr lang="en-US" sz="1220" dirty="0"/>
-          </a:p>
-          <a:p>
-            <a:pPr indent="0" marL="0">
-              <a:buNone/>
-            </a:pPr>
-            <a:r>
-              <a:rPr lang="en-US" sz="1220" dirty="0">
+              <a:t>Which staff, partners, or communities would be.</a:t>
+            </a:r>
+            <a:endParaRPr lang="en-US" sz="1140" dirty="0"/>
+          </a:p>
+          <a:p>
+            <a:pPr indent="0" marL="0">
+              <a:buNone/>
+            </a:pPr>
+            <a:r>
+              <a:rPr lang="en-US" sz="1140" dirty="0">
                 <a:solidFill>
                   <a:srgbClr val="17364A"/>
                 </a:solidFill>
@@ -5537,9 +5537,9 @@
                 <a:ea typeface="Aptos" pitchFamily="34" charset="-122"/>
                 <a:cs typeface="Aptos" pitchFamily="34" charset="-120"/>
               </a:rPr>
-              <a:t>What policy, process, or artifact should be created or updated.</a:t>
-            </a:r>
-            <a:endParaRPr lang="en-US" sz="1220" dirty="0"/>
+              <a:t>What policy, process, or artifact should be.</a:t>
+            </a:r>
+            <a:endParaRPr lang="en-US" sz="1140" dirty="0"/>
           </a:p>
         </p:txBody>
       </p:sp>
@@ -5551,12 +5551,12 @@
         </p:nvSpPr>
         <p:spPr>
           <a:xfrm>
-            <a:off x="7635240" y="4184294"/>
-            <a:ext cx="3474720" cy="1466698"/>
+            <a:off x="7543800" y="4389120"/>
+            <a:ext cx="3611880" cy="1261872"/>
           </a:xfrm>
           <a:prstGeom prst="roundRect">
             <a:avLst>
-              <a:gd name="adj" fmla="val 7481"/>
+              <a:gd name="adj" fmla="val 8696"/>
             </a:avLst>
           </a:prstGeom>
           <a:solidFill>
@@ -5578,8 +5578,8 @@
         </p:nvSpPr>
         <p:spPr>
           <a:xfrm>
-            <a:off x="7799832" y="4330598"/>
-            <a:ext cx="3145536" cy="256032"/>
+            <a:off x="7708392" y="4517136"/>
+            <a:ext cx="3282696" cy="228600"/>
           </a:xfrm>
           <a:prstGeom prst="rect">
             <a:avLst/>
@@ -5595,7 +5595,7 @@
               <a:buNone/>
             </a:pPr>
             <a:r>
-              <a:rPr lang="en-US" sz="1300" b="1" dirty="0">
+              <a:rPr lang="en-US" sz="1220" b="1" dirty="0">
                 <a:solidFill>
                   <a:srgbClr val="0068B7"/>
                 </a:solidFill>
@@ -5605,7 +5605,7 @@
               </a:rPr>
               <a:t>Next action</a:t>
             </a:r>
-            <a:endParaRPr lang="en-US" sz="1300" dirty="0"/>
+            <a:endParaRPr lang="en-US" sz="1220" dirty="0"/>
           </a:p>
         </p:txBody>
       </p:sp>
@@ -5617,8 +5617,8 @@
         </p:nvSpPr>
         <p:spPr>
           <a:xfrm>
-            <a:off x="7799832" y="4659782"/>
-            <a:ext cx="3145536" cy="899770"/>
+            <a:off x="7708392" y="4828032"/>
+            <a:ext cx="3282696" cy="749808"/>
           </a:xfrm>
           <a:prstGeom prst="rect">
             <a:avLst/>
@@ -5636,7 +5636,7 @@
               <a:buNone/>
             </a:pPr>
             <a:r>
-              <a:rPr lang="en-US" sz="1320" dirty="0">
+              <a:rPr lang="en-US" sz="1220" dirty="0">
                 <a:solidFill>
                   <a:srgbClr val="17364A"/>
                 </a:solidFill>
@@ -5644,9 +5644,9 @@
                 <a:ea typeface="Aptos" pitchFamily="34" charset="-122"/>
                 <a:cs typeface="Aptos" pitchFamily="34" charset="-120"/>
               </a:rPr>
-              <a:t>Use the concept to clarify workflow changes, dependencies, staffing, procurement requirements, training needs, and implementation checkpoints.</a:t>
-            </a:r>
-            <a:endParaRPr lang="en-US" sz="1320" dirty="0"/>
+              <a:t>Use the concept to clarify workflow changes, dependencies, staffing, procurement.</a:t>
+            </a:r>
+            <a:endParaRPr lang="en-US" sz="1220" dirty="0"/>
           </a:p>
         </p:txBody>
       </p:sp>
@@ -5937,8 +5937,8 @@
         </p:nvSpPr>
         <p:spPr>
           <a:xfrm>
-            <a:off x="868680" y="1508760"/>
-            <a:ext cx="6309360" cy="4160520"/>
+            <a:off x="822960" y="1463040"/>
+            <a:ext cx="6565392" cy="4343400"/>
           </a:xfrm>
           <a:prstGeom prst="rect">
             <a:avLst/>
@@ -5956,7 +5956,7 @@
               <a:buNone/>
             </a:pPr>
             <a:r>
-              <a:rPr lang="en-US" sz="2100" dirty="0">
+              <a:rPr lang="en-US" sz="1920" dirty="0">
                 <a:solidFill>
                   <a:srgbClr val="003A63"/>
                 </a:solidFill>
@@ -5966,14 +5966,14 @@
               </a:rPr>
               <a:t>• Create a change management plan for one AI use case.</a:t>
             </a:r>
-            <a:endParaRPr lang="en-US" sz="2100" dirty="0"/>
-          </a:p>
-          <a:p>
-            <a:pPr indent="0" marL="0">
-              <a:buNone/>
-            </a:pPr>
-            <a:r>
-              <a:rPr lang="en-US" sz="2100" dirty="0">
+            <a:endParaRPr lang="en-US" sz="1920" dirty="0"/>
+          </a:p>
+          <a:p>
+            <a:pPr indent="0" marL="0">
+              <a:buNone/>
+            </a:pPr>
+            <a:r>
+              <a:rPr lang="en-US" sz="1920" dirty="0">
                 <a:solidFill>
                   <a:srgbClr val="003A63"/>
                 </a:solidFill>
@@ -5981,9 +5981,9 @@
                 <a:ea typeface="Aptos" pitchFamily="34" charset="-122"/>
                 <a:cs typeface="Aptos" pitchFamily="34" charset="-120"/>
               </a:rPr>
-              <a:t>• Include stakeholder map, communication messages, training needs, workflow changes, adoption.</a:t>
-            </a:r>
-            <a:endParaRPr lang="en-US" sz="2100" dirty="0"/>
+              <a:t>• Include stakeholder map, communication messages, training needs, workflow.</a:t>
+            </a:r>
+            <a:endParaRPr lang="en-US" sz="1920" dirty="0"/>
           </a:p>
         </p:txBody>
       </p:sp>
@@ -5995,12 +5995,12 @@
         </p:nvSpPr>
         <p:spPr>
           <a:xfrm>
-            <a:off x="7635240" y="1325880"/>
-            <a:ext cx="3474720" cy="1207008"/>
+            <a:off x="7543800" y="1325880"/>
+            <a:ext cx="3611880" cy="1261872"/>
           </a:xfrm>
           <a:prstGeom prst="roundRect">
             <a:avLst>
-              <a:gd name="adj" fmla="val 9091"/>
+              <a:gd name="adj" fmla="val 8696"/>
             </a:avLst>
           </a:prstGeom>
           <a:solidFill>
@@ -6022,8 +6022,8 @@
         </p:nvSpPr>
         <p:spPr>
           <a:xfrm>
-            <a:off x="7799832" y="1472184"/>
-            <a:ext cx="3145536" cy="256032"/>
+            <a:off x="7708392" y="1453896"/>
+            <a:ext cx="3282696" cy="228600"/>
           </a:xfrm>
           <a:prstGeom prst="rect">
             <a:avLst/>
@@ -6039,7 +6039,7 @@
               <a:buNone/>
             </a:pPr>
             <a:r>
-              <a:rPr lang="en-US" sz="1300" b="1" dirty="0">
+              <a:rPr lang="en-US" sz="1220" b="1" dirty="0">
                 <a:solidFill>
                   <a:srgbClr val="0068B7"/>
                 </a:solidFill>
@@ -6049,7 +6049,7 @@
               </a:rPr>
               <a:t>Implementation cue</a:t>
             </a:r>
-            <a:endParaRPr lang="en-US" sz="1300" dirty="0"/>
+            <a:endParaRPr lang="en-US" sz="1220" dirty="0"/>
           </a:p>
         </p:txBody>
       </p:sp>
@@ -6061,8 +6061,8 @@
         </p:nvSpPr>
         <p:spPr>
           <a:xfrm>
-            <a:off x="7799832" y="1801368"/>
-            <a:ext cx="3145536" cy="640080"/>
+            <a:off x="7708392" y="1764792"/>
+            <a:ext cx="3282696" cy="749808"/>
           </a:xfrm>
           <a:prstGeom prst="rect">
             <a:avLst/>
@@ -6080,7 +6080,7 @@
               <a:buNone/>
             </a:pPr>
             <a:r>
-              <a:rPr lang="en-US" sz="1320" dirty="0">
+              <a:rPr lang="en-US" sz="1220" dirty="0">
                 <a:solidFill>
                   <a:srgbClr val="17364A"/>
                 </a:solidFill>
@@ -6090,7 +6090,7 @@
               </a:rPr>
               <a:t>Create a change management plan for one AI use case.</a:t>
             </a:r>
-            <a:endParaRPr lang="en-US" sz="1320" dirty="0"/>
+            <a:endParaRPr lang="en-US" sz="1220" dirty="0"/>
           </a:p>
         </p:txBody>
       </p:sp>
@@ -6102,12 +6102,12 @@
         </p:nvSpPr>
         <p:spPr>
           <a:xfrm>
-            <a:off x="7635240" y="2670048"/>
-            <a:ext cx="3474720" cy="1377086"/>
+            <a:off x="7543800" y="2724912"/>
+            <a:ext cx="3611880" cy="1527048"/>
           </a:xfrm>
           <a:prstGeom prst="roundRect">
             <a:avLst>
-              <a:gd name="adj" fmla="val 7968"/>
+              <a:gd name="adj" fmla="val 7186"/>
             </a:avLst>
           </a:prstGeom>
           <a:solidFill>
@@ -6129,8 +6129,8 @@
         </p:nvSpPr>
         <p:spPr>
           <a:xfrm>
-            <a:off x="7799832" y="2816352"/>
-            <a:ext cx="3145536" cy="256032"/>
+            <a:off x="7708392" y="2852928"/>
+            <a:ext cx="3282696" cy="228600"/>
           </a:xfrm>
           <a:prstGeom prst="rect">
             <a:avLst/>
@@ -6146,7 +6146,7 @@
               <a:buNone/>
             </a:pPr>
             <a:r>
-              <a:rPr lang="en-US" sz="1300" b="1" dirty="0">
+              <a:rPr lang="en-US" sz="1220" b="1" dirty="0">
                 <a:solidFill>
                   <a:srgbClr val="0068B7"/>
                 </a:solidFill>
@@ -6156,7 +6156,7 @@
               </a:rPr>
               <a:t>Concept checkpoints</a:t>
             </a:r>
-            <a:endParaRPr lang="en-US" sz="1300" dirty="0"/>
+            <a:endParaRPr lang="en-US" sz="1220" dirty="0"/>
           </a:p>
         </p:txBody>
       </p:sp>
@@ -6168,8 +6168,8 @@
         </p:nvSpPr>
         <p:spPr>
           <a:xfrm>
-            <a:off x="7818120" y="3182112"/>
-            <a:ext cx="3090672" cy="718718"/>
+            <a:off x="7726680" y="3182112"/>
+            <a:ext cx="3227832" cy="960120"/>
           </a:xfrm>
           <a:prstGeom prst="rect">
             <a:avLst/>
@@ -6187,7 +6187,7 @@
               <a:buNone/>
             </a:pPr>
             <a:r>
-              <a:rPr lang="en-US" sz="1220" dirty="0">
+              <a:rPr lang="en-US" sz="1140" dirty="0">
                 <a:solidFill>
                   <a:srgbClr val="17364A"/>
                 </a:solidFill>
@@ -6197,14 +6197,14 @@
               </a:rPr>
               <a:t>Create a change management plan for one AI use case.</a:t>
             </a:r>
-            <a:endParaRPr lang="en-US" sz="1220" dirty="0"/>
-          </a:p>
-          <a:p>
-            <a:pPr indent="0" marL="0">
-              <a:buNone/>
-            </a:pPr>
-            <a:r>
-              <a:rPr lang="en-US" sz="1220" dirty="0">
+            <a:endParaRPr lang="en-US" sz="1140" dirty="0"/>
+          </a:p>
+          <a:p>
+            <a:pPr indent="0" marL="0">
+              <a:buNone/>
+            </a:pPr>
+            <a:r>
+              <a:rPr lang="en-US" sz="1140" dirty="0">
                 <a:solidFill>
                   <a:srgbClr val="17364A"/>
                 </a:solidFill>
@@ -6212,9 +6212,9 @@
                 <a:ea typeface="Aptos" pitchFamily="34" charset="-122"/>
                 <a:cs typeface="Aptos" pitchFamily="34" charset="-120"/>
               </a:rPr>
-              <a:t>Include stakeholder map, communication messages, training needs,.</a:t>
-            </a:r>
-            <a:endParaRPr lang="en-US" sz="1220" dirty="0"/>
+              <a:t>Include stakeholder map, communication messages,.</a:t>
+            </a:r>
+            <a:endParaRPr lang="en-US" sz="1140" dirty="0"/>
           </a:p>
         </p:txBody>
       </p:sp>
@@ -6226,12 +6226,12 @@
         </p:nvSpPr>
         <p:spPr>
           <a:xfrm>
-            <a:off x="7635240" y="4184294"/>
-            <a:ext cx="3474720" cy="1466698"/>
+            <a:off x="7543800" y="4389120"/>
+            <a:ext cx="3611880" cy="1261872"/>
           </a:xfrm>
           <a:prstGeom prst="roundRect">
             <a:avLst>
-              <a:gd name="adj" fmla="val 7481"/>
+              <a:gd name="adj" fmla="val 8696"/>
             </a:avLst>
           </a:prstGeom>
           <a:solidFill>
@@ -6253,8 +6253,8 @@
         </p:nvSpPr>
         <p:spPr>
           <a:xfrm>
-            <a:off x="7799832" y="4330598"/>
-            <a:ext cx="3145536" cy="256032"/>
+            <a:off x="7708392" y="4517136"/>
+            <a:ext cx="3282696" cy="228600"/>
           </a:xfrm>
           <a:prstGeom prst="rect">
             <a:avLst/>
@@ -6270,7 +6270,7 @@
               <a:buNone/>
             </a:pPr>
             <a:r>
-              <a:rPr lang="en-US" sz="1300" b="1" dirty="0">
+              <a:rPr lang="en-US" sz="1220" b="1" dirty="0">
                 <a:solidFill>
                   <a:srgbClr val="0068B7"/>
                 </a:solidFill>
@@ -6280,7 +6280,7 @@
               </a:rPr>
               <a:t>Next action</a:t>
             </a:r>
-            <a:endParaRPr lang="en-US" sz="1300" dirty="0"/>
+            <a:endParaRPr lang="en-US" sz="1220" dirty="0"/>
           </a:p>
         </p:txBody>
       </p:sp>
@@ -6292,8 +6292,8 @@
         </p:nvSpPr>
         <p:spPr>
           <a:xfrm>
-            <a:off x="7799832" y="4659782"/>
-            <a:ext cx="3145536" cy="899770"/>
+            <a:off x="7708392" y="4828032"/>
+            <a:ext cx="3282696" cy="749808"/>
           </a:xfrm>
           <a:prstGeom prst="rect">
             <a:avLst/>
@@ -6311,7 +6311,7 @@
               <a:buNone/>
             </a:pPr>
             <a:r>
-              <a:rPr lang="en-US" sz="1320" dirty="0">
+              <a:rPr lang="en-US" sz="1220" dirty="0">
                 <a:solidFill>
                   <a:srgbClr val="17364A"/>
                 </a:solidFill>
@@ -6319,9 +6319,9 @@
                 <a:ea typeface="Aptos" pitchFamily="34" charset="-122"/>
                 <a:cs typeface="Aptos" pitchFamily="34" charset="-120"/>
               </a:rPr>
-              <a:t>Use the assignment to test whether you can explain the concept, apply it to a realistic public health situation, and identify what would need review before the work moves forward.</a:t>
-            </a:r>
-            <a:endParaRPr lang="en-US" sz="1320" dirty="0"/>
+              <a:t>Use the assignment to test whether you can explain the concept, apply it to a.</a:t>
+            </a:r>
+            <a:endParaRPr lang="en-US" sz="1220" dirty="0"/>
           </a:p>
         </p:txBody>
       </p:sp>
@@ -6612,8 +6612,8 @@
         </p:nvSpPr>
         <p:spPr>
           <a:xfrm>
-            <a:off x="868680" y="1508760"/>
-            <a:ext cx="6309360" cy="4160520"/>
+            <a:off x="822960" y="1463040"/>
+            <a:ext cx="6565392" cy="4343400"/>
           </a:xfrm>
           <a:prstGeom prst="rect">
             <a:avLst/>
@@ -6631,7 +6631,7 @@
               <a:buNone/>
             </a:pPr>
             <a:r>
-              <a:rPr lang="en-US" sz="2100" dirty="0">
+              <a:rPr lang="en-US" sz="1920" dirty="0">
                 <a:solidFill>
                   <a:srgbClr val="003A63"/>
                 </a:solidFill>
@@ -6641,14 +6641,14 @@
               </a:rPr>
               <a:t>• Choose a real or realistic public health AI use case.</a:t>
             </a:r>
-            <a:endParaRPr lang="en-US" sz="2100" dirty="0"/>
-          </a:p>
-          <a:p>
-            <a:pPr indent="0" marL="0">
-              <a:buNone/>
-            </a:pPr>
-            <a:r>
-              <a:rPr lang="en-US" sz="2100" dirty="0">
+            <a:endParaRPr lang="en-US" sz="1920" dirty="0"/>
+          </a:p>
+          <a:p>
+            <a:pPr indent="0" marL="0">
+              <a:buNone/>
+            </a:pPr>
+            <a:r>
+              <a:rPr lang="en-US" sz="1920" dirty="0">
                 <a:solidFill>
                   <a:srgbClr val="003A63"/>
                 </a:solidFill>
@@ -6656,16 +6656,16 @@
                 <a:ea typeface="Aptos" pitchFamily="34" charset="-122"/>
                 <a:cs typeface="Aptos" pitchFamily="34" charset="-120"/>
               </a:rPr>
-              <a:t>• Document assumptions, unresolved questions, and which agency roles would need to review the.</a:t>
-            </a:r>
-            <a:endParaRPr lang="en-US" sz="2100" dirty="0"/>
-          </a:p>
-          <a:p>
-            <a:pPr indent="0" marL="0">
-              <a:buNone/>
-            </a:pPr>
-            <a:r>
-              <a:rPr lang="en-US" sz="2100" dirty="0">
+              <a:t>• Document assumptions, unresolved questions, and which agency roles would.</a:t>
+            </a:r>
+            <a:endParaRPr lang="en-US" sz="1920" dirty="0"/>
+          </a:p>
+          <a:p>
+            <a:pPr indent="0" marL="0">
+              <a:buNone/>
+            </a:pPr>
+            <a:r>
+              <a:rPr lang="en-US" sz="1920" dirty="0">
                 <a:solidFill>
                   <a:srgbClr val="003A63"/>
                 </a:solidFill>
@@ -6673,9 +6673,9 @@
                 <a:ea typeface="Aptos" pitchFamily="34" charset="-122"/>
                 <a:cs typeface="Aptos" pitchFamily="34" charset="-120"/>
               </a:rPr>
-              <a:t>• The exercise should produce a work product that could support governance review, leadership.</a:t>
-            </a:r>
-            <a:endParaRPr lang="en-US" sz="2100" dirty="0"/>
+              <a:t>• The exercise should produce a work product that could support governance.</a:t>
+            </a:r>
+            <a:endParaRPr lang="en-US" sz="1920" dirty="0"/>
           </a:p>
         </p:txBody>
       </p:sp>
@@ -6687,12 +6687,12 @@
         </p:nvSpPr>
         <p:spPr>
           <a:xfrm>
-            <a:off x="7635240" y="1325880"/>
-            <a:ext cx="3474720" cy="1207008"/>
+            <a:off x="7543800" y="1325880"/>
+            <a:ext cx="3611880" cy="1261872"/>
           </a:xfrm>
           <a:prstGeom prst="roundRect">
             <a:avLst>
-              <a:gd name="adj" fmla="val 9091"/>
+              <a:gd name="adj" fmla="val 8696"/>
             </a:avLst>
           </a:prstGeom>
           <a:solidFill>
@@ -6714,8 +6714,8 @@
         </p:nvSpPr>
         <p:spPr>
           <a:xfrm>
-            <a:off x="7799832" y="1472184"/>
-            <a:ext cx="3145536" cy="256032"/>
+            <a:off x="7708392" y="1453896"/>
+            <a:ext cx="3282696" cy="228600"/>
           </a:xfrm>
           <a:prstGeom prst="rect">
             <a:avLst/>
@@ -6731,7 +6731,7 @@
               <a:buNone/>
             </a:pPr>
             <a:r>
-              <a:rPr lang="en-US" sz="1300" b="1" dirty="0">
+              <a:rPr lang="en-US" sz="1220" b="1" dirty="0">
                 <a:solidFill>
                   <a:srgbClr val="0068B7"/>
                 </a:solidFill>
@@ -6741,7 +6741,7 @@
               </a:rPr>
               <a:t>Implementation cue</a:t>
             </a:r>
-            <a:endParaRPr lang="en-US" sz="1300" dirty="0"/>
+            <a:endParaRPr lang="en-US" sz="1220" dirty="0"/>
           </a:p>
         </p:txBody>
       </p:sp>
@@ -6753,8 +6753,8 @@
         </p:nvSpPr>
         <p:spPr>
           <a:xfrm>
-            <a:off x="7799832" y="1801368"/>
-            <a:ext cx="3145536" cy="640080"/>
+            <a:off x="7708392" y="1764792"/>
+            <a:ext cx="3282696" cy="749808"/>
           </a:xfrm>
           <a:prstGeom prst="rect">
             <a:avLst/>
@@ -6772,7 +6772,7 @@
               <a:buNone/>
             </a:pPr>
             <a:r>
-              <a:rPr lang="en-US" sz="1320" dirty="0">
+              <a:rPr lang="en-US" sz="1220" dirty="0">
                 <a:solidFill>
                   <a:srgbClr val="17364A"/>
                 </a:solidFill>
@@ -6782,7 +6782,7 @@
               </a:rPr>
               <a:t>Choose a real or realistic public health AI use case.</a:t>
             </a:r>
-            <a:endParaRPr lang="en-US" sz="1320" dirty="0"/>
+            <a:endParaRPr lang="en-US" sz="1220" dirty="0"/>
           </a:p>
         </p:txBody>
       </p:sp>
@@ -6794,12 +6794,12 @@
         </p:nvSpPr>
         <p:spPr>
           <a:xfrm>
-            <a:off x="7635240" y="2670048"/>
-            <a:ext cx="3474720" cy="1377086"/>
+            <a:off x="7543800" y="2724912"/>
+            <a:ext cx="3611880" cy="1527048"/>
           </a:xfrm>
           <a:prstGeom prst="roundRect">
             <a:avLst>
-              <a:gd name="adj" fmla="val 7968"/>
+              <a:gd name="adj" fmla="val 7186"/>
             </a:avLst>
           </a:prstGeom>
           <a:solidFill>
@@ -6821,8 +6821,8 @@
         </p:nvSpPr>
         <p:spPr>
           <a:xfrm>
-            <a:off x="7799832" y="2816352"/>
-            <a:ext cx="3145536" cy="256032"/>
+            <a:off x="7708392" y="2852928"/>
+            <a:ext cx="3282696" cy="228600"/>
           </a:xfrm>
           <a:prstGeom prst="rect">
             <a:avLst/>
@@ -6838,7 +6838,7 @@
               <a:buNone/>
             </a:pPr>
             <a:r>
-              <a:rPr lang="en-US" sz="1300" b="1" dirty="0">
+              <a:rPr lang="en-US" sz="1220" b="1" dirty="0">
                 <a:solidFill>
                   <a:srgbClr val="0068B7"/>
                 </a:solidFill>
@@ -6848,7 +6848,7 @@
               </a:rPr>
               <a:t>Concept checkpoints</a:t>
             </a:r>
-            <a:endParaRPr lang="en-US" sz="1300" dirty="0"/>
+            <a:endParaRPr lang="en-US" sz="1220" dirty="0"/>
           </a:p>
         </p:txBody>
       </p:sp>
@@ -6860,8 +6860,8 @@
         </p:nvSpPr>
         <p:spPr>
           <a:xfrm>
-            <a:off x="7818120" y="3182112"/>
-            <a:ext cx="3090672" cy="718718"/>
+            <a:off x="7726680" y="3182112"/>
+            <a:ext cx="3227832" cy="960120"/>
           </a:xfrm>
           <a:prstGeom prst="rect">
             <a:avLst/>
@@ -6879,7 +6879,7 @@
               <a:buNone/>
             </a:pPr>
             <a:r>
-              <a:rPr lang="en-US" sz="1220" dirty="0">
+              <a:rPr lang="en-US" sz="1140" dirty="0">
                 <a:solidFill>
                   <a:srgbClr val="17364A"/>
                 </a:solidFill>
@@ -6887,16 +6887,16 @@
                 <a:ea typeface="Aptos" pitchFamily="34" charset="-122"/>
                 <a:cs typeface="Aptos" pitchFamily="34" charset="-120"/>
               </a:rPr>
-              <a:t>Document assumptions, unresolved questions, and which agency roles.</a:t>
-            </a:r>
-            <a:endParaRPr lang="en-US" sz="1220" dirty="0"/>
-          </a:p>
-          <a:p>
-            <a:pPr indent="0" marL="0">
-              <a:buNone/>
-            </a:pPr>
-            <a:r>
-              <a:rPr lang="en-US" sz="1220" dirty="0">
+              <a:t>Document assumptions, unresolved questions, and.</a:t>
+            </a:r>
+            <a:endParaRPr lang="en-US" sz="1140" dirty="0"/>
+          </a:p>
+          <a:p>
+            <a:pPr indent="0" marL="0">
+              <a:buNone/>
+            </a:pPr>
+            <a:r>
+              <a:rPr lang="en-US" sz="1140" dirty="0">
                 <a:solidFill>
                   <a:srgbClr val="17364A"/>
                 </a:solidFill>
@@ -6904,9 +6904,9 @@
                 <a:ea typeface="Aptos" pitchFamily="34" charset="-122"/>
                 <a:cs typeface="Aptos" pitchFamily="34" charset="-120"/>
               </a:rPr>
-              <a:t>The exercise should produce a work product that could support.</a:t>
-            </a:r>
-            <a:endParaRPr lang="en-US" sz="1220" dirty="0"/>
+              <a:t>The exercise should produce a work product that.</a:t>
+            </a:r>
+            <a:endParaRPr lang="en-US" sz="1140" dirty="0"/>
           </a:p>
         </p:txBody>
       </p:sp>
@@ -6918,12 +6918,12 @@
         </p:nvSpPr>
         <p:spPr>
           <a:xfrm>
-            <a:off x="7635240" y="4184294"/>
-            <a:ext cx="3474720" cy="1466698"/>
+            <a:off x="7543800" y="4389120"/>
+            <a:ext cx="3611880" cy="1261872"/>
           </a:xfrm>
           <a:prstGeom prst="roundRect">
             <a:avLst>
-              <a:gd name="adj" fmla="val 7481"/>
+              <a:gd name="adj" fmla="val 8696"/>
             </a:avLst>
           </a:prstGeom>
           <a:solidFill>
@@ -6945,8 +6945,8 @@
         </p:nvSpPr>
         <p:spPr>
           <a:xfrm>
-            <a:off x="7799832" y="4330598"/>
-            <a:ext cx="3145536" cy="256032"/>
+            <a:off x="7708392" y="4517136"/>
+            <a:ext cx="3282696" cy="228600"/>
           </a:xfrm>
           <a:prstGeom prst="rect">
             <a:avLst/>
@@ -6962,7 +6962,7 @@
               <a:buNone/>
             </a:pPr>
             <a:r>
-              <a:rPr lang="en-US" sz="1300" b="1" dirty="0">
+              <a:rPr lang="en-US" sz="1220" b="1" dirty="0">
                 <a:solidFill>
                   <a:srgbClr val="0068B7"/>
                 </a:solidFill>
@@ -6972,7 +6972,7 @@
               </a:rPr>
               <a:t>Next action</a:t>
             </a:r>
-            <a:endParaRPr lang="en-US" sz="1300" dirty="0"/>
+            <a:endParaRPr lang="en-US" sz="1220" dirty="0"/>
           </a:p>
         </p:txBody>
       </p:sp>
@@ -6984,8 +6984,8 @@
         </p:nvSpPr>
         <p:spPr>
           <a:xfrm>
-            <a:off x="7799832" y="4659782"/>
-            <a:ext cx="3145536" cy="899770"/>
+            <a:off x="7708392" y="4828032"/>
+            <a:ext cx="3282696" cy="749808"/>
           </a:xfrm>
           <a:prstGeom prst="rect">
             <a:avLst/>
@@ -7003,7 +7003,7 @@
               <a:buNone/>
             </a:pPr>
             <a:r>
-              <a:rPr lang="en-US" sz="1320" dirty="0">
+              <a:rPr lang="en-US" sz="1220" dirty="0">
                 <a:solidFill>
                   <a:srgbClr val="17364A"/>
                 </a:solidFill>
@@ -7011,9 +7011,9 @@
                 <a:ea typeface="Aptos" pitchFamily="34" charset="-122"/>
                 <a:cs typeface="Aptos" pitchFamily="34" charset="-120"/>
               </a:rPr>
-              <a:t>Use the concept to clarify workflow changes, dependencies, staffing, procurement requirements, training needs, and implementation checkpoints.</a:t>
-            </a:r>
-            <a:endParaRPr lang="en-US" sz="1320" dirty="0"/>
+              <a:t>Use the concept to clarify workflow changes, dependencies, staffing, procurement.</a:t>
+            </a:r>
+            <a:endParaRPr lang="en-US" sz="1220" dirty="0"/>
           </a:p>
         </p:txBody>
       </p:sp>
@@ -7304,8 +7304,8 @@
         </p:nvSpPr>
         <p:spPr>
           <a:xfrm>
-            <a:off x="868680" y="1508760"/>
-            <a:ext cx="6309360" cy="4160520"/>
+            <a:off x="822960" y="1463040"/>
+            <a:ext cx="6565392" cy="4343400"/>
           </a:xfrm>
           <a:prstGeom prst="rect">
             <a:avLst/>
@@ -7323,7 +7323,7 @@
               <a:buNone/>
             </a:pPr>
             <a:r>
-              <a:rPr lang="en-US" sz="2100" dirty="0">
+              <a:rPr lang="en-US" sz="1920" dirty="0">
                 <a:solidFill>
                   <a:srgbClr val="003A63"/>
                 </a:solidFill>
@@ -7331,9 +7331,9 @@
                 <a:ea typeface="Aptos" pitchFamily="34" charset="-122"/>
                 <a:cs typeface="Aptos" pitchFamily="34" charset="-120"/>
               </a:rPr>
-              <a:t>• AI adoption plan; stakeholder map; communication plan; training plan; feedback and adoption.</a:t>
-            </a:r>
-            <a:endParaRPr lang="en-US" sz="2100" dirty="0"/>
+              <a:t>• AI adoption plan; stakeholder map; communication plan; training plan;.</a:t>
+            </a:r>
+            <a:endParaRPr lang="en-US" sz="1920" dirty="0"/>
           </a:p>
         </p:txBody>
       </p:sp>
@@ -7345,12 +7345,12 @@
         </p:nvSpPr>
         <p:spPr>
           <a:xfrm>
-            <a:off x="7635240" y="1325880"/>
-            <a:ext cx="3474720" cy="1255471"/>
+            <a:off x="7543800" y="1325880"/>
+            <a:ext cx="3611880" cy="1261872"/>
           </a:xfrm>
           <a:prstGeom prst="roundRect">
             <a:avLst>
-              <a:gd name="adj" fmla="val 8740"/>
+              <a:gd name="adj" fmla="val 8696"/>
             </a:avLst>
           </a:prstGeom>
           <a:solidFill>
@@ -7372,8 +7372,8 @@
         </p:nvSpPr>
         <p:spPr>
           <a:xfrm>
-            <a:off x="7799832" y="1472184"/>
-            <a:ext cx="3145536" cy="256032"/>
+            <a:off x="7708392" y="1453896"/>
+            <a:ext cx="3282696" cy="228600"/>
           </a:xfrm>
           <a:prstGeom prst="rect">
             <a:avLst/>
@@ -7389,7 +7389,7 @@
               <a:buNone/>
             </a:pPr>
             <a:r>
-              <a:rPr lang="en-US" sz="1300" b="1" dirty="0">
+              <a:rPr lang="en-US" sz="1220" b="1" dirty="0">
                 <a:solidFill>
                   <a:srgbClr val="0068B7"/>
                 </a:solidFill>
@@ -7399,7 +7399,7 @@
               </a:rPr>
               <a:t>Implementation cue</a:t>
             </a:r>
-            <a:endParaRPr lang="en-US" sz="1300" dirty="0"/>
+            <a:endParaRPr lang="en-US" sz="1220" dirty="0"/>
           </a:p>
         </p:txBody>
       </p:sp>
@@ -7411,8 +7411,8 @@
         </p:nvSpPr>
         <p:spPr>
           <a:xfrm>
-            <a:off x="7799832" y="1801368"/>
-            <a:ext cx="3145536" cy="688543"/>
+            <a:off x="7708392" y="1764792"/>
+            <a:ext cx="3282696" cy="749808"/>
           </a:xfrm>
           <a:prstGeom prst="rect">
             <a:avLst/>
@@ -7430,7 +7430,7 @@
               <a:buNone/>
             </a:pPr>
             <a:r>
-              <a:rPr lang="en-US" sz="1320" dirty="0">
+              <a:rPr lang="en-US" sz="1220" dirty="0">
                 <a:solidFill>
                   <a:srgbClr val="17364A"/>
                 </a:solidFill>
@@ -7438,9 +7438,9 @@
                 <a:ea typeface="Aptos" pitchFamily="34" charset="-122"/>
                 <a:cs typeface="Aptos" pitchFamily="34" charset="-120"/>
               </a:rPr>
-              <a:t>AI adoption plan; stakeholder map; communication plan; training plan; feedback and adoption monitoring.</a:t>
-            </a:r>
-            <a:endParaRPr lang="en-US" sz="1320" dirty="0"/>
+              <a:t>AI adoption plan; stakeholder map; communication plan; training plan; feedback.</a:t>
+            </a:r>
+            <a:endParaRPr lang="en-US" sz="1220" dirty="0"/>
           </a:p>
         </p:txBody>
       </p:sp>
@@ -7452,12 +7452,12 @@
         </p:nvSpPr>
         <p:spPr>
           <a:xfrm>
-            <a:off x="7635240" y="2718511"/>
-            <a:ext cx="3474720" cy="1328623"/>
+            <a:off x="7543800" y="2724912"/>
+            <a:ext cx="3611880" cy="1527048"/>
           </a:xfrm>
           <a:prstGeom prst="roundRect">
             <a:avLst>
-              <a:gd name="adj" fmla="val 8259"/>
+              <a:gd name="adj" fmla="val 7186"/>
             </a:avLst>
           </a:prstGeom>
           <a:solidFill>
@@ -7479,8 +7479,8 @@
         </p:nvSpPr>
         <p:spPr>
           <a:xfrm>
-            <a:off x="7799832" y="2864815"/>
-            <a:ext cx="3145536" cy="256032"/>
+            <a:off x="7708392" y="2852928"/>
+            <a:ext cx="3282696" cy="228600"/>
           </a:xfrm>
           <a:prstGeom prst="rect">
             <a:avLst/>
@@ -7496,7 +7496,7 @@
               <a:buNone/>
             </a:pPr>
             <a:r>
-              <a:rPr lang="en-US" sz="1300" b="1" dirty="0">
+              <a:rPr lang="en-US" sz="1220" b="1" dirty="0">
                 <a:solidFill>
                   <a:srgbClr val="0068B7"/>
                 </a:solidFill>
@@ -7506,7 +7506,7 @@
               </a:rPr>
               <a:t>Concept checkpoints</a:t>
             </a:r>
-            <a:endParaRPr lang="en-US" sz="1300" dirty="0"/>
+            <a:endParaRPr lang="en-US" sz="1220" dirty="0"/>
           </a:p>
         </p:txBody>
       </p:sp>
@@ -7518,8 +7518,8 @@
         </p:nvSpPr>
         <p:spPr>
           <a:xfrm>
-            <a:off x="7818120" y="3230575"/>
-            <a:ext cx="3090672" cy="670255"/>
+            <a:off x="7726680" y="3182112"/>
+            <a:ext cx="3227832" cy="960120"/>
           </a:xfrm>
           <a:prstGeom prst="rect">
             <a:avLst/>
@@ -7537,7 +7537,7 @@
               <a:buNone/>
             </a:pPr>
             <a:r>
-              <a:rPr lang="en-US" sz="1220" dirty="0">
+              <a:rPr lang="en-US" sz="1140" dirty="0">
                 <a:solidFill>
                   <a:srgbClr val="17364A"/>
                 </a:solidFill>
@@ -7545,9 +7545,9 @@
                 <a:ea typeface="Aptos" pitchFamily="34" charset="-122"/>
                 <a:cs typeface="Aptos" pitchFamily="34" charset="-120"/>
               </a:rPr>
-              <a:t>AI adoption plan; stakeholder map; communication plan; training.</a:t>
-            </a:r>
-            <a:endParaRPr lang="en-US" sz="1220" dirty="0"/>
+              <a:t>AI adoption plan; stakeholder map; communication.</a:t>
+            </a:r>
+            <a:endParaRPr lang="en-US" sz="1140" dirty="0"/>
           </a:p>
         </p:txBody>
       </p:sp>
@@ -7559,12 +7559,12 @@
         </p:nvSpPr>
         <p:spPr>
           <a:xfrm>
-            <a:off x="7635240" y="4184294"/>
-            <a:ext cx="3474720" cy="1466698"/>
+            <a:off x="7543800" y="4389120"/>
+            <a:ext cx="3611880" cy="1261872"/>
           </a:xfrm>
           <a:prstGeom prst="roundRect">
             <a:avLst>
-              <a:gd name="adj" fmla="val 7481"/>
+              <a:gd name="adj" fmla="val 8696"/>
             </a:avLst>
           </a:prstGeom>
           <a:solidFill>
@@ -7586,8 +7586,8 @@
         </p:nvSpPr>
         <p:spPr>
           <a:xfrm>
-            <a:off x="7799832" y="4330598"/>
-            <a:ext cx="3145536" cy="256032"/>
+            <a:off x="7708392" y="4517136"/>
+            <a:ext cx="3282696" cy="228600"/>
           </a:xfrm>
           <a:prstGeom prst="rect">
             <a:avLst/>
@@ -7603,7 +7603,7 @@
               <a:buNone/>
             </a:pPr>
             <a:r>
-              <a:rPr lang="en-US" sz="1300" b="1" dirty="0">
+              <a:rPr lang="en-US" sz="1220" b="1" dirty="0">
                 <a:solidFill>
                   <a:srgbClr val="0068B7"/>
                 </a:solidFill>
@@ -7613,7 +7613,7 @@
               </a:rPr>
               <a:t>Next action</a:t>
             </a:r>
-            <a:endParaRPr lang="en-US" sz="1300" dirty="0"/>
+            <a:endParaRPr lang="en-US" sz="1220" dirty="0"/>
           </a:p>
         </p:txBody>
       </p:sp>
@@ -7625,8 +7625,8 @@
         </p:nvSpPr>
         <p:spPr>
           <a:xfrm>
-            <a:off x="7799832" y="4659782"/>
-            <a:ext cx="3145536" cy="899770"/>
+            <a:off x="7708392" y="4828032"/>
+            <a:ext cx="3282696" cy="749808"/>
           </a:xfrm>
           <a:prstGeom prst="rect">
             <a:avLst/>
@@ -7644,7 +7644,7 @@
               <a:buNone/>
             </a:pPr>
             <a:r>
-              <a:rPr lang="en-US" sz="1320" dirty="0">
+              <a:rPr lang="en-US" sz="1220" dirty="0">
                 <a:solidFill>
                   <a:srgbClr val="17364A"/>
                 </a:solidFill>
@@ -7652,9 +7652,9 @@
                 <a:ea typeface="Aptos" pitchFamily="34" charset="-122"/>
                 <a:cs typeface="Aptos" pitchFamily="34" charset="-120"/>
               </a:rPr>
-              <a:t>Use the concept to clarify workflow changes, dependencies, staffing, procurement requirements, training needs, and implementation checkpoints.</a:t>
-            </a:r>
-            <a:endParaRPr lang="en-US" sz="1320" dirty="0"/>
+              <a:t>Use the concept to clarify workflow changes, dependencies, staffing, procurement.</a:t>
+            </a:r>
+            <a:endParaRPr lang="en-US" sz="1220" dirty="0"/>
           </a:p>
         </p:txBody>
       </p:sp>
@@ -7945,8 +7945,8 @@
         </p:nvSpPr>
         <p:spPr>
           <a:xfrm>
-            <a:off x="868680" y="1508760"/>
-            <a:ext cx="6309360" cy="4160520"/>
+            <a:off x="822960" y="1463040"/>
+            <a:ext cx="6565392" cy="4343400"/>
           </a:xfrm>
           <a:prstGeom prst="rect">
             <a:avLst/>
@@ -7964,7 +7964,7 @@
               <a:buNone/>
             </a:pPr>
             <a:r>
-              <a:rPr lang="en-US" sz="2100" dirty="0">
+              <a:rPr lang="en-US" sz="1920" dirty="0">
                 <a:solidFill>
                   <a:srgbClr val="003A63"/>
                 </a:solidFill>
@@ -7972,9 +7972,9 @@
                 <a:ea typeface="Aptos" pitchFamily="34" charset="-122"/>
                 <a:cs typeface="Aptos" pitchFamily="34" charset="-120"/>
               </a:rPr>
-              <a:t>• AI adoption plan; stakeholder map; communication plan; training plan; feedback and adoption.</a:t>
-            </a:r>
-            <a:endParaRPr lang="en-US" sz="2100" dirty="0"/>
+              <a:t>• AI adoption plan; stakeholder map; communication plan; training plan;.</a:t>
+            </a:r>
+            <a:endParaRPr lang="en-US" sz="1920" dirty="0"/>
           </a:p>
         </p:txBody>
       </p:sp>
@@ -7986,12 +7986,12 @@
         </p:nvSpPr>
         <p:spPr>
           <a:xfrm>
-            <a:off x="7635240" y="1325880"/>
-            <a:ext cx="3474720" cy="1255471"/>
+            <a:off x="7543800" y="1325880"/>
+            <a:ext cx="3611880" cy="1261872"/>
           </a:xfrm>
           <a:prstGeom prst="roundRect">
             <a:avLst>
-              <a:gd name="adj" fmla="val 8740"/>
+              <a:gd name="adj" fmla="val 8696"/>
             </a:avLst>
           </a:prstGeom>
           <a:solidFill>
@@ -8013,8 +8013,8 @@
         </p:nvSpPr>
         <p:spPr>
           <a:xfrm>
-            <a:off x="7799832" y="1472184"/>
-            <a:ext cx="3145536" cy="256032"/>
+            <a:off x="7708392" y="1453896"/>
+            <a:ext cx="3282696" cy="228600"/>
           </a:xfrm>
           <a:prstGeom prst="rect">
             <a:avLst/>
@@ -8030,7 +8030,7 @@
               <a:buNone/>
             </a:pPr>
             <a:r>
-              <a:rPr lang="en-US" sz="1300" b="1" dirty="0">
+              <a:rPr lang="en-US" sz="1220" b="1" dirty="0">
                 <a:solidFill>
                   <a:srgbClr val="0068B7"/>
                 </a:solidFill>
@@ -8040,7 +8040,7 @@
               </a:rPr>
               <a:t>Implementation cue</a:t>
             </a:r>
-            <a:endParaRPr lang="en-US" sz="1300" dirty="0"/>
+            <a:endParaRPr lang="en-US" sz="1220" dirty="0"/>
           </a:p>
         </p:txBody>
       </p:sp>
@@ -8052,8 +8052,8 @@
         </p:nvSpPr>
         <p:spPr>
           <a:xfrm>
-            <a:off x="7799832" y="1801368"/>
-            <a:ext cx="3145536" cy="688543"/>
+            <a:off x="7708392" y="1764792"/>
+            <a:ext cx="3282696" cy="749808"/>
           </a:xfrm>
           <a:prstGeom prst="rect">
             <a:avLst/>
@@ -8071,7 +8071,7 @@
               <a:buNone/>
             </a:pPr>
             <a:r>
-              <a:rPr lang="en-US" sz="1320" dirty="0">
+              <a:rPr lang="en-US" sz="1220" dirty="0">
                 <a:solidFill>
                   <a:srgbClr val="17364A"/>
                 </a:solidFill>
@@ -8079,9 +8079,9 @@
                 <a:ea typeface="Aptos" pitchFamily="34" charset="-122"/>
                 <a:cs typeface="Aptos" pitchFamily="34" charset="-120"/>
               </a:rPr>
-              <a:t>AI adoption plan; stakeholder map; communication plan; training plan; feedback and adoption monitoring.</a:t>
-            </a:r>
-            <a:endParaRPr lang="en-US" sz="1320" dirty="0"/>
+              <a:t>AI adoption plan; stakeholder map; communication plan; training plan; feedback.</a:t>
+            </a:r>
+            <a:endParaRPr lang="en-US" sz="1220" dirty="0"/>
           </a:p>
         </p:txBody>
       </p:sp>
@@ -8093,12 +8093,12 @@
         </p:nvSpPr>
         <p:spPr>
           <a:xfrm>
-            <a:off x="7635240" y="2718511"/>
-            <a:ext cx="3474720" cy="1328623"/>
+            <a:off x="7543800" y="2724912"/>
+            <a:ext cx="3611880" cy="1527048"/>
           </a:xfrm>
           <a:prstGeom prst="roundRect">
             <a:avLst>
-              <a:gd name="adj" fmla="val 8259"/>
+              <a:gd name="adj" fmla="val 7186"/>
             </a:avLst>
           </a:prstGeom>
           <a:solidFill>
@@ -8120,8 +8120,8 @@
         </p:nvSpPr>
         <p:spPr>
           <a:xfrm>
-            <a:off x="7799832" y="2864815"/>
-            <a:ext cx="3145536" cy="256032"/>
+            <a:off x="7708392" y="2852928"/>
+            <a:ext cx="3282696" cy="228600"/>
           </a:xfrm>
           <a:prstGeom prst="rect">
             <a:avLst/>
@@ -8137,7 +8137,7 @@
               <a:buNone/>
             </a:pPr>
             <a:r>
-              <a:rPr lang="en-US" sz="1300" b="1" dirty="0">
+              <a:rPr lang="en-US" sz="1220" b="1" dirty="0">
                 <a:solidFill>
                   <a:srgbClr val="0068B7"/>
                 </a:solidFill>
@@ -8147,7 +8147,7 @@
               </a:rPr>
               <a:t>Concept checkpoints</a:t>
             </a:r>
-            <a:endParaRPr lang="en-US" sz="1300" dirty="0"/>
+            <a:endParaRPr lang="en-US" sz="1220" dirty="0"/>
           </a:p>
         </p:txBody>
       </p:sp>
@@ -8159,8 +8159,8 @@
         </p:nvSpPr>
         <p:spPr>
           <a:xfrm>
-            <a:off x="7818120" y="3230575"/>
-            <a:ext cx="3090672" cy="670255"/>
+            <a:off x="7726680" y="3182112"/>
+            <a:ext cx="3227832" cy="960120"/>
           </a:xfrm>
           <a:prstGeom prst="rect">
             <a:avLst/>
@@ -8178,7 +8178,7 @@
               <a:buNone/>
             </a:pPr>
             <a:r>
-              <a:rPr lang="en-US" sz="1220" dirty="0">
+              <a:rPr lang="en-US" sz="1140" dirty="0">
                 <a:solidFill>
                   <a:srgbClr val="17364A"/>
                 </a:solidFill>
@@ -8186,9 +8186,9 @@
                 <a:ea typeface="Aptos" pitchFamily="34" charset="-122"/>
                 <a:cs typeface="Aptos" pitchFamily="34" charset="-120"/>
               </a:rPr>
-              <a:t>AI adoption plan; stakeholder map; communication plan; training.</a:t>
-            </a:r>
-            <a:endParaRPr lang="en-US" sz="1220" dirty="0"/>
+              <a:t>AI adoption plan; stakeholder map; communication.</a:t>
+            </a:r>
+            <a:endParaRPr lang="en-US" sz="1140" dirty="0"/>
           </a:p>
         </p:txBody>
       </p:sp>
@@ -8200,12 +8200,12 @@
         </p:nvSpPr>
         <p:spPr>
           <a:xfrm>
-            <a:off x="7635240" y="4184294"/>
-            <a:ext cx="3474720" cy="1466698"/>
+            <a:off x="7543800" y="4389120"/>
+            <a:ext cx="3611880" cy="1261872"/>
           </a:xfrm>
           <a:prstGeom prst="roundRect">
             <a:avLst>
-              <a:gd name="adj" fmla="val 7481"/>
+              <a:gd name="adj" fmla="val 8696"/>
             </a:avLst>
           </a:prstGeom>
           <a:solidFill>
@@ -8227,8 +8227,8 @@
         </p:nvSpPr>
         <p:spPr>
           <a:xfrm>
-            <a:off x="7799832" y="4330598"/>
-            <a:ext cx="3145536" cy="256032"/>
+            <a:off x="7708392" y="4517136"/>
+            <a:ext cx="3282696" cy="228600"/>
           </a:xfrm>
           <a:prstGeom prst="rect">
             <a:avLst/>
@@ -8244,7 +8244,7 @@
               <a:buNone/>
             </a:pPr>
             <a:r>
-              <a:rPr lang="en-US" sz="1300" b="1" dirty="0">
+              <a:rPr lang="en-US" sz="1220" b="1" dirty="0">
                 <a:solidFill>
                   <a:srgbClr val="0068B7"/>
                 </a:solidFill>
@@ -8254,7 +8254,7 @@
               </a:rPr>
               <a:t>Next action</a:t>
             </a:r>
-            <a:endParaRPr lang="en-US" sz="1300" dirty="0"/>
+            <a:endParaRPr lang="en-US" sz="1220" dirty="0"/>
           </a:p>
         </p:txBody>
       </p:sp>
@@ -8266,8 +8266,8 @@
         </p:nvSpPr>
         <p:spPr>
           <a:xfrm>
-            <a:off x="7799832" y="4659782"/>
-            <a:ext cx="3145536" cy="899770"/>
+            <a:off x="7708392" y="4828032"/>
+            <a:ext cx="3282696" cy="749808"/>
           </a:xfrm>
           <a:prstGeom prst="rect">
             <a:avLst/>
@@ -8285,7 +8285,7 @@
               <a:buNone/>
             </a:pPr>
             <a:r>
-              <a:rPr lang="en-US" sz="1320" dirty="0">
+              <a:rPr lang="en-US" sz="1220" dirty="0">
                 <a:solidFill>
                   <a:srgbClr val="17364A"/>
                 </a:solidFill>
@@ -8293,9 +8293,9 @@
                 <a:ea typeface="Aptos" pitchFamily="34" charset="-122"/>
                 <a:cs typeface="Aptos" pitchFamily="34" charset="-120"/>
               </a:rPr>
-              <a:t>Use the assignment to test whether you can explain the concept, apply it to a realistic public health situation, and identify what would need review before the work moves forward.</a:t>
-            </a:r>
-            <a:endParaRPr lang="en-US" sz="1320" dirty="0"/>
+              <a:t>Use the assignment to test whether you can explain the concept, apply it to a.</a:t>
+            </a:r>
+            <a:endParaRPr lang="en-US" sz="1220" dirty="0"/>
           </a:p>
         </p:txBody>
       </p:sp>
@@ -8586,8 +8586,8 @@
         </p:nvSpPr>
         <p:spPr>
           <a:xfrm>
-            <a:off x="868680" y="1508760"/>
-            <a:ext cx="6309360" cy="4160520"/>
+            <a:off x="822960" y="1463040"/>
+            <a:ext cx="6565392" cy="4343400"/>
           </a:xfrm>
           <a:prstGeom prst="rect">
             <a:avLst/>
@@ -8605,7 +8605,7 @@
               <a:buNone/>
             </a:pPr>
             <a:r>
-              <a:rPr lang="en-US" sz="2100" dirty="0">
+              <a:rPr lang="en-US" sz="1920" dirty="0">
                 <a:solidFill>
                   <a:srgbClr val="003A63"/>
                 </a:solidFill>
@@ -8613,16 +8613,16 @@
                 <a:ea typeface="Aptos" pitchFamily="34" charset="-122"/>
                 <a:cs typeface="Aptos" pitchFamily="34" charset="-120"/>
               </a:rPr>
-              <a:t>• 1. What is the strongest reason this module topic belongs in AI leadership and governance.</a:t>
-            </a:r>
-            <a:endParaRPr lang="en-US" sz="2100" dirty="0"/>
-          </a:p>
-          <a:p>
-            <a:pPr indent="0" marL="0">
-              <a:buNone/>
-            </a:pPr>
-            <a:r>
-              <a:rPr lang="en-US" sz="2100" dirty="0">
+              <a:t>• 1. What is the strongest reason this module topic belongs in AI leadership.</a:t>
+            </a:r>
+            <a:endParaRPr lang="en-US" sz="1920" dirty="0"/>
+          </a:p>
+          <a:p>
+            <a:pPr indent="0" marL="0">
+              <a:buNone/>
+            </a:pPr>
+            <a:r>
+              <a:rPr lang="en-US" sz="1920" dirty="0">
                 <a:solidFill>
                   <a:srgbClr val="003A63"/>
                 </a:solidFill>
@@ -8632,14 +8632,14 @@
               </a:rPr>
               <a:t>• 2. Which practice best supports accountable public health AI governance?</a:t>
             </a:r>
-            <a:endParaRPr lang="en-US" sz="2100" dirty="0"/>
-          </a:p>
-          <a:p>
-            <a:pPr indent="0" marL="0">
-              <a:buNone/>
-            </a:pPr>
-            <a:r>
-              <a:rPr lang="en-US" sz="2100" dirty="0">
+            <a:endParaRPr lang="en-US" sz="1920" dirty="0"/>
+          </a:p>
+          <a:p>
+            <a:pPr indent="0" marL="0">
+              <a:buNone/>
+            </a:pPr>
+            <a:r>
+              <a:rPr lang="en-US" sz="1920" dirty="0">
                 <a:solidFill>
                   <a:srgbClr val="003A63"/>
                 </a:solidFill>
@@ -8647,9 +8647,9 @@
                 <a:ea typeface="Aptos" pitchFamily="34" charset="-122"/>
                 <a:cs typeface="Aptos" pitchFamily="34" charset="-120"/>
               </a:rPr>
-              <a:t>• 3. When should an AI use case be escalated for leadership or governance review?</a:t>
-            </a:r>
-            <a:endParaRPr lang="en-US" sz="2100" dirty="0"/>
+              <a:t>• 3. When should an AI use case be escalated for leadership or governance.</a:t>
+            </a:r>
+            <a:endParaRPr lang="en-US" sz="1920" dirty="0"/>
           </a:p>
         </p:txBody>
       </p:sp>
@@ -8661,12 +8661,12 @@
         </p:nvSpPr>
         <p:spPr>
           <a:xfrm>
-            <a:off x="7635240" y="1325880"/>
-            <a:ext cx="3474720" cy="1255471"/>
+            <a:off x="7543800" y="1325880"/>
+            <a:ext cx="3611880" cy="1261872"/>
           </a:xfrm>
           <a:prstGeom prst="roundRect">
             <a:avLst>
-              <a:gd name="adj" fmla="val 8740"/>
+              <a:gd name="adj" fmla="val 8696"/>
             </a:avLst>
           </a:prstGeom>
           <a:solidFill>
@@ -8688,8 +8688,8 @@
         </p:nvSpPr>
         <p:spPr>
           <a:xfrm>
-            <a:off x="7799832" y="1472184"/>
-            <a:ext cx="3145536" cy="256032"/>
+            <a:off x="7708392" y="1453896"/>
+            <a:ext cx="3282696" cy="228600"/>
           </a:xfrm>
           <a:prstGeom prst="rect">
             <a:avLst/>
@@ -8705,7 +8705,7 @@
               <a:buNone/>
             </a:pPr>
             <a:r>
-              <a:rPr lang="en-US" sz="1300" b="1" dirty="0">
+              <a:rPr lang="en-US" sz="1220" b="1" dirty="0">
                 <a:solidFill>
                   <a:srgbClr val="0068B7"/>
                 </a:solidFill>
@@ -8715,7 +8715,7 @@
               </a:rPr>
               <a:t>Implementation cue</a:t>
             </a:r>
-            <a:endParaRPr lang="en-US" sz="1300" dirty="0"/>
+            <a:endParaRPr lang="en-US" sz="1220" dirty="0"/>
           </a:p>
         </p:txBody>
       </p:sp>
@@ -8727,8 +8727,8 @@
         </p:nvSpPr>
         <p:spPr>
           <a:xfrm>
-            <a:off x="7799832" y="1801368"/>
-            <a:ext cx="3145536" cy="688543"/>
+            <a:off x="7708392" y="1764792"/>
+            <a:ext cx="3282696" cy="749808"/>
           </a:xfrm>
           <a:prstGeom prst="rect">
             <a:avLst/>
@@ -8746,7 +8746,7 @@
               <a:buNone/>
             </a:pPr>
             <a:r>
-              <a:rPr lang="en-US" sz="1320" dirty="0">
+              <a:rPr lang="en-US" sz="1220" dirty="0">
                 <a:solidFill>
                   <a:srgbClr val="17364A"/>
                 </a:solidFill>
@@ -8754,9 +8754,9 @@
                 <a:ea typeface="Aptos" pitchFamily="34" charset="-122"/>
                 <a:cs typeface="Aptos" pitchFamily="34" charset="-120"/>
               </a:rPr>
-              <a:t>1. What is the strongest reason this module topic belongs in AI leadership and governance training?</a:t>
-            </a:r>
-            <a:endParaRPr lang="en-US" sz="1320" dirty="0"/>
+              <a:t>1. What is the strongest reason this module topic belongs in AI leadership and.</a:t>
+            </a:r>
+            <a:endParaRPr lang="en-US" sz="1220" dirty="0"/>
           </a:p>
         </p:txBody>
       </p:sp>
@@ -8768,12 +8768,12 @@
         </p:nvSpPr>
         <p:spPr>
           <a:xfrm>
-            <a:off x="7635240" y="2718511"/>
-            <a:ext cx="3474720" cy="1328623"/>
+            <a:off x="7543800" y="2724912"/>
+            <a:ext cx="3611880" cy="1527048"/>
           </a:xfrm>
           <a:prstGeom prst="roundRect">
             <a:avLst>
-              <a:gd name="adj" fmla="val 8259"/>
+              <a:gd name="adj" fmla="val 7186"/>
             </a:avLst>
           </a:prstGeom>
           <a:solidFill>
@@ -8795,8 +8795,8 @@
         </p:nvSpPr>
         <p:spPr>
           <a:xfrm>
-            <a:off x="7799832" y="2864815"/>
-            <a:ext cx="3145536" cy="256032"/>
+            <a:off x="7708392" y="2852928"/>
+            <a:ext cx="3282696" cy="228600"/>
           </a:xfrm>
           <a:prstGeom prst="rect">
             <a:avLst/>
@@ -8812,7 +8812,7 @@
               <a:buNone/>
             </a:pPr>
             <a:r>
-              <a:rPr lang="en-US" sz="1300" b="1" dirty="0">
+              <a:rPr lang="en-US" sz="1220" b="1" dirty="0">
                 <a:solidFill>
                   <a:srgbClr val="0068B7"/>
                 </a:solidFill>
@@ -8822,7 +8822,7 @@
               </a:rPr>
               <a:t>Concept checkpoints</a:t>
             </a:r>
-            <a:endParaRPr lang="en-US" sz="1300" dirty="0"/>
+            <a:endParaRPr lang="en-US" sz="1220" dirty="0"/>
           </a:p>
         </p:txBody>
       </p:sp>
@@ -8834,8 +8834,8 @@
         </p:nvSpPr>
         <p:spPr>
           <a:xfrm>
-            <a:off x="7818120" y="3230575"/>
-            <a:ext cx="3090672" cy="670255"/>
+            <a:off x="7726680" y="3182112"/>
+            <a:ext cx="3227832" cy="960120"/>
           </a:xfrm>
           <a:prstGeom prst="rect">
             <a:avLst/>
@@ -8853,7 +8853,7 @@
               <a:buNone/>
             </a:pPr>
             <a:r>
-              <a:rPr lang="en-US" sz="1220" dirty="0">
+              <a:rPr lang="en-US" sz="1140" dirty="0">
                 <a:solidFill>
                   <a:srgbClr val="17364A"/>
                 </a:solidFill>
@@ -8863,14 +8863,14 @@
               </a:rPr>
               <a:t>1.</a:t>
             </a:r>
-            <a:endParaRPr lang="en-US" sz="1220" dirty="0"/>
-          </a:p>
-          <a:p>
-            <a:pPr indent="0" marL="0">
-              <a:buNone/>
-            </a:pPr>
-            <a:r>
-              <a:rPr lang="en-US" sz="1220" dirty="0">
+            <a:endParaRPr lang="en-US" sz="1140" dirty="0"/>
+          </a:p>
+          <a:p>
+            <a:pPr indent="0" marL="0">
+              <a:buNone/>
+            </a:pPr>
+            <a:r>
+              <a:rPr lang="en-US" sz="1140" dirty="0">
                 <a:solidFill>
                   <a:srgbClr val="17364A"/>
                 </a:solidFill>
@@ -8878,16 +8878,16 @@
                 <a:ea typeface="Aptos" pitchFamily="34" charset="-122"/>
                 <a:cs typeface="Aptos" pitchFamily="34" charset="-120"/>
               </a:rPr>
-              <a:t>What is the strongest reason this module topic belongs in AI.</a:t>
-            </a:r>
-            <a:endParaRPr lang="en-US" sz="1220" dirty="0"/>
-          </a:p>
-          <a:p>
-            <a:pPr indent="0" marL="0">
-              <a:buNone/>
-            </a:pPr>
-            <a:r>
-              <a:rPr lang="en-US" sz="1220" dirty="0">
+              <a:t>What is the strongest reason this module topic.</a:t>
+            </a:r>
+            <a:endParaRPr lang="en-US" sz="1140" dirty="0"/>
+          </a:p>
+          <a:p>
+            <a:pPr indent="0" marL="0">
+              <a:buNone/>
+            </a:pPr>
+            <a:r>
+              <a:rPr lang="en-US" sz="1140" dirty="0">
                 <a:solidFill>
                   <a:srgbClr val="17364A"/>
                 </a:solidFill>
@@ -8897,7 +8897,7 @@
               </a:rPr>
               <a:t>2.</a:t>
             </a:r>
-            <a:endParaRPr lang="en-US" sz="1220" dirty="0"/>
+            <a:endParaRPr lang="en-US" sz="1140" dirty="0"/>
           </a:p>
         </p:txBody>
       </p:sp>
@@ -8909,12 +8909,12 @@
         </p:nvSpPr>
         <p:spPr>
           <a:xfrm>
-            <a:off x="7635240" y="4184294"/>
-            <a:ext cx="3474720" cy="1466698"/>
+            <a:off x="7543800" y="4389120"/>
+            <a:ext cx="3611880" cy="1261872"/>
           </a:xfrm>
           <a:prstGeom prst="roundRect">
             <a:avLst>
-              <a:gd name="adj" fmla="val 7481"/>
+              <a:gd name="adj" fmla="val 8696"/>
             </a:avLst>
           </a:prstGeom>
           <a:solidFill>
@@ -8936,8 +8936,8 @@
         </p:nvSpPr>
         <p:spPr>
           <a:xfrm>
-            <a:off x="7799832" y="4330598"/>
-            <a:ext cx="3145536" cy="256032"/>
+            <a:off x="7708392" y="4517136"/>
+            <a:ext cx="3282696" cy="228600"/>
           </a:xfrm>
           <a:prstGeom prst="rect">
             <a:avLst/>
@@ -8953,7 +8953,7 @@
               <a:buNone/>
             </a:pPr>
             <a:r>
-              <a:rPr lang="en-US" sz="1300" b="1" dirty="0">
+              <a:rPr lang="en-US" sz="1220" b="1" dirty="0">
                 <a:solidFill>
                   <a:srgbClr val="0068B7"/>
                 </a:solidFill>
@@ -8963,7 +8963,7 @@
               </a:rPr>
               <a:t>Next action</a:t>
             </a:r>
-            <a:endParaRPr lang="en-US" sz="1300" dirty="0"/>
+            <a:endParaRPr lang="en-US" sz="1220" dirty="0"/>
           </a:p>
         </p:txBody>
       </p:sp>
@@ -8975,8 +8975,8 @@
         </p:nvSpPr>
         <p:spPr>
           <a:xfrm>
-            <a:off x="7799832" y="4659782"/>
-            <a:ext cx="3145536" cy="899770"/>
+            <a:off x="7708392" y="4828032"/>
+            <a:ext cx="3282696" cy="749808"/>
           </a:xfrm>
           <a:prstGeom prst="rect">
             <a:avLst/>
@@ -8994,7 +8994,7 @@
               <a:buNone/>
             </a:pPr>
             <a:r>
-              <a:rPr lang="en-US" sz="1320" dirty="0">
+              <a:rPr lang="en-US" sz="1220" dirty="0">
                 <a:solidFill>
                   <a:srgbClr val="17364A"/>
                 </a:solidFill>
@@ -9002,9 +9002,9 @@
                 <a:ea typeface="Aptos" pitchFamily="34" charset="-122"/>
                 <a:cs typeface="Aptos" pitchFamily="34" charset="-120"/>
               </a:rPr>
-              <a:t>Use the assignment to test whether you can explain the concept, apply it to a realistic public health situation, and identify what would need review before the work moves forward.</a:t>
-            </a:r>
-            <a:endParaRPr lang="en-US" sz="1320" dirty="0"/>
+              <a:t>Use the assignment to test whether you can explain the concept, apply it to a.</a:t>
+            </a:r>
+            <a:endParaRPr lang="en-US" sz="1220" dirty="0"/>
           </a:p>
         </p:txBody>
       </p:sp>
@@ -9295,8 +9295,8 @@
         </p:nvSpPr>
         <p:spPr>
           <a:xfrm>
-            <a:off x="868680" y="1508760"/>
-            <a:ext cx="6309360" cy="4160520"/>
+            <a:off x="822960" y="1463040"/>
+            <a:ext cx="6565392" cy="4343400"/>
           </a:xfrm>
           <a:prstGeom prst="rect">
             <a:avLst/>
@@ -9314,7 +9314,7 @@
               <a:buNone/>
             </a:pPr>
             <a:r>
-              <a:rPr lang="en-US" sz="2100" dirty="0">
+              <a:rPr lang="en-US" sz="1920" dirty="0">
                 <a:solidFill>
                   <a:srgbClr val="003A63"/>
                 </a:solidFill>
@@ -9324,14 +9324,14 @@
               </a:rPr>
               <a:t>• NIST Artificial Intelligence Risk Management Framework (AI RMF 1.0):.</a:t>
             </a:r>
-            <a:endParaRPr lang="en-US" sz="2100" dirty="0"/>
-          </a:p>
-          <a:p>
-            <a:pPr indent="0" marL="0">
-              <a:buNone/>
-            </a:pPr>
-            <a:r>
-              <a:rPr lang="en-US" sz="2100" dirty="0">
+            <a:endParaRPr lang="en-US" sz="1920" dirty="0"/>
+          </a:p>
+          <a:p>
+            <a:pPr indent="0" marL="0">
+              <a:buNone/>
+            </a:pPr>
+            <a:r>
+              <a:rPr lang="en-US" sz="1920" dirty="0">
                 <a:solidFill>
                   <a:srgbClr val="003A63"/>
                 </a:solidFill>
@@ -9341,14 +9341,14 @@
               </a:rPr>
               <a:t>• NIST Generative AI Profile:.</a:t>
             </a:r>
-            <a:endParaRPr lang="en-US" sz="2100" dirty="0"/>
-          </a:p>
-          <a:p>
-            <a:pPr indent="0" marL="0">
-              <a:buNone/>
-            </a:pPr>
-            <a:r>
-              <a:rPr lang="en-US" sz="2100" dirty="0">
+            <a:endParaRPr lang="en-US" sz="1920" dirty="0"/>
+          </a:p>
+          <a:p>
+            <a:pPr indent="0" marL="0">
+              <a:buNone/>
+            </a:pPr>
+            <a:r>
+              <a:rPr lang="en-US" sz="1920" dirty="0">
                 <a:solidFill>
                   <a:srgbClr val="003A63"/>
                 </a:solidFill>
@@ -9358,7 +9358,7 @@
               </a:rPr>
               <a:t>• NIST Privacy Framework</a:t>
             </a:r>
-            <a:endParaRPr lang="en-US" sz="2100" dirty="0"/>
+            <a:endParaRPr lang="en-US" sz="1920" dirty="0"/>
           </a:p>
         </p:txBody>
       </p:sp>
@@ -9370,12 +9370,12 @@
         </p:nvSpPr>
         <p:spPr>
           <a:xfrm>
-            <a:off x="7635240" y="1325880"/>
-            <a:ext cx="3474720" cy="1207008"/>
+            <a:off x="7543800" y="1325880"/>
+            <a:ext cx="3611880" cy="1261872"/>
           </a:xfrm>
           <a:prstGeom prst="roundRect">
             <a:avLst>
-              <a:gd name="adj" fmla="val 9091"/>
+              <a:gd name="adj" fmla="val 8696"/>
             </a:avLst>
           </a:prstGeom>
           <a:solidFill>
@@ -9397,8 +9397,8 @@
         </p:nvSpPr>
         <p:spPr>
           <a:xfrm>
-            <a:off x="7799832" y="1472184"/>
-            <a:ext cx="3145536" cy="256032"/>
+            <a:off x="7708392" y="1453896"/>
+            <a:ext cx="3282696" cy="228600"/>
           </a:xfrm>
           <a:prstGeom prst="rect">
             <a:avLst/>
@@ -9414,7 +9414,7 @@
               <a:buNone/>
             </a:pPr>
             <a:r>
-              <a:rPr lang="en-US" sz="1300" b="1" dirty="0">
+              <a:rPr lang="en-US" sz="1220" b="1" dirty="0">
                 <a:solidFill>
                   <a:srgbClr val="0068B7"/>
                 </a:solidFill>
@@ -9424,7 +9424,7 @@
               </a:rPr>
               <a:t>Implementation cue</a:t>
             </a:r>
-            <a:endParaRPr lang="en-US" sz="1300" dirty="0"/>
+            <a:endParaRPr lang="en-US" sz="1220" dirty="0"/>
           </a:p>
         </p:txBody>
       </p:sp>
@@ -9436,8 +9436,8 @@
         </p:nvSpPr>
         <p:spPr>
           <a:xfrm>
-            <a:off x="7799832" y="1801368"/>
-            <a:ext cx="3145536" cy="640080"/>
+            <a:off x="7708392" y="1764792"/>
+            <a:ext cx="3282696" cy="749808"/>
           </a:xfrm>
           <a:prstGeom prst="rect">
             <a:avLst/>
@@ -9455,7 +9455,7 @@
               <a:buNone/>
             </a:pPr>
             <a:r>
-              <a:rPr lang="en-US" sz="1320" dirty="0">
+              <a:rPr lang="en-US" sz="1220" dirty="0">
                 <a:solidFill>
                   <a:srgbClr val="17364A"/>
                 </a:solidFill>
@@ -9465,7 +9465,7 @@
               </a:rPr>
               <a:t>NIST Artificial Intelligence Risk Management Framework (AI RMF 1.0):.</a:t>
             </a:r>
-            <a:endParaRPr lang="en-US" sz="1320" dirty="0"/>
+            <a:endParaRPr lang="en-US" sz="1220" dirty="0"/>
           </a:p>
         </p:txBody>
       </p:sp>
@@ -9477,12 +9477,12 @@
         </p:nvSpPr>
         <p:spPr>
           <a:xfrm>
-            <a:off x="7635240" y="2670048"/>
-            <a:ext cx="3474720" cy="1377086"/>
+            <a:off x="7543800" y="2724912"/>
+            <a:ext cx="3611880" cy="1527048"/>
           </a:xfrm>
           <a:prstGeom prst="roundRect">
             <a:avLst>
-              <a:gd name="adj" fmla="val 7968"/>
+              <a:gd name="adj" fmla="val 7186"/>
             </a:avLst>
           </a:prstGeom>
           <a:solidFill>
@@ -9504,8 +9504,8 @@
         </p:nvSpPr>
         <p:spPr>
           <a:xfrm>
-            <a:off x="7799832" y="2816352"/>
-            <a:ext cx="3145536" cy="256032"/>
+            <a:off x="7708392" y="2852928"/>
+            <a:ext cx="3282696" cy="228600"/>
           </a:xfrm>
           <a:prstGeom prst="rect">
             <a:avLst/>
@@ -9521,7 +9521,7 @@
               <a:buNone/>
             </a:pPr>
             <a:r>
-              <a:rPr lang="en-US" sz="1300" b="1" dirty="0">
+              <a:rPr lang="en-US" sz="1220" b="1" dirty="0">
                 <a:solidFill>
                   <a:srgbClr val="0068B7"/>
                 </a:solidFill>
@@ -9531,7 +9531,7 @@
               </a:rPr>
               <a:t>Concept checkpoints</a:t>
             </a:r>
-            <a:endParaRPr lang="en-US" sz="1300" dirty="0"/>
+            <a:endParaRPr lang="en-US" sz="1220" dirty="0"/>
           </a:p>
         </p:txBody>
       </p:sp>
@@ -9543,8 +9543,8 @@
         </p:nvSpPr>
         <p:spPr>
           <a:xfrm>
-            <a:off x="7818120" y="3182112"/>
-            <a:ext cx="3090672" cy="718718"/>
+            <a:off x="7726680" y="3182112"/>
+            <a:ext cx="3227832" cy="960120"/>
           </a:xfrm>
           <a:prstGeom prst="rect">
             <a:avLst/>
@@ -9562,7 +9562,7 @@
               <a:buNone/>
             </a:pPr>
             <a:r>
-              <a:rPr lang="en-US" sz="1220" dirty="0">
+              <a:rPr lang="en-US" sz="1140" dirty="0">
                 <a:solidFill>
                   <a:srgbClr val="17364A"/>
                 </a:solidFill>
@@ -9570,16 +9570,16 @@
                 <a:ea typeface="Aptos" pitchFamily="34" charset="-122"/>
                 <a:cs typeface="Aptos" pitchFamily="34" charset="-120"/>
               </a:rPr>
-              <a:t>NIST Artificial Intelligence Risk Management Framework (AI RMF.</a:t>
-            </a:r>
-            <a:endParaRPr lang="en-US" sz="1220" dirty="0"/>
-          </a:p>
-          <a:p>
-            <a:pPr indent="0" marL="0">
-              <a:buNone/>
-            </a:pPr>
-            <a:r>
-              <a:rPr lang="en-US" sz="1220" dirty="0">
+              <a:t>NIST Artificial Intelligence Risk Management.</a:t>
+            </a:r>
+            <a:endParaRPr lang="en-US" sz="1140" dirty="0"/>
+          </a:p>
+          <a:p>
+            <a:pPr indent="0" marL="0">
+              <a:buNone/>
+            </a:pPr>
+            <a:r>
+              <a:rPr lang="en-US" sz="1140" dirty="0">
                 <a:solidFill>
                   <a:srgbClr val="17364A"/>
                 </a:solidFill>
@@ -9587,16 +9587,16 @@
                 <a:ea typeface="Aptos" pitchFamily="34" charset="-122"/>
                 <a:cs typeface="Aptos" pitchFamily="34" charset="-120"/>
               </a:rPr>
-              <a:t>CDC Public Health Data Strategy and Data Modernization resources:.</a:t>
-            </a:r>
-            <a:endParaRPr lang="en-US" sz="1220" dirty="0"/>
-          </a:p>
-          <a:p>
-            <a:pPr indent="0" marL="0">
-              <a:buNone/>
-            </a:pPr>
-            <a:r>
-              <a:rPr lang="en-US" sz="1220" dirty="0">
+              <a:t>CDC Public Health Data Strategy and Data.</a:t>
+            </a:r>
+            <a:endParaRPr lang="en-US" sz="1140" dirty="0"/>
+          </a:p>
+          <a:p>
+            <a:pPr indent="0" marL="0">
+              <a:buNone/>
+            </a:pPr>
+            <a:r>
+              <a:rPr lang="en-US" sz="1140" dirty="0">
                 <a:solidFill>
                   <a:srgbClr val="17364A"/>
                 </a:solidFill>
@@ -9604,9 +9604,9 @@
                 <a:ea typeface="Aptos" pitchFamily="34" charset="-122"/>
                 <a:cs typeface="Aptos" pitchFamily="34" charset="-120"/>
               </a:rPr>
-              <a:t>WHO Ethics and Governance of Artificial Intelligence for Health:.</a:t>
-            </a:r>
-            <a:endParaRPr lang="en-US" sz="1220" dirty="0"/>
+              <a:t>WHO Ethics and Governance of Artificial.</a:t>
+            </a:r>
+            <a:endParaRPr lang="en-US" sz="1140" dirty="0"/>
           </a:p>
         </p:txBody>
       </p:sp>
@@ -9618,12 +9618,12 @@
         </p:nvSpPr>
         <p:spPr>
           <a:xfrm>
-            <a:off x="7635240" y="4184294"/>
-            <a:ext cx="3474720" cy="1466698"/>
+            <a:off x="7543800" y="4389120"/>
+            <a:ext cx="3611880" cy="1261872"/>
           </a:xfrm>
           <a:prstGeom prst="roundRect">
             <a:avLst>
-              <a:gd name="adj" fmla="val 7481"/>
+              <a:gd name="adj" fmla="val 8696"/>
             </a:avLst>
           </a:prstGeom>
           <a:solidFill>
@@ -9645,8 +9645,8 @@
         </p:nvSpPr>
         <p:spPr>
           <a:xfrm>
-            <a:off x="7799832" y="4330598"/>
-            <a:ext cx="3145536" cy="256032"/>
+            <a:off x="7708392" y="4517136"/>
+            <a:ext cx="3282696" cy="228600"/>
           </a:xfrm>
           <a:prstGeom prst="rect">
             <a:avLst/>
@@ -9662,7 +9662,7 @@
               <a:buNone/>
             </a:pPr>
             <a:r>
-              <a:rPr lang="en-US" sz="1300" b="1" dirty="0">
+              <a:rPr lang="en-US" sz="1220" b="1" dirty="0">
                 <a:solidFill>
                   <a:srgbClr val="0068B7"/>
                 </a:solidFill>
@@ -9672,7 +9672,7 @@
               </a:rPr>
               <a:t>Next action</a:t>
             </a:r>
-            <a:endParaRPr lang="en-US" sz="1300" dirty="0"/>
+            <a:endParaRPr lang="en-US" sz="1220" dirty="0"/>
           </a:p>
         </p:txBody>
       </p:sp>
@@ -9684,8 +9684,8 @@
         </p:nvSpPr>
         <p:spPr>
           <a:xfrm>
-            <a:off x="7799832" y="4659782"/>
-            <a:ext cx="3145536" cy="899770"/>
+            <a:off x="7708392" y="4828032"/>
+            <a:ext cx="3282696" cy="749808"/>
           </a:xfrm>
           <a:prstGeom prst="rect">
             <a:avLst/>
@@ -9703,7 +9703,7 @@
               <a:buNone/>
             </a:pPr>
             <a:r>
-              <a:rPr lang="en-US" sz="1320" dirty="0">
+              <a:rPr lang="en-US" sz="1220" dirty="0">
                 <a:solidFill>
                   <a:srgbClr val="17364A"/>
                 </a:solidFill>
@@ -9711,9 +9711,9 @@
                 <a:ea typeface="Aptos" pitchFamily="34" charset="-122"/>
                 <a:cs typeface="Aptos" pitchFamily="34" charset="-120"/>
               </a:rPr>
-              <a:t>Use the concept to clarify workflow changes, dependencies, staffing, procurement requirements, training needs, and implementation checkpoints.</a:t>
-            </a:r>
-            <a:endParaRPr lang="en-US" sz="1320" dirty="0"/>
+              <a:t>Use the concept to clarify workflow changes, dependencies, staffing, procurement.</a:t>
+            </a:r>
+            <a:endParaRPr lang="en-US" sz="1220" dirty="0"/>
           </a:p>
         </p:txBody>
       </p:sp>
@@ -10031,7 +10031,7 @@
                 <a:ea typeface="Aptos" pitchFamily="34" charset="-122"/>
                 <a:cs typeface="Aptos" pitchFamily="34" charset="-120"/>
               </a:rPr>
-              <a:t>• AI adoption changes how people work, make decisions, document actions, communicate with.</a:t>
+              <a:t>• AI adoption changes how people work, make decisions, document actions,.</a:t>
             </a:r>
             <a:endParaRPr lang="en-US" sz="2100" dirty="0"/>
           </a:p>
@@ -10048,7 +10048,7 @@
                 <a:ea typeface="Aptos" pitchFamily="34" charset="-122"/>
                 <a:cs typeface="Aptos" pitchFamily="34" charset="-120"/>
               </a:rPr>
-              <a:t>• Successful implementation requires change management, not just technical deployment.</a:t>
+              <a:t>• Successful implementation requires change management, not just technical.</a:t>
             </a:r>
             <a:endParaRPr lang="en-US" sz="2100" dirty="0"/>
           </a:p>
@@ -10065,7 +10065,7 @@
                 <a:ea typeface="Aptos" pitchFamily="34" charset="-122"/>
                 <a:cs typeface="Aptos" pitchFamily="34" charset="-120"/>
               </a:rPr>
-              <a:t>• Staff need to understand why a tool is being introduced, how it affects their workflow, what.</a:t>
+              <a:t>• Staff need to understand why a tool is being introduced, how it affects.</a:t>
             </a:r>
             <a:endParaRPr lang="en-US" sz="2100" dirty="0"/>
           </a:p>
@@ -10106,8 +10106,8 @@
         </p:nvSpPr>
         <p:spPr>
           <a:xfrm>
-            <a:off x="8074152" y="1563624"/>
-            <a:ext cx="2825496" cy="256032"/>
+            <a:off x="8074152" y="1545336"/>
+            <a:ext cx="2825496" cy="228600"/>
           </a:xfrm>
           <a:prstGeom prst="rect">
             <a:avLst/>
@@ -10123,7 +10123,7 @@
               <a:buNone/>
             </a:pPr>
             <a:r>
-              <a:rPr lang="en-US" sz="1300" b="1" dirty="0">
+              <a:rPr lang="en-US" sz="1220" b="1" dirty="0">
                 <a:solidFill>
                   <a:srgbClr val="0068B7"/>
                 </a:solidFill>
@@ -10133,7 +10133,7 @@
               </a:rPr>
               <a:t>Module details</a:t>
             </a:r>
-            <a:endParaRPr lang="en-US" sz="1300" dirty="0"/>
+            <a:endParaRPr lang="en-US" sz="1220" dirty="0"/>
           </a:p>
         </p:txBody>
       </p:sp>
@@ -10145,8 +10145,8 @@
         </p:nvSpPr>
         <p:spPr>
           <a:xfrm>
-            <a:off x="8074152" y="1892808"/>
-            <a:ext cx="2825496" cy="1353312"/>
+            <a:off x="8074152" y="1856232"/>
+            <a:ext cx="2825496" cy="1408176"/>
           </a:xfrm>
           <a:prstGeom prst="rect">
             <a:avLst/>
@@ -10164,7 +10164,7 @@
               <a:buNone/>
             </a:pPr>
             <a:r>
-              <a:rPr lang="en-US" sz="1320" dirty="0">
+              <a:rPr lang="en-US" sz="1220" dirty="0">
                 <a:solidFill>
                   <a:srgbClr val="17364A"/>
                 </a:solidFill>
@@ -10172,9 +10172,9 @@
                 <a:ea typeface="Aptos" pitchFamily="34" charset="-122"/>
                 <a:cs typeface="Aptos" pitchFamily="34" charset="-120"/>
               </a:rPr>
-              <a:t>Level: advanced/leadership Primary track: Public Health Executive Leadership Track Appears in tracks: governance-security</a:t>
-            </a:r>
-            <a:endParaRPr lang="en-US" sz="1320" dirty="0"/>
+              <a:t>Level: advanced/leadership Primary track: Public Health Executive Leadership.</a:t>
+            </a:r>
+            <a:endParaRPr lang="en-US" sz="1220" dirty="0"/>
           </a:p>
         </p:txBody>
       </p:sp>
@@ -10213,8 +10213,8 @@
         </p:nvSpPr>
         <p:spPr>
           <a:xfrm>
-            <a:off x="8074152" y="3822192"/>
-            <a:ext cx="2825496" cy="256032"/>
+            <a:off x="8074152" y="3803904"/>
+            <a:ext cx="2825496" cy="228600"/>
           </a:xfrm>
           <a:prstGeom prst="rect">
             <a:avLst/>
@@ -10230,7 +10230,7 @@
               <a:buNone/>
             </a:pPr>
             <a:r>
-              <a:rPr lang="en-US" sz="1300" b="1" dirty="0">
+              <a:rPr lang="en-US" sz="1220" b="1" dirty="0">
                 <a:solidFill>
                   <a:srgbClr val="0068B7"/>
                 </a:solidFill>
@@ -10240,7 +10240,7 @@
               </a:rPr>
               <a:t>Learning sequence</a:t>
             </a:r>
-            <a:endParaRPr lang="en-US" sz="1300" dirty="0"/>
+            <a:endParaRPr lang="en-US" sz="1220" dirty="0"/>
           </a:p>
         </p:txBody>
       </p:sp>
@@ -10252,8 +10252,8 @@
         </p:nvSpPr>
         <p:spPr>
           <a:xfrm>
-            <a:off x="8092440" y="4187952"/>
-            <a:ext cx="2770632" cy="1033272"/>
+            <a:off x="8092440" y="4133088"/>
+            <a:ext cx="2770632" cy="1124712"/>
           </a:xfrm>
           <a:prstGeom prst="rect">
             <a:avLst/>
@@ -10271,7 +10271,7 @@
               <a:buNone/>
             </a:pPr>
             <a:r>
-              <a:rPr lang="en-US" sz="1220" dirty="0">
+              <a:rPr lang="en-US" sz="1140" dirty="0">
                 <a:solidFill>
                   <a:srgbClr val="17364A"/>
                 </a:solidFill>
@@ -10281,14 +10281,14 @@
               </a:rPr>
               <a:t>Read the module for shared vocabulary and context.</a:t>
             </a:r>
-            <a:endParaRPr lang="en-US" sz="1220" dirty="0"/>
-          </a:p>
-          <a:p>
-            <a:pPr indent="0" marL="0">
-              <a:buNone/>
-            </a:pPr>
-            <a:r>
-              <a:rPr lang="en-US" sz="1220" dirty="0">
+            <a:endParaRPr lang="en-US" sz="1140" dirty="0"/>
+          </a:p>
+          <a:p>
+            <a:pPr indent="0" marL="0">
+              <a:buNone/>
+            </a:pPr>
+            <a:r>
+              <a:rPr lang="en-US" sz="1140" dirty="0">
                 <a:solidFill>
                   <a:srgbClr val="17364A"/>
                 </a:solidFill>
@@ -10296,16 +10296,16 @@
                 <a:ea typeface="Aptos" pitchFamily="34" charset="-122"/>
                 <a:cs typeface="Aptos" pitchFamily="34" charset="-120"/>
               </a:rPr>
-              <a:t>Complete the practical exercise to apply the concept.</a:t>
-            </a:r>
-            <a:endParaRPr lang="en-US" sz="1220" dirty="0"/>
-          </a:p>
-          <a:p>
-            <a:pPr indent="0" marL="0">
-              <a:buNone/>
-            </a:pPr>
-            <a:r>
-              <a:rPr lang="en-US" sz="1220" dirty="0">
+              <a:t>Complete the practical exercise to apply the.</a:t>
+            </a:r>
+            <a:endParaRPr lang="en-US" sz="1140" dirty="0"/>
+          </a:p>
+          <a:p>
+            <a:pPr indent="0" marL="0">
+              <a:buNone/>
+            </a:pPr>
+            <a:r>
+              <a:rPr lang="en-US" sz="1140" dirty="0">
                 <a:solidFill>
                   <a:srgbClr val="17364A"/>
                 </a:solidFill>
@@ -10315,7 +10315,7 @@
               </a:rPr>
               <a:t>Use the notes and references for deeper review.</a:t>
             </a:r>
-            <a:endParaRPr lang="en-US" sz="1220" dirty="0"/>
+            <a:endParaRPr lang="en-US" sz="1140" dirty="0"/>
           </a:p>
         </p:txBody>
       </p:sp>
@@ -10606,8 +10606,8 @@
         </p:nvSpPr>
         <p:spPr>
           <a:xfrm>
-            <a:off x="868680" y="1508760"/>
-            <a:ext cx="6309360" cy="4160520"/>
+            <a:off x="822960" y="1463040"/>
+            <a:ext cx="6565392" cy="4343400"/>
           </a:xfrm>
           <a:prstGeom prst="rect">
             <a:avLst/>
@@ -10625,7 +10625,7 @@
               <a:buNone/>
             </a:pPr>
             <a:r>
-              <a:rPr lang="en-US" sz="2100" dirty="0">
+              <a:rPr lang="en-US" sz="1920" dirty="0">
                 <a:solidFill>
                   <a:srgbClr val="003A63"/>
                 </a:solidFill>
@@ -10633,16 +10633,16 @@
                 <a:ea typeface="Aptos" pitchFamily="34" charset="-122"/>
                 <a:cs typeface="Aptos" pitchFamily="34" charset="-120"/>
               </a:rPr>
-              <a:t>• OMB Memorandum M-24-10 on federal AI governance, risk management, and innovation, where.</a:t>
-            </a:r>
-            <a:endParaRPr lang="en-US" sz="2100" dirty="0"/>
-          </a:p>
-          <a:p>
-            <a:pPr indent="0" marL="0">
-              <a:buNone/>
-            </a:pPr>
-            <a:r>
-              <a:rPr lang="en-US" sz="2100" dirty="0">
+              <a:t>• OMB Memorandum M-24-10 on federal AI governance, risk management, and.</a:t>
+            </a:r>
+            <a:endParaRPr lang="en-US" sz="1920" dirty="0"/>
+          </a:p>
+          <a:p>
+            <a:pPr indent="0" marL="0">
+              <a:buNone/>
+            </a:pPr>
+            <a:r>
+              <a:rPr lang="en-US" sz="1920" dirty="0">
                 <a:solidFill>
                   <a:srgbClr val="003A63"/>
                 </a:solidFill>
@@ -10650,9 +10650,9 @@
                 <a:ea typeface="Aptos" pitchFamily="34" charset="-122"/>
                 <a:cs typeface="Aptos" pitchFamily="34" charset="-120"/>
               </a:rPr>
-              <a:t>• Agency strategic plans, procurement policies, privacy policies, cybersecurity policies, records.</a:t>
-            </a:r>
-            <a:endParaRPr lang="en-US" sz="2100" dirty="0"/>
+              <a:t>• Agency strategic plans, procurement policies, privacy policies,.</a:t>
+            </a:r>
+            <a:endParaRPr lang="en-US" sz="1920" dirty="0"/>
           </a:p>
         </p:txBody>
       </p:sp>
@@ -10664,12 +10664,12 @@
         </p:nvSpPr>
         <p:spPr>
           <a:xfrm>
-            <a:off x="7635240" y="1325880"/>
-            <a:ext cx="3474720" cy="1255471"/>
+            <a:off x="7543800" y="1325880"/>
+            <a:ext cx="3611880" cy="1261872"/>
           </a:xfrm>
           <a:prstGeom prst="roundRect">
             <a:avLst>
-              <a:gd name="adj" fmla="val 8740"/>
+              <a:gd name="adj" fmla="val 8696"/>
             </a:avLst>
           </a:prstGeom>
           <a:solidFill>
@@ -10691,8 +10691,8 @@
         </p:nvSpPr>
         <p:spPr>
           <a:xfrm>
-            <a:off x="7799832" y="1472184"/>
-            <a:ext cx="3145536" cy="256032"/>
+            <a:off x="7708392" y="1453896"/>
+            <a:ext cx="3282696" cy="228600"/>
           </a:xfrm>
           <a:prstGeom prst="rect">
             <a:avLst/>
@@ -10708,7 +10708,7 @@
               <a:buNone/>
             </a:pPr>
             <a:r>
-              <a:rPr lang="en-US" sz="1300" b="1" dirty="0">
+              <a:rPr lang="en-US" sz="1220" b="1" dirty="0">
                 <a:solidFill>
                   <a:srgbClr val="0068B7"/>
                 </a:solidFill>
@@ -10718,7 +10718,7 @@
               </a:rPr>
               <a:t>Implementation cue</a:t>
             </a:r>
-            <a:endParaRPr lang="en-US" sz="1300" dirty="0"/>
+            <a:endParaRPr lang="en-US" sz="1220" dirty="0"/>
           </a:p>
         </p:txBody>
       </p:sp>
@@ -10730,8 +10730,8 @@
         </p:nvSpPr>
         <p:spPr>
           <a:xfrm>
-            <a:off x="7799832" y="1801368"/>
-            <a:ext cx="3145536" cy="688543"/>
+            <a:off x="7708392" y="1764792"/>
+            <a:ext cx="3282696" cy="749808"/>
           </a:xfrm>
           <a:prstGeom prst="rect">
             <a:avLst/>
@@ -10749,7 +10749,7 @@
               <a:buNone/>
             </a:pPr>
             <a:r>
-              <a:rPr lang="en-US" sz="1320" dirty="0">
+              <a:rPr lang="en-US" sz="1220" dirty="0">
                 <a:solidFill>
                   <a:srgbClr val="17364A"/>
                 </a:solidFill>
@@ -10757,9 +10757,9 @@
                 <a:ea typeface="Aptos" pitchFamily="34" charset="-122"/>
                 <a:cs typeface="Aptos" pitchFamily="34" charset="-120"/>
               </a:rPr>
-              <a:t>OMB Memorandum M-24-10 on federal AI governance, risk management, and innovation, where relevant to.</a:t>
-            </a:r>
-            <a:endParaRPr lang="en-US" sz="1320" dirty="0"/>
+              <a:t>OMB Memorandum M-24-10 on federal AI governance, risk management, and.</a:t>
+            </a:r>
+            <a:endParaRPr lang="en-US" sz="1220" dirty="0"/>
           </a:p>
         </p:txBody>
       </p:sp>
@@ -10771,12 +10771,12 @@
         </p:nvSpPr>
         <p:spPr>
           <a:xfrm>
-            <a:off x="7635240" y="2718511"/>
-            <a:ext cx="3474720" cy="1328623"/>
+            <a:off x="7543800" y="2724912"/>
+            <a:ext cx="3611880" cy="1527048"/>
           </a:xfrm>
           <a:prstGeom prst="roundRect">
             <a:avLst>
-              <a:gd name="adj" fmla="val 8259"/>
+              <a:gd name="adj" fmla="val 7186"/>
             </a:avLst>
           </a:prstGeom>
           <a:solidFill>
@@ -10798,8 +10798,8 @@
         </p:nvSpPr>
         <p:spPr>
           <a:xfrm>
-            <a:off x="7799832" y="2864815"/>
-            <a:ext cx="3145536" cy="256032"/>
+            <a:off x="7708392" y="2852928"/>
+            <a:ext cx="3282696" cy="228600"/>
           </a:xfrm>
           <a:prstGeom prst="rect">
             <a:avLst/>
@@ -10815,7 +10815,7 @@
               <a:buNone/>
             </a:pPr>
             <a:r>
-              <a:rPr lang="en-US" sz="1300" b="1" dirty="0">
+              <a:rPr lang="en-US" sz="1220" b="1" dirty="0">
                 <a:solidFill>
                   <a:srgbClr val="0068B7"/>
                 </a:solidFill>
@@ -10825,7 +10825,7 @@
               </a:rPr>
               <a:t>Concept checkpoints</a:t>
             </a:r>
-            <a:endParaRPr lang="en-US" sz="1300" dirty="0"/>
+            <a:endParaRPr lang="en-US" sz="1220" dirty="0"/>
           </a:p>
         </p:txBody>
       </p:sp>
@@ -10837,8 +10837,8 @@
         </p:nvSpPr>
         <p:spPr>
           <a:xfrm>
-            <a:off x="7818120" y="3230575"/>
-            <a:ext cx="3090672" cy="670255"/>
+            <a:off x="7726680" y="3182112"/>
+            <a:ext cx="3227832" cy="960120"/>
           </a:xfrm>
           <a:prstGeom prst="rect">
             <a:avLst/>
@@ -10856,7 +10856,7 @@
               <a:buNone/>
             </a:pPr>
             <a:r>
-              <a:rPr lang="en-US" sz="1220" dirty="0">
+              <a:rPr lang="en-US" sz="1140" dirty="0">
                 <a:solidFill>
                   <a:srgbClr val="17364A"/>
                 </a:solidFill>
@@ -10864,16 +10864,16 @@
                 <a:ea typeface="Aptos" pitchFamily="34" charset="-122"/>
                 <a:cs typeface="Aptos" pitchFamily="34" charset="-120"/>
               </a:rPr>
-              <a:t>OMB Memorandum M-24-10 on federal AI governance, risk management,.</a:t>
-            </a:r>
-            <a:endParaRPr lang="en-US" sz="1220" dirty="0"/>
-          </a:p>
-          <a:p>
-            <a:pPr indent="0" marL="0">
-              <a:buNone/>
-            </a:pPr>
-            <a:r>
-              <a:rPr lang="en-US" sz="1220" dirty="0">
+              <a:t>OMB Memorandum M-24-10 on federal AI governance,.</a:t>
+            </a:r>
+            <a:endParaRPr lang="en-US" sz="1140" dirty="0"/>
+          </a:p>
+          <a:p>
+            <a:pPr indent="0" marL="0">
+              <a:buNone/>
+            </a:pPr>
+            <a:r>
+              <a:rPr lang="en-US" sz="1140" dirty="0">
                 <a:solidFill>
                   <a:srgbClr val="17364A"/>
                 </a:solidFill>
@@ -10881,9 +10881,9 @@
                 <a:ea typeface="Aptos" pitchFamily="34" charset="-122"/>
                 <a:cs typeface="Aptos" pitchFamily="34" charset="-120"/>
               </a:rPr>
-              <a:t>Agency strategic plans, procurement policies, privacy policies,.</a:t>
-            </a:r>
-            <a:endParaRPr lang="en-US" sz="1220" dirty="0"/>
+              <a:t>Agency strategic plans, procurement policies,.</a:t>
+            </a:r>
+            <a:endParaRPr lang="en-US" sz="1140" dirty="0"/>
           </a:p>
         </p:txBody>
       </p:sp>
@@ -10895,12 +10895,12 @@
         </p:nvSpPr>
         <p:spPr>
           <a:xfrm>
-            <a:off x="7635240" y="4184294"/>
-            <a:ext cx="3474720" cy="1466698"/>
+            <a:off x="7543800" y="4389120"/>
+            <a:ext cx="3611880" cy="1261872"/>
           </a:xfrm>
           <a:prstGeom prst="roundRect">
             <a:avLst>
-              <a:gd name="adj" fmla="val 7481"/>
+              <a:gd name="adj" fmla="val 8696"/>
             </a:avLst>
           </a:prstGeom>
           <a:solidFill>
@@ -10922,8 +10922,8 @@
         </p:nvSpPr>
         <p:spPr>
           <a:xfrm>
-            <a:off x="7799832" y="4330598"/>
-            <a:ext cx="3145536" cy="256032"/>
+            <a:off x="7708392" y="4517136"/>
+            <a:ext cx="3282696" cy="228600"/>
           </a:xfrm>
           <a:prstGeom prst="rect">
             <a:avLst/>
@@ -10939,7 +10939,7 @@
               <a:buNone/>
             </a:pPr>
             <a:r>
-              <a:rPr lang="en-US" sz="1300" b="1" dirty="0">
+              <a:rPr lang="en-US" sz="1220" b="1" dirty="0">
                 <a:solidFill>
                   <a:srgbClr val="0068B7"/>
                 </a:solidFill>
@@ -10949,7 +10949,7 @@
               </a:rPr>
               <a:t>Next action</a:t>
             </a:r>
-            <a:endParaRPr lang="en-US" sz="1300" dirty="0"/>
+            <a:endParaRPr lang="en-US" sz="1220" dirty="0"/>
           </a:p>
         </p:txBody>
       </p:sp>
@@ -10961,8 +10961,8 @@
         </p:nvSpPr>
         <p:spPr>
           <a:xfrm>
-            <a:off x="7799832" y="4659782"/>
-            <a:ext cx="3145536" cy="899770"/>
+            <a:off x="7708392" y="4828032"/>
+            <a:ext cx="3282696" cy="749808"/>
           </a:xfrm>
           <a:prstGeom prst="rect">
             <a:avLst/>
@@ -10980,7 +10980,7 @@
               <a:buNone/>
             </a:pPr>
             <a:r>
-              <a:rPr lang="en-US" sz="1320" dirty="0">
+              <a:rPr lang="en-US" sz="1220" dirty="0">
                 <a:solidFill>
                   <a:srgbClr val="17364A"/>
                 </a:solidFill>
@@ -10988,9 +10988,9 @@
                 <a:ea typeface="Aptos" pitchFamily="34" charset="-122"/>
                 <a:cs typeface="Aptos" pitchFamily="34" charset="-120"/>
               </a:rPr>
-              <a:t>Use the concept to clarify workflow changes, dependencies, staffing, procurement requirements, training needs, and implementation checkpoints.</a:t>
-            </a:r>
-            <a:endParaRPr lang="en-US" sz="1320" dirty="0"/>
+              <a:t>Use the concept to clarify workflow changes, dependencies, staffing, procurement.</a:t>
+            </a:r>
+            <a:endParaRPr lang="en-US" sz="1220" dirty="0"/>
           </a:p>
         </p:txBody>
       </p:sp>
@@ -11308,7 +11308,7 @@
                 <a:ea typeface="Aptos" pitchFamily="34" charset="-122"/>
                 <a:cs typeface="Aptos" pitchFamily="34" charset="-120"/>
               </a:rPr>
-              <a:t>• Play 11: Build and Deploy AI Solutions - This lesson informs Play 11 by helping learners.</a:t>
+              <a:t>• Play 11: Build and Deploy AI Solutions - This lesson informs Play 11 by.</a:t>
             </a:r>
             <a:endParaRPr lang="en-US" sz="1900" dirty="0"/>
           </a:p>
@@ -11325,7 +11325,7 @@
                 <a:ea typeface="Aptos" pitchFamily="34" charset="-122"/>
                 <a:cs typeface="Aptos" pitchFamily="34" charset="-120"/>
               </a:rPr>
-              <a:t>• Play 2: Readiness Assessment - This lesson informs Play 2 by helping learners connect the.</a:t>
+              <a:t>• Play 2: Readiness Assessment - This lesson informs Play 2 by helping.</a:t>
             </a:r>
             <a:endParaRPr lang="en-US" sz="1900" dirty="0"/>
           </a:p>
@@ -11342,7 +11342,7 @@
                 <a:ea typeface="Aptos" pitchFamily="34" charset="-122"/>
                 <a:cs typeface="Aptos" pitchFamily="34" charset="-120"/>
               </a:rPr>
-              <a:t>• Play 3: Establish AI Governance - This lesson informs Play 3 by helping learners connect the.</a:t>
+              <a:t>• Play 3: Establish AI Governance - This lesson informs Play 3 by helping.</a:t>
             </a:r>
             <a:endParaRPr lang="en-US" sz="1900" dirty="0"/>
           </a:p>
@@ -11359,7 +11359,7 @@
                 <a:ea typeface="Aptos" pitchFamily="34" charset="-122"/>
                 <a:cs typeface="Aptos" pitchFamily="34" charset="-120"/>
               </a:rPr>
-              <a:t>• Play 1: Vision &amp; Guardrails - This lesson informs Play 1 by helping learners connect the.</a:t>
+              <a:t>• Play 1: Vision &amp; Guardrails - This lesson informs Play 1 by helping learners.</a:t>
             </a:r>
             <a:endParaRPr lang="en-US" sz="1900" dirty="0"/>
           </a:p>
@@ -11400,8 +11400,8 @@
         </p:nvSpPr>
         <p:spPr>
           <a:xfrm>
-            <a:off x="8211312" y="1563624"/>
-            <a:ext cx="2734056" cy="256032"/>
+            <a:off x="8211312" y="1545336"/>
+            <a:ext cx="2734056" cy="228600"/>
           </a:xfrm>
           <a:prstGeom prst="rect">
             <a:avLst/>
@@ -11417,7 +11417,7 @@
               <a:buNone/>
             </a:pPr>
             <a:r>
-              <a:rPr lang="en-US" sz="1300" b="1" dirty="0">
+              <a:rPr lang="en-US" sz="1220" b="1" dirty="0">
                 <a:solidFill>
                   <a:srgbClr val="0068B7"/>
                 </a:solidFill>
@@ -11427,7 +11427,7 @@
               </a:rPr>
               <a:t>Apply the lesson</a:t>
             </a:r>
-            <a:endParaRPr lang="en-US" sz="1300" dirty="0"/>
+            <a:endParaRPr lang="en-US" sz="1220" dirty="0"/>
           </a:p>
         </p:txBody>
       </p:sp>
@@ -11439,8 +11439,8 @@
         </p:nvSpPr>
         <p:spPr>
           <a:xfrm>
-            <a:off x="8211312" y="1892808"/>
-            <a:ext cx="2734056" cy="1536192"/>
+            <a:off x="8211312" y="1856232"/>
+            <a:ext cx="2734056" cy="1591056"/>
           </a:xfrm>
           <a:prstGeom prst="rect">
             <a:avLst/>
@@ -11458,7 +11458,7 @@
               <a:buNone/>
             </a:pPr>
             <a:r>
-              <a:rPr lang="en-US" sz="1320" dirty="0">
+              <a:rPr lang="en-US" sz="1220" dirty="0">
                 <a:solidFill>
                   <a:srgbClr val="17364A"/>
                 </a:solidFill>
@@ -11466,9 +11466,9 @@
                 <a:ea typeface="Aptos" pitchFamily="34" charset="-122"/>
                 <a:cs typeface="Aptos" pitchFamily="34" charset="-120"/>
               </a:rPr>
-              <a:t>Use the related plays to identify decisions, participants, timing, approvals, and documentation needed for responsible implementation.</a:t>
-            </a:r>
-            <a:endParaRPr lang="en-US" sz="1320" dirty="0"/>
+              <a:t>Use the related plays to identify decisions, participants, timing, approvals,.</a:t>
+            </a:r>
+            <a:endParaRPr lang="en-US" sz="1220" dirty="0"/>
           </a:p>
         </p:txBody>
       </p:sp>
@@ -11507,8 +11507,8 @@
         </p:nvSpPr>
         <p:spPr>
           <a:xfrm>
-            <a:off x="8211312" y="3941064"/>
-            <a:ext cx="2734056" cy="256032"/>
+            <a:off x="8211312" y="3922776"/>
+            <a:ext cx="2734056" cy="228600"/>
           </a:xfrm>
           <a:prstGeom prst="rect">
             <a:avLst/>
@@ -11524,7 +11524,7 @@
               <a:buNone/>
             </a:pPr>
             <a:r>
-              <a:rPr lang="en-US" sz="1300" b="1" dirty="0">
+              <a:rPr lang="en-US" sz="1220" b="1" dirty="0">
                 <a:solidFill>
                   <a:srgbClr val="0068B7"/>
                 </a:solidFill>
@@ -11534,7 +11534,7 @@
               </a:rPr>
               <a:t>Use the play links to</a:t>
             </a:r>
-            <a:endParaRPr lang="en-US" sz="1300" dirty="0"/>
+            <a:endParaRPr lang="en-US" sz="1220" dirty="0"/>
           </a:p>
         </p:txBody>
       </p:sp>
@@ -11546,8 +11546,8 @@
         </p:nvSpPr>
         <p:spPr>
           <a:xfrm>
-            <a:off x="8229600" y="4306824"/>
-            <a:ext cx="2679192" cy="941832"/>
+            <a:off x="8229600" y="4251960"/>
+            <a:ext cx="2679192" cy="1033272"/>
           </a:xfrm>
           <a:prstGeom prst="rect">
             <a:avLst/>
@@ -11565,7 +11565,7 @@
               <a:buNone/>
             </a:pPr>
             <a:r>
-              <a:rPr lang="en-US" sz="1220" dirty="0">
+              <a:rPr lang="en-US" sz="1140" dirty="0">
                 <a:solidFill>
                   <a:srgbClr val="17364A"/>
                 </a:solidFill>
@@ -11575,14 +11575,14 @@
               </a:rPr>
               <a:t>Locate the decision point in the playbook sequence.</a:t>
             </a:r>
-            <a:endParaRPr lang="en-US" sz="1220" dirty="0"/>
-          </a:p>
-          <a:p>
-            <a:pPr indent="0" marL="0">
-              <a:buNone/>
-            </a:pPr>
-            <a:r>
-              <a:rPr lang="en-US" sz="1220" dirty="0">
+            <a:endParaRPr lang="en-US" sz="1140" dirty="0"/>
+          </a:p>
+          <a:p>
+            <a:pPr indent="0" marL="0">
+              <a:buNone/>
+            </a:pPr>
+            <a:r>
+              <a:rPr lang="en-US" sz="1140" dirty="0">
                 <a:solidFill>
                   <a:srgbClr val="17364A"/>
                 </a:solidFill>
@@ -11592,14 +11592,14 @@
               </a:rPr>
               <a:t>Identify who should participate in the work.</a:t>
             </a:r>
-            <a:endParaRPr lang="en-US" sz="1220" dirty="0"/>
-          </a:p>
-          <a:p>
-            <a:pPr indent="0" marL="0">
-              <a:buNone/>
-            </a:pPr>
-            <a:r>
-              <a:rPr lang="en-US" sz="1220" dirty="0">
+            <a:endParaRPr lang="en-US" sz="1140" dirty="0"/>
+          </a:p>
+          <a:p>
+            <a:pPr indent="0" marL="0">
+              <a:buNone/>
+            </a:pPr>
+            <a:r>
+              <a:rPr lang="en-US" sz="1140" dirty="0">
                 <a:solidFill>
                   <a:srgbClr val="17364A"/>
                 </a:solidFill>
@@ -11607,9 +11607,9 @@
                 <a:ea typeface="Aptos" pitchFamily="34" charset="-122"/>
                 <a:cs typeface="Aptos" pitchFamily="34" charset="-120"/>
               </a:rPr>
-              <a:t>Document the review, approval, or implementation step.</a:t>
-            </a:r>
-            <a:endParaRPr lang="en-US" sz="1220" dirty="0"/>
+              <a:t>Document the review, approval, or implementation.</a:t>
+            </a:r>
+            <a:endParaRPr lang="en-US" sz="1140" dirty="0"/>
           </a:p>
         </p:txBody>
       </p:sp>
@@ -11927,7 +11927,7 @@
                 <a:ea typeface="Aptos" pitchFamily="34" charset="-122"/>
                 <a:cs typeface="Aptos" pitchFamily="34" charset="-120"/>
               </a:rPr>
-              <a:t>• Tool 4: AI Policy Landscape Scan (Worksheet) - Use AI Policy Landscape Scan to translate this.</a:t>
+              <a:t>• Tool 4: AI Policy Landscape Scan (Worksheet) - Use AI Policy Landscape Scan.</a:t>
             </a:r>
             <a:endParaRPr lang="en-US" sz="1850" dirty="0"/>
           </a:p>
@@ -11944,7 +11944,7 @@
                 <a:ea typeface="Aptos" pitchFamily="34" charset="-122"/>
                 <a:cs typeface="Aptos" pitchFamily="34" charset="-120"/>
               </a:rPr>
-              <a:t>• Tool 5: AI Environmental and Resource Impact Review (Checklist) - Use AI Environmental and.</a:t>
+              <a:t>• Tool 5: AI Environmental and Resource Impact Review (Checklist) - Use AI.</a:t>
             </a:r>
             <a:endParaRPr lang="en-US" sz="1850" dirty="0"/>
           </a:p>
@@ -11961,7 +11961,7 @@
                 <a:ea typeface="Aptos" pitchFamily="34" charset="-122"/>
                 <a:cs typeface="Aptos" pitchFamily="34" charset="-120"/>
               </a:rPr>
-              <a:t>• Tool 6: Human-Centered AI Decision Rule Checklist (Checklist) - Use Human-Centered AI Decision.</a:t>
+              <a:t>• Tool 6: Human-Centered AI Decision Rule Checklist (Checklist) - Use.</a:t>
             </a:r>
             <a:endParaRPr lang="en-US" sz="1850" dirty="0"/>
           </a:p>
@@ -11978,7 +11978,7 @@
                 <a:ea typeface="Aptos" pitchFamily="34" charset="-122"/>
                 <a:cs typeface="Aptos" pitchFamily="34" charset="-120"/>
               </a:rPr>
-              <a:t>• Tool 8: AI Project Charter (Planning) - Use AI Project Charter to translate this lesson into a.</a:t>
+              <a:t>• Tool 8: AI Project Charter (Planning) - Use AI Project Charter to translate.</a:t>
             </a:r>
             <a:endParaRPr lang="en-US" sz="1850" dirty="0"/>
           </a:p>
@@ -12019,8 +12019,8 @@
         </p:nvSpPr>
         <p:spPr>
           <a:xfrm>
-            <a:off x="8211312" y="1563624"/>
-            <a:ext cx="2734056" cy="256032"/>
+            <a:off x="8211312" y="1545336"/>
+            <a:ext cx="2734056" cy="228600"/>
           </a:xfrm>
           <a:prstGeom prst="rect">
             <a:avLst/>
@@ -12036,7 +12036,7 @@
               <a:buNone/>
             </a:pPr>
             <a:r>
-              <a:rPr lang="en-US" sz="1300" b="1" dirty="0">
+              <a:rPr lang="en-US" sz="1220" b="1" dirty="0">
                 <a:solidFill>
                   <a:srgbClr val="0068B7"/>
                 </a:solidFill>
@@ -12046,7 +12046,7 @@
               </a:rPr>
               <a:t>Use the tools</a:t>
             </a:r>
-            <a:endParaRPr lang="en-US" sz="1300" dirty="0"/>
+            <a:endParaRPr lang="en-US" sz="1220" dirty="0"/>
           </a:p>
         </p:txBody>
       </p:sp>
@@ -12058,8 +12058,8 @@
         </p:nvSpPr>
         <p:spPr>
           <a:xfrm>
-            <a:off x="8211312" y="1892808"/>
-            <a:ext cx="2734056" cy="1536192"/>
+            <a:off x="8211312" y="1856232"/>
+            <a:ext cx="2734056" cy="1591056"/>
           </a:xfrm>
           <a:prstGeom prst="rect">
             <a:avLst/>
@@ -12077,7 +12077,7 @@
               <a:buNone/>
             </a:pPr>
             <a:r>
-              <a:rPr lang="en-US" sz="1320" dirty="0">
+              <a:rPr lang="en-US" sz="1220" dirty="0">
                 <a:solidFill>
                   <a:srgbClr val="17364A"/>
                 </a:solidFill>
@@ -12085,9 +12085,9 @@
                 <a:ea typeface="Aptos" pitchFamily="34" charset="-122"/>
                 <a:cs typeface="Aptos" pitchFamily="34" charset="-120"/>
               </a:rPr>
-              <a:t>Use linked tools when your department needs a structured worksheet, template, checklist, review process, or documentation artifact.</a:t>
-            </a:r>
-            <a:endParaRPr lang="en-US" sz="1320" dirty="0"/>
+              <a:t>Use linked tools when your department needs a structured worksheet, template,.</a:t>
+            </a:r>
+            <a:endParaRPr lang="en-US" sz="1220" dirty="0"/>
           </a:p>
         </p:txBody>
       </p:sp>
@@ -12126,8 +12126,8 @@
         </p:nvSpPr>
         <p:spPr>
           <a:xfrm>
-            <a:off x="8211312" y="3941064"/>
-            <a:ext cx="2734056" cy="256032"/>
+            <a:off x="8211312" y="3922776"/>
+            <a:ext cx="2734056" cy="228600"/>
           </a:xfrm>
           <a:prstGeom prst="rect">
             <a:avLst/>
@@ -12143,7 +12143,7 @@
               <a:buNone/>
             </a:pPr>
             <a:r>
-              <a:rPr lang="en-US" sz="1300" b="1" dirty="0">
+              <a:rPr lang="en-US" sz="1220" b="1" dirty="0">
                 <a:solidFill>
                   <a:srgbClr val="0068B7"/>
                 </a:solidFill>
@@ -12153,7 +12153,7 @@
               </a:rPr>
               <a:t>Tool selection cues</a:t>
             </a:r>
-            <a:endParaRPr lang="en-US" sz="1300" dirty="0"/>
+            <a:endParaRPr lang="en-US" sz="1220" dirty="0"/>
           </a:p>
         </p:txBody>
       </p:sp>
@@ -12165,8 +12165,8 @@
         </p:nvSpPr>
         <p:spPr>
           <a:xfrm>
-            <a:off x="8229600" y="4306824"/>
-            <a:ext cx="2679192" cy="941832"/>
+            <a:off x="8229600" y="4251960"/>
+            <a:ext cx="2679192" cy="1033272"/>
           </a:xfrm>
           <a:prstGeom prst="rect">
             <a:avLst/>
@@ -12184,7 +12184,7 @@
               <a:buNone/>
             </a:pPr>
             <a:r>
-              <a:rPr lang="en-US" sz="1220" dirty="0">
+              <a:rPr lang="en-US" sz="1140" dirty="0">
                 <a:solidFill>
                   <a:srgbClr val="17364A"/>
                 </a:solidFill>
@@ -12194,14 +12194,14 @@
               </a:rPr>
               <a:t>Use a tool when no comparable local process exists.</a:t>
             </a:r>
-            <a:endParaRPr lang="en-US" sz="1220" dirty="0"/>
-          </a:p>
-          <a:p>
-            <a:pPr indent="0" marL="0">
-              <a:buNone/>
-            </a:pPr>
-            <a:r>
-              <a:rPr lang="en-US" sz="1220" dirty="0">
+            <a:endParaRPr lang="en-US" sz="1140" dirty="0"/>
+          </a:p>
+          <a:p>
+            <a:pPr indent="0" marL="0">
+              <a:buNone/>
+            </a:pPr>
+            <a:r>
+              <a:rPr lang="en-US" sz="1140" dirty="0">
                 <a:solidFill>
                   <a:srgbClr val="17364A"/>
                 </a:solidFill>
@@ -12209,16 +12209,16 @@
                 <a:ea typeface="Aptos" pitchFamily="34" charset="-122"/>
                 <a:cs typeface="Aptos" pitchFamily="34" charset="-120"/>
               </a:rPr>
-              <a:t>Adapt existing department templates when they already fit the.</a:t>
-            </a:r>
-            <a:endParaRPr lang="en-US" sz="1220" dirty="0"/>
-          </a:p>
-          <a:p>
-            <a:pPr indent="0" marL="0">
-              <a:buNone/>
-            </a:pPr>
-            <a:r>
-              <a:rPr lang="en-US" sz="1220" dirty="0">
+              <a:t>Adapt existing department templates when they.</a:t>
+            </a:r>
+            <a:endParaRPr lang="en-US" sz="1140" dirty="0"/>
+          </a:p>
+          <a:p>
+            <a:pPr indent="0" marL="0">
+              <a:buNone/>
+            </a:pPr>
+            <a:r>
+              <a:rPr lang="en-US" sz="1140" dirty="0">
                 <a:solidFill>
                   <a:srgbClr val="17364A"/>
                 </a:solidFill>
@@ -12226,9 +12226,9 @@
                 <a:ea typeface="Aptos" pitchFamily="34" charset="-122"/>
                 <a:cs typeface="Aptos" pitchFamily="34" charset="-120"/>
               </a:rPr>
-              <a:t>Save the completed artifact as evidence of the decision.</a:t>
-            </a:r>
-            <a:endParaRPr lang="en-US" sz="1220" dirty="0"/>
+              <a:t>Save the completed artifact as evidence of the.</a:t>
+            </a:r>
+            <a:endParaRPr lang="en-US" sz="1140" dirty="0"/>
           </a:p>
         </p:txBody>
       </p:sp>
@@ -12519,8 +12519,8 @@
         </p:nvSpPr>
         <p:spPr>
           <a:xfrm>
-            <a:off x="868680" y="1508760"/>
-            <a:ext cx="6309360" cy="4160520"/>
+            <a:off x="822960" y="1463040"/>
+            <a:ext cx="6565392" cy="4343400"/>
           </a:xfrm>
           <a:prstGeom prst="rect">
             <a:avLst/>
@@ -12538,7 +12538,7 @@
               <a:buNone/>
             </a:pPr>
             <a:r>
-              <a:rPr lang="en-US" sz="2100" dirty="0">
+              <a:rPr lang="en-US" sz="1920" dirty="0">
                 <a:solidFill>
                   <a:srgbClr val="003A63"/>
                 </a:solidFill>
@@ -12548,14 +12548,14 @@
               </a:rPr>
               <a:t>• Explain why AI implementation requires change management.</a:t>
             </a:r>
-            <a:endParaRPr lang="en-US" sz="2100" dirty="0"/>
-          </a:p>
-          <a:p>
-            <a:pPr indent="0" marL="0">
-              <a:buNone/>
-            </a:pPr>
-            <a:r>
-              <a:rPr lang="en-US" sz="2100" dirty="0">
+            <a:endParaRPr lang="en-US" sz="1920" dirty="0"/>
+          </a:p>
+          <a:p>
+            <a:pPr indent="0" marL="0">
+              <a:buNone/>
+            </a:pPr>
+            <a:r>
+              <a:rPr lang="en-US" sz="1920" dirty="0">
                 <a:solidFill>
                   <a:srgbClr val="003A63"/>
                 </a:solidFill>
@@ -12565,14 +12565,14 @@
               </a:rPr>
               <a:t>• Identify stakeholders affected by an AI-supported workflow.</a:t>
             </a:r>
-            <a:endParaRPr lang="en-US" sz="2100" dirty="0"/>
-          </a:p>
-          <a:p>
-            <a:pPr indent="0" marL="0">
-              <a:buNone/>
-            </a:pPr>
-            <a:r>
-              <a:rPr lang="en-US" sz="2100" dirty="0">
+            <a:endParaRPr lang="en-US" sz="1920" dirty="0"/>
+          </a:p>
+          <a:p>
+            <a:pPr indent="0" marL="0">
+              <a:buNone/>
+            </a:pPr>
+            <a:r>
+              <a:rPr lang="en-US" sz="1920" dirty="0">
                 <a:solidFill>
                   <a:srgbClr val="003A63"/>
                 </a:solidFill>
@@ -12580,9 +12580,9 @@
                 <a:ea typeface="Aptos" pitchFamily="34" charset="-122"/>
                 <a:cs typeface="Aptos" pitchFamily="34" charset="-120"/>
               </a:rPr>
-              <a:t>• Develop a change management plan that includes communication, training, workflow updates,.</a:t>
-            </a:r>
-            <a:endParaRPr lang="en-US" sz="2100" dirty="0"/>
+              <a:t>• Develop a change management plan that includes communication, training,.</a:t>
+            </a:r>
+            <a:endParaRPr lang="en-US" sz="1920" dirty="0"/>
           </a:p>
         </p:txBody>
       </p:sp>
@@ -12594,12 +12594,12 @@
         </p:nvSpPr>
         <p:spPr>
           <a:xfrm>
-            <a:off x="7635240" y="1325880"/>
-            <a:ext cx="3474720" cy="1207008"/>
+            <a:off x="7543800" y="1325880"/>
+            <a:ext cx="3611880" cy="1261872"/>
           </a:xfrm>
           <a:prstGeom prst="roundRect">
             <a:avLst>
-              <a:gd name="adj" fmla="val 9091"/>
+              <a:gd name="adj" fmla="val 8696"/>
             </a:avLst>
           </a:prstGeom>
           <a:solidFill>
@@ -12621,8 +12621,8 @@
         </p:nvSpPr>
         <p:spPr>
           <a:xfrm>
-            <a:off x="7799832" y="1472184"/>
-            <a:ext cx="3145536" cy="256032"/>
+            <a:off x="7708392" y="1453896"/>
+            <a:ext cx="3282696" cy="228600"/>
           </a:xfrm>
           <a:prstGeom prst="rect">
             <a:avLst/>
@@ -12638,7 +12638,7 @@
               <a:buNone/>
             </a:pPr>
             <a:r>
-              <a:rPr lang="en-US" sz="1300" b="1" dirty="0">
+              <a:rPr lang="en-US" sz="1220" b="1" dirty="0">
                 <a:solidFill>
                   <a:srgbClr val="0068B7"/>
                 </a:solidFill>
@@ -12648,7 +12648,7 @@
               </a:rPr>
               <a:t>Implementation cue</a:t>
             </a:r>
-            <a:endParaRPr lang="en-US" sz="1300" dirty="0"/>
+            <a:endParaRPr lang="en-US" sz="1220" dirty="0"/>
           </a:p>
         </p:txBody>
       </p:sp>
@@ -12660,8 +12660,8 @@
         </p:nvSpPr>
         <p:spPr>
           <a:xfrm>
-            <a:off x="7799832" y="1801368"/>
-            <a:ext cx="3145536" cy="640080"/>
+            <a:off x="7708392" y="1764792"/>
+            <a:ext cx="3282696" cy="749808"/>
           </a:xfrm>
           <a:prstGeom prst="rect">
             <a:avLst/>
@@ -12679,7 +12679,7 @@
               <a:buNone/>
             </a:pPr>
             <a:r>
-              <a:rPr lang="en-US" sz="1320" dirty="0">
+              <a:rPr lang="en-US" sz="1220" dirty="0">
                 <a:solidFill>
                   <a:srgbClr val="17364A"/>
                 </a:solidFill>
@@ -12689,7 +12689,7 @@
               </a:rPr>
               <a:t>Explain why AI implementation requires change management.</a:t>
             </a:r>
-            <a:endParaRPr lang="en-US" sz="1320" dirty="0"/>
+            <a:endParaRPr lang="en-US" sz="1220" dirty="0"/>
           </a:p>
         </p:txBody>
       </p:sp>
@@ -12701,12 +12701,12 @@
         </p:nvSpPr>
         <p:spPr>
           <a:xfrm>
-            <a:off x="7635240" y="2670048"/>
-            <a:ext cx="3474720" cy="1377086"/>
+            <a:off x="7543800" y="2724912"/>
+            <a:ext cx="3611880" cy="1527048"/>
           </a:xfrm>
           <a:prstGeom prst="roundRect">
             <a:avLst>
-              <a:gd name="adj" fmla="val 7968"/>
+              <a:gd name="adj" fmla="val 7186"/>
             </a:avLst>
           </a:prstGeom>
           <a:solidFill>
@@ -12728,8 +12728,8 @@
         </p:nvSpPr>
         <p:spPr>
           <a:xfrm>
-            <a:off x="7799832" y="2816352"/>
-            <a:ext cx="3145536" cy="256032"/>
+            <a:off x="7708392" y="2852928"/>
+            <a:ext cx="3282696" cy="228600"/>
           </a:xfrm>
           <a:prstGeom prst="rect">
             <a:avLst/>
@@ -12745,7 +12745,7 @@
               <a:buNone/>
             </a:pPr>
             <a:r>
-              <a:rPr lang="en-US" sz="1300" b="1" dirty="0">
+              <a:rPr lang="en-US" sz="1220" b="1" dirty="0">
                 <a:solidFill>
                   <a:srgbClr val="0068B7"/>
                 </a:solidFill>
@@ -12755,7 +12755,7 @@
               </a:rPr>
               <a:t>Concept checkpoints</a:t>
             </a:r>
-            <a:endParaRPr lang="en-US" sz="1300" dirty="0"/>
+            <a:endParaRPr lang="en-US" sz="1220" dirty="0"/>
           </a:p>
         </p:txBody>
       </p:sp>
@@ -12767,8 +12767,8 @@
         </p:nvSpPr>
         <p:spPr>
           <a:xfrm>
-            <a:off x="7818120" y="3182112"/>
-            <a:ext cx="3090672" cy="718718"/>
+            <a:off x="7726680" y="3182112"/>
+            <a:ext cx="3227832" cy="960120"/>
           </a:xfrm>
           <a:prstGeom prst="rect">
             <a:avLst/>
@@ -12786,7 +12786,7 @@
               <a:buNone/>
             </a:pPr>
             <a:r>
-              <a:rPr lang="en-US" sz="1220" dirty="0">
+              <a:rPr lang="en-US" sz="1140" dirty="0">
                 <a:solidFill>
                   <a:srgbClr val="17364A"/>
                 </a:solidFill>
@@ -12794,16 +12794,16 @@
                 <a:ea typeface="Aptos" pitchFamily="34" charset="-122"/>
                 <a:cs typeface="Aptos" pitchFamily="34" charset="-120"/>
               </a:rPr>
-              <a:t>Develop a change management plan that includes communication,.</a:t>
-            </a:r>
-            <a:endParaRPr lang="en-US" sz="1220" dirty="0"/>
-          </a:p>
-          <a:p>
-            <a:pPr indent="0" marL="0">
-              <a:buNone/>
-            </a:pPr>
-            <a:r>
-              <a:rPr lang="en-US" sz="1220" dirty="0">
+              <a:t>Develop a change management plan that includes.</a:t>
+            </a:r>
+            <a:endParaRPr lang="en-US" sz="1140" dirty="0"/>
+          </a:p>
+          <a:p>
+            <a:pPr indent="0" marL="0">
+              <a:buNone/>
+            </a:pPr>
+            <a:r>
+              <a:rPr lang="en-US" sz="1140" dirty="0">
                 <a:solidFill>
                   <a:srgbClr val="17364A"/>
                 </a:solidFill>
@@ -12811,16 +12811,16 @@
                 <a:ea typeface="Aptos" pitchFamily="34" charset="-122"/>
                 <a:cs typeface="Aptos" pitchFamily="34" charset="-120"/>
               </a:rPr>
-              <a:t>Recognize staff concerns related to trust, workload, deskilling,.</a:t>
-            </a:r>
-            <a:endParaRPr lang="en-US" sz="1220" dirty="0"/>
-          </a:p>
-          <a:p>
-            <a:pPr indent="0" marL="0">
-              <a:buNone/>
-            </a:pPr>
-            <a:r>
-              <a:rPr lang="en-US" sz="1220" dirty="0">
+              <a:t>Recognize staff concerns related to trust,.</a:t>
+            </a:r>
+            <a:endParaRPr lang="en-US" sz="1140" dirty="0"/>
+          </a:p>
+          <a:p>
+            <a:pPr indent="0" marL="0">
+              <a:buNone/>
+            </a:pPr>
+            <a:r>
+              <a:rPr lang="en-US" sz="1140" dirty="0">
                 <a:solidFill>
                   <a:srgbClr val="17364A"/>
                 </a:solidFill>
@@ -12830,7 +12830,7 @@
               </a:rPr>
               <a:t>Produce an AI adoption and change management plan.</a:t>
             </a:r>
-            <a:endParaRPr lang="en-US" sz="1220" dirty="0"/>
+            <a:endParaRPr lang="en-US" sz="1140" dirty="0"/>
           </a:p>
         </p:txBody>
       </p:sp>
@@ -12842,12 +12842,12 @@
         </p:nvSpPr>
         <p:spPr>
           <a:xfrm>
-            <a:off x="7635240" y="4184294"/>
-            <a:ext cx="3474720" cy="1466698"/>
+            <a:off x="7543800" y="4389120"/>
+            <a:ext cx="3611880" cy="1261872"/>
           </a:xfrm>
           <a:prstGeom prst="roundRect">
             <a:avLst>
-              <a:gd name="adj" fmla="val 7481"/>
+              <a:gd name="adj" fmla="val 8696"/>
             </a:avLst>
           </a:prstGeom>
           <a:solidFill>
@@ -12869,8 +12869,8 @@
         </p:nvSpPr>
         <p:spPr>
           <a:xfrm>
-            <a:off x="7799832" y="4330598"/>
-            <a:ext cx="3145536" cy="256032"/>
+            <a:off x="7708392" y="4517136"/>
+            <a:ext cx="3282696" cy="228600"/>
           </a:xfrm>
           <a:prstGeom prst="rect">
             <a:avLst/>
@@ -12886,7 +12886,7 @@
               <a:buNone/>
             </a:pPr>
             <a:r>
-              <a:rPr lang="en-US" sz="1300" b="1" dirty="0">
+              <a:rPr lang="en-US" sz="1220" b="1" dirty="0">
                 <a:solidFill>
                   <a:srgbClr val="0068B7"/>
                 </a:solidFill>
@@ -12896,7 +12896,7 @@
               </a:rPr>
               <a:t>Next action</a:t>
             </a:r>
-            <a:endParaRPr lang="en-US" sz="1300" dirty="0"/>
+            <a:endParaRPr lang="en-US" sz="1220" dirty="0"/>
           </a:p>
         </p:txBody>
       </p:sp>
@@ -12908,8 +12908,8 @@
         </p:nvSpPr>
         <p:spPr>
           <a:xfrm>
-            <a:off x="7799832" y="4659782"/>
-            <a:ext cx="3145536" cy="899770"/>
+            <a:off x="7708392" y="4828032"/>
+            <a:ext cx="3282696" cy="749808"/>
           </a:xfrm>
           <a:prstGeom prst="rect">
             <a:avLst/>
@@ -12927,7 +12927,7 @@
               <a:buNone/>
             </a:pPr>
             <a:r>
-              <a:rPr lang="en-US" sz="1320" dirty="0">
+              <a:rPr lang="en-US" sz="1220" dirty="0">
                 <a:solidFill>
                   <a:srgbClr val="17364A"/>
                 </a:solidFill>
@@ -12935,9 +12935,9 @@
                 <a:ea typeface="Aptos" pitchFamily="34" charset="-122"/>
                 <a:cs typeface="Aptos" pitchFamily="34" charset="-120"/>
               </a:rPr>
-              <a:t>Use the assignment to test whether you can explain the concept, apply it to a realistic public health situation, and identify what would need review before the work moves forward.</a:t>
-            </a:r>
-            <a:endParaRPr lang="en-US" sz="1320" dirty="0"/>
+              <a:t>Use the assignment to test whether you can explain the concept, apply it to a.</a:t>
+            </a:r>
+            <a:endParaRPr lang="en-US" sz="1220" dirty="0"/>
           </a:p>
         </p:txBody>
       </p:sp>
@@ -13228,8 +13228,8 @@
         </p:nvSpPr>
         <p:spPr>
           <a:xfrm>
-            <a:off x="868680" y="1508760"/>
-            <a:ext cx="6309360" cy="4160520"/>
+            <a:off x="822960" y="1463040"/>
+            <a:ext cx="6565392" cy="4343400"/>
           </a:xfrm>
           <a:prstGeom prst="rect">
             <a:avLst/>
@@ -13247,7 +13247,7 @@
               <a:buNone/>
             </a:pPr>
             <a:r>
-              <a:rPr lang="en-US" sz="2100" dirty="0">
+              <a:rPr lang="en-US" sz="1920" dirty="0">
                 <a:solidFill>
                   <a:srgbClr val="003A63"/>
                 </a:solidFill>
@@ -13255,16 +13255,16 @@
                 <a:ea typeface="Aptos" pitchFamily="34" charset="-122"/>
                 <a:cs typeface="Aptos" pitchFamily="34" charset="-120"/>
               </a:rPr>
-              <a:t>• AI adoption changes how people work, make decisions, document actions, communicate with.</a:t>
-            </a:r>
-            <a:endParaRPr lang="en-US" sz="2100" dirty="0"/>
-          </a:p>
-          <a:p>
-            <a:pPr indent="0" marL="0">
-              <a:buNone/>
-            </a:pPr>
-            <a:r>
-              <a:rPr lang="en-US" sz="2100" dirty="0">
+              <a:t>• AI adoption changes how people work, make decisions, document actions,.</a:t>
+            </a:r>
+            <a:endParaRPr lang="en-US" sz="1920" dirty="0"/>
+          </a:p>
+          <a:p>
+            <a:pPr indent="0" marL="0">
+              <a:buNone/>
+            </a:pPr>
+            <a:r>
+              <a:rPr lang="en-US" sz="1920" dirty="0">
                 <a:solidFill>
                   <a:srgbClr val="003A63"/>
                 </a:solidFill>
@@ -13272,16 +13272,16 @@
                 <a:ea typeface="Aptos" pitchFamily="34" charset="-122"/>
                 <a:cs typeface="Aptos" pitchFamily="34" charset="-120"/>
               </a:rPr>
-              <a:t>• Successful implementation requires change management, not just technical deployment.</a:t>
-            </a:r>
-            <a:endParaRPr lang="en-US" sz="2100" dirty="0"/>
-          </a:p>
-          <a:p>
-            <a:pPr indent="0" marL="0">
-              <a:buNone/>
-            </a:pPr>
-            <a:r>
-              <a:rPr lang="en-US" sz="2100" dirty="0">
+              <a:t>• Successful implementation requires change management, not just technical.</a:t>
+            </a:r>
+            <a:endParaRPr lang="en-US" sz="1920" dirty="0"/>
+          </a:p>
+          <a:p>
+            <a:pPr indent="0" marL="0">
+              <a:buNone/>
+            </a:pPr>
+            <a:r>
+              <a:rPr lang="en-US" sz="1920" dirty="0">
                 <a:solidFill>
                   <a:srgbClr val="003A63"/>
                 </a:solidFill>
@@ -13289,9 +13289,9 @@
                 <a:ea typeface="Aptos" pitchFamily="34" charset="-122"/>
                 <a:cs typeface="Aptos" pitchFamily="34" charset="-120"/>
               </a:rPr>
-              <a:t>• Staff need to understand why a tool is being introduced, how it affects their workflow, what.</a:t>
-            </a:r>
-            <a:endParaRPr lang="en-US" sz="2100" dirty="0"/>
+              <a:t>• Staff need to understand why a tool is being introduced, how it affects.</a:t>
+            </a:r>
+            <a:endParaRPr lang="en-US" sz="1920" dirty="0"/>
           </a:p>
         </p:txBody>
       </p:sp>
@@ -13303,12 +13303,12 @@
         </p:nvSpPr>
         <p:spPr>
           <a:xfrm>
-            <a:off x="7635240" y="1325880"/>
-            <a:ext cx="3474720" cy="1255471"/>
+            <a:off x="7543800" y="1325880"/>
+            <a:ext cx="3611880" cy="1261872"/>
           </a:xfrm>
           <a:prstGeom prst="roundRect">
             <a:avLst>
-              <a:gd name="adj" fmla="val 8740"/>
+              <a:gd name="adj" fmla="val 8696"/>
             </a:avLst>
           </a:prstGeom>
           <a:solidFill>
@@ -13330,8 +13330,8 @@
         </p:nvSpPr>
         <p:spPr>
           <a:xfrm>
-            <a:off x="7799832" y="1472184"/>
-            <a:ext cx="3145536" cy="256032"/>
+            <a:off x="7708392" y="1453896"/>
+            <a:ext cx="3282696" cy="228600"/>
           </a:xfrm>
           <a:prstGeom prst="rect">
             <a:avLst/>
@@ -13347,7 +13347,7 @@
               <a:buNone/>
             </a:pPr>
             <a:r>
-              <a:rPr lang="en-US" sz="1300" b="1" dirty="0">
+              <a:rPr lang="en-US" sz="1220" b="1" dirty="0">
                 <a:solidFill>
                   <a:srgbClr val="0068B7"/>
                 </a:solidFill>
@@ -13357,7 +13357,7 @@
               </a:rPr>
               <a:t>Implementation cue</a:t>
             </a:r>
-            <a:endParaRPr lang="en-US" sz="1300" dirty="0"/>
+            <a:endParaRPr lang="en-US" sz="1220" dirty="0"/>
           </a:p>
         </p:txBody>
       </p:sp>
@@ -13369,8 +13369,8 @@
         </p:nvSpPr>
         <p:spPr>
           <a:xfrm>
-            <a:off x="7799832" y="1801368"/>
-            <a:ext cx="3145536" cy="688543"/>
+            <a:off x="7708392" y="1764792"/>
+            <a:ext cx="3282696" cy="749808"/>
           </a:xfrm>
           <a:prstGeom prst="rect">
             <a:avLst/>
@@ -13388,7 +13388,7 @@
               <a:buNone/>
             </a:pPr>
             <a:r>
-              <a:rPr lang="en-US" sz="1320" dirty="0">
+              <a:rPr lang="en-US" sz="1220" dirty="0">
                 <a:solidFill>
                   <a:srgbClr val="17364A"/>
                 </a:solidFill>
@@ -13396,9 +13396,9 @@
                 <a:ea typeface="Aptos" pitchFamily="34" charset="-122"/>
                 <a:cs typeface="Aptos" pitchFamily="34" charset="-120"/>
               </a:rPr>
-              <a:t>AI adoption changes how people work, make decisions, document actions, communicate with partners, and.</a:t>
-            </a:r>
-            <a:endParaRPr lang="en-US" sz="1320" dirty="0"/>
+              <a:t>AI adoption changes how people work, make decisions, document actions,.</a:t>
+            </a:r>
+            <a:endParaRPr lang="en-US" sz="1220" dirty="0"/>
           </a:p>
         </p:txBody>
       </p:sp>
@@ -13410,12 +13410,12 @@
         </p:nvSpPr>
         <p:spPr>
           <a:xfrm>
-            <a:off x="7635240" y="2718511"/>
-            <a:ext cx="3474720" cy="1328623"/>
+            <a:off x="7543800" y="2724912"/>
+            <a:ext cx="3611880" cy="1527048"/>
           </a:xfrm>
           <a:prstGeom prst="roundRect">
             <a:avLst>
-              <a:gd name="adj" fmla="val 8259"/>
+              <a:gd name="adj" fmla="val 7186"/>
             </a:avLst>
           </a:prstGeom>
           <a:solidFill>
@@ -13437,24 +13437,26 @@
         </p:nvSpPr>
         <p:spPr>
           <a:xfrm>
-            <a:off x="7799832" y="2846527"/>
-            <a:ext cx="3145536" cy="237744"/>
-          </a:xfrm>
-          <a:prstGeom prst="rect">
-            <a:avLst/>
-          </a:prstGeom>
-          <a:noFill/>
-          <a:ln/>
-        </p:spPr>
-        <p:txBody>
-          <a:bodyPr wrap="square" lIns="0" tIns="0" rIns="0" bIns="0" rtlCol="0" anchor="ctr"/>
-          <a:lstStyle/>
-          <a:p>
-            <a:pPr indent="0" marL="0">
-              <a:buNone/>
-            </a:pPr>
-            <a:r>
-              <a:rPr lang="en-US" sz="1250" b="1" dirty="0">
+            <a:off x="7708392" y="2852928"/>
+            <a:ext cx="3282696" cy="219456"/>
+          </a:xfrm>
+          <a:prstGeom prst="rect">
+            <a:avLst/>
+          </a:prstGeom>
+          <a:noFill/>
+          <a:ln/>
+        </p:spPr>
+        <p:txBody>
+          <a:bodyPr wrap="square" lIns="0" tIns="0" rIns="0" bIns="0" rtlCol="0" anchor="ctr">
+            <a:normAutofit/>
+          </a:bodyPr>
+          <a:lstStyle/>
+          <a:p>
+            <a:pPr indent="0" marL="0">
+              <a:buNone/>
+            </a:pPr>
+            <a:r>
+              <a:rPr lang="en-US" sz="1160" b="1" dirty="0">
                 <a:solidFill>
                   <a:srgbClr val="0068B7"/>
                 </a:solidFill>
@@ -13464,7 +13466,7 @@
               </a:rPr>
               <a:t>Implementation path</a:t>
             </a:r>
-            <a:endParaRPr lang="en-US" sz="1250" dirty="0"/>
+            <a:endParaRPr lang="en-US" sz="1160" dirty="0"/>
           </a:p>
         </p:txBody>
       </p:sp>
@@ -13476,7 +13478,7 @@
         </p:nvSpPr>
         <p:spPr>
           <a:xfrm>
-            <a:off x="8763000" y="3399739"/>
+            <a:off x="8717280" y="3406140"/>
             <a:ext cx="164592" cy="0"/>
           </a:xfrm>
           <a:prstGeom prst="line">
@@ -13499,8 +13501,8 @@
         </p:nvSpPr>
         <p:spPr>
           <a:xfrm>
-            <a:off x="7872984" y="3248863"/>
-            <a:ext cx="890016" cy="301752"/>
+            <a:off x="7781544" y="3255264"/>
+            <a:ext cx="935736" cy="301752"/>
           </a:xfrm>
           <a:prstGeom prst="roundRect">
             <a:avLst>
@@ -13526,8 +13528,8 @@
         </p:nvSpPr>
         <p:spPr>
           <a:xfrm>
-            <a:off x="7909560" y="3322015"/>
-            <a:ext cx="816864" cy="146304"/>
+            <a:off x="7818120" y="3328416"/>
+            <a:ext cx="862584" cy="146304"/>
           </a:xfrm>
           <a:prstGeom prst="rect">
             <a:avLst/>
@@ -13567,7 +13569,7 @@
         </p:nvSpPr>
         <p:spPr>
           <a:xfrm>
-            <a:off x="9817608" y="3399739"/>
+            <a:off x="9817608" y="3406140"/>
             <a:ext cx="164592" cy="0"/>
           </a:xfrm>
           <a:prstGeom prst="line">
@@ -13590,8 +13592,8 @@
         </p:nvSpPr>
         <p:spPr>
           <a:xfrm>
-            <a:off x="8927592" y="3248863"/>
-            <a:ext cx="890016" cy="301752"/>
+            <a:off x="8881872" y="3255264"/>
+            <a:ext cx="935736" cy="301752"/>
           </a:xfrm>
           <a:prstGeom prst="roundRect">
             <a:avLst>
@@ -13617,8 +13619,8 @@
         </p:nvSpPr>
         <p:spPr>
           <a:xfrm>
-            <a:off x="8964168" y="3322015"/>
-            <a:ext cx="816864" cy="146304"/>
+            <a:off x="8918448" y="3328416"/>
+            <a:ext cx="862584" cy="146304"/>
           </a:xfrm>
           <a:prstGeom prst="rect">
             <a:avLst/>
@@ -13658,8 +13660,8 @@
         </p:nvSpPr>
         <p:spPr>
           <a:xfrm>
-            <a:off x="9982200" y="3248863"/>
-            <a:ext cx="890016" cy="301752"/>
+            <a:off x="9982200" y="3255264"/>
+            <a:ext cx="935736" cy="301752"/>
           </a:xfrm>
           <a:prstGeom prst="roundRect">
             <a:avLst>
@@ -13685,8 +13687,8 @@
         </p:nvSpPr>
         <p:spPr>
           <a:xfrm>
-            <a:off x="10018776" y="3322015"/>
-            <a:ext cx="816864" cy="146304"/>
+            <a:off x="10018776" y="3328416"/>
+            <a:ext cx="862584" cy="146304"/>
           </a:xfrm>
           <a:prstGeom prst="rect">
             <a:avLst/>
@@ -13726,8 +13728,8 @@
         </p:nvSpPr>
         <p:spPr>
           <a:xfrm>
-            <a:off x="7854696" y="3742639"/>
-            <a:ext cx="3035808" cy="158191"/>
+            <a:off x="7763256" y="3749040"/>
+            <a:ext cx="3172968" cy="356616"/>
           </a:xfrm>
           <a:prstGeom prst="rect">
             <a:avLst/>
@@ -13745,7 +13747,7 @@
               <a:buNone/>
             </a:pPr>
             <a:r>
-              <a:rPr lang="en-US" sz="1120" dirty="0">
+              <a:rPr lang="en-US" sz="1040" dirty="0">
                 <a:solidFill>
                   <a:srgbClr val="17364A"/>
                 </a:solidFill>
@@ -13753,9 +13755,9 @@
                 <a:ea typeface="Aptos" pitchFamily="34" charset="-122"/>
                 <a:cs typeface="Aptos" pitchFamily="34" charset="-120"/>
               </a:rPr>
-              <a:t>Implementation work should make dependencies, approvals, training, and sustainment visible before launch.</a:t>
-            </a:r>
-            <a:endParaRPr lang="en-US" sz="1120" dirty="0"/>
+              <a:t>Implementation work should make dependencies, approvals, training, and.</a:t>
+            </a:r>
+            <a:endParaRPr lang="en-US" sz="1040" dirty="0"/>
           </a:p>
         </p:txBody>
       </p:sp>
@@ -13767,12 +13769,12 @@
         </p:nvSpPr>
         <p:spPr>
           <a:xfrm>
-            <a:off x="7635240" y="4184294"/>
-            <a:ext cx="3474720" cy="1466698"/>
+            <a:off x="7543800" y="4389120"/>
+            <a:ext cx="3611880" cy="1261872"/>
           </a:xfrm>
           <a:prstGeom prst="roundRect">
             <a:avLst>
-              <a:gd name="adj" fmla="val 7481"/>
+              <a:gd name="adj" fmla="val 8696"/>
             </a:avLst>
           </a:prstGeom>
           <a:solidFill>
@@ -13794,8 +13796,8 @@
         </p:nvSpPr>
         <p:spPr>
           <a:xfrm>
-            <a:off x="7799832" y="4330598"/>
-            <a:ext cx="3145536" cy="256032"/>
+            <a:off x="7708392" y="4517136"/>
+            <a:ext cx="3282696" cy="228600"/>
           </a:xfrm>
           <a:prstGeom prst="rect">
             <a:avLst/>
@@ -13811,7 +13813,7 @@
               <a:buNone/>
             </a:pPr>
             <a:r>
-              <a:rPr lang="en-US" sz="1300" b="1" dirty="0">
+              <a:rPr lang="en-US" sz="1220" b="1" dirty="0">
                 <a:solidFill>
                   <a:srgbClr val="0068B7"/>
                 </a:solidFill>
@@ -13821,7 +13823,7 @@
               </a:rPr>
               <a:t>Next action</a:t>
             </a:r>
-            <a:endParaRPr lang="en-US" sz="1300" dirty="0"/>
+            <a:endParaRPr lang="en-US" sz="1220" dirty="0"/>
           </a:p>
         </p:txBody>
       </p:sp>
@@ -13833,8 +13835,8 @@
         </p:nvSpPr>
         <p:spPr>
           <a:xfrm>
-            <a:off x="7799832" y="4659782"/>
-            <a:ext cx="3145536" cy="899770"/>
+            <a:off x="7708392" y="4828032"/>
+            <a:ext cx="3282696" cy="749808"/>
           </a:xfrm>
           <a:prstGeom prst="rect">
             <a:avLst/>
@@ -13852,7 +13854,7 @@
               <a:buNone/>
             </a:pPr>
             <a:r>
-              <a:rPr lang="en-US" sz="1320" dirty="0">
+              <a:rPr lang="en-US" sz="1220" dirty="0">
                 <a:solidFill>
                   <a:srgbClr val="17364A"/>
                 </a:solidFill>
@@ -13860,9 +13862,9 @@
                 <a:ea typeface="Aptos" pitchFamily="34" charset="-122"/>
                 <a:cs typeface="Aptos" pitchFamily="34" charset="-120"/>
               </a:rPr>
-              <a:t>Use the concept to clarify workflow changes, dependencies, staffing, procurement requirements, training needs, and implementation checkpoints.</a:t>
-            </a:r>
-            <a:endParaRPr lang="en-US" sz="1320" dirty="0"/>
+              <a:t>Use the concept to clarify workflow changes, dependencies, staffing, procurement.</a:t>
+            </a:r>
+            <a:endParaRPr lang="en-US" sz="1220" dirty="0"/>
           </a:p>
         </p:txBody>
       </p:sp>
@@ -14153,8 +14155,8 @@
         </p:nvSpPr>
         <p:spPr>
           <a:xfrm>
-            <a:off x="868680" y="1508760"/>
-            <a:ext cx="6309360" cy="4160520"/>
+            <a:off x="822960" y="1463040"/>
+            <a:ext cx="6565392" cy="4343400"/>
           </a:xfrm>
           <a:prstGeom prst="rect">
             <a:avLst/>
@@ -14172,7 +14174,7 @@
               <a:buNone/>
             </a:pPr>
             <a:r>
-              <a:rPr lang="en-US" sz="2100" dirty="0">
+              <a:rPr lang="en-US" sz="1920" dirty="0">
                 <a:solidFill>
                   <a:srgbClr val="003A63"/>
                 </a:solidFill>
@@ -14180,16 +14182,16 @@
                 <a:ea typeface="Aptos" pitchFamily="34" charset="-122"/>
                 <a:cs typeface="Aptos" pitchFamily="34" charset="-120"/>
               </a:rPr>
-              <a:t>• AI tools may fail even when the technology works because the organization is not ready to use.</a:t>
-            </a:r>
-            <a:endParaRPr lang="en-US" sz="2100" dirty="0"/>
-          </a:p>
-          <a:p>
-            <a:pPr indent="0" marL="0">
-              <a:buNone/>
-            </a:pPr>
-            <a:r>
-              <a:rPr lang="en-US" sz="2100" dirty="0">
+              <a:t>• AI tools may fail even when the technology works because the organization is.</a:t>
+            </a:r>
+            <a:endParaRPr lang="en-US" sz="1920" dirty="0"/>
+          </a:p>
+          <a:p>
+            <a:pPr indent="0" marL="0">
+              <a:buNone/>
+            </a:pPr>
+            <a:r>
+              <a:rPr lang="en-US" sz="1920" dirty="0">
                 <a:solidFill>
                   <a:srgbClr val="003A63"/>
                 </a:solidFill>
@@ -14197,16 +14199,16 @@
                 <a:ea typeface="Aptos" pitchFamily="34" charset="-122"/>
                 <a:cs typeface="Aptos" pitchFamily="34" charset="-120"/>
               </a:rPr>
-              <a:t>• Staff may not trust the output, may over-trust it, may not understand their review.</a:t>
-            </a:r>
-            <a:endParaRPr lang="en-US" sz="2100" dirty="0"/>
-          </a:p>
-          <a:p>
-            <a:pPr indent="0" marL="0">
-              <a:buNone/>
-            </a:pPr>
-            <a:r>
-              <a:rPr lang="en-US" sz="2100" dirty="0">
+              <a:t>• Staff may not trust the output, may over-trust it, may not understand their.</a:t>
+            </a:r>
+            <a:endParaRPr lang="en-US" sz="1920" dirty="0"/>
+          </a:p>
+          <a:p>
+            <a:pPr indent="0" marL="0">
+              <a:buNone/>
+            </a:pPr>
+            <a:r>
+              <a:rPr lang="en-US" sz="1920" dirty="0">
                 <a:solidFill>
                   <a:srgbClr val="003A63"/>
                 </a:solidFill>
@@ -14214,9 +14216,9 @@
                 <a:ea typeface="Aptos" pitchFamily="34" charset="-122"/>
                 <a:cs typeface="Aptos" pitchFamily="34" charset="-120"/>
               </a:rPr>
-              <a:t>• Leaders may underestimate the time needed for training, workflow redesign, and user feedback.</a:t>
-            </a:r>
-            <a:endParaRPr lang="en-US" sz="2100" dirty="0"/>
+              <a:t>• Leaders may underestimate the time needed for training, workflow redesign,.</a:t>
+            </a:r>
+            <a:endParaRPr lang="en-US" sz="1920" dirty="0"/>
           </a:p>
         </p:txBody>
       </p:sp>
@@ -14228,12 +14230,12 @@
         </p:nvSpPr>
         <p:spPr>
           <a:xfrm>
-            <a:off x="7635240" y="1325880"/>
-            <a:ext cx="3474720" cy="1255471"/>
+            <a:off x="7543800" y="1325880"/>
+            <a:ext cx="3611880" cy="1261872"/>
           </a:xfrm>
           <a:prstGeom prst="roundRect">
             <a:avLst>
-              <a:gd name="adj" fmla="val 8740"/>
+              <a:gd name="adj" fmla="val 8696"/>
             </a:avLst>
           </a:prstGeom>
           <a:solidFill>
@@ -14255,8 +14257,8 @@
         </p:nvSpPr>
         <p:spPr>
           <a:xfrm>
-            <a:off x="7799832" y="1472184"/>
-            <a:ext cx="3145536" cy="256032"/>
+            <a:off x="7708392" y="1453896"/>
+            <a:ext cx="3282696" cy="228600"/>
           </a:xfrm>
           <a:prstGeom prst="rect">
             <a:avLst/>
@@ -14272,7 +14274,7 @@
               <a:buNone/>
             </a:pPr>
             <a:r>
-              <a:rPr lang="en-US" sz="1300" b="1" dirty="0">
+              <a:rPr lang="en-US" sz="1220" b="1" dirty="0">
                 <a:solidFill>
                   <a:srgbClr val="0068B7"/>
                 </a:solidFill>
@@ -14282,7 +14284,7 @@
               </a:rPr>
               <a:t>Implementation cue</a:t>
             </a:r>
-            <a:endParaRPr lang="en-US" sz="1300" dirty="0"/>
+            <a:endParaRPr lang="en-US" sz="1220" dirty="0"/>
           </a:p>
         </p:txBody>
       </p:sp>
@@ -14294,8 +14296,8 @@
         </p:nvSpPr>
         <p:spPr>
           <a:xfrm>
-            <a:off x="7799832" y="1801368"/>
-            <a:ext cx="3145536" cy="688543"/>
+            <a:off x="7708392" y="1764792"/>
+            <a:ext cx="3282696" cy="749808"/>
           </a:xfrm>
           <a:prstGeom prst="rect">
             <a:avLst/>
@@ -14313,7 +14315,7 @@
               <a:buNone/>
             </a:pPr>
             <a:r>
-              <a:rPr lang="en-US" sz="1320" dirty="0">
+              <a:rPr lang="en-US" sz="1220" dirty="0">
                 <a:solidFill>
                   <a:srgbClr val="17364A"/>
                 </a:solidFill>
@@ -14321,9 +14323,9 @@
                 <a:ea typeface="Aptos" pitchFamily="34" charset="-122"/>
                 <a:cs typeface="Aptos" pitchFamily="34" charset="-120"/>
               </a:rPr>
-              <a:t>AI tools may fail even when the technology works because the organization is not ready to use them.</a:t>
-            </a:r>
-            <a:endParaRPr lang="en-US" sz="1320" dirty="0"/>
+              <a:t>AI tools may fail even when the technology works because the organization is not.</a:t>
+            </a:r>
+            <a:endParaRPr lang="en-US" sz="1220" dirty="0"/>
           </a:p>
         </p:txBody>
       </p:sp>
@@ -14335,12 +14337,12 @@
         </p:nvSpPr>
         <p:spPr>
           <a:xfrm>
-            <a:off x="7635240" y="2718511"/>
-            <a:ext cx="3474720" cy="1328623"/>
+            <a:off x="7543800" y="2724912"/>
+            <a:ext cx="3611880" cy="1527048"/>
           </a:xfrm>
           <a:prstGeom prst="roundRect">
             <a:avLst>
-              <a:gd name="adj" fmla="val 8259"/>
+              <a:gd name="adj" fmla="val 7186"/>
             </a:avLst>
           </a:prstGeom>
           <a:solidFill>
@@ -14362,24 +14364,26 @@
         </p:nvSpPr>
         <p:spPr>
           <a:xfrm>
-            <a:off x="7799832" y="2846527"/>
-            <a:ext cx="3145536" cy="237744"/>
-          </a:xfrm>
-          <a:prstGeom prst="rect">
-            <a:avLst/>
-          </a:prstGeom>
-          <a:noFill/>
-          <a:ln/>
-        </p:spPr>
-        <p:txBody>
-          <a:bodyPr wrap="square" lIns="0" tIns="0" rIns="0" bIns="0" rtlCol="0" anchor="ctr"/>
-          <a:lstStyle/>
-          <a:p>
-            <a:pPr indent="0" marL="0">
-              <a:buNone/>
-            </a:pPr>
-            <a:r>
-              <a:rPr lang="en-US" sz="1250" b="1" dirty="0">
+            <a:off x="7708392" y="2852928"/>
+            <a:ext cx="3282696" cy="219456"/>
+          </a:xfrm>
+          <a:prstGeom prst="rect">
+            <a:avLst/>
+          </a:prstGeom>
+          <a:noFill/>
+          <a:ln/>
+        </p:spPr>
+        <p:txBody>
+          <a:bodyPr wrap="square" lIns="0" tIns="0" rIns="0" bIns="0" rtlCol="0" anchor="ctr">
+            <a:normAutofit/>
+          </a:bodyPr>
+          <a:lstStyle/>
+          <a:p>
+            <a:pPr indent="0" marL="0">
+              <a:buNone/>
+            </a:pPr>
+            <a:r>
+              <a:rPr lang="en-US" sz="1160" b="1" dirty="0">
                 <a:solidFill>
                   <a:srgbClr val="0068B7"/>
                 </a:solidFill>
@@ -14389,7 +14393,7 @@
               </a:rPr>
               <a:t>Implementation path</a:t>
             </a:r>
-            <a:endParaRPr lang="en-US" sz="1250" dirty="0"/>
+            <a:endParaRPr lang="en-US" sz="1160" dirty="0"/>
           </a:p>
         </p:txBody>
       </p:sp>
@@ -14401,7 +14405,7 @@
         </p:nvSpPr>
         <p:spPr>
           <a:xfrm>
-            <a:off x="8763000" y="3399739"/>
+            <a:off x="8717280" y="3406140"/>
             <a:ext cx="164592" cy="0"/>
           </a:xfrm>
           <a:prstGeom prst="line">
@@ -14424,8 +14428,8 @@
         </p:nvSpPr>
         <p:spPr>
           <a:xfrm>
-            <a:off x="7872984" y="3248863"/>
-            <a:ext cx="890016" cy="301752"/>
+            <a:off x="7781544" y="3255264"/>
+            <a:ext cx="935736" cy="301752"/>
           </a:xfrm>
           <a:prstGeom prst="roundRect">
             <a:avLst>
@@ -14451,8 +14455,8 @@
         </p:nvSpPr>
         <p:spPr>
           <a:xfrm>
-            <a:off x="7909560" y="3322015"/>
-            <a:ext cx="816864" cy="146304"/>
+            <a:off x="7818120" y="3328416"/>
+            <a:ext cx="862584" cy="146304"/>
           </a:xfrm>
           <a:prstGeom prst="rect">
             <a:avLst/>
@@ -14492,7 +14496,7 @@
         </p:nvSpPr>
         <p:spPr>
           <a:xfrm>
-            <a:off x="9817608" y="3399739"/>
+            <a:off x="9817608" y="3406140"/>
             <a:ext cx="164592" cy="0"/>
           </a:xfrm>
           <a:prstGeom prst="line">
@@ -14515,8 +14519,8 @@
         </p:nvSpPr>
         <p:spPr>
           <a:xfrm>
-            <a:off x="8927592" y="3248863"/>
-            <a:ext cx="890016" cy="301752"/>
+            <a:off x="8881872" y="3255264"/>
+            <a:ext cx="935736" cy="301752"/>
           </a:xfrm>
           <a:prstGeom prst="roundRect">
             <a:avLst>
@@ -14542,8 +14546,8 @@
         </p:nvSpPr>
         <p:spPr>
           <a:xfrm>
-            <a:off x="8964168" y="3322015"/>
-            <a:ext cx="816864" cy="146304"/>
+            <a:off x="8918448" y="3328416"/>
+            <a:ext cx="862584" cy="146304"/>
           </a:xfrm>
           <a:prstGeom prst="rect">
             <a:avLst/>
@@ -14583,8 +14587,8 @@
         </p:nvSpPr>
         <p:spPr>
           <a:xfrm>
-            <a:off x="9982200" y="3248863"/>
-            <a:ext cx="890016" cy="301752"/>
+            <a:off x="9982200" y="3255264"/>
+            <a:ext cx="935736" cy="301752"/>
           </a:xfrm>
           <a:prstGeom prst="roundRect">
             <a:avLst>
@@ -14610,8 +14614,8 @@
         </p:nvSpPr>
         <p:spPr>
           <a:xfrm>
-            <a:off x="10018776" y="3322015"/>
-            <a:ext cx="816864" cy="146304"/>
+            <a:off x="10018776" y="3328416"/>
+            <a:ext cx="862584" cy="146304"/>
           </a:xfrm>
           <a:prstGeom prst="rect">
             <a:avLst/>
@@ -14651,8 +14655,8 @@
         </p:nvSpPr>
         <p:spPr>
           <a:xfrm>
-            <a:off x="7854696" y="3742639"/>
-            <a:ext cx="3035808" cy="158191"/>
+            <a:off x="7763256" y="3749040"/>
+            <a:ext cx="3172968" cy="356616"/>
           </a:xfrm>
           <a:prstGeom prst="rect">
             <a:avLst/>
@@ -14670,7 +14674,7 @@
               <a:buNone/>
             </a:pPr>
             <a:r>
-              <a:rPr lang="en-US" sz="1120" dirty="0">
+              <a:rPr lang="en-US" sz="1040" dirty="0">
                 <a:solidFill>
                   <a:srgbClr val="17364A"/>
                 </a:solidFill>
@@ -14678,9 +14682,9 @@
                 <a:ea typeface="Aptos" pitchFamily="34" charset="-122"/>
                 <a:cs typeface="Aptos" pitchFamily="34" charset="-120"/>
               </a:rPr>
-              <a:t>Implementation work should make dependencies, approvals, training, and sustainment visible before launch.</a:t>
-            </a:r>
-            <a:endParaRPr lang="en-US" sz="1120" dirty="0"/>
+              <a:t>Implementation work should make dependencies, approvals, training, and.</a:t>
+            </a:r>
+            <a:endParaRPr lang="en-US" sz="1040" dirty="0"/>
           </a:p>
         </p:txBody>
       </p:sp>
@@ -14692,12 +14696,12 @@
         </p:nvSpPr>
         <p:spPr>
           <a:xfrm>
-            <a:off x="7635240" y="4184294"/>
-            <a:ext cx="3474720" cy="1466698"/>
+            <a:off x="7543800" y="4389120"/>
+            <a:ext cx="3611880" cy="1261872"/>
           </a:xfrm>
           <a:prstGeom prst="roundRect">
             <a:avLst>
-              <a:gd name="adj" fmla="val 7481"/>
+              <a:gd name="adj" fmla="val 8696"/>
             </a:avLst>
           </a:prstGeom>
           <a:solidFill>
@@ -14719,8 +14723,8 @@
         </p:nvSpPr>
         <p:spPr>
           <a:xfrm>
-            <a:off x="7799832" y="4330598"/>
-            <a:ext cx="3145536" cy="256032"/>
+            <a:off x="7708392" y="4517136"/>
+            <a:ext cx="3282696" cy="228600"/>
           </a:xfrm>
           <a:prstGeom prst="rect">
             <a:avLst/>
@@ -14736,7 +14740,7 @@
               <a:buNone/>
             </a:pPr>
             <a:r>
-              <a:rPr lang="en-US" sz="1300" b="1" dirty="0">
+              <a:rPr lang="en-US" sz="1220" b="1" dirty="0">
                 <a:solidFill>
                   <a:srgbClr val="0068B7"/>
                 </a:solidFill>
@@ -14746,7 +14750,7 @@
               </a:rPr>
               <a:t>Next action</a:t>
             </a:r>
-            <a:endParaRPr lang="en-US" sz="1300" dirty="0"/>
+            <a:endParaRPr lang="en-US" sz="1220" dirty="0"/>
           </a:p>
         </p:txBody>
       </p:sp>
@@ -14758,8 +14762,8 @@
         </p:nvSpPr>
         <p:spPr>
           <a:xfrm>
-            <a:off x="7799832" y="4659782"/>
-            <a:ext cx="3145536" cy="899770"/>
+            <a:off x="7708392" y="4828032"/>
+            <a:ext cx="3282696" cy="749808"/>
           </a:xfrm>
           <a:prstGeom prst="rect">
             <a:avLst/>
@@ -14777,7 +14781,7 @@
               <a:buNone/>
             </a:pPr>
             <a:r>
-              <a:rPr lang="en-US" sz="1320" dirty="0">
+              <a:rPr lang="en-US" sz="1220" dirty="0">
                 <a:solidFill>
                   <a:srgbClr val="17364A"/>
                 </a:solidFill>
@@ -14785,9 +14789,9 @@
                 <a:ea typeface="Aptos" pitchFamily="34" charset="-122"/>
                 <a:cs typeface="Aptos" pitchFamily="34" charset="-120"/>
               </a:rPr>
-              <a:t>Use the concept to clarify workflow changes, dependencies, staffing, procurement requirements, training needs, and implementation checkpoints.</a:t>
-            </a:r>
-            <a:endParaRPr lang="en-US" sz="1320" dirty="0"/>
+              <a:t>Use the concept to clarify workflow changes, dependencies, staffing, procurement.</a:t>
+            </a:r>
+            <a:endParaRPr lang="en-US" sz="1220" dirty="0"/>
           </a:p>
         </p:txBody>
       </p:sp>
@@ -15078,8 +15082,8 @@
         </p:nvSpPr>
         <p:spPr>
           <a:xfrm>
-            <a:off x="868680" y="1508760"/>
-            <a:ext cx="6309360" cy="4160520"/>
+            <a:off x="822960" y="1463040"/>
+            <a:ext cx="6565392" cy="4343400"/>
           </a:xfrm>
           <a:prstGeom prst="rect">
             <a:avLst/>
@@ -15097,7 +15101,7 @@
               <a:buNone/>
             </a:pPr>
             <a:r>
-              <a:rPr lang="en-US" sz="2100" dirty="0">
+              <a:rPr lang="en-US" sz="1920" dirty="0">
                 <a:solidFill>
                   <a:srgbClr val="003A63"/>
                 </a:solidFill>
@@ -15105,16 +15109,16 @@
                 <a:ea typeface="Aptos" pitchFamily="34" charset="-122"/>
                 <a:cs typeface="Aptos" pitchFamily="34" charset="-120"/>
               </a:rPr>
-              <a:t>• A health department launches an AI assistant to help staff find internal policies and program.</a:t>
-            </a:r>
-            <a:endParaRPr lang="en-US" sz="2100" dirty="0"/>
-          </a:p>
-          <a:p>
-            <a:pPr indent="0" marL="0">
-              <a:buNone/>
-            </a:pPr>
-            <a:r>
-              <a:rPr lang="en-US" sz="2100" dirty="0">
+              <a:t>• A health department launches an AI assistant to help staff find internal.</a:t>
+            </a:r>
+            <a:endParaRPr lang="en-US" sz="1920" dirty="0"/>
+          </a:p>
+          <a:p>
+            <a:pPr indent="0" marL="0">
+              <a:buNone/>
+            </a:pPr>
+            <a:r>
+              <a:rPr lang="en-US" sz="1920" dirty="0">
                 <a:solidFill>
                   <a:srgbClr val="003A63"/>
                 </a:solidFill>
@@ -15122,16 +15126,16 @@
                 <a:ea typeface="Aptos" pitchFamily="34" charset="-122"/>
                 <a:cs typeface="Aptos" pitchFamily="34" charset="-120"/>
               </a:rPr>
-              <a:t>• The tool is technically functional, but staff do not use it because they are unsure whether.</a:t>
-            </a:r>
-            <a:endParaRPr lang="en-US" sz="2100" dirty="0"/>
-          </a:p>
-          <a:p>
-            <a:pPr indent="0" marL="0">
-              <a:buNone/>
-            </a:pPr>
-            <a:r>
-              <a:rPr lang="en-US" sz="2100" dirty="0">
+              <a:t>• The tool is technically functional, but staff do not use it because they are.</a:t>
+            </a:r>
+            <a:endParaRPr lang="en-US" sz="1920" dirty="0"/>
+          </a:p>
+          <a:p>
+            <a:pPr indent="0" marL="0">
+              <a:buNone/>
+            </a:pPr>
+            <a:r>
+              <a:rPr lang="en-US" sz="1920" dirty="0">
                 <a:solidFill>
                   <a:srgbClr val="003A63"/>
                 </a:solidFill>
@@ -15141,7 +15145,7 @@
               </a:rPr>
               <a:t>• Some staff worry that the tool will be used to judge their productivity.</a:t>
             </a:r>
-            <a:endParaRPr lang="en-US" sz="2100" dirty="0"/>
+            <a:endParaRPr lang="en-US" sz="1920" dirty="0"/>
           </a:p>
         </p:txBody>
       </p:sp>
@@ -15153,12 +15157,12 @@
         </p:nvSpPr>
         <p:spPr>
           <a:xfrm>
-            <a:off x="7635240" y="1325880"/>
-            <a:ext cx="3474720" cy="1255471"/>
+            <a:off x="7543800" y="1325880"/>
+            <a:ext cx="3611880" cy="1261872"/>
           </a:xfrm>
           <a:prstGeom prst="roundRect">
             <a:avLst>
-              <a:gd name="adj" fmla="val 8740"/>
+              <a:gd name="adj" fmla="val 8696"/>
             </a:avLst>
           </a:prstGeom>
           <a:solidFill>
@@ -15180,8 +15184,8 @@
         </p:nvSpPr>
         <p:spPr>
           <a:xfrm>
-            <a:off x="7799832" y="1472184"/>
-            <a:ext cx="3145536" cy="256032"/>
+            <a:off x="7708392" y="1453896"/>
+            <a:ext cx="3282696" cy="228600"/>
           </a:xfrm>
           <a:prstGeom prst="rect">
             <a:avLst/>
@@ -15197,7 +15201,7 @@
               <a:buNone/>
             </a:pPr>
             <a:r>
-              <a:rPr lang="en-US" sz="1300" b="1" dirty="0">
+              <a:rPr lang="en-US" sz="1220" b="1" dirty="0">
                 <a:solidFill>
                   <a:srgbClr val="0068B7"/>
                 </a:solidFill>
@@ -15207,7 +15211,7 @@
               </a:rPr>
               <a:t>Implementation cue</a:t>
             </a:r>
-            <a:endParaRPr lang="en-US" sz="1300" dirty="0"/>
+            <a:endParaRPr lang="en-US" sz="1220" dirty="0"/>
           </a:p>
         </p:txBody>
       </p:sp>
@@ -15219,8 +15223,8 @@
         </p:nvSpPr>
         <p:spPr>
           <a:xfrm>
-            <a:off x="7799832" y="1801368"/>
-            <a:ext cx="3145536" cy="688543"/>
+            <a:off x="7708392" y="1764792"/>
+            <a:ext cx="3282696" cy="749808"/>
           </a:xfrm>
           <a:prstGeom prst="rect">
             <a:avLst/>
@@ -15238,7 +15242,7 @@
               <a:buNone/>
             </a:pPr>
             <a:r>
-              <a:rPr lang="en-US" sz="1320" dirty="0">
+              <a:rPr lang="en-US" sz="1220" dirty="0">
                 <a:solidFill>
                   <a:srgbClr val="17364A"/>
                 </a:solidFill>
@@ -15246,9 +15250,9 @@
                 <a:ea typeface="Aptos" pitchFamily="34" charset="-122"/>
                 <a:cs typeface="Aptos" pitchFamily="34" charset="-120"/>
               </a:rPr>
-              <a:t>A health department launches an AI assistant to help staff find internal policies and program guidance.</a:t>
-            </a:r>
-            <a:endParaRPr lang="en-US" sz="1320" dirty="0"/>
+              <a:t>A health department launches an AI assistant to help staff find internal.</a:t>
+            </a:r>
+            <a:endParaRPr lang="en-US" sz="1220" dirty="0"/>
           </a:p>
         </p:txBody>
       </p:sp>
@@ -15260,12 +15264,12 @@
         </p:nvSpPr>
         <p:spPr>
           <a:xfrm>
-            <a:off x="7635240" y="2718511"/>
-            <a:ext cx="3474720" cy="1328623"/>
+            <a:off x="7543800" y="2724912"/>
+            <a:ext cx="3611880" cy="1527048"/>
           </a:xfrm>
           <a:prstGeom prst="roundRect">
             <a:avLst>
-              <a:gd name="adj" fmla="val 8259"/>
+              <a:gd name="adj" fmla="val 7186"/>
             </a:avLst>
           </a:prstGeom>
           <a:solidFill>
@@ -15287,8 +15291,8 @@
         </p:nvSpPr>
         <p:spPr>
           <a:xfrm>
-            <a:off x="7799832" y="2864815"/>
-            <a:ext cx="3145536" cy="256032"/>
+            <a:off x="7708392" y="2852928"/>
+            <a:ext cx="3282696" cy="228600"/>
           </a:xfrm>
           <a:prstGeom prst="rect">
             <a:avLst/>
@@ -15304,7 +15308,7 @@
               <a:buNone/>
             </a:pPr>
             <a:r>
-              <a:rPr lang="en-US" sz="1300" b="1" dirty="0">
+              <a:rPr lang="en-US" sz="1220" b="1" dirty="0">
                 <a:solidFill>
                   <a:srgbClr val="0068B7"/>
                 </a:solidFill>
@@ -15314,7 +15318,7 @@
               </a:rPr>
               <a:t>Concept checkpoints</a:t>
             </a:r>
-            <a:endParaRPr lang="en-US" sz="1300" dirty="0"/>
+            <a:endParaRPr lang="en-US" sz="1220" dirty="0"/>
           </a:p>
         </p:txBody>
       </p:sp>
@@ -15326,8 +15330,8 @@
         </p:nvSpPr>
         <p:spPr>
           <a:xfrm>
-            <a:off x="7818120" y="3230575"/>
-            <a:ext cx="3090672" cy="670255"/>
+            <a:off x="7726680" y="3182112"/>
+            <a:ext cx="3227832" cy="960120"/>
           </a:xfrm>
           <a:prstGeom prst="rect">
             <a:avLst/>
@@ -15345,7 +15349,7 @@
               <a:buNone/>
             </a:pPr>
             <a:r>
-              <a:rPr lang="en-US" sz="1220" dirty="0">
+              <a:rPr lang="en-US" sz="1140" dirty="0">
                 <a:solidFill>
                   <a:srgbClr val="17364A"/>
                 </a:solidFill>
@@ -15353,16 +15357,16 @@
                 <a:ea typeface="Aptos" pitchFamily="34" charset="-122"/>
                 <a:cs typeface="Aptos" pitchFamily="34" charset="-120"/>
               </a:rPr>
-              <a:t>The tool is technically functional, but staff do not use it.</a:t>
-            </a:r>
-            <a:endParaRPr lang="en-US" sz="1220" dirty="0"/>
-          </a:p>
-          <a:p>
-            <a:pPr indent="0" marL="0">
-              <a:buNone/>
-            </a:pPr>
-            <a:r>
-              <a:rPr lang="en-US" sz="1220" dirty="0">
+              <a:t>The tool is technically functional, but staff do.</a:t>
+            </a:r>
+            <a:endParaRPr lang="en-US" sz="1140" dirty="0"/>
+          </a:p>
+          <a:p>
+            <a:pPr indent="0" marL="0">
+              <a:buNone/>
+            </a:pPr>
+            <a:r>
+              <a:rPr lang="en-US" sz="1140" dirty="0">
                 <a:solidFill>
                   <a:srgbClr val="17364A"/>
                 </a:solidFill>
@@ -15370,16 +15374,16 @@
                 <a:ea typeface="Aptos" pitchFamily="34" charset="-122"/>
                 <a:cs typeface="Aptos" pitchFamily="34" charset="-120"/>
               </a:rPr>
-              <a:t>A change management plan addresses these concerns directly.</a:t>
-            </a:r>
-            <a:endParaRPr lang="en-US" sz="1220" dirty="0"/>
-          </a:p>
-          <a:p>
-            <a:pPr indent="0" marL="0">
-              <a:buNone/>
-            </a:pPr>
-            <a:r>
-              <a:rPr lang="en-US" sz="1220" dirty="0">
+              <a:t>A change management plan addresses these concerns.</a:t>
+            </a:r>
+            <a:endParaRPr lang="en-US" sz="1140" dirty="0"/>
+          </a:p>
+          <a:p>
+            <a:pPr indent="0" marL="0">
+              <a:buNone/>
+            </a:pPr>
+            <a:r>
+              <a:rPr lang="en-US" sz="1140" dirty="0">
                 <a:solidFill>
                   <a:srgbClr val="17364A"/>
                 </a:solidFill>
@@ -15387,9 +15391,9 @@
                 <a:ea typeface="Aptos" pitchFamily="34" charset="-122"/>
                 <a:cs typeface="Aptos" pitchFamily="34" charset="-120"/>
               </a:rPr>
-              <a:t>It explains the purpose of the tool, approved uses, prohibited.</a:t>
-            </a:r>
-            <a:endParaRPr lang="en-US" sz="1220" dirty="0"/>
+              <a:t>It explains the purpose of the tool, approved.</a:t>
+            </a:r>
+            <a:endParaRPr lang="en-US" sz="1140" dirty="0"/>
           </a:p>
         </p:txBody>
       </p:sp>
@@ -15401,12 +15405,12 @@
         </p:nvSpPr>
         <p:spPr>
           <a:xfrm>
-            <a:off x="7635240" y="4184294"/>
-            <a:ext cx="3474720" cy="1466698"/>
+            <a:off x="7543800" y="4389120"/>
+            <a:ext cx="3611880" cy="1261872"/>
           </a:xfrm>
           <a:prstGeom prst="roundRect">
             <a:avLst>
-              <a:gd name="adj" fmla="val 7481"/>
+              <a:gd name="adj" fmla="val 8696"/>
             </a:avLst>
           </a:prstGeom>
           <a:solidFill>
@@ -15428,8 +15432,8 @@
         </p:nvSpPr>
         <p:spPr>
           <a:xfrm>
-            <a:off x="7799832" y="4330598"/>
-            <a:ext cx="3145536" cy="256032"/>
+            <a:off x="7708392" y="4517136"/>
+            <a:ext cx="3282696" cy="228600"/>
           </a:xfrm>
           <a:prstGeom prst="rect">
             <a:avLst/>
@@ -15445,7 +15449,7 @@
               <a:buNone/>
             </a:pPr>
             <a:r>
-              <a:rPr lang="en-US" sz="1300" b="1" dirty="0">
+              <a:rPr lang="en-US" sz="1220" b="1" dirty="0">
                 <a:solidFill>
                   <a:srgbClr val="0068B7"/>
                 </a:solidFill>
@@ -15455,7 +15459,7 @@
               </a:rPr>
               <a:t>Next action</a:t>
             </a:r>
-            <a:endParaRPr lang="en-US" sz="1300" dirty="0"/>
+            <a:endParaRPr lang="en-US" sz="1220" dirty="0"/>
           </a:p>
         </p:txBody>
       </p:sp>
@@ -15467,8 +15471,8 @@
         </p:nvSpPr>
         <p:spPr>
           <a:xfrm>
-            <a:off x="7799832" y="4659782"/>
-            <a:ext cx="3145536" cy="899770"/>
+            <a:off x="7708392" y="4828032"/>
+            <a:ext cx="3282696" cy="749808"/>
           </a:xfrm>
           <a:prstGeom prst="rect">
             <a:avLst/>
@@ -15486,7 +15490,7 @@
               <a:buNone/>
             </a:pPr>
             <a:r>
-              <a:rPr lang="en-US" sz="1320" dirty="0">
+              <a:rPr lang="en-US" sz="1220" dirty="0">
                 <a:solidFill>
                   <a:srgbClr val="17364A"/>
                 </a:solidFill>
@@ -15494,9 +15498,9 @@
                 <a:ea typeface="Aptos" pitchFamily="34" charset="-122"/>
                 <a:cs typeface="Aptos" pitchFamily="34" charset="-120"/>
               </a:rPr>
-              <a:t>Use the concept to clarify workflow changes, dependencies, staffing, procurement requirements, training needs, and implementation checkpoints.</a:t>
-            </a:r>
-            <a:endParaRPr lang="en-US" sz="1320" dirty="0"/>
+              <a:t>Use the concept to clarify workflow changes, dependencies, staffing, procurement.</a:t>
+            </a:r>
+            <a:endParaRPr lang="en-US" sz="1220" dirty="0"/>
           </a:p>
         </p:txBody>
       </p:sp>
@@ -15787,8 +15791,8 @@
         </p:nvSpPr>
         <p:spPr>
           <a:xfrm>
-            <a:off x="868680" y="1508760"/>
-            <a:ext cx="6309360" cy="4160520"/>
+            <a:off x="822960" y="1463040"/>
+            <a:ext cx="6565392" cy="4343400"/>
           </a:xfrm>
           <a:prstGeom prst="rect">
             <a:avLst/>
@@ -15806,7 +15810,7 @@
               <a:buNone/>
             </a:pPr>
             <a:r>
-              <a:rPr lang="en-US" sz="2100" dirty="0">
+              <a:rPr lang="en-US" sz="1920" dirty="0">
                 <a:solidFill>
                   <a:srgbClr val="003A63"/>
                 </a:solidFill>
@@ -15816,14 +15820,14 @@
               </a:rPr>
               <a:t>• AI change management should begin before procurement or configuration.</a:t>
             </a:r>
-            <a:endParaRPr lang="en-US" sz="2100" dirty="0"/>
-          </a:p>
-          <a:p>
-            <a:pPr indent="0" marL="0">
-              <a:buNone/>
-            </a:pPr>
-            <a:r>
-              <a:rPr lang="en-US" sz="2100" dirty="0">
+            <a:endParaRPr lang="en-US" sz="1920" dirty="0"/>
+          </a:p>
+          <a:p>
+            <a:pPr indent="0" marL="0">
+              <a:buNone/>
+            </a:pPr>
+            <a:r>
+              <a:rPr lang="en-US" sz="1920" dirty="0">
                 <a:solidFill>
                   <a:srgbClr val="003A63"/>
                 </a:solidFill>
@@ -15831,16 +15835,16 @@
                 <a:ea typeface="Aptos" pitchFamily="34" charset="-122"/>
                 <a:cs typeface="Aptos" pitchFamily="34" charset="-120"/>
               </a:rPr>
-              <a:t>• Leaders should identify who will be affected, what pain points the tool is supposed to.</a:t>
-            </a:r>
-            <a:endParaRPr lang="en-US" sz="2100" dirty="0"/>
-          </a:p>
-          <a:p>
-            <a:pPr indent="0" marL="0">
-              <a:buNone/>
-            </a:pPr>
-            <a:r>
-              <a:rPr lang="en-US" sz="2100" dirty="0">
+              <a:t>• Leaders should identify who will be affected, what pain points the tool is.</a:t>
+            </a:r>
+            <a:endParaRPr lang="en-US" sz="1920" dirty="0"/>
+          </a:p>
+          <a:p>
+            <a:pPr indent="0" marL="0">
+              <a:buNone/>
+            </a:pPr>
+            <a:r>
+              <a:rPr lang="en-US" sz="1920" dirty="0">
                 <a:solidFill>
                   <a:srgbClr val="003A63"/>
                 </a:solidFill>
@@ -15848,9 +15852,9 @@
                 <a:ea typeface="Aptos" pitchFamily="34" charset="-122"/>
                 <a:cs typeface="Aptos" pitchFamily="34" charset="-120"/>
               </a:rPr>
-              <a:t>• Stakeholder engagement should include frontline users, supervisors, program leaders, IT,.</a:t>
-            </a:r>
-            <a:endParaRPr lang="en-US" sz="2100" dirty="0"/>
+              <a:t>• Stakeholder engagement should include frontline users, supervisors, program.</a:t>
+            </a:r>
+            <a:endParaRPr lang="en-US" sz="1920" dirty="0"/>
           </a:p>
         </p:txBody>
       </p:sp>
@@ -15862,12 +15866,12 @@
         </p:nvSpPr>
         <p:spPr>
           <a:xfrm>
-            <a:off x="7635240" y="1325880"/>
-            <a:ext cx="3474720" cy="1207008"/>
+            <a:off x="7543800" y="1325880"/>
+            <a:ext cx="3611880" cy="1261872"/>
           </a:xfrm>
           <a:prstGeom prst="roundRect">
             <a:avLst>
-              <a:gd name="adj" fmla="val 9091"/>
+              <a:gd name="adj" fmla="val 8696"/>
             </a:avLst>
           </a:prstGeom>
           <a:solidFill>
@@ -15889,8 +15893,8 @@
         </p:nvSpPr>
         <p:spPr>
           <a:xfrm>
-            <a:off x="7799832" y="1472184"/>
-            <a:ext cx="3145536" cy="256032"/>
+            <a:off x="7708392" y="1453896"/>
+            <a:ext cx="3282696" cy="228600"/>
           </a:xfrm>
           <a:prstGeom prst="rect">
             <a:avLst/>
@@ -15906,7 +15910,7 @@
               <a:buNone/>
             </a:pPr>
             <a:r>
-              <a:rPr lang="en-US" sz="1300" b="1" dirty="0">
+              <a:rPr lang="en-US" sz="1220" b="1" dirty="0">
                 <a:solidFill>
                   <a:srgbClr val="0068B7"/>
                 </a:solidFill>
@@ -15916,7 +15920,7 @@
               </a:rPr>
               <a:t>Governance lens</a:t>
             </a:r>
-            <a:endParaRPr lang="en-US" sz="1300" dirty="0"/>
+            <a:endParaRPr lang="en-US" sz="1220" dirty="0"/>
           </a:p>
         </p:txBody>
       </p:sp>
@@ -15928,8 +15932,8 @@
         </p:nvSpPr>
         <p:spPr>
           <a:xfrm>
-            <a:off x="7799832" y="1801368"/>
-            <a:ext cx="3145536" cy="640080"/>
+            <a:off x="7708392" y="1764792"/>
+            <a:ext cx="3282696" cy="749808"/>
           </a:xfrm>
           <a:prstGeom prst="rect">
             <a:avLst/>
@@ -15947,7 +15951,7 @@
               <a:buNone/>
             </a:pPr>
             <a:r>
-              <a:rPr lang="en-US" sz="1320" dirty="0">
+              <a:rPr lang="en-US" sz="1220" dirty="0">
                 <a:solidFill>
                   <a:srgbClr val="17364A"/>
                 </a:solidFill>
@@ -15957,7 +15961,7 @@
               </a:rPr>
               <a:t>AI change management should begin before procurement or configuration.</a:t>
             </a:r>
-            <a:endParaRPr lang="en-US" sz="1320" dirty="0"/>
+            <a:endParaRPr lang="en-US" sz="1220" dirty="0"/>
           </a:p>
         </p:txBody>
       </p:sp>
@@ -15969,12 +15973,12 @@
         </p:nvSpPr>
         <p:spPr>
           <a:xfrm>
-            <a:off x="7635240" y="2670048"/>
-            <a:ext cx="3474720" cy="1377086"/>
+            <a:off x="7543800" y="2724912"/>
+            <a:ext cx="3611880" cy="1527048"/>
           </a:xfrm>
           <a:prstGeom prst="roundRect">
             <a:avLst>
-              <a:gd name="adj" fmla="val 7968"/>
+              <a:gd name="adj" fmla="val 7186"/>
             </a:avLst>
           </a:prstGeom>
           <a:solidFill>
@@ -15996,24 +16000,26 @@
         </p:nvSpPr>
         <p:spPr>
           <a:xfrm>
-            <a:off x="7799832" y="2798064"/>
-            <a:ext cx="3145536" cy="237744"/>
-          </a:xfrm>
-          <a:prstGeom prst="rect">
-            <a:avLst/>
-          </a:prstGeom>
-          <a:noFill/>
-          <a:ln/>
-        </p:spPr>
-        <p:txBody>
-          <a:bodyPr wrap="square" lIns="0" tIns="0" rIns="0" bIns="0" rtlCol="0" anchor="ctr"/>
-          <a:lstStyle/>
-          <a:p>
-            <a:pPr indent="0" marL="0">
-              <a:buNone/>
-            </a:pPr>
-            <a:r>
-              <a:rPr lang="en-US" sz="1250" b="1" dirty="0">
+            <a:off x="7708392" y="2852928"/>
+            <a:ext cx="3282696" cy="219456"/>
+          </a:xfrm>
+          <a:prstGeom prst="rect">
+            <a:avLst/>
+          </a:prstGeom>
+          <a:noFill/>
+          <a:ln/>
+        </p:spPr>
+        <p:txBody>
+          <a:bodyPr wrap="square" lIns="0" tIns="0" rIns="0" bIns="0" rtlCol="0" anchor="ctr">
+            <a:normAutofit/>
+          </a:bodyPr>
+          <a:lstStyle/>
+          <a:p>
+            <a:pPr indent="0" marL="0">
+              <a:buNone/>
+            </a:pPr>
+            <a:r>
+              <a:rPr lang="en-US" sz="1160" b="1" dirty="0">
                 <a:solidFill>
                   <a:srgbClr val="0068B7"/>
                 </a:solidFill>
@@ -16023,7 +16029,7 @@
               </a:rPr>
               <a:t>Governance pathway</a:t>
             </a:r>
-            <a:endParaRPr lang="en-US" sz="1250" dirty="0"/>
+            <a:endParaRPr lang="en-US" sz="1160" dirty="0"/>
           </a:p>
         </p:txBody>
       </p:sp>
@@ -16035,7 +16041,7 @@
         </p:nvSpPr>
         <p:spPr>
           <a:xfrm>
-            <a:off x="8763000" y="3351276"/>
+            <a:off x="8717280" y="3406140"/>
             <a:ext cx="164592" cy="0"/>
           </a:xfrm>
           <a:prstGeom prst="line">
@@ -16058,8 +16064,8 @@
         </p:nvSpPr>
         <p:spPr>
           <a:xfrm>
-            <a:off x="7872984" y="3200400"/>
-            <a:ext cx="890016" cy="301752"/>
+            <a:off x="7781544" y="3255264"/>
+            <a:ext cx="935736" cy="301752"/>
           </a:xfrm>
           <a:prstGeom prst="roundRect">
             <a:avLst>
@@ -16085,8 +16091,8 @@
         </p:nvSpPr>
         <p:spPr>
           <a:xfrm>
-            <a:off x="7909560" y="3273552"/>
-            <a:ext cx="816864" cy="146304"/>
+            <a:off x="7818120" y="3328416"/>
+            <a:ext cx="862584" cy="146304"/>
           </a:xfrm>
           <a:prstGeom prst="rect">
             <a:avLst/>
@@ -16126,7 +16132,7 @@
         </p:nvSpPr>
         <p:spPr>
           <a:xfrm>
-            <a:off x="9817608" y="3351276"/>
+            <a:off x="9817608" y="3406140"/>
             <a:ext cx="164592" cy="0"/>
           </a:xfrm>
           <a:prstGeom prst="line">
@@ -16149,8 +16155,8 @@
         </p:nvSpPr>
         <p:spPr>
           <a:xfrm>
-            <a:off x="8927592" y="3200400"/>
-            <a:ext cx="890016" cy="301752"/>
+            <a:off x="8881872" y="3255264"/>
+            <a:ext cx="935736" cy="301752"/>
           </a:xfrm>
           <a:prstGeom prst="roundRect">
             <a:avLst>
@@ -16176,8 +16182,8 @@
         </p:nvSpPr>
         <p:spPr>
           <a:xfrm>
-            <a:off x="8964168" y="3273552"/>
-            <a:ext cx="816864" cy="146304"/>
+            <a:off x="8918448" y="3328416"/>
+            <a:ext cx="862584" cy="146304"/>
           </a:xfrm>
           <a:prstGeom prst="rect">
             <a:avLst/>
@@ -16217,8 +16223,8 @@
         </p:nvSpPr>
         <p:spPr>
           <a:xfrm>
-            <a:off x="9982200" y="3200400"/>
-            <a:ext cx="890016" cy="301752"/>
+            <a:off x="9982200" y="3255264"/>
+            <a:ext cx="935736" cy="301752"/>
           </a:xfrm>
           <a:prstGeom prst="roundRect">
             <a:avLst>
@@ -16244,8 +16250,8 @@
         </p:nvSpPr>
         <p:spPr>
           <a:xfrm>
-            <a:off x="10018776" y="3273552"/>
-            <a:ext cx="816864" cy="146304"/>
+            <a:off x="10018776" y="3328416"/>
+            <a:ext cx="862584" cy="146304"/>
           </a:xfrm>
           <a:prstGeom prst="rect">
             <a:avLst/>
@@ -16285,8 +16291,8 @@
         </p:nvSpPr>
         <p:spPr>
           <a:xfrm>
-            <a:off x="7854696" y="3694176"/>
-            <a:ext cx="3035808" cy="206654"/>
+            <a:off x="7763256" y="3749040"/>
+            <a:ext cx="3172968" cy="356616"/>
           </a:xfrm>
           <a:prstGeom prst="rect">
             <a:avLst/>
@@ -16304,7 +16310,7 @@
               <a:buNone/>
             </a:pPr>
             <a:r>
-              <a:rPr lang="en-US" sz="1120" dirty="0">
+              <a:rPr lang="en-US" sz="1040" dirty="0">
                 <a:solidFill>
                   <a:srgbClr val="17364A"/>
                 </a:solidFill>
@@ -16312,9 +16318,9 @@
                 <a:ea typeface="Aptos" pitchFamily="34" charset="-122"/>
                 <a:cs typeface="Aptos" pitchFamily="34" charset="-120"/>
               </a:rPr>
-              <a:t>A proposed AI use should move through documented review before it becomes an operational workflow.</a:t>
-            </a:r>
-            <a:endParaRPr lang="en-US" sz="1120" dirty="0"/>
+              <a:t>A proposed AI use should move through documented review before it.</a:t>
+            </a:r>
+            <a:endParaRPr lang="en-US" sz="1040" dirty="0"/>
           </a:p>
         </p:txBody>
       </p:sp>
@@ -16326,12 +16332,12 @@
         </p:nvSpPr>
         <p:spPr>
           <a:xfrm>
-            <a:off x="7635240" y="4184294"/>
-            <a:ext cx="3474720" cy="1466698"/>
+            <a:off x="7543800" y="4389120"/>
+            <a:ext cx="3611880" cy="1261872"/>
           </a:xfrm>
           <a:prstGeom prst="roundRect">
             <a:avLst>
-              <a:gd name="adj" fmla="val 7481"/>
+              <a:gd name="adj" fmla="val 8696"/>
             </a:avLst>
           </a:prstGeom>
           <a:solidFill>
@@ -16353,8 +16359,8 @@
         </p:nvSpPr>
         <p:spPr>
           <a:xfrm>
-            <a:off x="7799832" y="4330598"/>
-            <a:ext cx="3145536" cy="256032"/>
+            <a:off x="7708392" y="4517136"/>
+            <a:ext cx="3282696" cy="228600"/>
           </a:xfrm>
           <a:prstGeom prst="rect">
             <a:avLst/>
@@ -16370,7 +16376,7 @@
               <a:buNone/>
             </a:pPr>
             <a:r>
-              <a:rPr lang="en-US" sz="1300" b="1" dirty="0">
+              <a:rPr lang="en-US" sz="1220" b="1" dirty="0">
                 <a:solidFill>
                   <a:srgbClr val="0068B7"/>
                 </a:solidFill>
@@ -16380,7 +16386,7 @@
               </a:rPr>
               <a:t>What to document</a:t>
             </a:r>
-            <a:endParaRPr lang="en-US" sz="1300" dirty="0"/>
+            <a:endParaRPr lang="en-US" sz="1220" dirty="0"/>
           </a:p>
         </p:txBody>
       </p:sp>
@@ -16392,8 +16398,8 @@
         </p:nvSpPr>
         <p:spPr>
           <a:xfrm>
-            <a:off x="7799832" y="4659782"/>
-            <a:ext cx="3145536" cy="899770"/>
+            <a:off x="7708392" y="4828032"/>
+            <a:ext cx="3282696" cy="749808"/>
           </a:xfrm>
           <a:prstGeom prst="rect">
             <a:avLst/>
@@ -16411,7 +16417,7 @@
               <a:buNone/>
             </a:pPr>
             <a:r>
-              <a:rPr lang="en-US" sz="1320" dirty="0">
+              <a:rPr lang="en-US" sz="1220" dirty="0">
                 <a:solidFill>
                   <a:srgbClr val="17364A"/>
                 </a:solidFill>
@@ -16419,9 +16425,9 @@
                 <a:ea typeface="Aptos" pitchFamily="34" charset="-122"/>
                 <a:cs typeface="Aptos" pitchFamily="34" charset="-120"/>
               </a:rPr>
-              <a:t>Translate this concept into clear decision rights, review steps, documentation expectations, and escalation paths before an AI-supported workflow is approved.</a:t>
-            </a:r>
-            <a:endParaRPr lang="en-US" sz="1320" dirty="0"/>
+              <a:t>Translate this concept into clear decision rights, review steps, documentation.</a:t>
+            </a:r>
+            <a:endParaRPr lang="en-US" sz="1220" dirty="0"/>
           </a:p>
         </p:txBody>
       </p:sp>

--- a/downloads/presentations/modules/exe-430.pptx
+++ b/downloads/presentations/modules/exe-430.pptx
@@ -8613,7 +8613,7 @@
                 <a:ea typeface="Aptos" pitchFamily="34" charset="-122"/>
                 <a:cs typeface="Aptos" pitchFamily="34" charset="-120"/>
               </a:rPr>
-              <a:t>• 1. What is the strongest reason this module topic belongs in AI leadership.</a:t>
+              <a:t>1. What is the strongest reason this module topic belongs in AI leadership.</a:t>
             </a:r>
             <a:endParaRPr lang="en-US" sz="1920" dirty="0"/>
           </a:p>
@@ -8630,7 +8630,7 @@
                 <a:ea typeface="Aptos" pitchFamily="34" charset="-122"/>
                 <a:cs typeface="Aptos" pitchFamily="34" charset="-120"/>
               </a:rPr>
-              <a:t>• 2. Which practice best supports accountable public health AI governance?</a:t>
+              <a:t>2. Which practice best supports accountable public health AI governance?</a:t>
             </a:r>
             <a:endParaRPr lang="en-US" sz="1920" dirty="0"/>
           </a:p>
@@ -8647,7 +8647,7 @@
                 <a:ea typeface="Aptos" pitchFamily="34" charset="-122"/>
                 <a:cs typeface="Aptos" pitchFamily="34" charset="-120"/>
               </a:rPr>
-              <a:t>• 3. When should an AI use case be escalated for leadership or governance.</a:t>
+              <a:t>3. When should an AI use case be escalated for leadership or governance.</a:t>
             </a:r>
             <a:endParaRPr lang="en-US" sz="1920" dirty="0"/>
           </a:p>
@@ -8754,7 +8754,7 @@
                 <a:ea typeface="Aptos" pitchFamily="34" charset="-122"/>
                 <a:cs typeface="Aptos" pitchFamily="34" charset="-120"/>
               </a:rPr>
-              <a:t>1. What is the strongest reason this module topic belongs in AI leadership and.</a:t>
+              <a:t>What is the strongest reason this module topic belongs in AI leadership and.</a:t>
             </a:r>
             <a:endParaRPr lang="en-US" sz="1220" dirty="0"/>
           </a:p>
@@ -8861,41 +8861,7 @@
                 <a:ea typeface="Aptos" pitchFamily="34" charset="-122"/>
                 <a:cs typeface="Aptos" pitchFamily="34" charset="-120"/>
               </a:rPr>
-              <a:t>1.</a:t>
-            </a:r>
-            <a:endParaRPr lang="en-US" sz="1140" dirty="0"/>
-          </a:p>
-          <a:p>
-            <a:pPr indent="0" marL="0">
-              <a:buNone/>
-            </a:pPr>
-            <a:r>
-              <a:rPr lang="en-US" sz="1140" dirty="0">
-                <a:solidFill>
-                  <a:srgbClr val="17364A"/>
-                </a:solidFill>
-                <a:latin typeface="Aptos" pitchFamily="34" charset="0"/>
-                <a:ea typeface="Aptos" pitchFamily="34" charset="-122"/>
-                <a:cs typeface="Aptos" pitchFamily="34" charset="-120"/>
-              </a:rPr>
               <a:t>What is the strongest reason this module topic.</a:t>
-            </a:r>
-            <a:endParaRPr lang="en-US" sz="1140" dirty="0"/>
-          </a:p>
-          <a:p>
-            <a:pPr indent="0" marL="0">
-              <a:buNone/>
-            </a:pPr>
-            <a:r>
-              <a:rPr lang="en-US" sz="1140" dirty="0">
-                <a:solidFill>
-                  <a:srgbClr val="17364A"/>
-                </a:solidFill>
-                <a:latin typeface="Aptos" pitchFamily="34" charset="0"/>
-                <a:ea typeface="Aptos" pitchFamily="34" charset="-122"/>
-                <a:cs typeface="Aptos" pitchFamily="34" charset="-120"/>
-              </a:rPr>
-              <a:t>2.</a:t>
             </a:r>
             <a:endParaRPr lang="en-US" sz="1140" dirty="0"/>
           </a:p>
